--- a/public/Stillform_Strategic_Overview.pptx
+++ b/public/Stillform_Strategic_Overview.pptx
@@ -15,6 +15,11 @@
     <p:sldId id="263" r:id="rId14"/>
     <p:sldId id="264" r:id="rId15"/>
     <p:sldId id="265" r:id="rId16"/>
+    <p:sldId id="266" r:id="rId17"/>
+    <p:sldId id="267" r:id="rId18"/>
+    <p:sldId id="268" r:id="rId19"/>
+    <p:sldId id="269" r:id="rId20"/>
+    <p:sldId id="270" r:id="rId21"/>
   </p:sldIdLst>
   <p:sldSz cx="12191695" cy="6858000" type="screen4x3"/>
   <p:notesSz cx="6858000" cy="9144000"/>
@@ -3107,54 +3112,20 @@
       <p:grpSpPr/>
       <p:sp>
         <p:nvSpPr>
-          <p:cNvPr id="2" name="TextBox 1"/>
-          <p:cNvSpPr txBox="1"/>
-          <p:nvPr/>
-        </p:nvSpPr>
-        <p:spPr>
-          <a:xfrm>
-            <a:off x="640080" y="320040"/>
-            <a:ext cx="5669280" cy="320040"/>
-          </a:xfrm>
-          <a:prstGeom prst="rect">
-            <a:avLst/>
-          </a:prstGeom>
-          <a:noFill/>
-        </p:spPr>
-        <p:txBody>
-          <a:bodyPr wrap="none">
-            <a:spAutoFit/>
-          </a:bodyPr>
-          <a:lstStyle/>
-          <a:p>
-            <a:r>
-              <a:rPr sz="1100">
-                <a:solidFill>
-                  <a:srgbClr val="C9933A"/>
-                </a:solidFill>
-                <a:latin typeface="IBM Plex Mono"/>
-              </a:rPr>
-              <a:t>STILLFORM · STRATEGIC DECK</a:t>
-            </a:r>
-          </a:p>
-        </p:txBody>
-      </p:sp>
-      <p:sp>
-        <p:nvSpPr>
-          <p:cNvPr id="3" name="Rectangle 2"/>
+          <p:cNvPr id="2" name="Rectangle 1"/>
           <p:cNvSpPr/>
           <p:nvPr/>
         </p:nvSpPr>
         <p:spPr>
           <a:xfrm>
-            <a:off x="640080" y="640080"/>
-            <a:ext cx="10972800" cy="9144"/>
+            <a:off x="0" y="0"/>
+            <a:ext cx="12191695" cy="320040"/>
           </a:xfrm>
           <a:prstGeom prst="rect">
             <a:avLst/>
           </a:prstGeom>
           <a:solidFill>
-            <a:srgbClr val="32343A"/>
+            <a:srgbClr val="17191D"/>
           </a:solidFill>
           <a:ln>
             <a:noFill/>
@@ -3184,14 +3155,14 @@
       </p:sp>
       <p:sp>
         <p:nvSpPr>
-          <p:cNvPr id="4" name="TextBox 3"/>
+          <p:cNvPr id="3" name="TextBox 2"/>
           <p:cNvSpPr txBox="1"/>
           <p:nvPr/>
         </p:nvSpPr>
         <p:spPr>
           <a:xfrm>
-            <a:off x="640080" y="868680"/>
-            <a:ext cx="10789920" cy="1097280"/>
+            <a:off x="502920" y="109728"/>
+            <a:ext cx="5029200" cy="182880"/>
           </a:xfrm>
           <a:prstGeom prst="rect">
             <a:avLst/>
@@ -3205,7 +3176,76 @@
           <a:lstStyle/>
           <a:p>
             <a:r>
-              <a:rPr sz="3800">
+              <a:rPr sz="900">
+                <a:solidFill>
+                  <a:srgbClr val="C9933A"/>
+                </a:solidFill>
+                <a:latin typeface="IBM Plex Mono"/>
+              </a:rPr>
+              <a:t>STILLFORM · STRATEGIC DECK</a:t>
+            </a:r>
+          </a:p>
+        </p:txBody>
+      </p:sp>
+      <p:sp>
+        <p:nvSpPr>
+          <p:cNvPr id="4" name="TextBox 3"/>
+          <p:cNvSpPr txBox="1"/>
+          <p:nvPr/>
+        </p:nvSpPr>
+        <p:spPr>
+          <a:xfrm>
+            <a:off x="10332720" y="109728"/>
+            <a:ext cx="1371600" cy="182880"/>
+          </a:xfrm>
+          <a:prstGeom prst="rect">
+            <a:avLst/>
+          </a:prstGeom>
+          <a:noFill/>
+        </p:spPr>
+        <p:txBody>
+          <a:bodyPr wrap="none">
+            <a:spAutoFit/>
+          </a:bodyPr>
+          <a:lstStyle/>
+          <a:p>
+            <a:pPr algn="r"/>
+            <a:r>
+              <a:rPr sz="900">
+                <a:solidFill>
+                  <a:srgbClr val="A5A8B0"/>
+                </a:solidFill>
+                <a:latin typeface="IBM Plex Mono"/>
+              </a:rPr>
+              <a:t>01 / 15</a:t>
+            </a:r>
+          </a:p>
+        </p:txBody>
+      </p:sp>
+      <p:sp>
+        <p:nvSpPr>
+          <p:cNvPr id="5" name="TextBox 4"/>
+          <p:cNvSpPr txBox="1"/>
+          <p:nvPr/>
+        </p:nvSpPr>
+        <p:spPr>
+          <a:xfrm>
+            <a:off x="640080" y="640080"/>
+            <a:ext cx="10972800" cy="1097280"/>
+          </a:xfrm>
+          <a:prstGeom prst="rect">
+            <a:avLst/>
+          </a:prstGeom>
+          <a:noFill/>
+        </p:spPr>
+        <p:txBody>
+          <a:bodyPr wrap="none">
+            <a:spAutoFit/>
+          </a:bodyPr>
+          <a:lstStyle/>
+          <a:p>
+            <a:r>
+              <a:rPr sz="4000">
                 <a:solidFill>
                   <a:srgbClr val="C9933A"/>
                 </a:solidFill>
@@ -3218,14 +3258,14 @@
       </p:sp>
       <p:sp>
         <p:nvSpPr>
-          <p:cNvPr id="5" name="TextBox 4"/>
+          <p:cNvPr id="6" name="TextBox 5"/>
           <p:cNvSpPr txBox="1"/>
           <p:nvPr/>
         </p:nvSpPr>
         <p:spPr>
           <a:xfrm>
-            <a:off x="658368" y="1737360"/>
-            <a:ext cx="10332720" cy="502920"/>
+            <a:off x="667512" y="1508760"/>
+            <a:ext cx="10789920" cy="411480"/>
           </a:xfrm>
           <a:prstGeom prst="rect">
             <a:avLst/>
@@ -3241,7 +3281,7 @@
             <a:r>
               <a:rPr sz="1600">
                 <a:solidFill>
-                  <a:srgbClr val="A0A2A8"/>
+                  <a:srgbClr val="A5A8B0"/>
                 </a:solidFill>
                 <a:latin typeface="DM Sans"/>
               </a:rPr>
@@ -3252,14 +3292,14 @@
       </p:sp>
       <p:sp>
         <p:nvSpPr>
-          <p:cNvPr id="6" name="TextBox 5"/>
+          <p:cNvPr id="7" name="TextBox 6"/>
           <p:cNvSpPr txBox="1"/>
           <p:nvPr/>
         </p:nvSpPr>
         <p:spPr>
           <a:xfrm>
-            <a:off x="731520" y="2468880"/>
-            <a:ext cx="10789920" cy="3383280"/>
+            <a:off x="731520" y="2240280"/>
+            <a:ext cx="10789920" cy="3108960"/>
           </a:xfrm>
           <a:prstGeom prst="rect">
             <a:avLst/>
@@ -3276,7 +3316,7 @@
               <a:spcAft>
                 <a:spcPts val="1000"/>
               </a:spcAft>
-              <a:defRPr sz="1800">
+              <a:defRPr sz="1900">
                 <a:solidFill>
                   <a:srgbClr val="E9E9EA"/>
                 </a:solidFill>
@@ -3284,7 +3324,7 @@
               </a:defRPr>
             </a:pPr>
             <a:r>
-              <a:t>Category: Preventive risk management for emotional maturity and behavioral decision quality.</a:t>
+              <a:t>Mission: make composure trainable, measurable, and transferable for everyone.</a:t>
             </a:r>
           </a:p>
           <a:p>
@@ -3292,7 +3332,7 @@
               <a:spcAft>
                 <a:spcPts val="1000"/>
               </a:spcAft>
-              <a:defRPr sz="1800">
+              <a:defRPr sz="1900">
                 <a:solidFill>
                   <a:srgbClr val="E9E9EA"/>
                 </a:solidFill>
@@ -3300,7 +3340,7 @@
               </a:defRPr>
             </a:pPr>
             <a:r>
-              <a:t>Audience: Everyone who needs better regulation under load — work, family, health, relationships.</a:t>
+              <a:t>Category: neuroscience-guided preventive risk management for emotional maturity and decision quality.</a:t>
             </a:r>
           </a:p>
           <a:p>
@@ -3308,7 +3348,7 @@
               <a:spcAft>
                 <a:spcPts val="1000"/>
               </a:spcAft>
-              <a:defRPr sz="1800">
+              <a:defRPr sz="1900">
                 <a:solidFill>
                   <a:srgbClr val="E9E9EA"/>
                 </a:solidFill>
@@ -3316,7 +3356,7 @@
               </a:defRPr>
             </a:pPr>
             <a:r>
-              <a:t>Standard: Every claim must map to mechanism, evidence, and measurable product signal.</a:t>
+              <a:t>Standard: every claim maps to mechanism, evidence, and measurable product signal.</a:t>
             </a:r>
           </a:p>
         </p:txBody>
@@ -3349,54 +3389,20 @@
       <p:grpSpPr/>
       <p:sp>
         <p:nvSpPr>
-          <p:cNvPr id="2" name="TextBox 1"/>
-          <p:cNvSpPr txBox="1"/>
-          <p:nvPr/>
-        </p:nvSpPr>
-        <p:spPr>
-          <a:xfrm>
-            <a:off x="640080" y="320040"/>
-            <a:ext cx="5669280" cy="320040"/>
-          </a:xfrm>
-          <a:prstGeom prst="rect">
-            <a:avLst/>
-          </a:prstGeom>
-          <a:noFill/>
-        </p:spPr>
-        <p:txBody>
-          <a:bodyPr wrap="none">
-            <a:spAutoFit/>
-          </a:bodyPr>
-          <a:lstStyle/>
-          <a:p>
-            <a:r>
-              <a:rPr sz="1100">
-                <a:solidFill>
-                  <a:srgbClr val="C9933A"/>
-                </a:solidFill>
-                <a:latin typeface="IBM Plex Mono"/>
-              </a:rPr>
-              <a:t>STILLFORM · STRATEGIC DECK</a:t>
-            </a:r>
-          </a:p>
-        </p:txBody>
-      </p:sp>
-      <p:sp>
-        <p:nvSpPr>
-          <p:cNvPr id="3" name="Rectangle 2"/>
+          <p:cNvPr id="2" name="Rectangle 1"/>
           <p:cNvSpPr/>
           <p:nvPr/>
         </p:nvSpPr>
         <p:spPr>
           <a:xfrm>
-            <a:off x="640080" y="640080"/>
-            <a:ext cx="10972800" cy="9144"/>
+            <a:off x="0" y="0"/>
+            <a:ext cx="12191695" cy="320040"/>
           </a:xfrm>
           <a:prstGeom prst="rect">
             <a:avLst/>
           </a:prstGeom>
           <a:solidFill>
-            <a:srgbClr val="32343A"/>
+            <a:srgbClr val="17191D"/>
           </a:solidFill>
           <a:ln>
             <a:noFill/>
@@ -3426,14 +3432,14 @@
       </p:sp>
       <p:sp>
         <p:nvSpPr>
-          <p:cNvPr id="4" name="TextBox 3"/>
+          <p:cNvPr id="3" name="TextBox 2"/>
           <p:cNvSpPr txBox="1"/>
           <p:nvPr/>
         </p:nvSpPr>
         <p:spPr>
           <a:xfrm>
-            <a:off x="640080" y="868680"/>
-            <a:ext cx="10789920" cy="1097280"/>
+            <a:off x="502920" y="109728"/>
+            <a:ext cx="5029200" cy="182880"/>
           </a:xfrm>
           <a:prstGeom prst="rect">
             <a:avLst/>
@@ -3447,7 +3453,2585 @@
           <a:lstStyle/>
           <a:p>
             <a:r>
-              <a:rPr sz="3800">
+              <a:rPr sz="900">
+                <a:solidFill>
+                  <a:srgbClr val="C9933A"/>
+                </a:solidFill>
+                <a:latin typeface="IBM Plex Mono"/>
+              </a:rPr>
+              <a:t>STILLFORM · STRATEGIC DECK</a:t>
+            </a:r>
+          </a:p>
+        </p:txBody>
+      </p:sp>
+      <p:sp>
+        <p:nvSpPr>
+          <p:cNvPr id="4" name="TextBox 3"/>
+          <p:cNvSpPr txBox="1"/>
+          <p:nvPr/>
+        </p:nvSpPr>
+        <p:spPr>
+          <a:xfrm>
+            <a:off x="10332720" y="109728"/>
+            <a:ext cx="1371600" cy="182880"/>
+          </a:xfrm>
+          <a:prstGeom prst="rect">
+            <a:avLst/>
+          </a:prstGeom>
+          <a:noFill/>
+        </p:spPr>
+        <p:txBody>
+          <a:bodyPr wrap="none">
+            <a:spAutoFit/>
+          </a:bodyPr>
+          <a:lstStyle/>
+          <a:p>
+            <a:pPr algn="r"/>
+            <a:r>
+              <a:rPr sz="900">
+                <a:solidFill>
+                  <a:srgbClr val="A5A8B0"/>
+                </a:solidFill>
+                <a:latin typeface="IBM Plex Mono"/>
+              </a:rPr>
+              <a:t>10 / 15</a:t>
+            </a:r>
+          </a:p>
+        </p:txBody>
+      </p:sp>
+      <p:sp>
+        <p:nvSpPr>
+          <p:cNvPr id="5" name="TextBox 4"/>
+          <p:cNvSpPr txBox="1"/>
+          <p:nvPr/>
+        </p:nvSpPr>
+        <p:spPr>
+          <a:xfrm>
+            <a:off x="640080" y="640080"/>
+            <a:ext cx="10972800" cy="1097280"/>
+          </a:xfrm>
+          <a:prstGeom prst="rect">
+            <a:avLst/>
+          </a:prstGeom>
+          <a:noFill/>
+        </p:spPr>
+        <p:txBody>
+          <a:bodyPr wrap="none">
+            <a:spAutoFit/>
+          </a:bodyPr>
+          <a:lstStyle/>
+          <a:p>
+            <a:r>
+              <a:rPr sz="4000">
+                <a:solidFill>
+                  <a:srgbClr val="C9933A"/>
+                </a:solidFill>
+                <a:latin typeface="Cormorant Garamond"/>
+              </a:rPr>
+              <a:t>Business + Distribution</a:t>
+            </a:r>
+          </a:p>
+        </p:txBody>
+      </p:sp>
+      <p:sp>
+        <p:nvSpPr>
+          <p:cNvPr id="6" name="TextBox 5"/>
+          <p:cNvSpPr txBox="1"/>
+          <p:nvPr/>
+        </p:nvSpPr>
+        <p:spPr>
+          <a:xfrm>
+            <a:off x="667512" y="1508760"/>
+            <a:ext cx="10789920" cy="411480"/>
+          </a:xfrm>
+          <a:prstGeom prst="rect">
+            <a:avLst/>
+          </a:prstGeom>
+          <a:noFill/>
+        </p:spPr>
+        <p:txBody>
+          <a:bodyPr wrap="none">
+            <a:spAutoFit/>
+          </a:bodyPr>
+          <a:lstStyle/>
+          <a:p>
+            <a:r>
+              <a:rPr sz="1600">
+                <a:solidFill>
+                  <a:srgbClr val="A5A8B0"/>
+                </a:solidFill>
+                <a:latin typeface="DM Sans"/>
+              </a:rPr>
+              <a:t>SECTION BREAK</a:t>
+            </a:r>
+          </a:p>
+        </p:txBody>
+      </p:sp>
+      <p:sp>
+        <p:nvSpPr>
+          <p:cNvPr id="7" name="Rounded Rectangle 6"/>
+          <p:cNvSpPr/>
+          <p:nvPr/>
+        </p:nvSpPr>
+        <p:spPr>
+          <a:xfrm>
+            <a:off x="868680" y="2103120"/>
+            <a:ext cx="10378440" cy="3154680"/>
+          </a:xfrm>
+          <a:prstGeom prst="roundRect">
+            <a:avLst/>
+          </a:prstGeom>
+          <a:solidFill>
+            <a:srgbClr val="17191D"/>
+          </a:solidFill>
+          <a:ln w="15240">
+            <a:solidFill>
+              <a:srgbClr val="353840"/>
+            </a:solidFill>
+          </a:ln>
+        </p:spPr>
+        <p:style>
+          <a:lnRef idx="1">
+            <a:schemeClr val="accent1"/>
+          </a:lnRef>
+          <a:fillRef idx="3">
+            <a:schemeClr val="accent1"/>
+          </a:fillRef>
+          <a:effectRef idx="2">
+            <a:schemeClr val="accent1"/>
+          </a:effectRef>
+          <a:fontRef idx="minor">
+            <a:schemeClr val="lt1"/>
+          </a:fontRef>
+        </p:style>
+        <p:txBody>
+          <a:bodyPr rtlCol="0" anchor="ctr"/>
+          <a:lstStyle/>
+          <a:p>
+            <a:pPr algn="ctr"/>
+          </a:p>
+        </p:txBody>
+      </p:sp>
+      <p:sp>
+        <p:nvSpPr>
+          <p:cNvPr id="8" name="Rectangle 7"/>
+          <p:cNvSpPr/>
+          <p:nvPr/>
+        </p:nvSpPr>
+        <p:spPr>
+          <a:xfrm>
+            <a:off x="868680" y="2103120"/>
+            <a:ext cx="146304" cy="3154680"/>
+          </a:xfrm>
+          <a:prstGeom prst="rect">
+            <a:avLst/>
+          </a:prstGeom>
+          <a:solidFill>
+            <a:srgbClr val="C9933A"/>
+          </a:solidFill>
+          <a:ln>
+            <a:noFill/>
+          </a:ln>
+        </p:spPr>
+        <p:style>
+          <a:lnRef idx="1">
+            <a:schemeClr val="accent1"/>
+          </a:lnRef>
+          <a:fillRef idx="3">
+            <a:schemeClr val="accent1"/>
+          </a:fillRef>
+          <a:effectRef idx="2">
+            <a:schemeClr val="accent1"/>
+          </a:effectRef>
+          <a:fontRef idx="minor">
+            <a:schemeClr val="lt1"/>
+          </a:fontRef>
+        </p:style>
+        <p:txBody>
+          <a:bodyPr rtlCol="0" anchor="ctr"/>
+          <a:lstStyle/>
+          <a:p>
+            <a:pPr algn="ctr"/>
+          </a:p>
+        </p:txBody>
+      </p:sp>
+      <p:sp>
+        <p:nvSpPr>
+          <p:cNvPr id="9" name="TextBox 8"/>
+          <p:cNvSpPr txBox="1"/>
+          <p:nvPr/>
+        </p:nvSpPr>
+        <p:spPr>
+          <a:xfrm>
+            <a:off x="1234440" y="2743200"/>
+            <a:ext cx="9326880" cy="1828800"/>
+          </a:xfrm>
+          <a:prstGeom prst="rect">
+            <a:avLst/>
+          </a:prstGeom>
+          <a:noFill/>
+        </p:spPr>
+        <p:txBody>
+          <a:bodyPr wrap="none">
+            <a:spAutoFit/>
+          </a:bodyPr>
+          <a:lstStyle/>
+          <a:p>
+            <a:pPr algn="l"/>
+            <a:r>
+              <a:rPr sz="2600">
+                <a:solidFill>
+                  <a:srgbClr val="E9E9EA"/>
+                </a:solidFill>
+                <a:latin typeface="DM Sans"/>
+              </a:rPr>
+              <a:t>Operator-grade economics and channel logic.</a:t>
+            </a:r>
+          </a:p>
+        </p:txBody>
+      </p:sp>
+    </p:spTree>
+  </p:cSld>
+  <p:clrMapOvr>
+    <a:masterClrMapping/>
+  </p:clrMapOvr>
+</p:sld>
+</file>
+
+<file path=ppt/slides/slide11.xml><?xml version="1.0" encoding="utf-8"?>
+<p:sld xmlns:a="http://schemas.openxmlformats.org/drawingml/2006/main" xmlns:p="http://schemas.openxmlformats.org/presentationml/2006/main" xmlns:r="http://schemas.openxmlformats.org/officeDocument/2006/relationships">
+  <p:cSld>
+    <p:bg>
+      <p:bgPr>
+        <a:solidFill>
+          <a:srgbClr val="0E0F11"/>
+        </a:solidFill>
+        <a:effectLst/>
+      </p:bgPr>
+    </p:bg>
+    <p:spTree>
+      <p:nvGrpSpPr>
+        <p:cNvPr id="1" name=""/>
+        <p:cNvGrpSpPr/>
+        <p:nvPr/>
+      </p:nvGrpSpPr>
+      <p:grpSpPr/>
+      <p:sp>
+        <p:nvSpPr>
+          <p:cNvPr id="2" name="Rectangle 1"/>
+          <p:cNvSpPr/>
+          <p:nvPr/>
+        </p:nvSpPr>
+        <p:spPr>
+          <a:xfrm>
+            <a:off x="0" y="0"/>
+            <a:ext cx="12191695" cy="320040"/>
+          </a:xfrm>
+          <a:prstGeom prst="rect">
+            <a:avLst/>
+          </a:prstGeom>
+          <a:solidFill>
+            <a:srgbClr val="17191D"/>
+          </a:solidFill>
+          <a:ln>
+            <a:noFill/>
+          </a:ln>
+        </p:spPr>
+        <p:style>
+          <a:lnRef idx="1">
+            <a:schemeClr val="accent1"/>
+          </a:lnRef>
+          <a:fillRef idx="3">
+            <a:schemeClr val="accent1"/>
+          </a:fillRef>
+          <a:effectRef idx="2">
+            <a:schemeClr val="accent1"/>
+          </a:effectRef>
+          <a:fontRef idx="minor">
+            <a:schemeClr val="lt1"/>
+          </a:fontRef>
+        </p:style>
+        <p:txBody>
+          <a:bodyPr rtlCol="0" anchor="ctr"/>
+          <a:lstStyle/>
+          <a:p>
+            <a:pPr algn="ctr"/>
+          </a:p>
+        </p:txBody>
+      </p:sp>
+      <p:sp>
+        <p:nvSpPr>
+          <p:cNvPr id="3" name="TextBox 2"/>
+          <p:cNvSpPr txBox="1"/>
+          <p:nvPr/>
+        </p:nvSpPr>
+        <p:spPr>
+          <a:xfrm>
+            <a:off x="502920" y="109728"/>
+            <a:ext cx="5029200" cy="182880"/>
+          </a:xfrm>
+          <a:prstGeom prst="rect">
+            <a:avLst/>
+          </a:prstGeom>
+          <a:noFill/>
+        </p:spPr>
+        <p:txBody>
+          <a:bodyPr wrap="none">
+            <a:spAutoFit/>
+          </a:bodyPr>
+          <a:lstStyle/>
+          <a:p>
+            <a:r>
+              <a:rPr sz="900">
+                <a:solidFill>
+                  <a:srgbClr val="C9933A"/>
+                </a:solidFill>
+                <a:latin typeface="IBM Plex Mono"/>
+              </a:rPr>
+              <a:t>STILLFORM · STRATEGIC DECK</a:t>
+            </a:r>
+          </a:p>
+        </p:txBody>
+      </p:sp>
+      <p:sp>
+        <p:nvSpPr>
+          <p:cNvPr id="4" name="TextBox 3"/>
+          <p:cNvSpPr txBox="1"/>
+          <p:nvPr/>
+        </p:nvSpPr>
+        <p:spPr>
+          <a:xfrm>
+            <a:off x="10332720" y="109728"/>
+            <a:ext cx="1371600" cy="182880"/>
+          </a:xfrm>
+          <a:prstGeom prst="rect">
+            <a:avLst/>
+          </a:prstGeom>
+          <a:noFill/>
+        </p:spPr>
+        <p:txBody>
+          <a:bodyPr wrap="none">
+            <a:spAutoFit/>
+          </a:bodyPr>
+          <a:lstStyle/>
+          <a:p>
+            <a:pPr algn="r"/>
+            <a:r>
+              <a:rPr sz="900">
+                <a:solidFill>
+                  <a:srgbClr val="A5A8B0"/>
+                </a:solidFill>
+                <a:latin typeface="IBM Plex Mono"/>
+              </a:rPr>
+              <a:t>11 / 15</a:t>
+            </a:r>
+          </a:p>
+        </p:txBody>
+      </p:sp>
+      <p:sp>
+        <p:nvSpPr>
+          <p:cNvPr id="5" name="TextBox 4"/>
+          <p:cNvSpPr txBox="1"/>
+          <p:nvPr/>
+        </p:nvSpPr>
+        <p:spPr>
+          <a:xfrm>
+            <a:off x="640080" y="640080"/>
+            <a:ext cx="10972800" cy="1097280"/>
+          </a:xfrm>
+          <a:prstGeom prst="rect">
+            <a:avLst/>
+          </a:prstGeom>
+          <a:noFill/>
+        </p:spPr>
+        <p:txBody>
+          <a:bodyPr wrap="none">
+            <a:spAutoFit/>
+          </a:bodyPr>
+          <a:lstStyle/>
+          <a:p>
+            <a:r>
+              <a:rPr sz="4000">
+                <a:solidFill>
+                  <a:srgbClr val="C9933A"/>
+                </a:solidFill>
+                <a:latin typeface="Cormorant Garamond"/>
+              </a:rPr>
+              <a:t>Business model</a:t>
+            </a:r>
+          </a:p>
+        </p:txBody>
+      </p:sp>
+      <p:sp>
+        <p:nvSpPr>
+          <p:cNvPr id="6" name="TextBox 5"/>
+          <p:cNvSpPr txBox="1"/>
+          <p:nvPr/>
+        </p:nvSpPr>
+        <p:spPr>
+          <a:xfrm>
+            <a:off x="667512" y="1508760"/>
+            <a:ext cx="10789920" cy="411480"/>
+          </a:xfrm>
+          <a:prstGeom prst="rect">
+            <a:avLst/>
+          </a:prstGeom>
+          <a:noFill/>
+        </p:spPr>
+        <p:txBody>
+          <a:bodyPr wrap="none">
+            <a:spAutoFit/>
+          </a:bodyPr>
+          <a:lstStyle/>
+          <a:p>
+            <a:r>
+              <a:rPr sz="1600">
+                <a:solidFill>
+                  <a:srgbClr val="A5A8B0"/>
+                </a:solidFill>
+                <a:latin typeface="DM Sans"/>
+              </a:rPr>
+              <a:t>Simple model, trust-aligned economics</a:t>
+            </a:r>
+          </a:p>
+        </p:txBody>
+      </p:sp>
+      <p:graphicFrame>
+        <p:nvGraphicFramePr>
+          <p:cNvPr id="7" name="Table 6"/>
+          <p:cNvGraphicFramePr>
+            <a:graphicFrameLocks noGrp="1"/>
+          </p:cNvGraphicFramePr>
+          <p:nvPr/>
+        </p:nvGraphicFramePr>
+        <p:xfrm>
+          <a:off x="640080" y="1828800"/>
+          <a:ext cx="10972800" cy="4480560"/>
+        </p:xfrm>
+        <a:graphic>
+          <a:graphicData uri="http://schemas.openxmlformats.org/drawingml/2006/table">
+            <a:tbl>
+              <a:tblPr firstRow="1" bandRow="1">
+                <a:tableStyleId>{5C22544A-7EE6-4342-B048-85BDC9FD1C3A}</a:tableStyleId>
+              </a:tblPr>
+              <a:tblGrid>
+                <a:gridCol w="1965960"/>
+                <a:gridCol w="3840480"/>
+                <a:gridCol w="5166360"/>
+              </a:tblGrid>
+              <a:tr h="896112">
+                <a:tc>
+                  <a:txBody>
+                    <a:bodyPr/>
+                    <a:lstStyle/>
+                    <a:p>
+                      <a:r>
+                        <a:rPr sz="1200">
+                          <a:solidFill>
+                            <a:srgbClr val="C9933A"/>
+                          </a:solidFill>
+                          <a:latin typeface="DM Sans"/>
+                        </a:rPr>
+                        <a:t>Component</a:t>
+                      </a:r>
+                    </a:p>
+                  </a:txBody>
+                  <a:tcPr marL="64008" marR="64008" marT="36576" marB="36576">
+                    <a:solidFill>
+                      <a:srgbClr val="17191D"/>
+                    </a:solidFill>
+                  </a:tcPr>
+                </a:tc>
+                <a:tc>
+                  <a:txBody>
+                    <a:bodyPr/>
+                    <a:lstStyle/>
+                    <a:p>
+                      <a:r>
+                        <a:rPr sz="1200">
+                          <a:solidFill>
+                            <a:srgbClr val="C9933A"/>
+                          </a:solidFill>
+                          <a:latin typeface="DM Sans"/>
+                        </a:rPr>
+                        <a:t>Current position</a:t>
+                      </a:r>
+                    </a:p>
+                  </a:txBody>
+                  <a:tcPr marL="64008" marR="64008" marT="36576" marB="36576">
+                    <a:solidFill>
+                      <a:srgbClr val="17191D"/>
+                    </a:solidFill>
+                  </a:tcPr>
+                </a:tc>
+                <a:tc>
+                  <a:txBody>
+                    <a:bodyPr/>
+                    <a:lstStyle/>
+                    <a:p>
+                      <a:r>
+                        <a:rPr sz="1200">
+                          <a:solidFill>
+                            <a:srgbClr val="C9933A"/>
+                          </a:solidFill>
+                          <a:latin typeface="DM Sans"/>
+                        </a:rPr>
+                        <a:t>Defensibility logic</a:t>
+                      </a:r>
+                    </a:p>
+                  </a:txBody>
+                  <a:tcPr marL="64008" marR="64008" marT="36576" marB="36576">
+                    <a:solidFill>
+                      <a:srgbClr val="17191D"/>
+                    </a:solidFill>
+                  </a:tcPr>
+                </a:tc>
+              </a:tr>
+              <a:tr h="896112">
+                <a:tc>
+                  <a:txBody>
+                    <a:bodyPr/>
+                    <a:lstStyle/>
+                    <a:p>
+                      <a:r>
+                        <a:rPr sz="1100">
+                          <a:solidFill>
+                            <a:srgbClr val="C4C6CC"/>
+                          </a:solidFill>
+                          <a:latin typeface="DM Sans"/>
+                        </a:rPr>
+                        <a:t>Revenue model</a:t>
+                      </a:r>
+                    </a:p>
+                  </a:txBody>
+                  <a:tcPr marL="64008" marR="64008" marT="36576" marB="36576">
+                    <a:solidFill>
+                      <a:srgbClr val="0E0F11"/>
+                    </a:solidFill>
+                  </a:tcPr>
+                </a:tc>
+                <a:tc>
+                  <a:txBody>
+                    <a:bodyPr/>
+                    <a:lstStyle/>
+                    <a:p>
+                      <a:r>
+                        <a:rPr sz="1100">
+                          <a:solidFill>
+                            <a:srgbClr val="C4C6CC"/>
+                          </a:solidFill>
+                          <a:latin typeface="DM Sans"/>
+                        </a:rPr>
+                        <a:t>Single tier ($14.99 / $9.99 annualized)</a:t>
+                      </a:r>
+                    </a:p>
+                  </a:txBody>
+                  <a:tcPr marL="64008" marR="64008" marT="36576" marB="36576">
+                    <a:solidFill>
+                      <a:srgbClr val="0E0F11"/>
+                    </a:solidFill>
+                  </a:tcPr>
+                </a:tc>
+                <a:tc>
+                  <a:txBody>
+                    <a:bodyPr/>
+                    <a:lstStyle/>
+                    <a:p>
+                      <a:r>
+                        <a:rPr sz="1100">
+                          <a:solidFill>
+                            <a:srgbClr val="C4C6CC"/>
+                          </a:solidFill>
+                          <a:latin typeface="DM Sans"/>
+                        </a:rPr>
+                        <a:t>Low friction + no upsell trust tax</a:t>
+                      </a:r>
+                    </a:p>
+                  </a:txBody>
+                  <a:tcPr marL="64008" marR="64008" marT="36576" marB="36576">
+                    <a:solidFill>
+                      <a:srgbClr val="0E0F11"/>
+                    </a:solidFill>
+                  </a:tcPr>
+                </a:tc>
+              </a:tr>
+              <a:tr h="896112">
+                <a:tc>
+                  <a:txBody>
+                    <a:bodyPr/>
+                    <a:lstStyle/>
+                    <a:p>
+                      <a:r>
+                        <a:rPr sz="1100">
+                          <a:solidFill>
+                            <a:srgbClr val="C4C6CC"/>
+                          </a:solidFill>
+                          <a:latin typeface="DM Sans"/>
+                        </a:rPr>
+                        <a:t>Category</a:t>
+                      </a:r>
+                    </a:p>
+                  </a:txBody>
+                  <a:tcPr marL="64008" marR="64008" marT="36576" marB="36576">
+                    <a:solidFill>
+                      <a:srgbClr val="1F2228"/>
+                    </a:solidFill>
+                  </a:tcPr>
+                </a:tc>
+                <a:tc>
+                  <a:txBody>
+                    <a:bodyPr/>
+                    <a:lstStyle/>
+                    <a:p>
+                      <a:r>
+                        <a:rPr sz="1100">
+                          <a:solidFill>
+                            <a:srgbClr val="C4C6CC"/>
+                          </a:solidFill>
+                          <a:latin typeface="DM Sans"/>
+                        </a:rPr>
+                        <a:t>Preventive risk management for behavior</a:t>
+                      </a:r>
+                    </a:p>
+                  </a:txBody>
+                  <a:tcPr marL="64008" marR="64008" marT="36576" marB="36576">
+                    <a:solidFill>
+                      <a:srgbClr val="1F2228"/>
+                    </a:solidFill>
+                  </a:tcPr>
+                </a:tc>
+                <a:tc>
+                  <a:txBody>
+                    <a:bodyPr/>
+                    <a:lstStyle/>
+                    <a:p>
+                      <a:r>
+                        <a:rPr sz="1100">
+                          <a:solidFill>
+                            <a:srgbClr val="C4C6CC"/>
+                          </a:solidFill>
+                          <a:latin typeface="DM Sans"/>
+                        </a:rPr>
+                        <a:t>Distinct from passive wellness consumption</a:t>
+                      </a:r>
+                    </a:p>
+                  </a:txBody>
+                  <a:tcPr marL="64008" marR="64008" marT="36576" marB="36576">
+                    <a:solidFill>
+                      <a:srgbClr val="1F2228"/>
+                    </a:solidFill>
+                  </a:tcPr>
+                </a:tc>
+              </a:tr>
+              <a:tr h="896112">
+                <a:tc>
+                  <a:txBody>
+                    <a:bodyPr/>
+                    <a:lstStyle/>
+                    <a:p>
+                      <a:r>
+                        <a:rPr sz="1100">
+                          <a:solidFill>
+                            <a:srgbClr val="C4C6CC"/>
+                          </a:solidFill>
+                          <a:latin typeface="DM Sans"/>
+                        </a:rPr>
+                        <a:t>Distribution</a:t>
+                      </a:r>
+                    </a:p>
+                  </a:txBody>
+                  <a:tcPr marL="64008" marR="64008" marT="36576" marB="36576">
+                    <a:solidFill>
+                      <a:srgbClr val="0E0F11"/>
+                    </a:solidFill>
+                  </a:tcPr>
+                </a:tc>
+                <a:tc>
+                  <a:txBody>
+                    <a:bodyPr/>
+                    <a:lstStyle/>
+                    <a:p>
+                      <a:r>
+                        <a:rPr sz="1100">
+                          <a:solidFill>
+                            <a:srgbClr val="C4C6CC"/>
+                          </a:solidFill>
+                          <a:latin typeface="DM Sans"/>
+                        </a:rPr>
+                        <a:t>Coaches, therapist-adjacent, trusted communities</a:t>
+                      </a:r>
+                    </a:p>
+                  </a:txBody>
+                  <a:tcPr marL="64008" marR="64008" marT="36576" marB="36576">
+                    <a:solidFill>
+                      <a:srgbClr val="0E0F11"/>
+                    </a:solidFill>
+                  </a:tcPr>
+                </a:tc>
+                <a:tc>
+                  <a:txBody>
+                    <a:bodyPr/>
+                    <a:lstStyle/>
+                    <a:p>
+                      <a:r>
+                        <a:rPr sz="1100">
+                          <a:solidFill>
+                            <a:srgbClr val="C4C6CC"/>
+                          </a:solidFill>
+                          <a:latin typeface="DM Sans"/>
+                        </a:rPr>
+                        <a:t>Trust transfer beats cold paid acquisition</a:t>
+                      </a:r>
+                    </a:p>
+                  </a:txBody>
+                  <a:tcPr marL="64008" marR="64008" marT="36576" marB="36576">
+                    <a:solidFill>
+                      <a:srgbClr val="0E0F11"/>
+                    </a:solidFill>
+                  </a:tcPr>
+                </a:tc>
+              </a:tr>
+              <a:tr h="896112">
+                <a:tc>
+                  <a:txBody>
+                    <a:bodyPr/>
+                    <a:lstStyle/>
+                    <a:p>
+                      <a:r>
+                        <a:rPr sz="1100">
+                          <a:solidFill>
+                            <a:srgbClr val="C4C6CC"/>
+                          </a:solidFill>
+                          <a:latin typeface="DM Sans"/>
+                        </a:rPr>
+                        <a:t>Retention thesis</a:t>
+                      </a:r>
+                    </a:p>
+                  </a:txBody>
+                  <a:tcPr marL="64008" marR="64008" marT="36576" marB="36576">
+                    <a:solidFill>
+                      <a:srgbClr val="1F2228"/>
+                    </a:solidFill>
+                  </a:tcPr>
+                </a:tc>
+                <a:tc>
+                  <a:txBody>
+                    <a:bodyPr/>
+                    <a:lstStyle/>
+                    <a:p>
+                      <a:r>
+                        <a:rPr sz="1100">
+                          <a:solidFill>
+                            <a:srgbClr val="C4C6CC"/>
+                          </a:solidFill>
+                          <a:latin typeface="DM Sans"/>
+                        </a:rPr>
+                        <a:t>Daily loop utility + proof of change + continuity</a:t>
+                      </a:r>
+                    </a:p>
+                  </a:txBody>
+                  <a:tcPr marL="64008" marR="64008" marT="36576" marB="36576">
+                    <a:solidFill>
+                      <a:srgbClr val="1F2228"/>
+                    </a:solidFill>
+                  </a:tcPr>
+                </a:tc>
+                <a:tc>
+                  <a:txBody>
+                    <a:bodyPr/>
+                    <a:lstStyle/>
+                    <a:p>
+                      <a:r>
+                        <a:rPr sz="1100">
+                          <a:solidFill>
+                            <a:srgbClr val="C4C6CC"/>
+                          </a:solidFill>
+                          <a:latin typeface="DM Sans"/>
+                        </a:rPr>
+                        <a:t>Habit + evidence + context memory</a:t>
+                      </a:r>
+                    </a:p>
+                  </a:txBody>
+                  <a:tcPr marL="64008" marR="64008" marT="36576" marB="36576">
+                    <a:solidFill>
+                      <a:srgbClr val="1F2228"/>
+                    </a:solidFill>
+                  </a:tcPr>
+                </a:tc>
+              </a:tr>
+            </a:tbl>
+          </a:graphicData>
+        </a:graphic>
+      </p:graphicFrame>
+    </p:spTree>
+  </p:cSld>
+  <p:clrMapOvr>
+    <a:masterClrMapping/>
+  </p:clrMapOvr>
+</p:sld>
+</file>
+
+<file path=ppt/slides/slide12.xml><?xml version="1.0" encoding="utf-8"?>
+<p:sld xmlns:a="http://schemas.openxmlformats.org/drawingml/2006/main" xmlns:p="http://schemas.openxmlformats.org/presentationml/2006/main" xmlns:r="http://schemas.openxmlformats.org/officeDocument/2006/relationships">
+  <p:cSld>
+    <p:bg>
+      <p:bgPr>
+        <a:solidFill>
+          <a:srgbClr val="0E0F11"/>
+        </a:solidFill>
+        <a:effectLst/>
+      </p:bgPr>
+    </p:bg>
+    <p:spTree>
+      <p:nvGrpSpPr>
+        <p:cNvPr id="1" name=""/>
+        <p:cNvGrpSpPr/>
+        <p:nvPr/>
+      </p:nvGrpSpPr>
+      <p:grpSpPr/>
+      <p:sp>
+        <p:nvSpPr>
+          <p:cNvPr id="2" name="Rectangle 1"/>
+          <p:cNvSpPr/>
+          <p:nvPr/>
+        </p:nvSpPr>
+        <p:spPr>
+          <a:xfrm>
+            <a:off x="0" y="0"/>
+            <a:ext cx="12191695" cy="320040"/>
+          </a:xfrm>
+          <a:prstGeom prst="rect">
+            <a:avLst/>
+          </a:prstGeom>
+          <a:solidFill>
+            <a:srgbClr val="17191D"/>
+          </a:solidFill>
+          <a:ln>
+            <a:noFill/>
+          </a:ln>
+        </p:spPr>
+        <p:style>
+          <a:lnRef idx="1">
+            <a:schemeClr val="accent1"/>
+          </a:lnRef>
+          <a:fillRef idx="3">
+            <a:schemeClr val="accent1"/>
+          </a:fillRef>
+          <a:effectRef idx="2">
+            <a:schemeClr val="accent1"/>
+          </a:effectRef>
+          <a:fontRef idx="minor">
+            <a:schemeClr val="lt1"/>
+          </a:fontRef>
+        </p:style>
+        <p:txBody>
+          <a:bodyPr rtlCol="0" anchor="ctr"/>
+          <a:lstStyle/>
+          <a:p>
+            <a:pPr algn="ctr"/>
+          </a:p>
+        </p:txBody>
+      </p:sp>
+      <p:sp>
+        <p:nvSpPr>
+          <p:cNvPr id="3" name="TextBox 2"/>
+          <p:cNvSpPr txBox="1"/>
+          <p:nvPr/>
+        </p:nvSpPr>
+        <p:spPr>
+          <a:xfrm>
+            <a:off x="502920" y="109728"/>
+            <a:ext cx="5029200" cy="182880"/>
+          </a:xfrm>
+          <a:prstGeom prst="rect">
+            <a:avLst/>
+          </a:prstGeom>
+          <a:noFill/>
+        </p:spPr>
+        <p:txBody>
+          <a:bodyPr wrap="none">
+            <a:spAutoFit/>
+          </a:bodyPr>
+          <a:lstStyle/>
+          <a:p>
+            <a:r>
+              <a:rPr sz="900">
+                <a:solidFill>
+                  <a:srgbClr val="C9933A"/>
+                </a:solidFill>
+                <a:latin typeface="IBM Plex Mono"/>
+              </a:rPr>
+              <a:t>STILLFORM · STRATEGIC DECK</a:t>
+            </a:r>
+          </a:p>
+        </p:txBody>
+      </p:sp>
+      <p:sp>
+        <p:nvSpPr>
+          <p:cNvPr id="4" name="TextBox 3"/>
+          <p:cNvSpPr txBox="1"/>
+          <p:nvPr/>
+        </p:nvSpPr>
+        <p:spPr>
+          <a:xfrm>
+            <a:off x="10332720" y="109728"/>
+            <a:ext cx="1371600" cy="182880"/>
+          </a:xfrm>
+          <a:prstGeom prst="rect">
+            <a:avLst/>
+          </a:prstGeom>
+          <a:noFill/>
+        </p:spPr>
+        <p:txBody>
+          <a:bodyPr wrap="none">
+            <a:spAutoFit/>
+          </a:bodyPr>
+          <a:lstStyle/>
+          <a:p>
+            <a:pPr algn="r"/>
+            <a:r>
+              <a:rPr sz="900">
+                <a:solidFill>
+                  <a:srgbClr val="A5A8B0"/>
+                </a:solidFill>
+                <a:latin typeface="IBM Plex Mono"/>
+              </a:rPr>
+              <a:t>12 / 15</a:t>
+            </a:r>
+          </a:p>
+        </p:txBody>
+      </p:sp>
+      <p:sp>
+        <p:nvSpPr>
+          <p:cNvPr id="5" name="TextBox 4"/>
+          <p:cNvSpPr txBox="1"/>
+          <p:nvPr/>
+        </p:nvSpPr>
+        <p:spPr>
+          <a:xfrm>
+            <a:off x="640080" y="640080"/>
+            <a:ext cx="10972800" cy="1097280"/>
+          </a:xfrm>
+          <a:prstGeom prst="rect">
+            <a:avLst/>
+          </a:prstGeom>
+          <a:noFill/>
+        </p:spPr>
+        <p:txBody>
+          <a:bodyPr wrap="none">
+            <a:spAutoFit/>
+          </a:bodyPr>
+          <a:lstStyle/>
+          <a:p>
+            <a:r>
+              <a:rPr sz="4000">
+                <a:solidFill>
+                  <a:srgbClr val="C9933A"/>
+                </a:solidFill>
+                <a:latin typeface="Cormorant Garamond"/>
+              </a:rPr>
+              <a:t>Execution phases</a:t>
+            </a:r>
+          </a:p>
+        </p:txBody>
+      </p:sp>
+      <p:sp>
+        <p:nvSpPr>
+          <p:cNvPr id="6" name="TextBox 5"/>
+          <p:cNvSpPr txBox="1"/>
+          <p:nvPr/>
+        </p:nvSpPr>
+        <p:spPr>
+          <a:xfrm>
+            <a:off x="667512" y="1508760"/>
+            <a:ext cx="10789920" cy="411480"/>
+          </a:xfrm>
+          <a:prstGeom prst="rect">
+            <a:avLst/>
+          </a:prstGeom>
+          <a:noFill/>
+        </p:spPr>
+        <p:txBody>
+          <a:bodyPr wrap="none">
+            <a:spAutoFit/>
+          </a:bodyPr>
+          <a:lstStyle/>
+          <a:p>
+            <a:r>
+              <a:rPr sz="1600">
+                <a:solidFill>
+                  <a:srgbClr val="A5A8B0"/>
+                </a:solidFill>
+                <a:latin typeface="DM Sans"/>
+              </a:rPr>
+              <a:t>Non-calendar phase logic</a:t>
+            </a:r>
+          </a:p>
+        </p:txBody>
+      </p:sp>
+      <p:sp>
+        <p:nvSpPr>
+          <p:cNvPr id="7" name="Rounded Rectangle 6"/>
+          <p:cNvSpPr/>
+          <p:nvPr/>
+        </p:nvSpPr>
+        <p:spPr>
+          <a:xfrm>
+            <a:off x="640080" y="2011680"/>
+            <a:ext cx="3611880" cy="3611880"/>
+          </a:xfrm>
+          <a:prstGeom prst="roundRect">
+            <a:avLst/>
+          </a:prstGeom>
+          <a:solidFill>
+            <a:srgbClr val="17191D"/>
+          </a:solidFill>
+          <a:ln w="12700">
+            <a:solidFill>
+              <a:srgbClr val="353840"/>
+            </a:solidFill>
+          </a:ln>
+        </p:spPr>
+        <p:style>
+          <a:lnRef idx="1">
+            <a:schemeClr val="accent1"/>
+          </a:lnRef>
+          <a:fillRef idx="3">
+            <a:schemeClr val="accent1"/>
+          </a:fillRef>
+          <a:effectRef idx="2">
+            <a:schemeClr val="accent1"/>
+          </a:effectRef>
+          <a:fontRef idx="minor">
+            <a:schemeClr val="lt1"/>
+          </a:fontRef>
+        </p:style>
+        <p:txBody>
+          <a:bodyPr rtlCol="0" anchor="ctr"/>
+          <a:lstStyle/>
+          <a:p>
+            <a:pPr algn="ctr"/>
+          </a:p>
+        </p:txBody>
+      </p:sp>
+      <p:sp>
+        <p:nvSpPr>
+          <p:cNvPr id="8" name="TextBox 7"/>
+          <p:cNvSpPr txBox="1"/>
+          <p:nvPr/>
+        </p:nvSpPr>
+        <p:spPr>
+          <a:xfrm>
+            <a:off x="868680" y="2212848"/>
+            <a:ext cx="3154680" cy="320040"/>
+          </a:xfrm>
+          <a:prstGeom prst="rect">
+            <a:avLst/>
+          </a:prstGeom>
+          <a:noFill/>
+        </p:spPr>
+        <p:txBody>
+          <a:bodyPr wrap="none">
+            <a:spAutoFit/>
+          </a:bodyPr>
+          <a:lstStyle/>
+          <a:p>
+            <a:r>
+              <a:rPr sz="1000">
+                <a:solidFill>
+                  <a:srgbClr val="C9933A"/>
+                </a:solidFill>
+                <a:latin typeface="IBM Plex Mono"/>
+              </a:rPr>
+              <a:t>PHASE 1-2</a:t>
+            </a:r>
+          </a:p>
+        </p:txBody>
+      </p:sp>
+      <p:sp>
+        <p:nvSpPr>
+          <p:cNvPr id="9" name="TextBox 8"/>
+          <p:cNvSpPr txBox="1"/>
+          <p:nvPr/>
+        </p:nvSpPr>
+        <p:spPr>
+          <a:xfrm>
+            <a:off x="868680" y="2651760"/>
+            <a:ext cx="3154680" cy="2697480"/>
+          </a:xfrm>
+          <a:prstGeom prst="rect">
+            <a:avLst/>
+          </a:prstGeom>
+          <a:noFill/>
+        </p:spPr>
+        <p:txBody>
+          <a:bodyPr wrap="none">
+            <a:spAutoFit/>
+          </a:bodyPr>
+          <a:lstStyle/>
+          <a:p/>
+        </p:txBody>
+      </p:sp>
+      <p:sp>
+        <p:nvSpPr>
+          <p:cNvPr id="10" name="TextBox 9"/>
+          <p:cNvSpPr txBox="1"/>
+          <p:nvPr/>
+        </p:nvSpPr>
+        <p:spPr>
+          <a:xfrm>
+            <a:off x="868680" y="2651760"/>
+            <a:ext cx="3154680" cy="2697480"/>
+          </a:xfrm>
+          <a:prstGeom prst="rect">
+            <a:avLst/>
+          </a:prstGeom>
+          <a:noFill/>
+        </p:spPr>
+        <p:txBody>
+          <a:bodyPr wrap="square">
+            <a:spAutoFit/>
+          </a:bodyPr>
+          <a:lstStyle/>
+          <a:p>
+            <a:pPr>
+              <a:spcAft>
+                <a:spcPts val="800"/>
+              </a:spcAft>
+              <a:defRPr sz="1400">
+                <a:solidFill>
+                  <a:srgbClr val="E9E9EA"/>
+                </a:solidFill>
+                <a:latin typeface="DM Sans"/>
+              </a:defRPr>
+            </a:pPr>
+            <a:r>
+              <a:t>Reliability + proof</a:t>
+            </a:r>
+          </a:p>
+          <a:p>
+            <a:pPr>
+              <a:spcAft>
+                <a:spcPts val="800"/>
+              </a:spcAft>
+              <a:defRPr sz="1400">
+                <a:solidFill>
+                  <a:srgbClr val="E9E9EA"/>
+                </a:solidFill>
+                <a:latin typeface="DM Sans"/>
+              </a:defRPr>
+            </a:pPr>
+            <a:r>
+              <a:t>Subscription truth</a:t>
+            </a:r>
+          </a:p>
+          <a:p>
+            <a:pPr>
+              <a:spcAft>
+                <a:spcPts val="800"/>
+              </a:spcAft>
+              <a:defRPr sz="1400">
+                <a:solidFill>
+                  <a:srgbClr val="E9E9EA"/>
+                </a:solidFill>
+                <a:latin typeface="DM Sans"/>
+              </a:defRPr>
+            </a:pPr>
+            <a:r>
+              <a:t>Daily loop hardening</a:t>
+            </a:r>
+          </a:p>
+          <a:p>
+            <a:pPr>
+              <a:spcAft>
+                <a:spcPts val="800"/>
+              </a:spcAft>
+              <a:defRPr sz="1400">
+                <a:solidFill>
+                  <a:srgbClr val="E9E9EA"/>
+                </a:solidFill>
+                <a:latin typeface="DM Sans"/>
+              </a:defRPr>
+            </a:pPr>
+            <a:r>
+              <a:t>Measured retention baseline</a:t>
+            </a:r>
+          </a:p>
+        </p:txBody>
+      </p:sp>
+      <p:sp>
+        <p:nvSpPr>
+          <p:cNvPr id="11" name="Rounded Rectangle 10"/>
+          <p:cNvSpPr/>
+          <p:nvPr/>
+        </p:nvSpPr>
+        <p:spPr>
+          <a:xfrm>
+            <a:off x="4480560" y="2011680"/>
+            <a:ext cx="3611880" cy="3611880"/>
+          </a:xfrm>
+          <a:prstGeom prst="roundRect">
+            <a:avLst/>
+          </a:prstGeom>
+          <a:solidFill>
+            <a:srgbClr val="17191D"/>
+          </a:solidFill>
+          <a:ln w="12700">
+            <a:solidFill>
+              <a:srgbClr val="353840"/>
+            </a:solidFill>
+          </a:ln>
+        </p:spPr>
+        <p:style>
+          <a:lnRef idx="1">
+            <a:schemeClr val="accent1"/>
+          </a:lnRef>
+          <a:fillRef idx="3">
+            <a:schemeClr val="accent1"/>
+          </a:fillRef>
+          <a:effectRef idx="2">
+            <a:schemeClr val="accent1"/>
+          </a:effectRef>
+          <a:fontRef idx="minor">
+            <a:schemeClr val="lt1"/>
+          </a:fontRef>
+        </p:style>
+        <p:txBody>
+          <a:bodyPr rtlCol="0" anchor="ctr"/>
+          <a:lstStyle/>
+          <a:p>
+            <a:pPr algn="ctr"/>
+          </a:p>
+        </p:txBody>
+      </p:sp>
+      <p:sp>
+        <p:nvSpPr>
+          <p:cNvPr id="12" name="TextBox 11"/>
+          <p:cNvSpPr txBox="1"/>
+          <p:nvPr/>
+        </p:nvSpPr>
+        <p:spPr>
+          <a:xfrm>
+            <a:off x="4709160" y="2212848"/>
+            <a:ext cx="3154680" cy="320040"/>
+          </a:xfrm>
+          <a:prstGeom prst="rect">
+            <a:avLst/>
+          </a:prstGeom>
+          <a:noFill/>
+        </p:spPr>
+        <p:txBody>
+          <a:bodyPr wrap="none">
+            <a:spAutoFit/>
+          </a:bodyPr>
+          <a:lstStyle/>
+          <a:p>
+            <a:r>
+              <a:rPr sz="1000">
+                <a:solidFill>
+                  <a:srgbClr val="C9933A"/>
+                </a:solidFill>
+                <a:latin typeface="IBM Plex Mono"/>
+              </a:rPr>
+              <a:t>PHASE 3</a:t>
+            </a:r>
+          </a:p>
+        </p:txBody>
+      </p:sp>
+      <p:sp>
+        <p:nvSpPr>
+          <p:cNvPr id="13" name="TextBox 12"/>
+          <p:cNvSpPr txBox="1"/>
+          <p:nvPr/>
+        </p:nvSpPr>
+        <p:spPr>
+          <a:xfrm>
+            <a:off x="4709160" y="2651760"/>
+            <a:ext cx="3154680" cy="2697480"/>
+          </a:xfrm>
+          <a:prstGeom prst="rect">
+            <a:avLst/>
+          </a:prstGeom>
+          <a:noFill/>
+        </p:spPr>
+        <p:txBody>
+          <a:bodyPr wrap="none">
+            <a:spAutoFit/>
+          </a:bodyPr>
+          <a:lstStyle/>
+          <a:p/>
+        </p:txBody>
+      </p:sp>
+      <p:sp>
+        <p:nvSpPr>
+          <p:cNvPr id="14" name="TextBox 13"/>
+          <p:cNvSpPr txBox="1"/>
+          <p:nvPr/>
+        </p:nvSpPr>
+        <p:spPr>
+          <a:xfrm>
+            <a:off x="4709160" y="2651760"/>
+            <a:ext cx="3154680" cy="2697480"/>
+          </a:xfrm>
+          <a:prstGeom prst="rect">
+            <a:avLst/>
+          </a:prstGeom>
+          <a:noFill/>
+        </p:spPr>
+        <p:txBody>
+          <a:bodyPr wrap="square">
+            <a:spAutoFit/>
+          </a:bodyPr>
+          <a:lstStyle/>
+          <a:p>
+            <a:pPr>
+              <a:spcAft>
+                <a:spcPts val="800"/>
+              </a:spcAft>
+              <a:defRPr sz="1400">
+                <a:solidFill>
+                  <a:srgbClr val="E9E9EA"/>
+                </a:solidFill>
+                <a:latin typeface="DM Sans"/>
+              </a:defRPr>
+            </a:pPr>
+            <a:r>
+              <a:t>Distribution scale</a:t>
+            </a:r>
+          </a:p>
+          <a:p>
+            <a:pPr>
+              <a:spcAft>
+                <a:spcPts val="800"/>
+              </a:spcAft>
+              <a:defRPr sz="1400">
+                <a:solidFill>
+                  <a:srgbClr val="E9E9EA"/>
+                </a:solidFill>
+                <a:latin typeface="DM Sans"/>
+              </a:defRPr>
+            </a:pPr>
+            <a:r>
+              <a:t>Coach/practitioner channels</a:t>
+            </a:r>
+          </a:p>
+          <a:p>
+            <a:pPr>
+              <a:spcAft>
+                <a:spcPts val="800"/>
+              </a:spcAft>
+              <a:defRPr sz="1400">
+                <a:solidFill>
+                  <a:srgbClr val="E9E9EA"/>
+                </a:solidFill>
+                <a:latin typeface="DM Sans"/>
+              </a:defRPr>
+            </a:pPr>
+            <a:r>
+              <a:t>Referral systemization</a:t>
+            </a:r>
+          </a:p>
+          <a:p>
+            <a:pPr>
+              <a:spcAft>
+                <a:spcPts val="800"/>
+              </a:spcAft>
+              <a:defRPr sz="1400">
+                <a:solidFill>
+                  <a:srgbClr val="E9E9EA"/>
+                </a:solidFill>
+                <a:latin typeface="DM Sans"/>
+              </a:defRPr>
+            </a:pPr>
+            <a:r>
+              <a:t>Conversion quality gates</a:t>
+            </a:r>
+          </a:p>
+        </p:txBody>
+      </p:sp>
+      <p:sp>
+        <p:nvSpPr>
+          <p:cNvPr id="15" name="Rounded Rectangle 14"/>
+          <p:cNvSpPr/>
+          <p:nvPr/>
+        </p:nvSpPr>
+        <p:spPr>
+          <a:xfrm>
+            <a:off x="8321040" y="2011680"/>
+            <a:ext cx="3611880" cy="3611880"/>
+          </a:xfrm>
+          <a:prstGeom prst="roundRect">
+            <a:avLst/>
+          </a:prstGeom>
+          <a:solidFill>
+            <a:srgbClr val="17191D"/>
+          </a:solidFill>
+          <a:ln w="12700">
+            <a:solidFill>
+              <a:srgbClr val="353840"/>
+            </a:solidFill>
+          </a:ln>
+        </p:spPr>
+        <p:style>
+          <a:lnRef idx="1">
+            <a:schemeClr val="accent1"/>
+          </a:lnRef>
+          <a:fillRef idx="3">
+            <a:schemeClr val="accent1"/>
+          </a:fillRef>
+          <a:effectRef idx="2">
+            <a:schemeClr val="accent1"/>
+          </a:effectRef>
+          <a:fontRef idx="minor">
+            <a:schemeClr val="lt1"/>
+          </a:fontRef>
+        </p:style>
+        <p:txBody>
+          <a:bodyPr rtlCol="0" anchor="ctr"/>
+          <a:lstStyle/>
+          <a:p>
+            <a:pPr algn="ctr"/>
+          </a:p>
+        </p:txBody>
+      </p:sp>
+      <p:sp>
+        <p:nvSpPr>
+          <p:cNvPr id="16" name="TextBox 15"/>
+          <p:cNvSpPr txBox="1"/>
+          <p:nvPr/>
+        </p:nvSpPr>
+        <p:spPr>
+          <a:xfrm>
+            <a:off x="8549640" y="2212848"/>
+            <a:ext cx="3154680" cy="320040"/>
+          </a:xfrm>
+          <a:prstGeom prst="rect">
+            <a:avLst/>
+          </a:prstGeom>
+          <a:noFill/>
+        </p:spPr>
+        <p:txBody>
+          <a:bodyPr wrap="none">
+            <a:spAutoFit/>
+          </a:bodyPr>
+          <a:lstStyle/>
+          <a:p>
+            <a:r>
+              <a:rPr sz="1000">
+                <a:solidFill>
+                  <a:srgbClr val="C9933A"/>
+                </a:solidFill>
+                <a:latin typeface="IBM Plex Mono"/>
+              </a:rPr>
+              <a:t>PHASE 4</a:t>
+            </a:r>
+          </a:p>
+        </p:txBody>
+      </p:sp>
+      <p:sp>
+        <p:nvSpPr>
+          <p:cNvPr id="17" name="TextBox 16"/>
+          <p:cNvSpPr txBox="1"/>
+          <p:nvPr/>
+        </p:nvSpPr>
+        <p:spPr>
+          <a:xfrm>
+            <a:off x="8549640" y="2651760"/>
+            <a:ext cx="3154680" cy="2697480"/>
+          </a:xfrm>
+          <a:prstGeom prst="rect">
+            <a:avLst/>
+          </a:prstGeom>
+          <a:noFill/>
+        </p:spPr>
+        <p:txBody>
+          <a:bodyPr wrap="none">
+            <a:spAutoFit/>
+          </a:bodyPr>
+          <a:lstStyle/>
+          <a:p/>
+        </p:txBody>
+      </p:sp>
+      <p:sp>
+        <p:nvSpPr>
+          <p:cNvPr id="18" name="TextBox 17"/>
+          <p:cNvSpPr txBox="1"/>
+          <p:nvPr/>
+        </p:nvSpPr>
+        <p:spPr>
+          <a:xfrm>
+            <a:off x="8549640" y="2651760"/>
+            <a:ext cx="3154680" cy="2697480"/>
+          </a:xfrm>
+          <a:prstGeom prst="rect">
+            <a:avLst/>
+          </a:prstGeom>
+          <a:noFill/>
+        </p:spPr>
+        <p:txBody>
+          <a:bodyPr wrap="square">
+            <a:spAutoFit/>
+          </a:bodyPr>
+          <a:lstStyle/>
+          <a:p>
+            <a:pPr>
+              <a:spcAft>
+                <a:spcPts val="800"/>
+              </a:spcAft>
+              <a:defRPr sz="1400">
+                <a:solidFill>
+                  <a:srgbClr val="E9E9EA"/>
+                </a:solidFill>
+                <a:latin typeface="DM Sans"/>
+              </a:defRPr>
+            </a:pPr>
+            <a:r>
+              <a:t>Calendar + health hookups</a:t>
+            </a:r>
+          </a:p>
+          <a:p>
+            <a:pPr>
+              <a:spcAft>
+                <a:spcPts val="800"/>
+              </a:spcAft>
+              <a:defRPr sz="1400">
+                <a:solidFill>
+                  <a:srgbClr val="E9E9EA"/>
+                </a:solidFill>
+                <a:latin typeface="DM Sans"/>
+              </a:defRPr>
+            </a:pPr>
+            <a:r>
+              <a:t>Consent/revoke integrity</a:t>
+            </a:r>
+          </a:p>
+          <a:p>
+            <a:pPr>
+              <a:spcAft>
+                <a:spcPts val="800"/>
+              </a:spcAft>
+              <a:defRPr sz="1400">
+                <a:solidFill>
+                  <a:srgbClr val="E9E9EA"/>
+                </a:solidFill>
+                <a:latin typeface="DM Sans"/>
+              </a:defRPr>
+            </a:pPr>
+            <a:r>
+              <a:t>Lower manual input burden</a:t>
+            </a:r>
+          </a:p>
+          <a:p>
+            <a:pPr>
+              <a:spcAft>
+                <a:spcPts val="800"/>
+              </a:spcAft>
+              <a:defRPr sz="1400">
+                <a:solidFill>
+                  <a:srgbClr val="E9E9EA"/>
+                </a:solidFill>
+                <a:latin typeface="DM Sans"/>
+              </a:defRPr>
+            </a:pPr>
+            <a:r>
+              <a:t>Context quality protection</a:t>
+            </a:r>
+          </a:p>
+        </p:txBody>
+      </p:sp>
+    </p:spTree>
+  </p:cSld>
+  <p:clrMapOvr>
+    <a:masterClrMapping/>
+  </p:clrMapOvr>
+</p:sld>
+</file>
+
+<file path=ppt/slides/slide13.xml><?xml version="1.0" encoding="utf-8"?>
+<p:sld xmlns:a="http://schemas.openxmlformats.org/drawingml/2006/main" xmlns:p="http://schemas.openxmlformats.org/presentationml/2006/main" xmlns:r="http://schemas.openxmlformats.org/officeDocument/2006/relationships">
+  <p:cSld>
+    <p:bg>
+      <p:bgPr>
+        <a:solidFill>
+          <a:srgbClr val="0E0F11"/>
+        </a:solidFill>
+        <a:effectLst/>
+      </p:bgPr>
+    </p:bg>
+    <p:spTree>
+      <p:nvGrpSpPr>
+        <p:cNvPr id="1" name=""/>
+        <p:cNvGrpSpPr/>
+        <p:nvPr/>
+      </p:nvGrpSpPr>
+      <p:grpSpPr/>
+      <p:sp>
+        <p:nvSpPr>
+          <p:cNvPr id="2" name="Rectangle 1"/>
+          <p:cNvSpPr/>
+          <p:nvPr/>
+        </p:nvSpPr>
+        <p:spPr>
+          <a:xfrm>
+            <a:off x="0" y="0"/>
+            <a:ext cx="12191695" cy="320040"/>
+          </a:xfrm>
+          <a:prstGeom prst="rect">
+            <a:avLst/>
+          </a:prstGeom>
+          <a:solidFill>
+            <a:srgbClr val="17191D"/>
+          </a:solidFill>
+          <a:ln>
+            <a:noFill/>
+          </a:ln>
+        </p:spPr>
+        <p:style>
+          <a:lnRef idx="1">
+            <a:schemeClr val="accent1"/>
+          </a:lnRef>
+          <a:fillRef idx="3">
+            <a:schemeClr val="accent1"/>
+          </a:fillRef>
+          <a:effectRef idx="2">
+            <a:schemeClr val="accent1"/>
+          </a:effectRef>
+          <a:fontRef idx="minor">
+            <a:schemeClr val="lt1"/>
+          </a:fontRef>
+        </p:style>
+        <p:txBody>
+          <a:bodyPr rtlCol="0" anchor="ctr"/>
+          <a:lstStyle/>
+          <a:p>
+            <a:pPr algn="ctr"/>
+          </a:p>
+        </p:txBody>
+      </p:sp>
+      <p:sp>
+        <p:nvSpPr>
+          <p:cNvPr id="3" name="TextBox 2"/>
+          <p:cNvSpPr txBox="1"/>
+          <p:nvPr/>
+        </p:nvSpPr>
+        <p:spPr>
+          <a:xfrm>
+            <a:off x="502920" y="109728"/>
+            <a:ext cx="5029200" cy="182880"/>
+          </a:xfrm>
+          <a:prstGeom prst="rect">
+            <a:avLst/>
+          </a:prstGeom>
+          <a:noFill/>
+        </p:spPr>
+        <p:txBody>
+          <a:bodyPr wrap="none">
+            <a:spAutoFit/>
+          </a:bodyPr>
+          <a:lstStyle/>
+          <a:p>
+            <a:r>
+              <a:rPr sz="900">
+                <a:solidFill>
+                  <a:srgbClr val="C9933A"/>
+                </a:solidFill>
+                <a:latin typeface="IBM Plex Mono"/>
+              </a:rPr>
+              <a:t>STILLFORM · STRATEGIC DECK</a:t>
+            </a:r>
+          </a:p>
+        </p:txBody>
+      </p:sp>
+      <p:sp>
+        <p:nvSpPr>
+          <p:cNvPr id="4" name="TextBox 3"/>
+          <p:cNvSpPr txBox="1"/>
+          <p:nvPr/>
+        </p:nvSpPr>
+        <p:spPr>
+          <a:xfrm>
+            <a:off x="10332720" y="109728"/>
+            <a:ext cx="1371600" cy="182880"/>
+          </a:xfrm>
+          <a:prstGeom prst="rect">
+            <a:avLst/>
+          </a:prstGeom>
+          <a:noFill/>
+        </p:spPr>
+        <p:txBody>
+          <a:bodyPr wrap="none">
+            <a:spAutoFit/>
+          </a:bodyPr>
+          <a:lstStyle/>
+          <a:p>
+            <a:pPr algn="r"/>
+            <a:r>
+              <a:rPr sz="900">
+                <a:solidFill>
+                  <a:srgbClr val="A5A8B0"/>
+                </a:solidFill>
+                <a:latin typeface="IBM Plex Mono"/>
+              </a:rPr>
+              <a:t>13 / 15</a:t>
+            </a:r>
+          </a:p>
+        </p:txBody>
+      </p:sp>
+      <p:sp>
+        <p:nvSpPr>
+          <p:cNvPr id="5" name="TextBox 4"/>
+          <p:cNvSpPr txBox="1"/>
+          <p:nvPr/>
+        </p:nvSpPr>
+        <p:spPr>
+          <a:xfrm>
+            <a:off x="640080" y="640080"/>
+            <a:ext cx="10972800" cy="1097280"/>
+          </a:xfrm>
+          <a:prstGeom prst="rect">
+            <a:avLst/>
+          </a:prstGeom>
+          <a:noFill/>
+        </p:spPr>
+        <p:txBody>
+          <a:bodyPr wrap="none">
+            <a:spAutoFit/>
+          </a:bodyPr>
+          <a:lstStyle/>
+          <a:p>
+            <a:r>
+              <a:rPr sz="4000">
+                <a:solidFill>
+                  <a:srgbClr val="C9933A"/>
+                </a:solidFill>
+                <a:latin typeface="Cormorant Garamond"/>
+              </a:rPr>
+              <a:t>Integrity + Risk</a:t>
+            </a:r>
+          </a:p>
+        </p:txBody>
+      </p:sp>
+      <p:sp>
+        <p:nvSpPr>
+          <p:cNvPr id="6" name="TextBox 5"/>
+          <p:cNvSpPr txBox="1"/>
+          <p:nvPr/>
+        </p:nvSpPr>
+        <p:spPr>
+          <a:xfrm>
+            <a:off x="667512" y="1508760"/>
+            <a:ext cx="10789920" cy="411480"/>
+          </a:xfrm>
+          <a:prstGeom prst="rect">
+            <a:avLst/>
+          </a:prstGeom>
+          <a:noFill/>
+        </p:spPr>
+        <p:txBody>
+          <a:bodyPr wrap="none">
+            <a:spAutoFit/>
+          </a:bodyPr>
+          <a:lstStyle/>
+          <a:p>
+            <a:r>
+              <a:rPr sz="1600">
+                <a:solidFill>
+                  <a:srgbClr val="A5A8B0"/>
+                </a:solidFill>
+                <a:latin typeface="DM Sans"/>
+              </a:rPr>
+              <a:t>SECTION BREAK</a:t>
+            </a:r>
+          </a:p>
+        </p:txBody>
+      </p:sp>
+      <p:sp>
+        <p:nvSpPr>
+          <p:cNvPr id="7" name="Rounded Rectangle 6"/>
+          <p:cNvSpPr/>
+          <p:nvPr/>
+        </p:nvSpPr>
+        <p:spPr>
+          <a:xfrm>
+            <a:off x="868680" y="2103120"/>
+            <a:ext cx="10378440" cy="3154680"/>
+          </a:xfrm>
+          <a:prstGeom prst="roundRect">
+            <a:avLst/>
+          </a:prstGeom>
+          <a:solidFill>
+            <a:srgbClr val="17191D"/>
+          </a:solidFill>
+          <a:ln w="15240">
+            <a:solidFill>
+              <a:srgbClr val="353840"/>
+            </a:solidFill>
+          </a:ln>
+        </p:spPr>
+        <p:style>
+          <a:lnRef idx="1">
+            <a:schemeClr val="accent1"/>
+          </a:lnRef>
+          <a:fillRef idx="3">
+            <a:schemeClr val="accent1"/>
+          </a:fillRef>
+          <a:effectRef idx="2">
+            <a:schemeClr val="accent1"/>
+          </a:effectRef>
+          <a:fontRef idx="minor">
+            <a:schemeClr val="lt1"/>
+          </a:fontRef>
+        </p:style>
+        <p:txBody>
+          <a:bodyPr rtlCol="0" anchor="ctr"/>
+          <a:lstStyle/>
+          <a:p>
+            <a:pPr algn="ctr"/>
+          </a:p>
+        </p:txBody>
+      </p:sp>
+      <p:sp>
+        <p:nvSpPr>
+          <p:cNvPr id="8" name="Rectangle 7"/>
+          <p:cNvSpPr/>
+          <p:nvPr/>
+        </p:nvSpPr>
+        <p:spPr>
+          <a:xfrm>
+            <a:off x="868680" y="2103120"/>
+            <a:ext cx="146304" cy="3154680"/>
+          </a:xfrm>
+          <a:prstGeom prst="rect">
+            <a:avLst/>
+          </a:prstGeom>
+          <a:solidFill>
+            <a:srgbClr val="C9933A"/>
+          </a:solidFill>
+          <a:ln>
+            <a:noFill/>
+          </a:ln>
+        </p:spPr>
+        <p:style>
+          <a:lnRef idx="1">
+            <a:schemeClr val="accent1"/>
+          </a:lnRef>
+          <a:fillRef idx="3">
+            <a:schemeClr val="accent1"/>
+          </a:fillRef>
+          <a:effectRef idx="2">
+            <a:schemeClr val="accent1"/>
+          </a:effectRef>
+          <a:fontRef idx="minor">
+            <a:schemeClr val="lt1"/>
+          </a:fontRef>
+        </p:style>
+        <p:txBody>
+          <a:bodyPr rtlCol="0" anchor="ctr"/>
+          <a:lstStyle/>
+          <a:p>
+            <a:pPr algn="ctr"/>
+          </a:p>
+        </p:txBody>
+      </p:sp>
+      <p:sp>
+        <p:nvSpPr>
+          <p:cNvPr id="9" name="TextBox 8"/>
+          <p:cNvSpPr txBox="1"/>
+          <p:nvPr/>
+        </p:nvSpPr>
+        <p:spPr>
+          <a:xfrm>
+            <a:off x="1234440" y="2743200"/>
+            <a:ext cx="9326880" cy="1828800"/>
+          </a:xfrm>
+          <a:prstGeom prst="rect">
+            <a:avLst/>
+          </a:prstGeom>
+          <a:noFill/>
+        </p:spPr>
+        <p:txBody>
+          <a:bodyPr wrap="none">
+            <a:spAutoFit/>
+          </a:bodyPr>
+          <a:lstStyle/>
+          <a:p>
+            <a:pPr algn="l"/>
+            <a:r>
+              <a:rPr sz="2600">
+                <a:solidFill>
+                  <a:srgbClr val="E9E9EA"/>
+                </a:solidFill>
+                <a:latin typeface="DM Sans"/>
+              </a:rPr>
+              <a:t>Release discipline and risk controls as product features.</a:t>
+            </a:r>
+          </a:p>
+        </p:txBody>
+      </p:sp>
+    </p:spTree>
+  </p:cSld>
+  <p:clrMapOvr>
+    <a:masterClrMapping/>
+  </p:clrMapOvr>
+</p:sld>
+</file>
+
+<file path=ppt/slides/slide14.xml><?xml version="1.0" encoding="utf-8"?>
+<p:sld xmlns:a="http://schemas.openxmlformats.org/drawingml/2006/main" xmlns:p="http://schemas.openxmlformats.org/presentationml/2006/main" xmlns:r="http://schemas.openxmlformats.org/officeDocument/2006/relationships">
+  <p:cSld>
+    <p:bg>
+      <p:bgPr>
+        <a:solidFill>
+          <a:srgbClr val="0E0F11"/>
+        </a:solidFill>
+        <a:effectLst/>
+      </p:bgPr>
+    </p:bg>
+    <p:spTree>
+      <p:nvGrpSpPr>
+        <p:cNvPr id="1" name=""/>
+        <p:cNvGrpSpPr/>
+        <p:nvPr/>
+      </p:nvGrpSpPr>
+      <p:grpSpPr/>
+      <p:sp>
+        <p:nvSpPr>
+          <p:cNvPr id="2" name="Rectangle 1"/>
+          <p:cNvSpPr/>
+          <p:nvPr/>
+        </p:nvSpPr>
+        <p:spPr>
+          <a:xfrm>
+            <a:off x="0" y="0"/>
+            <a:ext cx="12191695" cy="320040"/>
+          </a:xfrm>
+          <a:prstGeom prst="rect">
+            <a:avLst/>
+          </a:prstGeom>
+          <a:solidFill>
+            <a:srgbClr val="17191D"/>
+          </a:solidFill>
+          <a:ln>
+            <a:noFill/>
+          </a:ln>
+        </p:spPr>
+        <p:style>
+          <a:lnRef idx="1">
+            <a:schemeClr val="accent1"/>
+          </a:lnRef>
+          <a:fillRef idx="3">
+            <a:schemeClr val="accent1"/>
+          </a:fillRef>
+          <a:effectRef idx="2">
+            <a:schemeClr val="accent1"/>
+          </a:effectRef>
+          <a:fontRef idx="minor">
+            <a:schemeClr val="lt1"/>
+          </a:fontRef>
+        </p:style>
+        <p:txBody>
+          <a:bodyPr rtlCol="0" anchor="ctr"/>
+          <a:lstStyle/>
+          <a:p>
+            <a:pPr algn="ctr"/>
+          </a:p>
+        </p:txBody>
+      </p:sp>
+      <p:sp>
+        <p:nvSpPr>
+          <p:cNvPr id="3" name="TextBox 2"/>
+          <p:cNvSpPr txBox="1"/>
+          <p:nvPr/>
+        </p:nvSpPr>
+        <p:spPr>
+          <a:xfrm>
+            <a:off x="502920" y="109728"/>
+            <a:ext cx="5029200" cy="182880"/>
+          </a:xfrm>
+          <a:prstGeom prst="rect">
+            <a:avLst/>
+          </a:prstGeom>
+          <a:noFill/>
+        </p:spPr>
+        <p:txBody>
+          <a:bodyPr wrap="none">
+            <a:spAutoFit/>
+          </a:bodyPr>
+          <a:lstStyle/>
+          <a:p>
+            <a:r>
+              <a:rPr sz="900">
+                <a:solidFill>
+                  <a:srgbClr val="C9933A"/>
+                </a:solidFill>
+                <a:latin typeface="IBM Plex Mono"/>
+              </a:rPr>
+              <a:t>STILLFORM · STRATEGIC DECK</a:t>
+            </a:r>
+          </a:p>
+        </p:txBody>
+      </p:sp>
+      <p:sp>
+        <p:nvSpPr>
+          <p:cNvPr id="4" name="TextBox 3"/>
+          <p:cNvSpPr txBox="1"/>
+          <p:nvPr/>
+        </p:nvSpPr>
+        <p:spPr>
+          <a:xfrm>
+            <a:off x="10332720" y="109728"/>
+            <a:ext cx="1371600" cy="182880"/>
+          </a:xfrm>
+          <a:prstGeom prst="rect">
+            <a:avLst/>
+          </a:prstGeom>
+          <a:noFill/>
+        </p:spPr>
+        <p:txBody>
+          <a:bodyPr wrap="none">
+            <a:spAutoFit/>
+          </a:bodyPr>
+          <a:lstStyle/>
+          <a:p>
+            <a:pPr algn="r"/>
+            <a:r>
+              <a:rPr sz="900">
+                <a:solidFill>
+                  <a:srgbClr val="A5A8B0"/>
+                </a:solidFill>
+                <a:latin typeface="IBM Plex Mono"/>
+              </a:rPr>
+              <a:t>14 / 15</a:t>
+            </a:r>
+          </a:p>
+        </p:txBody>
+      </p:sp>
+      <p:sp>
+        <p:nvSpPr>
+          <p:cNvPr id="5" name="TextBox 4"/>
+          <p:cNvSpPr txBox="1"/>
+          <p:nvPr/>
+        </p:nvSpPr>
+        <p:spPr>
+          <a:xfrm>
+            <a:off x="640080" y="640080"/>
+            <a:ext cx="10972800" cy="1097280"/>
+          </a:xfrm>
+          <a:prstGeom prst="rect">
+            <a:avLst/>
+          </a:prstGeom>
+          <a:noFill/>
+        </p:spPr>
+        <p:txBody>
+          <a:bodyPr wrap="none">
+            <a:spAutoFit/>
+          </a:bodyPr>
+          <a:lstStyle/>
+          <a:p>
+            <a:r>
+              <a:rPr sz="4000">
+                <a:solidFill>
+                  <a:srgbClr val="C9933A"/>
+                </a:solidFill>
+                <a:latin typeface="Cormorant Garamond"/>
+              </a:rPr>
+              <a:t>Integrity operations</a:t>
+            </a:r>
+          </a:p>
+        </p:txBody>
+      </p:sp>
+      <p:sp>
+        <p:nvSpPr>
+          <p:cNvPr id="6" name="TextBox 5"/>
+          <p:cNvSpPr txBox="1"/>
+          <p:nvPr/>
+        </p:nvSpPr>
+        <p:spPr>
+          <a:xfrm>
+            <a:off x="667512" y="1508760"/>
+            <a:ext cx="10789920" cy="411480"/>
+          </a:xfrm>
+          <a:prstGeom prst="rect">
+            <a:avLst/>
+          </a:prstGeom>
+          <a:noFill/>
+        </p:spPr>
+        <p:txBody>
+          <a:bodyPr wrap="none">
+            <a:spAutoFit/>
+          </a:bodyPr>
+          <a:lstStyle/>
+          <a:p>
+            <a:r>
+              <a:rPr sz="1600">
+                <a:solidFill>
+                  <a:srgbClr val="A5A8B0"/>
+                </a:solidFill>
+                <a:latin typeface="DM Sans"/>
+              </a:rPr>
+              <a:t>How trust is enforced in code and release practice</a:t>
+            </a:r>
+          </a:p>
+        </p:txBody>
+      </p:sp>
+      <p:sp>
+        <p:nvSpPr>
+          <p:cNvPr id="7" name="Rounded Rectangle 6"/>
+          <p:cNvSpPr/>
+          <p:nvPr/>
+        </p:nvSpPr>
+        <p:spPr>
+          <a:xfrm>
+            <a:off x="640080" y="1874519"/>
+            <a:ext cx="5349240" cy="4526280"/>
+          </a:xfrm>
+          <a:prstGeom prst="roundRect">
+            <a:avLst/>
+          </a:prstGeom>
+          <a:solidFill>
+            <a:srgbClr val="17191D"/>
+          </a:solidFill>
+          <a:ln w="12700">
+            <a:solidFill>
+              <a:srgbClr val="353840"/>
+            </a:solidFill>
+          </a:ln>
+        </p:spPr>
+        <p:style>
+          <a:lnRef idx="1">
+            <a:schemeClr val="accent1"/>
+          </a:lnRef>
+          <a:fillRef idx="3">
+            <a:schemeClr val="accent1"/>
+          </a:fillRef>
+          <a:effectRef idx="2">
+            <a:schemeClr val="accent1"/>
+          </a:effectRef>
+          <a:fontRef idx="minor">
+            <a:schemeClr val="lt1"/>
+          </a:fontRef>
+        </p:style>
+        <p:txBody>
+          <a:bodyPr rtlCol="0" anchor="ctr"/>
+          <a:lstStyle/>
+          <a:p>
+            <a:pPr algn="ctr"/>
+          </a:p>
+        </p:txBody>
+      </p:sp>
+      <p:sp>
+        <p:nvSpPr>
+          <p:cNvPr id="8" name="TextBox 7"/>
+          <p:cNvSpPr txBox="1"/>
+          <p:nvPr/>
+        </p:nvSpPr>
+        <p:spPr>
+          <a:xfrm>
+            <a:off x="868680" y="2148839"/>
+            <a:ext cx="4937760" cy="4160520"/>
+          </a:xfrm>
+          <a:prstGeom prst="rect">
+            <a:avLst/>
+          </a:prstGeom>
+          <a:noFill/>
+        </p:spPr>
+        <p:txBody>
+          <a:bodyPr wrap="square">
+            <a:spAutoFit/>
+          </a:bodyPr>
+          <a:lstStyle/>
+          <a:p>
+            <a:pPr>
+              <a:spcAft>
+                <a:spcPts val="800"/>
+              </a:spcAft>
+              <a:defRPr sz="1400">
+                <a:solidFill>
+                  <a:srgbClr val="E9E9EA"/>
+                </a:solidFill>
+                <a:latin typeface="DM Sans"/>
+              </a:defRPr>
+            </a:pPr>
+            <a:r>
+              <a:t>SHIP preflight gates: build + invariant + trust checks.</a:t>
+            </a:r>
+          </a:p>
+          <a:p>
+            <a:pPr>
+              <a:spcAft>
+                <a:spcPts val="800"/>
+              </a:spcAft>
+              <a:defRPr sz="1400">
+                <a:solidFill>
+                  <a:srgbClr val="E9E9EA"/>
+                </a:solidFill>
+                <a:latin typeface="DM Sans"/>
+              </a:defRPr>
+            </a:pPr>
+            <a:r>
+              <a:t>Audience lock: universal framing; no niche-only drift.</a:t>
+            </a:r>
+          </a:p>
+          <a:p>
+            <a:pPr>
+              <a:spcAft>
+                <a:spcPts val="800"/>
+              </a:spcAft>
+              <a:defRPr sz="1400">
+                <a:solidFill>
+                  <a:srgbClr val="E9E9EA"/>
+                </a:solidFill>
+                <a:latin typeface="DM Sans"/>
+              </a:defRPr>
+            </a:pPr>
+            <a:r>
+              <a:t>Claim lock: mechanism-first language; no overclaiming.</a:t>
+            </a:r>
+          </a:p>
+          <a:p>
+            <a:pPr>
+              <a:spcAft>
+                <a:spcPts val="800"/>
+              </a:spcAft>
+              <a:defRPr sz="1400">
+                <a:solidFill>
+                  <a:srgbClr val="E9E9EA"/>
+                </a:solidFill>
+                <a:latin typeface="DM Sans"/>
+              </a:defRPr>
+            </a:pPr>
+            <a:r>
+              <a:t>Escalation: any invariant failure blocks release.</a:t>
+            </a:r>
+          </a:p>
+          <a:p>
+            <a:pPr>
+              <a:spcAft>
+                <a:spcPts val="800"/>
+              </a:spcAft>
+              <a:defRPr sz="1400">
+                <a:solidFill>
+                  <a:srgbClr val="E9E9EA"/>
+                </a:solidFill>
+                <a:latin typeface="DM Sans"/>
+              </a:defRPr>
+            </a:pPr>
+            <a:r>
+              <a:t>Diagnostics on trust-critical flows (subscription/sync/restore).</a:t>
+            </a:r>
+          </a:p>
+        </p:txBody>
+      </p:sp>
+      <p:sp>
+        <p:nvSpPr>
+          <p:cNvPr id="9" name="Rounded Rectangle 8"/>
+          <p:cNvSpPr/>
+          <p:nvPr/>
+        </p:nvSpPr>
+        <p:spPr>
+          <a:xfrm>
+            <a:off x="6217920" y="1874519"/>
+            <a:ext cx="5349240" cy="4526280"/>
+          </a:xfrm>
+          <a:prstGeom prst="roundRect">
+            <a:avLst/>
+          </a:prstGeom>
+          <a:solidFill>
+            <a:srgbClr val="1F2228"/>
+          </a:solidFill>
+          <a:ln w="12700">
+            <a:solidFill>
+              <a:srgbClr val="353840"/>
+            </a:solidFill>
+          </a:ln>
+        </p:spPr>
+        <p:style>
+          <a:lnRef idx="1">
+            <a:schemeClr val="accent1"/>
+          </a:lnRef>
+          <a:fillRef idx="3">
+            <a:schemeClr val="accent1"/>
+          </a:fillRef>
+          <a:effectRef idx="2">
+            <a:schemeClr val="accent1"/>
+          </a:effectRef>
+          <a:fontRef idx="minor">
+            <a:schemeClr val="lt1"/>
+          </a:fontRef>
+        </p:style>
+        <p:txBody>
+          <a:bodyPr rtlCol="0" anchor="ctr"/>
+          <a:lstStyle/>
+          <a:p>
+            <a:pPr algn="ctr"/>
+          </a:p>
+        </p:txBody>
+      </p:sp>
+      <p:sp>
+        <p:nvSpPr>
+          <p:cNvPr id="10" name="TextBox 9"/>
+          <p:cNvSpPr txBox="1"/>
+          <p:nvPr/>
+        </p:nvSpPr>
+        <p:spPr>
+          <a:xfrm>
+            <a:off x="6446520" y="2148839"/>
+            <a:ext cx="4937760" cy="4160520"/>
+          </a:xfrm>
+          <a:prstGeom prst="rect">
+            <a:avLst/>
+          </a:prstGeom>
+          <a:noFill/>
+        </p:spPr>
+        <p:txBody>
+          <a:bodyPr wrap="square">
+            <a:spAutoFit/>
+          </a:bodyPr>
+          <a:lstStyle/>
+          <a:p>
+            <a:pPr>
+              <a:spcAft>
+                <a:spcPts val="800"/>
+              </a:spcAft>
+              <a:defRPr sz="1400">
+                <a:solidFill>
+                  <a:srgbClr val="E9E9EA"/>
+                </a:solidFill>
+                <a:latin typeface="DM Sans"/>
+              </a:defRPr>
+            </a:pPr>
+            <a:r>
+              <a:t>Risk: feature sprawl -&gt; Mitigation: ecosystem-first gate.</a:t>
+            </a:r>
+          </a:p>
+          <a:p>
+            <a:pPr>
+              <a:spcAft>
+                <a:spcPts val="800"/>
+              </a:spcAft>
+              <a:defRPr sz="1400">
+                <a:solidFill>
+                  <a:srgbClr val="E9E9EA"/>
+                </a:solidFill>
+                <a:latin typeface="DM Sans"/>
+              </a:defRPr>
+            </a:pPr>
+            <a:r>
+              <a:t>Risk: reliability regression -&gt; Mitigation: preflight + smoke checks.</a:t>
+            </a:r>
+          </a:p>
+          <a:p>
+            <a:pPr>
+              <a:spcAft>
+                <a:spcPts val="800"/>
+              </a:spcAft>
+              <a:defRPr sz="1400">
+                <a:solidFill>
+                  <a:srgbClr val="E9E9EA"/>
+                </a:solidFill>
+                <a:latin typeface="DM Sans"/>
+              </a:defRPr>
+            </a:pPr>
+            <a:r>
+              <a:t>Risk: trust mismatch -&gt; Mitigation: copy/behavior parity review.</a:t>
+            </a:r>
+          </a:p>
+          <a:p>
+            <a:pPr>
+              <a:spcAft>
+                <a:spcPts val="800"/>
+              </a:spcAft>
+              <a:defRPr sz="1400">
+                <a:solidFill>
+                  <a:srgbClr val="E9E9EA"/>
+                </a:solidFill>
+                <a:latin typeface="DM Sans"/>
+              </a:defRPr>
+            </a:pPr>
+            <a:r>
+              <a:t>Risk: retention decay -&gt; Mitigation: loop adherence + nudge recovery telemetry.</a:t>
+            </a:r>
+          </a:p>
+          <a:p>
+            <a:pPr>
+              <a:spcAft>
+                <a:spcPts val="800"/>
+              </a:spcAft>
+              <a:defRPr sz="1400">
+                <a:solidFill>
+                  <a:srgbClr val="E9E9EA"/>
+                </a:solidFill>
+                <a:latin typeface="DM Sans"/>
+              </a:defRPr>
+            </a:pPr>
+            <a:r>
+              <a:t>Risk: evidence drift -&gt; Mitigation: measured outcomes before stronger claims.</a:t>
+            </a:r>
+          </a:p>
+        </p:txBody>
+      </p:sp>
+    </p:spTree>
+  </p:cSld>
+  <p:clrMapOvr>
+    <a:masterClrMapping/>
+  </p:clrMapOvr>
+</p:sld>
+</file>
+
+<file path=ppt/slides/slide15.xml><?xml version="1.0" encoding="utf-8"?>
+<p:sld xmlns:a="http://schemas.openxmlformats.org/drawingml/2006/main" xmlns:p="http://schemas.openxmlformats.org/presentationml/2006/main" xmlns:r="http://schemas.openxmlformats.org/officeDocument/2006/relationships">
+  <p:cSld>
+    <p:bg>
+      <p:bgPr>
+        <a:solidFill>
+          <a:srgbClr val="0E0F11"/>
+        </a:solidFill>
+        <a:effectLst/>
+      </p:bgPr>
+    </p:bg>
+    <p:spTree>
+      <p:nvGrpSpPr>
+        <p:cNvPr id="1" name=""/>
+        <p:cNvGrpSpPr/>
+        <p:nvPr/>
+      </p:nvGrpSpPr>
+      <p:grpSpPr/>
+      <p:sp>
+        <p:nvSpPr>
+          <p:cNvPr id="2" name="Rectangle 1"/>
+          <p:cNvSpPr/>
+          <p:nvPr/>
+        </p:nvSpPr>
+        <p:spPr>
+          <a:xfrm>
+            <a:off x="0" y="0"/>
+            <a:ext cx="12191695" cy="320040"/>
+          </a:xfrm>
+          <a:prstGeom prst="rect">
+            <a:avLst/>
+          </a:prstGeom>
+          <a:solidFill>
+            <a:srgbClr val="17191D"/>
+          </a:solidFill>
+          <a:ln>
+            <a:noFill/>
+          </a:ln>
+        </p:spPr>
+        <p:style>
+          <a:lnRef idx="1">
+            <a:schemeClr val="accent1"/>
+          </a:lnRef>
+          <a:fillRef idx="3">
+            <a:schemeClr val="accent1"/>
+          </a:fillRef>
+          <a:effectRef idx="2">
+            <a:schemeClr val="accent1"/>
+          </a:effectRef>
+          <a:fontRef idx="minor">
+            <a:schemeClr val="lt1"/>
+          </a:fontRef>
+        </p:style>
+        <p:txBody>
+          <a:bodyPr rtlCol="0" anchor="ctr"/>
+          <a:lstStyle/>
+          <a:p>
+            <a:pPr algn="ctr"/>
+          </a:p>
+        </p:txBody>
+      </p:sp>
+      <p:sp>
+        <p:nvSpPr>
+          <p:cNvPr id="3" name="TextBox 2"/>
+          <p:cNvSpPr txBox="1"/>
+          <p:nvPr/>
+        </p:nvSpPr>
+        <p:spPr>
+          <a:xfrm>
+            <a:off x="502920" y="109728"/>
+            <a:ext cx="5029200" cy="182880"/>
+          </a:xfrm>
+          <a:prstGeom prst="rect">
+            <a:avLst/>
+          </a:prstGeom>
+          <a:noFill/>
+        </p:spPr>
+        <p:txBody>
+          <a:bodyPr wrap="none">
+            <a:spAutoFit/>
+          </a:bodyPr>
+          <a:lstStyle/>
+          <a:p>
+            <a:r>
+              <a:rPr sz="900">
+                <a:solidFill>
+                  <a:srgbClr val="C9933A"/>
+                </a:solidFill>
+                <a:latin typeface="IBM Plex Mono"/>
+              </a:rPr>
+              <a:t>STILLFORM · STRATEGIC DECK</a:t>
+            </a:r>
+          </a:p>
+        </p:txBody>
+      </p:sp>
+      <p:sp>
+        <p:nvSpPr>
+          <p:cNvPr id="4" name="TextBox 3"/>
+          <p:cNvSpPr txBox="1"/>
+          <p:nvPr/>
+        </p:nvSpPr>
+        <p:spPr>
+          <a:xfrm>
+            <a:off x="10332720" y="109728"/>
+            <a:ext cx="1371600" cy="182880"/>
+          </a:xfrm>
+          <a:prstGeom prst="rect">
+            <a:avLst/>
+          </a:prstGeom>
+          <a:noFill/>
+        </p:spPr>
+        <p:txBody>
+          <a:bodyPr wrap="none">
+            <a:spAutoFit/>
+          </a:bodyPr>
+          <a:lstStyle/>
+          <a:p>
+            <a:pPr algn="r"/>
+            <a:r>
+              <a:rPr sz="900">
+                <a:solidFill>
+                  <a:srgbClr val="A5A8B0"/>
+                </a:solidFill>
+                <a:latin typeface="IBM Plex Mono"/>
+              </a:rPr>
+              <a:t>15 / 15</a:t>
+            </a:r>
+          </a:p>
+        </p:txBody>
+      </p:sp>
+      <p:sp>
+        <p:nvSpPr>
+          <p:cNvPr id="5" name="TextBox 4"/>
+          <p:cNvSpPr txBox="1"/>
+          <p:nvPr/>
+        </p:nvSpPr>
+        <p:spPr>
+          <a:xfrm>
+            <a:off x="640080" y="640080"/>
+            <a:ext cx="10972800" cy="1097280"/>
+          </a:xfrm>
+          <a:prstGeom prst="rect">
+            <a:avLst/>
+          </a:prstGeom>
+          <a:noFill/>
+        </p:spPr>
+        <p:txBody>
+          <a:bodyPr wrap="none">
+            <a:spAutoFit/>
+          </a:bodyPr>
+          <a:lstStyle/>
+          <a:p>
+            <a:r>
+              <a:rPr sz="4000">
                 <a:solidFill>
                   <a:srgbClr val="C9933A"/>
                 </a:solidFill>
@@ -3460,14 +6044,14 @@
       </p:sp>
       <p:sp>
         <p:nvSpPr>
-          <p:cNvPr id="5" name="TextBox 4"/>
+          <p:cNvPr id="6" name="TextBox 5"/>
           <p:cNvSpPr txBox="1"/>
           <p:nvPr/>
         </p:nvSpPr>
         <p:spPr>
           <a:xfrm>
-            <a:off x="658368" y="1737360"/>
-            <a:ext cx="10332720" cy="502920"/>
+            <a:off x="667512" y="1508760"/>
+            <a:ext cx="10789920" cy="411480"/>
           </a:xfrm>
           <a:prstGeom prst="rect">
             <a:avLst/>
@@ -3483,7 +6067,7 @@
             <a:r>
               <a:rPr sz="1600">
                 <a:solidFill>
-                  <a:srgbClr val="A0A2A8"/>
+                  <a:srgbClr val="A5A8B0"/>
                 </a:solidFill>
                 <a:latin typeface="DM Sans"/>
               </a:rPr>
@@ -3494,14 +6078,14 @@
       </p:sp>
       <p:sp>
         <p:nvSpPr>
-          <p:cNvPr id="6" name="TextBox 5"/>
+          <p:cNvPr id="7" name="TextBox 6"/>
           <p:cNvSpPr txBox="1"/>
           <p:nvPr/>
         </p:nvSpPr>
         <p:spPr>
           <a:xfrm>
-            <a:off x="731520" y="2560320"/>
-            <a:ext cx="10789920" cy="2286000"/>
+            <a:off x="731520" y="2286000"/>
+            <a:ext cx="10789920" cy="2468880"/>
           </a:xfrm>
           <a:prstGeom prst="rect">
             <a:avLst/>
@@ -3523,41 +6107,8 @@
                 <a:latin typeface="DM Sans"/>
               </a:rPr>
               <a:t>Mission: reduce avoidable human damage by making composure trainable, measurable, and transferable.
-Standard: honor, honesty, and integrity in product behavior, language, and release decisions.</a:t>
-            </a:r>
-          </a:p>
-        </p:txBody>
-      </p:sp>
-      <p:sp>
-        <p:nvSpPr>
-          <p:cNvPr id="7" name="TextBox 6"/>
-          <p:cNvSpPr txBox="1"/>
-          <p:nvPr/>
-        </p:nvSpPr>
-        <p:spPr>
-          <a:xfrm>
-            <a:off x="731520" y="5989320"/>
-            <a:ext cx="10515600" cy="365760"/>
-          </a:xfrm>
-          <a:prstGeom prst="rect">
-            <a:avLst/>
-          </a:prstGeom>
-          <a:noFill/>
-        </p:spPr>
-        <p:txBody>
-          <a:bodyPr wrap="none">
-            <a:spAutoFit/>
-          </a:bodyPr>
-          <a:lstStyle/>
-          <a:p>
-            <a:r>
-              <a:rPr sz="1400">
-                <a:solidFill>
-                  <a:srgbClr val="C9933A"/>
-                </a:solidFill>
-                <a:latin typeface="IBM Plex Mono"/>
-              </a:rPr>
-              <a:t>stillformapp.com</a:t>
+Standard: honor, honesty, and integrity in product behavior, language, and release decisions.
+stillformapp.com</a:t>
             </a:r>
           </a:p>
         </p:txBody>
@@ -3590,54 +6141,20 @@
       <p:grpSpPr/>
       <p:sp>
         <p:nvSpPr>
-          <p:cNvPr id="2" name="TextBox 1"/>
-          <p:cNvSpPr txBox="1"/>
-          <p:nvPr/>
-        </p:nvSpPr>
-        <p:spPr>
-          <a:xfrm>
-            <a:off x="640080" y="320040"/>
-            <a:ext cx="5669280" cy="320040"/>
-          </a:xfrm>
-          <a:prstGeom prst="rect">
-            <a:avLst/>
-          </a:prstGeom>
-          <a:noFill/>
-        </p:spPr>
-        <p:txBody>
-          <a:bodyPr wrap="none">
-            <a:spAutoFit/>
-          </a:bodyPr>
-          <a:lstStyle/>
-          <a:p>
-            <a:r>
-              <a:rPr sz="1100">
-                <a:solidFill>
-                  <a:srgbClr val="C9933A"/>
-                </a:solidFill>
-                <a:latin typeface="IBM Plex Mono"/>
-              </a:rPr>
-              <a:t>STILLFORM · STRATEGIC DECK</a:t>
-            </a:r>
-          </a:p>
-        </p:txBody>
-      </p:sp>
-      <p:sp>
-        <p:nvSpPr>
-          <p:cNvPr id="3" name="Rectangle 2"/>
+          <p:cNvPr id="2" name="Rectangle 1"/>
           <p:cNvSpPr/>
           <p:nvPr/>
         </p:nvSpPr>
         <p:spPr>
           <a:xfrm>
-            <a:off x="640080" y="640080"/>
-            <a:ext cx="10972800" cy="9144"/>
+            <a:off x="0" y="0"/>
+            <a:ext cx="12191695" cy="320040"/>
           </a:xfrm>
           <a:prstGeom prst="rect">
             <a:avLst/>
           </a:prstGeom>
           <a:solidFill>
-            <a:srgbClr val="32343A"/>
+            <a:srgbClr val="17191D"/>
           </a:solidFill>
           <a:ln>
             <a:noFill/>
@@ -3667,14 +6184,14 @@
       </p:sp>
       <p:sp>
         <p:nvSpPr>
-          <p:cNvPr id="4" name="TextBox 3"/>
+          <p:cNvPr id="3" name="TextBox 2"/>
           <p:cNvSpPr txBox="1"/>
           <p:nvPr/>
         </p:nvSpPr>
         <p:spPr>
           <a:xfrm>
-            <a:off x="640080" y="868680"/>
-            <a:ext cx="10789920" cy="1097280"/>
+            <a:off x="502920" y="109728"/>
+            <a:ext cx="5029200" cy="182880"/>
           </a:xfrm>
           <a:prstGeom prst="rect">
             <a:avLst/>
@@ -3688,27 +6205,27 @@
           <a:lstStyle/>
           <a:p>
             <a:r>
-              <a:rPr sz="3800">
+              <a:rPr sz="900">
                 <a:solidFill>
                   <a:srgbClr val="C9933A"/>
                 </a:solidFill>
-                <a:latin typeface="Cormorant Garamond"/>
+                <a:latin typeface="IBM Plex Mono"/>
               </a:rPr>
-              <a:t>Operating definition</a:t>
-            </a:r>
-          </a:p>
-        </p:txBody>
-      </p:sp>
-      <p:sp>
-        <p:nvSpPr>
-          <p:cNvPr id="5" name="TextBox 4"/>
+              <a:t>STILLFORM · STRATEGIC DECK</a:t>
+            </a:r>
+          </a:p>
+        </p:txBody>
+      </p:sp>
+      <p:sp>
+        <p:nvSpPr>
+          <p:cNvPr id="4" name="TextBox 3"/>
           <p:cNvSpPr txBox="1"/>
           <p:nvPr/>
         </p:nvSpPr>
         <p:spPr>
           <a:xfrm>
-            <a:off x="658368" y="1737360"/>
-            <a:ext cx="10332720" cy="502920"/>
+            <a:off x="10332720" y="109728"/>
+            <a:ext cx="1371600" cy="182880"/>
           </a:xfrm>
           <a:prstGeom prst="rect">
             <a:avLst/>
@@ -3721,385 +6238,210 @@
           </a:bodyPr>
           <a:lstStyle/>
           <a:p>
+            <a:pPr algn="r"/>
+            <a:r>
+              <a:rPr sz="900">
+                <a:solidFill>
+                  <a:srgbClr val="A5A8B0"/>
+                </a:solidFill>
+                <a:latin typeface="IBM Plex Mono"/>
+              </a:rPr>
+              <a:t>02 / 15</a:t>
+            </a:r>
+          </a:p>
+        </p:txBody>
+      </p:sp>
+      <p:sp>
+        <p:nvSpPr>
+          <p:cNvPr id="5" name="TextBox 4"/>
+          <p:cNvSpPr txBox="1"/>
+          <p:nvPr/>
+        </p:nvSpPr>
+        <p:spPr>
+          <a:xfrm>
+            <a:off x="640080" y="640080"/>
+            <a:ext cx="10972800" cy="1097280"/>
+          </a:xfrm>
+          <a:prstGeom prst="rect">
+            <a:avLst/>
+          </a:prstGeom>
+          <a:noFill/>
+        </p:spPr>
+        <p:txBody>
+          <a:bodyPr wrap="none">
+            <a:spAutoFit/>
+          </a:bodyPr>
+          <a:lstStyle/>
+          <a:p>
+            <a:r>
+              <a:rPr sz="4000">
+                <a:solidFill>
+                  <a:srgbClr val="C9933A"/>
+                </a:solidFill>
+                <a:latin typeface="Cormorant Garamond"/>
+              </a:rPr>
+              <a:t>Operating Thesis</a:t>
+            </a:r>
+          </a:p>
+        </p:txBody>
+      </p:sp>
+      <p:sp>
+        <p:nvSpPr>
+          <p:cNvPr id="6" name="TextBox 5"/>
+          <p:cNvSpPr txBox="1"/>
+          <p:nvPr/>
+        </p:nvSpPr>
+        <p:spPr>
+          <a:xfrm>
+            <a:off x="667512" y="1508760"/>
+            <a:ext cx="10789920" cy="411480"/>
+          </a:xfrm>
+          <a:prstGeom prst="rect">
+            <a:avLst/>
+          </a:prstGeom>
+          <a:noFill/>
+        </p:spPr>
+        <p:txBody>
+          <a:bodyPr wrap="none">
+            <a:spAutoFit/>
+          </a:bodyPr>
+          <a:lstStyle/>
+          <a:p>
             <a:r>
               <a:rPr sz="1600">
                 <a:solidFill>
-                  <a:srgbClr val="A0A2A8"/>
+                  <a:srgbClr val="A5A8B0"/>
                 </a:solidFill>
                 <a:latin typeface="DM Sans"/>
               </a:rPr>
-              <a:t>Who · What · How · Why</a:t>
-            </a:r>
-          </a:p>
-        </p:txBody>
-      </p:sp>
-      <p:graphicFrame>
-        <p:nvGraphicFramePr>
-          <p:cNvPr id="6" name="Table 5"/>
-          <p:cNvGraphicFramePr>
-            <a:graphicFrameLocks noGrp="1"/>
-          </p:cNvGraphicFramePr>
-          <p:nvPr/>
-        </p:nvGraphicFramePr>
-        <p:xfrm>
-          <a:off x="640080" y="1828800"/>
-          <a:ext cx="10972800" cy="4297680"/>
-        </p:xfrm>
-        <a:graphic>
-          <a:graphicData uri="http://schemas.openxmlformats.org/drawingml/2006/table">
-            <a:tbl>
-              <a:tblPr firstRow="1" bandRow="1">
-                <a:tableStyleId>{5C22544A-7EE6-4342-B048-85BDC9FD1C3A}</a:tableStyleId>
-              </a:tblPr>
-              <a:tblGrid>
-                <a:gridCol w="1280160"/>
-                <a:gridCol w="4572000"/>
-                <a:gridCol w="5120640"/>
-              </a:tblGrid>
-              <a:tr h="859536">
-                <a:tc>
-                  <a:txBody>
-                    <a:bodyPr/>
-                    <a:lstStyle/>
-                    <a:p>
-                      <a:r>
-                        <a:rPr sz="1200">
-                          <a:solidFill>
-                            <a:srgbClr val="C9933A"/>
-                          </a:solidFill>
-                          <a:latin typeface="DM Sans"/>
-                        </a:rPr>
-                        <a:t>Dimension</a:t>
-                      </a:r>
-                    </a:p>
-                  </a:txBody>
-                  <a:tcPr>
-                    <a:solidFill>
-                      <a:srgbClr val="17191D"/>
-                    </a:solidFill>
-                  </a:tcPr>
-                </a:tc>
-                <a:tc>
-                  <a:txBody>
-                    <a:bodyPr/>
-                    <a:lstStyle/>
-                    <a:p>
-                      <a:r>
-                        <a:rPr sz="1200">
-                          <a:solidFill>
-                            <a:srgbClr val="C9933A"/>
-                          </a:solidFill>
-                          <a:latin typeface="DM Sans"/>
-                        </a:rPr>
-                        <a:t>Definition</a:t>
-                      </a:r>
-                    </a:p>
-                  </a:txBody>
-                  <a:tcPr>
-                    <a:solidFill>
-                      <a:srgbClr val="17191D"/>
-                    </a:solidFill>
-                  </a:tcPr>
-                </a:tc>
-                <a:tc>
-                  <a:txBody>
-                    <a:bodyPr/>
-                    <a:lstStyle/>
-                    <a:p>
-                      <a:r>
-                        <a:rPr sz="1200">
-                          <a:solidFill>
-                            <a:srgbClr val="C9933A"/>
-                          </a:solidFill>
-                          <a:latin typeface="DM Sans"/>
-                        </a:rPr>
-                        <a:t>Why it matters</a:t>
-                      </a:r>
-                    </a:p>
-                  </a:txBody>
-                  <a:tcPr>
-                    <a:solidFill>
-                      <a:srgbClr val="17191D"/>
-                    </a:solidFill>
-                  </a:tcPr>
-                </a:tc>
-              </a:tr>
-              <a:tr h="859536">
-                <a:tc>
-                  <a:txBody>
-                    <a:bodyPr/>
-                    <a:lstStyle/>
-                    <a:p>
-                      <a:r>
-                        <a:rPr sz="1100">
-                          <a:solidFill>
-                            <a:srgbClr val="E9E9EA"/>
-                          </a:solidFill>
-                          <a:latin typeface="DM Sans"/>
-                        </a:rPr>
-                        <a:t>Who</a:t>
-                      </a:r>
-                    </a:p>
-                  </a:txBody>
-                  <a:tcPr>
-                    <a:solidFill>
-                      <a:srgbClr val="0E0F11"/>
-                    </a:solidFill>
-                  </a:tcPr>
-                </a:tc>
-                <a:tc>
-                  <a:txBody>
-                    <a:bodyPr/>
-                    <a:lstStyle/>
-                    <a:p>
-                      <a:r>
-                        <a:rPr sz="1100">
-                          <a:solidFill>
-                            <a:srgbClr val="E9E9EA"/>
-                          </a:solidFill>
-                          <a:latin typeface="DM Sans"/>
-                        </a:rPr>
-                        <a:t>For everyone building composure as a trainable daily skill.</a:t>
-                      </a:r>
-                    </a:p>
-                  </a:txBody>
-                  <a:tcPr>
-                    <a:solidFill>
-                      <a:srgbClr val="0E0F11"/>
-                    </a:solidFill>
-                  </a:tcPr>
-                </a:tc>
-                <a:tc>
-                  <a:txBody>
-                    <a:bodyPr/>
-                    <a:lstStyle/>
-                    <a:p>
-                      <a:r>
-                        <a:rPr sz="1100">
-                          <a:solidFill>
-                            <a:srgbClr val="E9E9EA"/>
-                          </a:solidFill>
-                          <a:latin typeface="DM Sans"/>
-                        </a:rPr>
-                        <a:t>Universal need, not niche framing.</a:t>
-                      </a:r>
-                    </a:p>
-                  </a:txBody>
-                  <a:tcPr>
-                    <a:solidFill>
-                      <a:srgbClr val="0E0F11"/>
-                    </a:solidFill>
-                  </a:tcPr>
-                </a:tc>
-              </a:tr>
-              <a:tr h="859536">
-                <a:tc>
-                  <a:txBody>
-                    <a:bodyPr/>
-                    <a:lstStyle/>
-                    <a:p>
-                      <a:r>
-                        <a:rPr sz="1100">
-                          <a:solidFill>
-                            <a:srgbClr val="E9E9EA"/>
-                          </a:solidFill>
-                          <a:latin typeface="DM Sans"/>
-                        </a:rPr>
-                        <a:t>What</a:t>
-                      </a:r>
-                    </a:p>
-                  </a:txBody>
-                  <a:tcPr>
-                    <a:solidFill>
-                      <a:srgbClr val="0E0F11"/>
-                    </a:solidFill>
-                  </a:tcPr>
-                </a:tc>
-                <a:tc>
-                  <a:txBody>
-                    <a:bodyPr/>
-                    <a:lstStyle/>
-                    <a:p>
-                      <a:r>
-                        <a:rPr sz="1100">
-                          <a:solidFill>
-                            <a:srgbClr val="E9E9EA"/>
-                          </a:solidFill>
-                          <a:latin typeface="DM Sans"/>
-                        </a:rPr>
-                        <a:t>A neuroscience-guided preventive risk management system for behavior.</a:t>
-                      </a:r>
-                    </a:p>
-                  </a:txBody>
-                  <a:tcPr>
-                    <a:solidFill>
-                      <a:srgbClr val="0E0F11"/>
-                    </a:solidFill>
-                  </a:tcPr>
-                </a:tc>
-                <a:tc>
-                  <a:txBody>
-                    <a:bodyPr/>
-                    <a:lstStyle/>
-                    <a:p>
-                      <a:r>
-                        <a:rPr sz="1100">
-                          <a:solidFill>
-                            <a:srgbClr val="E9E9EA"/>
-                          </a:solidFill>
-                          <a:latin typeface="DM Sans"/>
-                        </a:rPr>
-                        <a:t>Reduces avoidable human damage before it compounds.</a:t>
-                      </a:r>
-                    </a:p>
-                  </a:txBody>
-                  <a:tcPr>
-                    <a:solidFill>
-                      <a:srgbClr val="0E0F11"/>
-                    </a:solidFill>
-                  </a:tcPr>
-                </a:tc>
-              </a:tr>
-              <a:tr h="859536">
-                <a:tc>
-                  <a:txBody>
-                    <a:bodyPr/>
-                    <a:lstStyle/>
-                    <a:p>
-                      <a:r>
-                        <a:rPr sz="1100">
-                          <a:solidFill>
-                            <a:srgbClr val="E9E9EA"/>
-                          </a:solidFill>
-                          <a:latin typeface="DM Sans"/>
-                        </a:rPr>
-                        <a:t>How</a:t>
-                      </a:r>
-                    </a:p>
-                  </a:txBody>
-                  <a:tcPr>
-                    <a:solidFill>
-                      <a:srgbClr val="0E0F11"/>
-                    </a:solidFill>
-                  </a:tcPr>
-                </a:tc>
-                <a:tc>
-                  <a:txBody>
-                    <a:bodyPr/>
-                    <a:lstStyle/>
-                    <a:p>
-                      <a:r>
-                        <a:rPr sz="1100">
-                          <a:solidFill>
-                            <a:srgbClr val="E9E9EA"/>
-                          </a:solidFill>
-                          <a:latin typeface="DM Sans"/>
-                        </a:rPr>
-                        <a:t>Detect state -&gt; route intervention -&gt; transfer to action -&gt; close loop -&gt; learn patterns.</a:t>
-                      </a:r>
-                    </a:p>
-                  </a:txBody>
-                  <a:tcPr>
-                    <a:solidFill>
-                      <a:srgbClr val="0E0F11"/>
-                    </a:solidFill>
-                  </a:tcPr>
-                </a:tc>
-                <a:tc>
-                  <a:txBody>
-                    <a:bodyPr/>
-                    <a:lstStyle/>
-                    <a:p>
-                      <a:r>
-                        <a:rPr sz="1100">
-                          <a:solidFill>
-                            <a:srgbClr val="E9E9EA"/>
-                          </a:solidFill>
-                          <a:latin typeface="DM Sans"/>
-                        </a:rPr>
-                        <a:t>Mechanism-driven, not content-driven.</a:t>
-                      </a:r>
-                    </a:p>
-                  </a:txBody>
-                  <a:tcPr>
-                    <a:solidFill>
-                      <a:srgbClr val="0E0F11"/>
-                    </a:solidFill>
-                  </a:tcPr>
-                </a:tc>
-              </a:tr>
-              <a:tr h="859536">
-                <a:tc>
-                  <a:txBody>
-                    <a:bodyPr/>
-                    <a:lstStyle/>
-                    <a:p>
-                      <a:r>
-                        <a:rPr sz="1100">
-                          <a:solidFill>
-                            <a:srgbClr val="E9E9EA"/>
-                          </a:solidFill>
-                          <a:latin typeface="DM Sans"/>
-                        </a:rPr>
-                        <a:t>Why</a:t>
-                      </a:r>
-                    </a:p>
-                  </a:txBody>
-                  <a:tcPr>
-                    <a:solidFill>
-                      <a:srgbClr val="0E0F11"/>
-                    </a:solidFill>
-                  </a:tcPr>
-                </a:tc>
-                <a:tc>
-                  <a:txBody>
-                    <a:bodyPr/>
-                    <a:lstStyle/>
-                    <a:p>
-                      <a:r>
-                        <a:rPr sz="1100">
-                          <a:solidFill>
-                            <a:srgbClr val="E9E9EA"/>
-                          </a:solidFill>
-                          <a:latin typeface="DM Sans"/>
-                        </a:rPr>
-                        <a:t>Unregulated state degrades judgment, communication, and relationships.</a:t>
-                      </a:r>
-                    </a:p>
-                  </a:txBody>
-                  <a:tcPr>
-                    <a:solidFill>
-                      <a:srgbClr val="0E0F11"/>
-                    </a:solidFill>
-                  </a:tcPr>
-                </a:tc>
-                <a:tc>
-                  <a:txBody>
-                    <a:bodyPr/>
-                    <a:lstStyle/>
-                    <a:p>
-                      <a:r>
-                        <a:rPr sz="1100">
-                          <a:solidFill>
-                            <a:srgbClr val="E9E9EA"/>
-                          </a:solidFill>
-                          <a:latin typeface="DM Sans"/>
-                        </a:rPr>
-                        <a:t>Lower errors, cleaner decisions, better outcomes.</a:t>
-                      </a:r>
-                    </a:p>
-                  </a:txBody>
-                  <a:tcPr>
-                    <a:solidFill>
-                      <a:srgbClr val="0E0F11"/>
-                    </a:solidFill>
-                  </a:tcPr>
-                </a:tc>
-              </a:tr>
-            </a:tbl>
-          </a:graphicData>
-        </a:graphic>
-      </p:graphicFrame>
+              <a:t>SECTION BREAK</a:t>
+            </a:r>
+          </a:p>
+        </p:txBody>
+      </p:sp>
+      <p:sp>
+        <p:nvSpPr>
+          <p:cNvPr id="7" name="Rounded Rectangle 6"/>
+          <p:cNvSpPr/>
+          <p:nvPr/>
+        </p:nvSpPr>
+        <p:spPr>
+          <a:xfrm>
+            <a:off x="868680" y="2103120"/>
+            <a:ext cx="10378440" cy="3154680"/>
+          </a:xfrm>
+          <a:prstGeom prst="roundRect">
+            <a:avLst/>
+          </a:prstGeom>
+          <a:solidFill>
+            <a:srgbClr val="17191D"/>
+          </a:solidFill>
+          <a:ln w="15240">
+            <a:solidFill>
+              <a:srgbClr val="353840"/>
+            </a:solidFill>
+          </a:ln>
+        </p:spPr>
+        <p:style>
+          <a:lnRef idx="1">
+            <a:schemeClr val="accent1"/>
+          </a:lnRef>
+          <a:fillRef idx="3">
+            <a:schemeClr val="accent1"/>
+          </a:fillRef>
+          <a:effectRef idx="2">
+            <a:schemeClr val="accent1"/>
+          </a:effectRef>
+          <a:fontRef idx="minor">
+            <a:schemeClr val="lt1"/>
+          </a:fontRef>
+        </p:style>
+        <p:txBody>
+          <a:bodyPr rtlCol="0" anchor="ctr"/>
+          <a:lstStyle/>
+          <a:p>
+            <a:pPr algn="ctr"/>
+          </a:p>
+        </p:txBody>
+      </p:sp>
+      <p:sp>
+        <p:nvSpPr>
+          <p:cNvPr id="8" name="Rectangle 7"/>
+          <p:cNvSpPr/>
+          <p:nvPr/>
+        </p:nvSpPr>
+        <p:spPr>
+          <a:xfrm>
+            <a:off x="868680" y="2103120"/>
+            <a:ext cx="146304" cy="3154680"/>
+          </a:xfrm>
+          <a:prstGeom prst="rect">
+            <a:avLst/>
+          </a:prstGeom>
+          <a:solidFill>
+            <a:srgbClr val="C9933A"/>
+          </a:solidFill>
+          <a:ln>
+            <a:noFill/>
+          </a:ln>
+        </p:spPr>
+        <p:style>
+          <a:lnRef idx="1">
+            <a:schemeClr val="accent1"/>
+          </a:lnRef>
+          <a:fillRef idx="3">
+            <a:schemeClr val="accent1"/>
+          </a:fillRef>
+          <a:effectRef idx="2">
+            <a:schemeClr val="accent1"/>
+          </a:effectRef>
+          <a:fontRef idx="minor">
+            <a:schemeClr val="lt1"/>
+          </a:fontRef>
+        </p:style>
+        <p:txBody>
+          <a:bodyPr rtlCol="0" anchor="ctr"/>
+          <a:lstStyle/>
+          <a:p>
+            <a:pPr algn="ctr"/>
+          </a:p>
+        </p:txBody>
+      </p:sp>
+      <p:sp>
+        <p:nvSpPr>
+          <p:cNvPr id="9" name="TextBox 8"/>
+          <p:cNvSpPr txBox="1"/>
+          <p:nvPr/>
+        </p:nvSpPr>
+        <p:spPr>
+          <a:xfrm>
+            <a:off x="1234440" y="2743200"/>
+            <a:ext cx="9326880" cy="1828800"/>
+          </a:xfrm>
+          <a:prstGeom prst="rect">
+            <a:avLst/>
+          </a:prstGeom>
+          <a:noFill/>
+        </p:spPr>
+        <p:txBody>
+          <a:bodyPr wrap="none">
+            <a:spAutoFit/>
+          </a:bodyPr>
+          <a:lstStyle/>
+          <a:p>
+            <a:pPr algn="l"/>
+            <a:r>
+              <a:rPr sz="2600">
+                <a:solidFill>
+                  <a:srgbClr val="E9E9EA"/>
+                </a:solidFill>
+                <a:latin typeface="DM Sans"/>
+              </a:rPr>
+              <a:t>Who / What / How / Why with zero category drift.</a:t>
+            </a:r>
+          </a:p>
+        </p:txBody>
+      </p:sp>
     </p:spTree>
   </p:cSld>
   <p:clrMapOvr>
@@ -4128,54 +6470,20 @@
       <p:grpSpPr/>
       <p:sp>
         <p:nvSpPr>
-          <p:cNvPr id="2" name="TextBox 1"/>
-          <p:cNvSpPr txBox="1"/>
-          <p:nvPr/>
-        </p:nvSpPr>
-        <p:spPr>
-          <a:xfrm>
-            <a:off x="640080" y="320040"/>
-            <a:ext cx="5669280" cy="320040"/>
-          </a:xfrm>
-          <a:prstGeom prst="rect">
-            <a:avLst/>
-          </a:prstGeom>
-          <a:noFill/>
-        </p:spPr>
-        <p:txBody>
-          <a:bodyPr wrap="none">
-            <a:spAutoFit/>
-          </a:bodyPr>
-          <a:lstStyle/>
-          <a:p>
-            <a:r>
-              <a:rPr sz="1100">
-                <a:solidFill>
-                  <a:srgbClr val="C9933A"/>
-                </a:solidFill>
-                <a:latin typeface="IBM Plex Mono"/>
-              </a:rPr>
-              <a:t>STILLFORM · STRATEGIC DECK</a:t>
-            </a:r>
-          </a:p>
-        </p:txBody>
-      </p:sp>
-      <p:sp>
-        <p:nvSpPr>
-          <p:cNvPr id="3" name="Rectangle 2"/>
+          <p:cNvPr id="2" name="Rectangle 1"/>
           <p:cNvSpPr/>
           <p:nvPr/>
         </p:nvSpPr>
         <p:spPr>
           <a:xfrm>
-            <a:off x="640080" y="640080"/>
-            <a:ext cx="10972800" cy="9144"/>
+            <a:off x="0" y="0"/>
+            <a:ext cx="12191695" cy="320040"/>
           </a:xfrm>
           <a:prstGeom prst="rect">
             <a:avLst/>
           </a:prstGeom>
           <a:solidFill>
-            <a:srgbClr val="32343A"/>
+            <a:srgbClr val="17191D"/>
           </a:solidFill>
           <a:ln>
             <a:noFill/>
@@ -4205,14 +6513,14 @@
       </p:sp>
       <p:sp>
         <p:nvSpPr>
-          <p:cNvPr id="4" name="TextBox 3"/>
+          <p:cNvPr id="3" name="TextBox 2"/>
           <p:cNvSpPr txBox="1"/>
           <p:nvPr/>
         </p:nvSpPr>
         <p:spPr>
           <a:xfrm>
-            <a:off x="640080" y="868680"/>
-            <a:ext cx="10789920" cy="1097280"/>
+            <a:off x="502920" y="109728"/>
+            <a:ext cx="5029200" cy="182880"/>
           </a:xfrm>
           <a:prstGeom prst="rect">
             <a:avLst/>
@@ -4226,27 +6534,27 @@
           <a:lstStyle/>
           <a:p>
             <a:r>
-              <a:rPr sz="3800">
+              <a:rPr sz="900">
                 <a:solidFill>
                   <a:srgbClr val="C9933A"/>
                 </a:solidFill>
-                <a:latin typeface="Cormorant Garamond"/>
+                <a:latin typeface="IBM Plex Mono"/>
               </a:rPr>
-              <a:t>Mechanics + neuroscience map</a:t>
-            </a:r>
-          </a:p>
-        </p:txBody>
-      </p:sp>
-      <p:sp>
-        <p:nvSpPr>
-          <p:cNvPr id="5" name="TextBox 4"/>
+              <a:t>STILLFORM · STRATEGIC DECK</a:t>
+            </a:r>
+          </a:p>
+        </p:txBody>
+      </p:sp>
+      <p:sp>
+        <p:nvSpPr>
+          <p:cNvPr id="4" name="TextBox 3"/>
           <p:cNvSpPr txBox="1"/>
           <p:nvPr/>
         </p:nvSpPr>
         <p:spPr>
           <a:xfrm>
-            <a:off x="658368" y="1737360"/>
-            <a:ext cx="10332720" cy="502920"/>
+            <a:off x="10332720" y="109728"/>
+            <a:ext cx="1371600" cy="182880"/>
           </a:xfrm>
           <a:prstGeom prst="rect">
             <a:avLst/>
@@ -4259,29 +6567,98 @@
           </a:bodyPr>
           <a:lstStyle/>
           <a:p>
+            <a:pPr algn="r"/>
+            <a:r>
+              <a:rPr sz="900">
+                <a:solidFill>
+                  <a:srgbClr val="A5A8B0"/>
+                </a:solidFill>
+                <a:latin typeface="IBM Plex Mono"/>
+              </a:rPr>
+              <a:t>03 / 15</a:t>
+            </a:r>
+          </a:p>
+        </p:txBody>
+      </p:sp>
+      <p:sp>
+        <p:nvSpPr>
+          <p:cNvPr id="5" name="TextBox 4"/>
+          <p:cNvSpPr txBox="1"/>
+          <p:nvPr/>
+        </p:nvSpPr>
+        <p:spPr>
+          <a:xfrm>
+            <a:off x="640080" y="640080"/>
+            <a:ext cx="10972800" cy="1097280"/>
+          </a:xfrm>
+          <a:prstGeom prst="rect">
+            <a:avLst/>
+          </a:prstGeom>
+          <a:noFill/>
+        </p:spPr>
+        <p:txBody>
+          <a:bodyPr wrap="none">
+            <a:spAutoFit/>
+          </a:bodyPr>
+          <a:lstStyle/>
+          <a:p>
+            <a:r>
+              <a:rPr sz="4000">
+                <a:solidFill>
+                  <a:srgbClr val="C9933A"/>
+                </a:solidFill>
+                <a:latin typeface="Cormorant Garamond"/>
+              </a:rPr>
+              <a:t>Operating definition</a:t>
+            </a:r>
+          </a:p>
+        </p:txBody>
+      </p:sp>
+      <p:sp>
+        <p:nvSpPr>
+          <p:cNvPr id="6" name="TextBox 5"/>
+          <p:cNvSpPr txBox="1"/>
+          <p:nvPr/>
+        </p:nvSpPr>
+        <p:spPr>
+          <a:xfrm>
+            <a:off x="667512" y="1508760"/>
+            <a:ext cx="10789920" cy="411480"/>
+          </a:xfrm>
+          <a:prstGeom prst="rect">
+            <a:avLst/>
+          </a:prstGeom>
+          <a:noFill/>
+        </p:spPr>
+        <p:txBody>
+          <a:bodyPr wrap="none">
+            <a:spAutoFit/>
+          </a:bodyPr>
+          <a:lstStyle/>
+          <a:p>
             <a:r>
               <a:rPr sz="1600">
                 <a:solidFill>
-                  <a:srgbClr val="A0A2A8"/>
+                  <a:srgbClr val="A5A8B0"/>
                 </a:solidFill>
                 <a:latin typeface="DM Sans"/>
               </a:rPr>
-              <a:t>Science -&gt; product implementation -&gt; measured signal</a:t>
+              <a:t>Core framing constraints</a:t>
             </a:r>
           </a:p>
         </p:txBody>
       </p:sp>
       <p:graphicFrame>
         <p:nvGraphicFramePr>
-          <p:cNvPr id="6" name="Table 5"/>
+          <p:cNvPr id="7" name="Table 6"/>
           <p:cNvGraphicFramePr>
             <a:graphicFrameLocks noGrp="1"/>
           </p:cNvGraphicFramePr>
           <p:nvPr/>
         </p:nvGraphicFramePr>
         <p:xfrm>
-          <a:off x="502920" y="1783080"/>
-          <a:ext cx="11201400" cy="4572000"/>
+          <a:off x="640080" y="1828800"/>
+          <a:ext cx="10972800" cy="4526280"/>
         </p:xfrm>
         <a:graphic>
           <a:graphicData uri="http://schemas.openxmlformats.org/drawingml/2006/table">
@@ -4290,12 +6667,11 @@
                 <a:tableStyleId>{5C22544A-7EE6-4342-B048-85BDC9FD1C3A}</a:tableStyleId>
               </a:tblPr>
               <a:tblGrid>
-                <a:gridCol w="1737360"/>
-                <a:gridCol w="2834640"/>
-                <a:gridCol w="3200400"/>
-                <a:gridCol w="3429000"/>
+                <a:gridCol w="1417320"/>
+                <a:gridCol w="4709160"/>
+                <a:gridCol w="4846320"/>
               </a:tblGrid>
-              <a:tr h="762000">
+              <a:tr h="905256">
                 <a:tc>
                   <a:txBody>
                     <a:bodyPr/>
@@ -4308,11 +6684,11 @@
                           </a:solidFill>
                           <a:latin typeface="DM Sans"/>
                         </a:rPr>
-                        <a:t>Mechanic</a:t>
+                        <a:t>Dimension</a:t>
                       </a:r>
                     </a:p>
                   </a:txBody>
-                  <a:tcPr>
+                  <a:tcPr marL="64008" marR="64008" marT="36576" marB="36576">
                     <a:solidFill>
                       <a:srgbClr val="17191D"/>
                     </a:solidFill>
@@ -4330,11 +6706,11 @@
                           </a:solidFill>
                           <a:latin typeface="DM Sans"/>
                         </a:rPr>
-                        <a:t>Scientific basis</a:t>
+                        <a:t>Definition</a:t>
                       </a:r>
                     </a:p>
                   </a:txBody>
-                  <a:tcPr>
+                  <a:tcPr marL="64008" marR="64008" marT="36576" marB="36576">
                     <a:solidFill>
                       <a:srgbClr val="17191D"/>
                     </a:solidFill>
@@ -4352,40 +6728,18 @@
                           </a:solidFill>
                           <a:latin typeface="DM Sans"/>
                         </a:rPr>
-                        <a:t>Product implementation</a:t>
+                        <a:t>Why it matters</a:t>
                       </a:r>
                     </a:p>
                   </a:txBody>
-                  <a:tcPr>
-                    <a:solidFill>
-                      <a:srgbClr val="17191D"/>
-                    </a:solidFill>
-                  </a:tcPr>
-                </a:tc>
-                <a:tc>
-                  <a:txBody>
-                    <a:bodyPr/>
-                    <a:lstStyle/>
-                    <a:p>
-                      <a:r>
-                        <a:rPr sz="1200">
-                          <a:solidFill>
-                            <a:srgbClr val="C9933A"/>
-                          </a:solidFill>
-                          <a:latin typeface="DM Sans"/>
-                        </a:rPr>
-                        <a:t>Measured signal</a:t>
-                      </a:r>
-                    </a:p>
-                  </a:txBody>
-                  <a:tcPr>
+                  <a:tcPr marL="64008" marR="64008" marT="36576" marB="36576">
                     <a:solidFill>
                       <a:srgbClr val="17191D"/>
                     </a:solidFill>
                   </a:tcPr>
                 </a:tc>
               </a:tr>
-              <a:tr h="762000">
+              <a:tr h="905256">
                 <a:tc>
                   <a:txBody>
                     <a:bodyPr/>
@@ -4394,15 +6748,15 @@
                       <a:r>
                         <a:rPr sz="1100">
                           <a:solidFill>
-                            <a:srgbClr val="E9E9EA"/>
+                            <a:srgbClr val="C4C6CC"/>
                           </a:solidFill>
                           <a:latin typeface="DM Sans"/>
                         </a:rPr>
-                        <a:t>Affect labeling</a:t>
+                        <a:t>Who</a:t>
                       </a:r>
                     </a:p>
                   </a:txBody>
-                  <a:tcPr>
+                  <a:tcPr marL="64008" marR="64008" marT="36576" marB="36576">
                     <a:solidFill>
                       <a:srgbClr val="0E0F11"/>
                     </a:solidFill>
@@ -4416,15 +6770,15 @@
                       <a:r>
                         <a:rPr sz="1100">
                           <a:solidFill>
-                            <a:srgbClr val="E9E9EA"/>
+                            <a:srgbClr val="C4C6CC"/>
                           </a:solidFill>
                           <a:latin typeface="DM Sans"/>
                         </a:rPr>
-                        <a:t>Lieberman et al. (2007)</a:t>
+                        <a:t>Everyone building composure as a trainable daily capability.</a:t>
                       </a:r>
                     </a:p>
                   </a:txBody>
-                  <a:tcPr>
+                  <a:tcPr marL="64008" marR="64008" marT="36576" marB="36576">
                     <a:solidFill>
                       <a:srgbClr val="0E0F11"/>
                     </a:solidFill>
@@ -4438,15 +6792,107 @@
                       <a:r>
                         <a:rPr sz="1100">
                           <a:solidFill>
-                            <a:srgbClr val="E9E9EA"/>
+                            <a:srgbClr val="C4C6CC"/>
                           </a:solidFill>
                           <a:latin typeface="DM Sans"/>
                         </a:rPr>
-                        <a:t>Pulse chips + post-session labeling</a:t>
+                        <a:t>Universal requirement, not niche positioning.</a:t>
                       </a:r>
                     </a:p>
                   </a:txBody>
-                  <a:tcPr>
+                  <a:tcPr marL="64008" marR="64008" marT="36576" marB="36576">
+                    <a:solidFill>
+                      <a:srgbClr val="0E0F11"/>
+                    </a:solidFill>
+                  </a:tcPr>
+                </a:tc>
+              </a:tr>
+              <a:tr h="905256">
+                <a:tc>
+                  <a:txBody>
+                    <a:bodyPr/>
+                    <a:lstStyle/>
+                    <a:p>
+                      <a:r>
+                        <a:rPr sz="1100">
+                          <a:solidFill>
+                            <a:srgbClr val="C4C6CC"/>
+                          </a:solidFill>
+                          <a:latin typeface="DM Sans"/>
+                        </a:rPr>
+                        <a:t>What</a:t>
+                      </a:r>
+                    </a:p>
+                  </a:txBody>
+                  <a:tcPr marL="64008" marR="64008" marT="36576" marB="36576">
+                    <a:solidFill>
+                      <a:srgbClr val="1F2228"/>
+                    </a:solidFill>
+                  </a:tcPr>
+                </a:tc>
+                <a:tc>
+                  <a:txBody>
+                    <a:bodyPr/>
+                    <a:lstStyle/>
+                    <a:p>
+                      <a:r>
+                        <a:rPr sz="1100">
+                          <a:solidFill>
+                            <a:srgbClr val="C4C6CC"/>
+                          </a:solidFill>
+                          <a:latin typeface="DM Sans"/>
+                        </a:rPr>
+                        <a:t>A neuroscience-guided preventive risk management system for behavior.</a:t>
+                      </a:r>
+                    </a:p>
+                  </a:txBody>
+                  <a:tcPr marL="64008" marR="64008" marT="36576" marB="36576">
+                    <a:solidFill>
+                      <a:srgbClr val="1F2228"/>
+                    </a:solidFill>
+                  </a:tcPr>
+                </a:tc>
+                <a:tc>
+                  <a:txBody>
+                    <a:bodyPr/>
+                    <a:lstStyle/>
+                    <a:p>
+                      <a:r>
+                        <a:rPr sz="1100">
+                          <a:solidFill>
+                            <a:srgbClr val="C4C6CC"/>
+                          </a:solidFill>
+                          <a:latin typeface="DM Sans"/>
+                        </a:rPr>
+                        <a:t>Reduces avoidable damage before it compounds.</a:t>
+                      </a:r>
+                    </a:p>
+                  </a:txBody>
+                  <a:tcPr marL="64008" marR="64008" marT="36576" marB="36576">
+                    <a:solidFill>
+                      <a:srgbClr val="1F2228"/>
+                    </a:solidFill>
+                  </a:tcPr>
+                </a:tc>
+              </a:tr>
+              <a:tr h="905256">
+                <a:tc>
+                  <a:txBody>
+                    <a:bodyPr/>
+                    <a:lstStyle/>
+                    <a:p>
+                      <a:r>
+                        <a:rPr sz="1100">
+                          <a:solidFill>
+                            <a:srgbClr val="C4C6CC"/>
+                          </a:solidFill>
+                          <a:latin typeface="DM Sans"/>
+                        </a:rPr>
+                        <a:t>How</a:t>
+                      </a:r>
+                    </a:p>
+                  </a:txBody>
+                  <a:tcPr marL="64008" marR="64008" marT="36576" marB="36576">
                     <a:solidFill>
                       <a:srgbClr val="0E0F11"/>
                     </a:solidFill>
@@ -4460,39 +6906,15 @@
                       <a:r>
                         <a:rPr sz="1100">
                           <a:solidFill>
-                            <a:srgbClr val="E9E9EA"/>
+                            <a:srgbClr val="C4C6CC"/>
                           </a:solidFill>
                           <a:latin typeface="DM Sans"/>
                         </a:rPr>
-                        <a:t>State precision + shift trends</a:t>
+                        <a:t>Detect state -&gt; route intervention -&gt; transfer action -&gt; close daily loop -&gt; learn patterns.</a:t>
                       </a:r>
                     </a:p>
                   </a:txBody>
-                  <a:tcPr>
-                    <a:solidFill>
-                      <a:srgbClr val="0E0F11"/>
-                    </a:solidFill>
-                  </a:tcPr>
-                </a:tc>
-              </a:tr>
-              <a:tr h="762000">
-                <a:tc>
-                  <a:txBody>
-                    <a:bodyPr/>
-                    <a:lstStyle/>
-                    <a:p>
-                      <a:r>
-                        <a:rPr sz="1100">
-                          <a:solidFill>
-                            <a:srgbClr val="E9E9EA"/>
-                          </a:solidFill>
-                          <a:latin typeface="DM Sans"/>
-                        </a:rPr>
-                        <a:t>Cognitive reappraisal</a:t>
-                      </a:r>
-                    </a:p>
-                  </a:txBody>
-                  <a:tcPr>
+                  <a:tcPr marL="64008" marR="64008" marT="36576" marB="36576">
                     <a:solidFill>
                       <a:srgbClr val="0E0F11"/>
                     </a:solidFill>
@@ -4506,17 +6928,41 @@
                       <a:r>
                         <a:rPr sz="1100">
                           <a:solidFill>
-                            <a:srgbClr val="E9E9EA"/>
+                            <a:srgbClr val="C4C6CC"/>
                           </a:solidFill>
                           <a:latin typeface="DM Sans"/>
                         </a:rPr>
-                        <a:t>Ochsner &amp; Gross; Buhle et al.</a:t>
+                        <a:t>Mechanism-driven architecture, not inspirational content.</a:t>
                       </a:r>
                     </a:p>
                   </a:txBody>
-                  <a:tcPr>
+                  <a:tcPr marL="64008" marR="64008" marT="36576" marB="36576">
                     <a:solidFill>
                       <a:srgbClr val="0E0F11"/>
+                    </a:solidFill>
+                  </a:tcPr>
+                </a:tc>
+              </a:tr>
+              <a:tr h="905256">
+                <a:tc>
+                  <a:txBody>
+                    <a:bodyPr/>
+                    <a:lstStyle/>
+                    <a:p>
+                      <a:r>
+                        <a:rPr sz="1100">
+                          <a:solidFill>
+                            <a:srgbClr val="C4C6CC"/>
+                          </a:solidFill>
+                          <a:latin typeface="DM Sans"/>
+                        </a:rPr>
+                        <a:t>Why</a:t>
+                      </a:r>
+                    </a:p>
+                  </a:txBody>
+                  <a:tcPr marL="64008" marR="64008" marT="36576" marB="36576">
+                    <a:solidFill>
+                      <a:srgbClr val="1F2228"/>
                     </a:solidFill>
                   </a:tcPr>
                 </a:tc>
@@ -4528,17 +6974,17 @@
                       <a:r>
                         <a:rPr sz="1100">
                           <a:solidFill>
-                            <a:srgbClr val="E9E9EA"/>
+                            <a:srgbClr val="C4C6CC"/>
                           </a:solidFill>
                           <a:latin typeface="DM Sans"/>
                         </a:rPr>
-                        <a:t>Reframe structured perspective work</a:t>
+                        <a:t>Unregulated state degrades judgment, communication, and relationships.</a:t>
                       </a:r>
                     </a:p>
                   </a:txBody>
-                  <a:tcPr>
+                  <a:tcPr marL="64008" marR="64008" marT="36576" marB="36576">
                     <a:solidFill>
-                      <a:srgbClr val="0E0F11"/>
+                      <a:srgbClr val="1F2228"/>
                     </a:solidFill>
                   </a:tcPr>
                 </a:tc>
@@ -4550,287 +6996,17 @@
                       <a:r>
                         <a:rPr sz="1100">
                           <a:solidFill>
-                            <a:srgbClr val="E9E9EA"/>
+                            <a:srgbClr val="C4C6CC"/>
                           </a:solidFill>
                           <a:latin typeface="DM Sans"/>
                         </a:rPr>
-                        <a:t>Pre/post composure delta</a:t>
+                        <a:t>Cleaner decisions and lower downstream relational/operational cost.</a:t>
                       </a:r>
                     </a:p>
                   </a:txBody>
-                  <a:tcPr>
+                  <a:tcPr marL="64008" marR="64008" marT="36576" marB="36576">
                     <a:solidFill>
-                      <a:srgbClr val="0E0F11"/>
-                    </a:solidFill>
-                  </a:tcPr>
-                </a:tc>
-              </a:tr>
-              <a:tr h="762000">
-                <a:tc>
-                  <a:txBody>
-                    <a:bodyPr/>
-                    <a:lstStyle/>
-                    <a:p>
-                      <a:r>
-                        <a:rPr sz="1100">
-                          <a:solidFill>
-                            <a:srgbClr val="E9E9EA"/>
-                          </a:solidFill>
-                          <a:latin typeface="DM Sans"/>
-                        </a:rPr>
-                        <a:t>Interoceptive regulation</a:t>
-                      </a:r>
-                    </a:p>
-                  </a:txBody>
-                  <a:tcPr>
-                    <a:solidFill>
-                      <a:srgbClr val="0E0F11"/>
-                    </a:solidFill>
-                  </a:tcPr>
-                </a:tc>
-                <a:tc>
-                  <a:txBody>
-                    <a:bodyPr/>
-                    <a:lstStyle/>
-                    <a:p>
-                      <a:r>
-                        <a:rPr sz="1100">
-                          <a:solidFill>
-                            <a:srgbClr val="E9E9EA"/>
-                          </a:solidFill>
-                          <a:latin typeface="DM Sans"/>
-                        </a:rPr>
-                        <a:t>Mehling; Critchley &amp; Garfinkel</a:t>
-                      </a:r>
-                    </a:p>
-                  </a:txBody>
-                  <a:tcPr>
-                    <a:solidFill>
-                      <a:srgbClr val="0E0F11"/>
-                    </a:solidFill>
-                  </a:tcPr>
-                </a:tc>
-                <a:tc>
-                  <a:txBody>
-                    <a:bodyPr/>
-                    <a:lstStyle/>
-                    <a:p>
-                      <a:r>
-                        <a:rPr sz="1100">
-                          <a:solidFill>
-                            <a:srgbClr val="E9E9EA"/>
-                          </a:solidFill>
-                          <a:latin typeface="DM Sans"/>
-                        </a:rPr>
-                        <a:t>Bio-filter + body scan + somatic prompts</a:t>
-                      </a:r>
-                    </a:p>
-                  </a:txBody>
-                  <a:tcPr>
-                    <a:solidFill>
-                      <a:srgbClr val="0E0F11"/>
-                    </a:solidFill>
-                  </a:tcPr>
-                </a:tc>
-                <a:tc>
-                  <a:txBody>
-                    <a:bodyPr/>
-                    <a:lstStyle/>
-                    <a:p>
-                      <a:r>
-                        <a:rPr sz="1100">
-                          <a:solidFill>
-                            <a:srgbClr val="E9E9EA"/>
-                          </a:solidFill>
-                          <a:latin typeface="DM Sans"/>
-                        </a:rPr>
-                        <a:t>Faster recovery windows</a:t>
-                      </a:r>
-                    </a:p>
-                  </a:txBody>
-                  <a:tcPr>
-                    <a:solidFill>
-                      <a:srgbClr val="0E0F11"/>
-                    </a:solidFill>
-                  </a:tcPr>
-                </a:tc>
-              </a:tr>
-              <a:tr h="762000">
-                <a:tc>
-                  <a:txBody>
-                    <a:bodyPr/>
-                    <a:lstStyle/>
-                    <a:p>
-                      <a:r>
-                        <a:rPr sz="1100">
-                          <a:solidFill>
-                            <a:srgbClr val="E9E9EA"/>
-                          </a:solidFill>
-                          <a:latin typeface="DM Sans"/>
-                        </a:rPr>
-                        <a:t>Implementation intentions</a:t>
-                      </a:r>
-                    </a:p>
-                  </a:txBody>
-                  <a:tcPr>
-                    <a:solidFill>
-                      <a:srgbClr val="0E0F11"/>
-                    </a:solidFill>
-                  </a:tcPr>
-                </a:tc>
-                <a:tc>
-                  <a:txBody>
-                    <a:bodyPr/>
-                    <a:lstStyle/>
-                    <a:p>
-                      <a:r>
-                        <a:rPr sz="1100">
-                          <a:solidFill>
-                            <a:srgbClr val="E9E9EA"/>
-                          </a:solidFill>
-                          <a:latin typeface="DM Sans"/>
-                        </a:rPr>
-                        <a:t>Gollwitzer</a:t>
-                      </a:r>
-                    </a:p>
-                  </a:txBody>
-                  <a:tcPr>
-                    <a:solidFill>
-                      <a:srgbClr val="0E0F11"/>
-                    </a:solidFill>
-                  </a:tcPr>
-                </a:tc>
-                <a:tc>
-                  <a:txBody>
-                    <a:bodyPr/>
-                    <a:lstStyle/>
-                    <a:p>
-                      <a:r>
-                        <a:rPr sz="1100">
-                          <a:solidFill>
-                            <a:srgbClr val="E9E9EA"/>
-                          </a:solidFill>
-                          <a:latin typeface="DM Sans"/>
-                        </a:rPr>
-                        <a:t>Calibration -&gt; default routing</a:t>
-                      </a:r>
-                    </a:p>
-                  </a:txBody>
-                  <a:tcPr>
-                    <a:solidFill>
-                      <a:srgbClr val="0E0F11"/>
-                    </a:solidFill>
-                  </a:tcPr>
-                </a:tc>
-                <a:tc>
-                  <a:txBody>
-                    <a:bodyPr/>
-                    <a:lstStyle/>
-                    <a:p>
-                      <a:r>
-                        <a:rPr sz="1100">
-                          <a:solidFill>
-                            <a:srgbClr val="E9E9EA"/>
-                          </a:solidFill>
-                          <a:latin typeface="DM Sans"/>
-                        </a:rPr>
-                        <a:t>Action latency reduction</a:t>
-                      </a:r>
-                    </a:p>
-                  </a:txBody>
-                  <a:tcPr>
-                    <a:solidFill>
-                      <a:srgbClr val="0E0F11"/>
-                    </a:solidFill>
-                  </a:tcPr>
-                </a:tc>
-              </a:tr>
-              <a:tr h="762000">
-                <a:tc>
-                  <a:txBody>
-                    <a:bodyPr/>
-                    <a:lstStyle/>
-                    <a:p>
-                      <a:r>
-                        <a:rPr sz="1100">
-                          <a:solidFill>
-                            <a:srgbClr val="E9E9EA"/>
-                          </a:solidFill>
-                          <a:latin typeface="DM Sans"/>
-                        </a:rPr>
-                        <a:t>Stress inoculation</a:t>
-                      </a:r>
-                    </a:p>
-                  </a:txBody>
-                  <a:tcPr>
-                    <a:solidFill>
-                      <a:srgbClr val="0E0F11"/>
-                    </a:solidFill>
-                  </a:tcPr>
-                </a:tc>
-                <a:tc>
-                  <a:txBody>
-                    <a:bodyPr/>
-                    <a:lstStyle/>
-                    <a:p>
-                      <a:r>
-                        <a:rPr sz="1100">
-                          <a:solidFill>
-                            <a:srgbClr val="E9E9EA"/>
-                          </a:solidFill>
-                          <a:latin typeface="DM Sans"/>
-                        </a:rPr>
-                        <a:t>Meichenbaum</a:t>
-                      </a:r>
-                    </a:p>
-                  </a:txBody>
-                  <a:tcPr>
-                    <a:solidFill>
-                      <a:srgbClr val="0E0F11"/>
-                    </a:solidFill>
-                  </a:tcPr>
-                </a:tc>
-                <a:tc>
-                  <a:txBody>
-                    <a:bodyPr/>
-                    <a:lstStyle/>
-                    <a:p>
-                      <a:r>
-                        <a:rPr sz="1100">
-                          <a:solidFill>
-                            <a:srgbClr val="E9E9EA"/>
-                          </a:solidFill>
-                          <a:latin typeface="DM Sans"/>
-                        </a:rPr>
-                        <a:t>Morning baseline + EOD close loop</a:t>
-                      </a:r>
-                    </a:p>
-                  </a:txBody>
-                  <a:tcPr>
-                    <a:solidFill>
-                      <a:srgbClr val="0E0F11"/>
-                    </a:solidFill>
-                  </a:tcPr>
-                </a:tc>
-                <a:tc>
-                  <a:txBody>
-                    <a:bodyPr/>
-                    <a:lstStyle/>
-                    <a:p>
-                      <a:r>
-                        <a:rPr sz="1100">
-                          <a:solidFill>
-                            <a:srgbClr val="E9E9EA"/>
-                          </a:solidFill>
-                          <a:latin typeface="DM Sans"/>
-                        </a:rPr>
-                        <a:t>Loop adherence over time</a:t>
-                      </a:r>
-                    </a:p>
-                  </a:txBody>
-                  <a:tcPr>
-                    <a:solidFill>
-                      <a:srgbClr val="0E0F11"/>
+                      <a:srgbClr val="1F2228"/>
                     </a:solidFill>
                   </a:tcPr>
                 </a:tc>
@@ -4867,54 +7043,20 @@
       <p:grpSpPr/>
       <p:sp>
         <p:nvSpPr>
-          <p:cNvPr id="2" name="TextBox 1"/>
-          <p:cNvSpPr txBox="1"/>
-          <p:nvPr/>
-        </p:nvSpPr>
-        <p:spPr>
-          <a:xfrm>
-            <a:off x="640080" y="320040"/>
-            <a:ext cx="5669280" cy="320040"/>
-          </a:xfrm>
-          <a:prstGeom prst="rect">
-            <a:avLst/>
-          </a:prstGeom>
-          <a:noFill/>
-        </p:spPr>
-        <p:txBody>
-          <a:bodyPr wrap="none">
-            <a:spAutoFit/>
-          </a:bodyPr>
-          <a:lstStyle/>
-          <a:p>
-            <a:r>
-              <a:rPr sz="1100">
-                <a:solidFill>
-                  <a:srgbClr val="C9933A"/>
-                </a:solidFill>
-                <a:latin typeface="IBM Plex Mono"/>
-              </a:rPr>
-              <a:t>STILLFORM · STRATEGIC DECK</a:t>
-            </a:r>
-          </a:p>
-        </p:txBody>
-      </p:sp>
-      <p:sp>
-        <p:nvSpPr>
-          <p:cNvPr id="3" name="Rectangle 2"/>
+          <p:cNvPr id="2" name="Rectangle 1"/>
           <p:cNvSpPr/>
           <p:nvPr/>
         </p:nvSpPr>
         <p:spPr>
           <a:xfrm>
-            <a:off x="640080" y="640080"/>
-            <a:ext cx="10972800" cy="9144"/>
+            <a:off x="0" y="0"/>
+            <a:ext cx="12191695" cy="320040"/>
           </a:xfrm>
           <a:prstGeom prst="rect">
             <a:avLst/>
           </a:prstGeom>
           <a:solidFill>
-            <a:srgbClr val="32343A"/>
+            <a:srgbClr val="17191D"/>
           </a:solidFill>
           <a:ln>
             <a:noFill/>
@@ -4944,14 +7086,14 @@
       </p:sp>
       <p:sp>
         <p:nvSpPr>
-          <p:cNvPr id="4" name="TextBox 3"/>
+          <p:cNvPr id="3" name="TextBox 2"/>
           <p:cNvSpPr txBox="1"/>
           <p:nvPr/>
         </p:nvSpPr>
         <p:spPr>
           <a:xfrm>
-            <a:off x="640080" y="868680"/>
-            <a:ext cx="10789920" cy="1097280"/>
+            <a:off x="502920" y="109728"/>
+            <a:ext cx="5029200" cy="182880"/>
           </a:xfrm>
           <a:prstGeom prst="rect">
             <a:avLst/>
@@ -4965,27 +7107,27 @@
           <a:lstStyle/>
           <a:p>
             <a:r>
-              <a:rPr sz="3800">
+              <a:rPr sz="900">
                 <a:solidFill>
                   <a:srgbClr val="C9933A"/>
                 </a:solidFill>
-                <a:latin typeface="Cormorant Garamond"/>
+                <a:latin typeface="IBM Plex Mono"/>
               </a:rPr>
-              <a:t>Core loop mechanics</a:t>
-            </a:r>
-          </a:p>
-        </p:txBody>
-      </p:sp>
-      <p:sp>
-        <p:nvSpPr>
-          <p:cNvPr id="5" name="TextBox 4"/>
+              <a:t>STILLFORM · STRATEGIC DECK</a:t>
+            </a:r>
+          </a:p>
+        </p:txBody>
+      </p:sp>
+      <p:sp>
+        <p:nvSpPr>
+          <p:cNvPr id="4" name="TextBox 3"/>
           <p:cNvSpPr txBox="1"/>
           <p:nvPr/>
         </p:nvSpPr>
         <p:spPr>
           <a:xfrm>
-            <a:off x="658368" y="1737360"/>
-            <a:ext cx="10332720" cy="502920"/>
+            <a:off x="10332720" y="109728"/>
+            <a:ext cx="1371600" cy="182880"/>
           </a:xfrm>
           <a:prstGeom prst="rect">
             <a:avLst/>
@@ -4998,28 +7140,29 @@
           </a:bodyPr>
           <a:lstStyle/>
           <a:p>
-            <a:r>
-              <a:rPr sz="1600">
-                <a:solidFill>
-                  <a:srgbClr val="A0A2A8"/>
-                </a:solidFill>
-                <a:latin typeface="DM Sans"/>
+            <a:pPr algn="r"/>
+            <a:r>
+              <a:rPr sz="900">
+                <a:solidFill>
+                  <a:srgbClr val="A5A8B0"/>
+                </a:solidFill>
+                <a:latin typeface="IBM Plex Mono"/>
               </a:rPr>
-              <a:t>Preventive architecture, not reactive patching</a:t>
-            </a:r>
-          </a:p>
-        </p:txBody>
-      </p:sp>
-      <p:sp>
-        <p:nvSpPr>
-          <p:cNvPr id="6" name="TextBox 5"/>
+              <a:t>04 / 15</a:t>
+            </a:r>
+          </a:p>
+        </p:txBody>
+      </p:sp>
+      <p:sp>
+        <p:nvSpPr>
+          <p:cNvPr id="5" name="TextBox 4"/>
           <p:cNvSpPr txBox="1"/>
           <p:nvPr/>
         </p:nvSpPr>
         <p:spPr>
           <a:xfrm>
-            <a:off x="640080" y="2011680"/>
-            <a:ext cx="4114800" cy="320040"/>
+            <a:off x="640080" y="640080"/>
+            <a:ext cx="10972800" cy="1097280"/>
           </a:xfrm>
           <a:prstGeom prst="rect">
             <a:avLst/>
@@ -5033,27 +7176,27 @@
           <a:lstStyle/>
           <a:p>
             <a:r>
-              <a:rPr sz="1100">
+              <a:rPr sz="4000">
                 <a:solidFill>
                   <a:srgbClr val="C9933A"/>
                 </a:solidFill>
-                <a:latin typeface="IBM Plex Mono"/>
+                <a:latin typeface="Cormorant Garamond"/>
               </a:rPr>
-              <a:t>How the system runs</a:t>
-            </a:r>
-          </a:p>
-        </p:txBody>
-      </p:sp>
-      <p:sp>
-        <p:nvSpPr>
-          <p:cNvPr id="7" name="TextBox 6"/>
+              <a:t>Mechanics + Science</a:t>
+            </a:r>
+          </a:p>
+        </p:txBody>
+      </p:sp>
+      <p:sp>
+        <p:nvSpPr>
+          <p:cNvPr id="6" name="TextBox 5"/>
           <p:cNvSpPr txBox="1"/>
           <p:nvPr/>
         </p:nvSpPr>
         <p:spPr>
           <a:xfrm>
-            <a:off x="685800" y="2331720"/>
-            <a:ext cx="10972800" cy="3566160"/>
+            <a:off x="667512" y="1508760"/>
+            <a:ext cx="10789920" cy="411480"/>
           </a:xfrm>
           <a:prstGeom prst="rect">
             <a:avLst/>
@@ -5061,104 +7204,142 @@
           <a:noFill/>
         </p:spPr>
         <p:txBody>
-          <a:bodyPr wrap="square">
+          <a:bodyPr wrap="none">
             <a:spAutoFit/>
           </a:bodyPr>
           <a:lstStyle/>
           <a:p>
-            <a:pPr>
-              <a:spcAft>
-                <a:spcPts val="1000"/>
-              </a:spcAft>
-              <a:defRPr sz="1700">
+            <a:r>
+              <a:rPr sz="1600">
+                <a:solidFill>
+                  <a:srgbClr val="A5A8B0"/>
+                </a:solidFill>
+                <a:latin typeface="DM Sans"/>
+              </a:rPr>
+              <a:t>SECTION BREAK</a:t>
+            </a:r>
+          </a:p>
+        </p:txBody>
+      </p:sp>
+      <p:sp>
+        <p:nvSpPr>
+          <p:cNvPr id="7" name="Rounded Rectangle 6"/>
+          <p:cNvSpPr/>
+          <p:nvPr/>
+        </p:nvSpPr>
+        <p:spPr>
+          <a:xfrm>
+            <a:off x="868680" y="2103120"/>
+            <a:ext cx="10378440" cy="3154680"/>
+          </a:xfrm>
+          <a:prstGeom prst="roundRect">
+            <a:avLst/>
+          </a:prstGeom>
+          <a:solidFill>
+            <a:srgbClr val="17191D"/>
+          </a:solidFill>
+          <a:ln w="15240">
+            <a:solidFill>
+              <a:srgbClr val="353840"/>
+            </a:solidFill>
+          </a:ln>
+        </p:spPr>
+        <p:style>
+          <a:lnRef idx="1">
+            <a:schemeClr val="accent1"/>
+          </a:lnRef>
+          <a:fillRef idx="3">
+            <a:schemeClr val="accent1"/>
+          </a:fillRef>
+          <a:effectRef idx="2">
+            <a:schemeClr val="accent1"/>
+          </a:effectRef>
+          <a:fontRef idx="minor">
+            <a:schemeClr val="lt1"/>
+          </a:fontRef>
+        </p:style>
+        <p:txBody>
+          <a:bodyPr rtlCol="0" anchor="ctr"/>
+          <a:lstStyle/>
+          <a:p>
+            <a:pPr algn="ctr"/>
+          </a:p>
+        </p:txBody>
+      </p:sp>
+      <p:sp>
+        <p:nvSpPr>
+          <p:cNvPr id="8" name="Rectangle 7"/>
+          <p:cNvSpPr/>
+          <p:nvPr/>
+        </p:nvSpPr>
+        <p:spPr>
+          <a:xfrm>
+            <a:off x="868680" y="2103120"/>
+            <a:ext cx="146304" cy="3154680"/>
+          </a:xfrm>
+          <a:prstGeom prst="rect">
+            <a:avLst/>
+          </a:prstGeom>
+          <a:solidFill>
+            <a:srgbClr val="C9933A"/>
+          </a:solidFill>
+          <a:ln>
+            <a:noFill/>
+          </a:ln>
+        </p:spPr>
+        <p:style>
+          <a:lnRef idx="1">
+            <a:schemeClr val="accent1"/>
+          </a:lnRef>
+          <a:fillRef idx="3">
+            <a:schemeClr val="accent1"/>
+          </a:fillRef>
+          <a:effectRef idx="2">
+            <a:schemeClr val="accent1"/>
+          </a:effectRef>
+          <a:fontRef idx="minor">
+            <a:schemeClr val="lt1"/>
+          </a:fontRef>
+        </p:style>
+        <p:txBody>
+          <a:bodyPr rtlCol="0" anchor="ctr"/>
+          <a:lstStyle/>
+          <a:p>
+            <a:pPr algn="ctr"/>
+          </a:p>
+        </p:txBody>
+      </p:sp>
+      <p:sp>
+        <p:nvSpPr>
+          <p:cNvPr id="9" name="TextBox 8"/>
+          <p:cNvSpPr txBox="1"/>
+          <p:nvPr/>
+        </p:nvSpPr>
+        <p:spPr>
+          <a:xfrm>
+            <a:off x="1234440" y="2743200"/>
+            <a:ext cx="9326880" cy="1828800"/>
+          </a:xfrm>
+          <a:prstGeom prst="rect">
+            <a:avLst/>
+          </a:prstGeom>
+          <a:noFill/>
+        </p:spPr>
+        <p:txBody>
+          <a:bodyPr wrap="none">
+            <a:spAutoFit/>
+          </a:bodyPr>
+          <a:lstStyle/>
+          <a:p>
+            <a:pPr algn="l"/>
+            <a:r>
+              <a:rPr sz="2600">
                 <a:solidFill>
                   <a:srgbClr val="E9E9EA"/>
                 </a:solidFill>
                 <a:latin typeface="DM Sans"/>
-              </a:defRPr>
-            </a:pPr>
-            <a:r>
-              <a:t>1) Morning baseline: energy + hardware check (bio-filter).</a:t>
-            </a:r>
-          </a:p>
-          <a:p>
-            <a:pPr>
-              <a:spcAft>
-                <a:spcPts val="1000"/>
-              </a:spcAft>
-              <a:defRPr sz="1700">
-                <a:solidFill>
-                  <a:srgbClr val="E9E9EA"/>
-                </a:solidFill>
-                <a:latin typeface="DM Sans"/>
-              </a:defRPr>
-            </a:pPr>
-            <a:r>
-              <a:t>2) State routing: body-first, thought-first, or balanced intervention order.</a:t>
-            </a:r>
-          </a:p>
-          <a:p>
-            <a:pPr>
-              <a:spcAft>
-                <a:spcPts val="1000"/>
-              </a:spcAft>
-              <a:defRPr sz="1700">
-                <a:solidFill>
-                  <a:srgbClr val="E9E9EA"/>
-                </a:solidFill>
-                <a:latin typeface="DM Sans"/>
-              </a:defRPr>
-            </a:pPr>
-            <a:r>
-              <a:t>3) In-session work: paced regulation + cognitive reframing + affect labeling.</a:t>
-            </a:r>
-          </a:p>
-          <a:p>
-            <a:pPr>
-              <a:spcAft>
-                <a:spcPts val="1000"/>
-              </a:spcAft>
-              <a:defRPr sz="1700">
-                <a:solidFill>
-                  <a:srgbClr val="E9E9EA"/>
-                </a:solidFill>
-                <a:latin typeface="DM Sans"/>
-              </a:defRPr>
-            </a:pPr>
-            <a:r>
-              <a:t>4) Transfer: state-to-statement and practical next-action bridge.</a:t>
-            </a:r>
-          </a:p>
-          <a:p>
-            <a:pPr>
-              <a:spcAft>
-                <a:spcPts val="1000"/>
-              </a:spcAft>
-              <a:defRPr sz="1700">
-                <a:solidFill>
-                  <a:srgbClr val="E9E9EA"/>
-                </a:solidFill>
-                <a:latin typeface="DM Sans"/>
-              </a:defRPr>
-            </a:pPr>
-            <a:r>
-              <a:t>5) End-of-day closure: daily loop completion and pattern continuity.</a:t>
-            </a:r>
-          </a:p>
-          <a:p>
-            <a:pPr>
-              <a:spcAft>
-                <a:spcPts val="1000"/>
-              </a:spcAft>
-              <a:defRPr sz="1700">
-                <a:solidFill>
-                  <a:srgbClr val="E9E9EA"/>
-                </a:solidFill>
-                <a:latin typeface="DM Sans"/>
-              </a:defRPr>
-            </a:pPr>
-            <a:r>
-              <a:t>6) Longitudinal learning: pattern memory + proof of change surfaces.</a:t>
+              </a:rPr>
+              <a:t>Mechanism table split into clean slides for readability.</a:t>
             </a:r>
           </a:p>
         </p:txBody>
@@ -5191,54 +7372,20 @@
       <p:grpSpPr/>
       <p:sp>
         <p:nvSpPr>
-          <p:cNvPr id="2" name="TextBox 1"/>
-          <p:cNvSpPr txBox="1"/>
-          <p:nvPr/>
-        </p:nvSpPr>
-        <p:spPr>
-          <a:xfrm>
-            <a:off x="640080" y="320040"/>
-            <a:ext cx="5669280" cy="320040"/>
-          </a:xfrm>
-          <a:prstGeom prst="rect">
-            <a:avLst/>
-          </a:prstGeom>
-          <a:noFill/>
-        </p:spPr>
-        <p:txBody>
-          <a:bodyPr wrap="none">
-            <a:spAutoFit/>
-          </a:bodyPr>
-          <a:lstStyle/>
-          <a:p>
-            <a:r>
-              <a:rPr sz="1100">
-                <a:solidFill>
-                  <a:srgbClr val="C9933A"/>
-                </a:solidFill>
-                <a:latin typeface="IBM Plex Mono"/>
-              </a:rPr>
-              <a:t>STILLFORM · STRATEGIC DECK</a:t>
-            </a:r>
-          </a:p>
-        </p:txBody>
-      </p:sp>
-      <p:sp>
-        <p:nvSpPr>
-          <p:cNvPr id="3" name="Rectangle 2"/>
+          <p:cNvPr id="2" name="Rectangle 1"/>
           <p:cNvSpPr/>
           <p:nvPr/>
         </p:nvSpPr>
         <p:spPr>
           <a:xfrm>
-            <a:off x="640080" y="640080"/>
-            <a:ext cx="10972800" cy="9144"/>
+            <a:off x="0" y="0"/>
+            <a:ext cx="12191695" cy="320040"/>
           </a:xfrm>
           <a:prstGeom prst="rect">
             <a:avLst/>
           </a:prstGeom>
           <a:solidFill>
-            <a:srgbClr val="32343A"/>
+            <a:srgbClr val="17191D"/>
           </a:solidFill>
           <a:ln>
             <a:noFill/>
@@ -5268,14 +7415,14 @@
       </p:sp>
       <p:sp>
         <p:nvSpPr>
-          <p:cNvPr id="4" name="TextBox 3"/>
+          <p:cNvPr id="3" name="TextBox 2"/>
           <p:cNvSpPr txBox="1"/>
           <p:nvPr/>
         </p:nvSpPr>
         <p:spPr>
           <a:xfrm>
-            <a:off x="640080" y="868680"/>
-            <a:ext cx="10789920" cy="1097280"/>
+            <a:off x="502920" y="109728"/>
+            <a:ext cx="5029200" cy="182880"/>
           </a:xfrm>
           <a:prstGeom prst="rect">
             <a:avLst/>
@@ -5289,27 +7436,27 @@
           <a:lstStyle/>
           <a:p>
             <a:r>
-              <a:rPr sz="3800">
+              <a:rPr sz="900">
                 <a:solidFill>
                   <a:srgbClr val="C9933A"/>
                 </a:solidFill>
-                <a:latin typeface="Cormorant Garamond"/>
+                <a:latin typeface="IBM Plex Mono"/>
               </a:rPr>
-              <a:t>Evidence model</a:t>
-            </a:r>
-          </a:p>
-        </p:txBody>
-      </p:sp>
-      <p:sp>
-        <p:nvSpPr>
-          <p:cNvPr id="5" name="TextBox 4"/>
+              <a:t>STILLFORM · STRATEGIC DECK</a:t>
+            </a:r>
+          </a:p>
+        </p:txBody>
+      </p:sp>
+      <p:sp>
+        <p:nvSpPr>
+          <p:cNvPr id="4" name="TextBox 3"/>
           <p:cNvSpPr txBox="1"/>
           <p:nvPr/>
         </p:nvSpPr>
         <p:spPr>
           <a:xfrm>
-            <a:off x="658368" y="1737360"/>
-            <a:ext cx="10332720" cy="502920"/>
+            <a:off x="10332720" y="109728"/>
+            <a:ext cx="1371600" cy="182880"/>
           </a:xfrm>
           <a:prstGeom prst="rect">
             <a:avLst/>
@@ -5322,29 +7469,98 @@
           </a:bodyPr>
           <a:lstStyle/>
           <a:p>
+            <a:pPr algn="r"/>
+            <a:r>
+              <a:rPr sz="900">
+                <a:solidFill>
+                  <a:srgbClr val="A5A8B0"/>
+                </a:solidFill>
+                <a:latin typeface="IBM Plex Mono"/>
+              </a:rPr>
+              <a:t>05 / 15</a:t>
+            </a:r>
+          </a:p>
+        </p:txBody>
+      </p:sp>
+      <p:sp>
+        <p:nvSpPr>
+          <p:cNvPr id="5" name="TextBox 4"/>
+          <p:cNvSpPr txBox="1"/>
+          <p:nvPr/>
+        </p:nvSpPr>
+        <p:spPr>
+          <a:xfrm>
+            <a:off x="640080" y="640080"/>
+            <a:ext cx="10972800" cy="1097280"/>
+          </a:xfrm>
+          <a:prstGeom prst="rect">
+            <a:avLst/>
+          </a:prstGeom>
+          <a:noFill/>
+        </p:spPr>
+        <p:txBody>
+          <a:bodyPr wrap="none">
+            <a:spAutoFit/>
+          </a:bodyPr>
+          <a:lstStyle/>
+          <a:p>
+            <a:r>
+              <a:rPr sz="4000">
+                <a:solidFill>
+                  <a:srgbClr val="C9933A"/>
+                </a:solidFill>
+                <a:latin typeface="Cormorant Garamond"/>
+              </a:rPr>
+              <a:t>Mechanics map I</a:t>
+            </a:r>
+          </a:p>
+        </p:txBody>
+      </p:sp>
+      <p:sp>
+        <p:nvSpPr>
+          <p:cNvPr id="6" name="TextBox 5"/>
+          <p:cNvSpPr txBox="1"/>
+          <p:nvPr/>
+        </p:nvSpPr>
+        <p:spPr>
+          <a:xfrm>
+            <a:off x="667512" y="1508760"/>
+            <a:ext cx="10789920" cy="411480"/>
+          </a:xfrm>
+          <a:prstGeom prst="rect">
+            <a:avLst/>
+          </a:prstGeom>
+          <a:noFill/>
+        </p:spPr>
+        <p:txBody>
+          <a:bodyPr wrap="none">
+            <a:spAutoFit/>
+          </a:bodyPr>
+          <a:lstStyle/>
+          <a:p>
             <a:r>
               <a:rPr sz="1600">
                 <a:solidFill>
-                  <a:srgbClr val="A0A2A8"/>
+                  <a:srgbClr val="A5A8B0"/>
                 </a:solidFill>
                 <a:latin typeface="DM Sans"/>
               </a:rPr>
-              <a:t>What must be true to claim impact</a:t>
+              <a:t>Science -&gt; product implementation -&gt; measured signal</a:t>
             </a:r>
           </a:p>
         </p:txBody>
       </p:sp>
       <p:graphicFrame>
         <p:nvGraphicFramePr>
-          <p:cNvPr id="6" name="Table 5"/>
+          <p:cNvPr id="7" name="Table 6"/>
           <p:cNvGraphicFramePr>
             <a:graphicFrameLocks noGrp="1"/>
           </p:cNvGraphicFramePr>
           <p:nvPr/>
         </p:nvGraphicFramePr>
         <p:xfrm>
-          <a:off x="731520" y="1874519"/>
-          <a:ext cx="10789920" cy="4297680"/>
+          <a:off x="502920" y="1783080"/>
+          <a:ext cx="11201400" cy="4663440"/>
         </p:xfrm>
         <a:graphic>
           <a:graphicData uri="http://schemas.openxmlformats.org/drawingml/2006/table">
@@ -5353,11 +7569,12 @@
                 <a:tableStyleId>{5C22544A-7EE6-4342-B048-85BDC9FD1C3A}</a:tableStyleId>
               </a:tblPr>
               <a:tblGrid>
-                <a:gridCol w="2011680"/>
-                <a:gridCol w="3474720"/>
-                <a:gridCol w="5303520"/>
+                <a:gridCol w="1783080"/>
+                <a:gridCol w="2880360"/>
+                <a:gridCol w="3154680"/>
+                <a:gridCol w="3383280"/>
               </a:tblGrid>
-              <a:tr h="716280">
+              <a:tr h="932688">
                 <a:tc>
                   <a:txBody>
                     <a:bodyPr/>
@@ -5370,11 +7587,11 @@
                           </a:solidFill>
                           <a:latin typeface="DM Sans"/>
                         </a:rPr>
-                        <a:t>Layer</a:t>
+                        <a:t>Mechanic</a:t>
                       </a:r>
                     </a:p>
                   </a:txBody>
-                  <a:tcPr>
+                  <a:tcPr marL="64008" marR="64008" marT="36576" marB="36576">
                     <a:solidFill>
                       <a:srgbClr val="17191D"/>
                     </a:solidFill>
@@ -5392,11 +7609,11 @@
                           </a:solidFill>
                           <a:latin typeface="DM Sans"/>
                         </a:rPr>
-                        <a:t>Metric</a:t>
+                        <a:t>Scientific basis</a:t>
                       </a:r>
                     </a:p>
                   </a:txBody>
-                  <a:tcPr>
+                  <a:tcPr marL="64008" marR="64008" marT="36576" marB="36576">
                     <a:solidFill>
                       <a:srgbClr val="17191D"/>
                     </a:solidFill>
@@ -5414,35 +7631,57 @@
                           </a:solidFill>
                           <a:latin typeface="DM Sans"/>
                         </a:rPr>
-                        <a:t>Interpretation</a:t>
+                        <a:t>Product implementation</a:t>
                       </a:r>
                     </a:p>
                   </a:txBody>
-                  <a:tcPr>
+                  <a:tcPr marL="64008" marR="64008" marT="36576" marB="36576">
+                    <a:solidFill>
+                      <a:srgbClr val="17191D"/>
+                    </a:solidFill>
+                  </a:tcPr>
+                </a:tc>
+                <a:tc>
+                  <a:txBody>
+                    <a:bodyPr/>
+                    <a:lstStyle/>
+                    <a:p>
+                      <a:r>
+                        <a:rPr sz="1200">
+                          <a:solidFill>
+                            <a:srgbClr val="C9933A"/>
+                          </a:solidFill>
+                          <a:latin typeface="DM Sans"/>
+                        </a:rPr>
+                        <a:t>Measured signal</a:t>
+                      </a:r>
+                    </a:p>
+                  </a:txBody>
+                  <a:tcPr marL="64008" marR="64008" marT="36576" marB="36576">
                     <a:solidFill>
                       <a:srgbClr val="17191D"/>
                     </a:solidFill>
                   </a:tcPr>
                 </a:tc>
               </a:tr>
-              <a:tr h="716280">
+              <a:tr h="932688">
                 <a:tc>
                   <a:txBody>
                     <a:bodyPr/>
                     <a:lstStyle/>
                     <a:p>
                       <a:r>
-                        <a:rPr sz="1100">
+                        <a:rPr sz="1000">
                           <a:solidFill>
-                            <a:srgbClr val="E9E9EA"/>
+                            <a:srgbClr val="C4C6CC"/>
                           </a:solidFill>
                           <a:latin typeface="DM Sans"/>
                         </a:rPr>
-                        <a:t>Session</a:t>
+                        <a:t>Affect labeling</a:t>
                       </a:r>
                     </a:p>
                   </a:txBody>
-                  <a:tcPr>
+                  <a:tcPr marL="64008" marR="64008" marT="36576" marB="36576">
                     <a:solidFill>
                       <a:srgbClr val="0E0F11"/>
                     </a:solidFill>
@@ -5454,17 +7693,17 @@
                     <a:lstStyle/>
                     <a:p>
                       <a:r>
-                        <a:rPr sz="1100">
+                        <a:rPr sz="1000">
                           <a:solidFill>
-                            <a:srgbClr val="E9E9EA"/>
+                            <a:srgbClr val="C4C6CC"/>
                           </a:solidFill>
                           <a:latin typeface="DM Sans"/>
                         </a:rPr>
-                        <a:t>Pre/post composure delta</a:t>
+                        <a:t>Lieberman et al. (2007); Torre &amp; Lieberman (2018)</a:t>
                       </a:r>
                     </a:p>
                   </a:txBody>
-                  <a:tcPr>
+                  <a:tcPr marL="64008" marR="64008" marT="36576" marB="36576">
                     <a:solidFill>
                       <a:srgbClr val="0E0F11"/>
                     </a:solidFill>
@@ -5476,41 +7715,17 @@
                     <a:lstStyle/>
                     <a:p>
                       <a:r>
-                        <a:rPr sz="1100">
+                        <a:rPr sz="1000">
                           <a:solidFill>
-                            <a:srgbClr val="E9E9EA"/>
+                            <a:srgbClr val="C4C6CC"/>
                           </a:solidFill>
                           <a:latin typeface="DM Sans"/>
                         </a:rPr>
-                        <a:t>Immediate regulation effectiveness</a:t>
+                        <a:t>Pulse chips + post-session labeling</a:t>
                       </a:r>
                     </a:p>
                   </a:txBody>
-                  <a:tcPr>
-                    <a:solidFill>
-                      <a:srgbClr val="0E0F11"/>
-                    </a:solidFill>
-                  </a:tcPr>
-                </a:tc>
-              </a:tr>
-              <a:tr h="716280">
-                <a:tc>
-                  <a:txBody>
-                    <a:bodyPr/>
-                    <a:lstStyle/>
-                    <a:p>
-                      <a:r>
-                        <a:rPr sz="1100">
-                          <a:solidFill>
-                            <a:srgbClr val="E9E9EA"/>
-                          </a:solidFill>
-                          <a:latin typeface="DM Sans"/>
-                        </a:rPr>
-                        <a:t>Daily loop</a:t>
-                      </a:r>
-                    </a:p>
-                  </a:txBody>
-                  <a:tcPr>
+                  <a:tcPr marL="64008" marR="64008" marT="36576" marB="36576">
                     <a:solidFill>
                       <a:srgbClr val="0E0F11"/>
                     </a:solidFill>
@@ -5522,17 +7737,131 @@
                     <a:lstStyle/>
                     <a:p>
                       <a:r>
-                        <a:rPr sz="1100">
+                        <a:rPr sz="1000">
                           <a:solidFill>
-                            <a:srgbClr val="E9E9EA"/>
+                            <a:srgbClr val="C4C6CC"/>
                           </a:solidFill>
                           <a:latin typeface="DM Sans"/>
                         </a:rPr>
-                        <a:t>Morning/EOD completion + drop-off</a:t>
+                        <a:t>State precision and composure-shift trend</a:t>
                       </a:r>
                     </a:p>
                   </a:txBody>
-                  <a:tcPr>
+                  <a:tcPr marL="64008" marR="64008" marT="36576" marB="36576">
+                    <a:solidFill>
+                      <a:srgbClr val="0E0F11"/>
+                    </a:solidFill>
+                  </a:tcPr>
+                </a:tc>
+              </a:tr>
+              <a:tr h="932688">
+                <a:tc>
+                  <a:txBody>
+                    <a:bodyPr/>
+                    <a:lstStyle/>
+                    <a:p>
+                      <a:r>
+                        <a:rPr sz="1000">
+                          <a:solidFill>
+                            <a:srgbClr val="C4C6CC"/>
+                          </a:solidFill>
+                          <a:latin typeface="DM Sans"/>
+                        </a:rPr>
+                        <a:t>Cognitive reappraisal</a:t>
+                      </a:r>
+                    </a:p>
+                  </a:txBody>
+                  <a:tcPr marL="64008" marR="64008" marT="36576" marB="36576">
+                    <a:solidFill>
+                      <a:srgbClr val="1F2228"/>
+                    </a:solidFill>
+                  </a:tcPr>
+                </a:tc>
+                <a:tc>
+                  <a:txBody>
+                    <a:bodyPr/>
+                    <a:lstStyle/>
+                    <a:p>
+                      <a:r>
+                        <a:rPr sz="1000">
+                          <a:solidFill>
+                            <a:srgbClr val="C4C6CC"/>
+                          </a:solidFill>
+                          <a:latin typeface="DM Sans"/>
+                        </a:rPr>
+                        <a:t>Ochsner &amp; Gross (2005); Buhle et al. (2014)</a:t>
+                      </a:r>
+                    </a:p>
+                  </a:txBody>
+                  <a:tcPr marL="64008" marR="64008" marT="36576" marB="36576">
+                    <a:solidFill>
+                      <a:srgbClr val="1F2228"/>
+                    </a:solidFill>
+                  </a:tcPr>
+                </a:tc>
+                <a:tc>
+                  <a:txBody>
+                    <a:bodyPr/>
+                    <a:lstStyle/>
+                    <a:p>
+                      <a:r>
+                        <a:rPr sz="1000">
+                          <a:solidFill>
+                            <a:srgbClr val="C4C6CC"/>
+                          </a:solidFill>
+                          <a:latin typeface="DM Sans"/>
+                        </a:rPr>
+                        <a:t>Reframe structured perspective sequence</a:t>
+                      </a:r>
+                    </a:p>
+                  </a:txBody>
+                  <a:tcPr marL="64008" marR="64008" marT="36576" marB="36576">
+                    <a:solidFill>
+                      <a:srgbClr val="1F2228"/>
+                    </a:solidFill>
+                  </a:tcPr>
+                </a:tc>
+                <a:tc>
+                  <a:txBody>
+                    <a:bodyPr/>
+                    <a:lstStyle/>
+                    <a:p>
+                      <a:r>
+                        <a:rPr sz="1000">
+                          <a:solidFill>
+                            <a:srgbClr val="C4C6CC"/>
+                          </a:solidFill>
+                          <a:latin typeface="DM Sans"/>
+                        </a:rPr>
+                        <a:t>Pre/post composure delta</a:t>
+                      </a:r>
+                    </a:p>
+                  </a:txBody>
+                  <a:tcPr marL="64008" marR="64008" marT="36576" marB="36576">
+                    <a:solidFill>
+                      <a:srgbClr val="1F2228"/>
+                    </a:solidFill>
+                  </a:tcPr>
+                </a:tc>
+              </a:tr>
+              <a:tr h="932688">
+                <a:tc>
+                  <a:txBody>
+                    <a:bodyPr/>
+                    <a:lstStyle/>
+                    <a:p>
+                      <a:r>
+                        <a:rPr sz="1000">
+                          <a:solidFill>
+                            <a:srgbClr val="C4C6CC"/>
+                          </a:solidFill>
+                          <a:latin typeface="DM Sans"/>
+                        </a:rPr>
+                        <a:t>Interoceptive regulation</a:t>
+                      </a:r>
+                    </a:p>
+                  </a:txBody>
+                  <a:tcPr marL="64008" marR="64008" marT="36576" marB="36576">
                     <a:solidFill>
                       <a:srgbClr val="0E0F11"/>
                     </a:solidFill>
@@ -5544,41 +7873,17 @@
                     <a:lstStyle/>
                     <a:p>
                       <a:r>
-                        <a:rPr sz="1100">
+                        <a:rPr sz="1000">
                           <a:solidFill>
-                            <a:srgbClr val="E9E9EA"/>
+                            <a:srgbClr val="C4C6CC"/>
                           </a:solidFill>
                           <a:latin typeface="DM Sans"/>
                         </a:rPr>
-                        <a:t>Behavioral consistency quality</a:t>
+                        <a:t>Mehling et al. (2012); Critchley &amp; Garfinkel (2017)</a:t>
                       </a:r>
                     </a:p>
                   </a:txBody>
-                  <a:tcPr>
-                    <a:solidFill>
-                      <a:srgbClr val="0E0F11"/>
-                    </a:solidFill>
-                  </a:tcPr>
-                </a:tc>
-              </a:tr>
-              <a:tr h="716280">
-                <a:tc>
-                  <a:txBody>
-                    <a:bodyPr/>
-                    <a:lstStyle/>
-                    <a:p>
-                      <a:r>
-                        <a:rPr sz="1100">
-                          <a:solidFill>
-                            <a:srgbClr val="E9E9EA"/>
-                          </a:solidFill>
-                          <a:latin typeface="DM Sans"/>
-                        </a:rPr>
-                        <a:t>Intervention</a:t>
-                      </a:r>
-                    </a:p>
-                  </a:txBody>
-                  <a:tcPr>
+                  <a:tcPr marL="64008" marR="64008" marT="36576" marB="36576">
                     <a:solidFill>
                       <a:srgbClr val="0E0F11"/>
                     </a:solidFill>
@@ -5590,17 +7895,17 @@
                     <a:lstStyle/>
                     <a:p>
                       <a:r>
-                        <a:rPr sz="1100">
+                        <a:rPr sz="1000">
                           <a:solidFill>
-                            <a:srgbClr val="E9E9EA"/>
+                            <a:srgbClr val="C4C6CC"/>
                           </a:solidFill>
                           <a:latin typeface="DM Sans"/>
                         </a:rPr>
-                        <a:t>Nudge shown/actioned/recovery</a:t>
+                        <a:t>Bio-filter + body scan + somatic prompts</a:t>
                       </a:r>
                     </a:p>
                   </a:txBody>
-                  <a:tcPr>
+                  <a:tcPr marL="64008" marR="64008" marT="36576" marB="36576">
                     <a:solidFill>
                       <a:srgbClr val="0E0F11"/>
                     </a:solidFill>
@@ -5612,43 +7917,43 @@
                     <a:lstStyle/>
                     <a:p>
                       <a:r>
-                        <a:rPr sz="1100">
+                        <a:rPr sz="1000">
                           <a:solidFill>
-                            <a:srgbClr val="E9E9EA"/>
+                            <a:srgbClr val="C4C6CC"/>
                           </a:solidFill>
                           <a:latin typeface="DM Sans"/>
                         </a:rPr>
-                        <a:t>Preventive support conversion</a:t>
+                        <a:t>Recovery latency reduction</a:t>
                       </a:r>
                     </a:p>
                   </a:txBody>
-                  <a:tcPr>
+                  <a:tcPr marL="64008" marR="64008" marT="36576" marB="36576">
                     <a:solidFill>
                       <a:srgbClr val="0E0F11"/>
                     </a:solidFill>
                   </a:tcPr>
                 </a:tc>
               </a:tr>
-              <a:tr h="716280">
+              <a:tr h="932688">
                 <a:tc>
                   <a:txBody>
                     <a:bodyPr/>
                     <a:lstStyle/>
                     <a:p>
                       <a:r>
-                        <a:rPr sz="1100">
+                        <a:rPr sz="1000">
                           <a:solidFill>
-                            <a:srgbClr val="E9E9EA"/>
+                            <a:srgbClr val="C4C6CC"/>
                           </a:solidFill>
                           <a:latin typeface="DM Sans"/>
                         </a:rPr>
-                        <a:t>Longitudinal</a:t>
+                        <a:t>Implementation intentions</a:t>
                       </a:r>
                     </a:p>
                   </a:txBody>
-                  <a:tcPr>
+                  <a:tcPr marL="64008" marR="64008" marT="36576" marB="36576">
                     <a:solidFill>
-                      <a:srgbClr val="0E0F11"/>
+                      <a:srgbClr val="1F2228"/>
                     </a:solidFill>
                   </a:tcPr>
                 </a:tc>
@@ -5658,19 +7963,19 @@
                     <a:lstStyle/>
                     <a:p>
                       <a:r>
-                        <a:rPr sz="1100">
+                        <a:rPr sz="1000">
                           <a:solidFill>
-                            <a:srgbClr val="E9E9EA"/>
+                            <a:srgbClr val="C4C6CC"/>
                           </a:solidFill>
                           <a:latin typeface="DM Sans"/>
                         </a:rPr>
-                        <a:t>Trend in awareness latency</a:t>
+                        <a:t>Gollwitzer (1999); Gollwitzer &amp; Sheeran (2006)</a:t>
                       </a:r>
                     </a:p>
                   </a:txBody>
-                  <a:tcPr>
+                  <a:tcPr marL="64008" marR="64008" marT="36576" marB="36576">
                     <a:solidFill>
-                      <a:srgbClr val="0E0F11"/>
+                      <a:srgbClr val="1F2228"/>
                     </a:solidFill>
                   </a:tcPr>
                 </a:tc>
@@ -5680,43 +7985,19 @@
                     <a:lstStyle/>
                     <a:p>
                       <a:r>
-                        <a:rPr sz="1100">
+                        <a:rPr sz="1000">
                           <a:solidFill>
-                            <a:srgbClr val="E9E9EA"/>
+                            <a:srgbClr val="C4C6CC"/>
                           </a:solidFill>
                           <a:latin typeface="DM Sans"/>
                         </a:rPr>
-                        <a:t>Maturity and self-regulation speed</a:t>
+                        <a:t>Calibration -&gt; default tool routing</a:t>
                       </a:r>
                     </a:p>
                   </a:txBody>
-                  <a:tcPr>
+                  <a:tcPr marL="64008" marR="64008" marT="36576" marB="36576">
                     <a:solidFill>
-                      <a:srgbClr val="0E0F11"/>
-                    </a:solidFill>
-                  </a:tcPr>
-                </a:tc>
-              </a:tr>
-              <a:tr h="716280">
-                <a:tc>
-                  <a:txBody>
-                    <a:bodyPr/>
-                    <a:lstStyle/>
-                    <a:p>
-                      <a:r>
-                        <a:rPr sz="1100">
-                          <a:solidFill>
-                            <a:srgbClr val="E9E9EA"/>
-                          </a:solidFill>
-                          <a:latin typeface="DM Sans"/>
-                        </a:rPr>
-                        <a:t>Trust</a:t>
-                      </a:r>
-                    </a:p>
-                  </a:txBody>
-                  <a:tcPr>
-                    <a:solidFill>
-                      <a:srgbClr val="0E0F11"/>
+                      <a:srgbClr val="1F2228"/>
                     </a:solidFill>
                   </a:tcPr>
                 </a:tc>
@@ -5726,41 +8007,19 @@
                     <a:lstStyle/>
                     <a:p>
                       <a:r>
-                        <a:rPr sz="1100">
+                        <a:rPr sz="1000">
                           <a:solidFill>
-                            <a:srgbClr val="E9E9EA"/>
+                            <a:srgbClr val="C4C6CC"/>
                           </a:solidFill>
                           <a:latin typeface="DM Sans"/>
                         </a:rPr>
-                        <a:t>Restore reliability + entitlement truth</a:t>
+                        <a:t>Action latency reduction</a:t>
                       </a:r>
                     </a:p>
                   </a:txBody>
-                  <a:tcPr>
+                  <a:tcPr marL="64008" marR="64008" marT="36576" marB="36576">
                     <a:solidFill>
-                      <a:srgbClr val="0E0F11"/>
-                    </a:solidFill>
-                  </a:tcPr>
-                </a:tc>
-                <a:tc>
-                  <a:txBody>
-                    <a:bodyPr/>
-                    <a:lstStyle/>
-                    <a:p>
-                      <a:r>
-                        <a:rPr sz="1100">
-                          <a:solidFill>
-                            <a:srgbClr val="E9E9EA"/>
-                          </a:solidFill>
-                          <a:latin typeface="DM Sans"/>
-                        </a:rPr>
-                        <a:t>Operational integrity under production load</a:t>
-                      </a:r>
-                    </a:p>
-                  </a:txBody>
-                  <a:tcPr>
-                    <a:solidFill>
-                      <a:srgbClr val="0E0F11"/>
+                      <a:srgbClr val="1F2228"/>
                     </a:solidFill>
                   </a:tcPr>
                 </a:tc>
@@ -5797,54 +8056,20 @@
       <p:grpSpPr/>
       <p:sp>
         <p:nvSpPr>
-          <p:cNvPr id="2" name="TextBox 1"/>
-          <p:cNvSpPr txBox="1"/>
-          <p:nvPr/>
-        </p:nvSpPr>
-        <p:spPr>
-          <a:xfrm>
-            <a:off x="640080" y="320040"/>
-            <a:ext cx="5669280" cy="320040"/>
-          </a:xfrm>
-          <a:prstGeom prst="rect">
-            <a:avLst/>
-          </a:prstGeom>
-          <a:noFill/>
-        </p:spPr>
-        <p:txBody>
-          <a:bodyPr wrap="none">
-            <a:spAutoFit/>
-          </a:bodyPr>
-          <a:lstStyle/>
-          <a:p>
-            <a:r>
-              <a:rPr sz="1100">
-                <a:solidFill>
-                  <a:srgbClr val="C9933A"/>
-                </a:solidFill>
-                <a:latin typeface="IBM Plex Mono"/>
-              </a:rPr>
-              <a:t>STILLFORM · STRATEGIC DECK</a:t>
-            </a:r>
-          </a:p>
-        </p:txBody>
-      </p:sp>
-      <p:sp>
-        <p:nvSpPr>
-          <p:cNvPr id="3" name="Rectangle 2"/>
+          <p:cNvPr id="2" name="Rectangle 1"/>
           <p:cNvSpPr/>
           <p:nvPr/>
         </p:nvSpPr>
         <p:spPr>
           <a:xfrm>
-            <a:off x="640080" y="640080"/>
-            <a:ext cx="10972800" cy="9144"/>
+            <a:off x="0" y="0"/>
+            <a:ext cx="12191695" cy="320040"/>
           </a:xfrm>
           <a:prstGeom prst="rect">
             <a:avLst/>
           </a:prstGeom>
           <a:solidFill>
-            <a:srgbClr val="32343A"/>
+            <a:srgbClr val="17191D"/>
           </a:solidFill>
           <a:ln>
             <a:noFill/>
@@ -5874,14 +8099,14 @@
       </p:sp>
       <p:sp>
         <p:nvSpPr>
-          <p:cNvPr id="4" name="TextBox 3"/>
+          <p:cNvPr id="3" name="TextBox 2"/>
           <p:cNvSpPr txBox="1"/>
           <p:nvPr/>
         </p:nvSpPr>
         <p:spPr>
           <a:xfrm>
-            <a:off x="640080" y="868680"/>
-            <a:ext cx="10789920" cy="1097280"/>
+            <a:off x="502920" y="109728"/>
+            <a:ext cx="5029200" cy="182880"/>
           </a:xfrm>
           <a:prstGeom prst="rect">
             <a:avLst/>
@@ -5895,27 +8120,27 @@
           <a:lstStyle/>
           <a:p>
             <a:r>
-              <a:rPr sz="3800">
+              <a:rPr sz="900">
                 <a:solidFill>
                   <a:srgbClr val="C9933A"/>
                 </a:solidFill>
-                <a:latin typeface="Cormorant Garamond"/>
+                <a:latin typeface="IBM Plex Mono"/>
               </a:rPr>
-              <a:t>Integrity system</a:t>
-            </a:r>
-          </a:p>
-        </p:txBody>
-      </p:sp>
-      <p:sp>
-        <p:nvSpPr>
-          <p:cNvPr id="5" name="TextBox 4"/>
+              <a:t>STILLFORM · STRATEGIC DECK</a:t>
+            </a:r>
+          </a:p>
+        </p:txBody>
+      </p:sp>
+      <p:sp>
+        <p:nvSpPr>
+          <p:cNvPr id="4" name="TextBox 3"/>
           <p:cNvSpPr txBox="1"/>
           <p:nvPr/>
         </p:nvSpPr>
         <p:spPr>
           <a:xfrm>
-            <a:off x="658368" y="1737360"/>
-            <a:ext cx="10332720" cy="502920"/>
+            <a:off x="10332720" y="109728"/>
+            <a:ext cx="1371600" cy="182880"/>
           </a:xfrm>
           <a:prstGeom prst="rect">
             <a:avLst/>
@@ -5928,105 +8153,565 @@
           </a:bodyPr>
           <a:lstStyle/>
           <a:p>
+            <a:pPr algn="r"/>
+            <a:r>
+              <a:rPr sz="900">
+                <a:solidFill>
+                  <a:srgbClr val="A5A8B0"/>
+                </a:solidFill>
+                <a:latin typeface="IBM Plex Mono"/>
+              </a:rPr>
+              <a:t>06 / 15</a:t>
+            </a:r>
+          </a:p>
+        </p:txBody>
+      </p:sp>
+      <p:sp>
+        <p:nvSpPr>
+          <p:cNvPr id="5" name="TextBox 4"/>
+          <p:cNvSpPr txBox="1"/>
+          <p:nvPr/>
+        </p:nvSpPr>
+        <p:spPr>
+          <a:xfrm>
+            <a:off x="640080" y="640080"/>
+            <a:ext cx="10972800" cy="1097280"/>
+          </a:xfrm>
+          <a:prstGeom prst="rect">
+            <a:avLst/>
+          </a:prstGeom>
+          <a:noFill/>
+        </p:spPr>
+        <p:txBody>
+          <a:bodyPr wrap="none">
+            <a:spAutoFit/>
+          </a:bodyPr>
+          <a:lstStyle/>
+          <a:p>
+            <a:r>
+              <a:rPr sz="4000">
+                <a:solidFill>
+                  <a:srgbClr val="C9933A"/>
+                </a:solidFill>
+                <a:latin typeface="Cormorant Garamond"/>
+              </a:rPr>
+              <a:t>Mechanics map II</a:t>
+            </a:r>
+          </a:p>
+        </p:txBody>
+      </p:sp>
+      <p:sp>
+        <p:nvSpPr>
+          <p:cNvPr id="6" name="TextBox 5"/>
+          <p:cNvSpPr txBox="1"/>
+          <p:nvPr/>
+        </p:nvSpPr>
+        <p:spPr>
+          <a:xfrm>
+            <a:off x="667512" y="1508760"/>
+            <a:ext cx="10789920" cy="411480"/>
+          </a:xfrm>
+          <a:prstGeom prst="rect">
+            <a:avLst/>
+          </a:prstGeom>
+          <a:noFill/>
+        </p:spPr>
+        <p:txBody>
+          <a:bodyPr wrap="none">
+            <a:spAutoFit/>
+          </a:bodyPr>
+          <a:lstStyle/>
+          <a:p>
             <a:r>
               <a:rPr sz="1600">
                 <a:solidFill>
-                  <a:srgbClr val="A0A2A8"/>
+                  <a:srgbClr val="A5A8B0"/>
                 </a:solidFill>
                 <a:latin typeface="DM Sans"/>
               </a:rPr>
-              <a:t>How quality and trust are enforced</a:t>
-            </a:r>
-          </a:p>
-        </p:txBody>
-      </p:sp>
-      <p:sp>
-        <p:nvSpPr>
-          <p:cNvPr id="6" name="TextBox 5"/>
-          <p:cNvSpPr txBox="1"/>
-          <p:nvPr/>
-        </p:nvSpPr>
-        <p:spPr>
-          <a:xfrm>
-            <a:off x="731520" y="2148840"/>
-            <a:ext cx="10881360" cy="3566160"/>
-          </a:xfrm>
-          <a:prstGeom prst="rect">
-            <a:avLst/>
-          </a:prstGeom>
-          <a:noFill/>
-        </p:spPr>
-        <p:txBody>
-          <a:bodyPr wrap="square">
-            <a:spAutoFit/>
-          </a:bodyPr>
-          <a:lstStyle/>
-          <a:p>
-            <a:pPr>
-              <a:spcAft>
-                <a:spcPts val="1000"/>
-              </a:spcAft>
-              <a:defRPr sz="1800">
-                <a:solidFill>
-                  <a:srgbClr val="E9E9EA"/>
-                </a:solidFill>
-                <a:latin typeface="DM Sans"/>
-              </a:defRPr>
-            </a:pPr>
-            <a:r>
-              <a:t>SHIP preflight gates: build integrity + claim integrity + audience integrity.</a:t>
-            </a:r>
-          </a:p>
-          <a:p>
-            <a:pPr>
-              <a:spcAft>
-                <a:spcPts val="1000"/>
-              </a:spcAft>
-              <a:defRPr sz="1800">
-                <a:solidFill>
-                  <a:srgbClr val="E9E9EA"/>
-                </a:solidFill>
-                <a:latin typeface="DM Sans"/>
-              </a:defRPr>
-            </a:pPr>
-            <a:r>
-              <a:t>Invariant lock: universal audience framing, no niche drift, no manipulative copy.</a:t>
-            </a:r>
-          </a:p>
-          <a:p>
-            <a:pPr>
-              <a:spcAft>
-                <a:spcPts val="1000"/>
-              </a:spcAft>
-              <a:defRPr sz="1800">
-                <a:solidFill>
-                  <a:srgbClr val="E9E9EA"/>
-                </a:solidFill>
-                <a:latin typeface="DM Sans"/>
-              </a:defRPr>
-            </a:pPr>
-            <a:r>
-              <a:t>Execution quality gate: coherent pass, post-change verification, release blocking on failure.</a:t>
-            </a:r>
-          </a:p>
-          <a:p>
-            <a:pPr>
-              <a:spcAft>
-                <a:spcPts val="1000"/>
-              </a:spcAft>
-              <a:defRPr sz="1800">
-                <a:solidFill>
-                  <a:srgbClr val="E9E9EA"/>
-                </a:solidFill>
-                <a:latin typeface="DM Sans"/>
-              </a:defRPr>
-            </a:pPr>
-            <a:r>
-              <a:t>Subscription truth, cloud restore, and diagnostics are treated as trust-critical infrastructure.</a:t>
-            </a:r>
-          </a:p>
-        </p:txBody>
-      </p:sp>
+              <a:t>Longitudinal conditioning and risk reduction</a:t>
+            </a:r>
+          </a:p>
+        </p:txBody>
+      </p:sp>
+      <p:graphicFrame>
+        <p:nvGraphicFramePr>
+          <p:cNvPr id="7" name="Table 6"/>
+          <p:cNvGraphicFramePr>
+            <a:graphicFrameLocks noGrp="1"/>
+          </p:cNvGraphicFramePr>
+          <p:nvPr/>
+        </p:nvGraphicFramePr>
+        <p:xfrm>
+          <a:off x="502920" y="1783080"/>
+          <a:ext cx="11201400" cy="4663440"/>
+        </p:xfrm>
+        <a:graphic>
+          <a:graphicData uri="http://schemas.openxmlformats.org/drawingml/2006/table">
+            <a:tbl>
+              <a:tblPr firstRow="1" bandRow="1">
+                <a:tableStyleId>{5C22544A-7EE6-4342-B048-85BDC9FD1C3A}</a:tableStyleId>
+              </a:tblPr>
+              <a:tblGrid>
+                <a:gridCol w="1783080"/>
+                <a:gridCol w="2880360"/>
+                <a:gridCol w="3154680"/>
+                <a:gridCol w="3383280"/>
+              </a:tblGrid>
+              <a:tr h="932688">
+                <a:tc>
+                  <a:txBody>
+                    <a:bodyPr/>
+                    <a:lstStyle/>
+                    <a:p>
+                      <a:r>
+                        <a:rPr sz="1200">
+                          <a:solidFill>
+                            <a:srgbClr val="C9933A"/>
+                          </a:solidFill>
+                          <a:latin typeface="DM Sans"/>
+                        </a:rPr>
+                        <a:t>Mechanic</a:t>
+                      </a:r>
+                    </a:p>
+                  </a:txBody>
+                  <a:tcPr marL="64008" marR="64008" marT="36576" marB="36576">
+                    <a:solidFill>
+                      <a:srgbClr val="17191D"/>
+                    </a:solidFill>
+                  </a:tcPr>
+                </a:tc>
+                <a:tc>
+                  <a:txBody>
+                    <a:bodyPr/>
+                    <a:lstStyle/>
+                    <a:p>
+                      <a:r>
+                        <a:rPr sz="1200">
+                          <a:solidFill>
+                            <a:srgbClr val="C9933A"/>
+                          </a:solidFill>
+                          <a:latin typeface="DM Sans"/>
+                        </a:rPr>
+                        <a:t>Scientific basis</a:t>
+                      </a:r>
+                    </a:p>
+                  </a:txBody>
+                  <a:tcPr marL="64008" marR="64008" marT="36576" marB="36576">
+                    <a:solidFill>
+                      <a:srgbClr val="17191D"/>
+                    </a:solidFill>
+                  </a:tcPr>
+                </a:tc>
+                <a:tc>
+                  <a:txBody>
+                    <a:bodyPr/>
+                    <a:lstStyle/>
+                    <a:p>
+                      <a:r>
+                        <a:rPr sz="1200">
+                          <a:solidFill>
+                            <a:srgbClr val="C9933A"/>
+                          </a:solidFill>
+                          <a:latin typeface="DM Sans"/>
+                        </a:rPr>
+                        <a:t>Product implementation</a:t>
+                      </a:r>
+                    </a:p>
+                  </a:txBody>
+                  <a:tcPr marL="64008" marR="64008" marT="36576" marB="36576">
+                    <a:solidFill>
+                      <a:srgbClr val="17191D"/>
+                    </a:solidFill>
+                  </a:tcPr>
+                </a:tc>
+                <a:tc>
+                  <a:txBody>
+                    <a:bodyPr/>
+                    <a:lstStyle/>
+                    <a:p>
+                      <a:r>
+                        <a:rPr sz="1200">
+                          <a:solidFill>
+                            <a:srgbClr val="C9933A"/>
+                          </a:solidFill>
+                          <a:latin typeface="DM Sans"/>
+                        </a:rPr>
+                        <a:t>Measured signal</a:t>
+                      </a:r>
+                    </a:p>
+                  </a:txBody>
+                  <a:tcPr marL="64008" marR="64008" marT="36576" marB="36576">
+                    <a:solidFill>
+                      <a:srgbClr val="17191D"/>
+                    </a:solidFill>
+                  </a:tcPr>
+                </a:tc>
+              </a:tr>
+              <a:tr h="932688">
+                <a:tc>
+                  <a:txBody>
+                    <a:bodyPr/>
+                    <a:lstStyle/>
+                    <a:p>
+                      <a:r>
+                        <a:rPr sz="1000">
+                          <a:solidFill>
+                            <a:srgbClr val="C4C6CC"/>
+                          </a:solidFill>
+                          <a:latin typeface="DM Sans"/>
+                        </a:rPr>
+                        <a:t>Stress inoculation</a:t>
+                      </a:r>
+                    </a:p>
+                  </a:txBody>
+                  <a:tcPr marL="64008" marR="64008" marT="36576" marB="36576">
+                    <a:solidFill>
+                      <a:srgbClr val="0E0F11"/>
+                    </a:solidFill>
+                  </a:tcPr>
+                </a:tc>
+                <a:tc>
+                  <a:txBody>
+                    <a:bodyPr/>
+                    <a:lstStyle/>
+                    <a:p>
+                      <a:r>
+                        <a:rPr sz="1000">
+                          <a:solidFill>
+                            <a:srgbClr val="C4C6CC"/>
+                          </a:solidFill>
+                          <a:latin typeface="DM Sans"/>
+                        </a:rPr>
+                        <a:t>Meichenbaum (1985)</a:t>
+                      </a:r>
+                    </a:p>
+                  </a:txBody>
+                  <a:tcPr marL="64008" marR="64008" marT="36576" marB="36576">
+                    <a:solidFill>
+                      <a:srgbClr val="0E0F11"/>
+                    </a:solidFill>
+                  </a:tcPr>
+                </a:tc>
+                <a:tc>
+                  <a:txBody>
+                    <a:bodyPr/>
+                    <a:lstStyle/>
+                    <a:p>
+                      <a:r>
+                        <a:rPr sz="1000">
+                          <a:solidFill>
+                            <a:srgbClr val="C4C6CC"/>
+                          </a:solidFill>
+                          <a:latin typeface="DM Sans"/>
+                        </a:rPr>
+                        <a:t>Morning baseline + EOD closure</a:t>
+                      </a:r>
+                    </a:p>
+                  </a:txBody>
+                  <a:tcPr marL="64008" marR="64008" marT="36576" marB="36576">
+                    <a:solidFill>
+                      <a:srgbClr val="0E0F11"/>
+                    </a:solidFill>
+                  </a:tcPr>
+                </a:tc>
+                <a:tc>
+                  <a:txBody>
+                    <a:bodyPr/>
+                    <a:lstStyle/>
+                    <a:p>
+                      <a:r>
+                        <a:rPr sz="1000">
+                          <a:solidFill>
+                            <a:srgbClr val="C4C6CC"/>
+                          </a:solidFill>
+                          <a:latin typeface="DM Sans"/>
+                        </a:rPr>
+                        <a:t>Loop adherence and relapse protection</a:t>
+                      </a:r>
+                    </a:p>
+                  </a:txBody>
+                  <a:tcPr marL="64008" marR="64008" marT="36576" marB="36576">
+                    <a:solidFill>
+                      <a:srgbClr val="0E0F11"/>
+                    </a:solidFill>
+                  </a:tcPr>
+                </a:tc>
+              </a:tr>
+              <a:tr h="932688">
+                <a:tc>
+                  <a:txBody>
+                    <a:bodyPr/>
+                    <a:lstStyle/>
+                    <a:p>
+                      <a:r>
+                        <a:rPr sz="1000">
+                          <a:solidFill>
+                            <a:srgbClr val="C4C6CC"/>
+                          </a:solidFill>
+                          <a:latin typeface="DM Sans"/>
+                        </a:rPr>
+                        <a:t>Autonomic flexibility</a:t>
+                      </a:r>
+                    </a:p>
+                  </a:txBody>
+                  <a:tcPr marL="64008" marR="64008" marT="36576" marB="36576">
+                    <a:solidFill>
+                      <a:srgbClr val="1F2228"/>
+                    </a:solidFill>
+                  </a:tcPr>
+                </a:tc>
+                <a:tc>
+                  <a:txBody>
+                    <a:bodyPr/>
+                    <a:lstStyle/>
+                    <a:p>
+                      <a:r>
+                        <a:rPr sz="1000">
+                          <a:solidFill>
+                            <a:srgbClr val="C4C6CC"/>
+                          </a:solidFill>
+                          <a:latin typeface="DM Sans"/>
+                        </a:rPr>
+                        <a:t>Thayer &amp; Lane (2000); Appelhans &amp; Luecken (2006)</a:t>
+                      </a:r>
+                    </a:p>
+                  </a:txBody>
+                  <a:tcPr marL="64008" marR="64008" marT="36576" marB="36576">
+                    <a:solidFill>
+                      <a:srgbClr val="1F2228"/>
+                    </a:solidFill>
+                  </a:tcPr>
+                </a:tc>
+                <a:tc>
+                  <a:txBody>
+                    <a:bodyPr/>
+                    <a:lstStyle/>
+                    <a:p>
+                      <a:r>
+                        <a:rPr sz="1000">
+                          <a:solidFill>
+                            <a:srgbClr val="C4C6CC"/>
+                          </a:solidFill>
+                          <a:latin typeface="DM Sans"/>
+                        </a:rPr>
+                        <a:t>Repeated regulation reps over sessions</a:t>
+                      </a:r>
+                    </a:p>
+                  </a:txBody>
+                  <a:tcPr marL="64008" marR="64008" marT="36576" marB="36576">
+                    <a:solidFill>
+                      <a:srgbClr val="1F2228"/>
+                    </a:solidFill>
+                  </a:tcPr>
+                </a:tc>
+                <a:tc>
+                  <a:txBody>
+                    <a:bodyPr/>
+                    <a:lstStyle/>
+                    <a:p>
+                      <a:r>
+                        <a:rPr sz="1000">
+                          <a:solidFill>
+                            <a:srgbClr val="C4C6CC"/>
+                          </a:solidFill>
+                          <a:latin typeface="DM Sans"/>
+                        </a:rPr>
+                        <a:t>Faster baseline return over time</a:t>
+                      </a:r>
+                    </a:p>
+                  </a:txBody>
+                  <a:tcPr marL="64008" marR="64008" marT="36576" marB="36576">
+                    <a:solidFill>
+                      <a:srgbClr val="1F2228"/>
+                    </a:solidFill>
+                  </a:tcPr>
+                </a:tc>
+              </a:tr>
+              <a:tr h="932688">
+                <a:tc>
+                  <a:txBody>
+                    <a:bodyPr/>
+                    <a:lstStyle/>
+                    <a:p>
+                      <a:r>
+                        <a:rPr sz="1000">
+                          <a:solidFill>
+                            <a:srgbClr val="C4C6CC"/>
+                          </a:solidFill>
+                          <a:latin typeface="DM Sans"/>
+                        </a:rPr>
+                        <a:t>Emotional granularity</a:t>
+                      </a:r>
+                    </a:p>
+                  </a:txBody>
+                  <a:tcPr marL="64008" marR="64008" marT="36576" marB="36576">
+                    <a:solidFill>
+                      <a:srgbClr val="0E0F11"/>
+                    </a:solidFill>
+                  </a:tcPr>
+                </a:tc>
+                <a:tc>
+                  <a:txBody>
+                    <a:bodyPr/>
+                    <a:lstStyle/>
+                    <a:p>
+                      <a:r>
+                        <a:rPr sz="1000">
+                          <a:solidFill>
+                            <a:srgbClr val="C4C6CC"/>
+                          </a:solidFill>
+                          <a:latin typeface="DM Sans"/>
+                        </a:rPr>
+                        <a:t>Barrett et al. (2001); Kashdan et al. (2015)</a:t>
+                      </a:r>
+                    </a:p>
+                  </a:txBody>
+                  <a:tcPr marL="64008" marR="64008" marT="36576" marB="36576">
+                    <a:solidFill>
+                      <a:srgbClr val="0E0F11"/>
+                    </a:solidFill>
+                  </a:tcPr>
+                </a:tc>
+                <a:tc>
+                  <a:txBody>
+                    <a:bodyPr/>
+                    <a:lstStyle/>
+                    <a:p>
+                      <a:r>
+                        <a:rPr sz="1000">
+                          <a:solidFill>
+                            <a:srgbClr val="C4C6CC"/>
+                          </a:solidFill>
+                          <a:latin typeface="DM Sans"/>
+                        </a:rPr>
+                        <a:t>Expanded emotion taxonomy in Pulse</a:t>
+                      </a:r>
+                    </a:p>
+                  </a:txBody>
+                  <a:tcPr marL="64008" marR="64008" marT="36576" marB="36576">
+                    <a:solidFill>
+                      <a:srgbClr val="0E0F11"/>
+                    </a:solidFill>
+                  </a:tcPr>
+                </a:tc>
+                <a:tc>
+                  <a:txBody>
+                    <a:bodyPr/>
+                    <a:lstStyle/>
+                    <a:p>
+                      <a:r>
+                        <a:rPr sz="1000">
+                          <a:solidFill>
+                            <a:srgbClr val="C4C6CC"/>
+                          </a:solidFill>
+                          <a:latin typeface="DM Sans"/>
+                        </a:rPr>
+                        <a:t>Higher-quality self-report and intervention fit</a:t>
+                      </a:r>
+                    </a:p>
+                  </a:txBody>
+                  <a:tcPr marL="64008" marR="64008" marT="36576" marB="36576">
+                    <a:solidFill>
+                      <a:srgbClr val="0E0F11"/>
+                    </a:solidFill>
+                  </a:tcPr>
+                </a:tc>
+              </a:tr>
+              <a:tr h="932688">
+                <a:tc>
+                  <a:txBody>
+                    <a:bodyPr/>
+                    <a:lstStyle/>
+                    <a:p>
+                      <a:r>
+                        <a:rPr sz="1000">
+                          <a:solidFill>
+                            <a:srgbClr val="C4C6CC"/>
+                          </a:solidFill>
+                          <a:latin typeface="DM Sans"/>
+                        </a:rPr>
+                        <a:t>Misattribution correction</a:t>
+                      </a:r>
+                    </a:p>
+                  </a:txBody>
+                  <a:tcPr marL="64008" marR="64008" marT="36576" marB="36576">
+                    <a:solidFill>
+                      <a:srgbClr val="1F2228"/>
+                    </a:solidFill>
+                  </a:tcPr>
+                </a:tc>
+                <a:tc>
+                  <a:txBody>
+                    <a:bodyPr/>
+                    <a:lstStyle/>
+                    <a:p>
+                      <a:r>
+                        <a:rPr sz="1000">
+                          <a:solidFill>
+                            <a:srgbClr val="C4C6CC"/>
+                          </a:solidFill>
+                          <a:latin typeface="DM Sans"/>
+                        </a:rPr>
+                        <a:t>Schachter &amp; Singer (1962); Goldstein et al. (2007)</a:t>
+                      </a:r>
+                    </a:p>
+                  </a:txBody>
+                  <a:tcPr marL="64008" marR="64008" marT="36576" marB="36576">
+                    <a:solidFill>
+                      <a:srgbClr val="1F2228"/>
+                    </a:solidFill>
+                  </a:tcPr>
+                </a:tc>
+                <a:tc>
+                  <a:txBody>
+                    <a:bodyPr/>
+                    <a:lstStyle/>
+                    <a:p>
+                      <a:r>
+                        <a:rPr sz="1000">
+                          <a:solidFill>
+                            <a:srgbClr val="C4C6CC"/>
+                          </a:solidFill>
+                          <a:latin typeface="DM Sans"/>
+                        </a:rPr>
+                        <a:t>Bio-filter modifies interpretation before response</a:t>
+                      </a:r>
+                    </a:p>
+                  </a:txBody>
+                  <a:tcPr marL="64008" marR="64008" marT="36576" marB="36576">
+                    <a:solidFill>
+                      <a:srgbClr val="1F2228"/>
+                    </a:solidFill>
+                  </a:tcPr>
+                </a:tc>
+                <a:tc>
+                  <a:txBody>
+                    <a:bodyPr/>
+                    <a:lstStyle/>
+                    <a:p>
+                      <a:r>
+                        <a:rPr sz="1000">
+                          <a:solidFill>
+                            <a:srgbClr val="C4C6CC"/>
+                          </a:solidFill>
+                          <a:latin typeface="DM Sans"/>
+                        </a:rPr>
+                        <a:t>False-threat interpretation reduction</a:t>
+                      </a:r>
+                    </a:p>
+                  </a:txBody>
+                  <a:tcPr marL="64008" marR="64008" marT="36576" marB="36576">
+                    <a:solidFill>
+                      <a:srgbClr val="1F2228"/>
+                    </a:solidFill>
+                  </a:tcPr>
+                </a:tc>
+              </a:tr>
+            </a:tbl>
+          </a:graphicData>
+        </a:graphic>
+      </p:graphicFrame>
     </p:spTree>
   </p:cSld>
   <p:clrMapOvr>
@@ -6055,54 +8740,20 @@
       <p:grpSpPr/>
       <p:sp>
         <p:nvSpPr>
-          <p:cNvPr id="2" name="TextBox 1"/>
-          <p:cNvSpPr txBox="1"/>
-          <p:nvPr/>
-        </p:nvSpPr>
-        <p:spPr>
-          <a:xfrm>
-            <a:off x="640080" y="320040"/>
-            <a:ext cx="5669280" cy="320040"/>
-          </a:xfrm>
-          <a:prstGeom prst="rect">
-            <a:avLst/>
-          </a:prstGeom>
-          <a:noFill/>
-        </p:spPr>
-        <p:txBody>
-          <a:bodyPr wrap="none">
-            <a:spAutoFit/>
-          </a:bodyPr>
-          <a:lstStyle/>
-          <a:p>
-            <a:r>
-              <a:rPr sz="1100">
-                <a:solidFill>
-                  <a:srgbClr val="C9933A"/>
-                </a:solidFill>
-                <a:latin typeface="IBM Plex Mono"/>
-              </a:rPr>
-              <a:t>STILLFORM · STRATEGIC DECK</a:t>
-            </a:r>
-          </a:p>
-        </p:txBody>
-      </p:sp>
-      <p:sp>
-        <p:nvSpPr>
-          <p:cNvPr id="3" name="Rectangle 2"/>
+          <p:cNvPr id="2" name="Rectangle 1"/>
           <p:cNvSpPr/>
           <p:nvPr/>
         </p:nvSpPr>
         <p:spPr>
           <a:xfrm>
-            <a:off x="640080" y="640080"/>
-            <a:ext cx="10972800" cy="9144"/>
+            <a:off x="0" y="0"/>
+            <a:ext cx="12191695" cy="320040"/>
           </a:xfrm>
           <a:prstGeom prst="rect">
             <a:avLst/>
           </a:prstGeom>
           <a:solidFill>
-            <a:srgbClr val="32343A"/>
+            <a:srgbClr val="17191D"/>
           </a:solidFill>
           <a:ln>
             <a:noFill/>
@@ -6132,14 +8783,14 @@
       </p:sp>
       <p:sp>
         <p:nvSpPr>
-          <p:cNvPr id="4" name="TextBox 3"/>
+          <p:cNvPr id="3" name="TextBox 2"/>
           <p:cNvSpPr txBox="1"/>
           <p:nvPr/>
         </p:nvSpPr>
         <p:spPr>
           <a:xfrm>
-            <a:off x="640080" y="868680"/>
-            <a:ext cx="10789920" cy="1097280"/>
+            <a:off x="502920" y="109728"/>
+            <a:ext cx="5029200" cy="182880"/>
           </a:xfrm>
           <a:prstGeom prst="rect">
             <a:avLst/>
@@ -6153,27 +8804,27 @@
           <a:lstStyle/>
           <a:p>
             <a:r>
-              <a:rPr sz="3800">
+              <a:rPr sz="900">
                 <a:solidFill>
                   <a:srgbClr val="C9933A"/>
                 </a:solidFill>
-                <a:latin typeface="Cormorant Garamond"/>
+                <a:latin typeface="IBM Plex Mono"/>
               </a:rPr>
-              <a:t>Business model and distribution</a:t>
-            </a:r>
-          </a:p>
-        </p:txBody>
-      </p:sp>
-      <p:sp>
-        <p:nvSpPr>
-          <p:cNvPr id="5" name="TextBox 4"/>
+              <a:t>STILLFORM · STRATEGIC DECK</a:t>
+            </a:r>
+          </a:p>
+        </p:txBody>
+      </p:sp>
+      <p:sp>
+        <p:nvSpPr>
+          <p:cNvPr id="4" name="TextBox 3"/>
           <p:cNvSpPr txBox="1"/>
           <p:nvPr/>
         </p:nvSpPr>
         <p:spPr>
           <a:xfrm>
-            <a:off x="658368" y="1737360"/>
-            <a:ext cx="10332720" cy="502920"/>
+            <a:off x="10332720" y="109728"/>
+            <a:ext cx="1371600" cy="182880"/>
           </a:xfrm>
           <a:prstGeom prst="rect">
             <a:avLst/>
@@ -6186,385 +8837,210 @@
           </a:bodyPr>
           <a:lstStyle/>
           <a:p>
+            <a:pPr algn="r"/>
+            <a:r>
+              <a:rPr sz="900">
+                <a:solidFill>
+                  <a:srgbClr val="A5A8B0"/>
+                </a:solidFill>
+                <a:latin typeface="IBM Plex Mono"/>
+              </a:rPr>
+              <a:t>07 / 15</a:t>
+            </a:r>
+          </a:p>
+        </p:txBody>
+      </p:sp>
+      <p:sp>
+        <p:nvSpPr>
+          <p:cNvPr id="5" name="TextBox 4"/>
+          <p:cNvSpPr txBox="1"/>
+          <p:nvPr/>
+        </p:nvSpPr>
+        <p:spPr>
+          <a:xfrm>
+            <a:off x="640080" y="640080"/>
+            <a:ext cx="10972800" cy="1097280"/>
+          </a:xfrm>
+          <a:prstGeom prst="rect">
+            <a:avLst/>
+          </a:prstGeom>
+          <a:noFill/>
+        </p:spPr>
+        <p:txBody>
+          <a:bodyPr wrap="none">
+            <a:spAutoFit/>
+          </a:bodyPr>
+          <a:lstStyle/>
+          <a:p>
+            <a:r>
+              <a:rPr sz="4000">
+                <a:solidFill>
+                  <a:srgbClr val="C9933A"/>
+                </a:solidFill>
+                <a:latin typeface="Cormorant Garamond"/>
+              </a:rPr>
+              <a:t>Product System</a:t>
+            </a:r>
+          </a:p>
+        </p:txBody>
+      </p:sp>
+      <p:sp>
+        <p:nvSpPr>
+          <p:cNvPr id="6" name="TextBox 5"/>
+          <p:cNvSpPr txBox="1"/>
+          <p:nvPr/>
+        </p:nvSpPr>
+        <p:spPr>
+          <a:xfrm>
+            <a:off x="667512" y="1508760"/>
+            <a:ext cx="10789920" cy="411480"/>
+          </a:xfrm>
+          <a:prstGeom prst="rect">
+            <a:avLst/>
+          </a:prstGeom>
+          <a:noFill/>
+        </p:spPr>
+        <p:txBody>
+          <a:bodyPr wrap="none">
+            <a:spAutoFit/>
+          </a:bodyPr>
+          <a:lstStyle/>
+          <a:p>
             <a:r>
               <a:rPr sz="1600">
                 <a:solidFill>
-                  <a:srgbClr val="A0A2A8"/>
+                  <a:srgbClr val="A5A8B0"/>
                 </a:solidFill>
                 <a:latin typeface="DM Sans"/>
               </a:rPr>
-              <a:t>Operator-grade business plan snapshot</a:t>
-            </a:r>
-          </a:p>
-        </p:txBody>
-      </p:sp>
-      <p:graphicFrame>
-        <p:nvGraphicFramePr>
-          <p:cNvPr id="6" name="Table 5"/>
-          <p:cNvGraphicFramePr>
-            <a:graphicFrameLocks noGrp="1"/>
-          </p:cNvGraphicFramePr>
-          <p:nvPr/>
-        </p:nvGraphicFramePr>
-        <p:xfrm>
-          <a:off x="640080" y="1828800"/>
-          <a:ext cx="10972800" cy="4480560"/>
-        </p:xfrm>
-        <a:graphic>
-          <a:graphicData uri="http://schemas.openxmlformats.org/drawingml/2006/table">
-            <a:tbl>
-              <a:tblPr firstRow="1" bandRow="1">
-                <a:tableStyleId>{5C22544A-7EE6-4342-B048-85BDC9FD1C3A}</a:tableStyleId>
-              </a:tblPr>
-              <a:tblGrid>
-                <a:gridCol w="2011680"/>
-                <a:gridCol w="3931920"/>
-                <a:gridCol w="5029200"/>
-              </a:tblGrid>
-              <a:tr h="896112">
-                <a:tc>
-                  <a:txBody>
-                    <a:bodyPr/>
-                    <a:lstStyle/>
-                    <a:p>
-                      <a:r>
-                        <a:rPr sz="1200">
-                          <a:solidFill>
-                            <a:srgbClr val="C9933A"/>
-                          </a:solidFill>
-                          <a:latin typeface="DM Sans"/>
-                        </a:rPr>
-                        <a:t>Component</a:t>
-                      </a:r>
-                    </a:p>
-                  </a:txBody>
-                  <a:tcPr>
-                    <a:solidFill>
-                      <a:srgbClr val="17191D"/>
-                    </a:solidFill>
-                  </a:tcPr>
-                </a:tc>
-                <a:tc>
-                  <a:txBody>
-                    <a:bodyPr/>
-                    <a:lstStyle/>
-                    <a:p>
-                      <a:r>
-                        <a:rPr sz="1200">
-                          <a:solidFill>
-                            <a:srgbClr val="C9933A"/>
-                          </a:solidFill>
-                          <a:latin typeface="DM Sans"/>
-                        </a:rPr>
-                        <a:t>Current position</a:t>
-                      </a:r>
-                    </a:p>
-                  </a:txBody>
-                  <a:tcPr>
-                    <a:solidFill>
-                      <a:srgbClr val="17191D"/>
-                    </a:solidFill>
-                  </a:tcPr>
-                </a:tc>
-                <a:tc>
-                  <a:txBody>
-                    <a:bodyPr/>
-                    <a:lstStyle/>
-                    <a:p>
-                      <a:r>
-                        <a:rPr sz="1200">
-                          <a:solidFill>
-                            <a:srgbClr val="C9933A"/>
-                          </a:solidFill>
-                          <a:latin typeface="DM Sans"/>
-                        </a:rPr>
-                        <a:t>Why this is defensible</a:t>
-                      </a:r>
-                    </a:p>
-                  </a:txBody>
-                  <a:tcPr>
-                    <a:solidFill>
-                      <a:srgbClr val="17191D"/>
-                    </a:solidFill>
-                  </a:tcPr>
-                </a:tc>
-              </a:tr>
-              <a:tr h="896112">
-                <a:tc>
-                  <a:txBody>
-                    <a:bodyPr/>
-                    <a:lstStyle/>
-                    <a:p>
-                      <a:r>
-                        <a:rPr sz="1100">
-                          <a:solidFill>
-                            <a:srgbClr val="E9E9EA"/>
-                          </a:solidFill>
-                          <a:latin typeface="DM Sans"/>
-                        </a:rPr>
-                        <a:t>Revenue model</a:t>
-                      </a:r>
-                    </a:p>
-                  </a:txBody>
-                  <a:tcPr>
-                    <a:solidFill>
-                      <a:srgbClr val="0E0F11"/>
-                    </a:solidFill>
-                  </a:tcPr>
-                </a:tc>
-                <a:tc>
-                  <a:txBody>
-                    <a:bodyPr/>
-                    <a:lstStyle/>
-                    <a:p>
-                      <a:r>
-                        <a:rPr sz="1100">
-                          <a:solidFill>
-                            <a:srgbClr val="E9E9EA"/>
-                          </a:solidFill>
-                          <a:latin typeface="DM Sans"/>
-                        </a:rPr>
-                        <a:t>Single tier subscription ($14.99 / $9.99 annualized)</a:t>
-                      </a:r>
-                    </a:p>
-                  </a:txBody>
-                  <a:tcPr>
-                    <a:solidFill>
-                      <a:srgbClr val="0E0F11"/>
-                    </a:solidFill>
-                  </a:tcPr>
-                </a:tc>
-                <a:tc>
-                  <a:txBody>
-                    <a:bodyPr/>
-                    <a:lstStyle/>
-                    <a:p>
-                      <a:r>
-                        <a:rPr sz="1100">
-                          <a:solidFill>
-                            <a:srgbClr val="E9E9EA"/>
-                          </a:solidFill>
-                          <a:latin typeface="DM Sans"/>
-                        </a:rPr>
-                        <a:t>Low decision friction + trust alignment</a:t>
-                      </a:r>
-                    </a:p>
-                  </a:txBody>
-                  <a:tcPr>
-                    <a:solidFill>
-                      <a:srgbClr val="0E0F11"/>
-                    </a:solidFill>
-                  </a:tcPr>
-                </a:tc>
-              </a:tr>
-              <a:tr h="896112">
-                <a:tc>
-                  <a:txBody>
-                    <a:bodyPr/>
-                    <a:lstStyle/>
-                    <a:p>
-                      <a:r>
-                        <a:rPr sz="1100">
-                          <a:solidFill>
-                            <a:srgbClr val="E9E9EA"/>
-                          </a:solidFill>
-                          <a:latin typeface="DM Sans"/>
-                        </a:rPr>
-                        <a:t>Category</a:t>
-                      </a:r>
-                    </a:p>
-                  </a:txBody>
-                  <a:tcPr>
-                    <a:solidFill>
-                      <a:srgbClr val="0E0F11"/>
-                    </a:solidFill>
-                  </a:tcPr>
-                </a:tc>
-                <a:tc>
-                  <a:txBody>
-                    <a:bodyPr/>
-                    <a:lstStyle/>
-                    <a:p>
-                      <a:r>
-                        <a:rPr sz="1100">
-                          <a:solidFill>
-                            <a:srgbClr val="E9E9EA"/>
-                          </a:solidFill>
-                          <a:latin typeface="DM Sans"/>
-                        </a:rPr>
-                        <a:t>Preventive risk management for behavior</a:t>
-                      </a:r>
-                    </a:p>
-                  </a:txBody>
-                  <a:tcPr>
-                    <a:solidFill>
-                      <a:srgbClr val="0E0F11"/>
-                    </a:solidFill>
-                  </a:tcPr>
-                </a:tc>
-                <a:tc>
-                  <a:txBody>
-                    <a:bodyPr/>
-                    <a:lstStyle/>
-                    <a:p>
-                      <a:r>
-                        <a:rPr sz="1100">
-                          <a:solidFill>
-                            <a:srgbClr val="E9E9EA"/>
-                          </a:solidFill>
-                          <a:latin typeface="DM Sans"/>
-                        </a:rPr>
-                        <a:t>Differentiated from generic wellness consumption</a:t>
-                      </a:r>
-                    </a:p>
-                  </a:txBody>
-                  <a:tcPr>
-                    <a:solidFill>
-                      <a:srgbClr val="0E0F11"/>
-                    </a:solidFill>
-                  </a:tcPr>
-                </a:tc>
-              </a:tr>
-              <a:tr h="896112">
-                <a:tc>
-                  <a:txBody>
-                    <a:bodyPr/>
-                    <a:lstStyle/>
-                    <a:p>
-                      <a:r>
-                        <a:rPr sz="1100">
-                          <a:solidFill>
-                            <a:srgbClr val="E9E9EA"/>
-                          </a:solidFill>
-                          <a:latin typeface="DM Sans"/>
-                        </a:rPr>
-                        <a:t>Distribution</a:t>
-                      </a:r>
-                    </a:p>
-                  </a:txBody>
-                  <a:tcPr>
-                    <a:solidFill>
-                      <a:srgbClr val="0E0F11"/>
-                    </a:solidFill>
-                  </a:tcPr>
-                </a:tc>
-                <a:tc>
-                  <a:txBody>
-                    <a:bodyPr/>
-                    <a:lstStyle/>
-                    <a:p>
-                      <a:r>
-                        <a:rPr sz="1100">
-                          <a:solidFill>
-                            <a:srgbClr val="E9E9EA"/>
-                          </a:solidFill>
-                          <a:latin typeface="DM Sans"/>
-                        </a:rPr>
-                        <a:t>High-trust channels: coaches, therapist-adjacent, communities</a:t>
-                      </a:r>
-                    </a:p>
-                  </a:txBody>
-                  <a:tcPr>
-                    <a:solidFill>
-                      <a:srgbClr val="0E0F11"/>
-                    </a:solidFill>
-                  </a:tcPr>
-                </a:tc>
-                <a:tc>
-                  <a:txBody>
-                    <a:bodyPr/>
-                    <a:lstStyle/>
-                    <a:p>
-                      <a:r>
-                        <a:rPr sz="1100">
-                          <a:solidFill>
-                            <a:srgbClr val="E9E9EA"/>
-                          </a:solidFill>
-                          <a:latin typeface="DM Sans"/>
-                        </a:rPr>
-                        <a:t>Trust transfer beats cold top-of-funnel spend</a:t>
-                      </a:r>
-                    </a:p>
-                  </a:txBody>
-                  <a:tcPr>
-                    <a:solidFill>
-                      <a:srgbClr val="0E0F11"/>
-                    </a:solidFill>
-                  </a:tcPr>
-                </a:tc>
-              </a:tr>
-              <a:tr h="896112">
-                <a:tc>
-                  <a:txBody>
-                    <a:bodyPr/>
-                    <a:lstStyle/>
-                    <a:p>
-                      <a:r>
-                        <a:rPr sz="1100">
-                          <a:solidFill>
-                            <a:srgbClr val="E9E9EA"/>
-                          </a:solidFill>
-                          <a:latin typeface="DM Sans"/>
-                        </a:rPr>
-                        <a:t>Retention thesis</a:t>
-                      </a:r>
-                    </a:p>
-                  </a:txBody>
-                  <a:tcPr>
-                    <a:solidFill>
-                      <a:srgbClr val="0E0F11"/>
-                    </a:solidFill>
-                  </a:tcPr>
-                </a:tc>
-                <a:tc>
-                  <a:txBody>
-                    <a:bodyPr/>
-                    <a:lstStyle/>
-                    <a:p>
-                      <a:r>
-                        <a:rPr sz="1100">
-                          <a:solidFill>
-                            <a:srgbClr val="E9E9EA"/>
-                          </a:solidFill>
-                          <a:latin typeface="DM Sans"/>
-                        </a:rPr>
-                        <a:t>Daily loop utility + measured progress + continuity</a:t>
-                      </a:r>
-                    </a:p>
-                  </a:txBody>
-                  <a:tcPr>
-                    <a:solidFill>
-                      <a:srgbClr val="0E0F11"/>
-                    </a:solidFill>
-                  </a:tcPr>
-                </a:tc>
-                <a:tc>
-                  <a:txBody>
-                    <a:bodyPr/>
-                    <a:lstStyle/>
-                    <a:p>
-                      <a:r>
-                        <a:rPr sz="1100">
-                          <a:solidFill>
-                            <a:srgbClr val="E9E9EA"/>
-                          </a:solidFill>
-                          <a:latin typeface="DM Sans"/>
-                        </a:rPr>
-                        <a:t>Habit + proof + context memory creates stickiness</a:t>
-                      </a:r>
-                    </a:p>
-                  </a:txBody>
-                  <a:tcPr>
-                    <a:solidFill>
-                      <a:srgbClr val="0E0F11"/>
-                    </a:solidFill>
-                  </a:tcPr>
-                </a:tc>
-              </a:tr>
-            </a:tbl>
-          </a:graphicData>
-        </a:graphic>
-      </p:graphicFrame>
+              <a:t>SECTION BREAK</a:t>
+            </a:r>
+          </a:p>
+        </p:txBody>
+      </p:sp>
+      <p:sp>
+        <p:nvSpPr>
+          <p:cNvPr id="7" name="Rounded Rectangle 6"/>
+          <p:cNvSpPr/>
+          <p:nvPr/>
+        </p:nvSpPr>
+        <p:spPr>
+          <a:xfrm>
+            <a:off x="868680" y="2103120"/>
+            <a:ext cx="10378440" cy="3154680"/>
+          </a:xfrm>
+          <a:prstGeom prst="roundRect">
+            <a:avLst/>
+          </a:prstGeom>
+          <a:solidFill>
+            <a:srgbClr val="17191D"/>
+          </a:solidFill>
+          <a:ln w="15240">
+            <a:solidFill>
+              <a:srgbClr val="353840"/>
+            </a:solidFill>
+          </a:ln>
+        </p:spPr>
+        <p:style>
+          <a:lnRef idx="1">
+            <a:schemeClr val="accent1"/>
+          </a:lnRef>
+          <a:fillRef idx="3">
+            <a:schemeClr val="accent1"/>
+          </a:fillRef>
+          <a:effectRef idx="2">
+            <a:schemeClr val="accent1"/>
+          </a:effectRef>
+          <a:fontRef idx="minor">
+            <a:schemeClr val="lt1"/>
+          </a:fontRef>
+        </p:style>
+        <p:txBody>
+          <a:bodyPr rtlCol="0" anchor="ctr"/>
+          <a:lstStyle/>
+          <a:p>
+            <a:pPr algn="ctr"/>
+          </a:p>
+        </p:txBody>
+      </p:sp>
+      <p:sp>
+        <p:nvSpPr>
+          <p:cNvPr id="8" name="Rectangle 7"/>
+          <p:cNvSpPr/>
+          <p:nvPr/>
+        </p:nvSpPr>
+        <p:spPr>
+          <a:xfrm>
+            <a:off x="868680" y="2103120"/>
+            <a:ext cx="146304" cy="3154680"/>
+          </a:xfrm>
+          <a:prstGeom prst="rect">
+            <a:avLst/>
+          </a:prstGeom>
+          <a:solidFill>
+            <a:srgbClr val="C9933A"/>
+          </a:solidFill>
+          <a:ln>
+            <a:noFill/>
+          </a:ln>
+        </p:spPr>
+        <p:style>
+          <a:lnRef idx="1">
+            <a:schemeClr val="accent1"/>
+          </a:lnRef>
+          <a:fillRef idx="3">
+            <a:schemeClr val="accent1"/>
+          </a:fillRef>
+          <a:effectRef idx="2">
+            <a:schemeClr val="accent1"/>
+          </a:effectRef>
+          <a:fontRef idx="minor">
+            <a:schemeClr val="lt1"/>
+          </a:fontRef>
+        </p:style>
+        <p:txBody>
+          <a:bodyPr rtlCol="0" anchor="ctr"/>
+          <a:lstStyle/>
+          <a:p>
+            <a:pPr algn="ctr"/>
+          </a:p>
+        </p:txBody>
+      </p:sp>
+      <p:sp>
+        <p:nvSpPr>
+          <p:cNvPr id="9" name="TextBox 8"/>
+          <p:cNvSpPr txBox="1"/>
+          <p:nvPr/>
+        </p:nvSpPr>
+        <p:spPr>
+          <a:xfrm>
+            <a:off x="1234440" y="2743200"/>
+            <a:ext cx="9326880" cy="1828800"/>
+          </a:xfrm>
+          <a:prstGeom prst="rect">
+            <a:avLst/>
+          </a:prstGeom>
+          <a:noFill/>
+        </p:spPr>
+        <p:txBody>
+          <a:bodyPr wrap="none">
+            <a:spAutoFit/>
+          </a:bodyPr>
+          <a:lstStyle/>
+          <a:p>
+            <a:pPr algn="l"/>
+            <a:r>
+              <a:rPr sz="2600">
+                <a:solidFill>
+                  <a:srgbClr val="E9E9EA"/>
+                </a:solidFill>
+                <a:latin typeface="DM Sans"/>
+              </a:rPr>
+              <a:t>Preventive loop design and measurable evidence surfaces.</a:t>
+            </a:r>
+          </a:p>
+        </p:txBody>
+      </p:sp>
     </p:spTree>
   </p:cSld>
   <p:clrMapOvr>
@@ -6593,54 +9069,20 @@
       <p:grpSpPr/>
       <p:sp>
         <p:nvSpPr>
-          <p:cNvPr id="2" name="TextBox 1"/>
-          <p:cNvSpPr txBox="1"/>
-          <p:nvPr/>
-        </p:nvSpPr>
-        <p:spPr>
-          <a:xfrm>
-            <a:off x="640080" y="320040"/>
-            <a:ext cx="5669280" cy="320040"/>
-          </a:xfrm>
-          <a:prstGeom prst="rect">
-            <a:avLst/>
-          </a:prstGeom>
-          <a:noFill/>
-        </p:spPr>
-        <p:txBody>
-          <a:bodyPr wrap="none">
-            <a:spAutoFit/>
-          </a:bodyPr>
-          <a:lstStyle/>
-          <a:p>
-            <a:r>
-              <a:rPr sz="1100">
-                <a:solidFill>
-                  <a:srgbClr val="C9933A"/>
-                </a:solidFill>
-                <a:latin typeface="IBM Plex Mono"/>
-              </a:rPr>
-              <a:t>STILLFORM · STRATEGIC DECK</a:t>
-            </a:r>
-          </a:p>
-        </p:txBody>
-      </p:sp>
-      <p:sp>
-        <p:nvSpPr>
-          <p:cNvPr id="3" name="Rectangle 2"/>
+          <p:cNvPr id="2" name="Rectangle 1"/>
           <p:cNvSpPr/>
           <p:nvPr/>
         </p:nvSpPr>
         <p:spPr>
           <a:xfrm>
-            <a:off x="640080" y="640080"/>
-            <a:ext cx="10972800" cy="9144"/>
+            <a:off x="0" y="0"/>
+            <a:ext cx="12191695" cy="320040"/>
           </a:xfrm>
           <a:prstGeom prst="rect">
             <a:avLst/>
           </a:prstGeom>
           <a:solidFill>
-            <a:srgbClr val="32343A"/>
+            <a:srgbClr val="17191D"/>
           </a:solidFill>
           <a:ln>
             <a:noFill/>
@@ -6670,14 +9112,14 @@
       </p:sp>
       <p:sp>
         <p:nvSpPr>
-          <p:cNvPr id="4" name="TextBox 3"/>
+          <p:cNvPr id="3" name="TextBox 2"/>
           <p:cNvSpPr txBox="1"/>
           <p:nvPr/>
         </p:nvSpPr>
         <p:spPr>
           <a:xfrm>
-            <a:off x="640080" y="868680"/>
-            <a:ext cx="10789920" cy="1097280"/>
+            <a:off x="502920" y="109728"/>
+            <a:ext cx="5029200" cy="182880"/>
           </a:xfrm>
           <a:prstGeom prst="rect">
             <a:avLst/>
@@ -6691,27 +9133,27 @@
           <a:lstStyle/>
           <a:p>
             <a:r>
-              <a:rPr sz="3800">
+              <a:rPr sz="900">
                 <a:solidFill>
                   <a:srgbClr val="C9933A"/>
                 </a:solidFill>
-                <a:latin typeface="Cormorant Garamond"/>
+                <a:latin typeface="IBM Plex Mono"/>
               </a:rPr>
-              <a:t>Execution transparency</a:t>
-            </a:r>
-          </a:p>
-        </p:txBody>
-      </p:sp>
-      <p:sp>
-        <p:nvSpPr>
-          <p:cNvPr id="5" name="TextBox 4"/>
+              <a:t>STILLFORM · STRATEGIC DECK</a:t>
+            </a:r>
+          </a:p>
+        </p:txBody>
+      </p:sp>
+      <p:sp>
+        <p:nvSpPr>
+          <p:cNvPr id="4" name="TextBox 3"/>
           <p:cNvSpPr txBox="1"/>
           <p:nvPr/>
         </p:nvSpPr>
         <p:spPr>
           <a:xfrm>
-            <a:off x="658368" y="1737360"/>
-            <a:ext cx="10332720" cy="502920"/>
+            <a:off x="10332720" y="109728"/>
+            <a:ext cx="1371600" cy="182880"/>
           </a:xfrm>
           <a:prstGeom prst="rect">
             <a:avLst/>
@@ -6724,28 +9166,200 @@
           </a:bodyPr>
           <a:lstStyle/>
           <a:p>
+            <a:pPr algn="r"/>
+            <a:r>
+              <a:rPr sz="900">
+                <a:solidFill>
+                  <a:srgbClr val="A5A8B0"/>
+                </a:solidFill>
+                <a:latin typeface="IBM Plex Mono"/>
+              </a:rPr>
+              <a:t>08 / 15</a:t>
+            </a:r>
+          </a:p>
+        </p:txBody>
+      </p:sp>
+      <p:sp>
+        <p:nvSpPr>
+          <p:cNvPr id="5" name="TextBox 4"/>
+          <p:cNvSpPr txBox="1"/>
+          <p:nvPr/>
+        </p:nvSpPr>
+        <p:spPr>
+          <a:xfrm>
+            <a:off x="640080" y="640080"/>
+            <a:ext cx="10972800" cy="1097280"/>
+          </a:xfrm>
+          <a:prstGeom prst="rect">
+            <a:avLst/>
+          </a:prstGeom>
+          <a:noFill/>
+        </p:spPr>
+        <p:txBody>
+          <a:bodyPr wrap="none">
+            <a:spAutoFit/>
+          </a:bodyPr>
+          <a:lstStyle/>
+          <a:p>
+            <a:r>
+              <a:rPr sz="4000">
+                <a:solidFill>
+                  <a:srgbClr val="C9933A"/>
+                </a:solidFill>
+                <a:latin typeface="Cormorant Garamond"/>
+              </a:rPr>
+              <a:t>Core loop architecture</a:t>
+            </a:r>
+          </a:p>
+        </p:txBody>
+      </p:sp>
+      <p:sp>
+        <p:nvSpPr>
+          <p:cNvPr id="6" name="TextBox 5"/>
+          <p:cNvSpPr txBox="1"/>
+          <p:nvPr/>
+        </p:nvSpPr>
+        <p:spPr>
+          <a:xfrm>
+            <a:off x="667512" y="1508760"/>
+            <a:ext cx="10789920" cy="411480"/>
+          </a:xfrm>
+          <a:prstGeom prst="rect">
+            <a:avLst/>
+          </a:prstGeom>
+          <a:noFill/>
+        </p:spPr>
+        <p:txBody>
+          <a:bodyPr wrap="none">
+            <a:spAutoFit/>
+          </a:bodyPr>
+          <a:lstStyle/>
+          <a:p>
             <a:r>
               <a:rPr sz="1600">
                 <a:solidFill>
-                  <a:srgbClr val="A0A2A8"/>
+                  <a:srgbClr val="A5A8B0"/>
                 </a:solidFill>
                 <a:latin typeface="DM Sans"/>
               </a:rPr>
-              <a:t>Completed + tested vs next gated phases</a:t>
-            </a:r>
-          </a:p>
-        </p:txBody>
-      </p:sp>
-      <p:sp>
-        <p:nvSpPr>
-          <p:cNvPr id="6" name="TextBox 5"/>
+              <a:t>Six linked mechanics, one coherent daily system</a:t>
+            </a:r>
+          </a:p>
+        </p:txBody>
+      </p:sp>
+      <p:sp>
+        <p:nvSpPr>
+          <p:cNvPr id="7" name="Rounded Rectangle 6"/>
+          <p:cNvSpPr/>
+          <p:nvPr/>
+        </p:nvSpPr>
+        <p:spPr>
+          <a:xfrm>
+            <a:off x="640080" y="2011680"/>
+            <a:ext cx="3611880" cy="3611880"/>
+          </a:xfrm>
+          <a:prstGeom prst="roundRect">
+            <a:avLst/>
+          </a:prstGeom>
+          <a:solidFill>
+            <a:srgbClr val="17191D"/>
+          </a:solidFill>
+          <a:ln w="12700">
+            <a:solidFill>
+              <a:srgbClr val="353840"/>
+            </a:solidFill>
+          </a:ln>
+        </p:spPr>
+        <p:style>
+          <a:lnRef idx="1">
+            <a:schemeClr val="accent1"/>
+          </a:lnRef>
+          <a:fillRef idx="3">
+            <a:schemeClr val="accent1"/>
+          </a:fillRef>
+          <a:effectRef idx="2">
+            <a:schemeClr val="accent1"/>
+          </a:effectRef>
+          <a:fontRef idx="minor">
+            <a:schemeClr val="lt1"/>
+          </a:fontRef>
+        </p:style>
+        <p:txBody>
+          <a:bodyPr rtlCol="0" anchor="ctr"/>
+          <a:lstStyle/>
+          <a:p>
+            <a:pPr algn="ctr"/>
+          </a:p>
+        </p:txBody>
+      </p:sp>
+      <p:sp>
+        <p:nvSpPr>
+          <p:cNvPr id="8" name="TextBox 7"/>
           <p:cNvSpPr txBox="1"/>
           <p:nvPr/>
         </p:nvSpPr>
         <p:spPr>
           <a:xfrm>
-            <a:off x="731520" y="2148840"/>
-            <a:ext cx="10881360" cy="3474720"/>
+            <a:off x="868680" y="2212848"/>
+            <a:ext cx="3154680" cy="320040"/>
+          </a:xfrm>
+          <a:prstGeom prst="rect">
+            <a:avLst/>
+          </a:prstGeom>
+          <a:noFill/>
+        </p:spPr>
+        <p:txBody>
+          <a:bodyPr wrap="none">
+            <a:spAutoFit/>
+          </a:bodyPr>
+          <a:lstStyle/>
+          <a:p>
+            <a:r>
+              <a:rPr sz="1000">
+                <a:solidFill>
+                  <a:srgbClr val="C9933A"/>
+                </a:solidFill>
+                <a:latin typeface="IBM Plex Mono"/>
+              </a:rPr>
+              <a:t>LOOP START</a:t>
+            </a:r>
+          </a:p>
+        </p:txBody>
+      </p:sp>
+      <p:sp>
+        <p:nvSpPr>
+          <p:cNvPr id="9" name="TextBox 8"/>
+          <p:cNvSpPr txBox="1"/>
+          <p:nvPr/>
+        </p:nvSpPr>
+        <p:spPr>
+          <a:xfrm>
+            <a:off x="868680" y="2651760"/>
+            <a:ext cx="3154680" cy="2697480"/>
+          </a:xfrm>
+          <a:prstGeom prst="rect">
+            <a:avLst/>
+          </a:prstGeom>
+          <a:noFill/>
+        </p:spPr>
+        <p:txBody>
+          <a:bodyPr wrap="none">
+            <a:spAutoFit/>
+          </a:bodyPr>
+          <a:lstStyle/>
+          <a:p/>
+        </p:txBody>
+      </p:sp>
+      <p:sp>
+        <p:nvSpPr>
+          <p:cNvPr id="10" name="TextBox 9"/>
+          <p:cNvSpPr txBox="1"/>
+          <p:nvPr/>
+        </p:nvSpPr>
+        <p:spPr>
+          <a:xfrm>
+            <a:off x="868680" y="2651760"/>
+            <a:ext cx="3154680" cy="2697480"/>
           </a:xfrm>
           <a:prstGeom prst="rect">
             <a:avLst/>
@@ -6760,9 +9374,9 @@
           <a:p>
             <a:pPr>
               <a:spcAft>
-                <a:spcPts val="1000"/>
+                <a:spcPts val="800"/>
               </a:spcAft>
-              <a:defRPr sz="1700">
+              <a:defRPr sz="1400">
                 <a:solidFill>
                   <a:srgbClr val="E9E9EA"/>
                 </a:solidFill>
@@ -6770,15 +9384,15 @@
               </a:defRPr>
             </a:pPr>
             <a:r>
-              <a:t>Completed + tested: subscription truth plumbing, cloud restore controls, loop telemetry, intervention nudges, adaptive sensitivity.</a:t>
+              <a:t>Morning baseline</a:t>
             </a:r>
           </a:p>
           <a:p>
             <a:pPr>
               <a:spcAft>
-                <a:spcPts val="1000"/>
+                <a:spcPts val="800"/>
               </a:spcAft>
-              <a:defRPr sz="1700">
+              <a:defRPr sz="1400">
                 <a:solidFill>
                   <a:srgbClr val="E9E9EA"/>
                 </a:solidFill>
@@ -6786,15 +9400,15 @@
               </a:defRPr>
             </a:pPr>
             <a:r>
-              <a:t>Deck integrity uplift: business plan + integrity evidence + science-first mechanics register.</a:t>
+              <a:t>Energy + hardware read</a:t>
             </a:r>
           </a:p>
           <a:p>
             <a:pPr>
               <a:spcAft>
-                <a:spcPts val="1000"/>
+                <a:spcPts val="800"/>
               </a:spcAft>
-              <a:defRPr sz="1700">
+              <a:defRPr sz="1400">
                 <a:solidFill>
                   <a:srgbClr val="E9E9EA"/>
                 </a:solidFill>
@@ -6802,15 +9416,15 @@
               </a:defRPr>
             </a:pPr>
             <a:r>
-              <a:t>Next gated phases: live-mode billing truth, native launch QA matrix, integration provider hookups with consent/revoke controls.</a:t>
+              <a:t>Risk context before action</a:t>
             </a:r>
           </a:p>
           <a:p>
             <a:pPr>
               <a:spcAft>
-                <a:spcPts val="1000"/>
+                <a:spcPts val="800"/>
               </a:spcAft>
-              <a:defRPr sz="1700">
+              <a:defRPr sz="1400">
                 <a:solidFill>
                   <a:srgbClr val="E9E9EA"/>
                 </a:solidFill>
@@ -6818,7 +9432,387 @@
               </a:defRPr>
             </a:pPr>
             <a:r>
-              <a:t>Readiness standard: no phase advances without objective gate pass.</a:t>
+              <a:t>No branch clutter</a:t>
+            </a:r>
+          </a:p>
+        </p:txBody>
+      </p:sp>
+      <p:sp>
+        <p:nvSpPr>
+          <p:cNvPr id="11" name="Rounded Rectangle 10"/>
+          <p:cNvSpPr/>
+          <p:nvPr/>
+        </p:nvSpPr>
+        <p:spPr>
+          <a:xfrm>
+            <a:off x="4480560" y="2011680"/>
+            <a:ext cx="3611880" cy="3611880"/>
+          </a:xfrm>
+          <a:prstGeom prst="roundRect">
+            <a:avLst/>
+          </a:prstGeom>
+          <a:solidFill>
+            <a:srgbClr val="17191D"/>
+          </a:solidFill>
+          <a:ln w="12700">
+            <a:solidFill>
+              <a:srgbClr val="353840"/>
+            </a:solidFill>
+          </a:ln>
+        </p:spPr>
+        <p:style>
+          <a:lnRef idx="1">
+            <a:schemeClr val="accent1"/>
+          </a:lnRef>
+          <a:fillRef idx="3">
+            <a:schemeClr val="accent1"/>
+          </a:fillRef>
+          <a:effectRef idx="2">
+            <a:schemeClr val="accent1"/>
+          </a:effectRef>
+          <a:fontRef idx="minor">
+            <a:schemeClr val="lt1"/>
+          </a:fontRef>
+        </p:style>
+        <p:txBody>
+          <a:bodyPr rtlCol="0" anchor="ctr"/>
+          <a:lstStyle/>
+          <a:p>
+            <a:pPr algn="ctr"/>
+          </a:p>
+        </p:txBody>
+      </p:sp>
+      <p:sp>
+        <p:nvSpPr>
+          <p:cNvPr id="12" name="TextBox 11"/>
+          <p:cNvSpPr txBox="1"/>
+          <p:nvPr/>
+        </p:nvSpPr>
+        <p:spPr>
+          <a:xfrm>
+            <a:off x="4709160" y="2212848"/>
+            <a:ext cx="3154680" cy="320040"/>
+          </a:xfrm>
+          <a:prstGeom prst="rect">
+            <a:avLst/>
+          </a:prstGeom>
+          <a:noFill/>
+        </p:spPr>
+        <p:txBody>
+          <a:bodyPr wrap="none">
+            <a:spAutoFit/>
+          </a:bodyPr>
+          <a:lstStyle/>
+          <a:p>
+            <a:r>
+              <a:rPr sz="1000">
+                <a:solidFill>
+                  <a:srgbClr val="C9933A"/>
+                </a:solidFill>
+                <a:latin typeface="IBM Plex Mono"/>
+              </a:rPr>
+              <a:t>LOOP MIDDLE</a:t>
+            </a:r>
+          </a:p>
+        </p:txBody>
+      </p:sp>
+      <p:sp>
+        <p:nvSpPr>
+          <p:cNvPr id="13" name="TextBox 12"/>
+          <p:cNvSpPr txBox="1"/>
+          <p:nvPr/>
+        </p:nvSpPr>
+        <p:spPr>
+          <a:xfrm>
+            <a:off x="4709160" y="2651760"/>
+            <a:ext cx="3154680" cy="2697480"/>
+          </a:xfrm>
+          <a:prstGeom prst="rect">
+            <a:avLst/>
+          </a:prstGeom>
+          <a:noFill/>
+        </p:spPr>
+        <p:txBody>
+          <a:bodyPr wrap="none">
+            <a:spAutoFit/>
+          </a:bodyPr>
+          <a:lstStyle/>
+          <a:p/>
+        </p:txBody>
+      </p:sp>
+      <p:sp>
+        <p:nvSpPr>
+          <p:cNvPr id="14" name="TextBox 13"/>
+          <p:cNvSpPr txBox="1"/>
+          <p:nvPr/>
+        </p:nvSpPr>
+        <p:spPr>
+          <a:xfrm>
+            <a:off x="4709160" y="2651760"/>
+            <a:ext cx="3154680" cy="2697480"/>
+          </a:xfrm>
+          <a:prstGeom prst="rect">
+            <a:avLst/>
+          </a:prstGeom>
+          <a:noFill/>
+        </p:spPr>
+        <p:txBody>
+          <a:bodyPr wrap="square">
+            <a:spAutoFit/>
+          </a:bodyPr>
+          <a:lstStyle/>
+          <a:p>
+            <a:pPr>
+              <a:spcAft>
+                <a:spcPts val="800"/>
+              </a:spcAft>
+              <a:defRPr sz="1400">
+                <a:solidFill>
+                  <a:srgbClr val="E9E9EA"/>
+                </a:solidFill>
+                <a:latin typeface="DM Sans"/>
+              </a:defRPr>
+            </a:pPr>
+            <a:r>
+              <a:t>State-based routing</a:t>
+            </a:r>
+          </a:p>
+          <a:p>
+            <a:pPr>
+              <a:spcAft>
+                <a:spcPts val="800"/>
+              </a:spcAft>
+              <a:defRPr sz="1400">
+                <a:solidFill>
+                  <a:srgbClr val="E9E9EA"/>
+                </a:solidFill>
+                <a:latin typeface="DM Sans"/>
+              </a:defRPr>
+            </a:pPr>
+            <a:r>
+              <a:t>Body-first or thought-first</a:t>
+            </a:r>
+          </a:p>
+          <a:p>
+            <a:pPr>
+              <a:spcAft>
+                <a:spcPts val="800"/>
+              </a:spcAft>
+              <a:defRPr sz="1400">
+                <a:solidFill>
+                  <a:srgbClr val="E9E9EA"/>
+                </a:solidFill>
+                <a:latin typeface="DM Sans"/>
+              </a:defRPr>
+            </a:pPr>
+            <a:r>
+              <a:t>Reframe + regulation</a:t>
+            </a:r>
+          </a:p>
+          <a:p>
+            <a:pPr>
+              <a:spcAft>
+                <a:spcPts val="800"/>
+              </a:spcAft>
+              <a:defRPr sz="1400">
+                <a:solidFill>
+                  <a:srgbClr val="E9E9EA"/>
+                </a:solidFill>
+                <a:latin typeface="DM Sans"/>
+              </a:defRPr>
+            </a:pPr>
+            <a:r>
+              <a:t>Transfer to practical action</a:t>
+            </a:r>
+          </a:p>
+        </p:txBody>
+      </p:sp>
+      <p:sp>
+        <p:nvSpPr>
+          <p:cNvPr id="15" name="Rounded Rectangle 14"/>
+          <p:cNvSpPr/>
+          <p:nvPr/>
+        </p:nvSpPr>
+        <p:spPr>
+          <a:xfrm>
+            <a:off x="8321040" y="2011680"/>
+            <a:ext cx="3611880" cy="3611880"/>
+          </a:xfrm>
+          <a:prstGeom prst="roundRect">
+            <a:avLst/>
+          </a:prstGeom>
+          <a:solidFill>
+            <a:srgbClr val="17191D"/>
+          </a:solidFill>
+          <a:ln w="12700">
+            <a:solidFill>
+              <a:srgbClr val="353840"/>
+            </a:solidFill>
+          </a:ln>
+        </p:spPr>
+        <p:style>
+          <a:lnRef idx="1">
+            <a:schemeClr val="accent1"/>
+          </a:lnRef>
+          <a:fillRef idx="3">
+            <a:schemeClr val="accent1"/>
+          </a:fillRef>
+          <a:effectRef idx="2">
+            <a:schemeClr val="accent1"/>
+          </a:effectRef>
+          <a:fontRef idx="minor">
+            <a:schemeClr val="lt1"/>
+          </a:fontRef>
+        </p:style>
+        <p:txBody>
+          <a:bodyPr rtlCol="0" anchor="ctr"/>
+          <a:lstStyle/>
+          <a:p>
+            <a:pPr algn="ctr"/>
+          </a:p>
+        </p:txBody>
+      </p:sp>
+      <p:sp>
+        <p:nvSpPr>
+          <p:cNvPr id="16" name="TextBox 15"/>
+          <p:cNvSpPr txBox="1"/>
+          <p:nvPr/>
+        </p:nvSpPr>
+        <p:spPr>
+          <a:xfrm>
+            <a:off x="8549640" y="2212848"/>
+            <a:ext cx="3154680" cy="320040"/>
+          </a:xfrm>
+          <a:prstGeom prst="rect">
+            <a:avLst/>
+          </a:prstGeom>
+          <a:noFill/>
+        </p:spPr>
+        <p:txBody>
+          <a:bodyPr wrap="none">
+            <a:spAutoFit/>
+          </a:bodyPr>
+          <a:lstStyle/>
+          <a:p>
+            <a:r>
+              <a:rPr sz="1000">
+                <a:solidFill>
+                  <a:srgbClr val="C9933A"/>
+                </a:solidFill>
+                <a:latin typeface="IBM Plex Mono"/>
+              </a:rPr>
+              <a:t>LOOP CLOSE</a:t>
+            </a:r>
+          </a:p>
+        </p:txBody>
+      </p:sp>
+      <p:sp>
+        <p:nvSpPr>
+          <p:cNvPr id="17" name="TextBox 16"/>
+          <p:cNvSpPr txBox="1"/>
+          <p:nvPr/>
+        </p:nvSpPr>
+        <p:spPr>
+          <a:xfrm>
+            <a:off x="8549640" y="2651760"/>
+            <a:ext cx="3154680" cy="2697480"/>
+          </a:xfrm>
+          <a:prstGeom prst="rect">
+            <a:avLst/>
+          </a:prstGeom>
+          <a:noFill/>
+        </p:spPr>
+        <p:txBody>
+          <a:bodyPr wrap="none">
+            <a:spAutoFit/>
+          </a:bodyPr>
+          <a:lstStyle/>
+          <a:p/>
+        </p:txBody>
+      </p:sp>
+      <p:sp>
+        <p:nvSpPr>
+          <p:cNvPr id="18" name="TextBox 17"/>
+          <p:cNvSpPr txBox="1"/>
+          <p:nvPr/>
+        </p:nvSpPr>
+        <p:spPr>
+          <a:xfrm>
+            <a:off x="8549640" y="2651760"/>
+            <a:ext cx="3154680" cy="2697480"/>
+          </a:xfrm>
+          <a:prstGeom prst="rect">
+            <a:avLst/>
+          </a:prstGeom>
+          <a:noFill/>
+        </p:spPr>
+        <p:txBody>
+          <a:bodyPr wrap="square">
+            <a:spAutoFit/>
+          </a:bodyPr>
+          <a:lstStyle/>
+          <a:p>
+            <a:pPr>
+              <a:spcAft>
+                <a:spcPts val="800"/>
+              </a:spcAft>
+              <a:defRPr sz="1400">
+                <a:solidFill>
+                  <a:srgbClr val="E9E9EA"/>
+                </a:solidFill>
+                <a:latin typeface="DM Sans"/>
+              </a:defRPr>
+            </a:pPr>
+            <a:r>
+              <a:t>EOD closure signal</a:t>
+            </a:r>
+          </a:p>
+          <a:p>
+            <a:pPr>
+              <a:spcAft>
+                <a:spcPts val="800"/>
+              </a:spcAft>
+              <a:defRPr sz="1400">
+                <a:solidFill>
+                  <a:srgbClr val="E9E9EA"/>
+                </a:solidFill>
+                <a:latin typeface="DM Sans"/>
+              </a:defRPr>
+            </a:pPr>
+            <a:r>
+              <a:t>Pattern continuity</a:t>
+            </a:r>
+          </a:p>
+          <a:p>
+            <a:pPr>
+              <a:spcAft>
+                <a:spcPts val="800"/>
+              </a:spcAft>
+              <a:defRPr sz="1400">
+                <a:solidFill>
+                  <a:srgbClr val="E9E9EA"/>
+                </a:solidFill>
+                <a:latin typeface="DM Sans"/>
+              </a:defRPr>
+            </a:pPr>
+            <a:r>
+              <a:t>Nudge recovery checks</a:t>
+            </a:r>
+          </a:p>
+          <a:p>
+            <a:pPr>
+              <a:spcAft>
+                <a:spcPts val="800"/>
+              </a:spcAft>
+              <a:defRPr sz="1400">
+                <a:solidFill>
+                  <a:srgbClr val="E9E9EA"/>
+                </a:solidFill>
+                <a:latin typeface="DM Sans"/>
+              </a:defRPr>
+            </a:pPr>
+            <a:r>
+              <a:t>Longitudinal compounding</a:t>
             </a:r>
           </a:p>
         </p:txBody>
@@ -6851,54 +9845,20 @@
       <p:grpSpPr/>
       <p:sp>
         <p:nvSpPr>
-          <p:cNvPr id="2" name="TextBox 1"/>
-          <p:cNvSpPr txBox="1"/>
-          <p:nvPr/>
-        </p:nvSpPr>
-        <p:spPr>
-          <a:xfrm>
-            <a:off x="640080" y="320040"/>
-            <a:ext cx="5669280" cy="320040"/>
-          </a:xfrm>
-          <a:prstGeom prst="rect">
-            <a:avLst/>
-          </a:prstGeom>
-          <a:noFill/>
-        </p:spPr>
-        <p:txBody>
-          <a:bodyPr wrap="none">
-            <a:spAutoFit/>
-          </a:bodyPr>
-          <a:lstStyle/>
-          <a:p>
-            <a:r>
-              <a:rPr sz="1100">
-                <a:solidFill>
-                  <a:srgbClr val="C9933A"/>
-                </a:solidFill>
-                <a:latin typeface="IBM Plex Mono"/>
-              </a:rPr>
-              <a:t>STILLFORM · STRATEGIC DECK</a:t>
-            </a:r>
-          </a:p>
-        </p:txBody>
-      </p:sp>
-      <p:sp>
-        <p:nvSpPr>
-          <p:cNvPr id="3" name="Rectangle 2"/>
+          <p:cNvPr id="2" name="Rectangle 1"/>
           <p:cNvSpPr/>
           <p:nvPr/>
         </p:nvSpPr>
         <p:spPr>
           <a:xfrm>
-            <a:off x="640080" y="640080"/>
-            <a:ext cx="10972800" cy="9144"/>
+            <a:off x="0" y="0"/>
+            <a:ext cx="12191695" cy="320040"/>
           </a:xfrm>
           <a:prstGeom prst="rect">
             <a:avLst/>
           </a:prstGeom>
           <a:solidFill>
-            <a:srgbClr val="32343A"/>
+            <a:srgbClr val="17191D"/>
           </a:solidFill>
           <a:ln>
             <a:noFill/>
@@ -6928,14 +9888,14 @@
       </p:sp>
       <p:sp>
         <p:nvSpPr>
-          <p:cNvPr id="4" name="TextBox 3"/>
+          <p:cNvPr id="3" name="TextBox 2"/>
           <p:cNvSpPr txBox="1"/>
           <p:nvPr/>
         </p:nvSpPr>
         <p:spPr>
           <a:xfrm>
-            <a:off x="640080" y="868680"/>
-            <a:ext cx="10789920" cy="1097280"/>
+            <a:off x="502920" y="109728"/>
+            <a:ext cx="5029200" cy="182880"/>
           </a:xfrm>
           <a:prstGeom prst="rect">
             <a:avLst/>
@@ -6949,27 +9909,27 @@
           <a:lstStyle/>
           <a:p>
             <a:r>
-              <a:rPr sz="3800">
+              <a:rPr sz="900">
                 <a:solidFill>
                   <a:srgbClr val="C9933A"/>
                 </a:solidFill>
-                <a:latin typeface="Cormorant Garamond"/>
+                <a:latin typeface="IBM Plex Mono"/>
               </a:rPr>
-              <a:t>Risk register</a:t>
-            </a:r>
-          </a:p>
-        </p:txBody>
-      </p:sp>
-      <p:sp>
-        <p:nvSpPr>
-          <p:cNvPr id="5" name="TextBox 4"/>
+              <a:t>STILLFORM · STRATEGIC DECK</a:t>
+            </a:r>
+          </a:p>
+        </p:txBody>
+      </p:sp>
+      <p:sp>
+        <p:nvSpPr>
+          <p:cNvPr id="4" name="TextBox 3"/>
           <p:cNvSpPr txBox="1"/>
           <p:nvPr/>
         </p:nvSpPr>
         <p:spPr>
           <a:xfrm>
-            <a:off x="658368" y="1737360"/>
-            <a:ext cx="10332720" cy="502920"/>
+            <a:off x="10332720" y="109728"/>
+            <a:ext cx="1371600" cy="182880"/>
           </a:xfrm>
           <a:prstGeom prst="rect">
             <a:avLst/>
@@ -6982,29 +9942,98 @@
           </a:bodyPr>
           <a:lstStyle/>
           <a:p>
+            <a:pPr algn="r"/>
+            <a:r>
+              <a:rPr sz="900">
+                <a:solidFill>
+                  <a:srgbClr val="A5A8B0"/>
+                </a:solidFill>
+                <a:latin typeface="IBM Plex Mono"/>
+              </a:rPr>
+              <a:t>09 / 15</a:t>
+            </a:r>
+          </a:p>
+        </p:txBody>
+      </p:sp>
+      <p:sp>
+        <p:nvSpPr>
+          <p:cNvPr id="5" name="TextBox 4"/>
+          <p:cNvSpPr txBox="1"/>
+          <p:nvPr/>
+        </p:nvSpPr>
+        <p:spPr>
+          <a:xfrm>
+            <a:off x="640080" y="640080"/>
+            <a:ext cx="10972800" cy="1097280"/>
+          </a:xfrm>
+          <a:prstGeom prst="rect">
+            <a:avLst/>
+          </a:prstGeom>
+          <a:noFill/>
+        </p:spPr>
+        <p:txBody>
+          <a:bodyPr wrap="none">
+            <a:spAutoFit/>
+          </a:bodyPr>
+          <a:lstStyle/>
+          <a:p>
+            <a:r>
+              <a:rPr sz="4000">
+                <a:solidFill>
+                  <a:srgbClr val="C9933A"/>
+                </a:solidFill>
+                <a:latin typeface="Cormorant Garamond"/>
+              </a:rPr>
+              <a:t>Evidence model</a:t>
+            </a:r>
+          </a:p>
+        </p:txBody>
+      </p:sp>
+      <p:sp>
+        <p:nvSpPr>
+          <p:cNvPr id="6" name="TextBox 5"/>
+          <p:cNvSpPr txBox="1"/>
+          <p:nvPr/>
+        </p:nvSpPr>
+        <p:spPr>
+          <a:xfrm>
+            <a:off x="667512" y="1508760"/>
+            <a:ext cx="10789920" cy="411480"/>
+          </a:xfrm>
+          <a:prstGeom prst="rect">
+            <a:avLst/>
+          </a:prstGeom>
+          <a:noFill/>
+        </p:spPr>
+        <p:txBody>
+          <a:bodyPr wrap="none">
+            <a:spAutoFit/>
+          </a:bodyPr>
+          <a:lstStyle/>
+          <a:p>
             <a:r>
               <a:rPr sz="1600">
                 <a:solidFill>
-                  <a:srgbClr val="A0A2A8"/>
+                  <a:srgbClr val="A5A8B0"/>
                 </a:solidFill>
                 <a:latin typeface="DM Sans"/>
               </a:rPr>
-              <a:t>Known risks and active mitigations</a:t>
+              <a:t>What must be true to claim impact</a:t>
             </a:r>
           </a:p>
         </p:txBody>
       </p:sp>
       <p:graphicFrame>
         <p:nvGraphicFramePr>
-          <p:cNvPr id="6" name="Table 5"/>
+          <p:cNvPr id="7" name="Table 6"/>
           <p:cNvGraphicFramePr>
             <a:graphicFrameLocks noGrp="1"/>
           </p:cNvGraphicFramePr>
           <p:nvPr/>
         </p:nvGraphicFramePr>
         <p:xfrm>
-          <a:off x="914400" y="1920240"/>
-          <a:ext cx="10241280" cy="4206240"/>
+          <a:off x="685800" y="1828800"/>
+          <a:ext cx="10881360" cy="4526280"/>
         </p:xfrm>
         <a:graphic>
           <a:graphicData uri="http://schemas.openxmlformats.org/drawingml/2006/table">
@@ -7013,10 +10042,11 @@
                 <a:tableStyleId>{5C22544A-7EE6-4342-B048-85BDC9FD1C3A}</a:tableStyleId>
               </a:tblPr>
               <a:tblGrid>
-                <a:gridCol w="3383280"/>
-                <a:gridCol w="6858000"/>
+                <a:gridCol w="2011680"/>
+                <a:gridCol w="3566160"/>
+                <a:gridCol w="5303520"/>
               </a:tblGrid>
-              <a:tr h="841248">
+              <a:tr h="754380">
                 <a:tc>
                   <a:txBody>
                     <a:bodyPr/>
@@ -7029,11 +10059,11 @@
                           </a:solidFill>
                           <a:latin typeface="DM Sans"/>
                         </a:rPr>
-                        <a:t>Risk</a:t>
+                        <a:t>Layer</a:t>
                       </a:r>
                     </a:p>
                   </a:txBody>
-                  <a:tcPr>
+                  <a:tcPr marL="64008" marR="64008" marT="36576" marB="36576">
                     <a:solidFill>
                       <a:srgbClr val="17191D"/>
                     </a:solidFill>
@@ -7051,18 +10081,40 @@
                           </a:solidFill>
                           <a:latin typeface="DM Sans"/>
                         </a:rPr>
-                        <a:t>Mitigation</a:t>
+                        <a:t>Metric</a:t>
                       </a:r>
                     </a:p>
                   </a:txBody>
-                  <a:tcPr>
+                  <a:tcPr marL="64008" marR="64008" marT="36576" marB="36576">
+                    <a:solidFill>
+                      <a:srgbClr val="17191D"/>
+                    </a:solidFill>
+                  </a:tcPr>
+                </a:tc>
+                <a:tc>
+                  <a:txBody>
+                    <a:bodyPr/>
+                    <a:lstStyle/>
+                    <a:p>
+                      <a:r>
+                        <a:rPr sz="1200">
+                          <a:solidFill>
+                            <a:srgbClr val="C9933A"/>
+                          </a:solidFill>
+                          <a:latin typeface="DM Sans"/>
+                        </a:rPr>
+                        <a:t>Interpretation</a:t>
+                      </a:r>
+                    </a:p>
+                  </a:txBody>
+                  <a:tcPr marL="64008" marR="64008" marT="36576" marB="36576">
                     <a:solidFill>
                       <a:srgbClr val="17191D"/>
                     </a:solidFill>
                   </a:tcPr>
                 </a:tc>
               </a:tr>
-              <a:tr h="841248">
+              <a:tr h="754380">
                 <a:tc>
                   <a:txBody>
                     <a:bodyPr/>
@@ -7071,15 +10123,15 @@
                       <a:r>
                         <a:rPr sz="1100">
                           <a:solidFill>
-                            <a:srgbClr val="E9E9EA"/>
+                            <a:srgbClr val="C4C6CC"/>
                           </a:solidFill>
                           <a:latin typeface="DM Sans"/>
                         </a:rPr>
-                        <a:t>Claim drift or overstatement</a:t>
+                        <a:t>Session</a:t>
                       </a:r>
                     </a:p>
                   </a:txBody>
-                  <a:tcPr>
+                  <a:tcPr marL="64008" marR="64008" marT="36576" marB="36576">
                     <a:solidFill>
                       <a:srgbClr val="0E0F11"/>
                     </a:solidFill>
@@ -7093,39 +10145,15 @@
                       <a:r>
                         <a:rPr sz="1100">
                           <a:solidFill>
-                            <a:srgbClr val="E9E9EA"/>
+                            <a:srgbClr val="C4C6CC"/>
                           </a:solidFill>
                           <a:latin typeface="DM Sans"/>
                         </a:rPr>
-                        <a:t>Mechanism-first language and SHIP claim checks before release</a:t>
+                        <a:t>Pre/post composure delta</a:t>
                       </a:r>
                     </a:p>
                   </a:txBody>
-                  <a:tcPr>
-                    <a:solidFill>
-                      <a:srgbClr val="0E0F11"/>
-                    </a:solidFill>
-                  </a:tcPr>
-                </a:tc>
-              </a:tr>
-              <a:tr h="841248">
-                <a:tc>
-                  <a:txBody>
-                    <a:bodyPr/>
-                    <a:lstStyle/>
-                    <a:p>
-                      <a:r>
-                        <a:rPr sz="1100">
-                          <a:solidFill>
-                            <a:srgbClr val="E9E9EA"/>
-                          </a:solidFill>
-                          <a:latin typeface="DM Sans"/>
-                        </a:rPr>
-                        <a:t>Feature sprawl / UX noise</a:t>
-                      </a:r>
-                    </a:p>
-                  </a:txBody>
-                  <a:tcPr>
+                  <a:tcPr marL="64008" marR="64008" marT="36576" marB="36576">
                     <a:solidFill>
                       <a:srgbClr val="0E0F11"/>
                     </a:solidFill>
@@ -7139,22 +10167,22 @@
                       <a:r>
                         <a:rPr sz="1100">
                           <a:solidFill>
-                            <a:srgbClr val="E9E9EA"/>
+                            <a:srgbClr val="C4C6CC"/>
                           </a:solidFill>
                           <a:latin typeface="DM Sans"/>
                         </a:rPr>
-                        <a:t>Ecosystem-first policy: strengthen loop before adding branches</a:t>
+                        <a:t>Immediate regulation effect quality</a:t>
                       </a:r>
                     </a:p>
                   </a:txBody>
-                  <a:tcPr>
+                  <a:tcPr marL="64008" marR="64008" marT="36576" marB="36576">
                     <a:solidFill>
                       <a:srgbClr val="0E0F11"/>
                     </a:solidFill>
                   </a:tcPr>
                 </a:tc>
               </a:tr>
-              <a:tr h="841248">
+              <a:tr h="754380">
                 <a:tc>
                   <a:txBody>
                     <a:bodyPr/>
@@ -7163,15 +10191,83 @@
                       <a:r>
                         <a:rPr sz="1100">
                           <a:solidFill>
-                            <a:srgbClr val="E9E9EA"/>
+                            <a:srgbClr val="C4C6CC"/>
                           </a:solidFill>
                           <a:latin typeface="DM Sans"/>
                         </a:rPr>
-                        <a:t>Reliability regressions</a:t>
+                        <a:t>Daily loop</a:t>
                       </a:r>
                     </a:p>
                   </a:txBody>
-                  <a:tcPr>
+                  <a:tcPr marL="64008" marR="64008" marT="36576" marB="36576">
+                    <a:solidFill>
+                      <a:srgbClr val="1F2228"/>
+                    </a:solidFill>
+                  </a:tcPr>
+                </a:tc>
+                <a:tc>
+                  <a:txBody>
+                    <a:bodyPr/>
+                    <a:lstStyle/>
+                    <a:p>
+                      <a:r>
+                        <a:rPr sz="1100">
+                          <a:solidFill>
+                            <a:srgbClr val="C4C6CC"/>
+                          </a:solidFill>
+                          <a:latin typeface="DM Sans"/>
+                        </a:rPr>
+                        <a:t>Morning/EOD completion + drop-off</a:t>
+                      </a:r>
+                    </a:p>
+                  </a:txBody>
+                  <a:tcPr marL="64008" marR="64008" marT="36576" marB="36576">
+                    <a:solidFill>
+                      <a:srgbClr val="1F2228"/>
+                    </a:solidFill>
+                  </a:tcPr>
+                </a:tc>
+                <a:tc>
+                  <a:txBody>
+                    <a:bodyPr/>
+                    <a:lstStyle/>
+                    <a:p>
+                      <a:r>
+                        <a:rPr sz="1100">
+                          <a:solidFill>
+                            <a:srgbClr val="C4C6CC"/>
+                          </a:solidFill>
+                          <a:latin typeface="DM Sans"/>
+                        </a:rPr>
+                        <a:t>Behavioral consistency under load</a:t>
+                      </a:r>
+                    </a:p>
+                  </a:txBody>
+                  <a:tcPr marL="64008" marR="64008" marT="36576" marB="36576">
+                    <a:solidFill>
+                      <a:srgbClr val="1F2228"/>
+                    </a:solidFill>
+                  </a:tcPr>
+                </a:tc>
+              </a:tr>
+              <a:tr h="754380">
+                <a:tc>
+                  <a:txBody>
+                    <a:bodyPr/>
+                    <a:lstStyle/>
+                    <a:p>
+                      <a:r>
+                        <a:rPr sz="1100">
+                          <a:solidFill>
+                            <a:srgbClr val="C4C6CC"/>
+                          </a:solidFill>
+                          <a:latin typeface="DM Sans"/>
+                        </a:rPr>
+                        <a:t>Intervention</a:t>
+                      </a:r>
+                    </a:p>
+                  </a:txBody>
+                  <a:tcPr marL="64008" marR="64008" marT="36576" marB="36576">
                     <a:solidFill>
                       <a:srgbClr val="0E0F11"/>
                     </a:solidFill>
@@ -7185,39 +10281,15 @@
                       <a:r>
                         <a:rPr sz="1100">
                           <a:solidFill>
-                            <a:srgbClr val="E9E9EA"/>
+                            <a:srgbClr val="C4C6CC"/>
                           </a:solidFill>
                           <a:latin typeface="DM Sans"/>
                         </a:rPr>
-                        <a:t>Build + preflight gates + diagnostics for trust-critical surfaces</a:t>
+                        <a:t>Nudge shown/actioned/recovery</a:t>
                       </a:r>
                     </a:p>
                   </a:txBody>
-                  <a:tcPr>
-                    <a:solidFill>
-                      <a:srgbClr val="0E0F11"/>
-                    </a:solidFill>
-                  </a:tcPr>
-                </a:tc>
-              </a:tr>
-              <a:tr h="841248">
-                <a:tc>
-                  <a:txBody>
-                    <a:bodyPr/>
-                    <a:lstStyle/>
-                    <a:p>
-                      <a:r>
-                        <a:rPr sz="1100">
-                          <a:solidFill>
-                            <a:srgbClr val="E9E9EA"/>
-                          </a:solidFill>
-                          <a:latin typeface="DM Sans"/>
-                        </a:rPr>
-                        <a:t>Retention decay</a:t>
-                      </a:r>
-                    </a:p>
-                  </a:txBody>
-                  <a:tcPr>
+                  <a:tcPr marL="64008" marR="64008" marT="36576" marB="36576">
                     <a:solidFill>
                       <a:srgbClr val="0E0F11"/>
                     </a:solidFill>
@@ -7231,15 +10303,151 @@
                       <a:r>
                         <a:rPr sz="1100">
                           <a:solidFill>
-                            <a:srgbClr val="E9E9EA"/>
+                            <a:srgbClr val="C4C6CC"/>
                           </a:solidFill>
                           <a:latin typeface="DM Sans"/>
                         </a:rPr>
-                        <a:t>Daily loop reinforcement + intervention recovery measurement</a:t>
+                        <a:t>Preventive support conversion</a:t>
                       </a:r>
                     </a:p>
                   </a:txBody>
-                  <a:tcPr>
+                  <a:tcPr marL="64008" marR="64008" marT="36576" marB="36576">
+                    <a:solidFill>
+                      <a:srgbClr val="0E0F11"/>
+                    </a:solidFill>
+                  </a:tcPr>
+                </a:tc>
+              </a:tr>
+              <a:tr h="754380">
+                <a:tc>
+                  <a:txBody>
+                    <a:bodyPr/>
+                    <a:lstStyle/>
+                    <a:p>
+                      <a:r>
+                        <a:rPr sz="1100">
+                          <a:solidFill>
+                            <a:srgbClr val="C4C6CC"/>
+                          </a:solidFill>
+                          <a:latin typeface="DM Sans"/>
+                        </a:rPr>
+                        <a:t>Longitudinal</a:t>
+                      </a:r>
+                    </a:p>
+                  </a:txBody>
+                  <a:tcPr marL="64008" marR="64008" marT="36576" marB="36576">
+                    <a:solidFill>
+                      <a:srgbClr val="1F2228"/>
+                    </a:solidFill>
+                  </a:tcPr>
+                </a:tc>
+                <a:tc>
+                  <a:txBody>
+                    <a:bodyPr/>
+                    <a:lstStyle/>
+                    <a:p>
+                      <a:r>
+                        <a:rPr sz="1100">
+                          <a:solidFill>
+                            <a:srgbClr val="C4C6CC"/>
+                          </a:solidFill>
+                          <a:latin typeface="DM Sans"/>
+                        </a:rPr>
+                        <a:t>Awareness latency trend</a:t>
+                      </a:r>
+                    </a:p>
+                  </a:txBody>
+                  <a:tcPr marL="64008" marR="64008" marT="36576" marB="36576">
+                    <a:solidFill>
+                      <a:srgbClr val="1F2228"/>
+                    </a:solidFill>
+                  </a:tcPr>
+                </a:tc>
+                <a:tc>
+                  <a:txBody>
+                    <a:bodyPr/>
+                    <a:lstStyle/>
+                    <a:p>
+                      <a:r>
+                        <a:rPr sz="1100">
+                          <a:solidFill>
+                            <a:srgbClr val="C4C6CC"/>
+                          </a:solidFill>
+                          <a:latin typeface="DM Sans"/>
+                        </a:rPr>
+                        <a:t>Maturity and self-regulation speed</a:t>
+                      </a:r>
+                    </a:p>
+                  </a:txBody>
+                  <a:tcPr marL="64008" marR="64008" marT="36576" marB="36576">
+                    <a:solidFill>
+                      <a:srgbClr val="1F2228"/>
+                    </a:solidFill>
+                  </a:tcPr>
+                </a:tc>
+              </a:tr>
+              <a:tr h="754380">
+                <a:tc>
+                  <a:txBody>
+                    <a:bodyPr/>
+                    <a:lstStyle/>
+                    <a:p>
+                      <a:r>
+                        <a:rPr sz="1100">
+                          <a:solidFill>
+                            <a:srgbClr val="C4C6CC"/>
+                          </a:solidFill>
+                          <a:latin typeface="DM Sans"/>
+                        </a:rPr>
+                        <a:t>Trust</a:t>
+                      </a:r>
+                    </a:p>
+                  </a:txBody>
+                  <a:tcPr marL="64008" marR="64008" marT="36576" marB="36576">
+                    <a:solidFill>
+                      <a:srgbClr val="0E0F11"/>
+                    </a:solidFill>
+                  </a:tcPr>
+                </a:tc>
+                <a:tc>
+                  <a:txBody>
+                    <a:bodyPr/>
+                    <a:lstStyle/>
+                    <a:p>
+                      <a:r>
+                        <a:rPr sz="1100">
+                          <a:solidFill>
+                            <a:srgbClr val="C4C6CC"/>
+                          </a:solidFill>
+                          <a:latin typeface="DM Sans"/>
+                        </a:rPr>
+                        <a:t>Restore reliability + entitlement truth</a:t>
+                      </a:r>
+                    </a:p>
+                  </a:txBody>
+                  <a:tcPr marL="64008" marR="64008" marT="36576" marB="36576">
+                    <a:solidFill>
+                      <a:srgbClr val="0E0F11"/>
+                    </a:solidFill>
+                  </a:tcPr>
+                </a:tc>
+                <a:tc>
+                  <a:txBody>
+                    <a:bodyPr/>
+                    <a:lstStyle/>
+                    <a:p>
+                      <a:r>
+                        <a:rPr sz="1100">
+                          <a:solidFill>
+                            <a:srgbClr val="C4C6CC"/>
+                          </a:solidFill>
+                          <a:latin typeface="DM Sans"/>
+                        </a:rPr>
+                        <a:t>Operational integrity in production</a:t>
+                      </a:r>
+                    </a:p>
+                  </a:txBody>
+                  <a:tcPr marL="64008" marR="64008" marT="36576" marB="36576">
                     <a:solidFill>
                       <a:srgbClr val="0E0F11"/>
                     </a:solidFill>

--- a/public/Stillform_Strategic_Overview.pptx
+++ b/public/Stillform_Strategic_Overview.pptx
@@ -3285,7 +3285,7 @@
                 </a:solidFill>
                 <a:latin typeface="DM Sans"/>
               </a:rPr>
-              <a:t>Preventive risk management for human behavior · science-first operating deck</a:t>
+              <a:t>Preventive risk management for human behavior</a:t>
             </a:r>
           </a:p>
         </p:txBody>
@@ -3685,7 +3685,7 @@
                 </a:solidFill>
                 <a:latin typeface="DM Sans"/>
               </a:rPr>
-              <a:t>Operator-grade economics and channel logic.</a:t>
+              <a:t>Focused economics and trust-first channel strategy.</a:t>
             </a:r>
           </a:p>
         </p:txBody>
@@ -4180,7 +4180,7 @@
                           </a:solidFill>
                           <a:latin typeface="DM Sans"/>
                         </a:rPr>
-                        <a:t>Trust transfer beats cold paid acquisition</a:t>
+                        <a:t>Trust transfer outperforms cold paid acquisition</a:t>
                       </a:r>
                     </a:p>
                   </a:txBody>
@@ -5363,7 +5363,7 @@
                 </a:solidFill>
                 <a:latin typeface="DM Sans"/>
               </a:rPr>
-              <a:t>Release discipline and risk controls as product features.</a:t>
+              <a:t>Release discipline is part of the product, not an afterthought.</a:t>
             </a:r>
           </a:p>
         </p:txBody>
@@ -6437,7 +6437,7 @@
                 </a:solidFill>
                 <a:latin typeface="DM Sans"/>
               </a:rPr>
-              <a:t>Who / What / How / Why with zero category drift.</a:t>
+              <a:t>Clear category definition and operating thesis.</a:t>
             </a:r>
           </a:p>
         </p:txBody>
@@ -6643,7 +6643,7 @@
                 </a:solidFill>
                 <a:latin typeface="DM Sans"/>
               </a:rPr>
-              <a:t>Core framing constraints</a:t>
+              <a:t>Category, mechanism, and strategic position</a:t>
             </a:r>
           </a:p>
         </p:txBody>
@@ -6932,7 +6932,7 @@
                           </a:solidFill>
                           <a:latin typeface="DM Sans"/>
                         </a:rPr>
-                        <a:t>Mechanism-driven architecture, not inspirational content.</a:t>
+                        <a:t>Mechanism-driven architecture, not inspiration content.</a:t>
                       </a:r>
                     </a:p>
                   </a:txBody>
@@ -7339,7 +7339,7 @@
                 </a:solidFill>
                 <a:latin typeface="DM Sans"/>
               </a:rPr>
-              <a:t>Mechanism table split into clean slides for readability.</a:t>
+              <a:t>Science is operationalized as product behavior, not decoration.</a:t>
             </a:r>
           </a:p>
         </p:txBody>

--- a/public/Stillform_Strategic_Overview.pptx
+++ b/public/Stillform_Strategic_Overview.pptx
@@ -132,18 +132,18 @@
               <c:strCache>
                 <c:ptCount val="1"/>
                 <c:pt idx="0">
-                  <c:v>Global adults (%)</c:v>
+                  <c:v>Negative emotions (%)</c:v>
                 </c:pt>
               </c:strCache>
             </c:strRef>
           </c:tx>
           <c:spPr>
             <a:solidFill>
-              <a:srgbClr val="EBAB4A"/>
+              <a:srgbClr val="D76060"/>
             </a:solidFill>
             <a:ln>
               <a:solidFill>
-                <a:srgbClr val="EBAB4A"/>
+                <a:srgbClr val="D76060"/>
               </a:solidFill>
             </a:ln>
           </c:spPr>
@@ -285,6 +285,176 @@
 </file>
 
 <file path=ppt/charts/chart2.xml><?xml version="1.0" encoding="utf-8"?>
+<c:chartSpace xmlns:c="http://schemas.openxmlformats.org/drawingml/2006/chart" xmlns:a="http://schemas.openxmlformats.org/drawingml/2006/main" xmlns:r="http://schemas.openxmlformats.org/officeDocument/2006/relationships">
+  <c:date1904 val="0"/>
+  <c:chart>
+    <c:autoTitleDeleted val="0"/>
+    <c:plotArea>
+      <c:barChart>
+        <c:barDir val="bar"/>
+        <c:grouping val="clustered"/>
+        <c:ser>
+          <c:idx val="0"/>
+          <c:order val="0"/>
+          <c:tx>
+            <c:strRef>
+              <c:f>Sheet1!$B$1</c:f>
+              <c:strCache>
+                <c:ptCount val="1"/>
+                <c:pt idx="0">
+                  <c:v>Positive experiences (%)</c:v>
+                </c:pt>
+              </c:strCache>
+            </c:strRef>
+          </c:tx>
+          <c:spPr>
+            <a:solidFill>
+              <a:srgbClr val="63BF93"/>
+            </a:solidFill>
+            <a:ln>
+              <a:solidFill>
+                <a:srgbClr val="63BF93"/>
+              </a:solidFill>
+            </a:ln>
+          </c:spPr>
+          <c:cat>
+            <c:strRef>
+              <c:f>Sheet1!$A$2:$A$6</c:f>
+              <c:strCache>
+                <c:ptCount val="5"/>
+                <c:pt idx="0">
+                  <c:v>Respect</c:v>
+                </c:pt>
+                <c:pt idx="1">
+                  <c:v>Laughter</c:v>
+                </c:pt>
+                <c:pt idx="2">
+                  <c:v>Enjoyment</c:v>
+                </c:pt>
+                <c:pt idx="3">
+                  <c:v>Well-rested</c:v>
+                </c:pt>
+                <c:pt idx="4">
+                  <c:v>Learned</c:v>
+                </c:pt>
+              </c:strCache>
+            </c:strRef>
+          </c:cat>
+          <c:val>
+            <c:numRef>
+              <c:f>Sheet1!$B$2:$B$6</c:f>
+              <c:numCache>
+                <c:formatCode>General</c:formatCode>
+                <c:ptCount val="5"/>
+                <c:pt idx="0">
+                  <c:v>88</c:v>
+                </c:pt>
+                <c:pt idx="1">
+                  <c:v>73</c:v>
+                </c:pt>
+                <c:pt idx="2">
+                  <c:v>73</c:v>
+                </c:pt>
+                <c:pt idx="3">
+                  <c:v>72</c:v>
+                </c:pt>
+                <c:pt idx="4">
+                  <c:v>52</c:v>
+                </c:pt>
+              </c:numCache>
+            </c:numRef>
+          </c:val>
+        </c:ser>
+        <c:axId val="-2068027336"/>
+        <c:axId val="-2113994440"/>
+      </c:barChart>
+      <c:catAx>
+        <c:axId val="-2068027336"/>
+        <c:scaling>
+          <c:orientation val="minMax"/>
+        </c:scaling>
+        <c:delete val="0"/>
+        <c:axPos val="l"/>
+        <c:majorTickMark val="out"/>
+        <c:minorTickMark val="none"/>
+        <c:tickLblPos val="nextTo"/>
+        <c:txPr>
+          <a:bodyPr/>
+          <a:lstStyle/>
+          <a:p>
+            <a:pPr>
+              <a:defRPr sz="1100">
+                <a:solidFill>
+                  <a:srgbClr val="A6B0BF"/>
+                </a:solidFill>
+                <a:latin typeface="Calibri"/>
+              </a:defRPr>
+            </a:pPr>
+          </a:p>
+        </c:txPr>
+        <c:crossAx val="-2113994440"/>
+        <c:crosses val="autoZero"/>
+        <c:auto val="1"/>
+        <c:lblAlgn val="ctr"/>
+        <c:lblOffset val="100"/>
+        <c:noMultiLvlLbl val="0"/>
+      </c:catAx>
+      <c:valAx>
+        <c:axId val="-2113994440"/>
+        <c:scaling>
+          <c:max val="100.0"/>
+        </c:scaling>
+        <c:delete val="0"/>
+        <c:axPos val="b"/>
+        <c:majorGridlines>
+          <c:spPr>
+            <a:ln>
+              <a:solidFill>
+                <a:srgbClr val="363F4F"/>
+              </a:solidFill>
+            </a:ln>
+          </c:spPr>
+        </c:majorGridlines>
+        <c:majorTickMark val="out"/>
+        <c:minorTickMark val="none"/>
+        <c:tickLblPos val="nextTo"/>
+        <c:txPr>
+          <a:bodyPr/>
+          <a:lstStyle/>
+          <a:p>
+            <a:pPr>
+              <a:defRPr sz="1100">
+                <a:solidFill>
+                  <a:srgbClr val="A6B0BF"/>
+                </a:solidFill>
+                <a:latin typeface="Calibri"/>
+              </a:defRPr>
+            </a:pPr>
+          </a:p>
+        </c:txPr>
+        <c:crossAx val="-2068027336"/>
+        <c:crosses val="autoZero"/>
+      </c:valAx>
+    </c:plotArea>
+    <c:dispBlanksAs val="gap"/>
+  </c:chart>
+  <c:txPr>
+    <a:bodyPr/>
+    <a:lstStyle/>
+    <a:p>
+      <a:pPr>
+        <a:defRPr sz="1800"/>
+      </a:pPr>
+      <a:endParaRPr lang="en-US"/>
+    </a:p>
+  </c:txPr>
+  <c:externalData r:id="rId1">
+    <c:autoUpdate val="0"/>
+  </c:externalData>
+</c:chartSpace>
+</file>
+
+<file path=ppt/charts/chart3.xml><?xml version="1.0" encoding="utf-8"?>
 <c:chartSpace xmlns:c="http://schemas.openxmlformats.org/drawingml/2006/chart" xmlns:a="http://schemas.openxmlformats.org/drawingml/2006/main" xmlns:r="http://schemas.openxmlformats.org/officeDocument/2006/relationships">
   <c:date1904 val="0"/>
   <c:chart>
@@ -446,7 +616,7 @@
 </c:chartSpace>
 </file>
 
-<file path=ppt/charts/chart3.xml><?xml version="1.0" encoding="utf-8"?>
+<file path=ppt/charts/chart4.xml><?xml version="1.0" encoding="utf-8"?>
 <c:chartSpace xmlns:c="http://schemas.openxmlformats.org/drawingml/2006/chart" xmlns:a="http://schemas.openxmlformats.org/drawingml/2006/main" xmlns:r="http://schemas.openxmlformats.org/officeDocument/2006/relationships">
   <c:date1904 val="0"/>
   <c:chart>
@@ -702,7 +872,7 @@
 </c:chartSpace>
 </file>
 
-<file path=ppt/charts/chart4.xml><?xml version="1.0" encoding="utf-8"?>
+<file path=ppt/charts/chart5.xml><?xml version="1.0" encoding="utf-8"?>
 <c:chartSpace xmlns:c="http://schemas.openxmlformats.org/drawingml/2006/chart" xmlns:a="http://schemas.openxmlformats.org/drawingml/2006/main" xmlns:r="http://schemas.openxmlformats.org/officeDocument/2006/relationships">
   <c:date1904 val="0"/>
   <c:chart>
@@ -927,7 +1097,7 @@
 </c:chartSpace>
 </file>
 
-<file path=ppt/charts/chart5.xml><?xml version="1.0" encoding="utf-8"?>
+<file path=ppt/charts/chart6.xml><?xml version="1.0" encoding="utf-8"?>
 <c:chartSpace xmlns:c="http://schemas.openxmlformats.org/drawingml/2006/chart" xmlns:a="http://schemas.openxmlformats.org/drawingml/2006/main" xmlns:r="http://schemas.openxmlformats.org/officeDocument/2006/relationships">
   <c:date1904 val="0"/>
   <c:chart>
@@ -4601,7 +4771,7 @@
                 </a:solidFill>
                 <a:latin typeface="Calibri"/>
               </a:rPr>
-              <a:t>Global Emotional Load</a:t>
+              <a:t>Global Emotional Landscape</a:t>
             </a:r>
           </a:p>
         </p:txBody>
@@ -4635,7 +4805,7 @@
                 </a:solidFill>
                 <a:latin typeface="Calibri"/>
               </a:rPr>
-              <a:t>Daily distress indicators remain elevated worldwide</a:t>
+              <a:t>Risk signals and capacity signals both matter</a:t>
             </a:r>
           </a:p>
         </p:txBody>
@@ -4649,7 +4819,7 @@
         <p:spPr>
           <a:xfrm>
             <a:off x="685800" y="1901952"/>
-            <a:ext cx="7360920" cy="4251960"/>
+            <a:ext cx="5486400" cy="4251960"/>
           </a:xfrm>
           <a:prstGeom prst="roundRect">
             <a:avLst/>
@@ -4694,8 +4864,8 @@
           <p:nvPr/>
         </p:nvGraphicFramePr>
         <p:xfrm>
-          <a:off x="960120" y="2240280"/>
-          <a:ext cx="6812280" cy="3611880"/>
+          <a:off x="914400" y="2331720"/>
+          <a:ext cx="5074920" cy="3520440"/>
         </p:xfrm>
         <a:graphic>
           <a:graphicData uri="http://schemas.openxmlformats.org/drawingml/2006/chart">
@@ -4711,8 +4881,8 @@
         </p:nvSpPr>
         <p:spPr>
           <a:xfrm>
-            <a:off x="8275320" y="1901952"/>
-            <a:ext cx="3246120" cy="4251960"/>
+            <a:off x="6355080" y="1901952"/>
+            <a:ext cx="5349240" cy="4251960"/>
           </a:xfrm>
           <a:prstGeom prst="roundRect">
             <a:avLst/>
@@ -4748,16 +4918,34 @@
           </a:p>
         </p:txBody>
       </p:sp>
-      <p:sp>
-        <p:nvSpPr>
-          <p:cNvPr id="10" name="TextBox 9"/>
+      <p:graphicFrame>
+        <p:nvGraphicFramePr>
+          <p:cNvPr id="10" name="Chart 9"/>
+          <p:cNvGraphicFramePr>
+            <a:graphicFrameLocks noGrp="1"/>
+          </p:cNvGraphicFramePr>
+          <p:nvPr/>
+        </p:nvGraphicFramePr>
+        <p:xfrm>
+          <a:off x="6583680" y="2331720"/>
+          <a:ext cx="4937760" cy="3520440"/>
+        </p:xfrm>
+        <a:graphic>
+          <a:graphicData uri="http://schemas.openxmlformats.org/drawingml/2006/chart">
+            <c:chart xmlns:c="http://schemas.openxmlformats.org/drawingml/2006/chart" r:id="rId3"/>
+          </a:graphicData>
+        </a:graphic>
+      </p:graphicFrame>
+      <p:sp>
+        <p:nvSpPr>
+          <p:cNvPr id="11" name="TextBox 10"/>
           <p:cNvSpPr txBox="1"/>
           <p:nvPr/>
         </p:nvSpPr>
         <p:spPr>
           <a:xfrm>
-            <a:off x="8549640" y="2240280"/>
-            <a:ext cx="2560320" cy="1463040"/>
+            <a:off x="685800" y="6464808"/>
+            <a:ext cx="10972800" cy="219456"/>
           </a:xfrm>
           <a:prstGeom prst="rect">
             <a:avLst/>
@@ -4770,155 +4958,14 @@
           </a:bodyPr>
           <a:lstStyle/>
           <a:p>
-            <a:pPr algn="l"/>
-            <a:r>
-              <a:rPr sz="1000">
+            <a:r>
+              <a:rPr sz="900">
                 <a:solidFill>
                   <a:srgbClr val="A6B0BF"/>
                 </a:solidFill>
                 <a:latin typeface="Consolas"/>
               </a:rPr>
-              <a:t>WORRY</a:t>
-            </a:r>
-          </a:p>
-          <a:p>
-            <a:pPr algn="l"/>
-            <a:r>
-              <a:rPr sz="3800" b="1">
-                <a:solidFill>
-                  <a:srgbClr val="D76060"/>
-                </a:solidFill>
-                <a:latin typeface="Calibri"/>
-              </a:rPr>
-              <a:t>39%</a:t>
-            </a:r>
-          </a:p>
-        </p:txBody>
-      </p:sp>
-      <p:sp>
-        <p:nvSpPr>
-          <p:cNvPr id="11" name="TextBox 10"/>
-          <p:cNvSpPr txBox="1"/>
-          <p:nvPr/>
-        </p:nvSpPr>
-        <p:spPr>
-          <a:xfrm>
-            <a:off x="8549640" y="3401568"/>
-            <a:ext cx="2560320" cy="1463040"/>
-          </a:xfrm>
-          <a:prstGeom prst="rect">
-            <a:avLst/>
-          </a:prstGeom>
-          <a:noFill/>
-        </p:spPr>
-        <p:txBody>
-          <a:bodyPr wrap="none">
-            <a:spAutoFit/>
-          </a:bodyPr>
-          <a:lstStyle/>
-          <a:p>
-            <a:pPr algn="l"/>
-            <a:r>
-              <a:rPr sz="1000">
-                <a:solidFill>
-                  <a:srgbClr val="A6B0BF"/>
-                </a:solidFill>
-                <a:latin typeface="Consolas"/>
-              </a:rPr>
-              <a:t>STRESS</a:t>
-            </a:r>
-          </a:p>
-          <a:p>
-            <a:pPr algn="l"/>
-            <a:r>
-              <a:rPr sz="3800" b="1">
-                <a:solidFill>
-                  <a:srgbClr val="EBAB4A"/>
-                </a:solidFill>
-                <a:latin typeface="Calibri"/>
-              </a:rPr>
-              <a:t>37%</a:t>
-            </a:r>
-          </a:p>
-        </p:txBody>
-      </p:sp>
-      <p:sp>
-        <p:nvSpPr>
-          <p:cNvPr id="12" name="TextBox 11"/>
-          <p:cNvSpPr txBox="1"/>
-          <p:nvPr/>
-        </p:nvSpPr>
-        <p:spPr>
-          <a:xfrm>
-            <a:off x="8549640" y="4562856"/>
-            <a:ext cx="2560320" cy="1463040"/>
-          </a:xfrm>
-          <a:prstGeom prst="rect">
-            <a:avLst/>
-          </a:prstGeom>
-          <a:noFill/>
-        </p:spPr>
-        <p:txBody>
-          <a:bodyPr wrap="none">
-            <a:spAutoFit/>
-          </a:bodyPr>
-          <a:lstStyle/>
-          <a:p>
-            <a:pPr algn="l"/>
-            <a:r>
-              <a:rPr sz="1000">
-                <a:solidFill>
-                  <a:srgbClr val="A6B0BF"/>
-                </a:solidFill>
-                <a:latin typeface="Consolas"/>
-              </a:rPr>
-              <a:t>PAIN</a:t>
-            </a:r>
-          </a:p>
-          <a:p>
-            <a:pPr algn="l"/>
-            <a:r>
-              <a:rPr sz="3800" b="1">
-                <a:solidFill>
-                  <a:srgbClr val="5E99F4"/>
-                </a:solidFill>
-                <a:latin typeface="Calibri"/>
-              </a:rPr>
-              <a:t>32%</a:t>
-            </a:r>
-          </a:p>
-        </p:txBody>
-      </p:sp>
-      <p:sp>
-        <p:nvSpPr>
-          <p:cNvPr id="13" name="TextBox 12"/>
-          <p:cNvSpPr txBox="1"/>
-          <p:nvPr/>
-        </p:nvSpPr>
-        <p:spPr>
-          <a:xfrm>
-            <a:off x="685800" y="6464808"/>
-            <a:ext cx="10972800" cy="219456"/>
-          </a:xfrm>
-          <a:prstGeom prst="rect">
-            <a:avLst/>
-          </a:prstGeom>
-          <a:noFill/>
-        </p:spPr>
-        <p:txBody>
-          <a:bodyPr wrap="none">
-            <a:spAutoFit/>
-          </a:bodyPr>
-          <a:lstStyle/>
-          <a:p>
-            <a:r>
-              <a:rPr sz="900">
-                <a:solidFill>
-                  <a:srgbClr val="A6B0BF"/>
-                </a:solidFill>
-                <a:latin typeface="Consolas"/>
-              </a:rPr>
-              <a:t>Source: Gallup State of the World's Emotional Health (2024 global survey)</a:t>
+              <a:t>Source: Gallup State of the World's Emotional Health (2024 global survey): negative + positive indicators</a:t>
             </a:r>
           </a:p>
         </p:txBody>

--- a/public/Stillform_Strategic_Overview.pptx
+++ b/public/Stillform_Strategic_Overview.pptx
@@ -13,6 +13,8 @@
     <p:sldId id="261" r:id="rId12"/>
     <p:sldId id="262" r:id="rId13"/>
     <p:sldId id="263" r:id="rId14"/>
+    <p:sldId id="264" r:id="rId15"/>
+    <p:sldId id="265" r:id="rId16"/>
   </p:sldIdLst>
   <p:sldSz cx="12191695" cy="6858000" type="screen4x3"/>
   <p:notesSz cx="6858000" cy="9144000"/>
@@ -132,18 +134,18 @@
               <c:strCache>
                 <c:ptCount val="1"/>
                 <c:pt idx="0">
-                  <c:v>Negative emotions (%)</c:v>
+                  <c:v>Daily negative experiences (%)</c:v>
                 </c:pt>
               </c:strCache>
             </c:strRef>
           </c:tx>
           <c:spPr>
             <a:solidFill>
-              <a:srgbClr val="D76060"/>
+              <a:srgbClr val="D86161"/>
             </a:solidFill>
             <a:ln>
               <a:solidFill>
-                <a:srgbClr val="D76060"/>
+                <a:srgbClr val="D86161"/>
               </a:solidFill>
             </a:ln>
           </c:spPr>
@@ -213,9 +215,9 @@
           <a:lstStyle/>
           <a:p>
             <a:pPr>
-              <a:defRPr sz="1100">
-                <a:solidFill>
-                  <a:srgbClr val="A6B0BF"/>
+              <a:defRPr sz="1000">
+                <a:solidFill>
+                  <a:srgbClr val="A7B2C2"/>
                 </a:solidFill>
                 <a:latin typeface="Calibri"/>
               </a:defRPr>
@@ -240,7 +242,7 @@
           <c:spPr>
             <a:ln>
               <a:solidFill>
-                <a:srgbClr val="363F4F"/>
+                <a:srgbClr val="3B4557"/>
               </a:solidFill>
             </a:ln>
           </c:spPr>
@@ -253,9 +255,9 @@
           <a:lstStyle/>
           <a:p>
             <a:pPr>
-              <a:defRPr sz="1100">
-                <a:solidFill>
-                  <a:srgbClr val="A6B0BF"/>
+              <a:defRPr sz="1000">
+                <a:solidFill>
+                  <a:srgbClr val="A7B2C2"/>
                 </a:solidFill>
                 <a:latin typeface="Calibri"/>
               </a:defRPr>
@@ -302,18 +304,18 @@
               <c:strCache>
                 <c:ptCount val="1"/>
                 <c:pt idx="0">
-                  <c:v>Positive experiences (%)</c:v>
+                  <c:v>Daily positive experiences (%)</c:v>
                 </c:pt>
               </c:strCache>
             </c:strRef>
           </c:tx>
           <c:spPr>
             <a:solidFill>
-              <a:srgbClr val="63BF93"/>
+              <a:srgbClr val="65BF95"/>
             </a:solidFill>
             <a:ln>
               <a:solidFill>
-                <a:srgbClr val="63BF93"/>
+                <a:srgbClr val="65BF95"/>
               </a:solidFill>
             </a:ln>
           </c:spPr>
@@ -335,7 +337,7 @@
                   <c:v>Well-rested</c:v>
                 </c:pt>
                 <c:pt idx="4">
-                  <c:v>Learned</c:v>
+                  <c:v>Learned something</c:v>
                 </c:pt>
               </c:strCache>
             </c:strRef>
@@ -383,9 +385,9 @@
           <a:lstStyle/>
           <a:p>
             <a:pPr>
-              <a:defRPr sz="1100">
-                <a:solidFill>
-                  <a:srgbClr val="A6B0BF"/>
+              <a:defRPr sz="1000">
+                <a:solidFill>
+                  <a:srgbClr val="A7B2C2"/>
                 </a:solidFill>
                 <a:latin typeface="Calibri"/>
               </a:defRPr>
@@ -410,7 +412,7 @@
           <c:spPr>
             <a:ln>
               <a:solidFill>
-                <a:srgbClr val="363F4F"/>
+                <a:srgbClr val="3B4557"/>
               </a:solidFill>
             </a:ln>
           </c:spPr>
@@ -423,9 +425,9 @@
           <a:lstStyle/>
           <a:p>
             <a:pPr>
-              <a:defRPr sz="1100">
-                <a:solidFill>
-                  <a:srgbClr val="A6B0BF"/>
+              <a:defRPr sz="1000">
+                <a:solidFill>
+                  <a:srgbClr val="A7B2C2"/>
                 </a:solidFill>
                 <a:latin typeface="Calibri"/>
               </a:defRPr>
@@ -472,37 +474,79 @@
               <c:strCache>
                 <c:ptCount val="1"/>
                 <c:pt idx="0">
-                  <c:v>People affected (millions)</c:v>
+                  <c:v>Issue/lever index</c:v>
                 </c:pt>
               </c:strCache>
             </c:strRef>
           </c:tx>
-          <c:spPr>
-            <a:solidFill>
-              <a:srgbClr val="5E99F4"/>
-            </a:solidFill>
-            <a:ln>
+          <c:dPt>
+            <c:idx val="0"/>
+            <c:spPr>
               <a:solidFill>
-                <a:srgbClr val="5E99F4"/>
+                <a:srgbClr val="D86161"/>
               </a:solidFill>
-            </a:ln>
-          </c:spPr>
+              <a:ln>
+                <a:solidFill>
+                  <a:srgbClr val="D86161"/>
+                </a:solidFill>
+              </a:ln>
+            </c:spPr>
+          </c:dPt>
+          <c:dPt>
+            <c:idx val="1"/>
+            <c:spPr>
+              <a:solidFill>
+                <a:srgbClr val="D86161"/>
+              </a:solidFill>
+              <a:ln>
+                <a:solidFill>
+                  <a:srgbClr val="D86161"/>
+                </a:solidFill>
+              </a:ln>
+            </c:spPr>
+          </c:dPt>
+          <c:dPt>
+            <c:idx val="2"/>
+            <c:spPr>
+              <a:solidFill>
+                <a:srgbClr val="65BF95"/>
+              </a:solidFill>
+              <a:ln>
+                <a:solidFill>
+                  <a:srgbClr val="65BF95"/>
+                </a:solidFill>
+              </a:ln>
+            </c:spPr>
+          </c:dPt>
+          <c:dPt>
+            <c:idx val="3"/>
+            <c:spPr>
+              <a:solidFill>
+                <a:srgbClr val="629FF6"/>
+              </a:solidFill>
+              <a:ln>
+                <a:solidFill>
+                  <a:srgbClr val="629FF6"/>
+                </a:solidFill>
+              </a:ln>
+            </c:spPr>
+          </c:dPt>
           <c:cat>
             <c:strRef>
               <c:f>Sheet1!$A$2:$A$5</c:f>
               <c:strCache>
                 <c:ptCount val="4"/>
                 <c:pt idx="0">
-                  <c:v>Anxiety</c:v>
+                  <c:v>Worry load</c:v>
                 </c:pt>
                 <c:pt idx="1">
-                  <c:v>Depression</c:v>
+                  <c:v>Stress load</c:v>
                 </c:pt>
                 <c:pt idx="2">
-                  <c:v>Bipolar</c:v>
+                  <c:v>Learning signal</c:v>
                 </c:pt>
                 <c:pt idx="3">
-                  <c:v>Schizophrenia</c:v>
+                  <c:v>Affect labeling support</c:v>
                 </c:pt>
               </c:strCache>
             </c:strRef>
@@ -514,16 +558,16 @@
                 <c:formatCode>General</c:formatCode>
                 <c:ptCount val="4"/>
                 <c:pt idx="0">
-                  <c:v>359</c:v>
+                  <c:v>39</c:v>
                 </c:pt>
                 <c:pt idx="1">
-                  <c:v>280</c:v>
+                  <c:v>37</c:v>
                 </c:pt>
                 <c:pt idx="2">
-                  <c:v>37</c:v>
+                  <c:v>52</c:v>
                 </c:pt>
                 <c:pt idx="3">
-                  <c:v>23</c:v>
+                  <c:v>60</c:v>
                 </c:pt>
               </c:numCache>
             </c:numRef>
@@ -547,9 +591,9 @@
           <a:lstStyle/>
           <a:p>
             <a:pPr>
-              <a:defRPr sz="1100">
-                <a:solidFill>
-                  <a:srgbClr val="A6B0BF"/>
+              <a:defRPr sz="1000">
+                <a:solidFill>
+                  <a:srgbClr val="A7B2C2"/>
                 </a:solidFill>
                 <a:latin typeface="Calibri"/>
               </a:defRPr>
@@ -565,14 +609,16 @@
       </c:catAx>
       <c:valAx>
         <c:axId val="-2113994440"/>
-        <c:scaling/>
+        <c:scaling>
+          <c:max val="65.0"/>
+        </c:scaling>
         <c:delete val="0"/>
         <c:axPos val="l"/>
         <c:majorGridlines>
           <c:spPr>
             <a:ln>
               <a:solidFill>
-                <a:srgbClr val="363F4F"/>
+                <a:srgbClr val="3B4557"/>
               </a:solidFill>
             </a:ln>
           </c:spPr>
@@ -585,9 +631,9 @@
           <a:lstStyle/>
           <a:p>
             <a:pPr>
-              <a:defRPr sz="1100">
-                <a:solidFill>
-                  <a:srgbClr val="A6B0BF"/>
+              <a:defRPr sz="1000">
+                <a:solidFill>
+                  <a:srgbClr val="A7B2C2"/>
                 </a:solidFill>
                 <a:latin typeface="Calibri"/>
               </a:defRPr>
@@ -622,9 +668,9 @@
   <c:chart>
     <c:autoTitleDeleted val="0"/>
     <c:plotArea>
-      <c:lineChart>
-        <c:grouping val="standard"/>
-        <c:varyColors val="0"/>
+      <c:barChart>
+        <c:barDir val="col"/>
+        <c:grouping val="clustered"/>
         <c:ser>
           <c:idx val="0"/>
           <c:order val="0"/>
@@ -634,138 +680,110 @@
               <c:strCache>
                 <c:ptCount val="1"/>
                 <c:pt idx="0">
-                  <c:v>Overall apps</c:v>
+                  <c:v>Observed range / prevalence (%)</c:v>
                 </c:pt>
               </c:strCache>
             </c:strRef>
           </c:tx>
-          <c:spPr>
-            <a:ln w="33020">
-              <a:solidFill>
-                <a:srgbClr val="D76060"/>
-              </a:solidFill>
-            </a:ln>
-          </c:spPr>
-          <c:marker>
-            <c:symbol val="diamond"/>
-            <c:size val="7"/>
+          <c:dPt>
+            <c:idx val="0"/>
             <c:spPr>
               <a:solidFill>
-                <a:srgbClr val="D76060"/>
+                <a:srgbClr val="A47DEB"/>
               </a:solidFill>
+              <a:ln>
+                <a:solidFill>
+                  <a:srgbClr val="A47DEB"/>
+                </a:solidFill>
+              </a:ln>
             </c:spPr>
-          </c:marker>
+          </c:dPt>
+          <c:dPt>
+            <c:idx val="1"/>
+            <c:spPr>
+              <a:solidFill>
+                <a:srgbClr val="A47DEB"/>
+              </a:solidFill>
+              <a:ln>
+                <a:solidFill>
+                  <a:srgbClr val="A47DEB"/>
+                </a:solidFill>
+              </a:ln>
+            </c:spPr>
+          </c:dPt>
+          <c:dPt>
+            <c:idx val="2"/>
+            <c:spPr>
+              <a:solidFill>
+                <a:srgbClr val="D86161"/>
+              </a:solidFill>
+              <a:ln>
+                <a:solidFill>
+                  <a:srgbClr val="D86161"/>
+                </a:solidFill>
+              </a:ln>
+            </c:spPr>
+          </c:dPt>
+          <c:dPt>
+            <c:idx val="3"/>
+            <c:spPr>
+              <a:solidFill>
+                <a:srgbClr val="D86161"/>
+              </a:solidFill>
+              <a:ln>
+                <a:solidFill>
+                  <a:srgbClr val="D86161"/>
+                </a:solidFill>
+              </a:ln>
+            </c:spPr>
+          </c:dPt>
           <c:cat>
             <c:strRef>
-              <c:f>Sheet1!$A$2:$A$4</c:f>
+              <c:f>Sheet1!$A$2:$A$5</c:f>
               <c:strCache>
-                <c:ptCount val="3"/>
+                <c:ptCount val="4"/>
                 <c:pt idx="0">
-                  <c:v>Day 1</c:v>
+                  <c:v>Negative intensity overread (low)</c:v>
                 </c:pt>
                 <c:pt idx="1">
-                  <c:v>Day 7</c:v>
+                  <c:v>Negative intensity overread (high)</c:v>
                 </c:pt>
                 <c:pt idx="2">
-                  <c:v>Day 30</c:v>
+                  <c:v>Daily anger</c:v>
+                </c:pt>
+                <c:pt idx="3">
+                  <c:v>Daily sadness</c:v>
                 </c:pt>
               </c:strCache>
             </c:strRef>
           </c:cat>
           <c:val>
             <c:numRef>
-              <c:f>Sheet1!$B$2:$B$4</c:f>
+              <c:f>Sheet1!$B$2:$B$5</c:f>
               <c:numCache>
                 <c:formatCode>General</c:formatCode>
-                <c:ptCount val="3"/>
+                <c:ptCount val="4"/>
                 <c:pt idx="0">
-                  <c:v>28.29</c:v>
+                  <c:v>20</c:v>
                 </c:pt>
                 <c:pt idx="1">
-                  <c:v>17.86</c:v>
+                  <c:v>30</c:v>
                 </c:pt>
                 <c:pt idx="2">
-                  <c:v>7.88</c:v>
+                  <c:v>22</c:v>
+                </c:pt>
+                <c:pt idx="3">
+                  <c:v>26</c:v>
                 </c:pt>
               </c:numCache>
             </c:numRef>
           </c:val>
-          <c:smooth val="0"/>
         </c:ser>
-        <c:ser>
-          <c:idx val="1"/>
-          <c:order val="1"/>
-          <c:tx>
-            <c:strRef>
-              <c:f>Sheet1!$C$1</c:f>
-              <c:strCache>
-                <c:ptCount val="1"/>
-                <c:pt idx="0">
-                  <c:v>Health &amp; fitness</c:v>
-                </c:pt>
-              </c:strCache>
-            </c:strRef>
-          </c:tx>
-          <c:spPr>
-            <a:ln w="33020">
-              <a:solidFill>
-                <a:srgbClr val="63BF93"/>
-              </a:solidFill>
-            </a:ln>
-          </c:spPr>
-          <c:marker>
-            <c:symbol val="diamond"/>
-            <c:size val="7"/>
-            <c:spPr>
-              <a:solidFill>
-                <a:srgbClr val="63BF93"/>
-              </a:solidFill>
-            </c:spPr>
-          </c:marker>
-          <c:cat>
-            <c:strRef>
-              <c:f>Sheet1!$A$2:$A$4</c:f>
-              <c:strCache>
-                <c:ptCount val="3"/>
-                <c:pt idx="0">
-                  <c:v>Day 1</c:v>
-                </c:pt>
-                <c:pt idx="1">
-                  <c:v>Day 7</c:v>
-                </c:pt>
-                <c:pt idx="2">
-                  <c:v>Day 30</c:v>
-                </c:pt>
-              </c:strCache>
-            </c:strRef>
-          </c:cat>
-          <c:val>
-            <c:numRef>
-              <c:f>Sheet1!$C$2:$C$4</c:f>
-              <c:numCache>
-                <c:formatCode>General</c:formatCode>
-                <c:ptCount val="3"/>
-                <c:pt idx="0">
-                  <c:v>28.0</c:v>
-                </c:pt>
-                <c:pt idx="1">
-                  <c:v>18.13</c:v>
-                </c:pt>
-                <c:pt idx="2">
-                  <c:v>8.48</c:v>
-                </c:pt>
-              </c:numCache>
-            </c:numRef>
-          </c:val>
-          <c:smooth val="0"/>
-        </c:ser>
-        <c:marker val="1"/>
-        <c:smooth val="0"/>
-        <c:axId val="2118791784"/>
-        <c:axId val="2140495176"/>
-      </c:lineChart>
+        <c:axId val="-2068027336"/>
+        <c:axId val="-2113994440"/>
+      </c:barChart>
       <c:catAx>
-        <c:axId val="2118791784"/>
+        <c:axId val="-2068027336"/>
         <c:scaling>
           <c:orientation val="minMax"/>
         </c:scaling>
@@ -779,16 +797,16 @@
           <a:lstStyle/>
           <a:p>
             <a:pPr>
-              <a:defRPr sz="1100">
-                <a:solidFill>
-                  <a:srgbClr val="A6B0BF"/>
+              <a:defRPr sz="1000">
+                <a:solidFill>
+                  <a:srgbClr val="A7B2C2"/>
                 </a:solidFill>
                 <a:latin typeface="Calibri"/>
               </a:defRPr>
             </a:pPr>
           </a:p>
         </c:txPr>
-        <c:crossAx val="2140495176"/>
+        <c:crossAx val="-2113994440"/>
         <c:crosses val="autoZero"/>
         <c:auto val="1"/>
         <c:lblAlgn val="ctr"/>
@@ -796,10 +814,9 @@
         <c:noMultiLvlLbl val="0"/>
       </c:catAx>
       <c:valAx>
-        <c:axId val="2140495176"/>
+        <c:axId val="-2113994440"/>
         <c:scaling>
-          <c:max val="32.0"/>
-          <c:min val="0.0"/>
+          <c:max val="35.0"/>
         </c:scaling>
         <c:delete val="0"/>
         <c:axPos val="l"/>
@@ -807,7 +824,7 @@
           <c:spPr>
             <a:ln>
               <a:solidFill>
-                <a:srgbClr val="363F4F"/>
+                <a:srgbClr val="3B4557"/>
               </a:solidFill>
             </a:ln>
           </c:spPr>
@@ -820,41 +837,20 @@
           <a:lstStyle/>
           <a:p>
             <a:pPr>
-              <a:defRPr sz="1100">
-                <a:solidFill>
-                  <a:srgbClr val="A6B0BF"/>
+              <a:defRPr sz="1000">
+                <a:solidFill>
+                  <a:srgbClr val="A7B2C2"/>
                 </a:solidFill>
                 <a:latin typeface="Calibri"/>
               </a:defRPr>
             </a:pPr>
           </a:p>
         </c:txPr>
-        <c:crossAx val="2118791784"/>
+        <c:crossAx val="-2068027336"/>
         <c:crosses val="autoZero"/>
       </c:valAx>
     </c:plotArea>
-    <c:legend>
-      <c:legendPos val="b"/>
-      <c:layout/>
-      <c:overlay val="0"/>
-      <c:txPr>
-        <a:bodyPr/>
-        <a:lstStyle/>
-        <a:p>
-          <a:pPr>
-            <a:defRPr sz="1100">
-              <a:solidFill>
-                <a:srgbClr val="A6B0BF"/>
-              </a:solidFill>
-              <a:latin typeface="Calibri"/>
-            </a:defRPr>
-          </a:pPr>
-        </a:p>
-      </c:txPr>
-    </c:legend>
-    <c:plotVisOnly val="1"/>
     <c:dispBlanksAs val="gap"/>
-    <c:showDLblsOverMax val="0"/>
   </c:chart>
   <c:txPr>
     <a:bodyPr/>
@@ -880,7 +876,7 @@
     <c:plotArea>
       <c:barChart>
         <c:barDir val="col"/>
-        <c:grouping val="stacked"/>
+        <c:grouping val="clustered"/>
         <c:ser>
           <c:idx val="0"/>
           <c:order val="0"/>
@@ -890,31 +886,47 @@
               <c:strCache>
                 <c:ptCount val="1"/>
                 <c:pt idx="0">
-                  <c:v>Formal care</c:v>
+                  <c:v>Riots/strikes/anti-gov demos index</c:v>
                 </c:pt>
               </c:strCache>
             </c:strRef>
           </c:tx>
-          <c:spPr>
-            <a:solidFill>
-              <a:srgbClr val="63BF93"/>
-            </a:solidFill>
-            <a:ln>
+          <c:dPt>
+            <c:idx val="0"/>
+            <c:spPr>
               <a:solidFill>
-                <a:srgbClr val="63BF93"/>
+                <a:srgbClr val="D86161"/>
               </a:solidFill>
-            </a:ln>
-          </c:spPr>
+              <a:ln>
+                <a:solidFill>
+                  <a:srgbClr val="D86161"/>
+                </a:solidFill>
+              </a:ln>
+            </c:spPr>
+          </c:dPt>
+          <c:dPt>
+            <c:idx val="1"/>
+            <c:spPr>
+              <a:solidFill>
+                <a:srgbClr val="D86161"/>
+              </a:solidFill>
+              <a:ln>
+                <a:solidFill>
+                  <a:srgbClr val="D86161"/>
+                </a:solidFill>
+              </a:ln>
+            </c:spPr>
+          </c:dPt>
           <c:cat>
             <c:strRef>
               <c:f>Sheet1!$A$2:$A$3</c:f>
               <c:strCache>
                 <c:ptCount val="2"/>
                 <c:pt idx="0">
-                  <c:v>Psychosis</c:v>
+                  <c:v>2011 baseline</c:v>
                 </c:pt>
                 <c:pt idx="1">
-                  <c:v>Depression</c:v>
+                  <c:v>2019 level</c:v>
                 </c:pt>
               </c:strCache>
             </c:strRef>
@@ -926,70 +938,15 @@
                 <c:formatCode>General</c:formatCode>
                 <c:ptCount val="2"/>
                 <c:pt idx="0">
-                  <c:v>29</c:v>
+                  <c:v>100</c:v>
                 </c:pt>
                 <c:pt idx="1">
-                  <c:v>33</c:v>
+                  <c:v>344</c:v>
                 </c:pt>
               </c:numCache>
             </c:numRef>
           </c:val>
         </c:ser>
-        <c:ser>
-          <c:idx val="1"/>
-          <c:order val="1"/>
-          <c:tx>
-            <c:strRef>
-              <c:f>Sheet1!$C$1</c:f>
-              <c:strCache>
-                <c:ptCount val="1"/>
-                <c:pt idx="0">
-                  <c:v>No formal care</c:v>
-                </c:pt>
-              </c:strCache>
-            </c:strRef>
-          </c:tx>
-          <c:spPr>
-            <a:solidFill>
-              <a:srgbClr val="D76060"/>
-            </a:solidFill>
-            <a:ln>
-              <a:solidFill>
-                <a:srgbClr val="D76060"/>
-              </a:solidFill>
-            </a:ln>
-          </c:spPr>
-          <c:cat>
-            <c:strRef>
-              <c:f>Sheet1!$A$2:$A$3</c:f>
-              <c:strCache>
-                <c:ptCount val="2"/>
-                <c:pt idx="0">
-                  <c:v>Psychosis</c:v>
-                </c:pt>
-                <c:pt idx="1">
-                  <c:v>Depression</c:v>
-                </c:pt>
-              </c:strCache>
-            </c:strRef>
-          </c:cat>
-          <c:val>
-            <c:numRef>
-              <c:f>Sheet1!$C$2:$C$3</c:f>
-              <c:numCache>
-                <c:formatCode>General</c:formatCode>
-                <c:ptCount val="2"/>
-                <c:pt idx="0">
-                  <c:v>71</c:v>
-                </c:pt>
-                <c:pt idx="1">
-                  <c:v>67</c:v>
-                </c:pt>
-              </c:numCache>
-            </c:numRef>
-          </c:val>
-        </c:ser>
-        <c:overlap val="100"/>
         <c:axId val="-2068027336"/>
         <c:axId val="-2113994440"/>
       </c:barChart>
@@ -1008,9 +965,9 @@
           <a:lstStyle/>
           <a:p>
             <a:pPr>
-              <a:defRPr sz="1100">
-                <a:solidFill>
-                  <a:srgbClr val="A6B0BF"/>
+              <a:defRPr sz="1000">
+                <a:solidFill>
+                  <a:srgbClr val="A7B2C2"/>
                 </a:solidFill>
                 <a:latin typeface="Calibri"/>
               </a:defRPr>
@@ -1027,7 +984,7 @@
       <c:valAx>
         <c:axId val="-2113994440"/>
         <c:scaling>
-          <c:max val="100.0"/>
+          <c:max val="360.0"/>
         </c:scaling>
         <c:delete val="0"/>
         <c:axPos val="l"/>
@@ -1035,7 +992,7 @@
           <c:spPr>
             <a:ln>
               <a:solidFill>
-                <a:srgbClr val="363F4F"/>
+                <a:srgbClr val="3B4557"/>
               </a:solidFill>
             </a:ln>
           </c:spPr>
@@ -1048,9 +1005,9 @@
           <a:lstStyle/>
           <a:p>
             <a:pPr>
-              <a:defRPr sz="1100">
-                <a:solidFill>
-                  <a:srgbClr val="A6B0BF"/>
+              <a:defRPr sz="1000">
+                <a:solidFill>
+                  <a:srgbClr val="A7B2C2"/>
                 </a:solidFill>
                 <a:latin typeface="Calibri"/>
               </a:defRPr>
@@ -1061,24 +1018,6 @@
         <c:crosses val="autoZero"/>
       </c:valAx>
     </c:plotArea>
-    <c:legend>
-      <c:legendPos val="b"/>
-      <c:overlay val="0"/>
-      <c:txPr>
-        <a:bodyPr/>
-        <a:lstStyle/>
-        <a:p>
-          <a:pPr>
-            <a:defRPr sz="1100">
-              <a:solidFill>
-                <a:srgbClr val="A6B0BF"/>
-              </a:solidFill>
-              <a:latin typeface="Calibri"/>
-            </a:defRPr>
-          </a:pPr>
-        </a:p>
-      </c:txPr>
-    </c:legend>
     <c:dispBlanksAs val="gap"/>
   </c:chart>
   <c:txPr>
@@ -1115,7 +1054,7 @@
               <c:strCache>
                 <c:ptCount val="1"/>
                 <c:pt idx="0">
-                  <c:v>SMD (Hedges g)</c:v>
+                  <c:v>Daily pressure prevalence (%)</c:v>
                 </c:pt>
               </c:strCache>
             </c:strRef>
@@ -1124,11 +1063,11 @@
             <c:idx val="0"/>
             <c:spPr>
               <a:solidFill>
-                <a:srgbClr val="5E99F4"/>
+                <a:srgbClr val="EBAB4A"/>
               </a:solidFill>
               <a:ln>
                 <a:solidFill>
-                  <a:srgbClr val="5E99F4"/>
+                  <a:srgbClr val="EBAB4A"/>
                 </a:solidFill>
               </a:ln>
             </c:spPr>
@@ -1137,59 +1076,40 @@
             <c:idx val="1"/>
             <c:spPr>
               <a:solidFill>
-                <a:srgbClr val="63BF93"/>
+                <a:srgbClr val="EBAB4A"/>
               </a:solidFill>
               <a:ln>
                 <a:solidFill>
-                  <a:srgbClr val="63BF93"/>
-                </a:solidFill>
-              </a:ln>
-            </c:spPr>
-          </c:dPt>
-          <c:dPt>
-            <c:idx val="2"/>
-            <c:spPr>
-              <a:solidFill>
-                <a:srgbClr val="9F7AEA"/>
-              </a:solidFill>
-              <a:ln>
-                <a:solidFill>
-                  <a:srgbClr val="9F7AEA"/>
+                  <a:srgbClr val="EBAB4A"/>
                 </a:solidFill>
               </a:ln>
             </c:spPr>
           </c:dPt>
           <c:cat>
             <c:strRef>
-              <c:f>Sheet1!$A$2:$A$4</c:f>
+              <c:f>Sheet1!$A$2:$A$3</c:f>
               <c:strCache>
-                <c:ptCount val="3"/>
+                <c:ptCount val="2"/>
                 <c:pt idx="0">
-                  <c:v>Overall mental health</c:v>
+                  <c:v>Stress</c:v>
                 </c:pt>
                 <c:pt idx="1">
-                  <c:v>Anxiety symptoms</c:v>
-                </c:pt>
-                <c:pt idx="2">
-                  <c:v>Depressive symptoms</c:v>
+                  <c:v>Worry</c:v>
                 </c:pt>
               </c:strCache>
             </c:strRef>
           </c:cat>
           <c:val>
             <c:numRef>
-              <c:f>Sheet1!$B$2:$B$4</c:f>
+              <c:f>Sheet1!$B$2:$B$3</c:f>
               <c:numCache>
                 <c:formatCode>General</c:formatCode>
-                <c:ptCount val="3"/>
+                <c:ptCount val="2"/>
                 <c:pt idx="0">
-                  <c:v>0.34</c:v>
+                  <c:v>37</c:v>
                 </c:pt>
                 <c:pt idx="1">
-                  <c:v>0.33</c:v>
-                </c:pt>
-                <c:pt idx="2">
-                  <c:v>0.51</c:v>
+                  <c:v>39</c:v>
                 </c:pt>
               </c:numCache>
             </c:numRef>
@@ -1213,9 +1133,9 @@
           <a:lstStyle/>
           <a:p>
             <a:pPr>
-              <a:defRPr sz="1100">
-                <a:solidFill>
-                  <a:srgbClr val="A6B0BF"/>
+              <a:defRPr sz="1000">
+                <a:solidFill>
+                  <a:srgbClr val="A7B2C2"/>
                 </a:solidFill>
                 <a:latin typeface="Calibri"/>
               </a:defRPr>
@@ -1232,8 +1152,7 @@
       <c:valAx>
         <c:axId val="-2113994440"/>
         <c:scaling>
-          <c:max val="0.6"/>
-          <c:min val="0.0"/>
+          <c:max val="45.0"/>
         </c:scaling>
         <c:delete val="0"/>
         <c:axPos val="l"/>
@@ -1241,7 +1160,7 @@
           <c:spPr>
             <a:ln>
               <a:solidFill>
-                <a:srgbClr val="363F4F"/>
+                <a:srgbClr val="3B4557"/>
               </a:solidFill>
             </a:ln>
           </c:spPr>
@@ -1254,9 +1173,459 @@
           <a:lstStyle/>
           <a:p>
             <a:pPr>
-              <a:defRPr sz="1100">
-                <a:solidFill>
-                  <a:srgbClr val="A6B0BF"/>
+              <a:defRPr sz="1000">
+                <a:solidFill>
+                  <a:srgbClr val="A7B2C2"/>
+                </a:solidFill>
+                <a:latin typeface="Calibri"/>
+              </a:defRPr>
+            </a:pPr>
+          </a:p>
+        </c:txPr>
+        <c:crossAx val="-2068027336"/>
+        <c:crosses val="autoZero"/>
+      </c:valAx>
+    </c:plotArea>
+    <c:dispBlanksAs val="gap"/>
+  </c:chart>
+  <c:txPr>
+    <a:bodyPr/>
+    <a:lstStyle/>
+    <a:p>
+      <a:pPr>
+        <a:defRPr sz="1800"/>
+      </a:pPr>
+      <a:endParaRPr lang="en-US"/>
+    </a:p>
+  </c:txPr>
+  <c:externalData r:id="rId1">
+    <c:autoUpdate val="0"/>
+  </c:externalData>
+</c:chartSpace>
+</file>
+
+<file path=ppt/charts/chart7.xml><?xml version="1.0" encoding="utf-8"?>
+<c:chartSpace xmlns:c="http://schemas.openxmlformats.org/drawingml/2006/chart" xmlns:a="http://schemas.openxmlformats.org/drawingml/2006/main" xmlns:r="http://schemas.openxmlformats.org/officeDocument/2006/relationships">
+  <c:date1904 val="0"/>
+  <c:chart>
+    <c:autoTitleDeleted val="0"/>
+    <c:plotArea>
+      <c:barChart>
+        <c:barDir val="col"/>
+        <c:grouping val="clustered"/>
+        <c:ser>
+          <c:idx val="0"/>
+          <c:order val="0"/>
+          <c:tx>
+            <c:strRef>
+              <c:f>Sheet1!$B$1</c:f>
+              <c:strCache>
+                <c:ptCount val="1"/>
+                <c:pt idx="0">
+                  <c:v>System signal coverage index</c:v>
+                </c:pt>
+              </c:strCache>
+            </c:strRef>
+          </c:tx>
+          <c:dPt>
+            <c:idx val="0"/>
+            <c:spPr>
+              <a:solidFill>
+                <a:srgbClr val="629FF6"/>
+              </a:solidFill>
+              <a:ln>
+                <a:solidFill>
+                  <a:srgbClr val="629FF6"/>
+                </a:solidFill>
+              </a:ln>
+            </c:spPr>
+          </c:dPt>
+          <c:dPt>
+            <c:idx val="1"/>
+            <c:spPr>
+              <a:solidFill>
+                <a:srgbClr val="65BF95"/>
+              </a:solidFill>
+              <a:ln>
+                <a:solidFill>
+                  <a:srgbClr val="65BF95"/>
+                </a:solidFill>
+              </a:ln>
+            </c:spPr>
+          </c:dPt>
+          <c:dPt>
+            <c:idx val="2"/>
+            <c:spPr>
+              <a:solidFill>
+                <a:srgbClr val="A47DEB"/>
+              </a:solidFill>
+              <a:ln>
+                <a:solidFill>
+                  <a:srgbClr val="A47DEB"/>
+                </a:solidFill>
+              </a:ln>
+            </c:spPr>
+          </c:dPt>
+          <c:dPt>
+            <c:idx val="3"/>
+            <c:spPr>
+              <a:solidFill>
+                <a:srgbClr val="EBAB4A"/>
+              </a:solidFill>
+              <a:ln>
+                <a:solidFill>
+                  <a:srgbClr val="EBAB4A"/>
+                </a:solidFill>
+              </a:ln>
+            </c:spPr>
+          </c:dPt>
+          <c:dPt>
+            <c:idx val="4"/>
+            <c:spPr>
+              <a:solidFill>
+                <a:srgbClr val="D86161"/>
+              </a:solidFill>
+              <a:ln>
+                <a:solidFill>
+                  <a:srgbClr val="D86161"/>
+                </a:solidFill>
+              </a:ln>
+            </c:spPr>
+          </c:dPt>
+          <c:cat>
+            <c:strRef>
+              <c:f>Sheet1!$A$2:$A$6</c:f>
+              <c:strCache>
+                <c:ptCount val="5"/>
+                <c:pt idx="0">
+                  <c:v>Pre/post delta</c:v>
+                </c:pt>
+                <c:pt idx="1">
+                  <c:v>Loop completion 14d</c:v>
+                </c:pt>
+                <c:pt idx="2">
+                  <c:v>Nudge recovery 14d</c:v>
+                </c:pt>
+                <c:pt idx="3">
+                  <c:v>Reliability score</c:v>
+                </c:pt>
+                <c:pt idx="4">
+                  <c:v>Tool efficacy</c:v>
+                </c:pt>
+              </c:strCache>
+            </c:strRef>
+          </c:cat>
+          <c:val>
+            <c:numRef>
+              <c:f>Sheet1!$B$2:$B$6</c:f>
+              <c:numCache>
+                <c:formatCode>General</c:formatCode>
+                <c:ptCount val="5"/>
+                <c:pt idx="0">
+                  <c:v>100</c:v>
+                </c:pt>
+                <c:pt idx="1">
+                  <c:v>100</c:v>
+                </c:pt>
+                <c:pt idx="2">
+                  <c:v>100</c:v>
+                </c:pt>
+                <c:pt idx="3">
+                  <c:v>100</c:v>
+                </c:pt>
+                <c:pt idx="4">
+                  <c:v>100</c:v>
+                </c:pt>
+              </c:numCache>
+            </c:numRef>
+          </c:val>
+        </c:ser>
+        <c:axId val="-2068027336"/>
+        <c:axId val="-2113994440"/>
+      </c:barChart>
+      <c:catAx>
+        <c:axId val="-2068027336"/>
+        <c:scaling>
+          <c:orientation val="minMax"/>
+        </c:scaling>
+        <c:delete val="0"/>
+        <c:axPos val="b"/>
+        <c:majorTickMark val="out"/>
+        <c:minorTickMark val="none"/>
+        <c:tickLblPos val="nextTo"/>
+        <c:txPr>
+          <a:bodyPr/>
+          <a:lstStyle/>
+          <a:p>
+            <a:pPr>
+              <a:defRPr sz="1000">
+                <a:solidFill>
+                  <a:srgbClr val="A7B2C2"/>
+                </a:solidFill>
+                <a:latin typeface="Calibri"/>
+              </a:defRPr>
+            </a:pPr>
+          </a:p>
+        </c:txPr>
+        <c:crossAx val="-2113994440"/>
+        <c:crosses val="autoZero"/>
+        <c:auto val="1"/>
+        <c:lblAlgn val="ctr"/>
+        <c:lblOffset val="100"/>
+        <c:noMultiLvlLbl val="0"/>
+      </c:catAx>
+      <c:valAx>
+        <c:axId val="-2113994440"/>
+        <c:scaling>
+          <c:max val="110.0"/>
+        </c:scaling>
+        <c:delete val="0"/>
+        <c:axPos val="l"/>
+        <c:majorGridlines>
+          <c:spPr>
+            <a:ln>
+              <a:solidFill>
+                <a:srgbClr val="3B4557"/>
+              </a:solidFill>
+            </a:ln>
+          </c:spPr>
+        </c:majorGridlines>
+        <c:majorTickMark val="out"/>
+        <c:minorTickMark val="none"/>
+        <c:tickLblPos val="nextTo"/>
+        <c:txPr>
+          <a:bodyPr/>
+          <a:lstStyle/>
+          <a:p>
+            <a:pPr>
+              <a:defRPr sz="1000">
+                <a:solidFill>
+                  <a:srgbClr val="A7B2C2"/>
+                </a:solidFill>
+                <a:latin typeface="Calibri"/>
+              </a:defRPr>
+            </a:pPr>
+          </a:p>
+        </c:txPr>
+        <c:crossAx val="-2068027336"/>
+        <c:crosses val="autoZero"/>
+      </c:valAx>
+    </c:plotArea>
+    <c:dispBlanksAs val="gap"/>
+  </c:chart>
+  <c:txPr>
+    <a:bodyPr/>
+    <a:lstStyle/>
+    <a:p>
+      <a:pPr>
+        <a:defRPr sz="1800"/>
+      </a:pPr>
+      <a:endParaRPr lang="en-US"/>
+    </a:p>
+  </c:txPr>
+  <c:externalData r:id="rId1">
+    <c:autoUpdate val="0"/>
+  </c:externalData>
+</c:chartSpace>
+</file>
+
+<file path=ppt/charts/chart8.xml><?xml version="1.0" encoding="utf-8"?>
+<c:chartSpace xmlns:c="http://schemas.openxmlformats.org/drawingml/2006/chart" xmlns:a="http://schemas.openxmlformats.org/drawingml/2006/main" xmlns:r="http://schemas.openxmlformats.org/officeDocument/2006/relationships">
+  <c:date1904 val="0"/>
+  <c:chart>
+    <c:autoTitleDeleted val="0"/>
+    <c:plotArea>
+      <c:barChart>
+        <c:barDir val="col"/>
+        <c:grouping val="clustered"/>
+        <c:ser>
+          <c:idx val="0"/>
+          <c:order val="0"/>
+          <c:tx>
+            <c:strRef>
+              <c:f>Sheet1!$B$1</c:f>
+              <c:strCache>
+                <c:ptCount val="1"/>
+                <c:pt idx="0">
+                  <c:v>Weight (%)</c:v>
+                </c:pt>
+              </c:strCache>
+            </c:strRef>
+          </c:tx>
+          <c:dPt>
+            <c:idx val="0"/>
+            <c:spPr>
+              <a:solidFill>
+                <a:srgbClr val="EBAB4A"/>
+              </a:solidFill>
+              <a:ln>
+                <a:solidFill>
+                  <a:srgbClr val="EBAB4A"/>
+                </a:solidFill>
+              </a:ln>
+            </c:spPr>
+          </c:dPt>
+          <c:dPt>
+            <c:idx val="1"/>
+            <c:spPr>
+              <a:solidFill>
+                <a:srgbClr val="629FF6"/>
+              </a:solidFill>
+              <a:ln>
+                <a:solidFill>
+                  <a:srgbClr val="629FF6"/>
+                </a:solidFill>
+              </a:ln>
+            </c:spPr>
+          </c:dPt>
+          <c:dPt>
+            <c:idx val="2"/>
+            <c:spPr>
+              <a:solidFill>
+                <a:srgbClr val="65BF95"/>
+              </a:solidFill>
+              <a:ln>
+                <a:solidFill>
+                  <a:srgbClr val="65BF95"/>
+                </a:solidFill>
+              </a:ln>
+            </c:spPr>
+          </c:dPt>
+          <c:dPt>
+            <c:idx val="3"/>
+            <c:spPr>
+              <a:solidFill>
+                <a:srgbClr val="A47DEB"/>
+              </a:solidFill>
+              <a:ln>
+                <a:solidFill>
+                  <a:srgbClr val="A47DEB"/>
+                </a:solidFill>
+              </a:ln>
+            </c:spPr>
+          </c:dPt>
+          <c:dPt>
+            <c:idx val="4"/>
+            <c:spPr>
+              <a:solidFill>
+                <a:srgbClr val="D86161"/>
+              </a:solidFill>
+              <a:ln>
+                <a:solidFill>
+                  <a:srgbClr val="D86161"/>
+                </a:solidFill>
+              </a:ln>
+            </c:spPr>
+          </c:dPt>
+          <c:cat>
+            <c:strRef>
+              <c:f>Sheet1!$A$2:$A$6</c:f>
+              <c:strCache>
+                <c:ptCount val="5"/>
+                <c:pt idx="0">
+                  <c:v>Behavior changed in real moment</c:v>
+                </c:pt>
+                <c:pt idx="1">
+                  <c:v>Friction pinpoint (exact step)</c:v>
+                </c:pt>
+                <c:pt idx="2">
+                  <c:v>Reliability defect report</c:v>
+                </c:pt>
+                <c:pt idx="3">
+                  <c:v>Decision quality transfer</c:v>
+                </c:pt>
+                <c:pt idx="4">
+                  <c:v>Daily use blocker ranking</c:v>
+                </c:pt>
+              </c:strCache>
+            </c:strRef>
+          </c:cat>
+          <c:val>
+            <c:numRef>
+              <c:f>Sheet1!$B$2:$B$6</c:f>
+              <c:numCache>
+                <c:formatCode>General</c:formatCode>
+                <c:ptCount val="5"/>
+                <c:pt idx="0">
+                  <c:v>30</c:v>
+                </c:pt>
+                <c:pt idx="1">
+                  <c:v>20</c:v>
+                </c:pt>
+                <c:pt idx="2">
+                  <c:v>20</c:v>
+                </c:pt>
+                <c:pt idx="3">
+                  <c:v>15</c:v>
+                </c:pt>
+                <c:pt idx="4">
+                  <c:v>15</c:v>
+                </c:pt>
+              </c:numCache>
+            </c:numRef>
+          </c:val>
+        </c:ser>
+        <c:axId val="-2068027336"/>
+        <c:axId val="-2113994440"/>
+      </c:barChart>
+      <c:catAx>
+        <c:axId val="-2068027336"/>
+        <c:scaling>
+          <c:orientation val="minMax"/>
+        </c:scaling>
+        <c:delete val="0"/>
+        <c:axPos val="b"/>
+        <c:majorTickMark val="out"/>
+        <c:minorTickMark val="none"/>
+        <c:tickLblPos val="nextTo"/>
+        <c:txPr>
+          <a:bodyPr/>
+          <a:lstStyle/>
+          <a:p>
+            <a:pPr>
+              <a:defRPr sz="1000">
+                <a:solidFill>
+                  <a:srgbClr val="A7B2C2"/>
+                </a:solidFill>
+                <a:latin typeface="Calibri"/>
+              </a:defRPr>
+            </a:pPr>
+          </a:p>
+        </c:txPr>
+        <c:crossAx val="-2113994440"/>
+        <c:crosses val="autoZero"/>
+        <c:auto val="1"/>
+        <c:lblAlgn val="ctr"/>
+        <c:lblOffset val="100"/>
+        <c:noMultiLvlLbl val="0"/>
+      </c:catAx>
+      <c:valAx>
+        <c:axId val="-2113994440"/>
+        <c:scaling>
+          <c:max val="35.0"/>
+        </c:scaling>
+        <c:delete val="0"/>
+        <c:axPos val="l"/>
+        <c:majorGridlines>
+          <c:spPr>
+            <a:ln>
+              <a:solidFill>
+                <a:srgbClr val="3B4557"/>
+              </a:solidFill>
+            </a:ln>
+          </c:spPr>
+        </c:majorGridlines>
+        <c:majorTickMark val="out"/>
+        <c:minorTickMark val="none"/>
+        <c:tickLblPos val="nextTo"/>
+        <c:txPr>
+          <a:bodyPr/>
+          <a:lstStyle/>
+          <a:p>
+            <a:pPr>
+              <a:defRPr sz="1000">
+                <a:solidFill>
+                  <a:srgbClr val="A7B2C2"/>
                 </a:solidFill>
                 <a:latin typeface="Calibri"/>
               </a:defRPr>
@@ -4289,7 +4658,7 @@
             <a:avLst/>
           </a:prstGeom>
           <a:solidFill>
-            <a:srgbClr val="121822"/>
+            <a:srgbClr val="131924"/>
           </a:solidFill>
           <a:ln>
             <a:noFill/>
@@ -4325,8 +4694,8 @@
         </p:nvSpPr>
         <p:spPr>
           <a:xfrm>
-            <a:off x="502920" y="109728"/>
-            <a:ext cx="7315200" cy="182880"/>
+            <a:off x="512064" y="109728"/>
+            <a:ext cx="7772400" cy="182880"/>
           </a:xfrm>
           <a:prstGeom prst="rect">
             <a:avLst/>
@@ -4346,7 +4715,7 @@
                 </a:solidFill>
                 <a:latin typeface="Consolas"/>
               </a:rPr>
-              <a:t>STILLFORM · EXECUTIVE BRIEF</a:t>
+              <a:t>STILLFORM · APPLIED SCIENCE DECK</a:t>
             </a:r>
           </a:p>
         </p:txBody>
@@ -4377,11 +4746,11 @@
             <a:r>
               <a:rPr sz="900">
                 <a:solidFill>
-                  <a:srgbClr val="A6B0BF"/>
+                  <a:srgbClr val="A7B2C2"/>
                 </a:solidFill>
                 <a:latin typeface="Consolas"/>
               </a:rPr>
-              <a:t>01 / 08</a:t>
+              <a:t>01 / 10</a:t>
             </a:r>
           </a:p>
         </p:txBody>
@@ -4395,7 +4764,7 @@
         <p:spPr>
           <a:xfrm>
             <a:off x="640080" y="658368"/>
-            <a:ext cx="10972800" cy="1051560"/>
+            <a:ext cx="10972800" cy="1097280"/>
           </a:xfrm>
           <a:prstGeom prst="rect">
             <a:avLst/>
@@ -4409,13 +4778,13 @@
           <a:lstStyle/>
           <a:p>
             <a:r>
-              <a:rPr sz="4200" b="1">
+              <a:rPr sz="4000" b="1">
                 <a:solidFill>
                   <a:srgbClr val="ECF0F5"/>
                 </a:solidFill>
                 <a:latin typeface="Calibri"/>
               </a:rPr>
-              <a:t>Stillform Executive Deck</a:t>
+              <a:t>Stillform: Applied Science</a:t>
             </a:r>
           </a:p>
         </p:txBody>
@@ -4429,7 +4798,7 @@
         <p:spPr>
           <a:xfrm>
             <a:off x="676656" y="1481328"/>
-            <a:ext cx="10881360" cy="411480"/>
+            <a:ext cx="10927080" cy="411480"/>
           </a:xfrm>
           <a:prstGeom prst="rect">
             <a:avLst/>
@@ -4445,11 +4814,11 @@
             <a:r>
               <a:rPr sz="1600">
                 <a:solidFill>
-                  <a:srgbClr val="A6B0BF"/>
+                  <a:srgbClr val="A7B2C2"/>
                 </a:solidFill>
                 <a:latin typeface="Calibri"/>
               </a:rPr>
-              <a:t>Graph-first strategic view with externally sourced benchmarks</a:t>
+              <a:t>Metacognition, EQ, composure, impulsivity control, microbias conflict</a:t>
             </a:r>
           </a:p>
         </p:txBody>
@@ -4462,18 +4831,18 @@
         </p:nvSpPr>
         <p:spPr>
           <a:xfrm>
-            <a:off x="749808" y="2084831"/>
-            <a:ext cx="10972800" cy="3611880"/>
+            <a:off x="777240" y="2057400"/>
+            <a:ext cx="10881360" cy="3657600"/>
           </a:xfrm>
           <a:prstGeom prst="roundRect">
             <a:avLst/>
           </a:prstGeom>
           <a:solidFill>
-            <a:srgbClr val="121822"/>
+            <a:srgbClr val="131924"/>
           </a:solidFill>
-          <a:ln w="15240">
+          <a:ln w="13970">
             <a:solidFill>
-              <a:srgbClr val="363F4F"/>
+              <a:srgbClr val="3B4557"/>
             </a:solidFill>
           </a:ln>
         </p:spPr>
@@ -4507,8 +4876,8 @@
         </p:nvSpPr>
         <p:spPr>
           <a:xfrm>
-            <a:off x="1051560" y="2560320"/>
-            <a:ext cx="10241280" cy="2651760"/>
+            <a:off x="1097280" y="2514600"/>
+            <a:ext cx="10241280" cy="2926080"/>
           </a:xfrm>
           <a:prstGeom prst="rect">
             <a:avLst/>
@@ -4516,7 +4885,7 @@
           <a:noFill/>
         </p:spPr>
         <p:txBody>
-          <a:bodyPr wrap="square">
+          <a:bodyPr wrap="none">
             <a:spAutoFit/>
           </a:bodyPr>
           <a:lstStyle/>
@@ -4533,7 +4902,7 @@
               </a:defRPr>
             </a:pPr>
             <a:r>
-              <a:t>Composure as preventive risk management, not passive wellness content.</a:t>
+              <a:t>This deck is product-mechanism-first, not generic wellness benchmarking.</a:t>
             </a:r>
           </a:p>
           <a:p>
@@ -4549,7 +4918,7 @@
               </a:defRPr>
             </a:pPr>
             <a:r>
-              <a:t>Audience is everyone: high-stakes leaders, parents, students, and teams.</a:t>
+              <a:t>Each domain includes: global issue context -&gt; Stillform mechanism -&gt; measurable telemetry signal.</a:t>
             </a:r>
           </a:p>
           <a:p>
@@ -4565,7 +4934,7 @@
               </a:defRPr>
             </a:pPr>
             <a:r>
-              <a:t>Every quantitative claim on this deck is source-tagged.</a:t>
+              <a:t>No psychiatric treatment claims. Stillform is a composure training and decision-quality system.</a:t>
             </a:r>
           </a:p>
         </p:txBody>
@@ -4595,11 +4964,367 @@
             <a:r>
               <a:rPr sz="900">
                 <a:solidFill>
-                  <a:srgbClr val="A6B0BF"/>
+                  <a:srgbClr val="A7B2C2"/>
                 </a:solidFill>
                 <a:latin typeface="Consolas"/>
               </a:rPr>
-              <a:t>Source: Deck compiled from Gallup, WHO, OneSignal, Frontiers (2023-2025)</a:t>
+              <a:t>Source: Stillform science sheet + app instrumentation model</a:t>
+            </a:r>
+          </a:p>
+        </p:txBody>
+      </p:sp>
+    </p:spTree>
+  </p:cSld>
+  <p:clrMapOvr>
+    <a:masterClrMapping/>
+  </p:clrMapOvr>
+</p:sld>
+</file>
+
+<file path=ppt/slides/slide10.xml><?xml version="1.0" encoding="utf-8"?>
+<p:sld xmlns:a="http://schemas.openxmlformats.org/drawingml/2006/main" xmlns:p="http://schemas.openxmlformats.org/presentationml/2006/main" xmlns:r="http://schemas.openxmlformats.org/officeDocument/2006/relationships">
+  <p:cSld>
+    <p:bg>
+      <p:bgPr>
+        <a:solidFill>
+          <a:srgbClr val="0A0D13"/>
+        </a:solidFill>
+        <a:effectLst/>
+      </p:bgPr>
+    </p:bg>
+    <p:spTree>
+      <p:nvGrpSpPr>
+        <p:cNvPr id="1" name=""/>
+        <p:cNvGrpSpPr/>
+        <p:nvPr/>
+      </p:nvGrpSpPr>
+      <p:grpSpPr/>
+      <p:sp>
+        <p:nvSpPr>
+          <p:cNvPr id="2" name="Rectangle 1"/>
+          <p:cNvSpPr/>
+          <p:nvPr/>
+        </p:nvSpPr>
+        <p:spPr>
+          <a:xfrm>
+            <a:off x="0" y="0"/>
+            <a:ext cx="12191695" cy="347472"/>
+          </a:xfrm>
+          <a:prstGeom prst="rect">
+            <a:avLst/>
+          </a:prstGeom>
+          <a:solidFill>
+            <a:srgbClr val="131924"/>
+          </a:solidFill>
+          <a:ln>
+            <a:noFill/>
+          </a:ln>
+        </p:spPr>
+        <p:style>
+          <a:lnRef idx="1">
+            <a:schemeClr val="accent1"/>
+          </a:lnRef>
+          <a:fillRef idx="3">
+            <a:schemeClr val="accent1"/>
+          </a:fillRef>
+          <a:effectRef idx="2">
+            <a:schemeClr val="accent1"/>
+          </a:effectRef>
+          <a:fontRef idx="minor">
+            <a:schemeClr val="lt1"/>
+          </a:fontRef>
+        </p:style>
+        <p:txBody>
+          <a:bodyPr rtlCol="0" anchor="ctr"/>
+          <a:lstStyle/>
+          <a:p>
+            <a:pPr algn="ctr"/>
+          </a:p>
+        </p:txBody>
+      </p:sp>
+      <p:sp>
+        <p:nvSpPr>
+          <p:cNvPr id="3" name="TextBox 2"/>
+          <p:cNvSpPr txBox="1"/>
+          <p:nvPr/>
+        </p:nvSpPr>
+        <p:spPr>
+          <a:xfrm>
+            <a:off x="512064" y="109728"/>
+            <a:ext cx="7772400" cy="182880"/>
+          </a:xfrm>
+          <a:prstGeom prst="rect">
+            <a:avLst/>
+          </a:prstGeom>
+          <a:noFill/>
+        </p:spPr>
+        <p:txBody>
+          <a:bodyPr wrap="none">
+            <a:spAutoFit/>
+          </a:bodyPr>
+          <a:lstStyle/>
+          <a:p>
+            <a:r>
+              <a:rPr sz="900">
+                <a:solidFill>
+                  <a:srgbClr val="EBAB4A"/>
+                </a:solidFill>
+                <a:latin typeface="Consolas"/>
+              </a:rPr>
+              <a:t>STILLFORM · APPLIED SCIENCE DECK</a:t>
+            </a:r>
+          </a:p>
+        </p:txBody>
+      </p:sp>
+      <p:sp>
+        <p:nvSpPr>
+          <p:cNvPr id="4" name="TextBox 3"/>
+          <p:cNvSpPr txBox="1"/>
+          <p:nvPr/>
+        </p:nvSpPr>
+        <p:spPr>
+          <a:xfrm>
+            <a:off x="10241280" y="109728"/>
+            <a:ext cx="1463040" cy="182880"/>
+          </a:xfrm>
+          <a:prstGeom prst="rect">
+            <a:avLst/>
+          </a:prstGeom>
+          <a:noFill/>
+        </p:spPr>
+        <p:txBody>
+          <a:bodyPr wrap="none">
+            <a:spAutoFit/>
+          </a:bodyPr>
+          <a:lstStyle/>
+          <a:p>
+            <a:pPr algn="r"/>
+            <a:r>
+              <a:rPr sz="900">
+                <a:solidFill>
+                  <a:srgbClr val="A7B2C2"/>
+                </a:solidFill>
+                <a:latin typeface="Consolas"/>
+              </a:rPr>
+              <a:t>10 / 10</a:t>
+            </a:r>
+          </a:p>
+        </p:txBody>
+      </p:sp>
+      <p:sp>
+        <p:nvSpPr>
+          <p:cNvPr id="5" name="TextBox 4"/>
+          <p:cNvSpPr txBox="1"/>
+          <p:nvPr/>
+        </p:nvSpPr>
+        <p:spPr>
+          <a:xfrm>
+            <a:off x="640080" y="658368"/>
+            <a:ext cx="10972800" cy="1097280"/>
+          </a:xfrm>
+          <a:prstGeom prst="rect">
+            <a:avLst/>
+          </a:prstGeom>
+          <a:noFill/>
+        </p:spPr>
+        <p:txBody>
+          <a:bodyPr wrap="none">
+            <a:spAutoFit/>
+          </a:bodyPr>
+          <a:lstStyle/>
+          <a:p>
+            <a:r>
+              <a:rPr sz="4000" b="1">
+                <a:solidFill>
+                  <a:srgbClr val="ECF0F5"/>
+                </a:solidFill>
+                <a:latin typeface="Calibri"/>
+              </a:rPr>
+              <a:t>Closing Thesis</a:t>
+            </a:r>
+          </a:p>
+        </p:txBody>
+      </p:sp>
+      <p:sp>
+        <p:nvSpPr>
+          <p:cNvPr id="6" name="TextBox 5"/>
+          <p:cNvSpPr txBox="1"/>
+          <p:nvPr/>
+        </p:nvSpPr>
+        <p:spPr>
+          <a:xfrm>
+            <a:off x="676656" y="1481328"/>
+            <a:ext cx="10927080" cy="411480"/>
+          </a:xfrm>
+          <a:prstGeom prst="rect">
+            <a:avLst/>
+          </a:prstGeom>
+          <a:noFill/>
+        </p:spPr>
+        <p:txBody>
+          <a:bodyPr wrap="none">
+            <a:spAutoFit/>
+          </a:bodyPr>
+          <a:lstStyle/>
+          <a:p>
+            <a:r>
+              <a:rPr sz="1600">
+                <a:solidFill>
+                  <a:srgbClr val="A7B2C2"/>
+                </a:solidFill>
+                <a:latin typeface="Calibri"/>
+              </a:rPr>
+              <a:t>Applied science -&gt; composure skill -&gt; better decisions</a:t>
+            </a:r>
+          </a:p>
+        </p:txBody>
+      </p:sp>
+      <p:sp>
+        <p:nvSpPr>
+          <p:cNvPr id="7" name="Rounded Rectangle 6"/>
+          <p:cNvSpPr/>
+          <p:nvPr/>
+        </p:nvSpPr>
+        <p:spPr>
+          <a:xfrm>
+            <a:off x="822960" y="2011680"/>
+            <a:ext cx="10561320" cy="3840480"/>
+          </a:xfrm>
+          <a:prstGeom prst="roundRect">
+            <a:avLst/>
+          </a:prstGeom>
+          <a:solidFill>
+            <a:srgbClr val="131924"/>
+          </a:solidFill>
+          <a:ln w="13970">
+            <a:solidFill>
+              <a:srgbClr val="3B4557"/>
+            </a:solidFill>
+          </a:ln>
+        </p:spPr>
+        <p:style>
+          <a:lnRef idx="1">
+            <a:schemeClr val="accent1"/>
+          </a:lnRef>
+          <a:fillRef idx="3">
+            <a:schemeClr val="accent1"/>
+          </a:fillRef>
+          <a:effectRef idx="2">
+            <a:schemeClr val="accent1"/>
+          </a:effectRef>
+          <a:fontRef idx="minor">
+            <a:schemeClr val="lt1"/>
+          </a:fontRef>
+        </p:style>
+        <p:txBody>
+          <a:bodyPr rtlCol="0" anchor="ctr"/>
+          <a:lstStyle/>
+          <a:p>
+            <a:pPr algn="ctr"/>
+          </a:p>
+        </p:txBody>
+      </p:sp>
+      <p:sp>
+        <p:nvSpPr>
+          <p:cNvPr id="8" name="TextBox 7"/>
+          <p:cNvSpPr txBox="1"/>
+          <p:nvPr/>
+        </p:nvSpPr>
+        <p:spPr>
+          <a:xfrm>
+            <a:off x="1234440" y="2468880"/>
+            <a:ext cx="9875520" cy="3063240"/>
+          </a:xfrm>
+          <a:prstGeom prst="rect">
+            <a:avLst/>
+          </a:prstGeom>
+          <a:noFill/>
+        </p:spPr>
+        <p:txBody>
+          <a:bodyPr wrap="none">
+            <a:spAutoFit/>
+          </a:bodyPr>
+          <a:lstStyle/>
+          <a:p>
+            <a:pPr>
+              <a:spcAft>
+                <a:spcPts val="900"/>
+              </a:spcAft>
+              <a:defRPr sz="2900" b="1">
+                <a:solidFill>
+                  <a:srgbClr val="ECF0F5"/>
+                </a:solidFill>
+                <a:latin typeface="Calibri"/>
+              </a:defRPr>
+            </a:pPr>
+            <a:r>
+              <a:t>Stillform is not psychiatric treatment software.</a:t>
+            </a:r>
+          </a:p>
+          <a:p>
+            <a:pPr>
+              <a:spcAft>
+                <a:spcPts val="900"/>
+              </a:spcAft>
+              <a:defRPr sz="2400" b="1">
+                <a:solidFill>
+                  <a:srgbClr val="ECF0F5"/>
+                </a:solidFill>
+                <a:latin typeface="Calibri"/>
+              </a:defRPr>
+            </a:pPr>
+            <a:r>
+              <a:t>It is a composure and self-awareness training system.</a:t>
+            </a:r>
+          </a:p>
+          <a:p>
+            <a:pPr>
+              <a:spcAft>
+                <a:spcPts val="900"/>
+              </a:spcAft>
+              <a:defRPr sz="2400" b="1">
+                <a:solidFill>
+                  <a:srgbClr val="ECF0F5"/>
+                </a:solidFill>
+                <a:latin typeface="Calibri"/>
+              </a:defRPr>
+            </a:pPr>
+            <a:r>
+              <a:t>The science is applied through daily loops, state-aware interventions, and measurable behavior shift.</a:t>
+            </a:r>
+          </a:p>
+        </p:txBody>
+      </p:sp>
+      <p:sp>
+        <p:nvSpPr>
+          <p:cNvPr id="9" name="TextBox 8"/>
+          <p:cNvSpPr txBox="1"/>
+          <p:nvPr/>
+        </p:nvSpPr>
+        <p:spPr>
+          <a:xfrm>
+            <a:off x="685800" y="6464808"/>
+            <a:ext cx="10972800" cy="219456"/>
+          </a:xfrm>
+          <a:prstGeom prst="rect">
+            <a:avLst/>
+          </a:prstGeom>
+          <a:noFill/>
+        </p:spPr>
+        <p:txBody>
+          <a:bodyPr wrap="none">
+            <a:spAutoFit/>
+          </a:bodyPr>
+          <a:lstStyle/>
+          <a:p>
+            <a:r>
+              <a:rPr sz="900">
+                <a:solidFill>
+                  <a:srgbClr val="A7B2C2"/>
+                </a:solidFill>
+                <a:latin typeface="Consolas"/>
+              </a:rPr>
+              <a:t>Source: Stillform applied-science model (metacognition, EQ, composure, impulsivity, microbias)</a:t>
             </a:r>
           </a:p>
         </p:txBody>
@@ -4645,7 +5370,7 @@
             <a:avLst/>
           </a:prstGeom>
           <a:solidFill>
-            <a:srgbClr val="121822"/>
+            <a:srgbClr val="131924"/>
           </a:solidFill>
           <a:ln>
             <a:noFill/>
@@ -4681,8 +5406,8 @@
         </p:nvSpPr>
         <p:spPr>
           <a:xfrm>
-            <a:off x="502920" y="109728"/>
-            <a:ext cx="7315200" cy="182880"/>
+            <a:off x="512064" y="109728"/>
+            <a:ext cx="7772400" cy="182880"/>
           </a:xfrm>
           <a:prstGeom prst="rect">
             <a:avLst/>
@@ -4702,7 +5427,7 @@
                 </a:solidFill>
                 <a:latin typeface="Consolas"/>
               </a:rPr>
-              <a:t>STILLFORM · EXECUTIVE BRIEF</a:t>
+              <a:t>STILLFORM · APPLIED SCIENCE DECK</a:t>
             </a:r>
           </a:p>
         </p:txBody>
@@ -4733,11 +5458,11 @@
             <a:r>
               <a:rPr sz="900">
                 <a:solidFill>
-                  <a:srgbClr val="A6B0BF"/>
+                  <a:srgbClr val="A7B2C2"/>
                 </a:solidFill>
                 <a:latin typeface="Consolas"/>
               </a:rPr>
-              <a:t>02 / 08</a:t>
+              <a:t>02 / 10</a:t>
             </a:r>
           </a:p>
         </p:txBody>
@@ -4751,7 +5476,7 @@
         <p:spPr>
           <a:xfrm>
             <a:off x="640080" y="658368"/>
-            <a:ext cx="10972800" cy="1051560"/>
+            <a:ext cx="10972800" cy="1097280"/>
           </a:xfrm>
           <a:prstGeom prst="rect">
             <a:avLst/>
@@ -4765,13 +5490,13 @@
           <a:lstStyle/>
           <a:p>
             <a:r>
-              <a:rPr sz="4200" b="1">
+              <a:rPr sz="4000" b="1">
                 <a:solidFill>
                   <a:srgbClr val="ECF0F5"/>
                 </a:solidFill>
                 <a:latin typeface="Calibri"/>
               </a:rPr>
-              <a:t>Global Emotional Landscape</a:t>
+              <a:t>Global Composure Context</a:t>
             </a:r>
           </a:p>
         </p:txBody>
@@ -4785,7 +5510,7 @@
         <p:spPr>
           <a:xfrm>
             <a:off x="676656" y="1481328"/>
-            <a:ext cx="10881360" cy="411480"/>
+            <a:ext cx="10927080" cy="411480"/>
           </a:xfrm>
           <a:prstGeom prst="rect">
             <a:avLst/>
@@ -4801,11 +5526,11 @@
             <a:r>
               <a:rPr sz="1600">
                 <a:solidFill>
-                  <a:srgbClr val="A6B0BF"/>
+                  <a:srgbClr val="A7B2C2"/>
                 </a:solidFill>
                 <a:latin typeface="Calibri"/>
               </a:rPr>
-              <a:t>Risk signals and capacity signals both matter</a:t>
+              <a:t>Pressure is high; capacity is uneven</a:t>
             </a:r>
           </a:p>
         </p:txBody>
@@ -4818,18 +5543,18 @@
         </p:nvSpPr>
         <p:spPr>
           <a:xfrm>
-            <a:off x="685800" y="1901952"/>
+            <a:off x="685800" y="1920240"/>
             <a:ext cx="5486400" cy="4251960"/>
           </a:xfrm>
           <a:prstGeom prst="roundRect">
             <a:avLst/>
           </a:prstGeom>
           <a:solidFill>
-            <a:srgbClr val="121822"/>
+            <a:srgbClr val="131924"/>
           </a:solidFill>
-          <a:ln w="15240">
+          <a:ln w="13970">
             <a:solidFill>
-              <a:srgbClr val="363F4F"/>
+              <a:srgbClr val="3B4557"/>
             </a:solidFill>
           </a:ln>
         </p:spPr>
@@ -4865,7 +5590,7 @@
         </p:nvGraphicFramePr>
         <p:xfrm>
           <a:off x="914400" y="2331720"/>
-          <a:ext cx="5074920" cy="3520440"/>
+          <a:ext cx="5074920" cy="3611880"/>
         </p:xfrm>
         <a:graphic>
           <a:graphicData uri="http://schemas.openxmlformats.org/drawingml/2006/chart">
@@ -4881,18 +5606,18 @@
         </p:nvSpPr>
         <p:spPr>
           <a:xfrm>
-            <a:off x="6355080" y="1901952"/>
+            <a:off x="6355080" y="1920240"/>
             <a:ext cx="5349240" cy="4251960"/>
           </a:xfrm>
           <a:prstGeom prst="roundRect">
             <a:avLst/>
           </a:prstGeom>
           <a:solidFill>
-            <a:srgbClr val="121822"/>
+            <a:srgbClr val="131924"/>
           </a:solidFill>
-          <a:ln w="15240">
+          <a:ln w="13970">
             <a:solidFill>
-              <a:srgbClr val="363F4F"/>
+              <a:srgbClr val="3B4557"/>
             </a:solidFill>
           </a:ln>
         </p:spPr>
@@ -4928,7 +5653,7 @@
         </p:nvGraphicFramePr>
         <p:xfrm>
           <a:off x="6583680" y="2331720"/>
-          <a:ext cx="4937760" cy="3520440"/>
+          <a:ext cx="4937760" cy="3611880"/>
         </p:xfrm>
         <a:graphic>
           <a:graphicData uri="http://schemas.openxmlformats.org/drawingml/2006/chart">
@@ -4961,11 +5686,11 @@
             <a:r>
               <a:rPr sz="900">
                 <a:solidFill>
-                  <a:srgbClr val="A6B0BF"/>
+                  <a:srgbClr val="A7B2C2"/>
                 </a:solidFill>
                 <a:latin typeface="Consolas"/>
               </a:rPr>
-              <a:t>Source: Gallup State of the World's Emotional Health (2024 global survey): negative + positive indicators</a:t>
+              <a:t>Source: Gallup State of the World's Emotional Health (2024)</a:t>
             </a:r>
           </a:p>
         </p:txBody>
@@ -5011,7 +5736,7 @@
             <a:avLst/>
           </a:prstGeom>
           <a:solidFill>
-            <a:srgbClr val="121822"/>
+            <a:srgbClr val="131924"/>
           </a:solidFill>
           <a:ln>
             <a:noFill/>
@@ -5047,8 +5772,8 @@
         </p:nvSpPr>
         <p:spPr>
           <a:xfrm>
-            <a:off x="502920" y="109728"/>
-            <a:ext cx="7315200" cy="182880"/>
+            <a:off x="512064" y="109728"/>
+            <a:ext cx="7772400" cy="182880"/>
           </a:xfrm>
           <a:prstGeom prst="rect">
             <a:avLst/>
@@ -5068,7 +5793,7 @@
                 </a:solidFill>
                 <a:latin typeface="Consolas"/>
               </a:rPr>
-              <a:t>STILLFORM · EXECUTIVE BRIEF</a:t>
+              <a:t>STILLFORM · APPLIED SCIENCE DECK</a:t>
             </a:r>
           </a:p>
         </p:txBody>
@@ -5099,11 +5824,11 @@
             <a:r>
               <a:rPr sz="900">
                 <a:solidFill>
-                  <a:srgbClr val="A6B0BF"/>
+                  <a:srgbClr val="A7B2C2"/>
                 </a:solidFill>
                 <a:latin typeface="Consolas"/>
               </a:rPr>
-              <a:t>03 / 08</a:t>
+              <a:t>03 / 10</a:t>
             </a:r>
           </a:p>
         </p:txBody>
@@ -5117,7 +5842,7 @@
         <p:spPr>
           <a:xfrm>
             <a:off x="640080" y="658368"/>
-            <a:ext cx="10972800" cy="1051560"/>
+            <a:ext cx="10972800" cy="1097280"/>
           </a:xfrm>
           <a:prstGeom prst="rect">
             <a:avLst/>
@@ -5131,13 +5856,13 @@
           <a:lstStyle/>
           <a:p>
             <a:r>
-              <a:rPr sz="4200" b="1">
+              <a:rPr sz="4000" b="1">
                 <a:solidFill>
                   <a:srgbClr val="ECF0F5"/>
                 </a:solidFill>
                 <a:latin typeface="Calibri"/>
               </a:rPr>
-              <a:t>Clinical Need at Scale</a:t>
+              <a:t>Applied Science Map</a:t>
             </a:r>
           </a:p>
         </p:txBody>
@@ -5151,7 +5876,7 @@
         <p:spPr>
           <a:xfrm>
             <a:off x="676656" y="1481328"/>
-            <a:ext cx="10881360" cy="411480"/>
+            <a:ext cx="10927080" cy="411480"/>
           </a:xfrm>
           <a:prstGeom prst="rect">
             <a:avLst/>
@@ -5167,60 +5892,583 @@
             <a:r>
               <a:rPr sz="1600">
                 <a:solidFill>
-                  <a:srgbClr val="A6B0BF"/>
+                  <a:srgbClr val="A7B2C2"/>
                 </a:solidFill>
                 <a:latin typeface="Calibri"/>
               </a:rPr>
-              <a:t>Population burden is large; care access remains constrained</a:t>
-            </a:r>
-          </a:p>
-        </p:txBody>
-      </p:sp>
-      <p:sp>
-        <p:nvSpPr>
-          <p:cNvPr id="7" name="Rounded Rectangle 6"/>
-          <p:cNvSpPr/>
-          <p:nvPr/>
-        </p:nvSpPr>
-        <p:spPr>
-          <a:xfrm>
-            <a:off x="685800" y="1901952"/>
-            <a:ext cx="4892040" cy="4251960"/>
-          </a:xfrm>
-          <a:prstGeom prst="roundRect">
-            <a:avLst/>
-          </a:prstGeom>
-          <a:solidFill>
-            <a:srgbClr val="121822"/>
-          </a:solidFill>
-          <a:ln w="15240">
-            <a:solidFill>
-              <a:srgbClr val="363F4F"/>
-            </a:solidFill>
-          </a:ln>
-        </p:spPr>
-        <p:style>
-          <a:lnRef idx="1">
-            <a:schemeClr val="accent1"/>
-          </a:lnRef>
-          <a:fillRef idx="3">
-            <a:schemeClr val="accent1"/>
-          </a:fillRef>
-          <a:effectRef idx="2">
-            <a:schemeClr val="accent1"/>
-          </a:effectRef>
-          <a:fontRef idx="minor">
-            <a:schemeClr val="lt1"/>
-          </a:fontRef>
-        </p:style>
-        <p:txBody>
-          <a:bodyPr rtlCol="0" anchor="ctr"/>
-          <a:lstStyle/>
-          <a:p>
-            <a:pPr algn="ctr"/>
-          </a:p>
-        </p:txBody>
-      </p:sp>
+              <a:t>Domain -&gt; global issue -&gt; Stillform mechanism -&gt; telemetry</a:t>
+            </a:r>
+          </a:p>
+        </p:txBody>
+      </p:sp>
+      <p:graphicFrame>
+        <p:nvGraphicFramePr>
+          <p:cNvPr id="7" name="Table 6"/>
+          <p:cNvGraphicFramePr>
+            <a:graphicFrameLocks noGrp="1"/>
+          </p:cNvGraphicFramePr>
+          <p:nvPr/>
+        </p:nvGraphicFramePr>
+        <p:xfrm>
+          <a:off x="594360" y="1828800"/>
+          <a:ext cx="11064240" cy="4526280"/>
+        </p:xfrm>
+        <a:graphic>
+          <a:graphicData uri="http://schemas.openxmlformats.org/drawingml/2006/table">
+            <a:tbl>
+              <a:tblPr firstRow="1" bandRow="1">
+                <a:tableStyleId>{5C22544A-7EE6-4342-B048-85BDC9FD1C3A}</a:tableStyleId>
+              </a:tblPr>
+              <a:tblGrid>
+                <a:gridCol w="1828800"/>
+                <a:gridCol w="3017520"/>
+                <a:gridCol w="3063240"/>
+                <a:gridCol w="3154680"/>
+              </a:tblGrid>
+              <a:tr h="754380">
+                <a:tc>
+                  <a:txBody>
+                    <a:bodyPr/>
+                    <a:lstStyle/>
+                    <a:p>
+                      <a:r>
+                        <a:rPr sz="1100" b="1">
+                          <a:solidFill>
+                            <a:srgbClr val="EBAB4A"/>
+                          </a:solidFill>
+                          <a:latin typeface="Calibri"/>
+                        </a:rPr>
+                        <a:t>Domain</a:t>
+                      </a:r>
+                    </a:p>
+                  </a:txBody>
+                  <a:tcPr>
+                    <a:solidFill>
+                      <a:srgbClr val="131924"/>
+                    </a:solidFill>
+                  </a:tcPr>
+                </a:tc>
+                <a:tc>
+                  <a:txBody>
+                    <a:bodyPr/>
+                    <a:lstStyle/>
+                    <a:p>
+                      <a:r>
+                        <a:rPr sz="1100" b="1">
+                          <a:solidFill>
+                            <a:srgbClr val="EBAB4A"/>
+                          </a:solidFill>
+                          <a:latin typeface="Calibri"/>
+                        </a:rPr>
+                        <a:t>Global issue context</a:t>
+                      </a:r>
+                    </a:p>
+                  </a:txBody>
+                  <a:tcPr>
+                    <a:solidFill>
+                      <a:srgbClr val="131924"/>
+                    </a:solidFill>
+                  </a:tcPr>
+                </a:tc>
+                <a:tc>
+                  <a:txBody>
+                    <a:bodyPr/>
+                    <a:lstStyle/>
+                    <a:p>
+                      <a:r>
+                        <a:rPr sz="1100" b="1">
+                          <a:solidFill>
+                            <a:srgbClr val="EBAB4A"/>
+                          </a:solidFill>
+                          <a:latin typeface="Calibri"/>
+                        </a:rPr>
+                        <a:t>Stillform mechanism</a:t>
+                      </a:r>
+                    </a:p>
+                  </a:txBody>
+                  <a:tcPr>
+                    <a:solidFill>
+                      <a:srgbClr val="131924"/>
+                    </a:solidFill>
+                  </a:tcPr>
+                </a:tc>
+                <a:tc>
+                  <a:txBody>
+                    <a:bodyPr/>
+                    <a:lstStyle/>
+                    <a:p>
+                      <a:r>
+                        <a:rPr sz="1100" b="1">
+                          <a:solidFill>
+                            <a:srgbClr val="EBAB4A"/>
+                          </a:solidFill>
+                          <a:latin typeface="Calibri"/>
+                        </a:rPr>
+                        <a:t>Measured signal</a:t>
+                      </a:r>
+                    </a:p>
+                  </a:txBody>
+                  <a:tcPr>
+                    <a:solidFill>
+                      <a:srgbClr val="131924"/>
+                    </a:solidFill>
+                  </a:tcPr>
+                </a:tc>
+              </a:tr>
+              <a:tr h="754380">
+                <a:tc>
+                  <a:txBody>
+                    <a:bodyPr/>
+                    <a:lstStyle/>
+                    <a:p>
+                      <a:r>
+                        <a:rPr sz="1000" b="0">
+                          <a:solidFill>
+                            <a:srgbClr val="ECF0F5"/>
+                          </a:solidFill>
+                          <a:latin typeface="Calibri"/>
+                        </a:rPr>
+                        <a:t>Metacognition</a:t>
+                      </a:r>
+                    </a:p>
+                  </a:txBody>
+                  <a:tcPr>
+                    <a:solidFill>
+                      <a:srgbClr val="0A0D13"/>
+                    </a:solidFill>
+                  </a:tcPr>
+                </a:tc>
+                <a:tc>
+                  <a:txBody>
+                    <a:bodyPr/>
+                    <a:lstStyle/>
+                    <a:p>
+                      <a:r>
+                        <a:rPr sz="1000" b="0">
+                          <a:solidFill>
+                            <a:srgbClr val="ECF0F5"/>
+                          </a:solidFill>
+                          <a:latin typeface="Calibri"/>
+                        </a:rPr>
+                        <a:t>High worry/stress narrows cognitive monitoring</a:t>
+                      </a:r>
+                    </a:p>
+                  </a:txBody>
+                  <a:tcPr>
+                    <a:solidFill>
+                      <a:srgbClr val="0A0D13"/>
+                    </a:solidFill>
+                  </a:tcPr>
+                </a:tc>
+                <a:tc>
+                  <a:txBody>
+                    <a:bodyPr/>
+                    <a:lstStyle/>
+                    <a:p>
+                      <a:r>
+                        <a:rPr sz="1000" b="0">
+                          <a:solidFill>
+                            <a:srgbClr val="ECF0F5"/>
+                          </a:solidFill>
+                          <a:latin typeface="Calibri"/>
+                        </a:rPr>
+                        <a:t>Pulse labeling + Reframe pattern reflection</a:t>
+                      </a:r>
+                    </a:p>
+                  </a:txBody>
+                  <a:tcPr>
+                    <a:solidFill>
+                      <a:srgbClr val="0A0D13"/>
+                    </a:solidFill>
+                  </a:tcPr>
+                </a:tc>
+                <a:tc>
+                  <a:txBody>
+                    <a:bodyPr/>
+                    <a:lstStyle/>
+                    <a:p>
+                      <a:r>
+                        <a:rPr sz="1000" b="0">
+                          <a:solidFill>
+                            <a:srgbClr val="ECF0F5"/>
+                          </a:solidFill>
+                          <a:latin typeface="Calibri"/>
+                        </a:rPr>
+                        <a:t>Pre/post composure delta trend</a:t>
+                      </a:r>
+                    </a:p>
+                  </a:txBody>
+                  <a:tcPr>
+                    <a:solidFill>
+                      <a:srgbClr val="0A0D13"/>
+                    </a:solidFill>
+                  </a:tcPr>
+                </a:tc>
+              </a:tr>
+              <a:tr h="754380">
+                <a:tc>
+                  <a:txBody>
+                    <a:bodyPr/>
+                    <a:lstStyle/>
+                    <a:p>
+                      <a:r>
+                        <a:rPr sz="1000" b="0">
+                          <a:solidFill>
+                            <a:srgbClr val="ECF0F5"/>
+                          </a:solidFill>
+                          <a:latin typeface="Calibri"/>
+                        </a:rPr>
+                        <a:t>EQ</a:t>
+                      </a:r>
+                    </a:p>
+                  </a:txBody>
+                  <a:tcPr>
+                    <a:solidFill>
+                      <a:srgbClr val="1B222F"/>
+                    </a:solidFill>
+                  </a:tcPr>
+                </a:tc>
+                <a:tc>
+                  <a:txBody>
+                    <a:bodyPr/>
+                    <a:lstStyle/>
+                    <a:p>
+                      <a:r>
+                        <a:rPr sz="1000" b="0">
+                          <a:solidFill>
+                            <a:srgbClr val="ECF0F5"/>
+                          </a:solidFill>
+                          <a:latin typeface="Calibri"/>
+                        </a:rPr>
+                        <a:t>Interpersonal reads degrade under load</a:t>
+                      </a:r>
+                    </a:p>
+                  </a:txBody>
+                  <a:tcPr>
+                    <a:solidFill>
+                      <a:srgbClr val="1B222F"/>
+                    </a:solidFill>
+                  </a:tcPr>
+                </a:tc>
+                <a:tc>
+                  <a:txBody>
+                    <a:bodyPr/>
+                    <a:lstStyle/>
+                    <a:p>
+                      <a:r>
+                        <a:rPr sz="1000" b="0">
+                          <a:solidFill>
+                            <a:srgbClr val="ECF0F5"/>
+                          </a:solidFill>
+                          <a:latin typeface="Calibri"/>
+                        </a:rPr>
+                        <a:t>Bio-filter + interpersonal microbias prompts</a:t>
+                      </a:r>
+                    </a:p>
+                  </a:txBody>
+                  <a:tcPr>
+                    <a:solidFill>
+                      <a:srgbClr val="1B222F"/>
+                    </a:solidFill>
+                  </a:tcPr>
+                </a:tc>
+                <a:tc>
+                  <a:txBody>
+                    <a:bodyPr/>
+                    <a:lstStyle/>
+                    <a:p>
+                      <a:r>
+                        <a:rPr sz="1000" b="0">
+                          <a:solidFill>
+                            <a:srgbClr val="ECF0F5"/>
+                          </a:solidFill>
+                          <a:latin typeface="Calibri"/>
+                        </a:rPr>
+                        <a:t>Conflict-triggered session outcomes</a:t>
+                      </a:r>
+                    </a:p>
+                  </a:txBody>
+                  <a:tcPr>
+                    <a:solidFill>
+                      <a:srgbClr val="1B222F"/>
+                    </a:solidFill>
+                  </a:tcPr>
+                </a:tc>
+              </a:tr>
+              <a:tr h="754380">
+                <a:tc>
+                  <a:txBody>
+                    <a:bodyPr/>
+                    <a:lstStyle/>
+                    <a:p>
+                      <a:r>
+                        <a:rPr sz="1000" b="0">
+                          <a:solidFill>
+                            <a:srgbClr val="ECF0F5"/>
+                          </a:solidFill>
+                          <a:latin typeface="Calibri"/>
+                        </a:rPr>
+                        <a:t>Composure</a:t>
+                      </a:r>
+                    </a:p>
+                  </a:txBody>
+                  <a:tcPr>
+                    <a:solidFill>
+                      <a:srgbClr val="0A0D13"/>
+                    </a:solidFill>
+                  </a:tcPr>
+                </a:tc>
+                <a:tc>
+                  <a:txBody>
+                    <a:bodyPr/>
+                    <a:lstStyle/>
+                    <a:p>
+                      <a:r>
+                        <a:rPr sz="1000" b="0">
+                          <a:solidFill>
+                            <a:srgbClr val="ECF0F5"/>
+                          </a:solidFill>
+                          <a:latin typeface="Calibri"/>
+                        </a:rPr>
+                        <a:t>Daily regulation instability</a:t>
+                      </a:r>
+                    </a:p>
+                  </a:txBody>
+                  <a:tcPr>
+                    <a:solidFill>
+                      <a:srgbClr val="0A0D13"/>
+                    </a:solidFill>
+                  </a:tcPr>
+                </a:tc>
+                <a:tc>
+                  <a:txBody>
+                    <a:bodyPr/>
+                    <a:lstStyle/>
+                    <a:p>
+                      <a:r>
+                        <a:rPr sz="1000" b="0">
+                          <a:solidFill>
+                            <a:srgbClr val="ECF0F5"/>
+                          </a:solidFill>
+                          <a:latin typeface="Calibri"/>
+                        </a:rPr>
+                        <a:t>Morning baseline + intervention + EOD close</a:t>
+                      </a:r>
+                    </a:p>
+                  </a:txBody>
+                  <a:tcPr>
+                    <a:solidFill>
+                      <a:srgbClr val="0A0D13"/>
+                    </a:solidFill>
+                  </a:tcPr>
+                </a:tc>
+                <a:tc>
+                  <a:txBody>
+                    <a:bodyPr/>
+                    <a:lstStyle/>
+                    <a:p>
+                      <a:r>
+                        <a:rPr sz="1000" b="0">
+                          <a:solidFill>
+                            <a:srgbClr val="ECF0F5"/>
+                          </a:solidFill>
+                          <a:latin typeface="Calibri"/>
+                        </a:rPr>
+                        <a:t>14d loop completion</a:t>
+                      </a:r>
+                    </a:p>
+                  </a:txBody>
+                  <a:tcPr>
+                    <a:solidFill>
+                      <a:srgbClr val="0A0D13"/>
+                    </a:solidFill>
+                  </a:tcPr>
+                </a:tc>
+              </a:tr>
+              <a:tr h="754380">
+                <a:tc>
+                  <a:txBody>
+                    <a:bodyPr/>
+                    <a:lstStyle/>
+                    <a:p>
+                      <a:r>
+                        <a:rPr sz="1000" b="0">
+                          <a:solidFill>
+                            <a:srgbClr val="ECF0F5"/>
+                          </a:solidFill>
+                          <a:latin typeface="Calibri"/>
+                        </a:rPr>
+                        <a:t>Impulsivity</a:t>
+                      </a:r>
+                    </a:p>
+                  </a:txBody>
+                  <a:tcPr>
+                    <a:solidFill>
+                      <a:srgbClr val="1B222F"/>
+                    </a:solidFill>
+                  </a:tcPr>
+                </a:tc>
+                <a:tc>
+                  <a:txBody>
+                    <a:bodyPr/>
+                    <a:lstStyle/>
+                    <a:p>
+                      <a:r>
+                        <a:rPr sz="1000" b="0">
+                          <a:solidFill>
+                            <a:srgbClr val="ECF0F5"/>
+                          </a:solidFill>
+                          <a:latin typeface="Calibri"/>
+                        </a:rPr>
+                        <a:t>Fast state -&gt; fast action errors</a:t>
+                      </a:r>
+                    </a:p>
+                  </a:txBody>
+                  <a:tcPr>
+                    <a:solidFill>
+                      <a:srgbClr val="1B222F"/>
+                    </a:solidFill>
+                  </a:tcPr>
+                </a:tc>
+                <a:tc>
+                  <a:txBody>
+                    <a:bodyPr/>
+                    <a:lstStyle/>
+                    <a:p>
+                      <a:r>
+                        <a:rPr sz="1000" b="0">
+                          <a:solidFill>
+                            <a:srgbClr val="ECF0F5"/>
+                          </a:solidFill>
+                          <a:latin typeface="Calibri"/>
+                        </a:rPr>
+                        <a:t>Somatic interrupt + default pathway routing</a:t>
+                      </a:r>
+                    </a:p>
+                  </a:txBody>
+                  <a:tcPr>
+                    <a:solidFill>
+                      <a:srgbClr val="1B222F"/>
+                    </a:solidFill>
+                  </a:tcPr>
+                </a:tc>
+                <a:tc>
+                  <a:txBody>
+                    <a:bodyPr/>
+                    <a:lstStyle/>
+                    <a:p>
+                      <a:r>
+                        <a:rPr sz="1000" b="0">
+                          <a:solidFill>
+                            <a:srgbClr val="ECF0F5"/>
+                          </a:solidFill>
+                          <a:latin typeface="Calibri"/>
+                        </a:rPr>
+                        <a:t>Time-to-stabilization, post-rating gain</a:t>
+                      </a:r>
+                    </a:p>
+                  </a:txBody>
+                  <a:tcPr>
+                    <a:solidFill>
+                      <a:srgbClr val="1B222F"/>
+                    </a:solidFill>
+                  </a:tcPr>
+                </a:tc>
+              </a:tr>
+              <a:tr h="754380">
+                <a:tc>
+                  <a:txBody>
+                    <a:bodyPr/>
+                    <a:lstStyle/>
+                    <a:p>
+                      <a:r>
+                        <a:rPr sz="1000" b="0">
+                          <a:solidFill>
+                            <a:srgbClr val="ECF0F5"/>
+                          </a:solidFill>
+                          <a:latin typeface="Calibri"/>
+                        </a:rPr>
+                        <a:t>Microbias conflict</a:t>
+                      </a:r>
+                    </a:p>
+                  </a:txBody>
+                  <a:tcPr>
+                    <a:solidFill>
+                      <a:srgbClr val="0A0D13"/>
+                    </a:solidFill>
+                  </a:tcPr>
+                </a:tc>
+                <a:tc>
+                  <a:txBody>
+                    <a:bodyPr/>
+                    <a:lstStyle/>
+                    <a:p>
+                      <a:r>
+                        <a:rPr sz="1000" b="0">
+                          <a:solidFill>
+                            <a:srgbClr val="ECF0F5"/>
+                          </a:solidFill>
+                          <a:latin typeface="Calibri"/>
+                        </a:rPr>
+                        <a:t>20-30% overread of others' negative intensity</a:t>
+                      </a:r>
+                    </a:p>
+                  </a:txBody>
+                  <a:tcPr>
+                    <a:solidFill>
+                      <a:srgbClr val="0A0D13"/>
+                    </a:solidFill>
+                  </a:tcPr>
+                </a:tc>
+                <a:tc>
+                  <a:txBody>
+                    <a:bodyPr/>
+                    <a:lstStyle/>
+                    <a:p>
+                      <a:r>
+                        <a:rPr sz="1000" b="0">
+                          <a:solidFill>
+                            <a:srgbClr val="ECF0F5"/>
+                          </a:solidFill>
+                          <a:latin typeface="Calibri"/>
+                        </a:rPr>
+                        <a:t>Bias detection (projection/attribution/contagion)</a:t>
+                      </a:r>
+                    </a:p>
+                  </a:txBody>
+                  <a:tcPr>
+                    <a:solidFill>
+                      <a:srgbClr val="0A0D13"/>
+                    </a:solidFill>
+                  </a:tcPr>
+                </a:tc>
+                <a:tc>
+                  <a:txBody>
+                    <a:bodyPr/>
+                    <a:lstStyle/>
+                    <a:p>
+                      <a:r>
+                        <a:rPr sz="1000" b="0">
+                          <a:solidFill>
+                            <a:srgbClr val="ECF0F5"/>
+                          </a:solidFill>
+                          <a:latin typeface="Calibri"/>
+                        </a:rPr>
+                        <a:t>Bias-tag recurrence reduction</a:t>
+                      </a:r>
+                    </a:p>
+                  </a:txBody>
+                  <a:tcPr>
+                    <a:solidFill>
+                      <a:srgbClr val="0A0D13"/>
+                    </a:solidFill>
+                  </a:tcPr>
+                </a:tc>
+              </a:tr>
+            </a:tbl>
+          </a:graphicData>
+        </a:graphic>
+      </p:graphicFrame>
       <p:sp>
         <p:nvSpPr>
           <p:cNvPr id="8" name="TextBox 7"/>
@@ -5229,8 +6477,8 @@
         </p:nvSpPr>
         <p:spPr>
           <a:xfrm>
-            <a:off x="987552" y="2240280"/>
-            <a:ext cx="2560320" cy="1463040"/>
+            <a:off x="685800" y="6464808"/>
+            <a:ext cx="10972800" cy="219456"/>
           </a:xfrm>
           <a:prstGeom prst="rect">
             <a:avLst/>
@@ -5243,158 +6491,14 @@
           </a:bodyPr>
           <a:lstStyle/>
           <a:p>
-            <a:pPr algn="l"/>
-            <a:r>
-              <a:rPr sz="1000">
-                <a:solidFill>
-                  <a:srgbClr val="A6B0BF"/>
+            <a:r>
+              <a:rPr sz="900">
+                <a:solidFill>
+                  <a:srgbClr val="A7B2C2"/>
                 </a:solidFill>
                 <a:latin typeface="Consolas"/>
               </a:rPr>
-              <a:t>PEOPLE LIVING WITH MENTAL DISORDER</a:t>
-            </a:r>
-          </a:p>
-          <a:p>
-            <a:pPr algn="l"/>
-            <a:r>
-              <a:rPr sz="3800" b="1">
-                <a:solidFill>
-                  <a:srgbClr val="EBAB4A"/>
-                </a:solidFill>
-                <a:latin typeface="Calibri"/>
-              </a:rPr>
-              <a:t>1.1B</a:t>
-            </a:r>
-          </a:p>
-        </p:txBody>
-      </p:sp>
-      <p:sp>
-        <p:nvSpPr>
-          <p:cNvPr id="9" name="TextBox 8"/>
-          <p:cNvSpPr txBox="1"/>
-          <p:nvPr/>
-        </p:nvSpPr>
-        <p:spPr>
-          <a:xfrm>
-            <a:off x="1005840" y="3977639"/>
-            <a:ext cx="4297680" cy="1463040"/>
-          </a:xfrm>
-          <a:prstGeom prst="rect">
-            <a:avLst/>
-          </a:prstGeom>
-          <a:noFill/>
-        </p:spPr>
-        <p:txBody>
-          <a:bodyPr wrap="none">
-            <a:spAutoFit/>
-          </a:bodyPr>
-          <a:lstStyle/>
-          <a:p>
-            <a:r>
-              <a:rPr sz="2600" b="1">
-                <a:solidFill>
-                  <a:srgbClr val="ECF0F5"/>
-                </a:solidFill>
-                <a:latin typeface="Calibri"/>
-              </a:rPr>
-              <a:t>Nearly 1 in 7 globally</a:t>
-            </a:r>
-          </a:p>
-        </p:txBody>
-      </p:sp>
-      <p:sp>
-        <p:nvSpPr>
-          <p:cNvPr id="10" name="Rounded Rectangle 9"/>
-          <p:cNvSpPr/>
-          <p:nvPr/>
-        </p:nvSpPr>
-        <p:spPr>
-          <a:xfrm>
-            <a:off x="5806440" y="1901952"/>
-            <a:ext cx="5897880" cy="4251960"/>
-          </a:xfrm>
-          <a:prstGeom prst="roundRect">
-            <a:avLst/>
-          </a:prstGeom>
-          <a:solidFill>
-            <a:srgbClr val="121822"/>
-          </a:solidFill>
-          <a:ln w="15240">
-            <a:solidFill>
-              <a:srgbClr val="363F4F"/>
-            </a:solidFill>
-          </a:ln>
-        </p:spPr>
-        <p:style>
-          <a:lnRef idx="1">
-            <a:schemeClr val="accent1"/>
-          </a:lnRef>
-          <a:fillRef idx="3">
-            <a:schemeClr val="accent1"/>
-          </a:fillRef>
-          <a:effectRef idx="2">
-            <a:schemeClr val="accent1"/>
-          </a:effectRef>
-          <a:fontRef idx="minor">
-            <a:schemeClr val="lt1"/>
-          </a:fontRef>
-        </p:style>
-        <p:txBody>
-          <a:bodyPr rtlCol="0" anchor="ctr"/>
-          <a:lstStyle/>
-          <a:p>
-            <a:pPr algn="ctr"/>
-          </a:p>
-        </p:txBody>
-      </p:sp>
-      <p:graphicFrame>
-        <p:nvGraphicFramePr>
-          <p:cNvPr id="11" name="Chart 10"/>
-          <p:cNvGraphicFramePr>
-            <a:graphicFrameLocks noGrp="1"/>
-          </p:cNvGraphicFramePr>
-          <p:nvPr/>
-        </p:nvGraphicFramePr>
-        <p:xfrm>
-          <a:off x="6080760" y="2240280"/>
-          <a:ext cx="5394960" cy="3611880"/>
-        </p:xfrm>
-        <a:graphic>
-          <a:graphicData uri="http://schemas.openxmlformats.org/drawingml/2006/chart">
-            <c:chart xmlns:c="http://schemas.openxmlformats.org/drawingml/2006/chart" r:id="rId2"/>
-          </a:graphicData>
-        </a:graphic>
-      </p:graphicFrame>
-      <p:sp>
-        <p:nvSpPr>
-          <p:cNvPr id="12" name="TextBox 11"/>
-          <p:cNvSpPr txBox="1"/>
-          <p:nvPr/>
-        </p:nvSpPr>
-        <p:spPr>
-          <a:xfrm>
-            <a:off x="685800" y="6464808"/>
-            <a:ext cx="10972800" cy="219456"/>
-          </a:xfrm>
-          <a:prstGeom prst="rect">
-            <a:avLst/>
-          </a:prstGeom>
-          <a:noFill/>
-        </p:spPr>
-        <p:txBody>
-          <a:bodyPr wrap="none">
-            <a:spAutoFit/>
-          </a:bodyPr>
-          <a:lstStyle/>
-          <a:p>
-            <a:r>
-              <a:rPr sz="900">
-                <a:solidFill>
-                  <a:srgbClr val="A6B0BF"/>
-                </a:solidFill>
-                <a:latin typeface="Consolas"/>
-              </a:rPr>
-              <a:t>Source: WHO Mental Disorders Fact Sheet (2021 prevalence; updated 2025)</a:t>
+              <a:t>Source: Stillform science sheet; App.jsx loop, rating, and nudge telemetry</a:t>
             </a:r>
           </a:p>
         </p:txBody>
@@ -5440,7 +6544,7 @@
             <a:avLst/>
           </a:prstGeom>
           <a:solidFill>
-            <a:srgbClr val="121822"/>
+            <a:srgbClr val="131924"/>
           </a:solidFill>
           <a:ln>
             <a:noFill/>
@@ -5476,8 +6580,8 @@
         </p:nvSpPr>
         <p:spPr>
           <a:xfrm>
-            <a:off x="502920" y="109728"/>
-            <a:ext cx="7315200" cy="182880"/>
+            <a:off x="512064" y="109728"/>
+            <a:ext cx="7772400" cy="182880"/>
           </a:xfrm>
           <a:prstGeom prst="rect">
             <a:avLst/>
@@ -5497,7 +6601,7 @@
                 </a:solidFill>
                 <a:latin typeface="Consolas"/>
               </a:rPr>
-              <a:t>STILLFORM · EXECUTIVE BRIEF</a:t>
+              <a:t>STILLFORM · APPLIED SCIENCE DECK</a:t>
             </a:r>
           </a:p>
         </p:txBody>
@@ -5528,11 +6632,11 @@
             <a:r>
               <a:rPr sz="900">
                 <a:solidFill>
-                  <a:srgbClr val="A6B0BF"/>
+                  <a:srgbClr val="A7B2C2"/>
                 </a:solidFill>
                 <a:latin typeface="Consolas"/>
               </a:rPr>
-              <a:t>04 / 08</a:t>
+              <a:t>04 / 10</a:t>
             </a:r>
           </a:p>
         </p:txBody>
@@ -5546,7 +6650,7 @@
         <p:spPr>
           <a:xfrm>
             <a:off x="640080" y="658368"/>
-            <a:ext cx="10972800" cy="1051560"/>
+            <a:ext cx="10972800" cy="1097280"/>
           </a:xfrm>
           <a:prstGeom prst="rect">
             <a:avLst/>
@@ -5560,13 +6664,13 @@
           <a:lstStyle/>
           <a:p>
             <a:r>
-              <a:rPr sz="4200" b="1">
+              <a:rPr sz="4000" b="1">
                 <a:solidFill>
                   <a:srgbClr val="ECF0F5"/>
                 </a:solidFill>
                 <a:latin typeface="Calibri"/>
               </a:rPr>
-              <a:t>Behavioral Retention Curve</a:t>
+              <a:t>Metacognition</a:t>
             </a:r>
           </a:p>
         </p:txBody>
@@ -5580,7 +6684,7 @@
         <p:spPr>
           <a:xfrm>
             <a:off x="676656" y="1481328"/>
-            <a:ext cx="10881360" cy="411480"/>
+            <a:ext cx="10927080" cy="411480"/>
           </a:xfrm>
           <a:prstGeom prst="rect">
             <a:avLst/>
@@ -5596,11 +6700,11 @@
             <a:r>
               <a:rPr sz="1600">
                 <a:solidFill>
-                  <a:srgbClr val="A6B0BF"/>
+                  <a:srgbClr val="A7B2C2"/>
                 </a:solidFill>
                 <a:latin typeface="Calibri"/>
               </a:rPr>
-              <a:t>Steep decay from day 1 to day 30 in mobile usage</a:t>
+              <a:t>From unobserved state loops to monitored response choice</a:t>
             </a:r>
           </a:p>
         </p:txBody>
@@ -5613,18 +6717,18 @@
         </p:nvSpPr>
         <p:spPr>
           <a:xfrm>
-            <a:off x="685800" y="1901952"/>
-            <a:ext cx="11018520" cy="4251960"/>
+            <a:off x="685800" y="1920240"/>
+            <a:ext cx="7406640" cy="4251960"/>
           </a:xfrm>
           <a:prstGeom prst="roundRect">
             <a:avLst/>
           </a:prstGeom>
           <a:solidFill>
-            <a:srgbClr val="121822"/>
+            <a:srgbClr val="131924"/>
           </a:solidFill>
-          <a:ln w="15240">
+          <a:ln w="13970">
             <a:solidFill>
-              <a:srgbClr val="363F4F"/>
+              <a:srgbClr val="3B4557"/>
             </a:solidFill>
           </a:ln>
         </p:spPr>
@@ -5659,8 +6763,8 @@
           <p:nvPr/>
         </p:nvGraphicFramePr>
         <p:xfrm>
-          <a:off x="1051560" y="2240280"/>
-          <a:ext cx="10287000" cy="3611880"/>
+          <a:off x="960120" y="2240280"/>
+          <a:ext cx="6903720" cy="3611880"/>
         </p:xfrm>
         <a:graphic>
           <a:graphicData uri="http://schemas.openxmlformats.org/drawingml/2006/chart">
@@ -5670,14 +6774,59 @@
       </p:graphicFrame>
       <p:sp>
         <p:nvSpPr>
-          <p:cNvPr id="9" name="TextBox 8"/>
+          <p:cNvPr id="9" name="Rounded Rectangle 8"/>
+          <p:cNvSpPr/>
+          <p:nvPr/>
+        </p:nvSpPr>
+        <p:spPr>
+          <a:xfrm>
+            <a:off x="8321040" y="1920240"/>
+            <a:ext cx="3383280" cy="4251960"/>
+          </a:xfrm>
+          <a:prstGeom prst="roundRect">
+            <a:avLst/>
+          </a:prstGeom>
+          <a:solidFill>
+            <a:srgbClr val="131924"/>
+          </a:solidFill>
+          <a:ln w="13970">
+            <a:solidFill>
+              <a:srgbClr val="3B4557"/>
+            </a:solidFill>
+          </a:ln>
+        </p:spPr>
+        <p:style>
+          <a:lnRef idx="1">
+            <a:schemeClr val="accent1"/>
+          </a:lnRef>
+          <a:fillRef idx="3">
+            <a:schemeClr val="accent1"/>
+          </a:fillRef>
+          <a:effectRef idx="2">
+            <a:schemeClr val="accent1"/>
+          </a:effectRef>
+          <a:fontRef idx="minor">
+            <a:schemeClr val="lt1"/>
+          </a:fontRef>
+        </p:style>
+        <p:txBody>
+          <a:bodyPr rtlCol="0" anchor="ctr"/>
+          <a:lstStyle/>
+          <a:p>
+            <a:pPr algn="ctr"/>
+          </a:p>
+        </p:txBody>
+      </p:sp>
+      <p:sp>
+        <p:nvSpPr>
+          <p:cNvPr id="10" name="TextBox 9"/>
           <p:cNvSpPr txBox="1"/>
           <p:nvPr/>
         </p:nvSpPr>
         <p:spPr>
           <a:xfrm>
-            <a:off x="685800" y="6464808"/>
-            <a:ext cx="10972800" cy="219456"/>
+            <a:off x="8595360" y="2240280"/>
+            <a:ext cx="2926080" cy="1417320"/>
           </a:xfrm>
           <a:prstGeom prst="rect">
             <a:avLst/>
@@ -5691,13 +6840,148 @@
           <a:lstStyle/>
           <a:p>
             <a:r>
-              <a:rPr sz="900">
-                <a:solidFill>
-                  <a:srgbClr val="A6B0BF"/>
+              <a:rPr sz="1000">
+                <a:solidFill>
+                  <a:srgbClr val="A7B2C2"/>
                 </a:solidFill>
                 <a:latin typeface="Consolas"/>
               </a:rPr>
-              <a:t>Source: OneSignal Mobile App Benchmarks 2024</a:t>
+              <a:t>CORE MECHANISM</a:t>
+            </a:r>
+          </a:p>
+          <a:p>
+            <a:r>
+              <a:rPr sz="3400" b="1">
+                <a:solidFill>
+                  <a:srgbClr val="629FF6"/>
+                </a:solidFill>
+                <a:latin typeface="Calibri"/>
+              </a:rPr>
+              <a:t>Affect labeling</a:t>
+            </a:r>
+          </a:p>
+        </p:txBody>
+      </p:sp>
+      <p:sp>
+        <p:nvSpPr>
+          <p:cNvPr id="11" name="TextBox 10"/>
+          <p:cNvSpPr txBox="1"/>
+          <p:nvPr/>
+        </p:nvSpPr>
+        <p:spPr>
+          <a:xfrm>
+            <a:off x="8595360" y="3429000"/>
+            <a:ext cx="2926080" cy="1417320"/>
+          </a:xfrm>
+          <a:prstGeom prst="rect">
+            <a:avLst/>
+          </a:prstGeom>
+          <a:noFill/>
+        </p:spPr>
+        <p:txBody>
+          <a:bodyPr wrap="none">
+            <a:spAutoFit/>
+          </a:bodyPr>
+          <a:lstStyle/>
+          <a:p>
+            <a:r>
+              <a:rPr sz="1000">
+                <a:solidFill>
+                  <a:srgbClr val="A7B2C2"/>
+                </a:solidFill>
+                <a:latin typeface="Consolas"/>
+              </a:rPr>
+              <a:t>TOOL</a:t>
+            </a:r>
+          </a:p>
+          <a:p>
+            <a:r>
+              <a:rPr sz="3400" b="1">
+                <a:solidFill>
+                  <a:srgbClr val="65BF95"/>
+                </a:solidFill>
+                <a:latin typeface="Calibri"/>
+              </a:rPr>
+              <a:t>Pulse + Reframe</a:t>
+            </a:r>
+          </a:p>
+        </p:txBody>
+      </p:sp>
+      <p:sp>
+        <p:nvSpPr>
+          <p:cNvPr id="12" name="TextBox 11"/>
+          <p:cNvSpPr txBox="1"/>
+          <p:nvPr/>
+        </p:nvSpPr>
+        <p:spPr>
+          <a:xfrm>
+            <a:off x="8595360" y="4572000"/>
+            <a:ext cx="2926080" cy="1417320"/>
+          </a:xfrm>
+          <a:prstGeom prst="rect">
+            <a:avLst/>
+          </a:prstGeom>
+          <a:noFill/>
+        </p:spPr>
+        <p:txBody>
+          <a:bodyPr wrap="none">
+            <a:spAutoFit/>
+          </a:bodyPr>
+          <a:lstStyle/>
+          <a:p>
+            <a:r>
+              <a:rPr sz="1000">
+                <a:solidFill>
+                  <a:srgbClr val="A7B2C2"/>
+                </a:solidFill>
+                <a:latin typeface="Consolas"/>
+              </a:rPr>
+              <a:t>OUTCOME</a:t>
+            </a:r>
+          </a:p>
+          <a:p>
+            <a:r>
+              <a:rPr sz="3400" b="1">
+                <a:solidFill>
+                  <a:srgbClr val="EBAB4A"/>
+                </a:solidFill>
+                <a:latin typeface="Calibri"/>
+              </a:rPr>
+              <a:t>Clearer choices</a:t>
+            </a:r>
+          </a:p>
+        </p:txBody>
+      </p:sp>
+      <p:sp>
+        <p:nvSpPr>
+          <p:cNvPr id="13" name="TextBox 12"/>
+          <p:cNvSpPr txBox="1"/>
+          <p:nvPr/>
+        </p:nvSpPr>
+        <p:spPr>
+          <a:xfrm>
+            <a:off x="685800" y="6464808"/>
+            <a:ext cx="10972800" cy="219456"/>
+          </a:xfrm>
+          <a:prstGeom prst="rect">
+            <a:avLst/>
+          </a:prstGeom>
+          <a:noFill/>
+        </p:spPr>
+        <p:txBody>
+          <a:bodyPr wrap="none">
+            <a:spAutoFit/>
+          </a:bodyPr>
+          <a:lstStyle/>
+          <a:p>
+            <a:r>
+              <a:rPr sz="900">
+                <a:solidFill>
+                  <a:srgbClr val="A7B2C2"/>
+                </a:solidFill>
+                <a:latin typeface="Consolas"/>
+              </a:rPr>
+              <a:t>Source: Flavell 1979; Lieberman 2007; Torre &amp; Lieberman 2018; Gallup 2024</a:t>
             </a:r>
           </a:p>
         </p:txBody>
@@ -5743,7 +7027,7 @@
             <a:avLst/>
           </a:prstGeom>
           <a:solidFill>
-            <a:srgbClr val="121822"/>
+            <a:srgbClr val="131924"/>
           </a:solidFill>
           <a:ln>
             <a:noFill/>
@@ -5779,8 +7063,8 @@
         </p:nvSpPr>
         <p:spPr>
           <a:xfrm>
-            <a:off x="502920" y="109728"/>
-            <a:ext cx="7315200" cy="182880"/>
+            <a:off x="512064" y="109728"/>
+            <a:ext cx="7772400" cy="182880"/>
           </a:xfrm>
           <a:prstGeom prst="rect">
             <a:avLst/>
@@ -5800,7 +7084,7 @@
                 </a:solidFill>
                 <a:latin typeface="Consolas"/>
               </a:rPr>
-              <a:t>STILLFORM · EXECUTIVE BRIEF</a:t>
+              <a:t>STILLFORM · APPLIED SCIENCE DECK</a:t>
             </a:r>
           </a:p>
         </p:txBody>
@@ -5831,11 +7115,11 @@
             <a:r>
               <a:rPr sz="900">
                 <a:solidFill>
-                  <a:srgbClr val="A6B0BF"/>
+                  <a:srgbClr val="A7B2C2"/>
                 </a:solidFill>
                 <a:latin typeface="Consolas"/>
               </a:rPr>
-              <a:t>05 / 08</a:t>
+              <a:t>05 / 10</a:t>
             </a:r>
           </a:p>
         </p:txBody>
@@ -5849,7 +7133,7 @@
         <p:spPr>
           <a:xfrm>
             <a:off x="640080" y="658368"/>
-            <a:ext cx="10972800" cy="1051560"/>
+            <a:ext cx="10972800" cy="1097280"/>
           </a:xfrm>
           <a:prstGeom prst="rect">
             <a:avLst/>
@@ -5863,13 +7147,13 @@
           <a:lstStyle/>
           <a:p>
             <a:r>
-              <a:rPr sz="4200" b="1">
+              <a:rPr sz="4000" b="1">
                 <a:solidFill>
                   <a:srgbClr val="ECF0F5"/>
                 </a:solidFill>
                 <a:latin typeface="Calibri"/>
               </a:rPr>
-              <a:t>Formal Care Coverage Gap</a:t>
+              <a:t>EQ + Microbias Conflict</a:t>
             </a:r>
           </a:p>
         </p:txBody>
@@ -5883,7 +7167,7 @@
         <p:spPr>
           <a:xfrm>
             <a:off x="676656" y="1481328"/>
-            <a:ext cx="10881360" cy="411480"/>
+            <a:ext cx="10927080" cy="411480"/>
           </a:xfrm>
           <a:prstGeom prst="rect">
             <a:avLst/>
@@ -5899,11 +7183,11 @@
             <a:r>
               <a:rPr sz="1600">
                 <a:solidFill>
-                  <a:srgbClr val="A6B0BF"/>
+                  <a:srgbClr val="A7B2C2"/>
                 </a:solidFill>
                 <a:latin typeface="Calibri"/>
               </a:rPr>
-              <a:t>Most people with high-burden conditions are untreated</a:t>
+              <a:t>When state is noisy, social interpretation gets distorted</a:t>
             </a:r>
           </a:p>
         </p:txBody>
@@ -5916,18 +7200,18 @@
         </p:nvSpPr>
         <p:spPr>
           <a:xfrm>
-            <a:off x="685800" y="1901952"/>
-            <a:ext cx="7315200" cy="4251960"/>
+            <a:off x="685800" y="1920240"/>
+            <a:ext cx="7406640" cy="4251960"/>
           </a:xfrm>
           <a:prstGeom prst="roundRect">
             <a:avLst/>
           </a:prstGeom>
           <a:solidFill>
-            <a:srgbClr val="121822"/>
+            <a:srgbClr val="131924"/>
           </a:solidFill>
-          <a:ln w="15240">
+          <a:ln w="13970">
             <a:solidFill>
-              <a:srgbClr val="363F4F"/>
+              <a:srgbClr val="3B4557"/>
             </a:solidFill>
           </a:ln>
         </p:spPr>
@@ -5963,7 +7247,7 @@
         </p:nvGraphicFramePr>
         <p:xfrm>
           <a:off x="960120" y="2240280"/>
-          <a:ext cx="6766560" cy="3611880"/>
+          <a:ext cx="6903720" cy="3611880"/>
         </p:xfrm>
         <a:graphic>
           <a:graphicData uri="http://schemas.openxmlformats.org/drawingml/2006/chart">
@@ -5979,18 +7263,18 @@
         </p:nvSpPr>
         <p:spPr>
           <a:xfrm>
-            <a:off x="8275320" y="1901952"/>
-            <a:ext cx="3429000" cy="4251960"/>
+            <a:off x="8321040" y="1920240"/>
+            <a:ext cx="3383280" cy="4251960"/>
           </a:xfrm>
           <a:prstGeom prst="roundRect">
             <a:avLst/>
           </a:prstGeom>
           <a:solidFill>
-            <a:srgbClr val="121822"/>
+            <a:srgbClr val="131924"/>
           </a:solidFill>
-          <a:ln w="15240">
+          <a:ln w="13970">
             <a:solidFill>
-              <a:srgbClr val="363F4F"/>
+              <a:srgbClr val="3B4557"/>
             </a:solidFill>
           </a:ln>
         </p:spPr>
@@ -6024,7 +7308,7 @@
         </p:nvSpPr>
         <p:spPr>
           <a:xfrm>
-            <a:off x="8549640" y="2240280"/>
+            <a:off x="8595360" y="2240280"/>
             <a:ext cx="2926080" cy="3566160"/>
           </a:xfrm>
           <a:prstGeom prst="rect">
@@ -6033,7 +7317,7 @@
           <a:noFill/>
         </p:spPr>
         <p:txBody>
-          <a:bodyPr wrap="square">
+          <a:bodyPr wrap="none">
             <a:spAutoFit/>
           </a:bodyPr>
           <a:lstStyle/>
@@ -6042,7 +7326,7 @@
               <a:spcAft>
                 <a:spcPts val="800"/>
               </a:spcAft>
-              <a:defRPr sz="1800">
+              <a:defRPr sz="1600" b="1">
                 <a:solidFill>
                   <a:srgbClr val="ECF0F5"/>
                 </a:solidFill>
@@ -6050,7 +7334,7 @@
               </a:defRPr>
             </a:pPr>
             <a:r>
-              <a:t>Coverage is the strategic hole.</a:t>
+              <a:t>Stillform applies one bias check at a time:</a:t>
             </a:r>
           </a:p>
           <a:p>
@@ -6058,7 +7342,7 @@
               <a:spcAft>
                 <a:spcPts val="800"/>
               </a:spcAft>
-              <a:defRPr sz="1800">
+              <a:defRPr sz="1600" b="0">
                 <a:solidFill>
                   <a:srgbClr val="ECF0F5"/>
                 </a:solidFill>
@@ -6066,7 +7350,7 @@
               </a:defRPr>
             </a:pPr>
             <a:r>
-              <a:t>High-burden conditions still show majority untreated.</a:t>
+              <a:t>projection, attribution, contagion, impact gap, intensity amplification.</a:t>
             </a:r>
           </a:p>
           <a:p>
@@ -6074,7 +7358,7 @@
               <a:spcAft>
                 <a:spcPts val="800"/>
               </a:spcAft>
-              <a:defRPr sz="1800">
+              <a:defRPr sz="1600" b="0">
                 <a:solidFill>
                   <a:srgbClr val="ECF0F5"/>
                 </a:solidFill>
@@ -6082,7 +7366,7 @@
               </a:defRPr>
             </a:pPr>
             <a:r>
-              <a:t>Preventive systems should lower load before escalation.</a:t>
+              <a:t>Goal: reduce reactive conflict reads and improve decision tone.</a:t>
             </a:r>
           </a:p>
         </p:txBody>
@@ -6112,11 +7396,11 @@
             <a:r>
               <a:rPr sz="900">
                 <a:solidFill>
-                  <a:srgbClr val="A6B0BF"/>
+                  <a:srgbClr val="A7B2C2"/>
                 </a:solidFill>
                 <a:latin typeface="Consolas"/>
               </a:rPr>
-              <a:t>Source: WHO Mental Disorders Fact Sheet; Mental Health Atlas references</a:t>
+              <a:t>Source: Stillform science sheet microbias section; Nature Communications 2025; Gallup 2024</a:t>
             </a:r>
           </a:p>
         </p:txBody>
@@ -6162,7 +7446,7 @@
             <a:avLst/>
           </a:prstGeom>
           <a:solidFill>
-            <a:srgbClr val="121822"/>
+            <a:srgbClr val="131924"/>
           </a:solidFill>
           <a:ln>
             <a:noFill/>
@@ -6198,8 +7482,8 @@
         </p:nvSpPr>
         <p:spPr>
           <a:xfrm>
-            <a:off x="502920" y="109728"/>
-            <a:ext cx="7315200" cy="182880"/>
+            <a:off x="512064" y="109728"/>
+            <a:ext cx="7772400" cy="182880"/>
           </a:xfrm>
           <a:prstGeom prst="rect">
             <a:avLst/>
@@ -6219,7 +7503,7 @@
                 </a:solidFill>
                 <a:latin typeface="Consolas"/>
               </a:rPr>
-              <a:t>STILLFORM · EXECUTIVE BRIEF</a:t>
+              <a:t>STILLFORM · APPLIED SCIENCE DECK</a:t>
             </a:r>
           </a:p>
         </p:txBody>
@@ -6250,11 +7534,11 @@
             <a:r>
               <a:rPr sz="900">
                 <a:solidFill>
-                  <a:srgbClr val="A6B0BF"/>
+                  <a:srgbClr val="A7B2C2"/>
                 </a:solidFill>
                 <a:latin typeface="Consolas"/>
               </a:rPr>
-              <a:t>06 / 08</a:t>
+              <a:t>06 / 10</a:t>
             </a:r>
           </a:p>
         </p:txBody>
@@ -6268,7 +7552,7 @@
         <p:spPr>
           <a:xfrm>
             <a:off x="640080" y="658368"/>
-            <a:ext cx="10972800" cy="1051560"/>
+            <a:ext cx="10972800" cy="1097280"/>
           </a:xfrm>
           <a:prstGeom prst="rect">
             <a:avLst/>
@@ -6282,13 +7566,13 @@
           <a:lstStyle/>
           <a:p>
             <a:r>
-              <a:rPr sz="4200" b="1">
+              <a:rPr sz="4000" b="1">
                 <a:solidFill>
                   <a:srgbClr val="ECF0F5"/>
                 </a:solidFill>
                 <a:latin typeface="Calibri"/>
               </a:rPr>
-              <a:t>Mechanism Evidence (mHealth Reappraisal)</a:t>
+              <a:t>Impulsivity Under Load</a:t>
             </a:r>
           </a:p>
         </p:txBody>
@@ -6302,7 +7586,7 @@
         <p:spPr>
           <a:xfrm>
             <a:off x="676656" y="1481328"/>
-            <a:ext cx="10881360" cy="411480"/>
+            <a:ext cx="10927080" cy="411480"/>
           </a:xfrm>
           <a:prstGeom prst="rect">
             <a:avLst/>
@@ -6318,11 +7602,11 @@
             <a:r>
               <a:rPr sz="1600">
                 <a:solidFill>
-                  <a:srgbClr val="A6B0BF"/>
+                  <a:srgbClr val="A7B2C2"/>
                 </a:solidFill>
                 <a:latin typeface="Calibri"/>
               </a:rPr>
-              <a:t>Measured effect sizes are positive, moderate, and actionable</a:t>
+              <a:t>High arousal + low monitoring increases reactive action risk</a:t>
             </a:r>
           </a:p>
         </p:txBody>
@@ -6335,18 +7619,18 @@
         </p:nvSpPr>
         <p:spPr>
           <a:xfrm>
-            <a:off x="685800" y="1901952"/>
-            <a:ext cx="7360920" cy="4251960"/>
+            <a:off x="685800" y="1920240"/>
+            <a:ext cx="5486400" cy="4251960"/>
           </a:xfrm>
           <a:prstGeom prst="roundRect">
             <a:avLst/>
           </a:prstGeom>
           <a:solidFill>
-            <a:srgbClr val="121822"/>
+            <a:srgbClr val="131924"/>
           </a:solidFill>
-          <a:ln w="15240">
+          <a:ln w="13970">
             <a:solidFill>
-              <a:srgbClr val="363F4F"/>
+              <a:srgbClr val="3B4557"/>
             </a:solidFill>
           </a:ln>
         </p:spPr>
@@ -6381,8 +7665,8 @@
           <p:nvPr/>
         </p:nvGraphicFramePr>
         <p:xfrm>
-          <a:off x="960120" y="2240280"/>
-          <a:ext cx="6812280" cy="3611880"/>
+          <a:off x="914400" y="2240280"/>
+          <a:ext cx="5074920" cy="3611880"/>
         </p:xfrm>
         <a:graphic>
           <a:graphicData uri="http://schemas.openxmlformats.org/drawingml/2006/chart">
@@ -6398,18 +7682,18 @@
         </p:nvSpPr>
         <p:spPr>
           <a:xfrm>
-            <a:off x="8275320" y="1901952"/>
-            <a:ext cx="3429000" cy="4251960"/>
+            <a:off x="6355080" y="1920240"/>
+            <a:ext cx="5349240" cy="4251960"/>
           </a:xfrm>
           <a:prstGeom prst="roundRect">
             <a:avLst/>
           </a:prstGeom>
           <a:solidFill>
-            <a:srgbClr val="121822"/>
+            <a:srgbClr val="131924"/>
           </a:solidFill>
-          <a:ln w="15240">
+          <a:ln w="13970">
             <a:solidFill>
-              <a:srgbClr val="363F4F"/>
+              <a:srgbClr val="3B4557"/>
             </a:solidFill>
           </a:ln>
         </p:spPr>
@@ -6435,16 +7719,34 @@
           </a:p>
         </p:txBody>
       </p:sp>
-      <p:sp>
-        <p:nvSpPr>
-          <p:cNvPr id="10" name="TextBox 9"/>
+      <p:graphicFrame>
+        <p:nvGraphicFramePr>
+          <p:cNvPr id="10" name="Chart 9"/>
+          <p:cNvGraphicFramePr>
+            <a:graphicFrameLocks noGrp="1"/>
+          </p:cNvGraphicFramePr>
+          <p:nvPr/>
+        </p:nvGraphicFramePr>
+        <p:xfrm>
+          <a:off x="6583680" y="2240280"/>
+          <a:ext cx="4937760" cy="3611880"/>
+        </p:xfrm>
+        <a:graphic>
+          <a:graphicData uri="http://schemas.openxmlformats.org/drawingml/2006/chart">
+            <c:chart xmlns:c="http://schemas.openxmlformats.org/drawingml/2006/chart" r:id="rId3"/>
+          </a:graphicData>
+        </a:graphic>
+      </p:graphicFrame>
+      <p:sp>
+        <p:nvSpPr>
+          <p:cNvPr id="11" name="TextBox 10"/>
           <p:cNvSpPr txBox="1"/>
           <p:nvPr/>
         </p:nvSpPr>
         <p:spPr>
           <a:xfrm>
-            <a:off x="8549640" y="2240280"/>
-            <a:ext cx="2560320" cy="1463040"/>
+            <a:off x="685800" y="6464808"/>
+            <a:ext cx="10972800" cy="219456"/>
           </a:xfrm>
           <a:prstGeom prst="rect">
             <a:avLst/>
@@ -6457,155 +7759,14 @@
           </a:bodyPr>
           <a:lstStyle/>
           <a:p>
-            <a:pPr algn="l"/>
-            <a:r>
-              <a:rPr sz="1000">
-                <a:solidFill>
-                  <a:srgbClr val="A6B0BF"/>
+            <a:r>
+              <a:rPr sz="900">
+                <a:solidFill>
+                  <a:srgbClr val="A7B2C2"/>
                 </a:solidFill>
                 <a:latin typeface="Consolas"/>
               </a:rPr>
-              <a:t>RCTS</a:t>
-            </a:r>
-          </a:p>
-          <a:p>
-            <a:pPr algn="l"/>
-            <a:r>
-              <a:rPr sz="3800" b="1">
-                <a:solidFill>
-                  <a:srgbClr val="EBAB4A"/>
-                </a:solidFill>
-                <a:latin typeface="Calibri"/>
-              </a:rPr>
-              <a:t>30</a:t>
-            </a:r>
-          </a:p>
-        </p:txBody>
-      </p:sp>
-      <p:sp>
-        <p:nvSpPr>
-          <p:cNvPr id="11" name="TextBox 10"/>
-          <p:cNvSpPr txBox="1"/>
-          <p:nvPr/>
-        </p:nvSpPr>
-        <p:spPr>
-          <a:xfrm>
-            <a:off x="8549640" y="3401568"/>
-            <a:ext cx="2560320" cy="1463040"/>
-          </a:xfrm>
-          <a:prstGeom prst="rect">
-            <a:avLst/>
-          </a:prstGeom>
-          <a:noFill/>
-        </p:spPr>
-        <p:txBody>
-          <a:bodyPr wrap="none">
-            <a:spAutoFit/>
-          </a:bodyPr>
-          <a:lstStyle/>
-          <a:p>
-            <a:pPr algn="l"/>
-            <a:r>
-              <a:rPr sz="1000">
-                <a:solidFill>
-                  <a:srgbClr val="A6B0BF"/>
-                </a:solidFill>
-                <a:latin typeface="Consolas"/>
-              </a:rPr>
-              <a:t>PARTICIPANTS</a:t>
-            </a:r>
-          </a:p>
-          <a:p>
-            <a:pPr algn="l"/>
-            <a:r>
-              <a:rPr sz="3800" b="1">
-                <a:solidFill>
-                  <a:srgbClr val="ECF0F5"/>
-                </a:solidFill>
-                <a:latin typeface="Calibri"/>
-              </a:rPr>
-              <a:t>3,904</a:t>
-            </a:r>
-          </a:p>
-        </p:txBody>
-      </p:sp>
-      <p:sp>
-        <p:nvSpPr>
-          <p:cNvPr id="12" name="TextBox 11"/>
-          <p:cNvSpPr txBox="1"/>
-          <p:nvPr/>
-        </p:nvSpPr>
-        <p:spPr>
-          <a:xfrm>
-            <a:off x="8549640" y="4562856"/>
-            <a:ext cx="2560320" cy="1463040"/>
-          </a:xfrm>
-          <a:prstGeom prst="rect">
-            <a:avLst/>
-          </a:prstGeom>
-          <a:noFill/>
-        </p:spPr>
-        <p:txBody>
-          <a:bodyPr wrap="none">
-            <a:spAutoFit/>
-          </a:bodyPr>
-          <a:lstStyle/>
-          <a:p>
-            <a:pPr algn="l"/>
-            <a:r>
-              <a:rPr sz="1000">
-                <a:solidFill>
-                  <a:srgbClr val="A6B0BF"/>
-                </a:solidFill>
-                <a:latin typeface="Consolas"/>
-              </a:rPr>
-              <a:t>YEAR</a:t>
-            </a:r>
-          </a:p>
-          <a:p>
-            <a:pPr algn="l"/>
-            <a:r>
-              <a:rPr sz="3800" b="1">
-                <a:solidFill>
-                  <a:srgbClr val="5E99F4"/>
-                </a:solidFill>
-                <a:latin typeface="Calibri"/>
-              </a:rPr>
-              <a:t>2023</a:t>
-            </a:r>
-          </a:p>
-        </p:txBody>
-      </p:sp>
-      <p:sp>
-        <p:nvSpPr>
-          <p:cNvPr id="13" name="TextBox 12"/>
-          <p:cNvSpPr txBox="1"/>
-          <p:nvPr/>
-        </p:nvSpPr>
-        <p:spPr>
-          <a:xfrm>
-            <a:off x="685800" y="6464808"/>
-            <a:ext cx="10972800" cy="219456"/>
-          </a:xfrm>
-          <a:prstGeom prst="rect">
-            <a:avLst/>
-          </a:prstGeom>
-          <a:noFill/>
-        </p:spPr>
-        <p:txBody>
-          <a:bodyPr wrap="none">
-            <a:spAutoFit/>
-          </a:bodyPr>
-          <a:lstStyle/>
-          <a:p>
-            <a:r>
-              <a:rPr sz="900">
-                <a:solidFill>
-                  <a:srgbClr val="A6B0BF"/>
-                </a:solidFill>
-                <a:latin typeface="Consolas"/>
-              </a:rPr>
-              <a:t>Source: Frontiers in Digital Health (Kunzler et al., 2023; DOI 10.3389/fdgth.2023.1253390)</a:t>
+              <a:t>Source: Gallup/IEP unrest trend cited in Gallup 2025 report; Gallup 2024 daily stress/worry</a:t>
             </a:r>
           </a:p>
         </p:txBody>
@@ -6651,7 +7812,7 @@
             <a:avLst/>
           </a:prstGeom>
           <a:solidFill>
-            <a:srgbClr val="121822"/>
+            <a:srgbClr val="131924"/>
           </a:solidFill>
           <a:ln>
             <a:noFill/>
@@ -6687,8 +7848,8 @@
         </p:nvSpPr>
         <p:spPr>
           <a:xfrm>
-            <a:off x="502920" y="109728"/>
-            <a:ext cx="7315200" cy="182880"/>
+            <a:off x="512064" y="109728"/>
+            <a:ext cx="7772400" cy="182880"/>
           </a:xfrm>
           <a:prstGeom prst="rect">
             <a:avLst/>
@@ -6708,7 +7869,7 @@
                 </a:solidFill>
                 <a:latin typeface="Consolas"/>
               </a:rPr>
-              <a:t>STILLFORM · EXECUTIVE BRIEF</a:t>
+              <a:t>STILLFORM · APPLIED SCIENCE DECK</a:t>
             </a:r>
           </a:p>
         </p:txBody>
@@ -6739,11 +7900,11 @@
             <a:r>
               <a:rPr sz="900">
                 <a:solidFill>
-                  <a:srgbClr val="A6B0BF"/>
+                  <a:srgbClr val="A7B2C2"/>
                 </a:solidFill>
                 <a:latin typeface="Consolas"/>
               </a:rPr>
-              <a:t>07 / 08</a:t>
+              <a:t>07 / 10</a:t>
             </a:r>
           </a:p>
         </p:txBody>
@@ -6757,7 +7918,7 @@
         <p:spPr>
           <a:xfrm>
             <a:off x="640080" y="658368"/>
-            <a:ext cx="10972800" cy="1051560"/>
+            <a:ext cx="10972800" cy="1097280"/>
           </a:xfrm>
           <a:prstGeom prst="rect">
             <a:avLst/>
@@ -6771,13 +7932,13 @@
           <a:lstStyle/>
           <a:p>
             <a:r>
-              <a:rPr sz="4200" b="1">
+              <a:rPr sz="4000" b="1">
                 <a:solidFill>
                   <a:srgbClr val="ECF0F5"/>
                 </a:solidFill>
                 <a:latin typeface="Calibri"/>
               </a:rPr>
-              <a:t>Stillform Operating Loop</a:t>
+              <a:t>Stillform Mechanism Architecture</a:t>
             </a:r>
           </a:p>
         </p:txBody>
@@ -6791,7 +7952,7 @@
         <p:spPr>
           <a:xfrm>
             <a:off x="676656" y="1481328"/>
-            <a:ext cx="10881360" cy="411480"/>
+            <a:ext cx="10927080" cy="411480"/>
           </a:xfrm>
           <a:prstGeom prst="rect">
             <a:avLst/>
@@ -6807,11 +7968,11 @@
             <a:r>
               <a:rPr sz="1600">
                 <a:solidFill>
-                  <a:srgbClr val="A6B0BF"/>
+                  <a:srgbClr val="A7B2C2"/>
                 </a:solidFill>
                 <a:latin typeface="Calibri"/>
               </a:rPr>
-              <a:t>Designed for continuity, not one-off motivation</a:t>
+              <a:t>How applied science is operationalized in-product</a:t>
             </a:r>
           </a:p>
         </p:txBody>
@@ -6824,18 +7985,18 @@
         </p:nvSpPr>
         <p:spPr>
           <a:xfrm>
-            <a:off x="685800" y="2331720"/>
-            <a:ext cx="2148840" cy="2331720"/>
+            <a:off x="658368" y="2240280"/>
+            <a:ext cx="2194560" cy="2514600"/>
           </a:xfrm>
           <a:prstGeom prst="roundRect">
             <a:avLst/>
           </a:prstGeom>
           <a:solidFill>
-            <a:srgbClr val="121822"/>
+            <a:srgbClr val="131924"/>
           </a:solidFill>
-          <a:ln w="15240">
+          <a:ln w="13970">
             <a:solidFill>
-              <a:srgbClr val="5E99F4"/>
+              <a:srgbClr val="3B4557"/>
             </a:solidFill>
           </a:ln>
         </p:spPr>
@@ -6869,8 +8030,8 @@
         </p:nvSpPr>
         <p:spPr>
           <a:xfrm>
-            <a:off x="832104" y="2459736"/>
-            <a:ext cx="457200" cy="365760"/>
+            <a:off x="795528" y="2404872"/>
+            <a:ext cx="1920240" cy="457200"/>
           </a:xfrm>
           <a:prstGeom prst="rect">
             <a:avLst/>
@@ -6884,13 +8045,13 @@
           <a:lstStyle/>
           <a:p>
             <a:r>
-              <a:rPr sz="2200" b="1">
-                <a:solidFill>
-                  <a:srgbClr val="5E99F4"/>
+              <a:rPr sz="1600" b="1">
+                <a:solidFill>
+                  <a:srgbClr val="629FF6"/>
                 </a:solidFill>
                 <a:latin typeface="Calibri"/>
               </a:rPr>
-              <a:t>1</a:t>
+              <a:t>State capture</a:t>
             </a:r>
           </a:p>
         </p:txBody>
@@ -6903,8 +8064,8 @@
         </p:nvSpPr>
         <p:spPr>
           <a:xfrm>
-            <a:off x="832104" y="3017520"/>
-            <a:ext cx="1828800" cy="1463040"/>
+            <a:off x="795528" y="3081528"/>
+            <a:ext cx="1920240" cy="1508760"/>
           </a:xfrm>
           <a:prstGeom prst="rect">
             <a:avLst/>
@@ -6918,13 +8079,13 @@
           <a:lstStyle/>
           <a:p>
             <a:r>
-              <a:rPr sz="1800" b="1">
+              <a:rPr sz="1400">
                 <a:solidFill>
                   <a:srgbClr val="ECF0F5"/>
                 </a:solidFill>
                 <a:latin typeface="Calibri"/>
               </a:rPr>
-              <a:t>Morning baseline</a:t>
+              <a:t>Morning + bio-filter</a:t>
             </a:r>
           </a:p>
         </p:txBody>
@@ -6937,14 +8098,14 @@
         </p:nvSpPr>
         <p:spPr>
           <a:xfrm>
-            <a:off x="2825496" y="3264408"/>
-            <a:ext cx="146304" cy="438912"/>
+            <a:off x="2834640" y="3291840"/>
+            <a:ext cx="128016" cy="502920"/>
           </a:xfrm>
           <a:prstGeom prst="chevron">
             <a:avLst/>
           </a:prstGeom>
           <a:solidFill>
-            <a:srgbClr val="A6B0BF"/>
+            <a:srgbClr val="A7B2C2"/>
           </a:solidFill>
           <a:ln>
             <a:noFill/>
@@ -6980,18 +8141,18 @@
         </p:nvSpPr>
         <p:spPr>
           <a:xfrm>
-            <a:off x="2962656" y="2331720"/>
-            <a:ext cx="2148840" cy="2331720"/>
+            <a:off x="2962656" y="2240280"/>
+            <a:ext cx="2194560" cy="2514600"/>
           </a:xfrm>
           <a:prstGeom prst="roundRect">
             <a:avLst/>
           </a:prstGeom>
           <a:solidFill>
-            <a:srgbClr val="121822"/>
+            <a:srgbClr val="1B222F"/>
           </a:solidFill>
-          <a:ln w="15240">
+          <a:ln w="13970">
             <a:solidFill>
-              <a:srgbClr val="63BF93"/>
+              <a:srgbClr val="3B4557"/>
             </a:solidFill>
           </a:ln>
         </p:spPr>
@@ -7025,8 +8186,8 @@
         </p:nvSpPr>
         <p:spPr>
           <a:xfrm>
-            <a:off x="3108960" y="2459736"/>
-            <a:ext cx="457200" cy="365760"/>
+            <a:off x="3099816" y="2404872"/>
+            <a:ext cx="1920240" cy="457200"/>
           </a:xfrm>
           <a:prstGeom prst="rect">
             <a:avLst/>
@@ -7040,13 +8201,13 @@
           <a:lstStyle/>
           <a:p>
             <a:r>
-              <a:rPr sz="2200" b="1">
-                <a:solidFill>
-                  <a:srgbClr val="63BF93"/>
+              <a:rPr sz="1600" b="1">
+                <a:solidFill>
+                  <a:srgbClr val="65BF95"/>
                 </a:solidFill>
                 <a:latin typeface="Calibri"/>
               </a:rPr>
-              <a:t>2</a:t>
+              <a:t>Interrupt</a:t>
             </a:r>
           </a:p>
         </p:txBody>
@@ -7059,8 +8220,8 @@
         </p:nvSpPr>
         <p:spPr>
           <a:xfrm>
-            <a:off x="3108960" y="3017520"/>
-            <a:ext cx="1828800" cy="1463040"/>
+            <a:off x="3099816" y="3081528"/>
+            <a:ext cx="1920240" cy="1508760"/>
           </a:xfrm>
           <a:prstGeom prst="rect">
             <a:avLst/>
@@ -7074,13 +8235,13 @@
           <a:lstStyle/>
           <a:p>
             <a:r>
-              <a:rPr sz="1800" b="1">
+              <a:rPr sz="1400">
                 <a:solidFill>
                   <a:srgbClr val="ECF0F5"/>
                 </a:solidFill>
                 <a:latin typeface="Calibri"/>
               </a:rPr>
-              <a:t>State detection</a:t>
+              <a:t>Breathe / Body Scan / Somatic cue</a:t>
             </a:r>
           </a:p>
         </p:txBody>
@@ -7093,14 +8254,14 @@
         </p:nvSpPr>
         <p:spPr>
           <a:xfrm>
-            <a:off x="5102352" y="3264408"/>
-            <a:ext cx="146304" cy="438912"/>
+            <a:off x="5138928" y="3291840"/>
+            <a:ext cx="128016" cy="502920"/>
           </a:xfrm>
           <a:prstGeom prst="chevron">
             <a:avLst/>
           </a:prstGeom>
           <a:solidFill>
-            <a:srgbClr val="A6B0BF"/>
+            <a:srgbClr val="A7B2C2"/>
           </a:solidFill>
           <a:ln>
             <a:noFill/>
@@ -7136,18 +8297,18 @@
         </p:nvSpPr>
         <p:spPr>
           <a:xfrm>
-            <a:off x="5239512" y="2331720"/>
-            <a:ext cx="2148840" cy="2331720"/>
+            <a:off x="5266944" y="2240280"/>
+            <a:ext cx="2194560" cy="2514600"/>
           </a:xfrm>
           <a:prstGeom prst="roundRect">
             <a:avLst/>
           </a:prstGeom>
           <a:solidFill>
-            <a:srgbClr val="121822"/>
+            <a:srgbClr val="131924"/>
           </a:solidFill>
-          <a:ln w="15240">
+          <a:ln w="13970">
             <a:solidFill>
-              <a:srgbClr val="EBAB4A"/>
+              <a:srgbClr val="3B4557"/>
             </a:solidFill>
           </a:ln>
         </p:spPr>
@@ -7181,8 +8342,8 @@
         </p:nvSpPr>
         <p:spPr>
           <a:xfrm>
-            <a:off x="5385816" y="2459736"/>
-            <a:ext cx="457200" cy="365760"/>
+            <a:off x="5404104" y="2404872"/>
+            <a:ext cx="1920240" cy="457200"/>
           </a:xfrm>
           <a:prstGeom prst="rect">
             <a:avLst/>
@@ -7196,13 +8357,13 @@
           <a:lstStyle/>
           <a:p>
             <a:r>
-              <a:rPr sz="2200" b="1">
+              <a:rPr sz="1600" b="1">
                 <a:solidFill>
                   <a:srgbClr val="EBAB4A"/>
                 </a:solidFill>
                 <a:latin typeface="Calibri"/>
               </a:rPr>
-              <a:t>3</a:t>
+              <a:t>Reappraise</a:t>
             </a:r>
           </a:p>
         </p:txBody>
@@ -7215,8 +8376,8 @@
         </p:nvSpPr>
         <p:spPr>
           <a:xfrm>
-            <a:off x="5385816" y="3017520"/>
-            <a:ext cx="1828800" cy="1463040"/>
+            <a:off x="5404104" y="3081528"/>
+            <a:ext cx="1920240" cy="1508760"/>
           </a:xfrm>
           <a:prstGeom prst="rect">
             <a:avLst/>
@@ -7230,13 +8391,13 @@
           <a:lstStyle/>
           <a:p>
             <a:r>
-              <a:rPr sz="1800" b="1">
+              <a:rPr sz="1400">
                 <a:solidFill>
                   <a:srgbClr val="ECF0F5"/>
                 </a:solidFill>
                 <a:latin typeface="Calibri"/>
               </a:rPr>
-              <a:t>Right intervention</a:t>
+              <a:t>AI reframe + microbias correction</a:t>
             </a:r>
           </a:p>
         </p:txBody>
@@ -7249,14 +8410,14 @@
         </p:nvSpPr>
         <p:spPr>
           <a:xfrm>
-            <a:off x="7379208" y="3264408"/>
-            <a:ext cx="146304" cy="438912"/>
+            <a:off x="7443216" y="3291840"/>
+            <a:ext cx="128016" cy="502920"/>
           </a:xfrm>
           <a:prstGeom prst="chevron">
             <a:avLst/>
           </a:prstGeom>
           <a:solidFill>
-            <a:srgbClr val="A6B0BF"/>
+            <a:srgbClr val="A7B2C2"/>
           </a:solidFill>
           <a:ln>
             <a:noFill/>
@@ -7292,18 +8453,18 @@
         </p:nvSpPr>
         <p:spPr>
           <a:xfrm>
-            <a:off x="7516368" y="2331720"/>
-            <a:ext cx="2148840" cy="2331720"/>
+            <a:off x="7571232" y="2240280"/>
+            <a:ext cx="2194560" cy="2514600"/>
           </a:xfrm>
           <a:prstGeom prst="roundRect">
             <a:avLst/>
           </a:prstGeom>
           <a:solidFill>
-            <a:srgbClr val="121822"/>
+            <a:srgbClr val="1B222F"/>
           </a:solidFill>
-          <a:ln w="15240">
+          <a:ln w="13970">
             <a:solidFill>
-              <a:srgbClr val="9F7AEA"/>
+              <a:srgbClr val="3B4557"/>
             </a:solidFill>
           </a:ln>
         </p:spPr>
@@ -7337,8 +8498,8 @@
         </p:nvSpPr>
         <p:spPr>
           <a:xfrm>
-            <a:off x="7662672" y="2459736"/>
-            <a:ext cx="457200" cy="365760"/>
+            <a:off x="7708392" y="2404872"/>
+            <a:ext cx="1920240" cy="457200"/>
           </a:xfrm>
           <a:prstGeom prst="rect">
             <a:avLst/>
@@ -7352,13 +8513,13 @@
           <a:lstStyle/>
           <a:p>
             <a:r>
-              <a:rPr sz="2200" b="1">
-                <a:solidFill>
-                  <a:srgbClr val="9F7AEA"/>
+              <a:rPr sz="1600" b="1">
+                <a:solidFill>
+                  <a:srgbClr val="A47DEB"/>
                 </a:solidFill>
                 <a:latin typeface="Calibri"/>
               </a:rPr>
-              <a:t>4</a:t>
+              <a:t>Transfer</a:t>
             </a:r>
           </a:p>
         </p:txBody>
@@ -7371,8 +8532,8 @@
         </p:nvSpPr>
         <p:spPr>
           <a:xfrm>
-            <a:off x="7662672" y="3017520"/>
-            <a:ext cx="1828800" cy="1463040"/>
+            <a:off x="7708392" y="3081528"/>
+            <a:ext cx="1920240" cy="1508760"/>
           </a:xfrm>
           <a:prstGeom prst="rect">
             <a:avLst/>
@@ -7386,13 +8547,13 @@
           <a:lstStyle/>
           <a:p>
             <a:r>
-              <a:rPr sz="1800" b="1">
+              <a:rPr sz="1400">
                 <a:solidFill>
                   <a:srgbClr val="ECF0F5"/>
                 </a:solidFill>
                 <a:latin typeface="Calibri"/>
               </a:rPr>
-              <a:t>Post-shift rating</a:t>
+              <a:t>One next action under control</a:t>
             </a:r>
           </a:p>
         </p:txBody>
@@ -7405,14 +8566,14 @@
         </p:nvSpPr>
         <p:spPr>
           <a:xfrm>
-            <a:off x="9656064" y="3264408"/>
-            <a:ext cx="146304" cy="438912"/>
+            <a:off x="9747504" y="3291840"/>
+            <a:ext cx="128016" cy="502920"/>
           </a:xfrm>
           <a:prstGeom prst="chevron">
             <a:avLst/>
           </a:prstGeom>
           <a:solidFill>
-            <a:srgbClr val="A6B0BF"/>
+            <a:srgbClr val="A7B2C2"/>
           </a:solidFill>
           <a:ln>
             <a:noFill/>
@@ -7448,18 +8609,18 @@
         </p:nvSpPr>
         <p:spPr>
           <a:xfrm>
-            <a:off x="9793224" y="2331720"/>
-            <a:ext cx="2148840" cy="2331720"/>
+            <a:off x="9875520" y="2240280"/>
+            <a:ext cx="2194560" cy="2514600"/>
           </a:xfrm>
           <a:prstGeom prst="roundRect">
             <a:avLst/>
           </a:prstGeom>
           <a:solidFill>
-            <a:srgbClr val="121822"/>
+            <a:srgbClr val="131924"/>
           </a:solidFill>
-          <a:ln w="15240">
+          <a:ln w="13970">
             <a:solidFill>
-              <a:srgbClr val="D76060"/>
+              <a:srgbClr val="3B4557"/>
             </a:solidFill>
           </a:ln>
         </p:spPr>
@@ -7493,8 +8654,8 @@
         </p:nvSpPr>
         <p:spPr>
           <a:xfrm>
-            <a:off x="9939528" y="2459736"/>
-            <a:ext cx="457200" cy="365760"/>
+            <a:off x="10012680" y="2404872"/>
+            <a:ext cx="1920240" cy="457200"/>
           </a:xfrm>
           <a:prstGeom prst="rect">
             <a:avLst/>
@@ -7508,13 +8669,13 @@
           <a:lstStyle/>
           <a:p>
             <a:r>
-              <a:rPr sz="2200" b="1">
-                <a:solidFill>
-                  <a:srgbClr val="D76060"/>
+              <a:rPr sz="1600" b="1">
+                <a:solidFill>
+                  <a:srgbClr val="D86161"/>
                 </a:solidFill>
                 <a:latin typeface="Calibri"/>
               </a:rPr>
-              <a:t>5</a:t>
+              <a:t>Consolidate</a:t>
             </a:r>
           </a:p>
         </p:txBody>
@@ -7527,8 +8688,8 @@
         </p:nvSpPr>
         <p:spPr>
           <a:xfrm>
-            <a:off x="9939528" y="3017520"/>
-            <a:ext cx="1828800" cy="1463040"/>
+            <a:off x="10012680" y="3081528"/>
+            <a:ext cx="1920240" cy="1508760"/>
           </a:xfrm>
           <a:prstGeom prst="rect">
             <a:avLst/>
@@ -7542,72 +8703,27 @@
           <a:lstStyle/>
           <a:p>
             <a:r>
-              <a:rPr sz="1800" b="1">
+              <a:rPr sz="1400">
                 <a:solidFill>
                   <a:srgbClr val="ECF0F5"/>
                 </a:solidFill>
                 <a:latin typeface="Calibri"/>
               </a:rPr>
-              <a:t>Evening closure</a:t>
-            </a:r>
-          </a:p>
-        </p:txBody>
-      </p:sp>
-      <p:sp>
-        <p:nvSpPr>
-          <p:cNvPr id="26" name="Rounded Rectangle 25"/>
-          <p:cNvSpPr/>
-          <p:nvPr/>
-        </p:nvSpPr>
-        <p:spPr>
-          <a:xfrm>
-            <a:off x="685800" y="4892040"/>
-            <a:ext cx="11018520" cy="1225296"/>
-          </a:xfrm>
-          <a:prstGeom prst="roundRect">
-            <a:avLst/>
-          </a:prstGeom>
-          <a:solidFill>
-            <a:srgbClr val="121822"/>
-          </a:solidFill>
-          <a:ln w="15240">
-            <a:solidFill>
-              <a:srgbClr val="363F4F"/>
-            </a:solidFill>
-          </a:ln>
-        </p:spPr>
-        <p:style>
-          <a:lnRef idx="1">
-            <a:schemeClr val="accent1"/>
-          </a:lnRef>
-          <a:fillRef idx="3">
-            <a:schemeClr val="accent1"/>
-          </a:fillRef>
-          <a:effectRef idx="2">
-            <a:schemeClr val="accent1"/>
-          </a:effectRef>
-          <a:fontRef idx="minor">
-            <a:schemeClr val="lt1"/>
-          </a:fontRef>
-        </p:style>
-        <p:txBody>
-          <a:bodyPr rtlCol="0" anchor="ctr"/>
-          <a:lstStyle/>
-          <a:p>
-            <a:pPr algn="ctr"/>
-          </a:p>
-        </p:txBody>
-      </p:sp>
-      <p:sp>
-        <p:nvSpPr>
-          <p:cNvPr id="27" name="TextBox 26"/>
+              <a:t>EOD close + pattern memory</a:t>
+            </a:r>
+          </a:p>
+        </p:txBody>
+      </p:sp>
+      <p:sp>
+        <p:nvSpPr>
+          <p:cNvPr id="26" name="TextBox 25"/>
           <p:cNvSpPr txBox="1"/>
           <p:nvPr/>
         </p:nvSpPr>
         <p:spPr>
           <a:xfrm>
-            <a:off x="914400" y="5184648"/>
-            <a:ext cx="10515600" cy="731520"/>
+            <a:off x="685800" y="6464808"/>
+            <a:ext cx="10972800" cy="219456"/>
           </a:xfrm>
           <a:prstGeom prst="rect">
             <a:avLst/>
@@ -7621,47 +8737,13 @@
           <a:lstStyle/>
           <a:p>
             <a:r>
-              <a:rPr sz="2200">
-                <a:solidFill>
-                  <a:srgbClr val="ECF0F5"/>
-                </a:solidFill>
-                <a:latin typeface="Calibri"/>
-              </a:rPr>
-              <a:t>Core rule: composure is trained as a daily system behavior, not a one-time app event.</a:t>
-            </a:r>
-          </a:p>
-        </p:txBody>
-      </p:sp>
-      <p:sp>
-        <p:nvSpPr>
-          <p:cNvPr id="28" name="TextBox 27"/>
-          <p:cNvSpPr txBox="1"/>
-          <p:nvPr/>
-        </p:nvSpPr>
-        <p:spPr>
-          <a:xfrm>
-            <a:off x="685800" y="6464808"/>
-            <a:ext cx="10972800" cy="219456"/>
-          </a:xfrm>
-          <a:prstGeom prst="rect">
-            <a:avLst/>
-          </a:prstGeom>
-          <a:noFill/>
-        </p:spPr>
-        <p:txBody>
-          <a:bodyPr wrap="none">
-            <a:spAutoFit/>
-          </a:bodyPr>
-          <a:lstStyle/>
-          <a:p>
-            <a:r>
               <a:rPr sz="900">
                 <a:solidFill>
-                  <a:srgbClr val="A6B0BF"/>
+                  <a:srgbClr val="A7B2C2"/>
                 </a:solidFill>
                 <a:latin typeface="Consolas"/>
               </a:rPr>
-              <a:t>Source: Internal product architecture (loop-based intervention system)</a:t>
+              <a:t>Source: Stillform intervention flow: morning baseline -&gt; intervention -&gt; post-rating -&gt; EOD loop</a:t>
             </a:r>
           </a:p>
         </p:txBody>
@@ -7707,7 +8789,7 @@
             <a:avLst/>
           </a:prstGeom>
           <a:solidFill>
-            <a:srgbClr val="121822"/>
+            <a:srgbClr val="131924"/>
           </a:solidFill>
           <a:ln>
             <a:noFill/>
@@ -7743,8 +8825,8 @@
         </p:nvSpPr>
         <p:spPr>
           <a:xfrm>
-            <a:off x="502920" y="109728"/>
-            <a:ext cx="7315200" cy="182880"/>
+            <a:off x="512064" y="109728"/>
+            <a:ext cx="7772400" cy="182880"/>
           </a:xfrm>
           <a:prstGeom prst="rect">
             <a:avLst/>
@@ -7764,7 +8846,7 @@
                 </a:solidFill>
                 <a:latin typeface="Consolas"/>
               </a:rPr>
-              <a:t>STILLFORM · EXECUTIVE BRIEF</a:t>
+              <a:t>STILLFORM · APPLIED SCIENCE DECK</a:t>
             </a:r>
           </a:p>
         </p:txBody>
@@ -7795,11 +8877,11 @@
             <a:r>
               <a:rPr sz="900">
                 <a:solidFill>
-                  <a:srgbClr val="A6B0BF"/>
+                  <a:srgbClr val="A7B2C2"/>
                 </a:solidFill>
                 <a:latin typeface="Consolas"/>
               </a:rPr>
-              <a:t>08 / 08</a:t>
+              <a:t>08 / 10</a:t>
             </a:r>
           </a:p>
         </p:txBody>
@@ -7813,7 +8895,7 @@
         <p:spPr>
           <a:xfrm>
             <a:off x="640080" y="658368"/>
-            <a:ext cx="10972800" cy="1051560"/>
+            <a:ext cx="10972800" cy="1097280"/>
           </a:xfrm>
           <a:prstGeom prst="rect">
             <a:avLst/>
@@ -7827,13 +8909,13 @@
           <a:lstStyle/>
           <a:p>
             <a:r>
-              <a:rPr sz="4200" b="1">
+              <a:rPr sz="4000" b="1">
                 <a:solidFill>
                   <a:srgbClr val="ECF0F5"/>
                 </a:solidFill>
                 <a:latin typeface="Calibri"/>
               </a:rPr>
-              <a:t>Closing</a:t>
+              <a:t>Telemetry Proof Layer</a:t>
             </a:r>
           </a:p>
         </p:txBody>
@@ -7847,7 +8929,7 @@
         <p:spPr>
           <a:xfrm>
             <a:off x="676656" y="1481328"/>
-            <a:ext cx="10881360" cy="411480"/>
+            <a:ext cx="10927080" cy="411480"/>
           </a:xfrm>
           <a:prstGeom prst="rect">
             <a:avLst/>
@@ -7863,11 +8945,11 @@
             <a:r>
               <a:rPr sz="1600">
                 <a:solidFill>
-                  <a:srgbClr val="A6B0BF"/>
+                  <a:srgbClr val="A7B2C2"/>
                 </a:solidFill>
                 <a:latin typeface="Calibri"/>
               </a:rPr>
-              <a:t>What this deck proves</a:t>
+              <a:t>Applied science must be visible in measurable loop outputs</a:t>
             </a:r>
           </a:p>
         </p:txBody>
@@ -7880,18 +8962,18 @@
         </p:nvSpPr>
         <p:spPr>
           <a:xfrm>
-            <a:off x="822960" y="2011680"/>
-            <a:ext cx="10561320" cy="3840480"/>
+            <a:off x="685800" y="1920240"/>
+            <a:ext cx="7406640" cy="4251960"/>
           </a:xfrm>
           <a:prstGeom prst="roundRect">
             <a:avLst/>
           </a:prstGeom>
           <a:solidFill>
-            <a:srgbClr val="121822"/>
+            <a:srgbClr val="131924"/>
           </a:solidFill>
-          <a:ln w="15240">
+          <a:ln w="13970">
             <a:solidFill>
-              <a:srgbClr val="363F4F"/>
+              <a:srgbClr val="3B4557"/>
             </a:solidFill>
           </a:ln>
         </p:spPr>
@@ -7917,16 +8999,79 @@
           </a:p>
         </p:txBody>
       </p:sp>
-      <p:sp>
-        <p:nvSpPr>
-          <p:cNvPr id="8" name="TextBox 7"/>
+      <p:graphicFrame>
+        <p:nvGraphicFramePr>
+          <p:cNvPr id="8" name="Chart 7"/>
+          <p:cNvGraphicFramePr>
+            <a:graphicFrameLocks noGrp="1"/>
+          </p:cNvGraphicFramePr>
+          <p:nvPr/>
+        </p:nvGraphicFramePr>
+        <p:xfrm>
+          <a:off x="960120" y="2240280"/>
+          <a:ext cx="6903720" cy="3611880"/>
+        </p:xfrm>
+        <a:graphic>
+          <a:graphicData uri="http://schemas.openxmlformats.org/drawingml/2006/chart">
+            <c:chart xmlns:c="http://schemas.openxmlformats.org/drawingml/2006/chart" r:id="rId2"/>
+          </a:graphicData>
+        </a:graphic>
+      </p:graphicFrame>
+      <p:sp>
+        <p:nvSpPr>
+          <p:cNvPr id="9" name="Rounded Rectangle 8"/>
+          <p:cNvSpPr/>
+          <p:nvPr/>
+        </p:nvSpPr>
+        <p:spPr>
+          <a:xfrm>
+            <a:off x="8321040" y="1920240"/>
+            <a:ext cx="3383280" cy="4251960"/>
+          </a:xfrm>
+          <a:prstGeom prst="roundRect">
+            <a:avLst/>
+          </a:prstGeom>
+          <a:solidFill>
+            <a:srgbClr val="131924"/>
+          </a:solidFill>
+          <a:ln w="13970">
+            <a:solidFill>
+              <a:srgbClr val="3B4557"/>
+            </a:solidFill>
+          </a:ln>
+        </p:spPr>
+        <p:style>
+          <a:lnRef idx="1">
+            <a:schemeClr val="accent1"/>
+          </a:lnRef>
+          <a:fillRef idx="3">
+            <a:schemeClr val="accent1"/>
+          </a:fillRef>
+          <a:effectRef idx="2">
+            <a:schemeClr val="accent1"/>
+          </a:effectRef>
+          <a:fontRef idx="minor">
+            <a:schemeClr val="lt1"/>
+          </a:fontRef>
+        </p:style>
+        <p:txBody>
+          <a:bodyPr rtlCol="0" anchor="ctr"/>
+          <a:lstStyle/>
+          <a:p>
+            <a:pPr algn="ctr"/>
+          </a:p>
+        </p:txBody>
+      </p:sp>
+      <p:sp>
+        <p:nvSpPr>
+          <p:cNvPr id="10" name="TextBox 9"/>
           <p:cNvSpPr txBox="1"/>
           <p:nvPr/>
         </p:nvSpPr>
         <p:spPr>
           <a:xfrm>
-            <a:off x="1234440" y="2514600"/>
-            <a:ext cx="9784080" cy="3063240"/>
+            <a:off x="8595360" y="2240280"/>
+            <a:ext cx="2926080" cy="3566160"/>
           </a:xfrm>
           <a:prstGeom prst="rect">
             <a:avLst/>
@@ -7934,16 +9079,16 @@
           <a:noFill/>
         </p:spPr>
         <p:txBody>
-          <a:bodyPr wrap="square">
+          <a:bodyPr wrap="none">
             <a:spAutoFit/>
           </a:bodyPr>
           <a:lstStyle/>
           <a:p>
             <a:pPr>
               <a:spcAft>
-                <a:spcPts val="1000"/>
+                <a:spcPts val="500"/>
               </a:spcAft>
-              <a:defRPr sz="3000" b="1">
+              <a:defRPr sz="1600" b="1">
                 <a:solidFill>
                   <a:srgbClr val="ECF0F5"/>
                 </a:solidFill>
@@ -7951,15 +9096,15 @@
               </a:defRPr>
             </a:pPr>
             <a:r>
-              <a:t>1) The need is real and global.</a:t>
+              <a:t>Reliability score formula:</a:t>
             </a:r>
           </a:p>
           <a:p>
             <a:pPr>
               <a:spcAft>
-                <a:spcPts val="1000"/>
+                <a:spcPts val="500"/>
               </a:spcAft>
-              <a:defRPr sz="3000" b="1">
+              <a:defRPr sz="1400" b="0">
                 <a:solidFill>
                   <a:srgbClr val="ECF0F5"/>
                 </a:solidFill>
@@ -7967,15 +9112,15 @@
               </a:defRPr>
             </a:pPr>
             <a:r>
-              <a:t>2) The care gap is structural.</a:t>
+              <a:t>(Loop completion x 0.65) +</a:t>
             </a:r>
           </a:p>
           <a:p>
             <a:pPr>
               <a:spcAft>
-                <a:spcPts val="1000"/>
+                <a:spcPts val="500"/>
               </a:spcAft>
-              <a:defRPr sz="3000" b="1">
+              <a:defRPr sz="1400" b="0">
                 <a:solidFill>
                   <a:srgbClr val="ECF0F5"/>
                 </a:solidFill>
@@ -7983,30 +9128,75 @@
               </a:defRPr>
             </a:pPr>
             <a:r>
-              <a:t>3) The mechanism has measurable efficacy.</a:t>
+              <a:t>(Nudge recovery x 0.35)</a:t>
             </a:r>
           </a:p>
           <a:p>
             <a:pPr>
               <a:spcAft>
-                <a:spcPts val="1000"/>
+                <a:spcPts val="500"/>
               </a:spcAft>
-              <a:defRPr sz="3000" b="1">
+              <a:defRPr sz="1400" b="0">
                 <a:solidFill>
                   <a:srgbClr val="ECF0F5"/>
                 </a:solidFill>
                 <a:latin typeface="Calibri"/>
               </a:defRPr>
             </a:pPr>
-            <a:r>
-              <a:t>4) The product is built as a continuity loop for everyone.</a:t>
-            </a:r>
-          </a:p>
-        </p:txBody>
-      </p:sp>
-      <p:sp>
-        <p:nvSpPr>
-          <p:cNvPr id="9" name="TextBox 8"/>
+          </a:p>
+          <a:p>
+            <a:pPr>
+              <a:spcAft>
+                <a:spcPts val="500"/>
+              </a:spcAft>
+              <a:defRPr sz="1400" b="0">
+                <a:solidFill>
+                  <a:srgbClr val="ECF0F5"/>
+                </a:solidFill>
+                <a:latin typeface="Calibri"/>
+              </a:defRPr>
+            </a:pPr>
+            <a:r>
+              <a:t>Windows:</a:t>
+            </a:r>
+          </a:p>
+          <a:p>
+            <a:pPr>
+              <a:spcAft>
+                <a:spcPts val="500"/>
+              </a:spcAft>
+              <a:defRPr sz="1400" b="0">
+                <a:solidFill>
+                  <a:srgbClr val="ECF0F5"/>
+                </a:solidFill>
+                <a:latin typeface="Calibri"/>
+              </a:defRPr>
+            </a:pPr>
+            <a:r>
+              <a:t>14-day operating loop</a:t>
+            </a:r>
+          </a:p>
+          <a:p>
+            <a:pPr>
+              <a:spcAft>
+                <a:spcPts val="500"/>
+              </a:spcAft>
+              <a:defRPr sz="1400" b="0">
+                <a:solidFill>
+                  <a:srgbClr val="ECF0F5"/>
+                </a:solidFill>
+                <a:latin typeface="Calibri"/>
+              </a:defRPr>
+            </a:pPr>
+            <a:r>
+              <a:t>12-week telemetry history</a:t>
+            </a:r>
+          </a:p>
+        </p:txBody>
+      </p:sp>
+      <p:sp>
+        <p:nvSpPr>
+          <p:cNvPr id="11" name="TextBox 10"/>
           <p:cNvSpPr txBox="1"/>
           <p:nvPr/>
         </p:nvSpPr>
@@ -8029,11 +9219,494 @@
             <a:r>
               <a:rPr sz="900">
                 <a:solidFill>
-                  <a:srgbClr val="A6B0BF"/>
+                  <a:srgbClr val="A7B2C2"/>
                 </a:solidFill>
                 <a:latin typeface="Consolas"/>
               </a:rPr>
-              <a:t>Source: Compiled from Gallup, WHO, OneSignal, Frontiers (full citations in slide footers)</a:t>
+              <a:t>Source: Stillform App.jsx: reliabilityScore, loop history, nudge event telemetry</a:t>
+            </a:r>
+          </a:p>
+        </p:txBody>
+      </p:sp>
+    </p:spTree>
+  </p:cSld>
+  <p:clrMapOvr>
+    <a:masterClrMapping/>
+  </p:clrMapOvr>
+</p:sld>
+</file>
+
+<file path=ppt/slides/slide9.xml><?xml version="1.0" encoding="utf-8"?>
+<p:sld xmlns:a="http://schemas.openxmlformats.org/drawingml/2006/main" xmlns:p="http://schemas.openxmlformats.org/presentationml/2006/main" xmlns:r="http://schemas.openxmlformats.org/officeDocument/2006/relationships">
+  <p:cSld>
+    <p:bg>
+      <p:bgPr>
+        <a:solidFill>
+          <a:srgbClr val="0A0D13"/>
+        </a:solidFill>
+        <a:effectLst/>
+      </p:bgPr>
+    </p:bg>
+    <p:spTree>
+      <p:nvGrpSpPr>
+        <p:cNvPr id="1" name=""/>
+        <p:cNvGrpSpPr/>
+        <p:nvPr/>
+      </p:nvGrpSpPr>
+      <p:grpSpPr/>
+      <p:sp>
+        <p:nvSpPr>
+          <p:cNvPr id="2" name="Rectangle 1"/>
+          <p:cNvSpPr/>
+          <p:nvPr/>
+        </p:nvSpPr>
+        <p:spPr>
+          <a:xfrm>
+            <a:off x="0" y="0"/>
+            <a:ext cx="12191695" cy="347472"/>
+          </a:xfrm>
+          <a:prstGeom prst="rect">
+            <a:avLst/>
+          </a:prstGeom>
+          <a:solidFill>
+            <a:srgbClr val="131924"/>
+          </a:solidFill>
+          <a:ln>
+            <a:noFill/>
+          </a:ln>
+        </p:spPr>
+        <p:style>
+          <a:lnRef idx="1">
+            <a:schemeClr val="accent1"/>
+          </a:lnRef>
+          <a:fillRef idx="3">
+            <a:schemeClr val="accent1"/>
+          </a:fillRef>
+          <a:effectRef idx="2">
+            <a:schemeClr val="accent1"/>
+          </a:effectRef>
+          <a:fontRef idx="minor">
+            <a:schemeClr val="lt1"/>
+          </a:fontRef>
+        </p:style>
+        <p:txBody>
+          <a:bodyPr rtlCol="0" anchor="ctr"/>
+          <a:lstStyle/>
+          <a:p>
+            <a:pPr algn="ctr"/>
+          </a:p>
+        </p:txBody>
+      </p:sp>
+      <p:sp>
+        <p:nvSpPr>
+          <p:cNvPr id="3" name="TextBox 2"/>
+          <p:cNvSpPr txBox="1"/>
+          <p:nvPr/>
+        </p:nvSpPr>
+        <p:spPr>
+          <a:xfrm>
+            <a:off x="512064" y="109728"/>
+            <a:ext cx="7772400" cy="182880"/>
+          </a:xfrm>
+          <a:prstGeom prst="rect">
+            <a:avLst/>
+          </a:prstGeom>
+          <a:noFill/>
+        </p:spPr>
+        <p:txBody>
+          <a:bodyPr wrap="none">
+            <a:spAutoFit/>
+          </a:bodyPr>
+          <a:lstStyle/>
+          <a:p>
+            <a:r>
+              <a:rPr sz="900">
+                <a:solidFill>
+                  <a:srgbClr val="EBAB4A"/>
+                </a:solidFill>
+                <a:latin typeface="Consolas"/>
+              </a:rPr>
+              <a:t>STILLFORM · APPLIED SCIENCE DECK</a:t>
+            </a:r>
+          </a:p>
+        </p:txBody>
+      </p:sp>
+      <p:sp>
+        <p:nvSpPr>
+          <p:cNvPr id="4" name="TextBox 3"/>
+          <p:cNvSpPr txBox="1"/>
+          <p:nvPr/>
+        </p:nvSpPr>
+        <p:spPr>
+          <a:xfrm>
+            <a:off x="10241280" y="109728"/>
+            <a:ext cx="1463040" cy="182880"/>
+          </a:xfrm>
+          <a:prstGeom prst="rect">
+            <a:avLst/>
+          </a:prstGeom>
+          <a:noFill/>
+        </p:spPr>
+        <p:txBody>
+          <a:bodyPr wrap="none">
+            <a:spAutoFit/>
+          </a:bodyPr>
+          <a:lstStyle/>
+          <a:p>
+            <a:pPr algn="r"/>
+            <a:r>
+              <a:rPr sz="900">
+                <a:solidFill>
+                  <a:srgbClr val="A7B2C2"/>
+                </a:solidFill>
+                <a:latin typeface="Consolas"/>
+              </a:rPr>
+              <a:t>09 / 10</a:t>
+            </a:r>
+          </a:p>
+        </p:txBody>
+      </p:sp>
+      <p:sp>
+        <p:nvSpPr>
+          <p:cNvPr id="5" name="TextBox 4"/>
+          <p:cNvSpPr txBox="1"/>
+          <p:nvPr/>
+        </p:nvSpPr>
+        <p:spPr>
+          <a:xfrm>
+            <a:off x="640080" y="658368"/>
+            <a:ext cx="10972800" cy="1097280"/>
+          </a:xfrm>
+          <a:prstGeom prst="rect">
+            <a:avLst/>
+          </a:prstGeom>
+          <a:noFill/>
+        </p:spPr>
+        <p:txBody>
+          <a:bodyPr wrap="none">
+            <a:spAutoFit/>
+          </a:bodyPr>
+          <a:lstStyle/>
+          <a:p>
+            <a:r>
+              <a:rPr sz="4000" b="1">
+                <a:solidFill>
+                  <a:srgbClr val="ECF0F5"/>
+                </a:solidFill>
+                <a:latin typeface="Calibri"/>
+              </a:rPr>
+              <a:t>UAT Decision Instrument</a:t>
+            </a:r>
+          </a:p>
+        </p:txBody>
+      </p:sp>
+      <p:sp>
+        <p:nvSpPr>
+          <p:cNvPr id="6" name="TextBox 5"/>
+          <p:cNvSpPr txBox="1"/>
+          <p:nvPr/>
+        </p:nvSpPr>
+        <p:spPr>
+          <a:xfrm>
+            <a:off x="676656" y="1481328"/>
+            <a:ext cx="10927080" cy="411480"/>
+          </a:xfrm>
+          <a:prstGeom prst="rect">
+            <a:avLst/>
+          </a:prstGeom>
+          <a:noFill/>
+        </p:spPr>
+        <p:txBody>
+          <a:bodyPr wrap="none">
+            <a:spAutoFit/>
+          </a:bodyPr>
+          <a:lstStyle/>
+          <a:p>
+            <a:r>
+              <a:rPr sz="1600">
+                <a:solidFill>
+                  <a:srgbClr val="A7B2C2"/>
+                </a:solidFill>
+                <a:latin typeface="Calibri"/>
+              </a:rPr>
+              <a:t>Testing now scores mechanism quality, not vague sentiment</a:t>
+            </a:r>
+          </a:p>
+        </p:txBody>
+      </p:sp>
+      <p:sp>
+        <p:nvSpPr>
+          <p:cNvPr id="7" name="Rounded Rectangle 6"/>
+          <p:cNvSpPr/>
+          <p:nvPr/>
+        </p:nvSpPr>
+        <p:spPr>
+          <a:xfrm>
+            <a:off x="685800" y="1920240"/>
+            <a:ext cx="7406640" cy="4251960"/>
+          </a:xfrm>
+          <a:prstGeom prst="roundRect">
+            <a:avLst/>
+          </a:prstGeom>
+          <a:solidFill>
+            <a:srgbClr val="131924"/>
+          </a:solidFill>
+          <a:ln w="13970">
+            <a:solidFill>
+              <a:srgbClr val="3B4557"/>
+            </a:solidFill>
+          </a:ln>
+        </p:spPr>
+        <p:style>
+          <a:lnRef idx="1">
+            <a:schemeClr val="accent1"/>
+          </a:lnRef>
+          <a:fillRef idx="3">
+            <a:schemeClr val="accent1"/>
+          </a:fillRef>
+          <a:effectRef idx="2">
+            <a:schemeClr val="accent1"/>
+          </a:effectRef>
+          <a:fontRef idx="minor">
+            <a:schemeClr val="lt1"/>
+          </a:fontRef>
+        </p:style>
+        <p:txBody>
+          <a:bodyPr rtlCol="0" anchor="ctr"/>
+          <a:lstStyle/>
+          <a:p>
+            <a:pPr algn="ctr"/>
+          </a:p>
+        </p:txBody>
+      </p:sp>
+      <p:graphicFrame>
+        <p:nvGraphicFramePr>
+          <p:cNvPr id="8" name="Chart 7"/>
+          <p:cNvGraphicFramePr>
+            <a:graphicFrameLocks noGrp="1"/>
+          </p:cNvGraphicFramePr>
+          <p:nvPr/>
+        </p:nvGraphicFramePr>
+        <p:xfrm>
+          <a:off x="960120" y="2240280"/>
+          <a:ext cx="6903720" cy="3611880"/>
+        </p:xfrm>
+        <a:graphic>
+          <a:graphicData uri="http://schemas.openxmlformats.org/drawingml/2006/chart">
+            <c:chart xmlns:c="http://schemas.openxmlformats.org/drawingml/2006/chart" r:id="rId2"/>
+          </a:graphicData>
+        </a:graphic>
+      </p:graphicFrame>
+      <p:sp>
+        <p:nvSpPr>
+          <p:cNvPr id="9" name="Rounded Rectangle 8"/>
+          <p:cNvSpPr/>
+          <p:nvPr/>
+        </p:nvSpPr>
+        <p:spPr>
+          <a:xfrm>
+            <a:off x="8321040" y="1920240"/>
+            <a:ext cx="3383280" cy="4251960"/>
+          </a:xfrm>
+          <a:prstGeom prst="roundRect">
+            <a:avLst/>
+          </a:prstGeom>
+          <a:solidFill>
+            <a:srgbClr val="131924"/>
+          </a:solidFill>
+          <a:ln w="13970">
+            <a:solidFill>
+              <a:srgbClr val="3B4557"/>
+            </a:solidFill>
+          </a:ln>
+        </p:spPr>
+        <p:style>
+          <a:lnRef idx="1">
+            <a:schemeClr val="accent1"/>
+          </a:lnRef>
+          <a:fillRef idx="3">
+            <a:schemeClr val="accent1"/>
+          </a:fillRef>
+          <a:effectRef idx="2">
+            <a:schemeClr val="accent1"/>
+          </a:effectRef>
+          <a:fontRef idx="minor">
+            <a:schemeClr val="lt1"/>
+          </a:fontRef>
+        </p:style>
+        <p:txBody>
+          <a:bodyPr rtlCol="0" anchor="ctr"/>
+          <a:lstStyle/>
+          <a:p>
+            <a:pPr algn="ctr"/>
+          </a:p>
+        </p:txBody>
+      </p:sp>
+      <p:sp>
+        <p:nvSpPr>
+          <p:cNvPr id="10" name="TextBox 9"/>
+          <p:cNvSpPr txBox="1"/>
+          <p:nvPr/>
+        </p:nvSpPr>
+        <p:spPr>
+          <a:xfrm>
+            <a:off x="8595360" y="2240280"/>
+            <a:ext cx="2926080" cy="1417320"/>
+          </a:xfrm>
+          <a:prstGeom prst="rect">
+            <a:avLst/>
+          </a:prstGeom>
+          <a:noFill/>
+        </p:spPr>
+        <p:txBody>
+          <a:bodyPr wrap="none">
+            <a:spAutoFit/>
+          </a:bodyPr>
+          <a:lstStyle/>
+          <a:p>
+            <a:r>
+              <a:rPr sz="1000">
+                <a:solidFill>
+                  <a:srgbClr val="A7B2C2"/>
+                </a:solidFill>
+                <a:latin typeface="Consolas"/>
+              </a:rPr>
+              <a:t>QUESTIONS</a:t>
+            </a:r>
+          </a:p>
+          <a:p>
+            <a:r>
+              <a:rPr sz="3400" b="1">
+                <a:solidFill>
+                  <a:srgbClr val="EBAB4A"/>
+                </a:solidFill>
+                <a:latin typeface="Calibri"/>
+              </a:rPr>
+              <a:t>5</a:t>
+            </a:r>
+          </a:p>
+        </p:txBody>
+      </p:sp>
+      <p:sp>
+        <p:nvSpPr>
+          <p:cNvPr id="11" name="TextBox 10"/>
+          <p:cNvSpPr txBox="1"/>
+          <p:nvPr/>
+        </p:nvSpPr>
+        <p:spPr>
+          <a:xfrm>
+            <a:off x="8595360" y="3429000"/>
+            <a:ext cx="2926080" cy="1417320"/>
+          </a:xfrm>
+          <a:prstGeom prst="rect">
+            <a:avLst/>
+          </a:prstGeom>
+          <a:noFill/>
+        </p:spPr>
+        <p:txBody>
+          <a:bodyPr wrap="none">
+            <a:spAutoFit/>
+          </a:bodyPr>
+          <a:lstStyle/>
+          <a:p>
+            <a:r>
+              <a:rPr sz="1000">
+                <a:solidFill>
+                  <a:srgbClr val="A7B2C2"/>
+                </a:solidFill>
+                <a:latin typeface="Consolas"/>
+              </a:rPr>
+              <a:t>MODE</a:t>
+            </a:r>
+          </a:p>
+          <a:p>
+            <a:r>
+              <a:rPr sz="3400" b="1">
+                <a:solidFill>
+                  <a:srgbClr val="65BF95"/>
+                </a:solidFill>
+                <a:latin typeface="Calibri"/>
+              </a:rPr>
+              <a:t>Operator-grade</a:t>
+            </a:r>
+          </a:p>
+        </p:txBody>
+      </p:sp>
+      <p:sp>
+        <p:nvSpPr>
+          <p:cNvPr id="12" name="TextBox 11"/>
+          <p:cNvSpPr txBox="1"/>
+          <p:nvPr/>
+        </p:nvSpPr>
+        <p:spPr>
+          <a:xfrm>
+            <a:off x="8595360" y="4572000"/>
+            <a:ext cx="2926080" cy="1417320"/>
+          </a:xfrm>
+          <a:prstGeom prst="rect">
+            <a:avLst/>
+          </a:prstGeom>
+          <a:noFill/>
+        </p:spPr>
+        <p:txBody>
+          <a:bodyPr wrap="none">
+            <a:spAutoFit/>
+          </a:bodyPr>
+          <a:lstStyle/>
+          <a:p>
+            <a:r>
+              <a:rPr sz="1000">
+                <a:solidFill>
+                  <a:srgbClr val="A7B2C2"/>
+                </a:solidFill>
+                <a:latin typeface="Consolas"/>
+              </a:rPr>
+              <a:t>PURPOSE</a:t>
+            </a:r>
+          </a:p>
+          <a:p>
+            <a:r>
+              <a:rPr sz="3400" b="1">
+                <a:solidFill>
+                  <a:srgbClr val="629FF6"/>
+                </a:solidFill>
+                <a:latin typeface="Calibri"/>
+              </a:rPr>
+              <a:t>Ship decisions</a:t>
+            </a:r>
+          </a:p>
+        </p:txBody>
+      </p:sp>
+      <p:sp>
+        <p:nvSpPr>
+          <p:cNvPr id="13" name="TextBox 12"/>
+          <p:cNvSpPr txBox="1"/>
+          <p:nvPr/>
+        </p:nvSpPr>
+        <p:spPr>
+          <a:xfrm>
+            <a:off x="685800" y="6464808"/>
+            <a:ext cx="10972800" cy="219456"/>
+          </a:xfrm>
+          <a:prstGeom prst="rect">
+            <a:avLst/>
+          </a:prstGeom>
+          <a:noFill/>
+        </p:spPr>
+        <p:txBody>
+          <a:bodyPr wrap="none">
+            <a:spAutoFit/>
+          </a:bodyPr>
+          <a:lstStyle/>
+          <a:p>
+            <a:r>
+              <a:rPr sz="900">
+                <a:solidFill>
+                  <a:srgbClr val="A7B2C2"/>
+                </a:solidFill>
+                <a:latin typeface="Consolas"/>
+              </a:rPr>
+              <a:t>Source: public/uat-roadmap.html tester ask section (updated)</a:t>
             </a:r>
           </a:p>
         </p:txBody>

--- a/public/Stillform_Strategic_Overview.pptx
+++ b/public/Stillform_Strategic_Overview.pptx
@@ -14,7 +14,6 @@
     <p:sldId id="262" r:id="rId13"/>
     <p:sldId id="263" r:id="rId14"/>
     <p:sldId id="264" r:id="rId15"/>
-    <p:sldId id="265" r:id="rId16"/>
   </p:sldIdLst>
   <p:sldSz cx="12191695" cy="6858000" type="screen4x3"/>
   <p:notesSz cx="6858000" cy="9144000"/>
@@ -134,21 +133,76 @@
               <c:strCache>
                 <c:ptCount val="1"/>
                 <c:pt idx="0">
-                  <c:v>Daily negative experiences (%)</c:v>
+                  <c:v>Daily negative (%)</c:v>
                 </c:pt>
               </c:strCache>
             </c:strRef>
           </c:tx>
-          <c:spPr>
-            <a:solidFill>
-              <a:srgbClr val="D86161"/>
-            </a:solidFill>
-            <a:ln>
+          <c:dPt>
+            <c:idx val="0"/>
+            <c:spPr>
               <a:solidFill>
-                <a:srgbClr val="D86161"/>
+                <a:srgbClr val="C8922A"/>
               </a:solidFill>
-            </a:ln>
-          </c:spPr>
+              <a:ln>
+                <a:solidFill>
+                  <a:srgbClr val="C8922A"/>
+                </a:solidFill>
+              </a:ln>
+            </c:spPr>
+          </c:dPt>
+          <c:dPt>
+            <c:idx val="1"/>
+            <c:spPr>
+              <a:solidFill>
+                <a:srgbClr val="C8922A"/>
+              </a:solidFill>
+              <a:ln>
+                <a:solidFill>
+                  <a:srgbClr val="C8922A"/>
+                </a:solidFill>
+              </a:ln>
+            </c:spPr>
+          </c:dPt>
+          <c:dPt>
+            <c:idx val="2"/>
+            <c:spPr>
+              <a:solidFill>
+                <a:srgbClr val="C8922A"/>
+              </a:solidFill>
+              <a:ln>
+                <a:solidFill>
+                  <a:srgbClr val="C8922A"/>
+                </a:solidFill>
+              </a:ln>
+            </c:spPr>
+          </c:dPt>
+          <c:dPt>
+            <c:idx val="3"/>
+            <c:spPr>
+              <a:solidFill>
+                <a:srgbClr val="C8922A"/>
+              </a:solidFill>
+              <a:ln>
+                <a:solidFill>
+                  <a:srgbClr val="C8922A"/>
+                </a:solidFill>
+              </a:ln>
+            </c:spPr>
+          </c:dPt>
+          <c:dPt>
+            <c:idx val="4"/>
+            <c:spPr>
+              <a:solidFill>
+                <a:srgbClr val="C8922A"/>
+              </a:solidFill>
+              <a:ln>
+                <a:solidFill>
+                  <a:srgbClr val="C8922A"/>
+                </a:solidFill>
+              </a:ln>
+            </c:spPr>
+          </c:dPt>
           <c:cat>
             <c:strRef>
               <c:f>Sheet1!$A$2:$A$6</c:f>
@@ -161,7 +215,7 @@
                   <c:v>Stress</c:v>
                 </c:pt>
                 <c:pt idx="2">
-                  <c:v>Physical pain</c:v>
+                  <c:v>Pain</c:v>
                 </c:pt>
                 <c:pt idx="3">
                   <c:v>Sadness</c:v>
@@ -215,9 +269,9 @@
           <a:lstStyle/>
           <a:p>
             <a:pPr>
-              <a:defRPr sz="1000">
-                <a:solidFill>
-                  <a:srgbClr val="A7B2C2"/>
+              <a:defRPr sz="900">
+                <a:solidFill>
+                  <a:srgbClr val="9496A1"/>
                 </a:solidFill>
                 <a:latin typeface="Calibri"/>
               </a:defRPr>
@@ -242,7 +296,7 @@
           <c:spPr>
             <a:ln>
               <a:solidFill>
-                <a:srgbClr val="3B4557"/>
+                <a:srgbClr val="3D3E47"/>
               </a:solidFill>
             </a:ln>
           </c:spPr>
@@ -255,9 +309,9 @@
           <a:lstStyle/>
           <a:p>
             <a:pPr>
-              <a:defRPr sz="1000">
-                <a:solidFill>
-                  <a:srgbClr val="A7B2C2"/>
+              <a:defRPr sz="900">
+                <a:solidFill>
+                  <a:srgbClr val="9496A1"/>
                 </a:solidFill>
                 <a:latin typeface="Calibri"/>
               </a:defRPr>
@@ -304,21 +358,76 @@
               <c:strCache>
                 <c:ptCount val="1"/>
                 <c:pt idx="0">
-                  <c:v>Daily positive experiences (%)</c:v>
+                  <c:v>Daily positive (%)</c:v>
                 </c:pt>
               </c:strCache>
             </c:strRef>
           </c:tx>
-          <c:spPr>
-            <a:solidFill>
-              <a:srgbClr val="65BF95"/>
-            </a:solidFill>
-            <a:ln>
+          <c:dPt>
+            <c:idx val="0"/>
+            <c:spPr>
               <a:solidFill>
-                <a:srgbClr val="65BF95"/>
+                <a:srgbClr val="777D8C"/>
               </a:solidFill>
-            </a:ln>
-          </c:spPr>
+              <a:ln>
+                <a:solidFill>
+                  <a:srgbClr val="777D8C"/>
+                </a:solidFill>
+              </a:ln>
+            </c:spPr>
+          </c:dPt>
+          <c:dPt>
+            <c:idx val="1"/>
+            <c:spPr>
+              <a:solidFill>
+                <a:srgbClr val="777D8C"/>
+              </a:solidFill>
+              <a:ln>
+                <a:solidFill>
+                  <a:srgbClr val="777D8C"/>
+                </a:solidFill>
+              </a:ln>
+            </c:spPr>
+          </c:dPt>
+          <c:dPt>
+            <c:idx val="2"/>
+            <c:spPr>
+              <a:solidFill>
+                <a:srgbClr val="777D8C"/>
+              </a:solidFill>
+              <a:ln>
+                <a:solidFill>
+                  <a:srgbClr val="777D8C"/>
+                </a:solidFill>
+              </a:ln>
+            </c:spPr>
+          </c:dPt>
+          <c:dPt>
+            <c:idx val="3"/>
+            <c:spPr>
+              <a:solidFill>
+                <a:srgbClr val="777D8C"/>
+              </a:solidFill>
+              <a:ln>
+                <a:solidFill>
+                  <a:srgbClr val="777D8C"/>
+                </a:solidFill>
+              </a:ln>
+            </c:spPr>
+          </c:dPt>
+          <c:dPt>
+            <c:idx val="4"/>
+            <c:spPr>
+              <a:solidFill>
+                <a:srgbClr val="777D8C"/>
+              </a:solidFill>
+              <a:ln>
+                <a:solidFill>
+                  <a:srgbClr val="777D8C"/>
+                </a:solidFill>
+              </a:ln>
+            </c:spPr>
+          </c:dPt>
           <c:cat>
             <c:strRef>
               <c:f>Sheet1!$A$2:$A$6</c:f>
@@ -328,16 +437,16 @@
                   <c:v>Respect</c:v>
                 </c:pt>
                 <c:pt idx="1">
+                  <c:v>Enjoyment</c:v>
+                </c:pt>
+                <c:pt idx="2">
                   <c:v>Laughter</c:v>
                 </c:pt>
-                <c:pt idx="2">
-                  <c:v>Enjoyment</c:v>
-                </c:pt>
                 <c:pt idx="3">
-                  <c:v>Well-rested</c:v>
+                  <c:v>Rested</c:v>
                 </c:pt>
                 <c:pt idx="4">
-                  <c:v>Learned something</c:v>
+                  <c:v>Learned</c:v>
                 </c:pt>
               </c:strCache>
             </c:strRef>
@@ -385,9 +494,9 @@
           <a:lstStyle/>
           <a:p>
             <a:pPr>
-              <a:defRPr sz="1000">
-                <a:solidFill>
-                  <a:srgbClr val="A7B2C2"/>
+              <a:defRPr sz="900">
+                <a:solidFill>
+                  <a:srgbClr val="9496A1"/>
                 </a:solidFill>
                 <a:latin typeface="Calibri"/>
               </a:defRPr>
@@ -412,7 +521,7 @@
           <c:spPr>
             <a:ln>
               <a:solidFill>
-                <a:srgbClr val="3B4557"/>
+                <a:srgbClr val="3D3E47"/>
               </a:solidFill>
             </a:ln>
           </c:spPr>
@@ -425,9 +534,9 @@
           <a:lstStyle/>
           <a:p>
             <a:pPr>
-              <a:defRPr sz="1000">
-                <a:solidFill>
-                  <a:srgbClr val="A7B2C2"/>
+              <a:defRPr sz="900">
+                <a:solidFill>
+                  <a:srgbClr val="9496A1"/>
                 </a:solidFill>
                 <a:latin typeface="Calibri"/>
               </a:defRPr>
@@ -474,7 +583,7 @@
               <c:strCache>
                 <c:ptCount val="1"/>
                 <c:pt idx="0">
-                  <c:v>Issue/lever index</c:v>
+                  <c:v>Index</c:v>
                 </c:pt>
               </c:strCache>
             </c:strRef>
@@ -483,11 +592,11 @@
             <c:idx val="0"/>
             <c:spPr>
               <a:solidFill>
-                <a:srgbClr val="D86161"/>
+                <a:srgbClr val="C8922A"/>
               </a:solidFill>
               <a:ln>
                 <a:solidFill>
-                  <a:srgbClr val="D86161"/>
+                  <a:srgbClr val="C8922A"/>
                 </a:solidFill>
               </a:ln>
             </c:spPr>
@@ -496,11 +605,11 @@
             <c:idx val="1"/>
             <c:spPr>
               <a:solidFill>
-                <a:srgbClr val="D86161"/>
+                <a:srgbClr val="C8922A"/>
               </a:solidFill>
               <a:ln>
                 <a:solidFill>
-                  <a:srgbClr val="D86161"/>
+                  <a:srgbClr val="C8922A"/>
                 </a:solidFill>
               </a:ln>
             </c:spPr>
@@ -509,11 +618,11 @@
             <c:idx val="2"/>
             <c:spPr>
               <a:solidFill>
-                <a:srgbClr val="65BF95"/>
+                <a:srgbClr val="C8922A"/>
               </a:solidFill>
               <a:ln>
                 <a:solidFill>
-                  <a:srgbClr val="65BF95"/>
+                  <a:srgbClr val="C8922A"/>
                 </a:solidFill>
               </a:ln>
             </c:spPr>
@@ -522,11 +631,11 @@
             <c:idx val="3"/>
             <c:spPr>
               <a:solidFill>
-                <a:srgbClr val="629FF6"/>
+                <a:srgbClr val="C8922A"/>
               </a:solidFill>
               <a:ln>
                 <a:solidFill>
-                  <a:srgbClr val="629FF6"/>
+                  <a:srgbClr val="C8922A"/>
                 </a:solidFill>
               </a:ln>
             </c:spPr>
@@ -546,7 +655,7 @@
                   <c:v>Learning signal</c:v>
                 </c:pt>
                 <c:pt idx="3">
-                  <c:v>Affect labeling support</c:v>
+                  <c:v>Affect-label support</c:v>
                 </c:pt>
               </c:strCache>
             </c:strRef>
@@ -591,9 +700,9 @@
           <a:lstStyle/>
           <a:p>
             <a:pPr>
-              <a:defRPr sz="1000">
-                <a:solidFill>
-                  <a:srgbClr val="A7B2C2"/>
+              <a:defRPr sz="900">
+                <a:solidFill>
+                  <a:srgbClr val="9496A1"/>
                 </a:solidFill>
                 <a:latin typeface="Calibri"/>
               </a:defRPr>
@@ -618,7 +727,7 @@
           <c:spPr>
             <a:ln>
               <a:solidFill>
-                <a:srgbClr val="3B4557"/>
+                <a:srgbClr val="3D3E47"/>
               </a:solidFill>
             </a:ln>
           </c:spPr>
@@ -631,9 +740,9 @@
           <a:lstStyle/>
           <a:p>
             <a:pPr>
-              <a:defRPr sz="1000">
-                <a:solidFill>
-                  <a:srgbClr val="A7B2C2"/>
+              <a:defRPr sz="900">
+                <a:solidFill>
+                  <a:srgbClr val="9496A1"/>
                 </a:solidFill>
                 <a:latin typeface="Calibri"/>
               </a:defRPr>
@@ -680,7 +789,7 @@
               <c:strCache>
                 <c:ptCount val="1"/>
                 <c:pt idx="0">
-                  <c:v>Observed range / prevalence (%)</c:v>
+                  <c:v>Range / prevalence (%)</c:v>
                 </c:pt>
               </c:strCache>
             </c:strRef>
@@ -689,11 +798,11 @@
             <c:idx val="0"/>
             <c:spPr>
               <a:solidFill>
-                <a:srgbClr val="A47DEB"/>
+                <a:srgbClr val="C8922A"/>
               </a:solidFill>
               <a:ln>
                 <a:solidFill>
-                  <a:srgbClr val="A47DEB"/>
+                  <a:srgbClr val="C8922A"/>
                 </a:solidFill>
               </a:ln>
             </c:spPr>
@@ -702,11 +811,11 @@
             <c:idx val="1"/>
             <c:spPr>
               <a:solidFill>
-                <a:srgbClr val="A47DEB"/>
+                <a:srgbClr val="C8922A"/>
               </a:solidFill>
               <a:ln>
                 <a:solidFill>
-                  <a:srgbClr val="A47DEB"/>
+                  <a:srgbClr val="C8922A"/>
                 </a:solidFill>
               </a:ln>
             </c:spPr>
@@ -715,11 +824,11 @@
             <c:idx val="2"/>
             <c:spPr>
               <a:solidFill>
-                <a:srgbClr val="D86161"/>
+                <a:srgbClr val="C8922A"/>
               </a:solidFill>
               <a:ln>
                 <a:solidFill>
-                  <a:srgbClr val="D86161"/>
+                  <a:srgbClr val="C8922A"/>
                 </a:solidFill>
               </a:ln>
             </c:spPr>
@@ -728,11 +837,11 @@
             <c:idx val="3"/>
             <c:spPr>
               <a:solidFill>
-                <a:srgbClr val="D86161"/>
+                <a:srgbClr val="C8922A"/>
               </a:solidFill>
               <a:ln>
                 <a:solidFill>
-                  <a:srgbClr val="D86161"/>
+                  <a:srgbClr val="C8922A"/>
                 </a:solidFill>
               </a:ln>
             </c:spPr>
@@ -743,10 +852,10 @@
               <c:strCache>
                 <c:ptCount val="4"/>
                 <c:pt idx="0">
-                  <c:v>Negative intensity overread (low)</c:v>
+                  <c:v>Overread low</c:v>
                 </c:pt>
                 <c:pt idx="1">
-                  <c:v>Negative intensity overread (high)</c:v>
+                  <c:v>Overread high</c:v>
                 </c:pt>
                 <c:pt idx="2">
                   <c:v>Daily anger</c:v>
@@ -797,9 +906,9 @@
           <a:lstStyle/>
           <a:p>
             <a:pPr>
-              <a:defRPr sz="1000">
-                <a:solidFill>
-                  <a:srgbClr val="A7B2C2"/>
+              <a:defRPr sz="900">
+                <a:solidFill>
+                  <a:srgbClr val="9496A1"/>
                 </a:solidFill>
                 <a:latin typeface="Calibri"/>
               </a:defRPr>
@@ -824,7 +933,7 @@
           <c:spPr>
             <a:ln>
               <a:solidFill>
-                <a:srgbClr val="3B4557"/>
+                <a:srgbClr val="3D3E47"/>
               </a:solidFill>
             </a:ln>
           </c:spPr>
@@ -837,9 +946,9 @@
           <a:lstStyle/>
           <a:p>
             <a:pPr>
-              <a:defRPr sz="1000">
-                <a:solidFill>
-                  <a:srgbClr val="A7B2C2"/>
+              <a:defRPr sz="900">
+                <a:solidFill>
+                  <a:srgbClr val="9496A1"/>
                 </a:solidFill>
                 <a:latin typeface="Calibri"/>
               </a:defRPr>
@@ -886,7 +995,7 @@
               <c:strCache>
                 <c:ptCount val="1"/>
                 <c:pt idx="0">
-                  <c:v>Riots/strikes/anti-gov demos index</c:v>
+                  <c:v>Unrest index</c:v>
                 </c:pt>
               </c:strCache>
             </c:strRef>
@@ -895,11 +1004,11 @@
             <c:idx val="0"/>
             <c:spPr>
               <a:solidFill>
-                <a:srgbClr val="D86161"/>
+                <a:srgbClr val="C8922A"/>
               </a:solidFill>
               <a:ln>
                 <a:solidFill>
-                  <a:srgbClr val="D86161"/>
+                  <a:srgbClr val="C8922A"/>
                 </a:solidFill>
               </a:ln>
             </c:spPr>
@@ -908,11 +1017,11 @@
             <c:idx val="1"/>
             <c:spPr>
               <a:solidFill>
-                <a:srgbClr val="D86161"/>
+                <a:srgbClr val="C8922A"/>
               </a:solidFill>
               <a:ln>
                 <a:solidFill>
-                  <a:srgbClr val="D86161"/>
+                  <a:srgbClr val="C8922A"/>
                 </a:solidFill>
               </a:ln>
             </c:spPr>
@@ -923,10 +1032,10 @@
               <c:strCache>
                 <c:ptCount val="2"/>
                 <c:pt idx="0">
-                  <c:v>2011 baseline</c:v>
+                  <c:v>2011</c:v>
                 </c:pt>
                 <c:pt idx="1">
-                  <c:v>2019 level</c:v>
+                  <c:v>2019</c:v>
                 </c:pt>
               </c:strCache>
             </c:strRef>
@@ -965,9 +1074,9 @@
           <a:lstStyle/>
           <a:p>
             <a:pPr>
-              <a:defRPr sz="1000">
-                <a:solidFill>
-                  <a:srgbClr val="A7B2C2"/>
+              <a:defRPr sz="900">
+                <a:solidFill>
+                  <a:srgbClr val="9496A1"/>
                 </a:solidFill>
                 <a:latin typeface="Calibri"/>
               </a:defRPr>
@@ -992,7 +1101,7 @@
           <c:spPr>
             <a:ln>
               <a:solidFill>
-                <a:srgbClr val="3B4557"/>
+                <a:srgbClr val="3D3E47"/>
               </a:solidFill>
             </a:ln>
           </c:spPr>
@@ -1005,9 +1114,9 @@
           <a:lstStyle/>
           <a:p>
             <a:pPr>
-              <a:defRPr sz="1000">
-                <a:solidFill>
-                  <a:srgbClr val="A7B2C2"/>
+              <a:defRPr sz="900">
+                <a:solidFill>
+                  <a:srgbClr val="9496A1"/>
                 </a:solidFill>
                 <a:latin typeface="Calibri"/>
               </a:defRPr>
@@ -1054,7 +1163,7 @@
               <c:strCache>
                 <c:ptCount val="1"/>
                 <c:pt idx="0">
-                  <c:v>Daily pressure prevalence (%)</c:v>
+                  <c:v>Daily pressure (%)</c:v>
                 </c:pt>
               </c:strCache>
             </c:strRef>
@@ -1063,11 +1172,11 @@
             <c:idx val="0"/>
             <c:spPr>
               <a:solidFill>
-                <a:srgbClr val="EBAB4A"/>
+                <a:srgbClr val="777D8C"/>
               </a:solidFill>
               <a:ln>
                 <a:solidFill>
-                  <a:srgbClr val="EBAB4A"/>
+                  <a:srgbClr val="777D8C"/>
                 </a:solidFill>
               </a:ln>
             </c:spPr>
@@ -1076,11 +1185,11 @@
             <c:idx val="1"/>
             <c:spPr>
               <a:solidFill>
-                <a:srgbClr val="EBAB4A"/>
+                <a:srgbClr val="777D8C"/>
               </a:solidFill>
               <a:ln>
                 <a:solidFill>
-                  <a:srgbClr val="EBAB4A"/>
+                  <a:srgbClr val="777D8C"/>
                 </a:solidFill>
               </a:ln>
             </c:spPr>
@@ -1133,9 +1242,9 @@
           <a:lstStyle/>
           <a:p>
             <a:pPr>
-              <a:defRPr sz="1000">
-                <a:solidFill>
-                  <a:srgbClr val="A7B2C2"/>
+              <a:defRPr sz="900">
+                <a:solidFill>
+                  <a:srgbClr val="9496A1"/>
                 </a:solidFill>
                 <a:latin typeface="Calibri"/>
               </a:defRPr>
@@ -1160,7 +1269,7 @@
           <c:spPr>
             <a:ln>
               <a:solidFill>
-                <a:srgbClr val="3B4557"/>
+                <a:srgbClr val="3D3E47"/>
               </a:solidFill>
             </a:ln>
           </c:spPr>
@@ -1173,9 +1282,9 @@
           <a:lstStyle/>
           <a:p>
             <a:pPr>
-              <a:defRPr sz="1000">
-                <a:solidFill>
-                  <a:srgbClr val="A7B2C2"/>
+              <a:defRPr sz="900">
+                <a:solidFill>
+                  <a:srgbClr val="9496A1"/>
                 </a:solidFill>
                 <a:latin typeface="Calibri"/>
               </a:defRPr>
@@ -1222,7 +1331,7 @@
               <c:strCache>
                 <c:ptCount val="1"/>
                 <c:pt idx="0">
-                  <c:v>System signal coverage index</c:v>
+                  <c:v>Instrumentation coverage</c:v>
                 </c:pt>
               </c:strCache>
             </c:strRef>
@@ -1231,11 +1340,11 @@
             <c:idx val="0"/>
             <c:spPr>
               <a:solidFill>
-                <a:srgbClr val="629FF6"/>
+                <a:srgbClr val="C8922A"/>
               </a:solidFill>
               <a:ln>
                 <a:solidFill>
-                  <a:srgbClr val="629FF6"/>
+                  <a:srgbClr val="C8922A"/>
                 </a:solidFill>
               </a:ln>
             </c:spPr>
@@ -1244,11 +1353,11 @@
             <c:idx val="1"/>
             <c:spPr>
               <a:solidFill>
-                <a:srgbClr val="65BF95"/>
+                <a:srgbClr val="C8922A"/>
               </a:solidFill>
               <a:ln>
                 <a:solidFill>
-                  <a:srgbClr val="65BF95"/>
+                  <a:srgbClr val="C8922A"/>
                 </a:solidFill>
               </a:ln>
             </c:spPr>
@@ -1257,11 +1366,11 @@
             <c:idx val="2"/>
             <c:spPr>
               <a:solidFill>
-                <a:srgbClr val="A47DEB"/>
+                <a:srgbClr val="C8922A"/>
               </a:solidFill>
               <a:ln>
                 <a:solidFill>
-                  <a:srgbClr val="A47DEB"/>
+                  <a:srgbClr val="C8922A"/>
                 </a:solidFill>
               </a:ln>
             </c:spPr>
@@ -1270,11 +1379,11 @@
             <c:idx val="3"/>
             <c:spPr>
               <a:solidFill>
-                <a:srgbClr val="EBAB4A"/>
+                <a:srgbClr val="C8922A"/>
               </a:solidFill>
               <a:ln>
                 <a:solidFill>
-                  <a:srgbClr val="EBAB4A"/>
+                  <a:srgbClr val="C8922A"/>
                 </a:solidFill>
               </a:ln>
             </c:spPr>
@@ -1283,11 +1392,11 @@
             <c:idx val="4"/>
             <c:spPr>
               <a:solidFill>
-                <a:srgbClr val="D86161"/>
+                <a:srgbClr val="C8922A"/>
               </a:solidFill>
               <a:ln>
                 <a:solidFill>
-                  <a:srgbClr val="D86161"/>
+                  <a:srgbClr val="C8922A"/>
                 </a:solidFill>
               </a:ln>
             </c:spPr>
@@ -1298,7 +1407,7 @@
               <c:strCache>
                 <c:ptCount val="5"/>
                 <c:pt idx="0">
-                  <c:v>Pre/post delta</c:v>
+                  <c:v>Pre/post shift</c:v>
                 </c:pt>
                 <c:pt idx="1">
                   <c:v>Loop completion 14d</c:v>
@@ -1358,9 +1467,9 @@
           <a:lstStyle/>
           <a:p>
             <a:pPr>
-              <a:defRPr sz="1000">
-                <a:solidFill>
-                  <a:srgbClr val="A7B2C2"/>
+              <a:defRPr sz="900">
+                <a:solidFill>
+                  <a:srgbClr val="9496A1"/>
                 </a:solidFill>
                 <a:latin typeface="Calibri"/>
               </a:defRPr>
@@ -1385,7 +1494,7 @@
           <c:spPr>
             <a:ln>
               <a:solidFill>
-                <a:srgbClr val="3B4557"/>
+                <a:srgbClr val="3D3E47"/>
               </a:solidFill>
             </a:ln>
           </c:spPr>
@@ -1398,234 +1507,9 @@
           <a:lstStyle/>
           <a:p>
             <a:pPr>
-              <a:defRPr sz="1000">
-                <a:solidFill>
-                  <a:srgbClr val="A7B2C2"/>
-                </a:solidFill>
-                <a:latin typeface="Calibri"/>
-              </a:defRPr>
-            </a:pPr>
-          </a:p>
-        </c:txPr>
-        <c:crossAx val="-2068027336"/>
-        <c:crosses val="autoZero"/>
-      </c:valAx>
-    </c:plotArea>
-    <c:dispBlanksAs val="gap"/>
-  </c:chart>
-  <c:txPr>
-    <a:bodyPr/>
-    <a:lstStyle/>
-    <a:p>
-      <a:pPr>
-        <a:defRPr sz="1800"/>
-      </a:pPr>
-      <a:endParaRPr lang="en-US"/>
-    </a:p>
-  </c:txPr>
-  <c:externalData r:id="rId1">
-    <c:autoUpdate val="0"/>
-  </c:externalData>
-</c:chartSpace>
-</file>
-
-<file path=ppt/charts/chart8.xml><?xml version="1.0" encoding="utf-8"?>
-<c:chartSpace xmlns:c="http://schemas.openxmlformats.org/drawingml/2006/chart" xmlns:a="http://schemas.openxmlformats.org/drawingml/2006/main" xmlns:r="http://schemas.openxmlformats.org/officeDocument/2006/relationships">
-  <c:date1904 val="0"/>
-  <c:chart>
-    <c:autoTitleDeleted val="0"/>
-    <c:plotArea>
-      <c:barChart>
-        <c:barDir val="col"/>
-        <c:grouping val="clustered"/>
-        <c:ser>
-          <c:idx val="0"/>
-          <c:order val="0"/>
-          <c:tx>
-            <c:strRef>
-              <c:f>Sheet1!$B$1</c:f>
-              <c:strCache>
-                <c:ptCount val="1"/>
-                <c:pt idx="0">
-                  <c:v>Weight (%)</c:v>
-                </c:pt>
-              </c:strCache>
-            </c:strRef>
-          </c:tx>
-          <c:dPt>
-            <c:idx val="0"/>
-            <c:spPr>
-              <a:solidFill>
-                <a:srgbClr val="EBAB4A"/>
-              </a:solidFill>
-              <a:ln>
-                <a:solidFill>
-                  <a:srgbClr val="EBAB4A"/>
-                </a:solidFill>
-              </a:ln>
-            </c:spPr>
-          </c:dPt>
-          <c:dPt>
-            <c:idx val="1"/>
-            <c:spPr>
-              <a:solidFill>
-                <a:srgbClr val="629FF6"/>
-              </a:solidFill>
-              <a:ln>
-                <a:solidFill>
-                  <a:srgbClr val="629FF6"/>
-                </a:solidFill>
-              </a:ln>
-            </c:spPr>
-          </c:dPt>
-          <c:dPt>
-            <c:idx val="2"/>
-            <c:spPr>
-              <a:solidFill>
-                <a:srgbClr val="65BF95"/>
-              </a:solidFill>
-              <a:ln>
-                <a:solidFill>
-                  <a:srgbClr val="65BF95"/>
-                </a:solidFill>
-              </a:ln>
-            </c:spPr>
-          </c:dPt>
-          <c:dPt>
-            <c:idx val="3"/>
-            <c:spPr>
-              <a:solidFill>
-                <a:srgbClr val="A47DEB"/>
-              </a:solidFill>
-              <a:ln>
-                <a:solidFill>
-                  <a:srgbClr val="A47DEB"/>
-                </a:solidFill>
-              </a:ln>
-            </c:spPr>
-          </c:dPt>
-          <c:dPt>
-            <c:idx val="4"/>
-            <c:spPr>
-              <a:solidFill>
-                <a:srgbClr val="D86161"/>
-              </a:solidFill>
-              <a:ln>
-                <a:solidFill>
-                  <a:srgbClr val="D86161"/>
-                </a:solidFill>
-              </a:ln>
-            </c:spPr>
-          </c:dPt>
-          <c:cat>
-            <c:strRef>
-              <c:f>Sheet1!$A$2:$A$6</c:f>
-              <c:strCache>
-                <c:ptCount val="5"/>
-                <c:pt idx="0">
-                  <c:v>Behavior changed in real moment</c:v>
-                </c:pt>
-                <c:pt idx="1">
-                  <c:v>Friction pinpoint (exact step)</c:v>
-                </c:pt>
-                <c:pt idx="2">
-                  <c:v>Reliability defect report</c:v>
-                </c:pt>
-                <c:pt idx="3">
-                  <c:v>Decision quality transfer</c:v>
-                </c:pt>
-                <c:pt idx="4">
-                  <c:v>Daily use blocker ranking</c:v>
-                </c:pt>
-              </c:strCache>
-            </c:strRef>
-          </c:cat>
-          <c:val>
-            <c:numRef>
-              <c:f>Sheet1!$B$2:$B$6</c:f>
-              <c:numCache>
-                <c:formatCode>General</c:formatCode>
-                <c:ptCount val="5"/>
-                <c:pt idx="0">
-                  <c:v>30</c:v>
-                </c:pt>
-                <c:pt idx="1">
-                  <c:v>20</c:v>
-                </c:pt>
-                <c:pt idx="2">
-                  <c:v>20</c:v>
-                </c:pt>
-                <c:pt idx="3">
-                  <c:v>15</c:v>
-                </c:pt>
-                <c:pt idx="4">
-                  <c:v>15</c:v>
-                </c:pt>
-              </c:numCache>
-            </c:numRef>
-          </c:val>
-        </c:ser>
-        <c:axId val="-2068027336"/>
-        <c:axId val="-2113994440"/>
-      </c:barChart>
-      <c:catAx>
-        <c:axId val="-2068027336"/>
-        <c:scaling>
-          <c:orientation val="minMax"/>
-        </c:scaling>
-        <c:delete val="0"/>
-        <c:axPos val="b"/>
-        <c:majorTickMark val="out"/>
-        <c:minorTickMark val="none"/>
-        <c:tickLblPos val="nextTo"/>
-        <c:txPr>
-          <a:bodyPr/>
-          <a:lstStyle/>
-          <a:p>
-            <a:pPr>
-              <a:defRPr sz="1000">
-                <a:solidFill>
-                  <a:srgbClr val="A7B2C2"/>
-                </a:solidFill>
-                <a:latin typeface="Calibri"/>
-              </a:defRPr>
-            </a:pPr>
-          </a:p>
-        </c:txPr>
-        <c:crossAx val="-2113994440"/>
-        <c:crosses val="autoZero"/>
-        <c:auto val="1"/>
-        <c:lblAlgn val="ctr"/>
-        <c:lblOffset val="100"/>
-        <c:noMultiLvlLbl val="0"/>
-      </c:catAx>
-      <c:valAx>
-        <c:axId val="-2113994440"/>
-        <c:scaling>
-          <c:max val="35.0"/>
-        </c:scaling>
-        <c:delete val="0"/>
-        <c:axPos val="l"/>
-        <c:majorGridlines>
-          <c:spPr>
-            <a:ln>
-              <a:solidFill>
-                <a:srgbClr val="3B4557"/>
-              </a:solidFill>
-            </a:ln>
-          </c:spPr>
-        </c:majorGridlines>
-        <c:majorTickMark val="out"/>
-        <c:minorTickMark val="none"/>
-        <c:tickLblPos val="nextTo"/>
-        <c:txPr>
-          <a:bodyPr/>
-          <a:lstStyle/>
-          <a:p>
-            <a:pPr>
-              <a:defRPr sz="1000">
-                <a:solidFill>
-                  <a:srgbClr val="A7B2C2"/>
+              <a:defRPr sz="900">
+                <a:solidFill>
+                  <a:srgbClr val="9496A1"/>
                 </a:solidFill>
                 <a:latin typeface="Calibri"/>
               </a:defRPr>
@@ -4631,7 +4515,7 @@
     <p:bg>
       <p:bgPr>
         <a:solidFill>
-          <a:srgbClr val="0A0D13"/>
+          <a:srgbClr val="0A0A0C"/>
         </a:solidFill>
         <a:effectLst/>
       </p:bgPr>
@@ -4652,13 +4536,13 @@
         <p:spPr>
           <a:xfrm>
             <a:off x="0" y="0"/>
-            <a:ext cx="12191695" cy="347472"/>
+            <a:ext cx="12191695" cy="329184"/>
           </a:xfrm>
           <a:prstGeom prst="rect">
             <a:avLst/>
           </a:prstGeom>
           <a:solidFill>
-            <a:srgbClr val="131924"/>
+            <a:srgbClr val="141418"/>
           </a:solidFill>
           <a:ln>
             <a:noFill/>
@@ -4694,8 +4578,8 @@
         </p:nvSpPr>
         <p:spPr>
           <a:xfrm>
-            <a:off x="512064" y="109728"/>
-            <a:ext cx="7772400" cy="182880"/>
+            <a:off x="502920" y="100584"/>
+            <a:ext cx="7315200" cy="182880"/>
           </a:xfrm>
           <a:prstGeom prst="rect">
             <a:avLst/>
@@ -4709,13 +4593,13 @@
           <a:lstStyle/>
           <a:p>
             <a:r>
-              <a:rPr sz="900">
-                <a:solidFill>
-                  <a:srgbClr val="EBAB4A"/>
+              <a:rPr sz="850">
+                <a:solidFill>
+                  <a:srgbClr val="C8922A"/>
                 </a:solidFill>
                 <a:latin typeface="Consolas"/>
               </a:rPr>
-              <a:t>STILLFORM · APPLIED SCIENCE DECK</a:t>
+              <a:t>STILLFORM · APPLIED SCIENCE BRIEF</a:t>
             </a:r>
           </a:p>
         </p:txBody>
@@ -4728,8 +4612,8 @@
         </p:nvSpPr>
         <p:spPr>
           <a:xfrm>
-            <a:off x="10241280" y="109728"/>
-            <a:ext cx="1463040" cy="182880"/>
+            <a:off x="10149840" y="100584"/>
+            <a:ext cx="1554480" cy="182880"/>
           </a:xfrm>
           <a:prstGeom prst="rect">
             <a:avLst/>
@@ -4744,13 +4628,13 @@
           <a:p>
             <a:pPr algn="r"/>
             <a:r>
-              <a:rPr sz="900">
-                <a:solidFill>
-                  <a:srgbClr val="A7B2C2"/>
+              <a:rPr sz="850">
+                <a:solidFill>
+                  <a:srgbClr val="9496A1"/>
                 </a:solidFill>
                 <a:latin typeface="Consolas"/>
               </a:rPr>
-              <a:t>01 / 10</a:t>
+              <a:t>01 / 09</a:t>
             </a:r>
           </a:p>
         </p:txBody>
@@ -4763,8 +4647,8 @@
         </p:nvSpPr>
         <p:spPr>
           <a:xfrm>
-            <a:off x="640080" y="658368"/>
-            <a:ext cx="10972800" cy="1097280"/>
+            <a:off x="640080" y="640080"/>
+            <a:ext cx="10972800" cy="1005840"/>
           </a:xfrm>
           <a:prstGeom prst="rect">
             <a:avLst/>
@@ -4778,9 +4662,9 @@
           <a:lstStyle/>
           <a:p>
             <a:r>
-              <a:rPr sz="4000" b="1">
-                <a:solidFill>
-                  <a:srgbClr val="ECF0F5"/>
+              <a:rPr sz="3600" b="1">
+                <a:solidFill>
+                  <a:srgbClr val="E8EAF0"/>
                 </a:solidFill>
                 <a:latin typeface="Calibri"/>
               </a:rPr>
@@ -4797,8 +4681,8 @@
         </p:nvSpPr>
         <p:spPr>
           <a:xfrm>
-            <a:off x="676656" y="1481328"/>
-            <a:ext cx="10927080" cy="411480"/>
+            <a:off x="658368" y="1417320"/>
+            <a:ext cx="10972800" cy="365760"/>
           </a:xfrm>
           <a:prstGeom prst="rect">
             <a:avLst/>
@@ -4812,37 +4696,37 @@
           <a:lstStyle/>
           <a:p>
             <a:r>
-              <a:rPr sz="1600">
-                <a:solidFill>
-                  <a:srgbClr val="A7B2C2"/>
+              <a:rPr sz="1400">
+                <a:solidFill>
+                  <a:srgbClr val="9496A1"/>
                 </a:solidFill>
                 <a:latin typeface="Calibri"/>
               </a:rPr>
-              <a:t>Metacognition, EQ, composure, impulsivity control, microbias conflict</a:t>
-            </a:r>
-          </a:p>
-        </p:txBody>
-      </p:sp>
-      <p:sp>
-        <p:nvSpPr>
-          <p:cNvPr id="7" name="Rounded Rectangle 6"/>
+              <a:t>Executive view — mechanism, not marketing</a:t>
+            </a:r>
+          </a:p>
+        </p:txBody>
+      </p:sp>
+      <p:sp>
+        <p:nvSpPr>
+          <p:cNvPr id="7" name="Rectangle 6"/>
           <p:cNvSpPr/>
           <p:nvPr/>
         </p:nvSpPr>
         <p:spPr>
           <a:xfrm>
-            <a:off x="777240" y="2057400"/>
-            <a:ext cx="10881360" cy="3657600"/>
-          </a:xfrm>
-          <a:prstGeom prst="roundRect">
+            <a:off x="777240" y="2011680"/>
+            <a:ext cx="10881360" cy="3749039"/>
+          </a:xfrm>
+          <a:prstGeom prst="rect">
             <a:avLst/>
           </a:prstGeom>
           <a:solidFill>
-            <a:srgbClr val="131924"/>
+            <a:srgbClr val="141418"/>
           </a:solidFill>
-          <a:ln w="13970">
+          <a:ln w="11430">
             <a:solidFill>
-              <a:srgbClr val="3B4557"/>
+              <a:srgbClr val="3D3E47"/>
             </a:solidFill>
           </a:ln>
         </p:spPr>
@@ -4876,8 +4760,8 @@
         </p:nvSpPr>
         <p:spPr>
           <a:xfrm>
-            <a:off x="1097280" y="2514600"/>
-            <a:ext cx="10241280" cy="2926080"/>
+            <a:off x="1051560" y="2423160"/>
+            <a:ext cx="10241280" cy="3108960"/>
           </a:xfrm>
           <a:prstGeom prst="rect">
             <a:avLst/>
@@ -4892,49 +4776,49 @@
           <a:p>
             <a:pPr>
               <a:spcAft>
-                <a:spcPts val="1000"/>
+                <a:spcPts val="800"/>
               </a:spcAft>
-              <a:defRPr sz="2200">
-                <a:solidFill>
-                  <a:srgbClr val="ECF0F5"/>
+              <a:defRPr sz="2000">
+                <a:solidFill>
+                  <a:srgbClr val="E8EAF0"/>
                 </a:solidFill>
                 <a:latin typeface="Calibri"/>
               </a:defRPr>
             </a:pPr>
             <a:r>
-              <a:t>This deck is product-mechanism-first, not generic wellness benchmarking.</a:t>
+              <a:t>Composure is treated as a trainable operational skill.</a:t>
             </a:r>
           </a:p>
           <a:p>
             <a:pPr>
               <a:spcAft>
-                <a:spcPts val="1000"/>
+                <a:spcPts val="800"/>
               </a:spcAft>
-              <a:defRPr sz="2200">
-                <a:solidFill>
-                  <a:srgbClr val="ECF0F5"/>
+              <a:defRPr sz="2000">
+                <a:solidFill>
+                  <a:srgbClr val="E8EAF0"/>
                 </a:solidFill>
                 <a:latin typeface="Calibri"/>
               </a:defRPr>
             </a:pPr>
             <a:r>
-              <a:t>Each domain includes: global issue context -&gt; Stillform mechanism -&gt; measurable telemetry signal.</a:t>
+              <a:t>Science domains: metacognition, EQ, impulsivity interruption, microbias conflict correction.</a:t>
             </a:r>
           </a:p>
           <a:p>
             <a:pPr>
               <a:spcAft>
-                <a:spcPts val="1000"/>
+                <a:spcPts val="800"/>
               </a:spcAft>
-              <a:defRPr sz="2200">
-                <a:solidFill>
-                  <a:srgbClr val="ECF0F5"/>
+              <a:defRPr sz="2000">
+                <a:solidFill>
+                  <a:srgbClr val="E8EAF0"/>
                 </a:solidFill>
                 <a:latin typeface="Calibri"/>
               </a:defRPr>
             </a:pPr>
             <a:r>
-              <a:t>No psychiatric treatment claims. Stillform is a composure training and decision-quality system.</a:t>
+              <a:t>Every chart maps to a Stillform mechanism and a measurable telemetry output.</a:t>
             </a:r>
           </a:p>
         </p:txBody>
@@ -4947,8 +4831,8 @@
         </p:nvSpPr>
         <p:spPr>
           <a:xfrm>
-            <a:off x="685800" y="6464808"/>
-            <a:ext cx="10972800" cy="219456"/>
+            <a:off x="685800" y="6428232"/>
+            <a:ext cx="10972800" cy="228600"/>
           </a:xfrm>
           <a:prstGeom prst="rect">
             <a:avLst/>
@@ -4962,369 +4846,13 @@
           <a:lstStyle/>
           <a:p>
             <a:r>
-              <a:rPr sz="900">
-                <a:solidFill>
-                  <a:srgbClr val="A7B2C2"/>
+              <a:rPr sz="800">
+                <a:solidFill>
+                  <a:srgbClr val="9496A1"/>
                 </a:solidFill>
                 <a:latin typeface="Consolas"/>
               </a:rPr>
-              <a:t>Source: Stillform science sheet + app instrumentation model</a:t>
-            </a:r>
-          </a:p>
-        </p:txBody>
-      </p:sp>
-    </p:spTree>
-  </p:cSld>
-  <p:clrMapOvr>
-    <a:masterClrMapping/>
-  </p:clrMapOvr>
-</p:sld>
-</file>
-
-<file path=ppt/slides/slide10.xml><?xml version="1.0" encoding="utf-8"?>
-<p:sld xmlns:a="http://schemas.openxmlformats.org/drawingml/2006/main" xmlns:p="http://schemas.openxmlformats.org/presentationml/2006/main" xmlns:r="http://schemas.openxmlformats.org/officeDocument/2006/relationships">
-  <p:cSld>
-    <p:bg>
-      <p:bgPr>
-        <a:solidFill>
-          <a:srgbClr val="0A0D13"/>
-        </a:solidFill>
-        <a:effectLst/>
-      </p:bgPr>
-    </p:bg>
-    <p:spTree>
-      <p:nvGrpSpPr>
-        <p:cNvPr id="1" name=""/>
-        <p:cNvGrpSpPr/>
-        <p:nvPr/>
-      </p:nvGrpSpPr>
-      <p:grpSpPr/>
-      <p:sp>
-        <p:nvSpPr>
-          <p:cNvPr id="2" name="Rectangle 1"/>
-          <p:cNvSpPr/>
-          <p:nvPr/>
-        </p:nvSpPr>
-        <p:spPr>
-          <a:xfrm>
-            <a:off x="0" y="0"/>
-            <a:ext cx="12191695" cy="347472"/>
-          </a:xfrm>
-          <a:prstGeom prst="rect">
-            <a:avLst/>
-          </a:prstGeom>
-          <a:solidFill>
-            <a:srgbClr val="131924"/>
-          </a:solidFill>
-          <a:ln>
-            <a:noFill/>
-          </a:ln>
-        </p:spPr>
-        <p:style>
-          <a:lnRef idx="1">
-            <a:schemeClr val="accent1"/>
-          </a:lnRef>
-          <a:fillRef idx="3">
-            <a:schemeClr val="accent1"/>
-          </a:fillRef>
-          <a:effectRef idx="2">
-            <a:schemeClr val="accent1"/>
-          </a:effectRef>
-          <a:fontRef idx="minor">
-            <a:schemeClr val="lt1"/>
-          </a:fontRef>
-        </p:style>
-        <p:txBody>
-          <a:bodyPr rtlCol="0" anchor="ctr"/>
-          <a:lstStyle/>
-          <a:p>
-            <a:pPr algn="ctr"/>
-          </a:p>
-        </p:txBody>
-      </p:sp>
-      <p:sp>
-        <p:nvSpPr>
-          <p:cNvPr id="3" name="TextBox 2"/>
-          <p:cNvSpPr txBox="1"/>
-          <p:nvPr/>
-        </p:nvSpPr>
-        <p:spPr>
-          <a:xfrm>
-            <a:off x="512064" y="109728"/>
-            <a:ext cx="7772400" cy="182880"/>
-          </a:xfrm>
-          <a:prstGeom prst="rect">
-            <a:avLst/>
-          </a:prstGeom>
-          <a:noFill/>
-        </p:spPr>
-        <p:txBody>
-          <a:bodyPr wrap="none">
-            <a:spAutoFit/>
-          </a:bodyPr>
-          <a:lstStyle/>
-          <a:p>
-            <a:r>
-              <a:rPr sz="900">
-                <a:solidFill>
-                  <a:srgbClr val="EBAB4A"/>
-                </a:solidFill>
-                <a:latin typeface="Consolas"/>
-              </a:rPr>
-              <a:t>STILLFORM · APPLIED SCIENCE DECK</a:t>
-            </a:r>
-          </a:p>
-        </p:txBody>
-      </p:sp>
-      <p:sp>
-        <p:nvSpPr>
-          <p:cNvPr id="4" name="TextBox 3"/>
-          <p:cNvSpPr txBox="1"/>
-          <p:nvPr/>
-        </p:nvSpPr>
-        <p:spPr>
-          <a:xfrm>
-            <a:off x="10241280" y="109728"/>
-            <a:ext cx="1463040" cy="182880"/>
-          </a:xfrm>
-          <a:prstGeom prst="rect">
-            <a:avLst/>
-          </a:prstGeom>
-          <a:noFill/>
-        </p:spPr>
-        <p:txBody>
-          <a:bodyPr wrap="none">
-            <a:spAutoFit/>
-          </a:bodyPr>
-          <a:lstStyle/>
-          <a:p>
-            <a:pPr algn="r"/>
-            <a:r>
-              <a:rPr sz="900">
-                <a:solidFill>
-                  <a:srgbClr val="A7B2C2"/>
-                </a:solidFill>
-                <a:latin typeface="Consolas"/>
-              </a:rPr>
-              <a:t>10 / 10</a:t>
-            </a:r>
-          </a:p>
-        </p:txBody>
-      </p:sp>
-      <p:sp>
-        <p:nvSpPr>
-          <p:cNvPr id="5" name="TextBox 4"/>
-          <p:cNvSpPr txBox="1"/>
-          <p:nvPr/>
-        </p:nvSpPr>
-        <p:spPr>
-          <a:xfrm>
-            <a:off x="640080" y="658368"/>
-            <a:ext cx="10972800" cy="1097280"/>
-          </a:xfrm>
-          <a:prstGeom prst="rect">
-            <a:avLst/>
-          </a:prstGeom>
-          <a:noFill/>
-        </p:spPr>
-        <p:txBody>
-          <a:bodyPr wrap="none">
-            <a:spAutoFit/>
-          </a:bodyPr>
-          <a:lstStyle/>
-          <a:p>
-            <a:r>
-              <a:rPr sz="4000" b="1">
-                <a:solidFill>
-                  <a:srgbClr val="ECF0F5"/>
-                </a:solidFill>
-                <a:latin typeface="Calibri"/>
-              </a:rPr>
-              <a:t>Closing Thesis</a:t>
-            </a:r>
-          </a:p>
-        </p:txBody>
-      </p:sp>
-      <p:sp>
-        <p:nvSpPr>
-          <p:cNvPr id="6" name="TextBox 5"/>
-          <p:cNvSpPr txBox="1"/>
-          <p:nvPr/>
-        </p:nvSpPr>
-        <p:spPr>
-          <a:xfrm>
-            <a:off x="676656" y="1481328"/>
-            <a:ext cx="10927080" cy="411480"/>
-          </a:xfrm>
-          <a:prstGeom prst="rect">
-            <a:avLst/>
-          </a:prstGeom>
-          <a:noFill/>
-        </p:spPr>
-        <p:txBody>
-          <a:bodyPr wrap="none">
-            <a:spAutoFit/>
-          </a:bodyPr>
-          <a:lstStyle/>
-          <a:p>
-            <a:r>
-              <a:rPr sz="1600">
-                <a:solidFill>
-                  <a:srgbClr val="A7B2C2"/>
-                </a:solidFill>
-                <a:latin typeface="Calibri"/>
-              </a:rPr>
-              <a:t>Applied science -&gt; composure skill -&gt; better decisions</a:t>
-            </a:r>
-          </a:p>
-        </p:txBody>
-      </p:sp>
-      <p:sp>
-        <p:nvSpPr>
-          <p:cNvPr id="7" name="Rounded Rectangle 6"/>
-          <p:cNvSpPr/>
-          <p:nvPr/>
-        </p:nvSpPr>
-        <p:spPr>
-          <a:xfrm>
-            <a:off x="822960" y="2011680"/>
-            <a:ext cx="10561320" cy="3840480"/>
-          </a:xfrm>
-          <a:prstGeom prst="roundRect">
-            <a:avLst/>
-          </a:prstGeom>
-          <a:solidFill>
-            <a:srgbClr val="131924"/>
-          </a:solidFill>
-          <a:ln w="13970">
-            <a:solidFill>
-              <a:srgbClr val="3B4557"/>
-            </a:solidFill>
-          </a:ln>
-        </p:spPr>
-        <p:style>
-          <a:lnRef idx="1">
-            <a:schemeClr val="accent1"/>
-          </a:lnRef>
-          <a:fillRef idx="3">
-            <a:schemeClr val="accent1"/>
-          </a:fillRef>
-          <a:effectRef idx="2">
-            <a:schemeClr val="accent1"/>
-          </a:effectRef>
-          <a:fontRef idx="minor">
-            <a:schemeClr val="lt1"/>
-          </a:fontRef>
-        </p:style>
-        <p:txBody>
-          <a:bodyPr rtlCol="0" anchor="ctr"/>
-          <a:lstStyle/>
-          <a:p>
-            <a:pPr algn="ctr"/>
-          </a:p>
-        </p:txBody>
-      </p:sp>
-      <p:sp>
-        <p:nvSpPr>
-          <p:cNvPr id="8" name="TextBox 7"/>
-          <p:cNvSpPr txBox="1"/>
-          <p:nvPr/>
-        </p:nvSpPr>
-        <p:spPr>
-          <a:xfrm>
-            <a:off x="1234440" y="2468880"/>
-            <a:ext cx="9875520" cy="3063240"/>
-          </a:xfrm>
-          <a:prstGeom prst="rect">
-            <a:avLst/>
-          </a:prstGeom>
-          <a:noFill/>
-        </p:spPr>
-        <p:txBody>
-          <a:bodyPr wrap="none">
-            <a:spAutoFit/>
-          </a:bodyPr>
-          <a:lstStyle/>
-          <a:p>
-            <a:pPr>
-              <a:spcAft>
-                <a:spcPts val="900"/>
-              </a:spcAft>
-              <a:defRPr sz="2900" b="1">
-                <a:solidFill>
-                  <a:srgbClr val="ECF0F5"/>
-                </a:solidFill>
-                <a:latin typeface="Calibri"/>
-              </a:defRPr>
-            </a:pPr>
-            <a:r>
-              <a:t>Stillform is not psychiatric treatment software.</a:t>
-            </a:r>
-          </a:p>
-          <a:p>
-            <a:pPr>
-              <a:spcAft>
-                <a:spcPts val="900"/>
-              </a:spcAft>
-              <a:defRPr sz="2400" b="1">
-                <a:solidFill>
-                  <a:srgbClr val="ECF0F5"/>
-                </a:solidFill>
-                <a:latin typeface="Calibri"/>
-              </a:defRPr>
-            </a:pPr>
-            <a:r>
-              <a:t>It is a composure and self-awareness training system.</a:t>
-            </a:r>
-          </a:p>
-          <a:p>
-            <a:pPr>
-              <a:spcAft>
-                <a:spcPts val="900"/>
-              </a:spcAft>
-              <a:defRPr sz="2400" b="1">
-                <a:solidFill>
-                  <a:srgbClr val="ECF0F5"/>
-                </a:solidFill>
-                <a:latin typeface="Calibri"/>
-              </a:defRPr>
-            </a:pPr>
-            <a:r>
-              <a:t>The science is applied through daily loops, state-aware interventions, and measurable behavior shift.</a:t>
-            </a:r>
-          </a:p>
-        </p:txBody>
-      </p:sp>
-      <p:sp>
-        <p:nvSpPr>
-          <p:cNvPr id="9" name="TextBox 8"/>
-          <p:cNvSpPr txBox="1"/>
-          <p:nvPr/>
-        </p:nvSpPr>
-        <p:spPr>
-          <a:xfrm>
-            <a:off x="685800" y="6464808"/>
-            <a:ext cx="10972800" cy="219456"/>
-          </a:xfrm>
-          <a:prstGeom prst="rect">
-            <a:avLst/>
-          </a:prstGeom>
-          <a:noFill/>
-        </p:spPr>
-        <p:txBody>
-          <a:bodyPr wrap="none">
-            <a:spAutoFit/>
-          </a:bodyPr>
-          <a:lstStyle/>
-          <a:p>
-            <a:r>
-              <a:rPr sz="900">
-                <a:solidFill>
-                  <a:srgbClr val="A7B2C2"/>
-                </a:solidFill>
-                <a:latin typeface="Consolas"/>
-              </a:rPr>
-              <a:t>Source: Stillform applied-science model (metacognition, EQ, composure, impulsivity, microbias)</a:t>
+              <a:t>Source: Stillform science sheet + App.jsx telemetry model</a:t>
             </a:r>
           </a:p>
         </p:txBody>
@@ -5343,7 +4871,7 @@
     <p:bg>
       <p:bgPr>
         <a:solidFill>
-          <a:srgbClr val="0A0D13"/>
+          <a:srgbClr val="0A0A0C"/>
         </a:solidFill>
         <a:effectLst/>
       </p:bgPr>
@@ -5364,13 +4892,13 @@
         <p:spPr>
           <a:xfrm>
             <a:off x="0" y="0"/>
-            <a:ext cx="12191695" cy="347472"/>
+            <a:ext cx="12191695" cy="329184"/>
           </a:xfrm>
           <a:prstGeom prst="rect">
             <a:avLst/>
           </a:prstGeom>
           <a:solidFill>
-            <a:srgbClr val="131924"/>
+            <a:srgbClr val="141418"/>
           </a:solidFill>
           <a:ln>
             <a:noFill/>
@@ -5406,8 +4934,8 @@
         </p:nvSpPr>
         <p:spPr>
           <a:xfrm>
-            <a:off x="512064" y="109728"/>
-            <a:ext cx="7772400" cy="182880"/>
+            <a:off x="502920" y="100584"/>
+            <a:ext cx="7315200" cy="182880"/>
           </a:xfrm>
           <a:prstGeom prst="rect">
             <a:avLst/>
@@ -5421,13 +4949,13 @@
           <a:lstStyle/>
           <a:p>
             <a:r>
-              <a:rPr sz="900">
-                <a:solidFill>
-                  <a:srgbClr val="EBAB4A"/>
+              <a:rPr sz="850">
+                <a:solidFill>
+                  <a:srgbClr val="C8922A"/>
                 </a:solidFill>
                 <a:latin typeface="Consolas"/>
               </a:rPr>
-              <a:t>STILLFORM · APPLIED SCIENCE DECK</a:t>
+              <a:t>STILLFORM · APPLIED SCIENCE BRIEF</a:t>
             </a:r>
           </a:p>
         </p:txBody>
@@ -5440,8 +4968,8 @@
         </p:nvSpPr>
         <p:spPr>
           <a:xfrm>
-            <a:off x="10241280" y="109728"/>
-            <a:ext cx="1463040" cy="182880"/>
+            <a:off x="10149840" y="100584"/>
+            <a:ext cx="1554480" cy="182880"/>
           </a:xfrm>
           <a:prstGeom prst="rect">
             <a:avLst/>
@@ -5456,13 +4984,13 @@
           <a:p>
             <a:pPr algn="r"/>
             <a:r>
-              <a:rPr sz="900">
-                <a:solidFill>
-                  <a:srgbClr val="A7B2C2"/>
+              <a:rPr sz="850">
+                <a:solidFill>
+                  <a:srgbClr val="9496A1"/>
                 </a:solidFill>
                 <a:latin typeface="Consolas"/>
               </a:rPr>
-              <a:t>02 / 10</a:t>
+              <a:t>02 / 09</a:t>
             </a:r>
           </a:p>
         </p:txBody>
@@ -5475,8 +5003,8 @@
         </p:nvSpPr>
         <p:spPr>
           <a:xfrm>
-            <a:off x="640080" y="658368"/>
-            <a:ext cx="10972800" cy="1097280"/>
+            <a:off x="640080" y="640080"/>
+            <a:ext cx="10972800" cy="1005840"/>
           </a:xfrm>
           <a:prstGeom prst="rect">
             <a:avLst/>
@@ -5490,13 +5018,13 @@
           <a:lstStyle/>
           <a:p>
             <a:r>
-              <a:rPr sz="4000" b="1">
-                <a:solidFill>
-                  <a:srgbClr val="ECF0F5"/>
+              <a:rPr sz="3600" b="1">
+                <a:solidFill>
+                  <a:srgbClr val="E8EAF0"/>
                 </a:solidFill>
                 <a:latin typeface="Calibri"/>
               </a:rPr>
-              <a:t>Global Composure Context</a:t>
+              <a:t>Global Context</a:t>
             </a:r>
           </a:p>
         </p:txBody>
@@ -5509,8 +5037,8 @@
         </p:nvSpPr>
         <p:spPr>
           <a:xfrm>
-            <a:off x="676656" y="1481328"/>
-            <a:ext cx="10927080" cy="411480"/>
+            <a:off x="658368" y="1417320"/>
+            <a:ext cx="10972800" cy="365760"/>
           </a:xfrm>
           <a:prstGeom prst="rect">
             <a:avLst/>
@@ -5524,37 +5052,37 @@
           <a:lstStyle/>
           <a:p>
             <a:r>
-              <a:rPr sz="1600">
-                <a:solidFill>
-                  <a:srgbClr val="A7B2C2"/>
+              <a:rPr sz="1400">
+                <a:solidFill>
+                  <a:srgbClr val="9496A1"/>
                 </a:solidFill>
                 <a:latin typeface="Calibri"/>
               </a:rPr>
-              <a:t>Pressure is high; capacity is uneven</a:t>
-            </a:r>
-          </a:p>
-        </p:txBody>
-      </p:sp>
-      <p:sp>
-        <p:nvSpPr>
-          <p:cNvPr id="7" name="Rounded Rectangle 6"/>
+              <a:t>Pressure remains high; composure capacity is uneven</a:t>
+            </a:r>
+          </a:p>
+        </p:txBody>
+      </p:sp>
+      <p:sp>
+        <p:nvSpPr>
+          <p:cNvPr id="7" name="Rectangle 6"/>
           <p:cNvSpPr/>
           <p:nvPr/>
         </p:nvSpPr>
         <p:spPr>
           <a:xfrm>
-            <a:off x="685800" y="1920240"/>
-            <a:ext cx="5486400" cy="4251960"/>
-          </a:xfrm>
-          <a:prstGeom prst="roundRect">
+            <a:off x="685800" y="1874519"/>
+            <a:ext cx="5440680" cy="4297680"/>
+          </a:xfrm>
+          <a:prstGeom prst="rect">
             <a:avLst/>
           </a:prstGeom>
           <a:solidFill>
-            <a:srgbClr val="131924"/>
+            <a:srgbClr val="141418"/>
           </a:solidFill>
-          <a:ln w="13970">
+          <a:ln w="11430">
             <a:solidFill>
-              <a:srgbClr val="3B4557"/>
+              <a:srgbClr val="3D3E47"/>
             </a:solidFill>
           </a:ln>
         </p:spPr>
@@ -5589,8 +5117,8 @@
           <p:nvPr/>
         </p:nvGraphicFramePr>
         <p:xfrm>
-          <a:off x="914400" y="2331720"/>
-          <a:ext cx="5074920" cy="3611880"/>
+          <a:off x="914400" y="2240280"/>
+          <a:ext cx="4983480" cy="3611880"/>
         </p:xfrm>
         <a:graphic>
           <a:graphicData uri="http://schemas.openxmlformats.org/drawingml/2006/chart">
@@ -5600,24 +5128,24 @@
       </p:graphicFrame>
       <p:sp>
         <p:nvSpPr>
-          <p:cNvPr id="9" name="Rounded Rectangle 8"/>
+          <p:cNvPr id="9" name="Rectangle 8"/>
           <p:cNvSpPr/>
           <p:nvPr/>
         </p:nvSpPr>
         <p:spPr>
           <a:xfrm>
-            <a:off x="6355080" y="1920240"/>
-            <a:ext cx="5349240" cy="4251960"/>
-          </a:xfrm>
-          <a:prstGeom prst="roundRect">
+            <a:off x="6355080" y="1874519"/>
+            <a:ext cx="5349240" cy="4297680"/>
+          </a:xfrm>
+          <a:prstGeom prst="rect">
             <a:avLst/>
           </a:prstGeom>
           <a:solidFill>
-            <a:srgbClr val="131924"/>
+            <a:srgbClr val="141418"/>
           </a:solidFill>
-          <a:ln w="13970">
+          <a:ln w="11430">
             <a:solidFill>
-              <a:srgbClr val="3B4557"/>
+              <a:srgbClr val="3D3E47"/>
             </a:solidFill>
           </a:ln>
         </p:spPr>
@@ -5652,8 +5180,8 @@
           <p:nvPr/>
         </p:nvGraphicFramePr>
         <p:xfrm>
-          <a:off x="6583680" y="2331720"/>
-          <a:ext cx="4937760" cy="3611880"/>
+          <a:off x="6583680" y="2240280"/>
+          <a:ext cx="4892040" cy="3611880"/>
         </p:xfrm>
         <a:graphic>
           <a:graphicData uri="http://schemas.openxmlformats.org/drawingml/2006/chart">
@@ -5669,8 +5197,8 @@
         </p:nvSpPr>
         <p:spPr>
           <a:xfrm>
-            <a:off x="685800" y="6464808"/>
-            <a:ext cx="10972800" cy="219456"/>
+            <a:off x="685800" y="6428232"/>
+            <a:ext cx="10972800" cy="228600"/>
           </a:xfrm>
           <a:prstGeom prst="rect">
             <a:avLst/>
@@ -5684,9 +5212,9 @@
           <a:lstStyle/>
           <a:p>
             <a:r>
-              <a:rPr sz="900">
-                <a:solidFill>
-                  <a:srgbClr val="A7B2C2"/>
+              <a:rPr sz="800">
+                <a:solidFill>
+                  <a:srgbClr val="9496A1"/>
                 </a:solidFill>
                 <a:latin typeface="Consolas"/>
               </a:rPr>
@@ -5709,7 +5237,7 @@
     <p:bg>
       <p:bgPr>
         <a:solidFill>
-          <a:srgbClr val="0A0D13"/>
+          <a:srgbClr val="0A0A0C"/>
         </a:solidFill>
         <a:effectLst/>
       </p:bgPr>
@@ -5730,13 +5258,13 @@
         <p:spPr>
           <a:xfrm>
             <a:off x="0" y="0"/>
-            <a:ext cx="12191695" cy="347472"/>
+            <a:ext cx="12191695" cy="329184"/>
           </a:xfrm>
           <a:prstGeom prst="rect">
             <a:avLst/>
           </a:prstGeom>
           <a:solidFill>
-            <a:srgbClr val="131924"/>
+            <a:srgbClr val="141418"/>
           </a:solidFill>
           <a:ln>
             <a:noFill/>
@@ -5772,8 +5300,8 @@
         </p:nvSpPr>
         <p:spPr>
           <a:xfrm>
-            <a:off x="512064" y="109728"/>
-            <a:ext cx="7772400" cy="182880"/>
+            <a:off x="502920" y="100584"/>
+            <a:ext cx="7315200" cy="182880"/>
           </a:xfrm>
           <a:prstGeom prst="rect">
             <a:avLst/>
@@ -5787,13 +5315,13 @@
           <a:lstStyle/>
           <a:p>
             <a:r>
-              <a:rPr sz="900">
-                <a:solidFill>
-                  <a:srgbClr val="EBAB4A"/>
+              <a:rPr sz="850">
+                <a:solidFill>
+                  <a:srgbClr val="C8922A"/>
                 </a:solidFill>
                 <a:latin typeface="Consolas"/>
               </a:rPr>
-              <a:t>STILLFORM · APPLIED SCIENCE DECK</a:t>
+              <a:t>STILLFORM · APPLIED SCIENCE BRIEF</a:t>
             </a:r>
           </a:p>
         </p:txBody>
@@ -5806,8 +5334,8 @@
         </p:nvSpPr>
         <p:spPr>
           <a:xfrm>
-            <a:off x="10241280" y="109728"/>
-            <a:ext cx="1463040" cy="182880"/>
+            <a:off x="10149840" y="100584"/>
+            <a:ext cx="1554480" cy="182880"/>
           </a:xfrm>
           <a:prstGeom prst="rect">
             <a:avLst/>
@@ -5822,13 +5350,13 @@
           <a:p>
             <a:pPr algn="r"/>
             <a:r>
-              <a:rPr sz="900">
-                <a:solidFill>
-                  <a:srgbClr val="A7B2C2"/>
+              <a:rPr sz="850">
+                <a:solidFill>
+                  <a:srgbClr val="9496A1"/>
                 </a:solidFill>
                 <a:latin typeface="Consolas"/>
               </a:rPr>
-              <a:t>03 / 10</a:t>
+              <a:t>03 / 09</a:t>
             </a:r>
           </a:p>
         </p:txBody>
@@ -5841,8 +5369,8 @@
         </p:nvSpPr>
         <p:spPr>
           <a:xfrm>
-            <a:off x="640080" y="658368"/>
-            <a:ext cx="10972800" cy="1097280"/>
+            <a:off x="640080" y="640080"/>
+            <a:ext cx="10972800" cy="1005840"/>
           </a:xfrm>
           <a:prstGeom prst="rect">
             <a:avLst/>
@@ -5856,13 +5384,13 @@
           <a:lstStyle/>
           <a:p>
             <a:r>
-              <a:rPr sz="4000" b="1">
-                <a:solidFill>
-                  <a:srgbClr val="ECF0F5"/>
+              <a:rPr sz="3600" b="1">
+                <a:solidFill>
+                  <a:srgbClr val="E8EAF0"/>
                 </a:solidFill>
                 <a:latin typeface="Calibri"/>
               </a:rPr>
-              <a:t>Applied Science Map</a:t>
+              <a:t>How Stillform Works</a:t>
             </a:r>
           </a:p>
         </p:txBody>
@@ -5875,8 +5403,8 @@
         </p:nvSpPr>
         <p:spPr>
           <a:xfrm>
-            <a:off x="676656" y="1481328"/>
-            <a:ext cx="10927080" cy="411480"/>
+            <a:off x="658368" y="1417320"/>
+            <a:ext cx="10972800" cy="365760"/>
           </a:xfrm>
           <a:prstGeom prst="rect">
             <a:avLst/>
@@ -5890,13 +5418,13 @@
           <a:lstStyle/>
           <a:p>
             <a:r>
-              <a:rPr sz="1600">
-                <a:solidFill>
-                  <a:srgbClr val="A7B2C2"/>
+              <a:rPr sz="1400">
+                <a:solidFill>
+                  <a:srgbClr val="9496A1"/>
                 </a:solidFill>
                 <a:latin typeface="Calibri"/>
               </a:rPr>
-              <a:t>Domain -&gt; global issue -&gt; Stillform mechanism -&gt; telemetry</a:t>
+              <a:t>Applied science -&gt; mechanism -&gt; signal</a:t>
             </a:r>
           </a:p>
         </p:txBody>
@@ -5920,10 +5448,10 @@
                 <a:tableStyleId>{5C22544A-7EE6-4342-B048-85BDC9FD1C3A}</a:tableStyleId>
               </a:tblPr>
               <a:tblGrid>
-                <a:gridCol w="1828800"/>
-                <a:gridCol w="3017520"/>
-                <a:gridCol w="3063240"/>
-                <a:gridCol w="3154680"/>
+                <a:gridCol w="1920240"/>
+                <a:gridCol w="2926080"/>
+                <a:gridCol w="3291840"/>
+                <a:gridCol w="2926080"/>
               </a:tblGrid>
               <a:tr h="754380">
                 <a:tc>
@@ -5932,9 +5460,9 @@
                     <a:lstStyle/>
                     <a:p>
                       <a:r>
-                        <a:rPr sz="1100" b="1">
+                        <a:rPr sz="1000" b="1">
                           <a:solidFill>
-                            <a:srgbClr val="EBAB4A"/>
+                            <a:srgbClr val="C8922A"/>
                           </a:solidFill>
                           <a:latin typeface="Calibri"/>
                         </a:rPr>
@@ -5944,7 +5472,7 @@
                   </a:txBody>
                   <a:tcPr>
                     <a:solidFill>
-                      <a:srgbClr val="131924"/>
+                      <a:srgbClr val="141418"/>
                     </a:solidFill>
                   </a:tcPr>
                 </a:tc>
@@ -5954,19 +5482,19 @@
                     <a:lstStyle/>
                     <a:p>
                       <a:r>
-                        <a:rPr sz="1100" b="1">
+                        <a:rPr sz="1000" b="1">
                           <a:solidFill>
-                            <a:srgbClr val="EBAB4A"/>
+                            <a:srgbClr val="C8922A"/>
                           </a:solidFill>
                           <a:latin typeface="Calibri"/>
                         </a:rPr>
-                        <a:t>Global issue context</a:t>
+                        <a:t>Issue</a:t>
                       </a:r>
                     </a:p>
                   </a:txBody>
                   <a:tcPr>
                     <a:solidFill>
-                      <a:srgbClr val="131924"/>
+                      <a:srgbClr val="141418"/>
                     </a:solidFill>
                   </a:tcPr>
                 </a:tc>
@@ -5976,9 +5504,9 @@
                     <a:lstStyle/>
                     <a:p>
                       <a:r>
-                        <a:rPr sz="1100" b="1">
+                        <a:rPr sz="1000" b="1">
                           <a:solidFill>
-                            <a:srgbClr val="EBAB4A"/>
+                            <a:srgbClr val="C8922A"/>
                           </a:solidFill>
                           <a:latin typeface="Calibri"/>
                         </a:rPr>
@@ -5988,7 +5516,7 @@
                   </a:txBody>
                   <a:tcPr>
                     <a:solidFill>
-                      <a:srgbClr val="131924"/>
+                      <a:srgbClr val="141418"/>
                     </a:solidFill>
                   </a:tcPr>
                 </a:tc>
@@ -5998,9 +5526,9 @@
                     <a:lstStyle/>
                     <a:p>
                       <a:r>
-                        <a:rPr sz="1100" b="1">
+                        <a:rPr sz="1000" b="1">
                           <a:solidFill>
-                            <a:srgbClr val="EBAB4A"/>
+                            <a:srgbClr val="C8922A"/>
                           </a:solidFill>
                           <a:latin typeface="Calibri"/>
                         </a:rPr>
@@ -6010,7 +5538,7 @@
                   </a:txBody>
                   <a:tcPr>
                     <a:solidFill>
-                      <a:srgbClr val="131924"/>
+                      <a:srgbClr val="141418"/>
                     </a:solidFill>
                   </a:tcPr>
                 </a:tc>
@@ -6022,9 +5550,9 @@
                     <a:lstStyle/>
                     <a:p>
                       <a:r>
-                        <a:rPr sz="1000" b="0">
+                        <a:rPr sz="950" b="0">
                           <a:solidFill>
-                            <a:srgbClr val="ECF0F5"/>
+                            <a:srgbClr val="E8EAF0"/>
                           </a:solidFill>
                           <a:latin typeface="Calibri"/>
                         </a:rPr>
@@ -6034,7 +5562,7 @@
                   </a:txBody>
                   <a:tcPr>
                     <a:solidFill>
-                      <a:srgbClr val="0A0D13"/>
+                      <a:srgbClr val="0A0A0C"/>
                     </a:solidFill>
                   </a:tcPr>
                 </a:tc>
@@ -6044,19 +5572,19 @@
                     <a:lstStyle/>
                     <a:p>
                       <a:r>
-                        <a:rPr sz="1000" b="0">
+                        <a:rPr sz="950" b="0">
                           <a:solidFill>
-                            <a:srgbClr val="ECF0F5"/>
+                            <a:srgbClr val="E8EAF0"/>
                           </a:solidFill>
                           <a:latin typeface="Calibri"/>
                         </a:rPr>
-                        <a:t>High worry/stress narrows cognitive monitoring</a:t>
+                        <a:t>High stress narrows self-monitoring</a:t>
                       </a:r>
                     </a:p>
                   </a:txBody>
                   <a:tcPr>
                     <a:solidFill>
-                      <a:srgbClr val="0A0D13"/>
+                      <a:srgbClr val="0A0A0C"/>
                     </a:solidFill>
                   </a:tcPr>
                 </a:tc>
@@ -6066,19 +5594,19 @@
                     <a:lstStyle/>
                     <a:p>
                       <a:r>
-                        <a:rPr sz="1000" b="0">
+                        <a:rPr sz="950" b="0">
                           <a:solidFill>
-                            <a:srgbClr val="ECF0F5"/>
+                            <a:srgbClr val="E8EAF0"/>
                           </a:solidFill>
                           <a:latin typeface="Calibri"/>
                         </a:rPr>
-                        <a:t>Pulse labeling + Reframe pattern reflection</a:t>
+                        <a:t>Affect labeling + pattern reflection</a:t>
                       </a:r>
                     </a:p>
                   </a:txBody>
                   <a:tcPr>
                     <a:solidFill>
-                      <a:srgbClr val="0A0D13"/>
+                      <a:srgbClr val="0A0A0C"/>
                     </a:solidFill>
                   </a:tcPr>
                 </a:tc>
@@ -6088,19 +5616,19 @@
                     <a:lstStyle/>
                     <a:p>
                       <a:r>
-                        <a:rPr sz="1000" b="0">
+                        <a:rPr sz="950" b="0">
                           <a:solidFill>
-                            <a:srgbClr val="ECF0F5"/>
+                            <a:srgbClr val="E8EAF0"/>
                           </a:solidFill>
                           <a:latin typeface="Calibri"/>
                         </a:rPr>
-                        <a:t>Pre/post composure delta trend</a:t>
+                        <a:t>Pre/post composure shift</a:t>
                       </a:r>
                     </a:p>
                   </a:txBody>
                   <a:tcPr>
                     <a:solidFill>
-                      <a:srgbClr val="0A0D13"/>
+                      <a:srgbClr val="0A0A0C"/>
                     </a:solidFill>
                   </a:tcPr>
                 </a:tc>
@@ -6112,9 +5640,9 @@
                     <a:lstStyle/>
                     <a:p>
                       <a:r>
-                        <a:rPr sz="1000" b="0">
+                        <a:rPr sz="950" b="0">
                           <a:solidFill>
-                            <a:srgbClr val="ECF0F5"/>
+                            <a:srgbClr val="E8EAF0"/>
                           </a:solidFill>
                           <a:latin typeface="Calibri"/>
                         </a:rPr>
@@ -6124,7 +5652,7 @@
                   </a:txBody>
                   <a:tcPr>
                     <a:solidFill>
-                      <a:srgbClr val="1B222F"/>
+                      <a:srgbClr val="1A1A1F"/>
                     </a:solidFill>
                   </a:tcPr>
                 </a:tc>
@@ -6134,19 +5662,19 @@
                     <a:lstStyle/>
                     <a:p>
                       <a:r>
-                        <a:rPr sz="1000" b="0">
+                        <a:rPr sz="950" b="0">
                           <a:solidFill>
-                            <a:srgbClr val="ECF0F5"/>
+                            <a:srgbClr val="E8EAF0"/>
                           </a:solidFill>
                           <a:latin typeface="Calibri"/>
                         </a:rPr>
-                        <a:t>Interpersonal reads degrade under load</a:t>
+                        <a:t>State noise distorts social reads</a:t>
                       </a:r>
                     </a:p>
                   </a:txBody>
                   <a:tcPr>
                     <a:solidFill>
-                      <a:srgbClr val="1B222F"/>
+                      <a:srgbClr val="1A1A1F"/>
                     </a:solidFill>
                   </a:tcPr>
                 </a:tc>
@@ -6156,19 +5684,19 @@
                     <a:lstStyle/>
                     <a:p>
                       <a:r>
-                        <a:rPr sz="1000" b="0">
+                        <a:rPr sz="950" b="0">
                           <a:solidFill>
-                            <a:srgbClr val="ECF0F5"/>
+                            <a:srgbClr val="E8EAF0"/>
                           </a:solidFill>
                           <a:latin typeface="Calibri"/>
                         </a:rPr>
-                        <a:t>Bio-filter + interpersonal microbias prompts</a:t>
+                        <a:t>Bio-filter + microbias prompting</a:t>
                       </a:r>
                     </a:p>
                   </a:txBody>
                   <a:tcPr>
                     <a:solidFill>
-                      <a:srgbClr val="1B222F"/>
+                      <a:srgbClr val="1A1A1F"/>
                     </a:solidFill>
                   </a:tcPr>
                 </a:tc>
@@ -6178,19 +5706,19 @@
                     <a:lstStyle/>
                     <a:p>
                       <a:r>
-                        <a:rPr sz="1000" b="0">
+                        <a:rPr sz="950" b="0">
                           <a:solidFill>
-                            <a:srgbClr val="ECF0F5"/>
+                            <a:srgbClr val="E8EAF0"/>
                           </a:solidFill>
                           <a:latin typeface="Calibri"/>
                         </a:rPr>
-                        <a:t>Conflict-triggered session outcomes</a:t>
+                        <a:t>Conflict-loop reduction</a:t>
                       </a:r>
                     </a:p>
                   </a:txBody>
                   <a:tcPr>
                     <a:solidFill>
-                      <a:srgbClr val="1B222F"/>
+                      <a:srgbClr val="1A1A1F"/>
                     </a:solidFill>
                   </a:tcPr>
                 </a:tc>
@@ -6202,9 +5730,9 @@
                     <a:lstStyle/>
                     <a:p>
                       <a:r>
-                        <a:rPr sz="1000" b="0">
+                        <a:rPr sz="950" b="0">
                           <a:solidFill>
-                            <a:srgbClr val="ECF0F5"/>
+                            <a:srgbClr val="E8EAF0"/>
                           </a:solidFill>
                           <a:latin typeface="Calibri"/>
                         </a:rPr>
@@ -6214,7 +5742,7 @@
                   </a:txBody>
                   <a:tcPr>
                     <a:solidFill>
-                      <a:srgbClr val="0A0D13"/>
+                      <a:srgbClr val="0A0A0C"/>
                     </a:solidFill>
                   </a:tcPr>
                 </a:tc>
@@ -6224,19 +5752,19 @@
                     <a:lstStyle/>
                     <a:p>
                       <a:r>
-                        <a:rPr sz="1000" b="0">
+                        <a:rPr sz="950" b="0">
                           <a:solidFill>
-                            <a:srgbClr val="ECF0F5"/>
+                            <a:srgbClr val="E8EAF0"/>
                           </a:solidFill>
                           <a:latin typeface="Calibri"/>
                         </a:rPr>
-                        <a:t>Daily regulation instability</a:t>
+                        <a:t>Inconsistent daily regulation</a:t>
                       </a:r>
                     </a:p>
                   </a:txBody>
                   <a:tcPr>
                     <a:solidFill>
-                      <a:srgbClr val="0A0D13"/>
+                      <a:srgbClr val="0A0A0C"/>
                     </a:solidFill>
                   </a:tcPr>
                 </a:tc>
@@ -6246,19 +5774,19 @@
                     <a:lstStyle/>
                     <a:p>
                       <a:r>
-                        <a:rPr sz="1000" b="0">
+                        <a:rPr sz="950" b="0">
                           <a:solidFill>
-                            <a:srgbClr val="ECF0F5"/>
+                            <a:srgbClr val="E8EAF0"/>
                           </a:solidFill>
                           <a:latin typeface="Calibri"/>
                         </a:rPr>
-                        <a:t>Morning baseline + intervention + EOD close</a:t>
+                        <a:t>Morning baseline + EOD close</a:t>
                       </a:r>
                     </a:p>
                   </a:txBody>
                   <a:tcPr>
                     <a:solidFill>
-                      <a:srgbClr val="0A0D13"/>
+                      <a:srgbClr val="0A0A0C"/>
                     </a:solidFill>
                   </a:tcPr>
                 </a:tc>
@@ -6268,9 +5796,9 @@
                     <a:lstStyle/>
                     <a:p>
                       <a:r>
-                        <a:rPr sz="1000" b="0">
+                        <a:rPr sz="950" b="0">
                           <a:solidFill>
-                            <a:srgbClr val="ECF0F5"/>
+                            <a:srgbClr val="E8EAF0"/>
                           </a:solidFill>
                           <a:latin typeface="Calibri"/>
                         </a:rPr>
@@ -6280,7 +5808,7 @@
                   </a:txBody>
                   <a:tcPr>
                     <a:solidFill>
-                      <a:srgbClr val="0A0D13"/>
+                      <a:srgbClr val="0A0A0C"/>
                     </a:solidFill>
                   </a:tcPr>
                 </a:tc>
@@ -6292,9 +5820,9 @@
                     <a:lstStyle/>
                     <a:p>
                       <a:r>
-                        <a:rPr sz="1000" b="0">
+                        <a:rPr sz="950" b="0">
                           <a:solidFill>
-                            <a:srgbClr val="ECF0F5"/>
+                            <a:srgbClr val="E8EAF0"/>
                           </a:solidFill>
                           <a:latin typeface="Calibri"/>
                         </a:rPr>
@@ -6304,7 +5832,7 @@
                   </a:txBody>
                   <a:tcPr>
                     <a:solidFill>
-                      <a:srgbClr val="1B222F"/>
+                      <a:srgbClr val="1A1A1F"/>
                     </a:solidFill>
                   </a:tcPr>
                 </a:tc>
@@ -6314,19 +5842,19 @@
                     <a:lstStyle/>
                     <a:p>
                       <a:r>
-                        <a:rPr sz="1000" b="0">
+                        <a:rPr sz="950" b="0">
                           <a:solidFill>
-                            <a:srgbClr val="ECF0F5"/>
+                            <a:srgbClr val="E8EAF0"/>
                           </a:solidFill>
                           <a:latin typeface="Calibri"/>
                         </a:rPr>
-                        <a:t>Fast state -&gt; fast action errors</a:t>
+                        <a:t>Fast state -&gt; fast reactions</a:t>
                       </a:r>
                     </a:p>
                   </a:txBody>
                   <a:tcPr>
                     <a:solidFill>
-                      <a:srgbClr val="1B222F"/>
+                      <a:srgbClr val="1A1A1F"/>
                     </a:solidFill>
                   </a:tcPr>
                 </a:tc>
@@ -6336,19 +5864,19 @@
                     <a:lstStyle/>
                     <a:p>
                       <a:r>
-                        <a:rPr sz="1000" b="0">
+                        <a:rPr sz="950" b="0">
                           <a:solidFill>
-                            <a:srgbClr val="ECF0F5"/>
+                            <a:srgbClr val="E8EAF0"/>
                           </a:solidFill>
                           <a:latin typeface="Calibri"/>
                         </a:rPr>
-                        <a:t>Somatic interrupt + default pathway routing</a:t>
+                        <a:t>Somatic interrupt + default pathway</a:t>
                       </a:r>
                     </a:p>
                   </a:txBody>
                   <a:tcPr>
                     <a:solidFill>
-                      <a:srgbClr val="1B222F"/>
+                      <a:srgbClr val="1A1A1F"/>
                     </a:solidFill>
                   </a:tcPr>
                 </a:tc>
@@ -6358,19 +5886,19 @@
                     <a:lstStyle/>
                     <a:p>
                       <a:r>
-                        <a:rPr sz="1000" b="0">
+                        <a:rPr sz="950" b="0">
                           <a:solidFill>
-                            <a:srgbClr val="ECF0F5"/>
+                            <a:srgbClr val="E8EAF0"/>
                           </a:solidFill>
                           <a:latin typeface="Calibri"/>
                         </a:rPr>
-                        <a:t>Time-to-stabilization, post-rating gain</a:t>
+                        <a:t>Time-to-stabilization</a:t>
                       </a:r>
                     </a:p>
                   </a:txBody>
                   <a:tcPr>
                     <a:solidFill>
-                      <a:srgbClr val="1B222F"/>
+                      <a:srgbClr val="1A1A1F"/>
                     </a:solidFill>
                   </a:tcPr>
                 </a:tc>
@@ -6382,19 +5910,19 @@
                     <a:lstStyle/>
                     <a:p>
                       <a:r>
-                        <a:rPr sz="1000" b="0">
+                        <a:rPr sz="950" b="0">
                           <a:solidFill>
-                            <a:srgbClr val="ECF0F5"/>
+                            <a:srgbClr val="E8EAF0"/>
                           </a:solidFill>
                           <a:latin typeface="Calibri"/>
                         </a:rPr>
-                        <a:t>Microbias conflict</a:t>
+                        <a:t>Microbias</a:t>
                       </a:r>
                     </a:p>
                   </a:txBody>
                   <a:tcPr>
                     <a:solidFill>
-                      <a:srgbClr val="0A0D13"/>
+                      <a:srgbClr val="0A0A0C"/>
                     </a:solidFill>
                   </a:tcPr>
                 </a:tc>
@@ -6404,19 +5932,19 @@
                     <a:lstStyle/>
                     <a:p>
                       <a:r>
-                        <a:rPr sz="1000" b="0">
+                        <a:rPr sz="950" b="0">
                           <a:solidFill>
-                            <a:srgbClr val="ECF0F5"/>
+                            <a:srgbClr val="E8EAF0"/>
                           </a:solidFill>
                           <a:latin typeface="Calibri"/>
                         </a:rPr>
-                        <a:t>20-30% overread of others' negative intensity</a:t>
+                        <a:t>20-30% overread of negative intensity</a:t>
                       </a:r>
                     </a:p>
                   </a:txBody>
                   <a:tcPr>
                     <a:solidFill>
-                      <a:srgbClr val="0A0D13"/>
+                      <a:srgbClr val="0A0A0C"/>
                     </a:solidFill>
                   </a:tcPr>
                 </a:tc>
@@ -6426,19 +5954,19 @@
                     <a:lstStyle/>
                     <a:p>
                       <a:r>
-                        <a:rPr sz="1000" b="0">
+                        <a:rPr sz="950" b="0">
                           <a:solidFill>
-                            <a:srgbClr val="ECF0F5"/>
+                            <a:srgbClr val="E8EAF0"/>
                           </a:solidFill>
                           <a:latin typeface="Calibri"/>
                         </a:rPr>
-                        <a:t>Bias detection (projection/attribution/contagion)</a:t>
+                        <a:t>Projection/attribution checks</a:t>
                       </a:r>
                     </a:p>
                   </a:txBody>
                   <a:tcPr>
                     <a:solidFill>
-                      <a:srgbClr val="0A0D13"/>
+                      <a:srgbClr val="0A0A0C"/>
                     </a:solidFill>
                   </a:tcPr>
                 </a:tc>
@@ -6448,19 +5976,19 @@
                     <a:lstStyle/>
                     <a:p>
                       <a:r>
-                        <a:rPr sz="1000" b="0">
+                        <a:rPr sz="950" b="0">
                           <a:solidFill>
-                            <a:srgbClr val="ECF0F5"/>
+                            <a:srgbClr val="E8EAF0"/>
                           </a:solidFill>
                           <a:latin typeface="Calibri"/>
                         </a:rPr>
-                        <a:t>Bias-tag recurrence reduction</a:t>
+                        <a:t>Bias-tag recurrence trend</a:t>
                       </a:r>
                     </a:p>
                   </a:txBody>
                   <a:tcPr>
                     <a:solidFill>
-                      <a:srgbClr val="0A0D13"/>
+                      <a:srgbClr val="0A0A0C"/>
                     </a:solidFill>
                   </a:tcPr>
                 </a:tc>
@@ -6477,8 +6005,8 @@
         </p:nvSpPr>
         <p:spPr>
           <a:xfrm>
-            <a:off x="685800" y="6464808"/>
-            <a:ext cx="10972800" cy="219456"/>
+            <a:off x="685800" y="6428232"/>
+            <a:ext cx="10972800" cy="228600"/>
           </a:xfrm>
           <a:prstGeom prst="rect">
             <a:avLst/>
@@ -6492,13 +6020,13 @@
           <a:lstStyle/>
           <a:p>
             <a:r>
-              <a:rPr sz="900">
-                <a:solidFill>
-                  <a:srgbClr val="A7B2C2"/>
+              <a:rPr sz="800">
+                <a:solidFill>
+                  <a:srgbClr val="9496A1"/>
                 </a:solidFill>
                 <a:latin typeface="Consolas"/>
               </a:rPr>
-              <a:t>Source: Stillform science sheet; App.jsx loop, rating, and nudge telemetry</a:t>
+              <a:t>Source: Stillform science sheet + App.jsx loop/nudge/rating instrumentation</a:t>
             </a:r>
           </a:p>
         </p:txBody>
@@ -6517,7 +6045,7 @@
     <p:bg>
       <p:bgPr>
         <a:solidFill>
-          <a:srgbClr val="0A0D13"/>
+          <a:srgbClr val="0A0A0C"/>
         </a:solidFill>
         <a:effectLst/>
       </p:bgPr>
@@ -6538,13 +6066,13 @@
         <p:spPr>
           <a:xfrm>
             <a:off x="0" y="0"/>
-            <a:ext cx="12191695" cy="347472"/>
+            <a:ext cx="12191695" cy="329184"/>
           </a:xfrm>
           <a:prstGeom prst="rect">
             <a:avLst/>
           </a:prstGeom>
           <a:solidFill>
-            <a:srgbClr val="131924"/>
+            <a:srgbClr val="141418"/>
           </a:solidFill>
           <a:ln>
             <a:noFill/>
@@ -6580,8 +6108,8 @@
         </p:nvSpPr>
         <p:spPr>
           <a:xfrm>
-            <a:off x="512064" y="109728"/>
-            <a:ext cx="7772400" cy="182880"/>
+            <a:off x="502920" y="100584"/>
+            <a:ext cx="7315200" cy="182880"/>
           </a:xfrm>
           <a:prstGeom prst="rect">
             <a:avLst/>
@@ -6595,13 +6123,13 @@
           <a:lstStyle/>
           <a:p>
             <a:r>
-              <a:rPr sz="900">
-                <a:solidFill>
-                  <a:srgbClr val="EBAB4A"/>
+              <a:rPr sz="850">
+                <a:solidFill>
+                  <a:srgbClr val="C8922A"/>
                 </a:solidFill>
                 <a:latin typeface="Consolas"/>
               </a:rPr>
-              <a:t>STILLFORM · APPLIED SCIENCE DECK</a:t>
+              <a:t>STILLFORM · APPLIED SCIENCE BRIEF</a:t>
             </a:r>
           </a:p>
         </p:txBody>
@@ -6614,8 +6142,8 @@
         </p:nvSpPr>
         <p:spPr>
           <a:xfrm>
-            <a:off x="10241280" y="109728"/>
-            <a:ext cx="1463040" cy="182880"/>
+            <a:off x="10149840" y="100584"/>
+            <a:ext cx="1554480" cy="182880"/>
           </a:xfrm>
           <a:prstGeom prst="rect">
             <a:avLst/>
@@ -6630,13 +6158,13 @@
           <a:p>
             <a:pPr algn="r"/>
             <a:r>
-              <a:rPr sz="900">
-                <a:solidFill>
-                  <a:srgbClr val="A7B2C2"/>
+              <a:rPr sz="850">
+                <a:solidFill>
+                  <a:srgbClr val="9496A1"/>
                 </a:solidFill>
                 <a:latin typeface="Consolas"/>
               </a:rPr>
-              <a:t>04 / 10</a:t>
+              <a:t>04 / 09</a:t>
             </a:r>
           </a:p>
         </p:txBody>
@@ -6649,8 +6177,8 @@
         </p:nvSpPr>
         <p:spPr>
           <a:xfrm>
-            <a:off x="640080" y="658368"/>
-            <a:ext cx="10972800" cy="1097280"/>
+            <a:off x="640080" y="640080"/>
+            <a:ext cx="10972800" cy="1005840"/>
           </a:xfrm>
           <a:prstGeom prst="rect">
             <a:avLst/>
@@ -6664,9 +6192,9 @@
           <a:lstStyle/>
           <a:p>
             <a:r>
-              <a:rPr sz="4000" b="1">
-                <a:solidFill>
-                  <a:srgbClr val="ECF0F5"/>
+              <a:rPr sz="3600" b="1">
+                <a:solidFill>
+                  <a:srgbClr val="E8EAF0"/>
                 </a:solidFill>
                 <a:latin typeface="Calibri"/>
               </a:rPr>
@@ -6683,8 +6211,8 @@
         </p:nvSpPr>
         <p:spPr>
           <a:xfrm>
-            <a:off x="676656" y="1481328"/>
-            <a:ext cx="10927080" cy="411480"/>
+            <a:off x="658368" y="1417320"/>
+            <a:ext cx="10972800" cy="365760"/>
           </a:xfrm>
           <a:prstGeom prst="rect">
             <a:avLst/>
@@ -6698,37 +6226,37 @@
           <a:lstStyle/>
           <a:p>
             <a:r>
-              <a:rPr sz="1600">
-                <a:solidFill>
-                  <a:srgbClr val="A7B2C2"/>
+              <a:rPr sz="1400">
+                <a:solidFill>
+                  <a:srgbClr val="9496A1"/>
                 </a:solidFill>
                 <a:latin typeface="Calibri"/>
               </a:rPr>
-              <a:t>From unobserved state loops to monitored response choice</a:t>
-            </a:r>
-          </a:p>
-        </p:txBody>
-      </p:sp>
-      <p:sp>
-        <p:nvSpPr>
-          <p:cNvPr id="7" name="Rounded Rectangle 6"/>
+              <a:t>Converting unobserved emotion loops into monitored choices</a:t>
+            </a:r>
+          </a:p>
+        </p:txBody>
+      </p:sp>
+      <p:sp>
+        <p:nvSpPr>
+          <p:cNvPr id="7" name="Rectangle 6"/>
           <p:cNvSpPr/>
           <p:nvPr/>
         </p:nvSpPr>
         <p:spPr>
           <a:xfrm>
-            <a:off x="685800" y="1920240"/>
-            <a:ext cx="7406640" cy="4251960"/>
-          </a:xfrm>
-          <a:prstGeom prst="roundRect">
+            <a:off x="685800" y="1874519"/>
+            <a:ext cx="7223760" cy="4297680"/>
+          </a:xfrm>
+          <a:prstGeom prst="rect">
             <a:avLst/>
           </a:prstGeom>
           <a:solidFill>
-            <a:srgbClr val="131924"/>
+            <a:srgbClr val="141418"/>
           </a:solidFill>
-          <a:ln w="13970">
+          <a:ln w="11430">
             <a:solidFill>
-              <a:srgbClr val="3B4557"/>
+              <a:srgbClr val="3D3E47"/>
             </a:solidFill>
           </a:ln>
         </p:spPr>
@@ -6764,7 +6292,7 @@
         </p:nvGraphicFramePr>
         <p:xfrm>
           <a:off x="960120" y="2240280"/>
-          <a:ext cx="6903720" cy="3611880"/>
+          <a:ext cx="6720840" cy="3611880"/>
         </p:xfrm>
         <a:graphic>
           <a:graphicData uri="http://schemas.openxmlformats.org/drawingml/2006/chart">
@@ -6774,24 +6302,24 @@
       </p:graphicFrame>
       <p:sp>
         <p:nvSpPr>
-          <p:cNvPr id="9" name="Rounded Rectangle 8"/>
+          <p:cNvPr id="9" name="Rectangle 8"/>
           <p:cNvSpPr/>
           <p:nvPr/>
         </p:nvSpPr>
         <p:spPr>
           <a:xfrm>
-            <a:off x="8321040" y="1920240"/>
-            <a:ext cx="3383280" cy="4251960"/>
-          </a:xfrm>
-          <a:prstGeom prst="roundRect">
+            <a:off x="8183879" y="1874519"/>
+            <a:ext cx="3520440" cy="4297680"/>
+          </a:xfrm>
+          <a:prstGeom prst="rect">
             <a:avLst/>
           </a:prstGeom>
           <a:solidFill>
-            <a:srgbClr val="131924"/>
+            <a:srgbClr val="1A1A1F"/>
           </a:solidFill>
-          <a:ln w="13970">
+          <a:ln w="11430">
             <a:solidFill>
-              <a:srgbClr val="3B4557"/>
+              <a:srgbClr val="3D3E47"/>
             </a:solidFill>
           </a:ln>
         </p:spPr>
@@ -6825,8 +6353,8 @@
         </p:nvSpPr>
         <p:spPr>
           <a:xfrm>
-            <a:off x="8595360" y="2240280"/>
-            <a:ext cx="2926080" cy="1417320"/>
+            <a:off x="8348471" y="2039111"/>
+            <a:ext cx="3200400" cy="3977640"/>
           </a:xfrm>
           <a:prstGeom prst="rect">
             <a:avLst/>
@@ -6840,24 +6368,61 @@
           <a:lstStyle/>
           <a:p>
             <a:r>
-              <a:rPr sz="1000">
-                <a:solidFill>
-                  <a:srgbClr val="A7B2C2"/>
-                </a:solidFill>
-                <a:latin typeface="Consolas"/>
-              </a:rPr>
-              <a:t>CORE MECHANISM</a:t>
-            </a:r>
-          </a:p>
-          <a:p>
-            <a:r>
-              <a:rPr sz="3400" b="1">
-                <a:solidFill>
-                  <a:srgbClr val="629FF6"/>
+              <a:rPr sz="1500" b="1">
+                <a:solidFill>
+                  <a:srgbClr val="C8922A"/>
                 </a:solidFill>
                 <a:latin typeface="Calibri"/>
               </a:rPr>
-              <a:t>Affect labeling</a:t>
+              <a:t>How this works in-app</a:t>
+            </a:r>
+          </a:p>
+          <a:p>
+            <a:pPr>
+              <a:spcAft>
+                <a:spcPts val="600"/>
+              </a:spcAft>
+              <a:defRPr sz="1200">
+                <a:solidFill>
+                  <a:srgbClr val="E8EAF0"/>
+                </a:solidFill>
+                <a:latin typeface="Calibri"/>
+              </a:defRPr>
+            </a:pPr>
+            <a:r>
+              <a:t>Pulse emotion chips perform affect labeling.</a:t>
+            </a:r>
+          </a:p>
+          <a:p>
+            <a:pPr>
+              <a:spcAft>
+                <a:spcPts val="600"/>
+              </a:spcAft>
+              <a:defRPr sz="1200">
+                <a:solidFill>
+                  <a:srgbClr val="E8EAF0"/>
+                </a:solidFill>
+                <a:latin typeface="Calibri"/>
+              </a:defRPr>
+            </a:pPr>
+            <a:r>
+              <a:t>Reframe reflects patterns back as operational language.</a:t>
+            </a:r>
+          </a:p>
+          <a:p>
+            <a:pPr>
+              <a:spcAft>
+                <a:spcPts val="600"/>
+              </a:spcAft>
+              <a:defRPr sz="1200">
+                <a:solidFill>
+                  <a:srgbClr val="E8EAF0"/>
+                </a:solidFill>
+                <a:latin typeface="Calibri"/>
+              </a:defRPr>
+            </a:pPr>
+            <a:r>
+              <a:t>Output target: clearer next-action selection under load.</a:t>
             </a:r>
           </a:p>
         </p:txBody>
@@ -6870,8 +6435,8 @@
         </p:nvSpPr>
         <p:spPr>
           <a:xfrm>
-            <a:off x="8595360" y="3429000"/>
-            <a:ext cx="2926080" cy="1417320"/>
+            <a:off x="685800" y="6428232"/>
+            <a:ext cx="10972800" cy="228600"/>
           </a:xfrm>
           <a:prstGeom prst="rect">
             <a:avLst/>
@@ -6885,103 +6450,13 @@
           <a:lstStyle/>
           <a:p>
             <a:r>
-              <a:rPr sz="1000">
-                <a:solidFill>
-                  <a:srgbClr val="A7B2C2"/>
+              <a:rPr sz="800">
+                <a:solidFill>
+                  <a:srgbClr val="9496A1"/>
                 </a:solidFill>
                 <a:latin typeface="Consolas"/>
               </a:rPr>
-              <a:t>TOOL</a:t>
-            </a:r>
-          </a:p>
-          <a:p>
-            <a:r>
-              <a:rPr sz="3400" b="1">
-                <a:solidFill>
-                  <a:srgbClr val="65BF95"/>
-                </a:solidFill>
-                <a:latin typeface="Calibri"/>
-              </a:rPr>
-              <a:t>Pulse + Reframe</a:t>
-            </a:r>
-          </a:p>
-        </p:txBody>
-      </p:sp>
-      <p:sp>
-        <p:nvSpPr>
-          <p:cNvPr id="12" name="TextBox 11"/>
-          <p:cNvSpPr txBox="1"/>
-          <p:nvPr/>
-        </p:nvSpPr>
-        <p:spPr>
-          <a:xfrm>
-            <a:off x="8595360" y="4572000"/>
-            <a:ext cx="2926080" cy="1417320"/>
-          </a:xfrm>
-          <a:prstGeom prst="rect">
-            <a:avLst/>
-          </a:prstGeom>
-          <a:noFill/>
-        </p:spPr>
-        <p:txBody>
-          <a:bodyPr wrap="none">
-            <a:spAutoFit/>
-          </a:bodyPr>
-          <a:lstStyle/>
-          <a:p>
-            <a:r>
-              <a:rPr sz="1000">
-                <a:solidFill>
-                  <a:srgbClr val="A7B2C2"/>
-                </a:solidFill>
-                <a:latin typeface="Consolas"/>
-              </a:rPr>
-              <a:t>OUTCOME</a:t>
-            </a:r>
-          </a:p>
-          <a:p>
-            <a:r>
-              <a:rPr sz="3400" b="1">
-                <a:solidFill>
-                  <a:srgbClr val="EBAB4A"/>
-                </a:solidFill>
-                <a:latin typeface="Calibri"/>
-              </a:rPr>
-              <a:t>Clearer choices</a:t>
-            </a:r>
-          </a:p>
-        </p:txBody>
-      </p:sp>
-      <p:sp>
-        <p:nvSpPr>
-          <p:cNvPr id="13" name="TextBox 12"/>
-          <p:cNvSpPr txBox="1"/>
-          <p:nvPr/>
-        </p:nvSpPr>
-        <p:spPr>
-          <a:xfrm>
-            <a:off x="685800" y="6464808"/>
-            <a:ext cx="10972800" cy="219456"/>
-          </a:xfrm>
-          <a:prstGeom prst="rect">
-            <a:avLst/>
-          </a:prstGeom>
-          <a:noFill/>
-        </p:spPr>
-        <p:txBody>
-          <a:bodyPr wrap="none">
-            <a:spAutoFit/>
-          </a:bodyPr>
-          <a:lstStyle/>
-          <a:p>
-            <a:r>
-              <a:rPr sz="900">
-                <a:solidFill>
-                  <a:srgbClr val="A7B2C2"/>
-                </a:solidFill>
-                <a:latin typeface="Consolas"/>
-              </a:rPr>
-              <a:t>Source: Flavell 1979; Lieberman 2007; Torre &amp; Lieberman 2018; Gallup 2024</a:t>
+              <a:t>Source: Flavell 1979; Lieberman 2007; Torre &amp; Lieberman 2018</a:t>
             </a:r>
           </a:p>
         </p:txBody>
@@ -7000,7 +6475,7 @@
     <p:bg>
       <p:bgPr>
         <a:solidFill>
-          <a:srgbClr val="0A0D13"/>
+          <a:srgbClr val="0A0A0C"/>
         </a:solidFill>
         <a:effectLst/>
       </p:bgPr>
@@ -7021,13 +6496,13 @@
         <p:spPr>
           <a:xfrm>
             <a:off x="0" y="0"/>
-            <a:ext cx="12191695" cy="347472"/>
+            <a:ext cx="12191695" cy="329184"/>
           </a:xfrm>
           <a:prstGeom prst="rect">
             <a:avLst/>
           </a:prstGeom>
           <a:solidFill>
-            <a:srgbClr val="131924"/>
+            <a:srgbClr val="141418"/>
           </a:solidFill>
           <a:ln>
             <a:noFill/>
@@ -7063,8 +6538,8 @@
         </p:nvSpPr>
         <p:spPr>
           <a:xfrm>
-            <a:off x="512064" y="109728"/>
-            <a:ext cx="7772400" cy="182880"/>
+            <a:off x="502920" y="100584"/>
+            <a:ext cx="7315200" cy="182880"/>
           </a:xfrm>
           <a:prstGeom prst="rect">
             <a:avLst/>
@@ -7078,13 +6553,13 @@
           <a:lstStyle/>
           <a:p>
             <a:r>
-              <a:rPr sz="900">
-                <a:solidFill>
-                  <a:srgbClr val="EBAB4A"/>
+              <a:rPr sz="850">
+                <a:solidFill>
+                  <a:srgbClr val="C8922A"/>
                 </a:solidFill>
                 <a:latin typeface="Consolas"/>
               </a:rPr>
-              <a:t>STILLFORM · APPLIED SCIENCE DECK</a:t>
+              <a:t>STILLFORM · APPLIED SCIENCE BRIEF</a:t>
             </a:r>
           </a:p>
         </p:txBody>
@@ -7097,8 +6572,8 @@
         </p:nvSpPr>
         <p:spPr>
           <a:xfrm>
-            <a:off x="10241280" y="109728"/>
-            <a:ext cx="1463040" cy="182880"/>
+            <a:off x="10149840" y="100584"/>
+            <a:ext cx="1554480" cy="182880"/>
           </a:xfrm>
           <a:prstGeom prst="rect">
             <a:avLst/>
@@ -7113,13 +6588,13 @@
           <a:p>
             <a:pPr algn="r"/>
             <a:r>
-              <a:rPr sz="900">
-                <a:solidFill>
-                  <a:srgbClr val="A7B2C2"/>
+              <a:rPr sz="850">
+                <a:solidFill>
+                  <a:srgbClr val="9496A1"/>
                 </a:solidFill>
                 <a:latin typeface="Consolas"/>
               </a:rPr>
-              <a:t>05 / 10</a:t>
+              <a:t>05 / 09</a:t>
             </a:r>
           </a:p>
         </p:txBody>
@@ -7132,8 +6607,8 @@
         </p:nvSpPr>
         <p:spPr>
           <a:xfrm>
-            <a:off x="640080" y="658368"/>
-            <a:ext cx="10972800" cy="1097280"/>
+            <a:off x="640080" y="640080"/>
+            <a:ext cx="10972800" cy="1005840"/>
           </a:xfrm>
           <a:prstGeom prst="rect">
             <a:avLst/>
@@ -7147,9 +6622,9 @@
           <a:lstStyle/>
           <a:p>
             <a:r>
-              <a:rPr sz="4000" b="1">
-                <a:solidFill>
-                  <a:srgbClr val="ECF0F5"/>
+              <a:rPr sz="3600" b="1">
+                <a:solidFill>
+                  <a:srgbClr val="E8EAF0"/>
                 </a:solidFill>
                 <a:latin typeface="Calibri"/>
               </a:rPr>
@@ -7166,8 +6641,8 @@
         </p:nvSpPr>
         <p:spPr>
           <a:xfrm>
-            <a:off x="676656" y="1481328"/>
-            <a:ext cx="10927080" cy="411480"/>
+            <a:off x="658368" y="1417320"/>
+            <a:ext cx="10972800" cy="365760"/>
           </a:xfrm>
           <a:prstGeom prst="rect">
             <a:avLst/>
@@ -7181,37 +6656,37 @@
           <a:lstStyle/>
           <a:p>
             <a:r>
-              <a:rPr sz="1600">
-                <a:solidFill>
-                  <a:srgbClr val="A7B2C2"/>
+              <a:rPr sz="1400">
+                <a:solidFill>
+                  <a:srgbClr val="9496A1"/>
                 </a:solidFill>
                 <a:latin typeface="Calibri"/>
               </a:rPr>
-              <a:t>When state is noisy, social interpretation gets distorted</a:t>
-            </a:r>
-          </a:p>
-        </p:txBody>
-      </p:sp>
-      <p:sp>
-        <p:nvSpPr>
-          <p:cNvPr id="7" name="Rounded Rectangle 6"/>
+              <a:t>Reducing projection and attribution errors before they escalate</a:t>
+            </a:r>
+          </a:p>
+        </p:txBody>
+      </p:sp>
+      <p:sp>
+        <p:nvSpPr>
+          <p:cNvPr id="7" name="Rectangle 6"/>
           <p:cNvSpPr/>
           <p:nvPr/>
         </p:nvSpPr>
         <p:spPr>
           <a:xfrm>
-            <a:off x="685800" y="1920240"/>
-            <a:ext cx="7406640" cy="4251960"/>
-          </a:xfrm>
-          <a:prstGeom prst="roundRect">
+            <a:off x="685800" y="1874519"/>
+            <a:ext cx="7223760" cy="4297680"/>
+          </a:xfrm>
+          <a:prstGeom prst="rect">
             <a:avLst/>
           </a:prstGeom>
           <a:solidFill>
-            <a:srgbClr val="131924"/>
+            <a:srgbClr val="141418"/>
           </a:solidFill>
-          <a:ln w="13970">
+          <a:ln w="11430">
             <a:solidFill>
-              <a:srgbClr val="3B4557"/>
+              <a:srgbClr val="3D3E47"/>
             </a:solidFill>
           </a:ln>
         </p:spPr>
@@ -7247,7 +6722,7 @@
         </p:nvGraphicFramePr>
         <p:xfrm>
           <a:off x="960120" y="2240280"/>
-          <a:ext cx="6903720" cy="3611880"/>
+          <a:ext cx="6720840" cy="3611880"/>
         </p:xfrm>
         <a:graphic>
           <a:graphicData uri="http://schemas.openxmlformats.org/drawingml/2006/chart">
@@ -7257,24 +6732,24 @@
       </p:graphicFrame>
       <p:sp>
         <p:nvSpPr>
-          <p:cNvPr id="9" name="Rounded Rectangle 8"/>
+          <p:cNvPr id="9" name="Rectangle 8"/>
           <p:cNvSpPr/>
           <p:nvPr/>
         </p:nvSpPr>
         <p:spPr>
           <a:xfrm>
-            <a:off x="8321040" y="1920240"/>
-            <a:ext cx="3383280" cy="4251960"/>
-          </a:xfrm>
-          <a:prstGeom prst="roundRect">
+            <a:off x="8183879" y="1874519"/>
+            <a:ext cx="3520440" cy="4297680"/>
+          </a:xfrm>
+          <a:prstGeom prst="rect">
             <a:avLst/>
           </a:prstGeom>
           <a:solidFill>
-            <a:srgbClr val="131924"/>
+            <a:srgbClr val="1A1A1F"/>
           </a:solidFill>
-          <a:ln w="13970">
+          <a:ln w="11430">
             <a:solidFill>
-              <a:srgbClr val="3B4557"/>
+              <a:srgbClr val="3D3E47"/>
             </a:solidFill>
           </a:ln>
         </p:spPr>
@@ -7308,8 +6783,8 @@
         </p:nvSpPr>
         <p:spPr>
           <a:xfrm>
-            <a:off x="8595360" y="2240280"/>
-            <a:ext cx="2926080" cy="3566160"/>
+            <a:off x="8348471" y="2039111"/>
+            <a:ext cx="3200400" cy="3977640"/>
           </a:xfrm>
           <a:prstGeom prst="rect">
             <a:avLst/>
@@ -7322,51 +6797,62 @@
           </a:bodyPr>
           <a:lstStyle/>
           <a:p>
+            <a:r>
+              <a:rPr sz="1500" b="1">
+                <a:solidFill>
+                  <a:srgbClr val="C8922A"/>
+                </a:solidFill>
+                <a:latin typeface="Calibri"/>
+              </a:rPr>
+              <a:t>How this works in-app</a:t>
+            </a:r>
+          </a:p>
+          <a:p>
             <a:pPr>
               <a:spcAft>
-                <a:spcPts val="800"/>
+                <a:spcPts val="600"/>
               </a:spcAft>
-              <a:defRPr sz="1600" b="1">
-                <a:solidFill>
-                  <a:srgbClr val="ECF0F5"/>
+              <a:defRPr sz="1200">
+                <a:solidFill>
+                  <a:srgbClr val="E8EAF0"/>
                 </a:solidFill>
                 <a:latin typeface="Calibri"/>
               </a:defRPr>
             </a:pPr>
             <a:r>
-              <a:t>Stillform applies one bias check at a time:</a:t>
+              <a:t>Bio-filter tags depleted hardware states first.</a:t>
             </a:r>
           </a:p>
           <a:p>
             <a:pPr>
               <a:spcAft>
-                <a:spcPts val="800"/>
+                <a:spcPts val="600"/>
               </a:spcAft>
-              <a:defRPr sz="1600" b="0">
-                <a:solidFill>
-                  <a:srgbClr val="ECF0F5"/>
+              <a:defRPr sz="1200">
+                <a:solidFill>
+                  <a:srgbClr val="E8EAF0"/>
                 </a:solidFill>
                 <a:latin typeface="Calibri"/>
               </a:defRPr>
             </a:pPr>
             <a:r>
-              <a:t>projection, attribution, contagion, impact gap, intensity amplification.</a:t>
+              <a:t>Reframe applies one microbias correction at a time.</a:t>
             </a:r>
           </a:p>
           <a:p>
             <a:pPr>
               <a:spcAft>
-                <a:spcPts val="800"/>
+                <a:spcPts val="600"/>
               </a:spcAft>
-              <a:defRPr sz="1600" b="0">
-                <a:solidFill>
-                  <a:srgbClr val="ECF0F5"/>
+              <a:defRPr sz="1200">
+                <a:solidFill>
+                  <a:srgbClr val="E8EAF0"/>
                 </a:solidFill>
                 <a:latin typeface="Calibri"/>
               </a:defRPr>
             </a:pPr>
             <a:r>
-              <a:t>Goal: reduce reactive conflict reads and improve decision tone.</a:t>
+              <a:t>Goal: lower reactive conflict interpretation errors.</a:t>
             </a:r>
           </a:p>
         </p:txBody>
@@ -7379,8 +6865,8 @@
         </p:nvSpPr>
         <p:spPr>
           <a:xfrm>
-            <a:off x="685800" y="6464808"/>
-            <a:ext cx="10972800" cy="219456"/>
+            <a:off x="685800" y="6428232"/>
+            <a:ext cx="10972800" cy="228600"/>
           </a:xfrm>
           <a:prstGeom prst="rect">
             <a:avLst/>
@@ -7394,13 +6880,13 @@
           <a:lstStyle/>
           <a:p>
             <a:r>
-              <a:rPr sz="900">
-                <a:solidFill>
-                  <a:srgbClr val="A7B2C2"/>
+              <a:rPr sz="800">
+                <a:solidFill>
+                  <a:srgbClr val="9496A1"/>
                 </a:solidFill>
                 <a:latin typeface="Consolas"/>
               </a:rPr>
-              <a:t>Source: Stillform science sheet microbias section; Nature Communications 2025; Gallup 2024</a:t>
+              <a:t>Source: Stillform science sheet microbias section; Nature Communications 2025</a:t>
             </a:r>
           </a:p>
         </p:txBody>
@@ -7419,7 +6905,7 @@
     <p:bg>
       <p:bgPr>
         <a:solidFill>
-          <a:srgbClr val="0A0D13"/>
+          <a:srgbClr val="0A0A0C"/>
         </a:solidFill>
         <a:effectLst/>
       </p:bgPr>
@@ -7440,13 +6926,13 @@
         <p:spPr>
           <a:xfrm>
             <a:off x="0" y="0"/>
-            <a:ext cx="12191695" cy="347472"/>
+            <a:ext cx="12191695" cy="329184"/>
           </a:xfrm>
           <a:prstGeom prst="rect">
             <a:avLst/>
           </a:prstGeom>
           <a:solidFill>
-            <a:srgbClr val="131924"/>
+            <a:srgbClr val="141418"/>
           </a:solidFill>
           <a:ln>
             <a:noFill/>
@@ -7482,8 +6968,8 @@
         </p:nvSpPr>
         <p:spPr>
           <a:xfrm>
-            <a:off x="512064" y="109728"/>
-            <a:ext cx="7772400" cy="182880"/>
+            <a:off x="502920" y="100584"/>
+            <a:ext cx="7315200" cy="182880"/>
           </a:xfrm>
           <a:prstGeom prst="rect">
             <a:avLst/>
@@ -7497,13 +6983,13 @@
           <a:lstStyle/>
           <a:p>
             <a:r>
-              <a:rPr sz="900">
-                <a:solidFill>
-                  <a:srgbClr val="EBAB4A"/>
+              <a:rPr sz="850">
+                <a:solidFill>
+                  <a:srgbClr val="C8922A"/>
                 </a:solidFill>
                 <a:latin typeface="Consolas"/>
               </a:rPr>
-              <a:t>STILLFORM · APPLIED SCIENCE DECK</a:t>
+              <a:t>STILLFORM · APPLIED SCIENCE BRIEF</a:t>
             </a:r>
           </a:p>
         </p:txBody>
@@ -7516,8 +7002,8 @@
         </p:nvSpPr>
         <p:spPr>
           <a:xfrm>
-            <a:off x="10241280" y="109728"/>
-            <a:ext cx="1463040" cy="182880"/>
+            <a:off x="10149840" y="100584"/>
+            <a:ext cx="1554480" cy="182880"/>
           </a:xfrm>
           <a:prstGeom prst="rect">
             <a:avLst/>
@@ -7532,13 +7018,13 @@
           <a:p>
             <a:pPr algn="r"/>
             <a:r>
-              <a:rPr sz="900">
-                <a:solidFill>
-                  <a:srgbClr val="A7B2C2"/>
+              <a:rPr sz="850">
+                <a:solidFill>
+                  <a:srgbClr val="9496A1"/>
                 </a:solidFill>
                 <a:latin typeface="Consolas"/>
               </a:rPr>
-              <a:t>06 / 10</a:t>
+              <a:t>06 / 09</a:t>
             </a:r>
           </a:p>
         </p:txBody>
@@ -7551,8 +7037,8 @@
         </p:nvSpPr>
         <p:spPr>
           <a:xfrm>
-            <a:off x="640080" y="658368"/>
-            <a:ext cx="10972800" cy="1097280"/>
+            <a:off x="640080" y="640080"/>
+            <a:ext cx="10972800" cy="1005840"/>
           </a:xfrm>
           <a:prstGeom prst="rect">
             <a:avLst/>
@@ -7566,9 +7052,9 @@
           <a:lstStyle/>
           <a:p>
             <a:r>
-              <a:rPr sz="4000" b="1">
-                <a:solidFill>
-                  <a:srgbClr val="ECF0F5"/>
+              <a:rPr sz="3600" b="1">
+                <a:solidFill>
+                  <a:srgbClr val="E8EAF0"/>
                 </a:solidFill>
                 <a:latin typeface="Calibri"/>
               </a:rPr>
@@ -7585,8 +7071,8 @@
         </p:nvSpPr>
         <p:spPr>
           <a:xfrm>
-            <a:off x="676656" y="1481328"/>
-            <a:ext cx="10927080" cy="411480"/>
+            <a:off x="658368" y="1417320"/>
+            <a:ext cx="10972800" cy="365760"/>
           </a:xfrm>
           <a:prstGeom prst="rect">
             <a:avLst/>
@@ -7600,37 +7086,37 @@
           <a:lstStyle/>
           <a:p>
             <a:r>
-              <a:rPr sz="1600">
-                <a:solidFill>
-                  <a:srgbClr val="A7B2C2"/>
+              <a:rPr sz="1400">
+                <a:solidFill>
+                  <a:srgbClr val="9496A1"/>
                 </a:solidFill>
                 <a:latin typeface="Calibri"/>
               </a:rPr>
-              <a:t>High arousal + low monitoring increases reactive action risk</a:t>
-            </a:r>
-          </a:p>
-        </p:txBody>
-      </p:sp>
-      <p:sp>
-        <p:nvSpPr>
-          <p:cNvPr id="7" name="Rounded Rectangle 6"/>
+              <a:t>Interrupting fast-state reaction chains</a:t>
+            </a:r>
+          </a:p>
+        </p:txBody>
+      </p:sp>
+      <p:sp>
+        <p:nvSpPr>
+          <p:cNvPr id="7" name="Rectangle 6"/>
           <p:cNvSpPr/>
           <p:nvPr/>
         </p:nvSpPr>
         <p:spPr>
           <a:xfrm>
-            <a:off x="685800" y="1920240"/>
-            <a:ext cx="5486400" cy="4251960"/>
-          </a:xfrm>
-          <a:prstGeom prst="roundRect">
+            <a:off x="685800" y="1874519"/>
+            <a:ext cx="5440680" cy="4297680"/>
+          </a:xfrm>
+          <a:prstGeom prst="rect">
             <a:avLst/>
           </a:prstGeom>
           <a:solidFill>
-            <a:srgbClr val="131924"/>
+            <a:srgbClr val="141418"/>
           </a:solidFill>
-          <a:ln w="13970">
+          <a:ln w="11430">
             <a:solidFill>
-              <a:srgbClr val="3B4557"/>
+              <a:srgbClr val="3D3E47"/>
             </a:solidFill>
           </a:ln>
         </p:spPr>
@@ -7666,7 +7152,7 @@
         </p:nvGraphicFramePr>
         <p:xfrm>
           <a:off x="914400" y="2240280"/>
-          <a:ext cx="5074920" cy="3611880"/>
+          <a:ext cx="4983480" cy="3611880"/>
         </p:xfrm>
         <a:graphic>
           <a:graphicData uri="http://schemas.openxmlformats.org/drawingml/2006/chart">
@@ -7676,24 +7162,24 @@
       </p:graphicFrame>
       <p:sp>
         <p:nvSpPr>
-          <p:cNvPr id="9" name="Rounded Rectangle 8"/>
+          <p:cNvPr id="9" name="Rectangle 8"/>
           <p:cNvSpPr/>
           <p:nvPr/>
         </p:nvSpPr>
         <p:spPr>
           <a:xfrm>
-            <a:off x="6355080" y="1920240"/>
-            <a:ext cx="5349240" cy="4251960"/>
-          </a:xfrm>
-          <a:prstGeom prst="roundRect">
+            <a:off x="6355080" y="1874519"/>
+            <a:ext cx="5349240" cy="2057400"/>
+          </a:xfrm>
+          <a:prstGeom prst="rect">
             <a:avLst/>
           </a:prstGeom>
           <a:solidFill>
-            <a:srgbClr val="131924"/>
+            <a:srgbClr val="141418"/>
           </a:solidFill>
-          <a:ln w="13970">
+          <a:ln w="11430">
             <a:solidFill>
-              <a:srgbClr val="3B4557"/>
+              <a:srgbClr val="3D3E47"/>
             </a:solidFill>
           </a:ln>
         </p:spPr>
@@ -7728,8 +7214,8 @@
           <p:nvPr/>
         </p:nvGraphicFramePr>
         <p:xfrm>
-          <a:off x="6583680" y="2240280"/>
-          <a:ext cx="4937760" cy="3611880"/>
+          <a:off x="6583680" y="2103120"/>
+          <a:ext cx="4892040" cy="1600200"/>
         </p:xfrm>
         <a:graphic>
           <a:graphicData uri="http://schemas.openxmlformats.org/drawingml/2006/chart">
@@ -7739,14 +7225,59 @@
       </p:graphicFrame>
       <p:sp>
         <p:nvSpPr>
-          <p:cNvPr id="11" name="TextBox 10"/>
+          <p:cNvPr id="11" name="Rectangle 10"/>
+          <p:cNvSpPr/>
+          <p:nvPr/>
+        </p:nvSpPr>
+        <p:spPr>
+          <a:xfrm>
+            <a:off x="6355080" y="4114800"/>
+            <a:ext cx="5349240" cy="2057400"/>
+          </a:xfrm>
+          <a:prstGeom prst="rect">
+            <a:avLst/>
+          </a:prstGeom>
+          <a:solidFill>
+            <a:srgbClr val="1A1A1F"/>
+          </a:solidFill>
+          <a:ln w="11430">
+            <a:solidFill>
+              <a:srgbClr val="3D3E47"/>
+            </a:solidFill>
+          </a:ln>
+        </p:spPr>
+        <p:style>
+          <a:lnRef idx="1">
+            <a:schemeClr val="accent1"/>
+          </a:lnRef>
+          <a:fillRef idx="3">
+            <a:schemeClr val="accent1"/>
+          </a:fillRef>
+          <a:effectRef idx="2">
+            <a:schemeClr val="accent1"/>
+          </a:effectRef>
+          <a:fontRef idx="minor">
+            <a:schemeClr val="lt1"/>
+          </a:fontRef>
+        </p:style>
+        <p:txBody>
+          <a:bodyPr rtlCol="0" anchor="ctr"/>
+          <a:lstStyle/>
+          <a:p>
+            <a:pPr algn="ctr"/>
+          </a:p>
+        </p:txBody>
+      </p:sp>
+      <p:sp>
+        <p:nvSpPr>
+          <p:cNvPr id="12" name="TextBox 11"/>
           <p:cNvSpPr txBox="1"/>
           <p:nvPr/>
         </p:nvSpPr>
         <p:spPr>
           <a:xfrm>
-            <a:off x="685800" y="6464808"/>
-            <a:ext cx="10972800" cy="219456"/>
+            <a:off x="6519672" y="4279392"/>
+            <a:ext cx="5029200" cy="1737360"/>
           </a:xfrm>
           <a:prstGeom prst="rect">
             <a:avLst/>
@@ -7760,13 +7291,95 @@
           <a:lstStyle/>
           <a:p>
             <a:r>
-              <a:rPr sz="900">
-                <a:solidFill>
-                  <a:srgbClr val="A7B2C2"/>
+              <a:rPr sz="1500" b="1">
+                <a:solidFill>
+                  <a:srgbClr val="C8922A"/>
+                </a:solidFill>
+                <a:latin typeface="Calibri"/>
+              </a:rPr>
+              <a:t>How this works in-app</a:t>
+            </a:r>
+          </a:p>
+          <a:p>
+            <a:pPr>
+              <a:spcAft>
+                <a:spcPts val="600"/>
+              </a:spcAft>
+              <a:defRPr sz="1200">
+                <a:solidFill>
+                  <a:srgbClr val="E8EAF0"/>
+                </a:solidFill>
+                <a:latin typeface="Calibri"/>
+              </a:defRPr>
+            </a:pPr>
+            <a:r>
+              <a:t>Somatic interrupt catches rapid escalation in-session.</a:t>
+            </a:r>
+          </a:p>
+          <a:p>
+            <a:pPr>
+              <a:spcAft>
+                <a:spcPts val="600"/>
+              </a:spcAft>
+              <a:defRPr sz="1200">
+                <a:solidFill>
+                  <a:srgbClr val="E8EAF0"/>
+                </a:solidFill>
+                <a:latin typeface="Calibri"/>
+              </a:defRPr>
+            </a:pPr>
+            <a:r>
+              <a:t>Default pathway routing reduces decision lag under load.</a:t>
+            </a:r>
+          </a:p>
+          <a:p>
+            <a:pPr>
+              <a:spcAft>
+                <a:spcPts val="600"/>
+              </a:spcAft>
+              <a:defRPr sz="1200">
+                <a:solidFill>
+                  <a:srgbClr val="E8EAF0"/>
+                </a:solidFill>
+                <a:latin typeface="Calibri"/>
+              </a:defRPr>
+            </a:pPr>
+            <a:r>
+              <a:t>Target: reduce reactive action in high-pressure windows.</a:t>
+            </a:r>
+          </a:p>
+        </p:txBody>
+      </p:sp>
+      <p:sp>
+        <p:nvSpPr>
+          <p:cNvPr id="13" name="TextBox 12"/>
+          <p:cNvSpPr txBox="1"/>
+          <p:nvPr/>
+        </p:nvSpPr>
+        <p:spPr>
+          <a:xfrm>
+            <a:off x="685800" y="6428232"/>
+            <a:ext cx="10972800" cy="228600"/>
+          </a:xfrm>
+          <a:prstGeom prst="rect">
+            <a:avLst/>
+          </a:prstGeom>
+          <a:noFill/>
+        </p:spPr>
+        <p:txBody>
+          <a:bodyPr wrap="none">
+            <a:spAutoFit/>
+          </a:bodyPr>
+          <a:lstStyle/>
+          <a:p>
+            <a:r>
+              <a:rPr sz="800">
+                <a:solidFill>
+                  <a:srgbClr val="9496A1"/>
                 </a:solidFill>
                 <a:latin typeface="Consolas"/>
               </a:rPr>
-              <a:t>Source: Gallup/IEP unrest trend cited in Gallup 2025 report; Gallup 2024 daily stress/worry</a:t>
+              <a:t>Source: Gallup 2024/2025 context; Stillform somatic interrupt + routing logic</a:t>
             </a:r>
           </a:p>
         </p:txBody>
@@ -7785,7 +7398,7 @@
     <p:bg>
       <p:bgPr>
         <a:solidFill>
-          <a:srgbClr val="0A0D13"/>
+          <a:srgbClr val="0A0A0C"/>
         </a:solidFill>
         <a:effectLst/>
       </p:bgPr>
@@ -7806,13 +7419,13 @@
         <p:spPr>
           <a:xfrm>
             <a:off x="0" y="0"/>
-            <a:ext cx="12191695" cy="347472"/>
+            <a:ext cx="12191695" cy="329184"/>
           </a:xfrm>
           <a:prstGeom prst="rect">
             <a:avLst/>
           </a:prstGeom>
           <a:solidFill>
-            <a:srgbClr val="131924"/>
+            <a:srgbClr val="141418"/>
           </a:solidFill>
           <a:ln>
             <a:noFill/>
@@ -7848,8 +7461,8 @@
         </p:nvSpPr>
         <p:spPr>
           <a:xfrm>
-            <a:off x="512064" y="109728"/>
-            <a:ext cx="7772400" cy="182880"/>
+            <a:off x="502920" y="100584"/>
+            <a:ext cx="7315200" cy="182880"/>
           </a:xfrm>
           <a:prstGeom prst="rect">
             <a:avLst/>
@@ -7863,13 +7476,13 @@
           <a:lstStyle/>
           <a:p>
             <a:r>
-              <a:rPr sz="900">
-                <a:solidFill>
-                  <a:srgbClr val="EBAB4A"/>
+              <a:rPr sz="850">
+                <a:solidFill>
+                  <a:srgbClr val="C8922A"/>
                 </a:solidFill>
                 <a:latin typeface="Consolas"/>
               </a:rPr>
-              <a:t>STILLFORM · APPLIED SCIENCE DECK</a:t>
+              <a:t>STILLFORM · APPLIED SCIENCE BRIEF</a:t>
             </a:r>
           </a:p>
         </p:txBody>
@@ -7882,8 +7495,8 @@
         </p:nvSpPr>
         <p:spPr>
           <a:xfrm>
-            <a:off x="10241280" y="109728"/>
-            <a:ext cx="1463040" cy="182880"/>
+            <a:off x="10149840" y="100584"/>
+            <a:ext cx="1554480" cy="182880"/>
           </a:xfrm>
           <a:prstGeom prst="rect">
             <a:avLst/>
@@ -7898,13 +7511,13 @@
           <a:p>
             <a:pPr algn="r"/>
             <a:r>
-              <a:rPr sz="900">
-                <a:solidFill>
-                  <a:srgbClr val="A7B2C2"/>
+              <a:rPr sz="850">
+                <a:solidFill>
+                  <a:srgbClr val="9496A1"/>
                 </a:solidFill>
                 <a:latin typeface="Consolas"/>
               </a:rPr>
-              <a:t>07 / 10</a:t>
+              <a:t>07 / 09</a:t>
             </a:r>
           </a:p>
         </p:txBody>
@@ -7917,8 +7530,8 @@
         </p:nvSpPr>
         <p:spPr>
           <a:xfrm>
-            <a:off x="640080" y="658368"/>
-            <a:ext cx="10972800" cy="1097280"/>
+            <a:off x="640080" y="640080"/>
+            <a:ext cx="10972800" cy="1005840"/>
           </a:xfrm>
           <a:prstGeom prst="rect">
             <a:avLst/>
@@ -7932,13 +7545,13 @@
           <a:lstStyle/>
           <a:p>
             <a:r>
-              <a:rPr sz="4000" b="1">
-                <a:solidFill>
-                  <a:srgbClr val="ECF0F5"/>
+              <a:rPr sz="3600" b="1">
+                <a:solidFill>
+                  <a:srgbClr val="E8EAF0"/>
                 </a:solidFill>
                 <a:latin typeface="Calibri"/>
               </a:rPr>
-              <a:t>Stillform Mechanism Architecture</a:t>
+              <a:t>Stillform Mechanism</a:t>
             </a:r>
           </a:p>
         </p:txBody>
@@ -7951,8 +7564,8 @@
         </p:nvSpPr>
         <p:spPr>
           <a:xfrm>
-            <a:off x="676656" y="1481328"/>
-            <a:ext cx="10927080" cy="411480"/>
+            <a:off x="658368" y="1417320"/>
+            <a:ext cx="10972800" cy="365760"/>
           </a:xfrm>
           <a:prstGeom prst="rect">
             <a:avLst/>
@@ -7966,37 +7579,37 @@
           <a:lstStyle/>
           <a:p>
             <a:r>
-              <a:rPr sz="1600">
-                <a:solidFill>
-                  <a:srgbClr val="A7B2C2"/>
+              <a:rPr sz="1400">
+                <a:solidFill>
+                  <a:srgbClr val="9496A1"/>
                 </a:solidFill>
                 <a:latin typeface="Calibri"/>
               </a:rPr>
-              <a:t>How applied science is operationalized in-product</a:t>
-            </a:r>
-          </a:p>
-        </p:txBody>
-      </p:sp>
-      <p:sp>
-        <p:nvSpPr>
-          <p:cNvPr id="7" name="Rounded Rectangle 6"/>
+              <a:t>Daily operating loop</a:t>
+            </a:r>
+          </a:p>
+        </p:txBody>
+      </p:sp>
+      <p:sp>
+        <p:nvSpPr>
+          <p:cNvPr id="7" name="Rectangle 6"/>
           <p:cNvSpPr/>
           <p:nvPr/>
         </p:nvSpPr>
         <p:spPr>
           <a:xfrm>
             <a:off x="658368" y="2240280"/>
-            <a:ext cx="2194560" cy="2514600"/>
-          </a:xfrm>
-          <a:prstGeom prst="roundRect">
+            <a:ext cx="2176272" cy="2560320"/>
+          </a:xfrm>
+          <a:prstGeom prst="rect">
             <a:avLst/>
           </a:prstGeom>
           <a:solidFill>
-            <a:srgbClr val="131924"/>
+            <a:srgbClr val="141418"/>
           </a:solidFill>
-          <a:ln w="13970">
+          <a:ln w="11430">
             <a:solidFill>
-              <a:srgbClr val="3B4557"/>
+              <a:srgbClr val="3D3E47"/>
             </a:solidFill>
           </a:ln>
         </p:spPr>
@@ -8030,8 +7643,8 @@
         </p:nvSpPr>
         <p:spPr>
           <a:xfrm>
-            <a:off x="795528" y="2404872"/>
-            <a:ext cx="1920240" cy="457200"/>
+            <a:off x="804672" y="2423160"/>
+            <a:ext cx="1874519" cy="502920"/>
           </a:xfrm>
           <a:prstGeom prst="rect">
             <a:avLst/>
@@ -8045,9 +7658,9 @@
           <a:lstStyle/>
           <a:p>
             <a:r>
-              <a:rPr sz="1600" b="1">
-                <a:solidFill>
-                  <a:srgbClr val="629FF6"/>
+              <a:rPr sz="1400" b="1">
+                <a:solidFill>
+                  <a:srgbClr val="C8922A"/>
                 </a:solidFill>
                 <a:latin typeface="Calibri"/>
               </a:rPr>
@@ -8058,54 +7671,20 @@
       </p:sp>
       <p:sp>
         <p:nvSpPr>
-          <p:cNvPr id="9" name="TextBox 8"/>
-          <p:cNvSpPr txBox="1"/>
-          <p:nvPr/>
-        </p:nvSpPr>
-        <p:spPr>
-          <a:xfrm>
-            <a:off x="795528" y="3081528"/>
-            <a:ext cx="1920240" cy="1508760"/>
-          </a:xfrm>
-          <a:prstGeom prst="rect">
-            <a:avLst/>
-          </a:prstGeom>
-          <a:noFill/>
-        </p:spPr>
-        <p:txBody>
-          <a:bodyPr wrap="none">
-            <a:spAutoFit/>
-          </a:bodyPr>
-          <a:lstStyle/>
-          <a:p>
-            <a:r>
-              <a:rPr sz="1400">
-                <a:solidFill>
-                  <a:srgbClr val="ECF0F5"/>
-                </a:solidFill>
-                <a:latin typeface="Calibri"/>
-              </a:rPr>
-              <a:t>Morning + bio-filter</a:t>
-            </a:r>
-          </a:p>
-        </p:txBody>
-      </p:sp>
-      <p:sp>
-        <p:nvSpPr>
-          <p:cNvPr id="10" name="Chevron 9"/>
+          <p:cNvPr id="9" name="Right Arrow 8"/>
           <p:cNvSpPr/>
           <p:nvPr/>
         </p:nvSpPr>
         <p:spPr>
           <a:xfrm>
-            <a:off x="2834640" y="3291840"/>
-            <a:ext cx="128016" cy="502920"/>
-          </a:xfrm>
-          <a:prstGeom prst="chevron">
+            <a:off x="2816352" y="3246120"/>
+            <a:ext cx="128016" cy="457200"/>
+          </a:xfrm>
+          <a:prstGeom prst="rightArrow">
             <a:avLst/>
           </a:prstGeom>
           <a:solidFill>
-            <a:srgbClr val="A7B2C2"/>
+            <a:srgbClr val="9496A1"/>
           </a:solidFill>
           <a:ln>
             <a:noFill/>
@@ -8135,24 +7714,24 @@
       </p:sp>
       <p:sp>
         <p:nvSpPr>
-          <p:cNvPr id="11" name="Rounded Rectangle 10"/>
+          <p:cNvPr id="10" name="Rectangle 9"/>
           <p:cNvSpPr/>
           <p:nvPr/>
         </p:nvSpPr>
         <p:spPr>
           <a:xfrm>
-            <a:off x="2962656" y="2240280"/>
-            <a:ext cx="2194560" cy="2514600"/>
-          </a:xfrm>
-          <a:prstGeom prst="roundRect">
+            <a:off x="2944368" y="2240280"/>
+            <a:ext cx="2176272" cy="2560320"/>
+          </a:xfrm>
+          <a:prstGeom prst="rect">
             <a:avLst/>
           </a:prstGeom>
           <a:solidFill>
-            <a:srgbClr val="1B222F"/>
+            <a:srgbClr val="1A1A1F"/>
           </a:solidFill>
-          <a:ln w="13970">
+          <a:ln w="11430">
             <a:solidFill>
-              <a:srgbClr val="3B4557"/>
+              <a:srgbClr val="3D3E47"/>
             </a:solidFill>
           </a:ln>
         </p:spPr>
@@ -8180,14 +7759,14 @@
       </p:sp>
       <p:sp>
         <p:nvSpPr>
-          <p:cNvPr id="12" name="TextBox 11"/>
+          <p:cNvPr id="11" name="TextBox 10"/>
           <p:cNvSpPr txBox="1"/>
           <p:nvPr/>
         </p:nvSpPr>
         <p:spPr>
           <a:xfrm>
-            <a:off x="3099816" y="2404872"/>
-            <a:ext cx="1920240" cy="457200"/>
+            <a:off x="3090672" y="2423160"/>
+            <a:ext cx="1874519" cy="502920"/>
           </a:xfrm>
           <a:prstGeom prst="rect">
             <a:avLst/>
@@ -8201,67 +7780,33 @@
           <a:lstStyle/>
           <a:p>
             <a:r>
-              <a:rPr sz="1600" b="1">
-                <a:solidFill>
-                  <a:srgbClr val="65BF95"/>
+              <a:rPr sz="1400" b="1">
+                <a:solidFill>
+                  <a:srgbClr val="C8922A"/>
                 </a:solidFill>
                 <a:latin typeface="Calibri"/>
               </a:rPr>
-              <a:t>Interrupt</a:t>
-            </a:r>
-          </a:p>
-        </p:txBody>
-      </p:sp>
-      <p:sp>
-        <p:nvSpPr>
-          <p:cNvPr id="13" name="TextBox 12"/>
-          <p:cNvSpPr txBox="1"/>
-          <p:nvPr/>
-        </p:nvSpPr>
-        <p:spPr>
-          <a:xfrm>
-            <a:off x="3099816" y="3081528"/>
-            <a:ext cx="1920240" cy="1508760"/>
-          </a:xfrm>
-          <a:prstGeom prst="rect">
-            <a:avLst/>
-          </a:prstGeom>
-          <a:noFill/>
-        </p:spPr>
-        <p:txBody>
-          <a:bodyPr wrap="none">
-            <a:spAutoFit/>
-          </a:bodyPr>
-          <a:lstStyle/>
-          <a:p>
-            <a:r>
-              <a:rPr sz="1400">
-                <a:solidFill>
-                  <a:srgbClr val="ECF0F5"/>
-                </a:solidFill>
-                <a:latin typeface="Calibri"/>
-              </a:rPr>
-              <a:t>Breathe / Body Scan / Somatic cue</a:t>
-            </a:r>
-          </a:p>
-        </p:txBody>
-      </p:sp>
-      <p:sp>
-        <p:nvSpPr>
-          <p:cNvPr id="14" name="Chevron 13"/>
+              <a:t>Intervention</a:t>
+            </a:r>
+          </a:p>
+        </p:txBody>
+      </p:sp>
+      <p:sp>
+        <p:nvSpPr>
+          <p:cNvPr id="12" name="Right Arrow 11"/>
           <p:cNvSpPr/>
           <p:nvPr/>
         </p:nvSpPr>
         <p:spPr>
           <a:xfrm>
-            <a:off x="5138928" y="3291840"/>
-            <a:ext cx="128016" cy="502920"/>
-          </a:xfrm>
-          <a:prstGeom prst="chevron">
+            <a:off x="5102352" y="3246120"/>
+            <a:ext cx="128016" cy="457200"/>
+          </a:xfrm>
+          <a:prstGeom prst="rightArrow">
             <a:avLst/>
           </a:prstGeom>
           <a:solidFill>
-            <a:srgbClr val="A7B2C2"/>
+            <a:srgbClr val="9496A1"/>
           </a:solidFill>
           <a:ln>
             <a:noFill/>
@@ -8291,24 +7836,24 @@
       </p:sp>
       <p:sp>
         <p:nvSpPr>
-          <p:cNvPr id="15" name="Rounded Rectangle 14"/>
+          <p:cNvPr id="13" name="Rectangle 12"/>
           <p:cNvSpPr/>
           <p:nvPr/>
         </p:nvSpPr>
         <p:spPr>
           <a:xfrm>
-            <a:off x="5266944" y="2240280"/>
-            <a:ext cx="2194560" cy="2514600"/>
-          </a:xfrm>
-          <a:prstGeom prst="roundRect">
+            <a:off x="5230368" y="2240280"/>
+            <a:ext cx="2176272" cy="2560320"/>
+          </a:xfrm>
+          <a:prstGeom prst="rect">
             <a:avLst/>
           </a:prstGeom>
           <a:solidFill>
-            <a:srgbClr val="131924"/>
+            <a:srgbClr val="141418"/>
           </a:solidFill>
-          <a:ln w="13970">
+          <a:ln w="11430">
             <a:solidFill>
-              <a:srgbClr val="3B4557"/>
+              <a:srgbClr val="3D3E47"/>
             </a:solidFill>
           </a:ln>
         </p:spPr>
@@ -8336,14 +7881,14 @@
       </p:sp>
       <p:sp>
         <p:nvSpPr>
-          <p:cNvPr id="16" name="TextBox 15"/>
+          <p:cNvPr id="14" name="TextBox 13"/>
           <p:cNvSpPr txBox="1"/>
           <p:nvPr/>
         </p:nvSpPr>
         <p:spPr>
           <a:xfrm>
-            <a:off x="5404104" y="2404872"/>
-            <a:ext cx="1920240" cy="457200"/>
+            <a:off x="5376672" y="2423160"/>
+            <a:ext cx="1874519" cy="502920"/>
           </a:xfrm>
           <a:prstGeom prst="rect">
             <a:avLst/>
@@ -8357,67 +7902,33 @@
           <a:lstStyle/>
           <a:p>
             <a:r>
-              <a:rPr sz="1600" b="1">
-                <a:solidFill>
-                  <a:srgbClr val="EBAB4A"/>
+              <a:rPr sz="1400" b="1">
+                <a:solidFill>
+                  <a:srgbClr val="C8922A"/>
                 </a:solidFill>
                 <a:latin typeface="Calibri"/>
               </a:rPr>
-              <a:t>Reappraise</a:t>
-            </a:r>
-          </a:p>
-        </p:txBody>
-      </p:sp>
-      <p:sp>
-        <p:nvSpPr>
-          <p:cNvPr id="17" name="TextBox 16"/>
-          <p:cNvSpPr txBox="1"/>
-          <p:nvPr/>
-        </p:nvSpPr>
-        <p:spPr>
-          <a:xfrm>
-            <a:off x="5404104" y="3081528"/>
-            <a:ext cx="1920240" cy="1508760"/>
-          </a:xfrm>
-          <a:prstGeom prst="rect">
-            <a:avLst/>
-          </a:prstGeom>
-          <a:noFill/>
-        </p:spPr>
-        <p:txBody>
-          <a:bodyPr wrap="none">
-            <a:spAutoFit/>
-          </a:bodyPr>
-          <a:lstStyle/>
-          <a:p>
-            <a:r>
-              <a:rPr sz="1400">
-                <a:solidFill>
-                  <a:srgbClr val="ECF0F5"/>
-                </a:solidFill>
-                <a:latin typeface="Calibri"/>
-              </a:rPr>
-              <a:t>AI reframe + microbias correction</a:t>
-            </a:r>
-          </a:p>
-        </p:txBody>
-      </p:sp>
-      <p:sp>
-        <p:nvSpPr>
-          <p:cNvPr id="18" name="Chevron 17"/>
+              <a:t>Reappraisal</a:t>
+            </a:r>
+          </a:p>
+        </p:txBody>
+      </p:sp>
+      <p:sp>
+        <p:nvSpPr>
+          <p:cNvPr id="15" name="Right Arrow 14"/>
           <p:cNvSpPr/>
           <p:nvPr/>
         </p:nvSpPr>
         <p:spPr>
           <a:xfrm>
-            <a:off x="7443216" y="3291840"/>
-            <a:ext cx="128016" cy="502920"/>
-          </a:xfrm>
-          <a:prstGeom prst="chevron">
+            <a:off x="7388352" y="3246120"/>
+            <a:ext cx="128016" cy="457200"/>
+          </a:xfrm>
+          <a:prstGeom prst="rightArrow">
             <a:avLst/>
           </a:prstGeom>
           <a:solidFill>
-            <a:srgbClr val="A7B2C2"/>
+            <a:srgbClr val="9496A1"/>
           </a:solidFill>
           <a:ln>
             <a:noFill/>
@@ -8447,24 +7958,24 @@
       </p:sp>
       <p:sp>
         <p:nvSpPr>
-          <p:cNvPr id="19" name="Rounded Rectangle 18"/>
+          <p:cNvPr id="16" name="Rectangle 15"/>
           <p:cNvSpPr/>
           <p:nvPr/>
         </p:nvSpPr>
         <p:spPr>
           <a:xfrm>
-            <a:off x="7571232" y="2240280"/>
-            <a:ext cx="2194560" cy="2514600"/>
-          </a:xfrm>
-          <a:prstGeom prst="roundRect">
+            <a:off x="7516368" y="2240280"/>
+            <a:ext cx="2176272" cy="2560320"/>
+          </a:xfrm>
+          <a:prstGeom prst="rect">
             <a:avLst/>
           </a:prstGeom>
           <a:solidFill>
-            <a:srgbClr val="1B222F"/>
+            <a:srgbClr val="1A1A1F"/>
           </a:solidFill>
-          <a:ln w="13970">
+          <a:ln w="11430">
             <a:solidFill>
-              <a:srgbClr val="3B4557"/>
+              <a:srgbClr val="3D3E47"/>
             </a:solidFill>
           </a:ln>
         </p:spPr>
@@ -8492,14 +8003,14 @@
       </p:sp>
       <p:sp>
         <p:nvSpPr>
-          <p:cNvPr id="20" name="TextBox 19"/>
+          <p:cNvPr id="17" name="TextBox 16"/>
           <p:cNvSpPr txBox="1"/>
           <p:nvPr/>
         </p:nvSpPr>
         <p:spPr>
           <a:xfrm>
-            <a:off x="7708392" y="2404872"/>
-            <a:ext cx="1920240" cy="457200"/>
+            <a:off x="7662672" y="2423160"/>
+            <a:ext cx="1874519" cy="502920"/>
           </a:xfrm>
           <a:prstGeom prst="rect">
             <a:avLst/>
@@ -8513,67 +8024,33 @@
           <a:lstStyle/>
           <a:p>
             <a:r>
-              <a:rPr sz="1600" b="1">
-                <a:solidFill>
-                  <a:srgbClr val="A47DEB"/>
+              <a:rPr sz="1400" b="1">
+                <a:solidFill>
+                  <a:srgbClr val="C8922A"/>
                 </a:solidFill>
                 <a:latin typeface="Calibri"/>
               </a:rPr>
-              <a:t>Transfer</a:t>
-            </a:r>
-          </a:p>
-        </p:txBody>
-      </p:sp>
-      <p:sp>
-        <p:nvSpPr>
-          <p:cNvPr id="21" name="TextBox 20"/>
-          <p:cNvSpPr txBox="1"/>
-          <p:nvPr/>
-        </p:nvSpPr>
-        <p:spPr>
-          <a:xfrm>
-            <a:off x="7708392" y="3081528"/>
-            <a:ext cx="1920240" cy="1508760"/>
-          </a:xfrm>
-          <a:prstGeom prst="rect">
-            <a:avLst/>
-          </a:prstGeom>
-          <a:noFill/>
-        </p:spPr>
-        <p:txBody>
-          <a:bodyPr wrap="none">
-            <a:spAutoFit/>
-          </a:bodyPr>
-          <a:lstStyle/>
-          <a:p>
-            <a:r>
-              <a:rPr sz="1400">
-                <a:solidFill>
-                  <a:srgbClr val="ECF0F5"/>
-                </a:solidFill>
-                <a:latin typeface="Calibri"/>
-              </a:rPr>
-              <a:t>One next action under control</a:t>
-            </a:r>
-          </a:p>
-        </p:txBody>
-      </p:sp>
-      <p:sp>
-        <p:nvSpPr>
-          <p:cNvPr id="22" name="Chevron 21"/>
+              <a:t>Transfer action</a:t>
+            </a:r>
+          </a:p>
+        </p:txBody>
+      </p:sp>
+      <p:sp>
+        <p:nvSpPr>
+          <p:cNvPr id="18" name="Right Arrow 17"/>
           <p:cNvSpPr/>
           <p:nvPr/>
         </p:nvSpPr>
         <p:spPr>
           <a:xfrm>
-            <a:off x="9747504" y="3291840"/>
-            <a:ext cx="128016" cy="502920"/>
-          </a:xfrm>
-          <a:prstGeom prst="chevron">
+            <a:off x="9674352" y="3246120"/>
+            <a:ext cx="128016" cy="457200"/>
+          </a:xfrm>
+          <a:prstGeom prst="rightArrow">
             <a:avLst/>
           </a:prstGeom>
           <a:solidFill>
-            <a:srgbClr val="A7B2C2"/>
+            <a:srgbClr val="9496A1"/>
           </a:solidFill>
           <a:ln>
             <a:noFill/>
@@ -8603,24 +8080,24 @@
       </p:sp>
       <p:sp>
         <p:nvSpPr>
-          <p:cNvPr id="23" name="Rounded Rectangle 22"/>
+          <p:cNvPr id="19" name="Rectangle 18"/>
           <p:cNvSpPr/>
           <p:nvPr/>
         </p:nvSpPr>
         <p:spPr>
           <a:xfrm>
-            <a:off x="9875520" y="2240280"/>
-            <a:ext cx="2194560" cy="2514600"/>
-          </a:xfrm>
-          <a:prstGeom prst="roundRect">
+            <a:off x="9802368" y="2240280"/>
+            <a:ext cx="2176272" cy="2560320"/>
+          </a:xfrm>
+          <a:prstGeom prst="rect">
             <a:avLst/>
           </a:prstGeom>
           <a:solidFill>
-            <a:srgbClr val="131924"/>
+            <a:srgbClr val="141418"/>
           </a:solidFill>
-          <a:ln w="13970">
+          <a:ln w="11430">
             <a:solidFill>
-              <a:srgbClr val="3B4557"/>
+              <a:srgbClr val="3D3E47"/>
             </a:solidFill>
           </a:ln>
         </p:spPr>
@@ -8648,14 +8125,14 @@
       </p:sp>
       <p:sp>
         <p:nvSpPr>
-          <p:cNvPr id="24" name="TextBox 23"/>
+          <p:cNvPr id="20" name="TextBox 19"/>
           <p:cNvSpPr txBox="1"/>
           <p:nvPr/>
         </p:nvSpPr>
         <p:spPr>
           <a:xfrm>
-            <a:off x="10012680" y="2404872"/>
-            <a:ext cx="1920240" cy="457200"/>
+            <a:off x="9948672" y="2423160"/>
+            <a:ext cx="1874519" cy="502920"/>
           </a:xfrm>
           <a:prstGeom prst="rect">
             <a:avLst/>
@@ -8669,27 +8146,72 @@
           <a:lstStyle/>
           <a:p>
             <a:r>
-              <a:rPr sz="1600" b="1">
-                <a:solidFill>
-                  <a:srgbClr val="D86161"/>
+              <a:rPr sz="1400" b="1">
+                <a:solidFill>
+                  <a:srgbClr val="C8922A"/>
                 </a:solidFill>
                 <a:latin typeface="Calibri"/>
               </a:rPr>
-              <a:t>Consolidate</a:t>
-            </a:r>
-          </a:p>
-        </p:txBody>
-      </p:sp>
-      <p:sp>
-        <p:nvSpPr>
-          <p:cNvPr id="25" name="TextBox 24"/>
+              <a:t>EOD consolidation</a:t>
+            </a:r>
+          </a:p>
+        </p:txBody>
+      </p:sp>
+      <p:sp>
+        <p:nvSpPr>
+          <p:cNvPr id="21" name="Rectangle 20"/>
+          <p:cNvSpPr/>
+          <p:nvPr/>
+        </p:nvSpPr>
+        <p:spPr>
+          <a:xfrm>
+            <a:off x="658368" y="4983480"/>
+            <a:ext cx="11027664" cy="1188720"/>
+          </a:xfrm>
+          <a:prstGeom prst="rect">
+            <a:avLst/>
+          </a:prstGeom>
+          <a:solidFill>
+            <a:srgbClr val="1A1A1F"/>
+          </a:solidFill>
+          <a:ln w="11430">
+            <a:solidFill>
+              <a:srgbClr val="3D3E47"/>
+            </a:solidFill>
+          </a:ln>
+        </p:spPr>
+        <p:style>
+          <a:lnRef idx="1">
+            <a:schemeClr val="accent1"/>
+          </a:lnRef>
+          <a:fillRef idx="3">
+            <a:schemeClr val="accent1"/>
+          </a:fillRef>
+          <a:effectRef idx="2">
+            <a:schemeClr val="accent1"/>
+          </a:effectRef>
+          <a:fontRef idx="minor">
+            <a:schemeClr val="lt1"/>
+          </a:fontRef>
+        </p:style>
+        <p:txBody>
+          <a:bodyPr rtlCol="0" anchor="ctr"/>
+          <a:lstStyle/>
+          <a:p>
+            <a:pPr algn="ctr"/>
+          </a:p>
+        </p:txBody>
+      </p:sp>
+      <p:sp>
+        <p:nvSpPr>
+          <p:cNvPr id="22" name="TextBox 21"/>
           <p:cNvSpPr txBox="1"/>
           <p:nvPr/>
         </p:nvSpPr>
         <p:spPr>
           <a:xfrm>
-            <a:off x="10012680" y="3081528"/>
-            <a:ext cx="1920240" cy="1508760"/>
+            <a:off x="822960" y="5148072"/>
+            <a:ext cx="10707624" cy="868680"/>
           </a:xfrm>
           <a:prstGeom prst="rect">
             <a:avLst/>
@@ -8703,27 +8225,43 @@
           <a:lstStyle/>
           <a:p>
             <a:r>
-              <a:rPr sz="1400">
-                <a:solidFill>
-                  <a:srgbClr val="ECF0F5"/>
+              <a:rPr sz="1500" b="1">
+                <a:solidFill>
+                  <a:srgbClr val="C8922A"/>
                 </a:solidFill>
                 <a:latin typeface="Calibri"/>
               </a:rPr>
-              <a:t>EOD close + pattern memory</a:t>
-            </a:r>
-          </a:p>
-        </p:txBody>
-      </p:sp>
-      <p:sp>
-        <p:nvSpPr>
-          <p:cNvPr id="26" name="TextBox 25"/>
+              <a:t>Execution intent</a:t>
+            </a:r>
+          </a:p>
+          <a:p>
+            <a:pPr>
+              <a:spcAft>
+                <a:spcPts val="600"/>
+              </a:spcAft>
+              <a:defRPr sz="1200">
+                <a:solidFill>
+                  <a:srgbClr val="E8EAF0"/>
+                </a:solidFill>
+                <a:latin typeface="Calibri"/>
+              </a:defRPr>
+            </a:pPr>
+            <a:r>
+              <a:t>Composure is trained as repeatable daily behavior, not occasional mood relief.</a:t>
+            </a:r>
+          </a:p>
+        </p:txBody>
+      </p:sp>
+      <p:sp>
+        <p:nvSpPr>
+          <p:cNvPr id="23" name="TextBox 22"/>
           <p:cNvSpPr txBox="1"/>
           <p:nvPr/>
         </p:nvSpPr>
         <p:spPr>
           <a:xfrm>
-            <a:off x="685800" y="6464808"/>
-            <a:ext cx="10972800" cy="219456"/>
+            <a:off x="685800" y="6428232"/>
+            <a:ext cx="10972800" cy="228600"/>
           </a:xfrm>
           <a:prstGeom prst="rect">
             <a:avLst/>
@@ -8737,13 +8275,13 @@
           <a:lstStyle/>
           <a:p>
             <a:r>
-              <a:rPr sz="900">
-                <a:solidFill>
-                  <a:srgbClr val="A7B2C2"/>
+              <a:rPr sz="800">
+                <a:solidFill>
+                  <a:srgbClr val="9496A1"/>
                 </a:solidFill>
                 <a:latin typeface="Consolas"/>
               </a:rPr>
-              <a:t>Source: Stillform intervention flow: morning baseline -&gt; intervention -&gt; post-rating -&gt; EOD loop</a:t>
+              <a:t>Source: Stillform morning -&gt; intervention -&gt; post-rating -&gt; EOD architecture</a:t>
             </a:r>
           </a:p>
         </p:txBody>
@@ -8762,7 +8300,7 @@
     <p:bg>
       <p:bgPr>
         <a:solidFill>
-          <a:srgbClr val="0A0D13"/>
+          <a:srgbClr val="0A0A0C"/>
         </a:solidFill>
         <a:effectLst/>
       </p:bgPr>
@@ -8783,13 +8321,13 @@
         <p:spPr>
           <a:xfrm>
             <a:off x="0" y="0"/>
-            <a:ext cx="12191695" cy="347472"/>
+            <a:ext cx="12191695" cy="329184"/>
           </a:xfrm>
           <a:prstGeom prst="rect">
             <a:avLst/>
           </a:prstGeom>
           <a:solidFill>
-            <a:srgbClr val="131924"/>
+            <a:srgbClr val="141418"/>
           </a:solidFill>
           <a:ln>
             <a:noFill/>
@@ -8825,8 +8363,8 @@
         </p:nvSpPr>
         <p:spPr>
           <a:xfrm>
-            <a:off x="512064" y="109728"/>
-            <a:ext cx="7772400" cy="182880"/>
+            <a:off x="502920" y="100584"/>
+            <a:ext cx="7315200" cy="182880"/>
           </a:xfrm>
           <a:prstGeom prst="rect">
             <a:avLst/>
@@ -8840,13 +8378,13 @@
           <a:lstStyle/>
           <a:p>
             <a:r>
-              <a:rPr sz="900">
-                <a:solidFill>
-                  <a:srgbClr val="EBAB4A"/>
+              <a:rPr sz="850">
+                <a:solidFill>
+                  <a:srgbClr val="C8922A"/>
                 </a:solidFill>
                 <a:latin typeface="Consolas"/>
               </a:rPr>
-              <a:t>STILLFORM · APPLIED SCIENCE DECK</a:t>
+              <a:t>STILLFORM · APPLIED SCIENCE BRIEF</a:t>
             </a:r>
           </a:p>
         </p:txBody>
@@ -8859,8 +8397,8 @@
         </p:nvSpPr>
         <p:spPr>
           <a:xfrm>
-            <a:off x="10241280" y="109728"/>
-            <a:ext cx="1463040" cy="182880"/>
+            <a:off x="10149840" y="100584"/>
+            <a:ext cx="1554480" cy="182880"/>
           </a:xfrm>
           <a:prstGeom prst="rect">
             <a:avLst/>
@@ -8875,13 +8413,13 @@
           <a:p>
             <a:pPr algn="r"/>
             <a:r>
-              <a:rPr sz="900">
-                <a:solidFill>
-                  <a:srgbClr val="A7B2C2"/>
+              <a:rPr sz="850">
+                <a:solidFill>
+                  <a:srgbClr val="9496A1"/>
                 </a:solidFill>
                 <a:latin typeface="Consolas"/>
               </a:rPr>
-              <a:t>08 / 10</a:t>
+              <a:t>08 / 09</a:t>
             </a:r>
           </a:p>
         </p:txBody>
@@ -8894,8 +8432,8 @@
         </p:nvSpPr>
         <p:spPr>
           <a:xfrm>
-            <a:off x="640080" y="658368"/>
-            <a:ext cx="10972800" cy="1097280"/>
+            <a:off x="640080" y="640080"/>
+            <a:ext cx="10972800" cy="1005840"/>
           </a:xfrm>
           <a:prstGeom prst="rect">
             <a:avLst/>
@@ -8909,13 +8447,13 @@
           <a:lstStyle/>
           <a:p>
             <a:r>
-              <a:rPr sz="4000" b="1">
-                <a:solidFill>
-                  <a:srgbClr val="ECF0F5"/>
+              <a:rPr sz="3600" b="1">
+                <a:solidFill>
+                  <a:srgbClr val="E8EAF0"/>
                 </a:solidFill>
                 <a:latin typeface="Calibri"/>
               </a:rPr>
-              <a:t>Telemetry Proof Layer</a:t>
+              <a:t>Telemetry Proof</a:t>
             </a:r>
           </a:p>
         </p:txBody>
@@ -8928,8 +8466,8 @@
         </p:nvSpPr>
         <p:spPr>
           <a:xfrm>
-            <a:off x="676656" y="1481328"/>
-            <a:ext cx="10927080" cy="411480"/>
+            <a:off x="658368" y="1417320"/>
+            <a:ext cx="10972800" cy="365760"/>
           </a:xfrm>
           <a:prstGeom prst="rect">
             <a:avLst/>
@@ -8943,37 +8481,37 @@
           <a:lstStyle/>
           <a:p>
             <a:r>
-              <a:rPr sz="1600">
-                <a:solidFill>
-                  <a:srgbClr val="A7B2C2"/>
+              <a:rPr sz="1400">
+                <a:solidFill>
+                  <a:srgbClr val="9496A1"/>
                 </a:solidFill>
                 <a:latin typeface="Calibri"/>
               </a:rPr>
-              <a:t>Applied science must be visible in measurable loop outputs</a:t>
-            </a:r>
-          </a:p>
-        </p:txBody>
-      </p:sp>
-      <p:sp>
-        <p:nvSpPr>
-          <p:cNvPr id="7" name="Rounded Rectangle 6"/>
+              <a:t>If applied science is real, it must show up in measured signals</a:t>
+            </a:r>
+          </a:p>
+        </p:txBody>
+      </p:sp>
+      <p:sp>
+        <p:nvSpPr>
+          <p:cNvPr id="7" name="Rectangle 6"/>
           <p:cNvSpPr/>
           <p:nvPr/>
         </p:nvSpPr>
         <p:spPr>
           <a:xfrm>
-            <a:off x="685800" y="1920240"/>
-            <a:ext cx="7406640" cy="4251960"/>
-          </a:xfrm>
-          <a:prstGeom prst="roundRect">
+            <a:off x="685800" y="1874519"/>
+            <a:ext cx="7223760" cy="4297680"/>
+          </a:xfrm>
+          <a:prstGeom prst="rect">
             <a:avLst/>
           </a:prstGeom>
           <a:solidFill>
-            <a:srgbClr val="131924"/>
+            <a:srgbClr val="141418"/>
           </a:solidFill>
-          <a:ln w="13970">
+          <a:ln w="11430">
             <a:solidFill>
-              <a:srgbClr val="3B4557"/>
+              <a:srgbClr val="3D3E47"/>
             </a:solidFill>
           </a:ln>
         </p:spPr>
@@ -9009,7 +8547,7 @@
         </p:nvGraphicFramePr>
         <p:xfrm>
           <a:off x="960120" y="2240280"/>
-          <a:ext cx="6903720" cy="3611880"/>
+          <a:ext cx="6720840" cy="3611880"/>
         </p:xfrm>
         <a:graphic>
           <a:graphicData uri="http://schemas.openxmlformats.org/drawingml/2006/chart">
@@ -9019,24 +8557,24 @@
       </p:graphicFrame>
       <p:sp>
         <p:nvSpPr>
-          <p:cNvPr id="9" name="Rounded Rectangle 8"/>
+          <p:cNvPr id="9" name="Rectangle 8"/>
           <p:cNvSpPr/>
           <p:nvPr/>
         </p:nvSpPr>
         <p:spPr>
           <a:xfrm>
-            <a:off x="8321040" y="1920240"/>
-            <a:ext cx="3383280" cy="4251960"/>
-          </a:xfrm>
-          <a:prstGeom prst="roundRect">
+            <a:off x="8183879" y="1874519"/>
+            <a:ext cx="3520440" cy="4297680"/>
+          </a:xfrm>
+          <a:prstGeom prst="rect">
             <a:avLst/>
           </a:prstGeom>
           <a:solidFill>
-            <a:srgbClr val="131924"/>
+            <a:srgbClr val="1A1A1F"/>
           </a:solidFill>
-          <a:ln w="13970">
+          <a:ln w="11430">
             <a:solidFill>
-              <a:srgbClr val="3B4557"/>
+              <a:srgbClr val="3D3E47"/>
             </a:solidFill>
           </a:ln>
         </p:spPr>
@@ -9070,8 +8608,8 @@
         </p:nvSpPr>
         <p:spPr>
           <a:xfrm>
-            <a:off x="8595360" y="2240280"/>
-            <a:ext cx="2926080" cy="3566160"/>
+            <a:off x="8348471" y="2039111"/>
+            <a:ext cx="3200400" cy="3977640"/>
           </a:xfrm>
           <a:prstGeom prst="rect">
             <a:avLst/>
@@ -9084,112 +8622,62 @@
           </a:bodyPr>
           <a:lstStyle/>
           <a:p>
+            <a:r>
+              <a:rPr sz="1500" b="1">
+                <a:solidFill>
+                  <a:srgbClr val="C8922A"/>
+                </a:solidFill>
+                <a:latin typeface="Calibri"/>
+              </a:rPr>
+              <a:t>How this works in-app</a:t>
+            </a:r>
+          </a:p>
+          <a:p>
             <a:pPr>
               <a:spcAft>
-                <a:spcPts val="500"/>
+                <a:spcPts val="600"/>
               </a:spcAft>
-              <a:defRPr sz="1600" b="1">
-                <a:solidFill>
-                  <a:srgbClr val="ECF0F5"/>
+              <a:defRPr sz="1200">
+                <a:solidFill>
+                  <a:srgbClr val="E8EAF0"/>
                 </a:solidFill>
                 <a:latin typeface="Calibri"/>
               </a:defRPr>
             </a:pPr>
             <a:r>
-              <a:t>Reliability score formula:</a:t>
+              <a:t>Reliability score = (Loop x 0.65) + (Recovery x 0.35).</a:t>
             </a:r>
           </a:p>
           <a:p>
             <a:pPr>
               <a:spcAft>
-                <a:spcPts val="500"/>
+                <a:spcPts val="600"/>
               </a:spcAft>
-              <a:defRPr sz="1400" b="0">
-                <a:solidFill>
-                  <a:srgbClr val="ECF0F5"/>
+              <a:defRPr sz="1200">
+                <a:solidFill>
+                  <a:srgbClr val="E8EAF0"/>
                 </a:solidFill>
                 <a:latin typeface="Calibri"/>
               </a:defRPr>
             </a:pPr>
             <a:r>
-              <a:t>(Loop completion x 0.65) +</a:t>
+              <a:t>14-day window for active operating signal.</a:t>
             </a:r>
           </a:p>
           <a:p>
             <a:pPr>
               <a:spcAft>
-                <a:spcPts val="500"/>
+                <a:spcPts val="600"/>
               </a:spcAft>
-              <a:defRPr sz="1400" b="0">
-                <a:solidFill>
-                  <a:srgbClr val="ECF0F5"/>
+              <a:defRPr sz="1200">
+                <a:solidFill>
+                  <a:srgbClr val="E8EAF0"/>
                 </a:solidFill>
                 <a:latin typeface="Calibri"/>
               </a:defRPr>
             </a:pPr>
             <a:r>
-              <a:t>(Nudge recovery x 0.35)</a:t>
-            </a:r>
-          </a:p>
-          <a:p>
-            <a:pPr>
-              <a:spcAft>
-                <a:spcPts val="500"/>
-              </a:spcAft>
-              <a:defRPr sz="1400" b="0">
-                <a:solidFill>
-                  <a:srgbClr val="ECF0F5"/>
-                </a:solidFill>
-                <a:latin typeface="Calibri"/>
-              </a:defRPr>
-            </a:pPr>
-          </a:p>
-          <a:p>
-            <a:pPr>
-              <a:spcAft>
-                <a:spcPts val="500"/>
-              </a:spcAft>
-              <a:defRPr sz="1400" b="0">
-                <a:solidFill>
-                  <a:srgbClr val="ECF0F5"/>
-                </a:solidFill>
-                <a:latin typeface="Calibri"/>
-              </a:defRPr>
-            </a:pPr>
-            <a:r>
-              <a:t>Windows:</a:t>
-            </a:r>
-          </a:p>
-          <a:p>
-            <a:pPr>
-              <a:spcAft>
-                <a:spcPts val="500"/>
-              </a:spcAft>
-              <a:defRPr sz="1400" b="0">
-                <a:solidFill>
-                  <a:srgbClr val="ECF0F5"/>
-                </a:solidFill>
-                <a:latin typeface="Calibri"/>
-              </a:defRPr>
-            </a:pPr>
-            <a:r>
-              <a:t>14-day operating loop</a:t>
-            </a:r>
-          </a:p>
-          <a:p>
-            <a:pPr>
-              <a:spcAft>
-                <a:spcPts val="500"/>
-              </a:spcAft>
-              <a:defRPr sz="1400" b="0">
-                <a:solidFill>
-                  <a:srgbClr val="ECF0F5"/>
-                </a:solidFill>
-                <a:latin typeface="Calibri"/>
-              </a:defRPr>
-            </a:pPr>
-            <a:r>
-              <a:t>12-week telemetry history</a:t>
+              <a:t>12-week horizon for composure telemetry.</a:t>
             </a:r>
           </a:p>
         </p:txBody>
@@ -9202,8 +8690,8 @@
         </p:nvSpPr>
         <p:spPr>
           <a:xfrm>
-            <a:off x="685800" y="6464808"/>
-            <a:ext cx="10972800" cy="219456"/>
+            <a:off x="685800" y="6428232"/>
+            <a:ext cx="10972800" cy="228600"/>
           </a:xfrm>
           <a:prstGeom prst="rect">
             <a:avLst/>
@@ -9217,13 +8705,13 @@
           <a:lstStyle/>
           <a:p>
             <a:r>
-              <a:rPr sz="900">
-                <a:solidFill>
-                  <a:srgbClr val="A7B2C2"/>
+              <a:rPr sz="800">
+                <a:solidFill>
+                  <a:srgbClr val="9496A1"/>
                 </a:solidFill>
                 <a:latin typeface="Consolas"/>
               </a:rPr>
-              <a:t>Source: Stillform App.jsx: reliabilityScore, loop history, nudge event telemetry</a:t>
+              <a:t>Source: Stillform App.jsx reliabilityScore + loop/nudge telemetry implementation</a:t>
             </a:r>
           </a:p>
         </p:txBody>
@@ -9242,7 +8730,7 @@
     <p:bg>
       <p:bgPr>
         <a:solidFill>
-          <a:srgbClr val="0A0D13"/>
+          <a:srgbClr val="0A0A0C"/>
         </a:solidFill>
         <a:effectLst/>
       </p:bgPr>
@@ -9263,13 +8751,13 @@
         <p:spPr>
           <a:xfrm>
             <a:off x="0" y="0"/>
-            <a:ext cx="12191695" cy="347472"/>
+            <a:ext cx="12191695" cy="329184"/>
           </a:xfrm>
           <a:prstGeom prst="rect">
             <a:avLst/>
           </a:prstGeom>
           <a:solidFill>
-            <a:srgbClr val="131924"/>
+            <a:srgbClr val="141418"/>
           </a:solidFill>
           <a:ln>
             <a:noFill/>
@@ -9305,8 +8793,8 @@
         </p:nvSpPr>
         <p:spPr>
           <a:xfrm>
-            <a:off x="512064" y="109728"/>
-            <a:ext cx="7772400" cy="182880"/>
+            <a:off x="502920" y="100584"/>
+            <a:ext cx="7315200" cy="182880"/>
           </a:xfrm>
           <a:prstGeom prst="rect">
             <a:avLst/>
@@ -9320,13 +8808,13 @@
           <a:lstStyle/>
           <a:p>
             <a:r>
-              <a:rPr sz="900">
-                <a:solidFill>
-                  <a:srgbClr val="EBAB4A"/>
+              <a:rPr sz="850">
+                <a:solidFill>
+                  <a:srgbClr val="C8922A"/>
                 </a:solidFill>
                 <a:latin typeface="Consolas"/>
               </a:rPr>
-              <a:t>STILLFORM · APPLIED SCIENCE DECK</a:t>
+              <a:t>STILLFORM · APPLIED SCIENCE BRIEF</a:t>
             </a:r>
           </a:p>
         </p:txBody>
@@ -9339,8 +8827,8 @@
         </p:nvSpPr>
         <p:spPr>
           <a:xfrm>
-            <a:off x="10241280" y="109728"/>
-            <a:ext cx="1463040" cy="182880"/>
+            <a:off x="10149840" y="100584"/>
+            <a:ext cx="1554480" cy="182880"/>
           </a:xfrm>
           <a:prstGeom prst="rect">
             <a:avLst/>
@@ -9355,13 +8843,13 @@
           <a:p>
             <a:pPr algn="r"/>
             <a:r>
-              <a:rPr sz="900">
-                <a:solidFill>
-                  <a:srgbClr val="A7B2C2"/>
+              <a:rPr sz="850">
+                <a:solidFill>
+                  <a:srgbClr val="9496A1"/>
                 </a:solidFill>
                 <a:latin typeface="Consolas"/>
               </a:rPr>
-              <a:t>09 / 10</a:t>
+              <a:t>09 / 09</a:t>
             </a:r>
           </a:p>
         </p:txBody>
@@ -9374,8 +8862,8 @@
         </p:nvSpPr>
         <p:spPr>
           <a:xfrm>
-            <a:off x="640080" y="658368"/>
-            <a:ext cx="10972800" cy="1097280"/>
+            <a:off x="640080" y="640080"/>
+            <a:ext cx="10972800" cy="1005840"/>
           </a:xfrm>
           <a:prstGeom prst="rect">
             <a:avLst/>
@@ -9389,13 +8877,13 @@
           <a:lstStyle/>
           <a:p>
             <a:r>
-              <a:rPr sz="4000" b="1">
-                <a:solidFill>
-                  <a:srgbClr val="ECF0F5"/>
+              <a:rPr sz="3600" b="1">
+                <a:solidFill>
+                  <a:srgbClr val="E8EAF0"/>
                 </a:solidFill>
                 <a:latin typeface="Calibri"/>
               </a:rPr>
-              <a:t>UAT Decision Instrument</a:t>
+              <a:t>Executive Thesis</a:t>
             </a:r>
           </a:p>
         </p:txBody>
@@ -9408,8 +8896,8 @@
         </p:nvSpPr>
         <p:spPr>
           <a:xfrm>
-            <a:off x="676656" y="1481328"/>
-            <a:ext cx="10927080" cy="411480"/>
+            <a:off x="658368" y="1417320"/>
+            <a:ext cx="10972800" cy="365760"/>
           </a:xfrm>
           <a:prstGeom prst="rect">
             <a:avLst/>
@@ -9423,37 +8911,37 @@
           <a:lstStyle/>
           <a:p>
             <a:r>
-              <a:rPr sz="1600">
-                <a:solidFill>
-                  <a:srgbClr val="A7B2C2"/>
+              <a:rPr sz="1400">
+                <a:solidFill>
+                  <a:srgbClr val="9496A1"/>
                 </a:solidFill>
                 <a:latin typeface="Calibri"/>
               </a:rPr>
-              <a:t>Testing now scores mechanism quality, not vague sentiment</a:t>
-            </a:r>
-          </a:p>
-        </p:txBody>
-      </p:sp>
-      <p:sp>
-        <p:nvSpPr>
-          <p:cNvPr id="7" name="Rounded Rectangle 6"/>
+              <a:t>Applied science mapped to execution</a:t>
+            </a:r>
+          </a:p>
+        </p:txBody>
+      </p:sp>
+      <p:sp>
+        <p:nvSpPr>
+          <p:cNvPr id="7" name="Rectangle 6"/>
           <p:cNvSpPr/>
           <p:nvPr/>
         </p:nvSpPr>
         <p:spPr>
           <a:xfrm>
-            <a:off x="685800" y="1920240"/>
-            <a:ext cx="7406640" cy="4251960"/>
-          </a:xfrm>
-          <a:prstGeom prst="roundRect">
+            <a:off x="804672" y="2011680"/>
+            <a:ext cx="10607040" cy="3794760"/>
+          </a:xfrm>
+          <a:prstGeom prst="rect">
             <a:avLst/>
           </a:prstGeom>
           <a:solidFill>
-            <a:srgbClr val="131924"/>
+            <a:srgbClr val="141418"/>
           </a:solidFill>
-          <a:ln w="13970">
+          <a:ln w="11430">
             <a:solidFill>
-              <a:srgbClr val="3B4557"/>
+              <a:srgbClr val="3D3E47"/>
             </a:solidFill>
           </a:ln>
         </p:spPr>
@@ -9479,79 +8967,16 @@
           </a:p>
         </p:txBody>
       </p:sp>
-      <p:graphicFrame>
-        <p:nvGraphicFramePr>
-          <p:cNvPr id="8" name="Chart 7"/>
-          <p:cNvGraphicFramePr>
-            <a:graphicFrameLocks noGrp="1"/>
-          </p:cNvGraphicFramePr>
-          <p:nvPr/>
-        </p:nvGraphicFramePr>
-        <p:xfrm>
-          <a:off x="960120" y="2240280"/>
-          <a:ext cx="6903720" cy="3611880"/>
-        </p:xfrm>
-        <a:graphic>
-          <a:graphicData uri="http://schemas.openxmlformats.org/drawingml/2006/chart">
-            <c:chart xmlns:c="http://schemas.openxmlformats.org/drawingml/2006/chart" r:id="rId2"/>
-          </a:graphicData>
-        </a:graphic>
-      </p:graphicFrame>
-      <p:sp>
-        <p:nvSpPr>
-          <p:cNvPr id="9" name="Rounded Rectangle 8"/>
-          <p:cNvSpPr/>
-          <p:nvPr/>
-        </p:nvSpPr>
-        <p:spPr>
-          <a:xfrm>
-            <a:off x="8321040" y="1920240"/>
-            <a:ext cx="3383280" cy="4251960"/>
-          </a:xfrm>
-          <a:prstGeom prst="roundRect">
-            <a:avLst/>
-          </a:prstGeom>
-          <a:solidFill>
-            <a:srgbClr val="131924"/>
-          </a:solidFill>
-          <a:ln w="13970">
-            <a:solidFill>
-              <a:srgbClr val="3B4557"/>
-            </a:solidFill>
-          </a:ln>
-        </p:spPr>
-        <p:style>
-          <a:lnRef idx="1">
-            <a:schemeClr val="accent1"/>
-          </a:lnRef>
-          <a:fillRef idx="3">
-            <a:schemeClr val="accent1"/>
-          </a:fillRef>
-          <a:effectRef idx="2">
-            <a:schemeClr val="accent1"/>
-          </a:effectRef>
-          <a:fontRef idx="minor">
-            <a:schemeClr val="lt1"/>
-          </a:fontRef>
-        </p:style>
-        <p:txBody>
-          <a:bodyPr rtlCol="0" anchor="ctr"/>
-          <a:lstStyle/>
-          <a:p>
-            <a:pPr algn="ctr"/>
-          </a:p>
-        </p:txBody>
-      </p:sp>
-      <p:sp>
-        <p:nvSpPr>
-          <p:cNvPr id="10" name="TextBox 9"/>
+      <p:sp>
+        <p:nvSpPr>
+          <p:cNvPr id="8" name="TextBox 7"/>
           <p:cNvSpPr txBox="1"/>
           <p:nvPr/>
         </p:nvSpPr>
         <p:spPr>
           <a:xfrm>
-            <a:off x="8595360" y="2240280"/>
-            <a:ext cx="2926080" cy="1417320"/>
+            <a:off x="1097280" y="2423160"/>
+            <a:ext cx="10058400" cy="3063240"/>
           </a:xfrm>
           <a:prstGeom prst="rect">
             <a:avLst/>
@@ -9564,39 +8989,65 @@
           </a:bodyPr>
           <a:lstStyle/>
           <a:p>
-            <a:r>
-              <a:rPr sz="1000">
-                <a:solidFill>
-                  <a:srgbClr val="A7B2C2"/>
-                </a:solidFill>
-                <a:latin typeface="Consolas"/>
-              </a:rPr>
-              <a:t>QUESTIONS</a:t>
-            </a:r>
-          </a:p>
-          <a:p>
-            <a:r>
-              <a:rPr sz="3400" b="1">
-                <a:solidFill>
-                  <a:srgbClr val="EBAB4A"/>
+            <a:pPr>
+              <a:spcAft>
+                <a:spcPts val="800"/>
+              </a:spcAft>
+              <a:defRPr sz="2500" b="1">
+                <a:solidFill>
+                  <a:srgbClr val="E8EAF0"/>
                 </a:solidFill>
                 <a:latin typeface="Calibri"/>
-              </a:rPr>
-              <a:t>5</a:t>
-            </a:r>
-          </a:p>
-        </p:txBody>
-      </p:sp>
-      <p:sp>
-        <p:nvSpPr>
-          <p:cNvPr id="11" name="TextBox 10"/>
+              </a:defRPr>
+            </a:pPr>
+            <a:r>
+              <a:t>Stillform is not psychiatric treatment software.</a:t>
+            </a:r>
+          </a:p>
+          <a:p>
+            <a:pPr>
+              <a:spcAft>
+                <a:spcPts val="800"/>
+              </a:spcAft>
+              <a:defRPr sz="2000" b="1">
+                <a:solidFill>
+                  <a:srgbClr val="E8EAF0"/>
+                </a:solidFill>
+                <a:latin typeface="Calibri"/>
+              </a:defRPr>
+            </a:pPr>
+            <a:r>
+              <a:t>It is a composure and self-awareness operating system.</a:t>
+            </a:r>
+          </a:p>
+          <a:p>
+            <a:pPr>
+              <a:spcAft>
+                <a:spcPts val="800"/>
+              </a:spcAft>
+              <a:defRPr sz="2000" b="1">
+                <a:solidFill>
+                  <a:srgbClr val="E8EAF0"/>
+                </a:solidFill>
+                <a:latin typeface="Calibri"/>
+              </a:defRPr>
+            </a:pPr>
+            <a:r>
+              <a:t>Mechanism quality is judged by behavior shift, reliability, and transfer under pressure.</a:t>
+            </a:r>
+          </a:p>
+        </p:txBody>
+      </p:sp>
+      <p:sp>
+        <p:nvSpPr>
+          <p:cNvPr id="9" name="TextBox 8"/>
           <p:cNvSpPr txBox="1"/>
           <p:nvPr/>
         </p:nvSpPr>
         <p:spPr>
           <a:xfrm>
-            <a:off x="8595360" y="3429000"/>
-            <a:ext cx="2926080" cy="1417320"/>
+            <a:off x="685800" y="6428232"/>
+            <a:ext cx="10972800" cy="228600"/>
           </a:xfrm>
           <a:prstGeom prst="rect">
             <a:avLst/>
@@ -9610,103 +9061,13 @@
           <a:lstStyle/>
           <a:p>
             <a:r>
-              <a:rPr sz="1000">
-                <a:solidFill>
-                  <a:srgbClr val="A7B2C2"/>
+              <a:rPr sz="800">
+                <a:solidFill>
+                  <a:srgbClr val="9496A1"/>
                 </a:solidFill>
                 <a:latin typeface="Consolas"/>
               </a:rPr>
-              <a:t>MODE</a:t>
-            </a:r>
-          </a:p>
-          <a:p>
-            <a:r>
-              <a:rPr sz="3400" b="1">
-                <a:solidFill>
-                  <a:srgbClr val="65BF95"/>
-                </a:solidFill>
-                <a:latin typeface="Calibri"/>
-              </a:rPr>
-              <a:t>Operator-grade</a:t>
-            </a:r>
-          </a:p>
-        </p:txBody>
-      </p:sp>
-      <p:sp>
-        <p:nvSpPr>
-          <p:cNvPr id="12" name="TextBox 11"/>
-          <p:cNvSpPr txBox="1"/>
-          <p:nvPr/>
-        </p:nvSpPr>
-        <p:spPr>
-          <a:xfrm>
-            <a:off x="8595360" y="4572000"/>
-            <a:ext cx="2926080" cy="1417320"/>
-          </a:xfrm>
-          <a:prstGeom prst="rect">
-            <a:avLst/>
-          </a:prstGeom>
-          <a:noFill/>
-        </p:spPr>
-        <p:txBody>
-          <a:bodyPr wrap="none">
-            <a:spAutoFit/>
-          </a:bodyPr>
-          <a:lstStyle/>
-          <a:p>
-            <a:r>
-              <a:rPr sz="1000">
-                <a:solidFill>
-                  <a:srgbClr val="A7B2C2"/>
-                </a:solidFill>
-                <a:latin typeface="Consolas"/>
-              </a:rPr>
-              <a:t>PURPOSE</a:t>
-            </a:r>
-          </a:p>
-          <a:p>
-            <a:r>
-              <a:rPr sz="3400" b="1">
-                <a:solidFill>
-                  <a:srgbClr val="629FF6"/>
-                </a:solidFill>
-                <a:latin typeface="Calibri"/>
-              </a:rPr>
-              <a:t>Ship decisions</a:t>
-            </a:r>
-          </a:p>
-        </p:txBody>
-      </p:sp>
-      <p:sp>
-        <p:nvSpPr>
-          <p:cNvPr id="13" name="TextBox 12"/>
-          <p:cNvSpPr txBox="1"/>
-          <p:nvPr/>
-        </p:nvSpPr>
-        <p:spPr>
-          <a:xfrm>
-            <a:off x="685800" y="6464808"/>
-            <a:ext cx="10972800" cy="219456"/>
-          </a:xfrm>
-          <a:prstGeom prst="rect">
-            <a:avLst/>
-          </a:prstGeom>
-          <a:noFill/>
-        </p:spPr>
-        <p:txBody>
-          <a:bodyPr wrap="none">
-            <a:spAutoFit/>
-          </a:bodyPr>
-          <a:lstStyle/>
-          <a:p>
-            <a:r>
-              <a:rPr sz="900">
-                <a:solidFill>
-                  <a:srgbClr val="A7B2C2"/>
-                </a:solidFill>
-                <a:latin typeface="Consolas"/>
-              </a:rPr>
-              <a:t>Source: public/uat-roadmap.html tester ask section (updated)</a:t>
+              <a:t>Source: Stillform applied science model: metacognition, EQ, composure, impulsivity, microbias</a:t>
             </a:r>
           </a:p>
         </p:txBody>

--- a/public/Stillform_Strategic_Overview.pptx
+++ b/public/Stillform_Strategic_Overview.pptx
@@ -133,7 +133,7 @@
               <c:strCache>
                 <c:ptCount val="1"/>
                 <c:pt idx="0">
-                  <c:v>Daily negative (%)</c:v>
+                  <c:v>Daily negative experiences (%)</c:v>
                 </c:pt>
               </c:strCache>
             </c:strRef>
@@ -142,11 +142,11 @@
             <c:idx val="0"/>
             <c:spPr>
               <a:solidFill>
-                <a:srgbClr val="C8922A"/>
+                <a:srgbClr val="967534"/>
               </a:solidFill>
               <a:ln>
                 <a:solidFill>
-                  <a:srgbClr val="C8922A"/>
+                  <a:srgbClr val="967534"/>
                 </a:solidFill>
               </a:ln>
             </c:spPr>
@@ -155,11 +155,11 @@
             <c:idx val="1"/>
             <c:spPr>
               <a:solidFill>
-                <a:srgbClr val="C8922A"/>
+                <a:srgbClr val="967534"/>
               </a:solidFill>
               <a:ln>
                 <a:solidFill>
-                  <a:srgbClr val="C8922A"/>
+                  <a:srgbClr val="967534"/>
                 </a:solidFill>
               </a:ln>
             </c:spPr>
@@ -168,11 +168,11 @@
             <c:idx val="2"/>
             <c:spPr>
               <a:solidFill>
-                <a:srgbClr val="C8922A"/>
+                <a:srgbClr val="967534"/>
               </a:solidFill>
               <a:ln>
                 <a:solidFill>
-                  <a:srgbClr val="C8922A"/>
+                  <a:srgbClr val="967534"/>
                 </a:solidFill>
               </a:ln>
             </c:spPr>
@@ -181,11 +181,11 @@
             <c:idx val="3"/>
             <c:spPr>
               <a:solidFill>
-                <a:srgbClr val="C8922A"/>
+                <a:srgbClr val="967534"/>
               </a:solidFill>
               <a:ln>
                 <a:solidFill>
-                  <a:srgbClr val="C8922A"/>
+                  <a:srgbClr val="967534"/>
                 </a:solidFill>
               </a:ln>
             </c:spPr>
@@ -194,11 +194,11 @@
             <c:idx val="4"/>
             <c:spPr>
               <a:solidFill>
-                <a:srgbClr val="C8922A"/>
+                <a:srgbClr val="967534"/>
               </a:solidFill>
               <a:ln>
                 <a:solidFill>
-                  <a:srgbClr val="C8922A"/>
+                  <a:srgbClr val="967534"/>
                 </a:solidFill>
               </a:ln>
             </c:spPr>
@@ -269,7 +269,7 @@
           <a:lstStyle/>
           <a:p>
             <a:pPr>
-              <a:defRPr sz="900">
+              <a:defRPr sz="1000">
                 <a:solidFill>
                   <a:srgbClr val="9496A1"/>
                 </a:solidFill>
@@ -296,7 +296,7 @@
           <c:spPr>
             <a:ln>
               <a:solidFill>
-                <a:srgbClr val="3D3E47"/>
+                <a:srgbClr val="3A3A42"/>
               </a:solidFill>
             </a:ln>
           </c:spPr>
@@ -309,7 +309,7 @@
           <a:lstStyle/>
           <a:p>
             <a:pPr>
-              <a:defRPr sz="900">
+              <a:defRPr sz="1000">
                 <a:solidFill>
                   <a:srgbClr val="9496A1"/>
                 </a:solidFill>
@@ -358,7 +358,7 @@
               <c:strCache>
                 <c:ptCount val="1"/>
                 <c:pt idx="0">
-                  <c:v>Daily positive (%)</c:v>
+                  <c:v>Daily positive experiences (%)</c:v>
                 </c:pt>
               </c:strCache>
             </c:strRef>
@@ -367,11 +367,11 @@
             <c:idx val="0"/>
             <c:spPr>
               <a:solidFill>
-                <a:srgbClr val="777D8C"/>
+                <a:srgbClr val="6A81AA"/>
               </a:solidFill>
               <a:ln>
                 <a:solidFill>
-                  <a:srgbClr val="777D8C"/>
+                  <a:srgbClr val="6A81AA"/>
                 </a:solidFill>
               </a:ln>
             </c:spPr>
@@ -380,11 +380,11 @@
             <c:idx val="1"/>
             <c:spPr>
               <a:solidFill>
-                <a:srgbClr val="777D8C"/>
+                <a:srgbClr val="6A81AA"/>
               </a:solidFill>
               <a:ln>
                 <a:solidFill>
-                  <a:srgbClr val="777D8C"/>
+                  <a:srgbClr val="6A81AA"/>
                 </a:solidFill>
               </a:ln>
             </c:spPr>
@@ -393,11 +393,11 @@
             <c:idx val="2"/>
             <c:spPr>
               <a:solidFill>
-                <a:srgbClr val="777D8C"/>
+                <a:srgbClr val="6A81AA"/>
               </a:solidFill>
               <a:ln>
                 <a:solidFill>
-                  <a:srgbClr val="777D8C"/>
+                  <a:srgbClr val="6A81AA"/>
                 </a:solidFill>
               </a:ln>
             </c:spPr>
@@ -406,11 +406,11 @@
             <c:idx val="3"/>
             <c:spPr>
               <a:solidFill>
-                <a:srgbClr val="777D8C"/>
+                <a:srgbClr val="6A81AA"/>
               </a:solidFill>
               <a:ln>
                 <a:solidFill>
-                  <a:srgbClr val="777D8C"/>
+                  <a:srgbClr val="6A81AA"/>
                 </a:solidFill>
               </a:ln>
             </c:spPr>
@@ -419,11 +419,11 @@
             <c:idx val="4"/>
             <c:spPr>
               <a:solidFill>
-                <a:srgbClr val="777D8C"/>
+                <a:srgbClr val="6A81AA"/>
               </a:solidFill>
               <a:ln>
                 <a:solidFill>
-                  <a:srgbClr val="777D8C"/>
+                  <a:srgbClr val="6A81AA"/>
                 </a:solidFill>
               </a:ln>
             </c:spPr>
@@ -437,10 +437,10 @@
                   <c:v>Respect</c:v>
                 </c:pt>
                 <c:pt idx="1">
-                  <c:v>Enjoyment</c:v>
+                  <c:v>Laughter</c:v>
                 </c:pt>
                 <c:pt idx="2">
-                  <c:v>Laughter</c:v>
+                  <c:v>Enjoyment</c:v>
                 </c:pt>
                 <c:pt idx="3">
                   <c:v>Rested</c:v>
@@ -494,7 +494,7 @@
           <a:lstStyle/>
           <a:p>
             <a:pPr>
-              <a:defRPr sz="900">
+              <a:defRPr sz="1000">
                 <a:solidFill>
                   <a:srgbClr val="9496A1"/>
                 </a:solidFill>
@@ -521,7 +521,7 @@
           <c:spPr>
             <a:ln>
               <a:solidFill>
-                <a:srgbClr val="3D3E47"/>
+                <a:srgbClr val="3A3A42"/>
               </a:solidFill>
             </a:ln>
           </c:spPr>
@@ -534,7 +534,7 @@
           <a:lstStyle/>
           <a:p>
             <a:pPr>
-              <a:defRPr sz="900">
+              <a:defRPr sz="1000">
                 <a:solidFill>
                   <a:srgbClr val="9496A1"/>
                 </a:solidFill>
@@ -583,7 +583,7 @@
               <c:strCache>
                 <c:ptCount val="1"/>
                 <c:pt idx="0">
-                  <c:v>Index</c:v>
+                  <c:v>Issue/lever index</c:v>
                 </c:pt>
               </c:strCache>
             </c:strRef>
@@ -592,11 +592,11 @@
             <c:idx val="0"/>
             <c:spPr>
               <a:solidFill>
-                <a:srgbClr val="C8922A"/>
+                <a:srgbClr val="967534"/>
               </a:solidFill>
               <a:ln>
                 <a:solidFill>
-                  <a:srgbClr val="C8922A"/>
+                  <a:srgbClr val="967534"/>
                 </a:solidFill>
               </a:ln>
             </c:spPr>
@@ -605,11 +605,11 @@
             <c:idx val="1"/>
             <c:spPr>
               <a:solidFill>
-                <a:srgbClr val="C8922A"/>
+                <a:srgbClr val="967534"/>
               </a:solidFill>
               <a:ln>
                 <a:solidFill>
-                  <a:srgbClr val="C8922A"/>
+                  <a:srgbClr val="967534"/>
                 </a:solidFill>
               </a:ln>
             </c:spPr>
@@ -618,11 +618,11 @@
             <c:idx val="2"/>
             <c:spPr>
               <a:solidFill>
-                <a:srgbClr val="C8922A"/>
+                <a:srgbClr val="6A81AA"/>
               </a:solidFill>
               <a:ln>
                 <a:solidFill>
-                  <a:srgbClr val="C8922A"/>
+                  <a:srgbClr val="6A81AA"/>
                 </a:solidFill>
               </a:ln>
             </c:spPr>
@@ -631,11 +631,11 @@
             <c:idx val="3"/>
             <c:spPr>
               <a:solidFill>
-                <a:srgbClr val="C8922A"/>
+                <a:srgbClr val="7EA27E"/>
               </a:solidFill>
               <a:ln>
                 <a:solidFill>
-                  <a:srgbClr val="C8922A"/>
+                  <a:srgbClr val="7EA27E"/>
                 </a:solidFill>
               </a:ln>
             </c:spPr>
@@ -655,7 +655,7 @@
                   <c:v>Learning signal</c:v>
                 </c:pt>
                 <c:pt idx="3">
-                  <c:v>Affect-label support</c:v>
+                  <c:v>Affect-label lever</c:v>
                 </c:pt>
               </c:strCache>
             </c:strRef>
@@ -700,7 +700,7 @@
           <a:lstStyle/>
           <a:p>
             <a:pPr>
-              <a:defRPr sz="900">
+              <a:defRPr sz="1000">
                 <a:solidFill>
                   <a:srgbClr val="9496A1"/>
                 </a:solidFill>
@@ -727,7 +727,7 @@
           <c:spPr>
             <a:ln>
               <a:solidFill>
-                <a:srgbClr val="3D3E47"/>
+                <a:srgbClr val="3A3A42"/>
               </a:solidFill>
             </a:ln>
           </c:spPr>
@@ -740,7 +740,7 @@
           <a:lstStyle/>
           <a:p>
             <a:pPr>
-              <a:defRPr sz="900">
+              <a:defRPr sz="1000">
                 <a:solidFill>
                   <a:srgbClr val="9496A1"/>
                 </a:solidFill>
@@ -798,11 +798,11 @@
             <c:idx val="0"/>
             <c:spPr>
               <a:solidFill>
-                <a:srgbClr val="C8922A"/>
+                <a:srgbClr val="6A81AA"/>
               </a:solidFill>
               <a:ln>
                 <a:solidFill>
-                  <a:srgbClr val="C8922A"/>
+                  <a:srgbClr val="6A81AA"/>
                 </a:solidFill>
               </a:ln>
             </c:spPr>
@@ -811,11 +811,11 @@
             <c:idx val="1"/>
             <c:spPr>
               <a:solidFill>
-                <a:srgbClr val="C8922A"/>
+                <a:srgbClr val="6A81AA"/>
               </a:solidFill>
               <a:ln>
                 <a:solidFill>
-                  <a:srgbClr val="C8922A"/>
+                  <a:srgbClr val="6A81AA"/>
                 </a:solidFill>
               </a:ln>
             </c:spPr>
@@ -824,11 +824,11 @@
             <c:idx val="2"/>
             <c:spPr>
               <a:solidFill>
-                <a:srgbClr val="C8922A"/>
+                <a:srgbClr val="967534"/>
               </a:solidFill>
               <a:ln>
                 <a:solidFill>
-                  <a:srgbClr val="C8922A"/>
+                  <a:srgbClr val="967534"/>
                 </a:solidFill>
               </a:ln>
             </c:spPr>
@@ -837,11 +837,11 @@
             <c:idx val="3"/>
             <c:spPr>
               <a:solidFill>
-                <a:srgbClr val="C8922A"/>
+                <a:srgbClr val="967534"/>
               </a:solidFill>
               <a:ln>
                 <a:solidFill>
-                  <a:srgbClr val="C8922A"/>
+                  <a:srgbClr val="967534"/>
                 </a:solidFill>
               </a:ln>
             </c:spPr>
@@ -906,7 +906,7 @@
           <a:lstStyle/>
           <a:p>
             <a:pPr>
-              <a:defRPr sz="900">
+              <a:defRPr sz="1000">
                 <a:solidFill>
                   <a:srgbClr val="9496A1"/>
                 </a:solidFill>
@@ -933,7 +933,7 @@
           <c:spPr>
             <a:ln>
               <a:solidFill>
-                <a:srgbClr val="3D3E47"/>
+                <a:srgbClr val="3A3A42"/>
               </a:solidFill>
             </a:ln>
           </c:spPr>
@@ -946,7 +946,7 @@
           <a:lstStyle/>
           <a:p>
             <a:pPr>
-              <a:defRPr sz="900">
+              <a:defRPr sz="1000">
                 <a:solidFill>
                   <a:srgbClr val="9496A1"/>
                 </a:solidFill>
@@ -995,7 +995,7 @@
               <c:strCache>
                 <c:ptCount val="1"/>
                 <c:pt idx="0">
-                  <c:v>Unrest index</c:v>
+                  <c:v>Riots/strikes/anti-gov demos index</c:v>
                 </c:pt>
               </c:strCache>
             </c:strRef>
@@ -1004,11 +1004,11 @@
             <c:idx val="0"/>
             <c:spPr>
               <a:solidFill>
-                <a:srgbClr val="C8922A"/>
+                <a:srgbClr val="967534"/>
               </a:solidFill>
               <a:ln>
                 <a:solidFill>
-                  <a:srgbClr val="C8922A"/>
+                  <a:srgbClr val="967534"/>
                 </a:solidFill>
               </a:ln>
             </c:spPr>
@@ -1017,11 +1017,11 @@
             <c:idx val="1"/>
             <c:spPr>
               <a:solidFill>
-                <a:srgbClr val="C8922A"/>
+                <a:srgbClr val="967534"/>
               </a:solidFill>
               <a:ln>
                 <a:solidFill>
-                  <a:srgbClr val="C8922A"/>
+                  <a:srgbClr val="967534"/>
                 </a:solidFill>
               </a:ln>
             </c:spPr>
@@ -1032,10 +1032,10 @@
               <c:strCache>
                 <c:ptCount val="2"/>
                 <c:pt idx="0">
-                  <c:v>2011</c:v>
+                  <c:v>2011 baseline</c:v>
                 </c:pt>
                 <c:pt idx="1">
-                  <c:v>2019</c:v>
+                  <c:v>2019 level</c:v>
                 </c:pt>
               </c:strCache>
             </c:strRef>
@@ -1074,7 +1074,7 @@
           <a:lstStyle/>
           <a:p>
             <a:pPr>
-              <a:defRPr sz="900">
+              <a:defRPr sz="1000">
                 <a:solidFill>
                   <a:srgbClr val="9496A1"/>
                 </a:solidFill>
@@ -1101,7 +1101,7 @@
           <c:spPr>
             <a:ln>
               <a:solidFill>
-                <a:srgbClr val="3D3E47"/>
+                <a:srgbClr val="3A3A42"/>
               </a:solidFill>
             </a:ln>
           </c:spPr>
@@ -1114,7 +1114,7 @@
           <a:lstStyle/>
           <a:p>
             <a:pPr>
-              <a:defRPr sz="900">
+              <a:defRPr sz="1000">
                 <a:solidFill>
                   <a:srgbClr val="9496A1"/>
                 </a:solidFill>
@@ -1163,7 +1163,7 @@
               <c:strCache>
                 <c:ptCount val="1"/>
                 <c:pt idx="0">
-                  <c:v>Daily pressure (%)</c:v>
+                  <c:v>Daily pressure prevalence (%)</c:v>
                 </c:pt>
               </c:strCache>
             </c:strRef>
@@ -1172,11 +1172,11 @@
             <c:idx val="0"/>
             <c:spPr>
               <a:solidFill>
-                <a:srgbClr val="777D8C"/>
+                <a:srgbClr val="6A81AA"/>
               </a:solidFill>
               <a:ln>
                 <a:solidFill>
-                  <a:srgbClr val="777D8C"/>
+                  <a:srgbClr val="6A81AA"/>
                 </a:solidFill>
               </a:ln>
             </c:spPr>
@@ -1185,11 +1185,11 @@
             <c:idx val="1"/>
             <c:spPr>
               <a:solidFill>
-                <a:srgbClr val="777D8C"/>
+                <a:srgbClr val="6A81AA"/>
               </a:solidFill>
               <a:ln>
                 <a:solidFill>
-                  <a:srgbClr val="777D8C"/>
+                  <a:srgbClr val="6A81AA"/>
                 </a:solidFill>
               </a:ln>
             </c:spPr>
@@ -1242,7 +1242,7 @@
           <a:lstStyle/>
           <a:p>
             <a:pPr>
-              <a:defRPr sz="900">
+              <a:defRPr sz="1000">
                 <a:solidFill>
                   <a:srgbClr val="9496A1"/>
                 </a:solidFill>
@@ -1269,7 +1269,7 @@
           <c:spPr>
             <a:ln>
               <a:solidFill>
-                <a:srgbClr val="3D3E47"/>
+                <a:srgbClr val="3A3A42"/>
               </a:solidFill>
             </a:ln>
           </c:spPr>
@@ -1282,7 +1282,7 @@
           <a:lstStyle/>
           <a:p>
             <a:pPr>
-              <a:defRPr sz="900">
+              <a:defRPr sz="1000">
                 <a:solidFill>
                   <a:srgbClr val="9496A1"/>
                 </a:solidFill>
@@ -1331,7 +1331,7 @@
               <c:strCache>
                 <c:ptCount val="1"/>
                 <c:pt idx="0">
-                  <c:v>Instrumentation coverage</c:v>
+                  <c:v>Signal coverage index</c:v>
                 </c:pt>
               </c:strCache>
             </c:strRef>
@@ -1407,7 +1407,7 @@
               <c:strCache>
                 <c:ptCount val="5"/>
                 <c:pt idx="0">
-                  <c:v>Pre/post shift</c:v>
+                  <c:v>Pre/post delta</c:v>
                 </c:pt>
                 <c:pt idx="1">
                   <c:v>Loop completion 14d</c:v>
@@ -1467,7 +1467,7 @@
           <a:lstStyle/>
           <a:p>
             <a:pPr>
-              <a:defRPr sz="900">
+              <a:defRPr sz="1000">
                 <a:solidFill>
                   <a:srgbClr val="9496A1"/>
                 </a:solidFill>
@@ -1494,7 +1494,7 @@
           <c:spPr>
             <a:ln>
               <a:solidFill>
-                <a:srgbClr val="3D3E47"/>
+                <a:srgbClr val="3A3A42"/>
               </a:solidFill>
             </a:ln>
           </c:spPr>
@@ -1507,7 +1507,7 @@
           <a:lstStyle/>
           <a:p>
             <a:pPr>
-              <a:defRPr sz="900">
+              <a:defRPr sz="1000">
                 <a:solidFill>
                   <a:srgbClr val="9496A1"/>
                 </a:solidFill>
@@ -4579,7 +4579,7 @@
         <p:spPr>
           <a:xfrm>
             <a:off x="502920" y="100584"/>
-            <a:ext cx="7315200" cy="182880"/>
+            <a:ext cx="7772400" cy="182880"/>
           </a:xfrm>
           <a:prstGeom prst="rect">
             <a:avLst/>
@@ -4593,13 +4593,13 @@
           <a:lstStyle/>
           <a:p>
             <a:r>
-              <a:rPr sz="850">
+              <a:rPr sz="900">
                 <a:solidFill>
                   <a:srgbClr val="C8922A"/>
                 </a:solidFill>
                 <a:latin typeface="Consolas"/>
               </a:rPr>
-              <a:t>STILLFORM · APPLIED SCIENCE BRIEF</a:t>
+              <a:t>STILLFORM · EXECUTIVE APPLIED SCIENCE BRIEF</a:t>
             </a:r>
           </a:p>
         </p:txBody>
@@ -4612,8 +4612,8 @@
         </p:nvSpPr>
         <p:spPr>
           <a:xfrm>
-            <a:off x="10149840" y="100584"/>
-            <a:ext cx="1554480" cy="182880"/>
+            <a:off x="10241280" y="100584"/>
+            <a:ext cx="1463040" cy="182880"/>
           </a:xfrm>
           <a:prstGeom prst="rect">
             <a:avLst/>
@@ -4628,7 +4628,7 @@
           <a:p>
             <a:pPr algn="r"/>
             <a:r>
-              <a:rPr sz="850">
+              <a:rPr sz="900">
                 <a:solidFill>
                   <a:srgbClr val="9496A1"/>
                 </a:solidFill>
@@ -4648,7 +4648,7 @@
         <p:spPr>
           <a:xfrm>
             <a:off x="640080" y="640080"/>
-            <a:ext cx="10972800" cy="1005840"/>
+            <a:ext cx="10972800" cy="960120"/>
           </a:xfrm>
           <a:prstGeom prst="rect">
             <a:avLst/>
@@ -4662,13 +4662,13 @@
           <a:lstStyle/>
           <a:p>
             <a:r>
-              <a:rPr sz="3600" b="1">
+              <a:rPr sz="3800" b="1">
                 <a:solidFill>
                   <a:srgbClr val="E8EAF0"/>
                 </a:solidFill>
                 <a:latin typeface="Calibri"/>
               </a:rPr>
-              <a:t>Stillform: Applied Science</a:t>
+              <a:t>What Stillform Is</a:t>
             </a:r>
           </a:p>
         </p:txBody>
@@ -4681,8 +4681,8 @@
         </p:nvSpPr>
         <p:spPr>
           <a:xfrm>
-            <a:off x="658368" y="1417320"/>
-            <a:ext cx="10972800" cy="365760"/>
+            <a:off x="676656" y="1417320"/>
+            <a:ext cx="10881360" cy="411480"/>
           </a:xfrm>
           <a:prstGeom prst="rect">
             <a:avLst/>
@@ -4696,13 +4696,13 @@
           <a:lstStyle/>
           <a:p>
             <a:r>
-              <a:rPr sz="1400">
+              <a:rPr sz="1500">
                 <a:solidFill>
                   <a:srgbClr val="9496A1"/>
                 </a:solidFill>
                 <a:latin typeface="Calibri"/>
               </a:rPr>
-              <a:t>Executive view — mechanism, not marketing</a:t>
+              <a:t>The story anchor before any charts</a:t>
             </a:r>
           </a:p>
         </p:txBody>
@@ -4715,8 +4715,8 @@
         </p:nvSpPr>
         <p:spPr>
           <a:xfrm>
-            <a:off x="777240" y="2011680"/>
-            <a:ext cx="10881360" cy="3749039"/>
+            <a:off x="777240" y="1920240"/>
+            <a:ext cx="10881360" cy="4343400"/>
           </a:xfrm>
           <a:prstGeom prst="rect">
             <a:avLst/>
@@ -4724,9 +4724,9 @@
           <a:solidFill>
             <a:srgbClr val="141418"/>
           </a:solidFill>
-          <a:ln w="11430">
+          <a:ln w="12700">
             <a:solidFill>
-              <a:srgbClr val="3D3E47"/>
+              <a:srgbClr val="3A3A42"/>
             </a:solidFill>
           </a:ln>
         </p:spPr>
@@ -4760,8 +4760,8 @@
         </p:nvSpPr>
         <p:spPr>
           <a:xfrm>
-            <a:off x="1051560" y="2423160"/>
-            <a:ext cx="10241280" cy="3108960"/>
+            <a:off x="1051560" y="2240280"/>
+            <a:ext cx="10241280" cy="3566160"/>
           </a:xfrm>
           <a:prstGeom prst="rect">
             <a:avLst/>
@@ -4769,16 +4769,16 @@
           <a:noFill/>
         </p:spPr>
         <p:txBody>
-          <a:bodyPr wrap="none">
+          <a:bodyPr wrap="square">
             <a:spAutoFit/>
           </a:bodyPr>
           <a:lstStyle/>
           <a:p>
             <a:pPr>
               <a:spcAft>
-                <a:spcPts val="800"/>
+                <a:spcPts val="900"/>
               </a:spcAft>
-              <a:defRPr sz="2000">
+              <a:defRPr sz="2200" b="1">
                 <a:solidFill>
                   <a:srgbClr val="E8EAF0"/>
                 </a:solidFill>
@@ -4786,15 +4786,15 @@
               </a:defRPr>
             </a:pPr>
             <a:r>
-              <a:t>Composure is treated as a trainable operational skill.</a:t>
+              <a:t>Stillform is a composure and self-awareness system.</a:t>
             </a:r>
           </a:p>
           <a:p>
             <a:pPr>
               <a:spcAft>
-                <a:spcPts val="800"/>
+                <a:spcPts val="700"/>
               </a:spcAft>
-              <a:defRPr sz="2000">
+              <a:defRPr sz="1600" b="0">
                 <a:solidFill>
                   <a:srgbClr val="E8EAF0"/>
                 </a:solidFill>
@@ -4802,15 +4802,15 @@
               </a:defRPr>
             </a:pPr>
             <a:r>
-              <a:t>Science domains: metacognition, EQ, impulsivity interruption, microbias conflict correction.</a:t>
+              <a:t>It is not a psychiatry app and not therapy replacement software.</a:t>
             </a:r>
           </a:p>
           <a:p>
             <a:pPr>
               <a:spcAft>
-                <a:spcPts val="800"/>
+                <a:spcPts val="700"/>
               </a:spcAft>
-              <a:defRPr sz="2000">
+              <a:defRPr sz="1600" b="0">
                 <a:solidFill>
                   <a:srgbClr val="E8EAF0"/>
                 </a:solidFill>
@@ -4818,7 +4818,23 @@
               </a:defRPr>
             </a:pPr>
             <a:r>
-              <a:t>Every chart maps to a Stillform mechanism and a measurable telemetry output.</a:t>
+              <a:t>It trains people to read state accurately, interrupt impulsive reactions, and choose better actions under load.</a:t>
+            </a:r>
+          </a:p>
+          <a:p>
+            <a:pPr>
+              <a:spcAft>
+                <a:spcPts val="700"/>
+              </a:spcAft>
+              <a:defRPr sz="1600" b="0">
+                <a:solidFill>
+                  <a:srgbClr val="E8EAF0"/>
+                </a:solidFill>
+                <a:latin typeface="Calibri"/>
+              </a:defRPr>
+            </a:pPr>
+            <a:r>
+              <a:t>Its core mechanism is daily loop execution: morning baseline -&gt; state-aware intervention -&gt; post-shift rating -&gt; evening closure.</a:t>
             </a:r>
           </a:p>
         </p:txBody>
@@ -4832,7 +4848,7 @@
         <p:spPr>
           <a:xfrm>
             <a:off x="685800" y="6428232"/>
-            <a:ext cx="10972800" cy="228600"/>
+            <a:ext cx="10972800" cy="219456"/>
           </a:xfrm>
           <a:prstGeom prst="rect">
             <a:avLst/>
@@ -4846,13 +4862,13 @@
           <a:lstStyle/>
           <a:p>
             <a:r>
-              <a:rPr sz="800">
+              <a:rPr sz="850">
                 <a:solidFill>
                   <a:srgbClr val="9496A1"/>
                 </a:solidFill>
                 <a:latin typeface="Consolas"/>
               </a:rPr>
-              <a:t>Source: Stillform science sheet + App.jsx telemetry model</a:t>
+              <a:t>Source: Stillform product architecture and privacy/disclaimer copy</a:t>
             </a:r>
           </a:p>
         </p:txBody>
@@ -4935,7 +4951,7 @@
         <p:spPr>
           <a:xfrm>
             <a:off x="502920" y="100584"/>
-            <a:ext cx="7315200" cy="182880"/>
+            <a:ext cx="7772400" cy="182880"/>
           </a:xfrm>
           <a:prstGeom prst="rect">
             <a:avLst/>
@@ -4949,13 +4965,13 @@
           <a:lstStyle/>
           <a:p>
             <a:r>
-              <a:rPr sz="850">
+              <a:rPr sz="900">
                 <a:solidFill>
                   <a:srgbClr val="C8922A"/>
                 </a:solidFill>
                 <a:latin typeface="Consolas"/>
               </a:rPr>
-              <a:t>STILLFORM · APPLIED SCIENCE BRIEF</a:t>
+              <a:t>STILLFORM · EXECUTIVE APPLIED SCIENCE BRIEF</a:t>
             </a:r>
           </a:p>
         </p:txBody>
@@ -4968,8 +4984,8 @@
         </p:nvSpPr>
         <p:spPr>
           <a:xfrm>
-            <a:off x="10149840" y="100584"/>
-            <a:ext cx="1554480" cy="182880"/>
+            <a:off x="10241280" y="100584"/>
+            <a:ext cx="1463040" cy="182880"/>
           </a:xfrm>
           <a:prstGeom prst="rect">
             <a:avLst/>
@@ -4984,7 +5000,7 @@
           <a:p>
             <a:pPr algn="r"/>
             <a:r>
-              <a:rPr sz="850">
+              <a:rPr sz="900">
                 <a:solidFill>
                   <a:srgbClr val="9496A1"/>
                 </a:solidFill>
@@ -5004,7 +5020,7 @@
         <p:spPr>
           <a:xfrm>
             <a:off x="640080" y="640080"/>
-            <a:ext cx="10972800" cy="1005840"/>
+            <a:ext cx="10972800" cy="960120"/>
           </a:xfrm>
           <a:prstGeom prst="rect">
             <a:avLst/>
@@ -5018,13 +5034,13 @@
           <a:lstStyle/>
           <a:p>
             <a:r>
-              <a:rPr sz="3600" b="1">
+              <a:rPr sz="3800" b="1">
                 <a:solidFill>
                   <a:srgbClr val="E8EAF0"/>
                 </a:solidFill>
                 <a:latin typeface="Calibri"/>
               </a:rPr>
-              <a:t>Global Context</a:t>
+              <a:t>Why These Visuals Matter</a:t>
             </a:r>
           </a:p>
         </p:txBody>
@@ -5037,8 +5053,8 @@
         </p:nvSpPr>
         <p:spPr>
           <a:xfrm>
-            <a:off x="658368" y="1417320"/>
-            <a:ext cx="10972800" cy="365760"/>
+            <a:off x="676656" y="1417320"/>
+            <a:ext cx="10881360" cy="411480"/>
           </a:xfrm>
           <a:prstGeom prst="rect">
             <a:avLst/>
@@ -5052,13 +5068,13 @@
           <a:lstStyle/>
           <a:p>
             <a:r>
-              <a:rPr sz="1400">
+              <a:rPr sz="1500">
                 <a:solidFill>
                   <a:srgbClr val="9496A1"/>
                 </a:solidFill>
                 <a:latin typeface="Calibri"/>
               </a:rPr>
-              <a:t>Pressure remains high; composure capacity is uneven</a:t>
+              <a:t>Each chart answers an executive decision question</a:t>
             </a:r>
           </a:p>
         </p:txBody>
@@ -5072,7 +5088,7 @@
         <p:spPr>
           <a:xfrm>
             <a:off x="685800" y="1874519"/>
-            <a:ext cx="5440680" cy="4297680"/>
+            <a:ext cx="11064240" cy="4389120"/>
           </a:xfrm>
           <a:prstGeom prst="rect">
             <a:avLst/>
@@ -5080,9 +5096,9 @@
           <a:solidFill>
             <a:srgbClr val="141418"/>
           </a:solidFill>
-          <a:ln w="11430">
+          <a:ln w="12700">
             <a:solidFill>
-              <a:srgbClr val="3D3E47"/>
+              <a:srgbClr val="3A3A42"/>
             </a:solidFill>
           </a:ln>
         </p:spPr>
@@ -5110,95 +5126,449 @@
       </p:sp>
       <p:graphicFrame>
         <p:nvGraphicFramePr>
-          <p:cNvPr id="8" name="Chart 7"/>
+          <p:cNvPr id="8" name="Table 7"/>
           <p:cNvGraphicFramePr>
             <a:graphicFrameLocks noGrp="1"/>
           </p:cNvGraphicFramePr>
           <p:nvPr/>
         </p:nvGraphicFramePr>
         <p:xfrm>
-          <a:off x="914400" y="2240280"/>
-          <a:ext cx="4983480" cy="3611880"/>
+          <a:off x="914400" y="2148840"/>
+          <a:ext cx="10607039" cy="3840480"/>
         </p:xfrm>
         <a:graphic>
-          <a:graphicData uri="http://schemas.openxmlformats.org/drawingml/2006/chart">
-            <c:chart xmlns:c="http://schemas.openxmlformats.org/drawingml/2006/chart" r:id="rId2"/>
+          <a:graphicData uri="http://schemas.openxmlformats.org/drawingml/2006/table">
+            <a:tbl>
+              <a:tblPr firstRow="1" bandRow="1">
+                <a:tableStyleId>{5C22544A-7EE6-4342-B048-85BDC9FD1C3A}</a:tableStyleId>
+              </a:tblPr>
+              <a:tblGrid>
+                <a:gridCol w="2560320"/>
+                <a:gridCol w="3749039"/>
+                <a:gridCol w="4297680"/>
+              </a:tblGrid>
+              <a:tr h="640080">
+                <a:tc>
+                  <a:txBody>
+                    <a:bodyPr/>
+                    <a:lstStyle/>
+                    <a:p>
+                      <a:r>
+                        <a:rPr sz="1100" b="1">
+                          <a:solidFill>
+                            <a:srgbClr val="C8922A"/>
+                          </a:solidFill>
+                          <a:latin typeface="Calibri"/>
+                        </a:rPr>
+                        <a:t>Visual</a:t>
+                      </a:r>
+                    </a:p>
+                  </a:txBody>
+                  <a:tcPr>
+                    <a:solidFill>
+                      <a:srgbClr val="141418"/>
+                    </a:solidFill>
+                  </a:tcPr>
+                </a:tc>
+                <a:tc>
+                  <a:txBody>
+                    <a:bodyPr/>
+                    <a:lstStyle/>
+                    <a:p>
+                      <a:r>
+                        <a:rPr sz="1100" b="1">
+                          <a:solidFill>
+                            <a:srgbClr val="C8922A"/>
+                          </a:solidFill>
+                          <a:latin typeface="Calibri"/>
+                        </a:rPr>
+                        <a:t>Question</a:t>
+                      </a:r>
+                    </a:p>
+                  </a:txBody>
+                  <a:tcPr>
+                    <a:solidFill>
+                      <a:srgbClr val="141418"/>
+                    </a:solidFill>
+                  </a:tcPr>
+                </a:tc>
+                <a:tc>
+                  <a:txBody>
+                    <a:bodyPr/>
+                    <a:lstStyle/>
+                    <a:p>
+                      <a:r>
+                        <a:rPr sz="1100" b="1">
+                          <a:solidFill>
+                            <a:srgbClr val="C8922A"/>
+                          </a:solidFill>
+                          <a:latin typeface="Calibri"/>
+                        </a:rPr>
+                        <a:t>Why it matters</a:t>
+                      </a:r>
+                    </a:p>
+                  </a:txBody>
+                  <a:tcPr>
+                    <a:solidFill>
+                      <a:srgbClr val="141418"/>
+                    </a:solidFill>
+                  </a:tcPr>
+                </a:tc>
+              </a:tr>
+              <a:tr h="640080">
+                <a:tc>
+                  <a:txBody>
+                    <a:bodyPr/>
+                    <a:lstStyle/>
+                    <a:p>
+                      <a:r>
+                        <a:rPr sz="1000" b="0">
+                          <a:solidFill>
+                            <a:srgbClr val="E8EAF0"/>
+                          </a:solidFill>
+                          <a:latin typeface="Calibri"/>
+                        </a:rPr>
+                        <a:t>Global context</a:t>
+                      </a:r>
+                    </a:p>
+                  </a:txBody>
+                  <a:tcPr>
+                    <a:solidFill>
+                      <a:srgbClr val="0A0A0C"/>
+                    </a:solidFill>
+                  </a:tcPr>
+                </a:tc>
+                <a:tc>
+                  <a:txBody>
+                    <a:bodyPr/>
+                    <a:lstStyle/>
+                    <a:p>
+                      <a:r>
+                        <a:rPr sz="1000" b="0">
+                          <a:solidFill>
+                            <a:srgbClr val="E8EAF0"/>
+                          </a:solidFill>
+                          <a:latin typeface="Calibri"/>
+                        </a:rPr>
+                        <a:t>Is composure demand real?</a:t>
+                      </a:r>
+                    </a:p>
+                  </a:txBody>
+                  <a:tcPr>
+                    <a:solidFill>
+                      <a:srgbClr val="0A0A0C"/>
+                    </a:solidFill>
+                  </a:tcPr>
+                </a:tc>
+                <a:tc>
+                  <a:txBody>
+                    <a:bodyPr/>
+                    <a:lstStyle/>
+                    <a:p>
+                      <a:r>
+                        <a:rPr sz="1000" b="0">
+                          <a:solidFill>
+                            <a:srgbClr val="E8EAF0"/>
+                          </a:solidFill>
+                          <a:latin typeface="Calibri"/>
+                        </a:rPr>
+                        <a:t>Shows pressure environment users live in.</a:t>
+                      </a:r>
+                    </a:p>
+                  </a:txBody>
+                  <a:tcPr>
+                    <a:solidFill>
+                      <a:srgbClr val="0A0A0C"/>
+                    </a:solidFill>
+                  </a:tcPr>
+                </a:tc>
+              </a:tr>
+              <a:tr h="640080">
+                <a:tc>
+                  <a:txBody>
+                    <a:bodyPr/>
+                    <a:lstStyle/>
+                    <a:p>
+                      <a:r>
+                        <a:rPr sz="1000" b="0">
+                          <a:solidFill>
+                            <a:srgbClr val="E8EAF0"/>
+                          </a:solidFill>
+                          <a:latin typeface="Calibri"/>
+                        </a:rPr>
+                        <a:t>Metacognition</a:t>
+                      </a:r>
+                    </a:p>
+                  </a:txBody>
+                  <a:tcPr>
+                    <a:solidFill>
+                      <a:srgbClr val="1A1A1F"/>
+                    </a:solidFill>
+                  </a:tcPr>
+                </a:tc>
+                <a:tc>
+                  <a:txBody>
+                    <a:bodyPr/>
+                    <a:lstStyle/>
+                    <a:p>
+                      <a:r>
+                        <a:rPr sz="1000" b="0">
+                          <a:solidFill>
+                            <a:srgbClr val="E8EAF0"/>
+                          </a:solidFill>
+                          <a:latin typeface="Calibri"/>
+                        </a:rPr>
+                        <a:t>Can users monitor state better?</a:t>
+                      </a:r>
+                    </a:p>
+                  </a:txBody>
+                  <a:tcPr>
+                    <a:solidFill>
+                      <a:srgbClr val="1A1A1F"/>
+                    </a:solidFill>
+                  </a:tcPr>
+                </a:tc>
+                <a:tc>
+                  <a:txBody>
+                    <a:bodyPr/>
+                    <a:lstStyle/>
+                    <a:p>
+                      <a:r>
+                        <a:rPr sz="1000" b="0">
+                          <a:solidFill>
+                            <a:srgbClr val="E8EAF0"/>
+                          </a:solidFill>
+                          <a:latin typeface="Calibri"/>
+                        </a:rPr>
+                        <a:t>Validates awareness training mechanics.</a:t>
+                      </a:r>
+                    </a:p>
+                  </a:txBody>
+                  <a:tcPr>
+                    <a:solidFill>
+                      <a:srgbClr val="1A1A1F"/>
+                    </a:solidFill>
+                  </a:tcPr>
+                </a:tc>
+              </a:tr>
+              <a:tr h="640080">
+                <a:tc>
+                  <a:txBody>
+                    <a:bodyPr/>
+                    <a:lstStyle/>
+                    <a:p>
+                      <a:r>
+                        <a:rPr sz="1000" b="0">
+                          <a:solidFill>
+                            <a:srgbClr val="E8EAF0"/>
+                          </a:solidFill>
+                          <a:latin typeface="Calibri"/>
+                        </a:rPr>
+                        <a:t>EQ/microbias</a:t>
+                      </a:r>
+                    </a:p>
+                  </a:txBody>
+                  <a:tcPr>
+                    <a:solidFill>
+                      <a:srgbClr val="0A0A0C"/>
+                    </a:solidFill>
+                  </a:tcPr>
+                </a:tc>
+                <a:tc>
+                  <a:txBody>
+                    <a:bodyPr/>
+                    <a:lstStyle/>
+                    <a:p>
+                      <a:r>
+                        <a:rPr sz="1000" b="0">
+                          <a:solidFill>
+                            <a:srgbClr val="E8EAF0"/>
+                          </a:solidFill>
+                          <a:latin typeface="Calibri"/>
+                        </a:rPr>
+                        <a:t>Are social reads cleaner?</a:t>
+                      </a:r>
+                    </a:p>
+                  </a:txBody>
+                  <a:tcPr>
+                    <a:solidFill>
+                      <a:srgbClr val="0A0A0C"/>
+                    </a:solidFill>
+                  </a:tcPr>
+                </a:tc>
+                <a:tc>
+                  <a:txBody>
+                    <a:bodyPr/>
+                    <a:lstStyle/>
+                    <a:p>
+                      <a:r>
+                        <a:rPr sz="1000" b="0">
+                          <a:solidFill>
+                            <a:srgbClr val="E8EAF0"/>
+                          </a:solidFill>
+                          <a:latin typeface="Calibri"/>
+                        </a:rPr>
+                        <a:t>Reduces conflict misreads and relational cost.</a:t>
+                      </a:r>
+                    </a:p>
+                  </a:txBody>
+                  <a:tcPr>
+                    <a:solidFill>
+                      <a:srgbClr val="0A0A0C"/>
+                    </a:solidFill>
+                  </a:tcPr>
+                </a:tc>
+              </a:tr>
+              <a:tr h="640080">
+                <a:tc>
+                  <a:txBody>
+                    <a:bodyPr/>
+                    <a:lstStyle/>
+                    <a:p>
+                      <a:r>
+                        <a:rPr sz="1000" b="0">
+                          <a:solidFill>
+                            <a:srgbClr val="E8EAF0"/>
+                          </a:solidFill>
+                          <a:latin typeface="Calibri"/>
+                        </a:rPr>
+                        <a:t>Impulsivity</a:t>
+                      </a:r>
+                    </a:p>
+                  </a:txBody>
+                  <a:tcPr>
+                    <a:solidFill>
+                      <a:srgbClr val="1A1A1F"/>
+                    </a:solidFill>
+                  </a:tcPr>
+                </a:tc>
+                <a:tc>
+                  <a:txBody>
+                    <a:bodyPr/>
+                    <a:lstStyle/>
+                    <a:p>
+                      <a:r>
+                        <a:rPr sz="1000" b="0">
+                          <a:solidFill>
+                            <a:srgbClr val="E8EAF0"/>
+                          </a:solidFill>
+                          <a:latin typeface="Calibri"/>
+                        </a:rPr>
+                        <a:t>Can reactions be interrupted?</a:t>
+                      </a:r>
+                    </a:p>
+                  </a:txBody>
+                  <a:tcPr>
+                    <a:solidFill>
+                      <a:srgbClr val="1A1A1F"/>
+                    </a:solidFill>
+                  </a:tcPr>
+                </a:tc>
+                <a:tc>
+                  <a:txBody>
+                    <a:bodyPr/>
+                    <a:lstStyle/>
+                    <a:p>
+                      <a:r>
+                        <a:rPr sz="1000" b="0">
+                          <a:solidFill>
+                            <a:srgbClr val="E8EAF0"/>
+                          </a:solidFill>
+                          <a:latin typeface="Calibri"/>
+                        </a:rPr>
+                        <a:t>Protects decisions in high-arousal windows.</a:t>
+                      </a:r>
+                    </a:p>
+                  </a:txBody>
+                  <a:tcPr>
+                    <a:solidFill>
+                      <a:srgbClr val="1A1A1F"/>
+                    </a:solidFill>
+                  </a:tcPr>
+                </a:tc>
+              </a:tr>
+              <a:tr h="640080">
+                <a:tc>
+                  <a:txBody>
+                    <a:bodyPr/>
+                    <a:lstStyle/>
+                    <a:p>
+                      <a:r>
+                        <a:rPr sz="1000" b="0">
+                          <a:solidFill>
+                            <a:srgbClr val="E8EAF0"/>
+                          </a:solidFill>
+                          <a:latin typeface="Calibri"/>
+                        </a:rPr>
+                        <a:t>Telemetry layer</a:t>
+                      </a:r>
+                    </a:p>
+                  </a:txBody>
+                  <a:tcPr>
+                    <a:solidFill>
+                      <a:srgbClr val="0A0A0C"/>
+                    </a:solidFill>
+                  </a:tcPr>
+                </a:tc>
+                <a:tc>
+                  <a:txBody>
+                    <a:bodyPr/>
+                    <a:lstStyle/>
+                    <a:p>
+                      <a:r>
+                        <a:rPr sz="1000" b="0">
+                          <a:solidFill>
+                            <a:srgbClr val="E8EAF0"/>
+                          </a:solidFill>
+                          <a:latin typeface="Calibri"/>
+                        </a:rPr>
+                        <a:t>Can we prove improvement?</a:t>
+                      </a:r>
+                    </a:p>
+                  </a:txBody>
+                  <a:tcPr>
+                    <a:solidFill>
+                      <a:srgbClr val="0A0A0C"/>
+                    </a:solidFill>
+                  </a:tcPr>
+                </a:tc>
+                <a:tc>
+                  <a:txBody>
+                    <a:bodyPr/>
+                    <a:lstStyle/>
+                    <a:p>
+                      <a:r>
+                        <a:rPr sz="1000" b="0">
+                          <a:solidFill>
+                            <a:srgbClr val="E8EAF0"/>
+                          </a:solidFill>
+                          <a:latin typeface="Calibri"/>
+                        </a:rPr>
+                        <a:t>Moves from claims to measurable evidence.</a:t>
+                      </a:r>
+                    </a:p>
+                  </a:txBody>
+                  <a:tcPr>
+                    <a:solidFill>
+                      <a:srgbClr val="0A0A0C"/>
+                    </a:solidFill>
+                  </a:tcPr>
+                </a:tc>
+              </a:tr>
+            </a:tbl>
           </a:graphicData>
         </a:graphic>
       </p:graphicFrame>
       <p:sp>
         <p:nvSpPr>
-          <p:cNvPr id="9" name="Rectangle 8"/>
-          <p:cNvSpPr/>
-          <p:nvPr/>
-        </p:nvSpPr>
-        <p:spPr>
-          <a:xfrm>
-            <a:off x="6355080" y="1874519"/>
-            <a:ext cx="5349240" cy="4297680"/>
-          </a:xfrm>
-          <a:prstGeom prst="rect">
-            <a:avLst/>
-          </a:prstGeom>
-          <a:solidFill>
-            <a:srgbClr val="141418"/>
-          </a:solidFill>
-          <a:ln w="11430">
-            <a:solidFill>
-              <a:srgbClr val="3D3E47"/>
-            </a:solidFill>
-          </a:ln>
-        </p:spPr>
-        <p:style>
-          <a:lnRef idx="1">
-            <a:schemeClr val="accent1"/>
-          </a:lnRef>
-          <a:fillRef idx="3">
-            <a:schemeClr val="accent1"/>
-          </a:fillRef>
-          <a:effectRef idx="2">
-            <a:schemeClr val="accent1"/>
-          </a:effectRef>
-          <a:fontRef idx="minor">
-            <a:schemeClr val="lt1"/>
-          </a:fontRef>
-        </p:style>
-        <p:txBody>
-          <a:bodyPr rtlCol="0" anchor="ctr"/>
-          <a:lstStyle/>
-          <a:p>
-            <a:pPr algn="ctr"/>
-          </a:p>
-        </p:txBody>
-      </p:sp>
-      <p:graphicFrame>
-        <p:nvGraphicFramePr>
-          <p:cNvPr id="10" name="Chart 9"/>
-          <p:cNvGraphicFramePr>
-            <a:graphicFrameLocks noGrp="1"/>
-          </p:cNvGraphicFramePr>
-          <p:nvPr/>
-        </p:nvGraphicFramePr>
-        <p:xfrm>
-          <a:off x="6583680" y="2240280"/>
-          <a:ext cx="4892040" cy="3611880"/>
-        </p:xfrm>
-        <a:graphic>
-          <a:graphicData uri="http://schemas.openxmlformats.org/drawingml/2006/chart">
-            <c:chart xmlns:c="http://schemas.openxmlformats.org/drawingml/2006/chart" r:id="rId3"/>
-          </a:graphicData>
-        </a:graphic>
-      </p:graphicFrame>
-      <p:sp>
-        <p:nvSpPr>
-          <p:cNvPr id="11" name="TextBox 10"/>
+          <p:cNvPr id="9" name="TextBox 8"/>
           <p:cNvSpPr txBox="1"/>
           <p:nvPr/>
         </p:nvSpPr>
         <p:spPr>
           <a:xfrm>
             <a:off x="685800" y="6428232"/>
-            <a:ext cx="10972800" cy="228600"/>
+            <a:ext cx="10972800" cy="219456"/>
           </a:xfrm>
           <a:prstGeom prst="rect">
             <a:avLst/>
@@ -5212,13 +5582,13 @@
           <a:lstStyle/>
           <a:p>
             <a:r>
-              <a:rPr sz="800">
+              <a:rPr sz="850">
                 <a:solidFill>
                   <a:srgbClr val="9496A1"/>
                 </a:solidFill>
                 <a:latin typeface="Consolas"/>
               </a:rPr>
-              <a:t>Source: Gallup State of the World's Emotional Health (2024)</a:t>
+              <a:t>Source: Deck framing logic tied to Stillform mechanism audit</a:t>
             </a:r>
           </a:p>
         </p:txBody>
@@ -5301,7 +5671,7 @@
         <p:spPr>
           <a:xfrm>
             <a:off x="502920" y="100584"/>
-            <a:ext cx="7315200" cy="182880"/>
+            <a:ext cx="7772400" cy="182880"/>
           </a:xfrm>
           <a:prstGeom prst="rect">
             <a:avLst/>
@@ -5315,13 +5685,13 @@
           <a:lstStyle/>
           <a:p>
             <a:r>
-              <a:rPr sz="850">
+              <a:rPr sz="900">
                 <a:solidFill>
                   <a:srgbClr val="C8922A"/>
                 </a:solidFill>
                 <a:latin typeface="Consolas"/>
               </a:rPr>
-              <a:t>STILLFORM · APPLIED SCIENCE BRIEF</a:t>
+              <a:t>STILLFORM · EXECUTIVE APPLIED SCIENCE BRIEF</a:t>
             </a:r>
           </a:p>
         </p:txBody>
@@ -5334,8 +5704,8 @@
         </p:nvSpPr>
         <p:spPr>
           <a:xfrm>
-            <a:off x="10149840" y="100584"/>
-            <a:ext cx="1554480" cy="182880"/>
+            <a:off x="10241280" y="100584"/>
+            <a:ext cx="1463040" cy="182880"/>
           </a:xfrm>
           <a:prstGeom prst="rect">
             <a:avLst/>
@@ -5350,7 +5720,7 @@
           <a:p>
             <a:pPr algn="r"/>
             <a:r>
-              <a:rPr sz="850">
+              <a:rPr sz="900">
                 <a:solidFill>
                   <a:srgbClr val="9496A1"/>
                 </a:solidFill>
@@ -5370,7 +5740,7 @@
         <p:spPr>
           <a:xfrm>
             <a:off x="640080" y="640080"/>
-            <a:ext cx="10972800" cy="1005840"/>
+            <a:ext cx="10972800" cy="960120"/>
           </a:xfrm>
           <a:prstGeom prst="rect">
             <a:avLst/>
@@ -5384,13 +5754,13 @@
           <a:lstStyle/>
           <a:p>
             <a:r>
-              <a:rPr sz="3600" b="1">
+              <a:rPr sz="3800" b="1">
                 <a:solidFill>
                   <a:srgbClr val="E8EAF0"/>
                 </a:solidFill>
                 <a:latin typeface="Calibri"/>
               </a:rPr>
-              <a:t>How Stillform Works</a:t>
+              <a:t>Global Context</a:t>
             </a:r>
           </a:p>
         </p:txBody>
@@ -5403,8 +5773,8 @@
         </p:nvSpPr>
         <p:spPr>
           <a:xfrm>
-            <a:off x="658368" y="1417320"/>
-            <a:ext cx="10972800" cy="365760"/>
+            <a:off x="676656" y="1417320"/>
+            <a:ext cx="10881360" cy="411480"/>
           </a:xfrm>
           <a:prstGeom prst="rect">
             <a:avLst/>
@@ -5418,595 +5788,153 @@
           <a:lstStyle/>
           <a:p>
             <a:r>
-              <a:rPr sz="1400">
+              <a:rPr sz="1500">
                 <a:solidFill>
                   <a:srgbClr val="9496A1"/>
                 </a:solidFill>
                 <a:latin typeface="Calibri"/>
               </a:rPr>
-              <a:t>Applied science -&gt; mechanism -&gt; signal</a:t>
-            </a:r>
+              <a:t>Pressure remains high; composure capacity is uneven</a:t>
+            </a:r>
+          </a:p>
+        </p:txBody>
+      </p:sp>
+      <p:sp>
+        <p:nvSpPr>
+          <p:cNvPr id="7" name="Rectangle 6"/>
+          <p:cNvSpPr/>
+          <p:nvPr/>
+        </p:nvSpPr>
+        <p:spPr>
+          <a:xfrm>
+            <a:off x="685800" y="1874519"/>
+            <a:ext cx="5486400" cy="4389120"/>
+          </a:xfrm>
+          <a:prstGeom prst="rect">
+            <a:avLst/>
+          </a:prstGeom>
+          <a:solidFill>
+            <a:srgbClr val="141418"/>
+          </a:solidFill>
+          <a:ln w="12700">
+            <a:solidFill>
+              <a:srgbClr val="3A3A42"/>
+            </a:solidFill>
+          </a:ln>
+        </p:spPr>
+        <p:style>
+          <a:lnRef idx="1">
+            <a:schemeClr val="accent1"/>
+          </a:lnRef>
+          <a:fillRef idx="3">
+            <a:schemeClr val="accent1"/>
+          </a:fillRef>
+          <a:effectRef idx="2">
+            <a:schemeClr val="accent1"/>
+          </a:effectRef>
+          <a:fontRef idx="minor">
+            <a:schemeClr val="lt1"/>
+          </a:fontRef>
+        </p:style>
+        <p:txBody>
+          <a:bodyPr rtlCol="0" anchor="ctr"/>
+          <a:lstStyle/>
+          <a:p>
+            <a:pPr algn="ctr"/>
           </a:p>
         </p:txBody>
       </p:sp>
       <p:graphicFrame>
         <p:nvGraphicFramePr>
-          <p:cNvPr id="7" name="Table 6"/>
+          <p:cNvPr id="8" name="Chart 7"/>
           <p:cNvGraphicFramePr>
             <a:graphicFrameLocks noGrp="1"/>
           </p:cNvGraphicFramePr>
           <p:nvPr/>
         </p:nvGraphicFramePr>
         <p:xfrm>
-          <a:off x="594360" y="1828800"/>
-          <a:ext cx="11064240" cy="4526280"/>
+          <a:off x="914400" y="2240280"/>
+          <a:ext cx="5074920" cy="3611880"/>
         </p:xfrm>
         <a:graphic>
-          <a:graphicData uri="http://schemas.openxmlformats.org/drawingml/2006/table">
-            <a:tbl>
-              <a:tblPr firstRow="1" bandRow="1">
-                <a:tableStyleId>{5C22544A-7EE6-4342-B048-85BDC9FD1C3A}</a:tableStyleId>
-              </a:tblPr>
-              <a:tblGrid>
-                <a:gridCol w="1920240"/>
-                <a:gridCol w="2926080"/>
-                <a:gridCol w="3291840"/>
-                <a:gridCol w="2926080"/>
-              </a:tblGrid>
-              <a:tr h="754380">
-                <a:tc>
-                  <a:txBody>
-                    <a:bodyPr/>
-                    <a:lstStyle/>
-                    <a:p>
-                      <a:r>
-                        <a:rPr sz="1000" b="1">
-                          <a:solidFill>
-                            <a:srgbClr val="C8922A"/>
-                          </a:solidFill>
-                          <a:latin typeface="Calibri"/>
-                        </a:rPr>
-                        <a:t>Domain</a:t>
-                      </a:r>
-                    </a:p>
-                  </a:txBody>
-                  <a:tcPr>
-                    <a:solidFill>
-                      <a:srgbClr val="141418"/>
-                    </a:solidFill>
-                  </a:tcPr>
-                </a:tc>
-                <a:tc>
-                  <a:txBody>
-                    <a:bodyPr/>
-                    <a:lstStyle/>
-                    <a:p>
-                      <a:r>
-                        <a:rPr sz="1000" b="1">
-                          <a:solidFill>
-                            <a:srgbClr val="C8922A"/>
-                          </a:solidFill>
-                          <a:latin typeface="Calibri"/>
-                        </a:rPr>
-                        <a:t>Issue</a:t>
-                      </a:r>
-                    </a:p>
-                  </a:txBody>
-                  <a:tcPr>
-                    <a:solidFill>
-                      <a:srgbClr val="141418"/>
-                    </a:solidFill>
-                  </a:tcPr>
-                </a:tc>
-                <a:tc>
-                  <a:txBody>
-                    <a:bodyPr/>
-                    <a:lstStyle/>
-                    <a:p>
-                      <a:r>
-                        <a:rPr sz="1000" b="1">
-                          <a:solidFill>
-                            <a:srgbClr val="C8922A"/>
-                          </a:solidFill>
-                          <a:latin typeface="Calibri"/>
-                        </a:rPr>
-                        <a:t>Stillform mechanism</a:t>
-                      </a:r>
-                    </a:p>
-                  </a:txBody>
-                  <a:tcPr>
-                    <a:solidFill>
-                      <a:srgbClr val="141418"/>
-                    </a:solidFill>
-                  </a:tcPr>
-                </a:tc>
-                <a:tc>
-                  <a:txBody>
-                    <a:bodyPr/>
-                    <a:lstStyle/>
-                    <a:p>
-                      <a:r>
-                        <a:rPr sz="1000" b="1">
-                          <a:solidFill>
-                            <a:srgbClr val="C8922A"/>
-                          </a:solidFill>
-                          <a:latin typeface="Calibri"/>
-                        </a:rPr>
-                        <a:t>Measured signal</a:t>
-                      </a:r>
-                    </a:p>
-                  </a:txBody>
-                  <a:tcPr>
-                    <a:solidFill>
-                      <a:srgbClr val="141418"/>
-                    </a:solidFill>
-                  </a:tcPr>
-                </a:tc>
-              </a:tr>
-              <a:tr h="754380">
-                <a:tc>
-                  <a:txBody>
-                    <a:bodyPr/>
-                    <a:lstStyle/>
-                    <a:p>
-                      <a:r>
-                        <a:rPr sz="950" b="0">
-                          <a:solidFill>
-                            <a:srgbClr val="E8EAF0"/>
-                          </a:solidFill>
-                          <a:latin typeface="Calibri"/>
-                        </a:rPr>
-                        <a:t>Metacognition</a:t>
-                      </a:r>
-                    </a:p>
-                  </a:txBody>
-                  <a:tcPr>
-                    <a:solidFill>
-                      <a:srgbClr val="0A0A0C"/>
-                    </a:solidFill>
-                  </a:tcPr>
-                </a:tc>
-                <a:tc>
-                  <a:txBody>
-                    <a:bodyPr/>
-                    <a:lstStyle/>
-                    <a:p>
-                      <a:r>
-                        <a:rPr sz="950" b="0">
-                          <a:solidFill>
-                            <a:srgbClr val="E8EAF0"/>
-                          </a:solidFill>
-                          <a:latin typeface="Calibri"/>
-                        </a:rPr>
-                        <a:t>High stress narrows self-monitoring</a:t>
-                      </a:r>
-                    </a:p>
-                  </a:txBody>
-                  <a:tcPr>
-                    <a:solidFill>
-                      <a:srgbClr val="0A0A0C"/>
-                    </a:solidFill>
-                  </a:tcPr>
-                </a:tc>
-                <a:tc>
-                  <a:txBody>
-                    <a:bodyPr/>
-                    <a:lstStyle/>
-                    <a:p>
-                      <a:r>
-                        <a:rPr sz="950" b="0">
-                          <a:solidFill>
-                            <a:srgbClr val="E8EAF0"/>
-                          </a:solidFill>
-                          <a:latin typeface="Calibri"/>
-                        </a:rPr>
-                        <a:t>Affect labeling + pattern reflection</a:t>
-                      </a:r>
-                    </a:p>
-                  </a:txBody>
-                  <a:tcPr>
-                    <a:solidFill>
-                      <a:srgbClr val="0A0A0C"/>
-                    </a:solidFill>
-                  </a:tcPr>
-                </a:tc>
-                <a:tc>
-                  <a:txBody>
-                    <a:bodyPr/>
-                    <a:lstStyle/>
-                    <a:p>
-                      <a:r>
-                        <a:rPr sz="950" b="0">
-                          <a:solidFill>
-                            <a:srgbClr val="E8EAF0"/>
-                          </a:solidFill>
-                          <a:latin typeface="Calibri"/>
-                        </a:rPr>
-                        <a:t>Pre/post composure shift</a:t>
-                      </a:r>
-                    </a:p>
-                  </a:txBody>
-                  <a:tcPr>
-                    <a:solidFill>
-                      <a:srgbClr val="0A0A0C"/>
-                    </a:solidFill>
-                  </a:tcPr>
-                </a:tc>
-              </a:tr>
-              <a:tr h="754380">
-                <a:tc>
-                  <a:txBody>
-                    <a:bodyPr/>
-                    <a:lstStyle/>
-                    <a:p>
-                      <a:r>
-                        <a:rPr sz="950" b="0">
-                          <a:solidFill>
-                            <a:srgbClr val="E8EAF0"/>
-                          </a:solidFill>
-                          <a:latin typeface="Calibri"/>
-                        </a:rPr>
-                        <a:t>EQ</a:t>
-                      </a:r>
-                    </a:p>
-                  </a:txBody>
-                  <a:tcPr>
-                    <a:solidFill>
-                      <a:srgbClr val="1A1A1F"/>
-                    </a:solidFill>
-                  </a:tcPr>
-                </a:tc>
-                <a:tc>
-                  <a:txBody>
-                    <a:bodyPr/>
-                    <a:lstStyle/>
-                    <a:p>
-                      <a:r>
-                        <a:rPr sz="950" b="0">
-                          <a:solidFill>
-                            <a:srgbClr val="E8EAF0"/>
-                          </a:solidFill>
-                          <a:latin typeface="Calibri"/>
-                        </a:rPr>
-                        <a:t>State noise distorts social reads</a:t>
-                      </a:r>
-                    </a:p>
-                  </a:txBody>
-                  <a:tcPr>
-                    <a:solidFill>
-                      <a:srgbClr val="1A1A1F"/>
-                    </a:solidFill>
-                  </a:tcPr>
-                </a:tc>
-                <a:tc>
-                  <a:txBody>
-                    <a:bodyPr/>
-                    <a:lstStyle/>
-                    <a:p>
-                      <a:r>
-                        <a:rPr sz="950" b="0">
-                          <a:solidFill>
-                            <a:srgbClr val="E8EAF0"/>
-                          </a:solidFill>
-                          <a:latin typeface="Calibri"/>
-                        </a:rPr>
-                        <a:t>Bio-filter + microbias prompting</a:t>
-                      </a:r>
-                    </a:p>
-                  </a:txBody>
-                  <a:tcPr>
-                    <a:solidFill>
-                      <a:srgbClr val="1A1A1F"/>
-                    </a:solidFill>
-                  </a:tcPr>
-                </a:tc>
-                <a:tc>
-                  <a:txBody>
-                    <a:bodyPr/>
-                    <a:lstStyle/>
-                    <a:p>
-                      <a:r>
-                        <a:rPr sz="950" b="0">
-                          <a:solidFill>
-                            <a:srgbClr val="E8EAF0"/>
-                          </a:solidFill>
-                          <a:latin typeface="Calibri"/>
-                        </a:rPr>
-                        <a:t>Conflict-loop reduction</a:t>
-                      </a:r>
-                    </a:p>
-                  </a:txBody>
-                  <a:tcPr>
-                    <a:solidFill>
-                      <a:srgbClr val="1A1A1F"/>
-                    </a:solidFill>
-                  </a:tcPr>
-                </a:tc>
-              </a:tr>
-              <a:tr h="754380">
-                <a:tc>
-                  <a:txBody>
-                    <a:bodyPr/>
-                    <a:lstStyle/>
-                    <a:p>
-                      <a:r>
-                        <a:rPr sz="950" b="0">
-                          <a:solidFill>
-                            <a:srgbClr val="E8EAF0"/>
-                          </a:solidFill>
-                          <a:latin typeface="Calibri"/>
-                        </a:rPr>
-                        <a:t>Composure</a:t>
-                      </a:r>
-                    </a:p>
-                  </a:txBody>
-                  <a:tcPr>
-                    <a:solidFill>
-                      <a:srgbClr val="0A0A0C"/>
-                    </a:solidFill>
-                  </a:tcPr>
-                </a:tc>
-                <a:tc>
-                  <a:txBody>
-                    <a:bodyPr/>
-                    <a:lstStyle/>
-                    <a:p>
-                      <a:r>
-                        <a:rPr sz="950" b="0">
-                          <a:solidFill>
-                            <a:srgbClr val="E8EAF0"/>
-                          </a:solidFill>
-                          <a:latin typeface="Calibri"/>
-                        </a:rPr>
-                        <a:t>Inconsistent daily regulation</a:t>
-                      </a:r>
-                    </a:p>
-                  </a:txBody>
-                  <a:tcPr>
-                    <a:solidFill>
-                      <a:srgbClr val="0A0A0C"/>
-                    </a:solidFill>
-                  </a:tcPr>
-                </a:tc>
-                <a:tc>
-                  <a:txBody>
-                    <a:bodyPr/>
-                    <a:lstStyle/>
-                    <a:p>
-                      <a:r>
-                        <a:rPr sz="950" b="0">
-                          <a:solidFill>
-                            <a:srgbClr val="E8EAF0"/>
-                          </a:solidFill>
-                          <a:latin typeface="Calibri"/>
-                        </a:rPr>
-                        <a:t>Morning baseline + EOD close</a:t>
-                      </a:r>
-                    </a:p>
-                  </a:txBody>
-                  <a:tcPr>
-                    <a:solidFill>
-                      <a:srgbClr val="0A0A0C"/>
-                    </a:solidFill>
-                  </a:tcPr>
-                </a:tc>
-                <a:tc>
-                  <a:txBody>
-                    <a:bodyPr/>
-                    <a:lstStyle/>
-                    <a:p>
-                      <a:r>
-                        <a:rPr sz="950" b="0">
-                          <a:solidFill>
-                            <a:srgbClr val="E8EAF0"/>
-                          </a:solidFill>
-                          <a:latin typeface="Calibri"/>
-                        </a:rPr>
-                        <a:t>14d loop completion</a:t>
-                      </a:r>
-                    </a:p>
-                  </a:txBody>
-                  <a:tcPr>
-                    <a:solidFill>
-                      <a:srgbClr val="0A0A0C"/>
-                    </a:solidFill>
-                  </a:tcPr>
-                </a:tc>
-              </a:tr>
-              <a:tr h="754380">
-                <a:tc>
-                  <a:txBody>
-                    <a:bodyPr/>
-                    <a:lstStyle/>
-                    <a:p>
-                      <a:r>
-                        <a:rPr sz="950" b="0">
-                          <a:solidFill>
-                            <a:srgbClr val="E8EAF0"/>
-                          </a:solidFill>
-                          <a:latin typeface="Calibri"/>
-                        </a:rPr>
-                        <a:t>Impulsivity</a:t>
-                      </a:r>
-                    </a:p>
-                  </a:txBody>
-                  <a:tcPr>
-                    <a:solidFill>
-                      <a:srgbClr val="1A1A1F"/>
-                    </a:solidFill>
-                  </a:tcPr>
-                </a:tc>
-                <a:tc>
-                  <a:txBody>
-                    <a:bodyPr/>
-                    <a:lstStyle/>
-                    <a:p>
-                      <a:r>
-                        <a:rPr sz="950" b="0">
-                          <a:solidFill>
-                            <a:srgbClr val="E8EAF0"/>
-                          </a:solidFill>
-                          <a:latin typeface="Calibri"/>
-                        </a:rPr>
-                        <a:t>Fast state -&gt; fast reactions</a:t>
-                      </a:r>
-                    </a:p>
-                  </a:txBody>
-                  <a:tcPr>
-                    <a:solidFill>
-                      <a:srgbClr val="1A1A1F"/>
-                    </a:solidFill>
-                  </a:tcPr>
-                </a:tc>
-                <a:tc>
-                  <a:txBody>
-                    <a:bodyPr/>
-                    <a:lstStyle/>
-                    <a:p>
-                      <a:r>
-                        <a:rPr sz="950" b="0">
-                          <a:solidFill>
-                            <a:srgbClr val="E8EAF0"/>
-                          </a:solidFill>
-                          <a:latin typeface="Calibri"/>
-                        </a:rPr>
-                        <a:t>Somatic interrupt + default pathway</a:t>
-                      </a:r>
-                    </a:p>
-                  </a:txBody>
-                  <a:tcPr>
-                    <a:solidFill>
-                      <a:srgbClr val="1A1A1F"/>
-                    </a:solidFill>
-                  </a:tcPr>
-                </a:tc>
-                <a:tc>
-                  <a:txBody>
-                    <a:bodyPr/>
-                    <a:lstStyle/>
-                    <a:p>
-                      <a:r>
-                        <a:rPr sz="950" b="0">
-                          <a:solidFill>
-                            <a:srgbClr val="E8EAF0"/>
-                          </a:solidFill>
-                          <a:latin typeface="Calibri"/>
-                        </a:rPr>
-                        <a:t>Time-to-stabilization</a:t>
-                      </a:r>
-                    </a:p>
-                  </a:txBody>
-                  <a:tcPr>
-                    <a:solidFill>
-                      <a:srgbClr val="1A1A1F"/>
-                    </a:solidFill>
-                  </a:tcPr>
-                </a:tc>
-              </a:tr>
-              <a:tr h="754380">
-                <a:tc>
-                  <a:txBody>
-                    <a:bodyPr/>
-                    <a:lstStyle/>
-                    <a:p>
-                      <a:r>
-                        <a:rPr sz="950" b="0">
-                          <a:solidFill>
-                            <a:srgbClr val="E8EAF0"/>
-                          </a:solidFill>
-                          <a:latin typeface="Calibri"/>
-                        </a:rPr>
-                        <a:t>Microbias</a:t>
-                      </a:r>
-                    </a:p>
-                  </a:txBody>
-                  <a:tcPr>
-                    <a:solidFill>
-                      <a:srgbClr val="0A0A0C"/>
-                    </a:solidFill>
-                  </a:tcPr>
-                </a:tc>
-                <a:tc>
-                  <a:txBody>
-                    <a:bodyPr/>
-                    <a:lstStyle/>
-                    <a:p>
-                      <a:r>
-                        <a:rPr sz="950" b="0">
-                          <a:solidFill>
-                            <a:srgbClr val="E8EAF0"/>
-                          </a:solidFill>
-                          <a:latin typeface="Calibri"/>
-                        </a:rPr>
-                        <a:t>20-30% overread of negative intensity</a:t>
-                      </a:r>
-                    </a:p>
-                  </a:txBody>
-                  <a:tcPr>
-                    <a:solidFill>
-                      <a:srgbClr val="0A0A0C"/>
-                    </a:solidFill>
-                  </a:tcPr>
-                </a:tc>
-                <a:tc>
-                  <a:txBody>
-                    <a:bodyPr/>
-                    <a:lstStyle/>
-                    <a:p>
-                      <a:r>
-                        <a:rPr sz="950" b="0">
-                          <a:solidFill>
-                            <a:srgbClr val="E8EAF0"/>
-                          </a:solidFill>
-                          <a:latin typeface="Calibri"/>
-                        </a:rPr>
-                        <a:t>Projection/attribution checks</a:t>
-                      </a:r>
-                    </a:p>
-                  </a:txBody>
-                  <a:tcPr>
-                    <a:solidFill>
-                      <a:srgbClr val="0A0A0C"/>
-                    </a:solidFill>
-                  </a:tcPr>
-                </a:tc>
-                <a:tc>
-                  <a:txBody>
-                    <a:bodyPr/>
-                    <a:lstStyle/>
-                    <a:p>
-                      <a:r>
-                        <a:rPr sz="950" b="0">
-                          <a:solidFill>
-                            <a:srgbClr val="E8EAF0"/>
-                          </a:solidFill>
-                          <a:latin typeface="Calibri"/>
-                        </a:rPr>
-                        <a:t>Bias-tag recurrence trend</a:t>
-                      </a:r>
-                    </a:p>
-                  </a:txBody>
-                  <a:tcPr>
-                    <a:solidFill>
-                      <a:srgbClr val="0A0A0C"/>
-                    </a:solidFill>
-                  </a:tcPr>
-                </a:tc>
-              </a:tr>
-            </a:tbl>
+          <a:graphicData uri="http://schemas.openxmlformats.org/drawingml/2006/chart">
+            <c:chart xmlns:c="http://schemas.openxmlformats.org/drawingml/2006/chart" r:id="rId2"/>
           </a:graphicData>
         </a:graphic>
       </p:graphicFrame>
       <p:sp>
         <p:nvSpPr>
-          <p:cNvPr id="8" name="TextBox 7"/>
+          <p:cNvPr id="9" name="Rectangle 8"/>
+          <p:cNvSpPr/>
+          <p:nvPr/>
+        </p:nvSpPr>
+        <p:spPr>
+          <a:xfrm>
+            <a:off x="6355080" y="1874519"/>
+            <a:ext cx="5349240" cy="4389120"/>
+          </a:xfrm>
+          <a:prstGeom prst="rect">
+            <a:avLst/>
+          </a:prstGeom>
+          <a:solidFill>
+            <a:srgbClr val="1A1A1F"/>
+          </a:solidFill>
+          <a:ln w="12700">
+            <a:solidFill>
+              <a:srgbClr val="3A3A42"/>
+            </a:solidFill>
+          </a:ln>
+        </p:spPr>
+        <p:style>
+          <a:lnRef idx="1">
+            <a:schemeClr val="accent1"/>
+          </a:lnRef>
+          <a:fillRef idx="3">
+            <a:schemeClr val="accent1"/>
+          </a:fillRef>
+          <a:effectRef idx="2">
+            <a:schemeClr val="accent1"/>
+          </a:effectRef>
+          <a:fontRef idx="minor">
+            <a:schemeClr val="lt1"/>
+          </a:fontRef>
+        </p:style>
+        <p:txBody>
+          <a:bodyPr rtlCol="0" anchor="ctr"/>
+          <a:lstStyle/>
+          <a:p>
+            <a:pPr algn="ctr"/>
+          </a:p>
+        </p:txBody>
+      </p:sp>
+      <p:graphicFrame>
+        <p:nvGraphicFramePr>
+          <p:cNvPr id="10" name="Chart 9"/>
+          <p:cNvGraphicFramePr>
+            <a:graphicFrameLocks noGrp="1"/>
+          </p:cNvGraphicFramePr>
+          <p:nvPr/>
+        </p:nvGraphicFramePr>
+        <p:xfrm>
+          <a:off x="6583680" y="2240280"/>
+          <a:ext cx="4937760" cy="3611880"/>
+        </p:xfrm>
+        <a:graphic>
+          <a:graphicData uri="http://schemas.openxmlformats.org/drawingml/2006/chart">
+            <c:chart xmlns:c="http://schemas.openxmlformats.org/drawingml/2006/chart" r:id="rId3"/>
+          </a:graphicData>
+        </a:graphic>
+      </p:graphicFrame>
+      <p:sp>
+        <p:nvSpPr>
+          <p:cNvPr id="11" name="TextBox 10"/>
           <p:cNvSpPr txBox="1"/>
           <p:nvPr/>
         </p:nvSpPr>
         <p:spPr>
           <a:xfrm>
             <a:off x="685800" y="6428232"/>
-            <a:ext cx="10972800" cy="228600"/>
+            <a:ext cx="10972800" cy="219456"/>
           </a:xfrm>
           <a:prstGeom prst="rect">
             <a:avLst/>
@@ -6020,13 +5948,13 @@
           <a:lstStyle/>
           <a:p>
             <a:r>
-              <a:rPr sz="800">
+              <a:rPr sz="850">
                 <a:solidFill>
                   <a:srgbClr val="9496A1"/>
                 </a:solidFill>
                 <a:latin typeface="Consolas"/>
               </a:rPr>
-              <a:t>Source: Stillform science sheet + App.jsx loop/nudge/rating instrumentation</a:t>
+              <a:t>Source: Gallup State of the World's Emotional Health (2024)</a:t>
             </a:r>
           </a:p>
         </p:txBody>
@@ -6109,7 +6037,7 @@
         <p:spPr>
           <a:xfrm>
             <a:off x="502920" y="100584"/>
-            <a:ext cx="7315200" cy="182880"/>
+            <a:ext cx="7772400" cy="182880"/>
           </a:xfrm>
           <a:prstGeom prst="rect">
             <a:avLst/>
@@ -6123,13 +6051,13 @@
           <a:lstStyle/>
           <a:p>
             <a:r>
-              <a:rPr sz="850">
+              <a:rPr sz="900">
                 <a:solidFill>
                   <a:srgbClr val="C8922A"/>
                 </a:solidFill>
                 <a:latin typeface="Consolas"/>
               </a:rPr>
-              <a:t>STILLFORM · APPLIED SCIENCE BRIEF</a:t>
+              <a:t>STILLFORM · EXECUTIVE APPLIED SCIENCE BRIEF</a:t>
             </a:r>
           </a:p>
         </p:txBody>
@@ -6142,8 +6070,8 @@
         </p:nvSpPr>
         <p:spPr>
           <a:xfrm>
-            <a:off x="10149840" y="100584"/>
-            <a:ext cx="1554480" cy="182880"/>
+            <a:off x="10241280" y="100584"/>
+            <a:ext cx="1463040" cy="182880"/>
           </a:xfrm>
           <a:prstGeom prst="rect">
             <a:avLst/>
@@ -6158,7 +6086,7 @@
           <a:p>
             <a:pPr algn="r"/>
             <a:r>
-              <a:rPr sz="850">
+              <a:rPr sz="900">
                 <a:solidFill>
                   <a:srgbClr val="9496A1"/>
                 </a:solidFill>
@@ -6178,7 +6106,7 @@
         <p:spPr>
           <a:xfrm>
             <a:off x="640080" y="640080"/>
-            <a:ext cx="10972800" cy="1005840"/>
+            <a:ext cx="10972800" cy="960120"/>
           </a:xfrm>
           <a:prstGeom prst="rect">
             <a:avLst/>
@@ -6192,7 +6120,7 @@
           <a:lstStyle/>
           <a:p>
             <a:r>
-              <a:rPr sz="3600" b="1">
+              <a:rPr sz="3800" b="1">
                 <a:solidFill>
                   <a:srgbClr val="E8EAF0"/>
                 </a:solidFill>
@@ -6211,8 +6139,8 @@
         </p:nvSpPr>
         <p:spPr>
           <a:xfrm>
-            <a:off x="658368" y="1417320"/>
-            <a:ext cx="10972800" cy="365760"/>
+            <a:off x="676656" y="1417320"/>
+            <a:ext cx="10881360" cy="411480"/>
           </a:xfrm>
           <a:prstGeom prst="rect">
             <a:avLst/>
@@ -6226,7 +6154,7 @@
           <a:lstStyle/>
           <a:p>
             <a:r>
-              <a:rPr sz="1400">
+              <a:rPr sz="1500">
                 <a:solidFill>
                   <a:srgbClr val="9496A1"/>
                 </a:solidFill>
@@ -6246,7 +6174,7 @@
         <p:spPr>
           <a:xfrm>
             <a:off x="685800" y="1874519"/>
-            <a:ext cx="7223760" cy="4297680"/>
+            <a:ext cx="7406640" cy="4389120"/>
           </a:xfrm>
           <a:prstGeom prst="rect">
             <a:avLst/>
@@ -6254,9 +6182,9 @@
           <a:solidFill>
             <a:srgbClr val="141418"/>
           </a:solidFill>
-          <a:ln w="11430">
+          <a:ln w="12700">
             <a:solidFill>
-              <a:srgbClr val="3D3E47"/>
+              <a:srgbClr val="3A3A42"/>
             </a:solidFill>
           </a:ln>
         </p:spPr>
@@ -6292,7 +6220,7 @@
         </p:nvGraphicFramePr>
         <p:xfrm>
           <a:off x="960120" y="2240280"/>
-          <a:ext cx="6720840" cy="3611880"/>
+          <a:ext cx="6903720" cy="3611880"/>
         </p:xfrm>
         <a:graphic>
           <a:graphicData uri="http://schemas.openxmlformats.org/drawingml/2006/chart">
@@ -6308,8 +6236,8 @@
         </p:nvSpPr>
         <p:spPr>
           <a:xfrm>
-            <a:off x="8183879" y="1874519"/>
-            <a:ext cx="3520440" cy="4297680"/>
+            <a:off x="8321040" y="1874519"/>
+            <a:ext cx="3383280" cy="4389120"/>
           </a:xfrm>
           <a:prstGeom prst="rect">
             <a:avLst/>
@@ -6317,9 +6245,9 @@
           <a:solidFill>
             <a:srgbClr val="1A1A1F"/>
           </a:solidFill>
-          <a:ln w="11430">
+          <a:ln w="12700">
             <a:solidFill>
-              <a:srgbClr val="3D3E47"/>
+              <a:srgbClr val="3A3A42"/>
             </a:solidFill>
           </a:ln>
         </p:spPr>
@@ -6353,8 +6281,8 @@
         </p:nvSpPr>
         <p:spPr>
           <a:xfrm>
-            <a:off x="8348471" y="2039111"/>
-            <a:ext cx="3200400" cy="3977640"/>
+            <a:off x="8595360" y="2240280"/>
+            <a:ext cx="2926080" cy="3566160"/>
           </a:xfrm>
           <a:prstGeom prst="rect">
             <a:avLst/>
@@ -6362,27 +6290,16 @@
           <a:noFill/>
         </p:spPr>
         <p:txBody>
-          <a:bodyPr wrap="none">
+          <a:bodyPr wrap="square">
             <a:spAutoFit/>
           </a:bodyPr>
           <a:lstStyle/>
           <a:p>
-            <a:r>
-              <a:rPr sz="1500" b="1">
-                <a:solidFill>
-                  <a:srgbClr val="C8922A"/>
-                </a:solidFill>
-                <a:latin typeface="Calibri"/>
-              </a:rPr>
-              <a:t>How this works in-app</a:t>
-            </a:r>
-          </a:p>
-          <a:p>
             <a:pPr>
               <a:spcAft>
-                <a:spcPts val="600"/>
+                <a:spcPts val="900"/>
               </a:spcAft>
-              <a:defRPr sz="1200">
+              <a:defRPr sz="1600" b="1">
                 <a:solidFill>
                   <a:srgbClr val="E8EAF0"/>
                 </a:solidFill>
@@ -6390,15 +6307,15 @@
               </a:defRPr>
             </a:pPr>
             <a:r>
-              <a:t>Pulse emotion chips perform affect labeling.</a:t>
+              <a:t>How Stillform applies this:</a:t>
             </a:r>
           </a:p>
           <a:p>
             <a:pPr>
               <a:spcAft>
-                <a:spcPts val="600"/>
+                <a:spcPts val="700"/>
               </a:spcAft>
-              <a:defRPr sz="1200">
+              <a:defRPr sz="1300" b="0">
                 <a:solidFill>
                   <a:srgbClr val="E8EAF0"/>
                 </a:solidFill>
@@ -6406,15 +6323,15 @@
               </a:defRPr>
             </a:pPr>
             <a:r>
-              <a:t>Reframe reflects patterns back as operational language.</a:t>
+              <a:t>Pulse emotion labeling trains state naming (affect labeling).</a:t>
             </a:r>
           </a:p>
           <a:p>
             <a:pPr>
               <a:spcAft>
-                <a:spcPts val="600"/>
+                <a:spcPts val="700"/>
               </a:spcAft>
-              <a:defRPr sz="1200">
+              <a:defRPr sz="1300" b="0">
                 <a:solidFill>
                   <a:srgbClr val="E8EAF0"/>
                 </a:solidFill>
@@ -6422,7 +6339,23 @@
               </a:defRPr>
             </a:pPr>
             <a:r>
-              <a:t>Output target: clearer next-action selection under load.</a:t>
+              <a:t>Reframe then converts state awareness into action selection.</a:t>
+            </a:r>
+          </a:p>
+          <a:p>
+            <a:pPr>
+              <a:spcAft>
+                <a:spcPts val="700"/>
+              </a:spcAft>
+              <a:defRPr sz="1300" b="0">
+                <a:solidFill>
+                  <a:srgbClr val="E8EAF0"/>
+                </a:solidFill>
+                <a:latin typeface="Calibri"/>
+              </a:defRPr>
+            </a:pPr>
+            <a:r>
+              <a:t>Measured by pre/post composure delta trends over sessions.</a:t>
             </a:r>
           </a:p>
         </p:txBody>
@@ -6436,7 +6369,7 @@
         <p:spPr>
           <a:xfrm>
             <a:off x="685800" y="6428232"/>
-            <a:ext cx="10972800" cy="228600"/>
+            <a:ext cx="10972800" cy="219456"/>
           </a:xfrm>
           <a:prstGeom prst="rect">
             <a:avLst/>
@@ -6450,7 +6383,7 @@
           <a:lstStyle/>
           <a:p>
             <a:r>
-              <a:rPr sz="800">
+              <a:rPr sz="850">
                 <a:solidFill>
                   <a:srgbClr val="9496A1"/>
                 </a:solidFill>
@@ -6539,7 +6472,7 @@
         <p:spPr>
           <a:xfrm>
             <a:off x="502920" y="100584"/>
-            <a:ext cx="7315200" cy="182880"/>
+            <a:ext cx="7772400" cy="182880"/>
           </a:xfrm>
           <a:prstGeom prst="rect">
             <a:avLst/>
@@ -6553,13 +6486,13 @@
           <a:lstStyle/>
           <a:p>
             <a:r>
-              <a:rPr sz="850">
+              <a:rPr sz="900">
                 <a:solidFill>
                   <a:srgbClr val="C8922A"/>
                 </a:solidFill>
                 <a:latin typeface="Consolas"/>
               </a:rPr>
-              <a:t>STILLFORM · APPLIED SCIENCE BRIEF</a:t>
+              <a:t>STILLFORM · EXECUTIVE APPLIED SCIENCE BRIEF</a:t>
             </a:r>
           </a:p>
         </p:txBody>
@@ -6572,8 +6505,8 @@
         </p:nvSpPr>
         <p:spPr>
           <a:xfrm>
-            <a:off x="10149840" y="100584"/>
-            <a:ext cx="1554480" cy="182880"/>
+            <a:off x="10241280" y="100584"/>
+            <a:ext cx="1463040" cy="182880"/>
           </a:xfrm>
           <a:prstGeom prst="rect">
             <a:avLst/>
@@ -6588,7 +6521,7 @@
           <a:p>
             <a:pPr algn="r"/>
             <a:r>
-              <a:rPr sz="850">
+              <a:rPr sz="900">
                 <a:solidFill>
                   <a:srgbClr val="9496A1"/>
                 </a:solidFill>
@@ -6608,7 +6541,7 @@
         <p:spPr>
           <a:xfrm>
             <a:off x="640080" y="640080"/>
-            <a:ext cx="10972800" cy="1005840"/>
+            <a:ext cx="10972800" cy="960120"/>
           </a:xfrm>
           <a:prstGeom prst="rect">
             <a:avLst/>
@@ -6622,7 +6555,7 @@
           <a:lstStyle/>
           <a:p>
             <a:r>
-              <a:rPr sz="3600" b="1">
+              <a:rPr sz="3800" b="1">
                 <a:solidFill>
                   <a:srgbClr val="E8EAF0"/>
                 </a:solidFill>
@@ -6641,8 +6574,8 @@
         </p:nvSpPr>
         <p:spPr>
           <a:xfrm>
-            <a:off x="658368" y="1417320"/>
-            <a:ext cx="10972800" cy="365760"/>
+            <a:off x="676656" y="1417320"/>
+            <a:ext cx="10881360" cy="411480"/>
           </a:xfrm>
           <a:prstGeom prst="rect">
             <a:avLst/>
@@ -6656,7 +6589,7 @@
           <a:lstStyle/>
           <a:p>
             <a:r>
-              <a:rPr sz="1400">
+              <a:rPr sz="1500">
                 <a:solidFill>
                   <a:srgbClr val="9496A1"/>
                 </a:solidFill>
@@ -6676,7 +6609,7 @@
         <p:spPr>
           <a:xfrm>
             <a:off x="685800" y="1874519"/>
-            <a:ext cx="7223760" cy="4297680"/>
+            <a:ext cx="7406640" cy="4389120"/>
           </a:xfrm>
           <a:prstGeom prst="rect">
             <a:avLst/>
@@ -6684,9 +6617,9 @@
           <a:solidFill>
             <a:srgbClr val="141418"/>
           </a:solidFill>
-          <a:ln w="11430">
+          <a:ln w="12700">
             <a:solidFill>
-              <a:srgbClr val="3D3E47"/>
+              <a:srgbClr val="3A3A42"/>
             </a:solidFill>
           </a:ln>
         </p:spPr>
@@ -6722,7 +6655,7 @@
         </p:nvGraphicFramePr>
         <p:xfrm>
           <a:off x="960120" y="2240280"/>
-          <a:ext cx="6720840" cy="3611880"/>
+          <a:ext cx="6903720" cy="3611880"/>
         </p:xfrm>
         <a:graphic>
           <a:graphicData uri="http://schemas.openxmlformats.org/drawingml/2006/chart">
@@ -6738,8 +6671,8 @@
         </p:nvSpPr>
         <p:spPr>
           <a:xfrm>
-            <a:off x="8183879" y="1874519"/>
-            <a:ext cx="3520440" cy="4297680"/>
+            <a:off x="8321040" y="1874519"/>
+            <a:ext cx="3383280" cy="4389120"/>
           </a:xfrm>
           <a:prstGeom prst="rect">
             <a:avLst/>
@@ -6747,9 +6680,9 @@
           <a:solidFill>
             <a:srgbClr val="1A1A1F"/>
           </a:solidFill>
-          <a:ln w="11430">
+          <a:ln w="12700">
             <a:solidFill>
-              <a:srgbClr val="3D3E47"/>
+              <a:srgbClr val="3A3A42"/>
             </a:solidFill>
           </a:ln>
         </p:spPr>
@@ -6783,8 +6716,8 @@
         </p:nvSpPr>
         <p:spPr>
           <a:xfrm>
-            <a:off x="8348471" y="2039111"/>
-            <a:ext cx="3200400" cy="3977640"/>
+            <a:off x="8595360" y="2240280"/>
+            <a:ext cx="2926080" cy="3566160"/>
           </a:xfrm>
           <a:prstGeom prst="rect">
             <a:avLst/>
@@ -6792,27 +6725,16 @@
           <a:noFill/>
         </p:spPr>
         <p:txBody>
-          <a:bodyPr wrap="none">
+          <a:bodyPr wrap="square">
             <a:spAutoFit/>
           </a:bodyPr>
           <a:lstStyle/>
           <a:p>
-            <a:r>
-              <a:rPr sz="1500" b="1">
-                <a:solidFill>
-                  <a:srgbClr val="C8922A"/>
-                </a:solidFill>
-                <a:latin typeface="Calibri"/>
-              </a:rPr>
-              <a:t>How this works in-app</a:t>
-            </a:r>
-          </a:p>
-          <a:p>
             <a:pPr>
               <a:spcAft>
-                <a:spcPts val="600"/>
+                <a:spcPts val="900"/>
               </a:spcAft>
-              <a:defRPr sz="1200">
+              <a:defRPr sz="1600" b="1">
                 <a:solidFill>
                   <a:srgbClr val="E8EAF0"/>
                 </a:solidFill>
@@ -6820,15 +6742,15 @@
               </a:defRPr>
             </a:pPr>
             <a:r>
-              <a:t>Bio-filter tags depleted hardware states first.</a:t>
+              <a:t>How Stillform applies this:</a:t>
             </a:r>
           </a:p>
           <a:p>
             <a:pPr>
               <a:spcAft>
-                <a:spcPts val="600"/>
+                <a:spcPts val="700"/>
               </a:spcAft>
-              <a:defRPr sz="1200">
+              <a:defRPr sz="1300" b="0">
                 <a:solidFill>
                   <a:srgbClr val="E8EAF0"/>
                 </a:solidFill>
@@ -6836,15 +6758,15 @@
               </a:defRPr>
             </a:pPr>
             <a:r>
-              <a:t>Reframe applies one microbias correction at a time.</a:t>
+              <a:t>Bio-filter marks depleted state before interpretation.</a:t>
             </a:r>
           </a:p>
           <a:p>
             <a:pPr>
               <a:spcAft>
-                <a:spcPts val="600"/>
+                <a:spcPts val="700"/>
               </a:spcAft>
-              <a:defRPr sz="1200">
+              <a:defRPr sz="1300" b="0">
                 <a:solidFill>
                   <a:srgbClr val="E8EAF0"/>
                 </a:solidFill>
@@ -6852,7 +6774,23 @@
               </a:defRPr>
             </a:pPr>
             <a:r>
-              <a:t>Goal: lower reactive conflict interpretation errors.</a:t>
+              <a:t>Reframe checks one microbias at a time (projection, attribution, contagion, impact gap, intensity).</a:t>
+            </a:r>
+          </a:p>
+          <a:p>
+            <a:pPr>
+              <a:spcAft>
+                <a:spcPts val="700"/>
+              </a:spcAft>
+              <a:defRPr sz="1300" b="0">
+                <a:solidFill>
+                  <a:srgbClr val="E8EAF0"/>
+                </a:solidFill>
+                <a:latin typeface="Calibri"/>
+              </a:defRPr>
+            </a:pPr>
+            <a:r>
+              <a:t>Target outcome: fewer avoidable social conflicts.</a:t>
             </a:r>
           </a:p>
         </p:txBody>
@@ -6866,7 +6804,7 @@
         <p:spPr>
           <a:xfrm>
             <a:off x="685800" y="6428232"/>
-            <a:ext cx="10972800" cy="228600"/>
+            <a:ext cx="10972800" cy="219456"/>
           </a:xfrm>
           <a:prstGeom prst="rect">
             <a:avLst/>
@@ -6880,13 +6818,13 @@
           <a:lstStyle/>
           <a:p>
             <a:r>
-              <a:rPr sz="800">
+              <a:rPr sz="850">
                 <a:solidFill>
                   <a:srgbClr val="9496A1"/>
                 </a:solidFill>
                 <a:latin typeface="Consolas"/>
               </a:rPr>
-              <a:t>Source: Stillform science sheet microbias section; Nature Communications 2025</a:t>
+              <a:t>Source: Stillform science sheet (microbias section); Nature Communications 2025</a:t>
             </a:r>
           </a:p>
         </p:txBody>
@@ -6969,7 +6907,7 @@
         <p:spPr>
           <a:xfrm>
             <a:off x="502920" y="100584"/>
-            <a:ext cx="7315200" cy="182880"/>
+            <a:ext cx="7772400" cy="182880"/>
           </a:xfrm>
           <a:prstGeom prst="rect">
             <a:avLst/>
@@ -6983,13 +6921,13 @@
           <a:lstStyle/>
           <a:p>
             <a:r>
-              <a:rPr sz="850">
+              <a:rPr sz="900">
                 <a:solidFill>
                   <a:srgbClr val="C8922A"/>
                 </a:solidFill>
                 <a:latin typeface="Consolas"/>
               </a:rPr>
-              <a:t>STILLFORM · APPLIED SCIENCE BRIEF</a:t>
+              <a:t>STILLFORM · EXECUTIVE APPLIED SCIENCE BRIEF</a:t>
             </a:r>
           </a:p>
         </p:txBody>
@@ -7002,8 +6940,8 @@
         </p:nvSpPr>
         <p:spPr>
           <a:xfrm>
-            <a:off x="10149840" y="100584"/>
-            <a:ext cx="1554480" cy="182880"/>
+            <a:off x="10241280" y="100584"/>
+            <a:ext cx="1463040" cy="182880"/>
           </a:xfrm>
           <a:prstGeom prst="rect">
             <a:avLst/>
@@ -7018,7 +6956,7 @@
           <a:p>
             <a:pPr algn="r"/>
             <a:r>
-              <a:rPr sz="850">
+              <a:rPr sz="900">
                 <a:solidFill>
                   <a:srgbClr val="9496A1"/>
                 </a:solidFill>
@@ -7038,7 +6976,7 @@
         <p:spPr>
           <a:xfrm>
             <a:off x="640080" y="640080"/>
-            <a:ext cx="10972800" cy="1005840"/>
+            <a:ext cx="10972800" cy="960120"/>
           </a:xfrm>
           <a:prstGeom prst="rect">
             <a:avLst/>
@@ -7052,7 +6990,7 @@
           <a:lstStyle/>
           <a:p>
             <a:r>
-              <a:rPr sz="3600" b="1">
+              <a:rPr sz="3800" b="1">
                 <a:solidFill>
                   <a:srgbClr val="E8EAF0"/>
                 </a:solidFill>
@@ -7071,8 +7009,8 @@
         </p:nvSpPr>
         <p:spPr>
           <a:xfrm>
-            <a:off x="658368" y="1417320"/>
-            <a:ext cx="10972800" cy="365760"/>
+            <a:off x="676656" y="1417320"/>
+            <a:ext cx="10881360" cy="411480"/>
           </a:xfrm>
           <a:prstGeom prst="rect">
             <a:avLst/>
@@ -7086,7 +7024,7 @@
           <a:lstStyle/>
           <a:p>
             <a:r>
-              <a:rPr sz="1400">
+              <a:rPr sz="1500">
                 <a:solidFill>
                   <a:srgbClr val="9496A1"/>
                 </a:solidFill>
@@ -7106,7 +7044,7 @@
         <p:spPr>
           <a:xfrm>
             <a:off x="685800" y="1874519"/>
-            <a:ext cx="5440680" cy="4297680"/>
+            <a:ext cx="5486400" cy="4389120"/>
           </a:xfrm>
           <a:prstGeom prst="rect">
             <a:avLst/>
@@ -7114,9 +7052,9 @@
           <a:solidFill>
             <a:srgbClr val="141418"/>
           </a:solidFill>
-          <a:ln w="11430">
+          <a:ln w="12700">
             <a:solidFill>
-              <a:srgbClr val="3D3E47"/>
+              <a:srgbClr val="3A3A42"/>
             </a:solidFill>
           </a:ln>
         </p:spPr>
@@ -7152,7 +7090,7 @@
         </p:nvGraphicFramePr>
         <p:xfrm>
           <a:off x="914400" y="2240280"/>
-          <a:ext cx="4983480" cy="3611880"/>
+          <a:ext cx="5074920" cy="3611880"/>
         </p:xfrm>
         <a:graphic>
           <a:graphicData uri="http://schemas.openxmlformats.org/drawingml/2006/chart">
@@ -7169,17 +7107,17 @@
         <p:spPr>
           <a:xfrm>
             <a:off x="6355080" y="1874519"/>
-            <a:ext cx="5349240" cy="2057400"/>
+            <a:ext cx="5349240" cy="4389120"/>
           </a:xfrm>
           <a:prstGeom prst="rect">
             <a:avLst/>
           </a:prstGeom>
           <a:solidFill>
-            <a:srgbClr val="141418"/>
+            <a:srgbClr val="1A1A1F"/>
           </a:solidFill>
-          <a:ln w="11430">
+          <a:ln w="12700">
             <a:solidFill>
-              <a:srgbClr val="3D3E47"/>
+              <a:srgbClr val="3A3A42"/>
             </a:solidFill>
           </a:ln>
         </p:spPr>
@@ -7214,8 +7152,8 @@
           <p:nvPr/>
         </p:nvGraphicFramePr>
         <p:xfrm>
-          <a:off x="6583680" y="2103120"/>
-          <a:ext cx="4892040" cy="1600200"/>
+          <a:off x="6583680" y="2240280"/>
+          <a:ext cx="2468880" cy="3611880"/>
         </p:xfrm>
         <a:graphic>
           <a:graphicData uri="http://schemas.openxmlformats.org/drawingml/2006/chart">
@@ -7225,59 +7163,14 @@
       </p:graphicFrame>
       <p:sp>
         <p:nvSpPr>
-          <p:cNvPr id="11" name="Rectangle 10"/>
-          <p:cNvSpPr/>
-          <p:nvPr/>
-        </p:nvSpPr>
-        <p:spPr>
-          <a:xfrm>
-            <a:off x="6355080" y="4114800"/>
-            <a:ext cx="5349240" cy="2057400"/>
-          </a:xfrm>
-          <a:prstGeom prst="rect">
-            <a:avLst/>
-          </a:prstGeom>
-          <a:solidFill>
-            <a:srgbClr val="1A1A1F"/>
-          </a:solidFill>
-          <a:ln w="11430">
-            <a:solidFill>
-              <a:srgbClr val="3D3E47"/>
-            </a:solidFill>
-          </a:ln>
-        </p:spPr>
-        <p:style>
-          <a:lnRef idx="1">
-            <a:schemeClr val="accent1"/>
-          </a:lnRef>
-          <a:fillRef idx="3">
-            <a:schemeClr val="accent1"/>
-          </a:fillRef>
-          <a:effectRef idx="2">
-            <a:schemeClr val="accent1"/>
-          </a:effectRef>
-          <a:fontRef idx="minor">
-            <a:schemeClr val="lt1"/>
-          </a:fontRef>
-        </p:style>
-        <p:txBody>
-          <a:bodyPr rtlCol="0" anchor="ctr"/>
-          <a:lstStyle/>
-          <a:p>
-            <a:pPr algn="ctr"/>
-          </a:p>
-        </p:txBody>
-      </p:sp>
-      <p:sp>
-        <p:nvSpPr>
-          <p:cNvPr id="12" name="TextBox 11"/>
+          <p:cNvPr id="11" name="TextBox 10"/>
           <p:cNvSpPr txBox="1"/>
           <p:nvPr/>
         </p:nvSpPr>
         <p:spPr>
           <a:xfrm>
-            <a:off x="6519672" y="4279392"/>
-            <a:ext cx="5029200" cy="1737360"/>
+            <a:off x="9326880" y="2240280"/>
+            <a:ext cx="2240280" cy="3566160"/>
           </a:xfrm>
           <a:prstGeom prst="rect">
             <a:avLst/>
@@ -7285,27 +7178,16 @@
           <a:noFill/>
         </p:spPr>
         <p:txBody>
-          <a:bodyPr wrap="none">
+          <a:bodyPr wrap="square">
             <a:spAutoFit/>
           </a:bodyPr>
           <a:lstStyle/>
           <a:p>
-            <a:r>
-              <a:rPr sz="1500" b="1">
-                <a:solidFill>
-                  <a:srgbClr val="C8922A"/>
-                </a:solidFill>
-                <a:latin typeface="Calibri"/>
-              </a:rPr>
-              <a:t>How this works in-app</a:t>
-            </a:r>
-          </a:p>
-          <a:p>
             <a:pPr>
               <a:spcAft>
-                <a:spcPts val="600"/>
+                <a:spcPts val="900"/>
               </a:spcAft>
-              <a:defRPr sz="1200">
+              <a:defRPr sz="1500" b="1">
                 <a:solidFill>
                   <a:srgbClr val="E8EAF0"/>
                 </a:solidFill>
@@ -7313,15 +7195,15 @@
               </a:defRPr>
             </a:pPr>
             <a:r>
-              <a:t>Somatic interrupt catches rapid escalation in-session.</a:t>
+              <a:t>How Stillform applies this:</a:t>
             </a:r>
           </a:p>
           <a:p>
             <a:pPr>
               <a:spcAft>
-                <a:spcPts val="600"/>
+                <a:spcPts val="700"/>
               </a:spcAft>
-              <a:defRPr sz="1200">
+              <a:defRPr sz="1250" b="0">
                 <a:solidFill>
                   <a:srgbClr val="E8EAF0"/>
                 </a:solidFill>
@@ -7329,15 +7211,15 @@
               </a:defRPr>
             </a:pPr>
             <a:r>
-              <a:t>Default pathway routing reduces decision lag under load.</a:t>
+              <a:t>Somatic interrupt catches body escalation during Reframe.</a:t>
             </a:r>
           </a:p>
           <a:p>
             <a:pPr>
               <a:spcAft>
-                <a:spcPts val="600"/>
+                <a:spcPts val="700"/>
               </a:spcAft>
-              <a:defRPr sz="1200">
+              <a:defRPr sz="1250" b="0">
                 <a:solidFill>
                   <a:srgbClr val="E8EAF0"/>
                 </a:solidFill>
@@ -7345,21 +7227,37 @@
               </a:defRPr>
             </a:pPr>
             <a:r>
-              <a:t>Target: reduce reactive action in high-pressure windows.</a:t>
-            </a:r>
-          </a:p>
-        </p:txBody>
-      </p:sp>
-      <p:sp>
-        <p:nvSpPr>
-          <p:cNvPr id="13" name="TextBox 12"/>
+              <a:t>Default pathway routing removes decision delay in high arousal.</a:t>
+            </a:r>
+          </a:p>
+          <a:p>
+            <a:pPr>
+              <a:spcAft>
+                <a:spcPts val="700"/>
+              </a:spcAft>
+              <a:defRPr sz="1250" b="0">
+                <a:solidFill>
+                  <a:srgbClr val="E8EAF0"/>
+                </a:solidFill>
+                <a:latin typeface="Calibri"/>
+              </a:defRPr>
+            </a:pPr>
+            <a:r>
+              <a:t>Measured by faster stabilization and stronger post-shift scores.</a:t>
+            </a:r>
+          </a:p>
+        </p:txBody>
+      </p:sp>
+      <p:sp>
+        <p:nvSpPr>
+          <p:cNvPr id="12" name="TextBox 11"/>
           <p:cNvSpPr txBox="1"/>
           <p:nvPr/>
         </p:nvSpPr>
         <p:spPr>
           <a:xfrm>
             <a:off x="685800" y="6428232"/>
-            <a:ext cx="10972800" cy="228600"/>
+            <a:ext cx="10972800" cy="219456"/>
           </a:xfrm>
           <a:prstGeom prst="rect">
             <a:avLst/>
@@ -7373,13 +7271,13 @@
           <a:lstStyle/>
           <a:p>
             <a:r>
-              <a:rPr sz="800">
+              <a:rPr sz="850">
                 <a:solidFill>
                   <a:srgbClr val="9496A1"/>
                 </a:solidFill>
                 <a:latin typeface="Consolas"/>
               </a:rPr>
-              <a:t>Source: Gallup 2024/2025 context; Stillform somatic interrupt + routing logic</a:t>
+              <a:t>Source: Gallup 2025 contextual trend references; Stillform intervention flow</a:t>
             </a:r>
           </a:p>
         </p:txBody>
@@ -7462,7 +7360,7 @@
         <p:spPr>
           <a:xfrm>
             <a:off x="502920" y="100584"/>
-            <a:ext cx="7315200" cy="182880"/>
+            <a:ext cx="7772400" cy="182880"/>
           </a:xfrm>
           <a:prstGeom prst="rect">
             <a:avLst/>
@@ -7476,13 +7374,13 @@
           <a:lstStyle/>
           <a:p>
             <a:r>
-              <a:rPr sz="850">
+              <a:rPr sz="900">
                 <a:solidFill>
                   <a:srgbClr val="C8922A"/>
                 </a:solidFill>
                 <a:latin typeface="Consolas"/>
               </a:rPr>
-              <a:t>STILLFORM · APPLIED SCIENCE BRIEF</a:t>
+              <a:t>STILLFORM · EXECUTIVE APPLIED SCIENCE BRIEF</a:t>
             </a:r>
           </a:p>
         </p:txBody>
@@ -7495,8 +7393,8 @@
         </p:nvSpPr>
         <p:spPr>
           <a:xfrm>
-            <a:off x="10149840" y="100584"/>
-            <a:ext cx="1554480" cy="182880"/>
+            <a:off x="10241280" y="100584"/>
+            <a:ext cx="1463040" cy="182880"/>
           </a:xfrm>
           <a:prstGeom prst="rect">
             <a:avLst/>
@@ -7511,7 +7409,7 @@
           <a:p>
             <a:pPr algn="r"/>
             <a:r>
-              <a:rPr sz="850">
+              <a:rPr sz="900">
                 <a:solidFill>
                   <a:srgbClr val="9496A1"/>
                 </a:solidFill>
@@ -7531,7 +7429,7 @@
         <p:spPr>
           <a:xfrm>
             <a:off x="640080" y="640080"/>
-            <a:ext cx="10972800" cy="1005840"/>
+            <a:ext cx="10972800" cy="960120"/>
           </a:xfrm>
           <a:prstGeom prst="rect">
             <a:avLst/>
@@ -7545,13 +7443,13 @@
           <a:lstStyle/>
           <a:p>
             <a:r>
-              <a:rPr sz="3600" b="1">
+              <a:rPr sz="3800" b="1">
                 <a:solidFill>
                   <a:srgbClr val="E8EAF0"/>
                 </a:solidFill>
                 <a:latin typeface="Calibri"/>
               </a:rPr>
-              <a:t>Stillform Mechanism</a:t>
+              <a:t>How Stillform Works</a:t>
             </a:r>
           </a:p>
         </p:txBody>
@@ -7564,8 +7462,8 @@
         </p:nvSpPr>
         <p:spPr>
           <a:xfrm>
-            <a:off x="658368" y="1417320"/>
-            <a:ext cx="10972800" cy="365760"/>
+            <a:off x="676656" y="1417320"/>
+            <a:ext cx="10881360" cy="411480"/>
           </a:xfrm>
           <a:prstGeom prst="rect">
             <a:avLst/>
@@ -7579,13 +7477,13 @@
           <a:lstStyle/>
           <a:p>
             <a:r>
-              <a:rPr sz="1400">
+              <a:rPr sz="1500">
                 <a:solidFill>
                   <a:srgbClr val="9496A1"/>
                 </a:solidFill>
                 <a:latin typeface="Calibri"/>
               </a:rPr>
-              <a:t>Daily operating loop</a:t>
+              <a:t>Applied science translated into one daily operating loop</a:t>
             </a:r>
           </a:p>
         </p:txBody>
@@ -7598,8 +7496,8 @@
         </p:nvSpPr>
         <p:spPr>
           <a:xfrm>
-            <a:off x="658368" y="2240280"/>
-            <a:ext cx="2176272" cy="2560320"/>
+            <a:off x="658368" y="2148840"/>
+            <a:ext cx="2240280" cy="2697480"/>
           </a:xfrm>
           <a:prstGeom prst="rect">
             <a:avLst/>
@@ -7607,9 +7505,9 @@
           <a:solidFill>
             <a:srgbClr val="141418"/>
           </a:solidFill>
-          <a:ln w="11430">
+          <a:ln w="12700">
             <a:solidFill>
-              <a:srgbClr val="3D3E47"/>
+              <a:srgbClr val="3A3A42"/>
             </a:solidFill>
           </a:ln>
         </p:spPr>
@@ -7643,8 +7541,8 @@
         </p:nvSpPr>
         <p:spPr>
           <a:xfrm>
-            <a:off x="804672" y="2423160"/>
-            <a:ext cx="1874519" cy="502920"/>
+            <a:off x="795528" y="2313432"/>
+            <a:ext cx="1920240" cy="457200"/>
           </a:xfrm>
           <a:prstGeom prst="rect">
             <a:avLst/>
@@ -7658,7 +7556,7 @@
           <a:lstStyle/>
           <a:p>
             <a:r>
-              <a:rPr sz="1400" b="1">
+              <a:rPr sz="1500" b="1">
                 <a:solidFill>
                   <a:srgbClr val="C8922A"/>
                 </a:solidFill>
@@ -7671,23 +7569,59 @@
       </p:sp>
       <p:sp>
         <p:nvSpPr>
-          <p:cNvPr id="9" name="Right Arrow 8"/>
+          <p:cNvPr id="9" name="TextBox 8"/>
+          <p:cNvSpPr txBox="1"/>
+          <p:nvPr/>
+        </p:nvSpPr>
+        <p:spPr>
+          <a:xfrm>
+            <a:off x="795528" y="2935224"/>
+            <a:ext cx="1920240" cy="1783080"/>
+          </a:xfrm>
+          <a:prstGeom prst="rect">
+            <a:avLst/>
+          </a:prstGeom>
+          <a:noFill/>
+        </p:spPr>
+        <p:txBody>
+          <a:bodyPr wrap="none">
+            <a:spAutoFit/>
+          </a:bodyPr>
+          <a:lstStyle/>
+          <a:p>
+            <a:r>
+              <a:rPr sz="1300">
+                <a:solidFill>
+                  <a:srgbClr val="E8EAF0"/>
+                </a:solidFill>
+                <a:latin typeface="Calibri"/>
+              </a:rPr>
+              <a:t>Morning check-in + bio-filter</a:t>
+            </a:r>
+          </a:p>
+        </p:txBody>
+      </p:sp>
+      <p:sp>
+        <p:nvSpPr>
+          <p:cNvPr id="10" name="Rectangle 9"/>
           <p:cNvSpPr/>
           <p:nvPr/>
         </p:nvSpPr>
         <p:spPr>
           <a:xfrm>
-            <a:off x="2816352" y="3246120"/>
-            <a:ext cx="128016" cy="457200"/>
-          </a:xfrm>
-          <a:prstGeom prst="rightArrow">
+            <a:off x="2990088" y="2148840"/>
+            <a:ext cx="2240280" cy="2697480"/>
+          </a:xfrm>
+          <a:prstGeom prst="rect">
             <a:avLst/>
           </a:prstGeom>
           <a:solidFill>
-            <a:srgbClr val="9496A1"/>
+            <a:srgbClr val="1A1A1F"/>
           </a:solidFill>
-          <a:ln>
-            <a:noFill/>
+          <a:ln w="12700">
+            <a:solidFill>
+              <a:srgbClr val="3A3A42"/>
+            </a:solidFill>
           </a:ln>
         </p:spPr>
         <p:style>
@@ -7714,24 +7648,92 @@
       </p:sp>
       <p:sp>
         <p:nvSpPr>
-          <p:cNvPr id="10" name="Rectangle 9"/>
+          <p:cNvPr id="11" name="TextBox 10"/>
+          <p:cNvSpPr txBox="1"/>
+          <p:nvPr/>
+        </p:nvSpPr>
+        <p:spPr>
+          <a:xfrm>
+            <a:off x="3127248" y="2313432"/>
+            <a:ext cx="1920240" cy="457200"/>
+          </a:xfrm>
+          <a:prstGeom prst="rect">
+            <a:avLst/>
+          </a:prstGeom>
+          <a:noFill/>
+        </p:spPr>
+        <p:txBody>
+          <a:bodyPr wrap="none">
+            <a:spAutoFit/>
+          </a:bodyPr>
+          <a:lstStyle/>
+          <a:p>
+            <a:r>
+              <a:rPr sz="1500" b="1">
+                <a:solidFill>
+                  <a:srgbClr val="C8922A"/>
+                </a:solidFill>
+                <a:latin typeface="Calibri"/>
+              </a:rPr>
+              <a:t>Interrupt</a:t>
+            </a:r>
+          </a:p>
+        </p:txBody>
+      </p:sp>
+      <p:sp>
+        <p:nvSpPr>
+          <p:cNvPr id="12" name="TextBox 11"/>
+          <p:cNvSpPr txBox="1"/>
+          <p:nvPr/>
+        </p:nvSpPr>
+        <p:spPr>
+          <a:xfrm>
+            <a:off x="3127248" y="2935224"/>
+            <a:ext cx="1920240" cy="1783080"/>
+          </a:xfrm>
+          <a:prstGeom prst="rect">
+            <a:avLst/>
+          </a:prstGeom>
+          <a:noFill/>
+        </p:spPr>
+        <p:txBody>
+          <a:bodyPr wrap="none">
+            <a:spAutoFit/>
+          </a:bodyPr>
+          <a:lstStyle/>
+          <a:p>
+            <a:r>
+              <a:rPr sz="1300">
+                <a:solidFill>
+                  <a:srgbClr val="E8EAF0"/>
+                </a:solidFill>
+                <a:latin typeface="Calibri"/>
+              </a:rPr>
+              <a:t>Breathe / Body Scan / somatic cue</a:t>
+            </a:r>
+          </a:p>
+        </p:txBody>
+      </p:sp>
+      <p:sp>
+        <p:nvSpPr>
+          <p:cNvPr id="13" name="Rectangle 12"/>
           <p:cNvSpPr/>
           <p:nvPr/>
         </p:nvSpPr>
         <p:spPr>
           <a:xfrm>
-            <a:off x="2944368" y="2240280"/>
-            <a:ext cx="2176272" cy="2560320"/>
+            <a:off x="5321808" y="2148840"/>
+            <a:ext cx="2240280" cy="2697480"/>
           </a:xfrm>
           <a:prstGeom prst="rect">
             <a:avLst/>
           </a:prstGeom>
           <a:solidFill>
-            <a:srgbClr val="1A1A1F"/>
+            <a:srgbClr val="141418"/>
           </a:solidFill>
-          <a:ln w="11430">
+          <a:ln w="12700">
             <a:solidFill>
-              <a:srgbClr val="3D3E47"/>
+              <a:srgbClr val="3A3A42"/>
             </a:solidFill>
           </a:ln>
         </p:spPr>
@@ -7759,14 +7761,14 @@
       </p:sp>
       <p:sp>
         <p:nvSpPr>
-          <p:cNvPr id="11" name="TextBox 10"/>
+          <p:cNvPr id="14" name="TextBox 13"/>
           <p:cNvSpPr txBox="1"/>
           <p:nvPr/>
         </p:nvSpPr>
         <p:spPr>
           <a:xfrm>
-            <a:off x="3090672" y="2423160"/>
-            <a:ext cx="1874519" cy="502920"/>
+            <a:off x="5458968" y="2313432"/>
+            <a:ext cx="1920240" cy="457200"/>
           </a:xfrm>
           <a:prstGeom prst="rect">
             <a:avLst/>
@@ -7780,36 +7782,72 @@
           <a:lstStyle/>
           <a:p>
             <a:r>
-              <a:rPr sz="1400" b="1">
+              <a:rPr sz="1500" b="1">
                 <a:solidFill>
                   <a:srgbClr val="C8922A"/>
                 </a:solidFill>
                 <a:latin typeface="Calibri"/>
               </a:rPr>
-              <a:t>Intervention</a:t>
-            </a:r>
-          </a:p>
-        </p:txBody>
-      </p:sp>
-      <p:sp>
-        <p:nvSpPr>
-          <p:cNvPr id="12" name="Right Arrow 11"/>
+              <a:t>Reframe</a:t>
+            </a:r>
+          </a:p>
+        </p:txBody>
+      </p:sp>
+      <p:sp>
+        <p:nvSpPr>
+          <p:cNvPr id="15" name="TextBox 14"/>
+          <p:cNvSpPr txBox="1"/>
+          <p:nvPr/>
+        </p:nvSpPr>
+        <p:spPr>
+          <a:xfrm>
+            <a:off x="5458968" y="2935224"/>
+            <a:ext cx="1920240" cy="1783080"/>
+          </a:xfrm>
+          <a:prstGeom prst="rect">
+            <a:avLst/>
+          </a:prstGeom>
+          <a:noFill/>
+        </p:spPr>
+        <p:txBody>
+          <a:bodyPr wrap="none">
+            <a:spAutoFit/>
+          </a:bodyPr>
+          <a:lstStyle/>
+          <a:p>
+            <a:r>
+              <a:rPr sz="1300">
+                <a:solidFill>
+                  <a:srgbClr val="E8EAF0"/>
+                </a:solidFill>
+                <a:latin typeface="Calibri"/>
+              </a:rPr>
+              <a:t>Structured cognitive shift + microbias check</a:t>
+            </a:r>
+          </a:p>
+        </p:txBody>
+      </p:sp>
+      <p:sp>
+        <p:nvSpPr>
+          <p:cNvPr id="16" name="Rectangle 15"/>
           <p:cNvSpPr/>
           <p:nvPr/>
         </p:nvSpPr>
         <p:spPr>
           <a:xfrm>
-            <a:off x="5102352" y="3246120"/>
-            <a:ext cx="128016" cy="457200"/>
-          </a:xfrm>
-          <a:prstGeom prst="rightArrow">
+            <a:off x="7653528" y="2148840"/>
+            <a:ext cx="2240280" cy="2697480"/>
+          </a:xfrm>
+          <a:prstGeom prst="rect">
             <a:avLst/>
           </a:prstGeom>
           <a:solidFill>
-            <a:srgbClr val="9496A1"/>
+            <a:srgbClr val="1A1A1F"/>
           </a:solidFill>
-          <a:ln>
-            <a:noFill/>
+          <a:ln w="12700">
+            <a:solidFill>
+              <a:srgbClr val="3A3A42"/>
+            </a:solidFill>
           </a:ln>
         </p:spPr>
         <p:style>
@@ -7836,14 +7874,82 @@
       </p:sp>
       <p:sp>
         <p:nvSpPr>
-          <p:cNvPr id="13" name="Rectangle 12"/>
+          <p:cNvPr id="17" name="TextBox 16"/>
+          <p:cNvSpPr txBox="1"/>
+          <p:nvPr/>
+        </p:nvSpPr>
+        <p:spPr>
+          <a:xfrm>
+            <a:off x="7790688" y="2313432"/>
+            <a:ext cx="1920240" cy="457200"/>
+          </a:xfrm>
+          <a:prstGeom prst="rect">
+            <a:avLst/>
+          </a:prstGeom>
+          <a:noFill/>
+        </p:spPr>
+        <p:txBody>
+          <a:bodyPr wrap="none">
+            <a:spAutoFit/>
+          </a:bodyPr>
+          <a:lstStyle/>
+          <a:p>
+            <a:r>
+              <a:rPr sz="1500" b="1">
+                <a:solidFill>
+                  <a:srgbClr val="C8922A"/>
+                </a:solidFill>
+                <a:latin typeface="Calibri"/>
+              </a:rPr>
+              <a:t>Rate shift</a:t>
+            </a:r>
+          </a:p>
+        </p:txBody>
+      </p:sp>
+      <p:sp>
+        <p:nvSpPr>
+          <p:cNvPr id="18" name="TextBox 17"/>
+          <p:cNvSpPr txBox="1"/>
+          <p:nvPr/>
+        </p:nvSpPr>
+        <p:spPr>
+          <a:xfrm>
+            <a:off x="7790688" y="2935224"/>
+            <a:ext cx="1920240" cy="1783080"/>
+          </a:xfrm>
+          <a:prstGeom prst="rect">
+            <a:avLst/>
+          </a:prstGeom>
+          <a:noFill/>
+        </p:spPr>
+        <p:txBody>
+          <a:bodyPr wrap="none">
+            <a:spAutoFit/>
+          </a:bodyPr>
+          <a:lstStyle/>
+          <a:p>
+            <a:r>
+              <a:rPr sz="1300">
+                <a:solidFill>
+                  <a:srgbClr val="E8EAF0"/>
+                </a:solidFill>
+                <a:latin typeface="Calibri"/>
+              </a:rPr>
+              <a:t>Non-skippable post-session state rating</a:t>
+            </a:r>
+          </a:p>
+        </p:txBody>
+      </p:sp>
+      <p:sp>
+        <p:nvSpPr>
+          <p:cNvPr id="19" name="Rectangle 18"/>
           <p:cNvSpPr/>
           <p:nvPr/>
         </p:nvSpPr>
         <p:spPr>
           <a:xfrm>
-            <a:off x="5230368" y="2240280"/>
-            <a:ext cx="2176272" cy="2560320"/>
+            <a:off x="9985248" y="2148840"/>
+            <a:ext cx="2240280" cy="2697480"/>
           </a:xfrm>
           <a:prstGeom prst="rect">
             <a:avLst/>
@@ -7851,9 +7957,9 @@
           <a:solidFill>
             <a:srgbClr val="141418"/>
           </a:solidFill>
-          <a:ln w="11430">
+          <a:ln w="12700">
             <a:solidFill>
-              <a:srgbClr val="3D3E47"/>
+              <a:srgbClr val="3A3A42"/>
             </a:solidFill>
           </a:ln>
         </p:spPr>
@@ -7881,14 +7987,14 @@
       </p:sp>
       <p:sp>
         <p:nvSpPr>
-          <p:cNvPr id="14" name="TextBox 13"/>
+          <p:cNvPr id="20" name="TextBox 19"/>
           <p:cNvSpPr txBox="1"/>
           <p:nvPr/>
         </p:nvSpPr>
         <p:spPr>
           <a:xfrm>
-            <a:off x="5376672" y="2423160"/>
-            <a:ext cx="1874519" cy="502920"/>
+            <a:off x="10122408" y="2313432"/>
+            <a:ext cx="1920240" cy="457200"/>
           </a:xfrm>
           <a:prstGeom prst="rect">
             <a:avLst/>
@@ -7902,115 +8008,27 @@
           <a:lstStyle/>
           <a:p>
             <a:r>
-              <a:rPr sz="1400" b="1">
+              <a:rPr sz="1500" b="1">
                 <a:solidFill>
                   <a:srgbClr val="C8922A"/>
                 </a:solidFill>
                 <a:latin typeface="Calibri"/>
               </a:rPr>
-              <a:t>Reappraisal</a:t>
-            </a:r>
-          </a:p>
-        </p:txBody>
-      </p:sp>
-      <p:sp>
-        <p:nvSpPr>
-          <p:cNvPr id="15" name="Right Arrow 14"/>
-          <p:cNvSpPr/>
-          <p:nvPr/>
-        </p:nvSpPr>
-        <p:spPr>
-          <a:xfrm>
-            <a:off x="7388352" y="3246120"/>
-            <a:ext cx="128016" cy="457200"/>
-          </a:xfrm>
-          <a:prstGeom prst="rightArrow">
-            <a:avLst/>
-          </a:prstGeom>
-          <a:solidFill>
-            <a:srgbClr val="9496A1"/>
-          </a:solidFill>
-          <a:ln>
-            <a:noFill/>
-          </a:ln>
-        </p:spPr>
-        <p:style>
-          <a:lnRef idx="1">
-            <a:schemeClr val="accent1"/>
-          </a:lnRef>
-          <a:fillRef idx="3">
-            <a:schemeClr val="accent1"/>
-          </a:fillRef>
-          <a:effectRef idx="2">
-            <a:schemeClr val="accent1"/>
-          </a:effectRef>
-          <a:fontRef idx="minor">
-            <a:schemeClr val="lt1"/>
-          </a:fontRef>
-        </p:style>
-        <p:txBody>
-          <a:bodyPr rtlCol="0" anchor="ctr"/>
-          <a:lstStyle/>
-          <a:p>
-            <a:pPr algn="ctr"/>
-          </a:p>
-        </p:txBody>
-      </p:sp>
-      <p:sp>
-        <p:nvSpPr>
-          <p:cNvPr id="16" name="Rectangle 15"/>
-          <p:cNvSpPr/>
-          <p:nvPr/>
-        </p:nvSpPr>
-        <p:spPr>
-          <a:xfrm>
-            <a:off x="7516368" y="2240280"/>
-            <a:ext cx="2176272" cy="2560320"/>
-          </a:xfrm>
-          <a:prstGeom prst="rect">
-            <a:avLst/>
-          </a:prstGeom>
-          <a:solidFill>
-            <a:srgbClr val="1A1A1F"/>
-          </a:solidFill>
-          <a:ln w="11430">
-            <a:solidFill>
-              <a:srgbClr val="3D3E47"/>
-            </a:solidFill>
-          </a:ln>
-        </p:spPr>
-        <p:style>
-          <a:lnRef idx="1">
-            <a:schemeClr val="accent1"/>
-          </a:lnRef>
-          <a:fillRef idx="3">
-            <a:schemeClr val="accent1"/>
-          </a:fillRef>
-          <a:effectRef idx="2">
-            <a:schemeClr val="accent1"/>
-          </a:effectRef>
-          <a:fontRef idx="minor">
-            <a:schemeClr val="lt1"/>
-          </a:fontRef>
-        </p:style>
-        <p:txBody>
-          <a:bodyPr rtlCol="0" anchor="ctr"/>
-          <a:lstStyle/>
-          <a:p>
-            <a:pPr algn="ctr"/>
-          </a:p>
-        </p:txBody>
-      </p:sp>
-      <p:sp>
-        <p:nvSpPr>
-          <p:cNvPr id="17" name="TextBox 16"/>
+              <a:t>Close loop</a:t>
+            </a:r>
+          </a:p>
+        </p:txBody>
+      </p:sp>
+      <p:sp>
+        <p:nvSpPr>
+          <p:cNvPr id="21" name="TextBox 20"/>
           <p:cNvSpPr txBox="1"/>
           <p:nvPr/>
         </p:nvSpPr>
         <p:spPr>
           <a:xfrm>
-            <a:off x="7662672" y="2423160"/>
-            <a:ext cx="1874519" cy="502920"/>
+            <a:off x="10122408" y="2935224"/>
+            <a:ext cx="1920240" cy="1783080"/>
           </a:xfrm>
           <a:prstGeom prst="rect">
             <a:avLst/>
@@ -8024,115 +8042,27 @@
           <a:lstStyle/>
           <a:p>
             <a:r>
-              <a:rPr sz="1400" b="1">
-                <a:solidFill>
-                  <a:srgbClr val="C8922A"/>
+              <a:rPr sz="1300">
+                <a:solidFill>
+                  <a:srgbClr val="E8EAF0"/>
                 </a:solidFill>
                 <a:latin typeface="Calibri"/>
               </a:rPr>
-              <a:t>Transfer action</a:t>
-            </a:r>
-          </a:p>
-        </p:txBody>
-      </p:sp>
-      <p:sp>
-        <p:nvSpPr>
-          <p:cNvPr id="18" name="Right Arrow 17"/>
-          <p:cNvSpPr/>
-          <p:nvPr/>
-        </p:nvSpPr>
-        <p:spPr>
-          <a:xfrm>
-            <a:off x="9674352" y="3246120"/>
-            <a:ext cx="128016" cy="457200"/>
-          </a:xfrm>
-          <a:prstGeom prst="rightArrow">
-            <a:avLst/>
-          </a:prstGeom>
-          <a:solidFill>
-            <a:srgbClr val="9496A1"/>
-          </a:solidFill>
-          <a:ln>
-            <a:noFill/>
-          </a:ln>
-        </p:spPr>
-        <p:style>
-          <a:lnRef idx="1">
-            <a:schemeClr val="accent1"/>
-          </a:lnRef>
-          <a:fillRef idx="3">
-            <a:schemeClr val="accent1"/>
-          </a:fillRef>
-          <a:effectRef idx="2">
-            <a:schemeClr val="accent1"/>
-          </a:effectRef>
-          <a:fontRef idx="minor">
-            <a:schemeClr val="lt1"/>
-          </a:fontRef>
-        </p:style>
-        <p:txBody>
-          <a:bodyPr rtlCol="0" anchor="ctr"/>
-          <a:lstStyle/>
-          <a:p>
-            <a:pPr algn="ctr"/>
-          </a:p>
-        </p:txBody>
-      </p:sp>
-      <p:sp>
-        <p:nvSpPr>
-          <p:cNvPr id="19" name="Rectangle 18"/>
-          <p:cNvSpPr/>
-          <p:nvPr/>
-        </p:nvSpPr>
-        <p:spPr>
-          <a:xfrm>
-            <a:off x="9802368" y="2240280"/>
-            <a:ext cx="2176272" cy="2560320"/>
-          </a:xfrm>
-          <a:prstGeom prst="rect">
-            <a:avLst/>
-          </a:prstGeom>
-          <a:solidFill>
-            <a:srgbClr val="141418"/>
-          </a:solidFill>
-          <a:ln w="11430">
-            <a:solidFill>
-              <a:srgbClr val="3D3E47"/>
-            </a:solidFill>
-          </a:ln>
-        </p:spPr>
-        <p:style>
-          <a:lnRef idx="1">
-            <a:schemeClr val="accent1"/>
-          </a:lnRef>
-          <a:fillRef idx="3">
-            <a:schemeClr val="accent1"/>
-          </a:fillRef>
-          <a:effectRef idx="2">
-            <a:schemeClr val="accent1"/>
-          </a:effectRef>
-          <a:fontRef idx="minor">
-            <a:schemeClr val="lt1"/>
-          </a:fontRef>
-        </p:style>
-        <p:txBody>
-          <a:bodyPr rtlCol="0" anchor="ctr"/>
-          <a:lstStyle/>
-          <a:p>
-            <a:pPr algn="ctr"/>
-          </a:p>
-        </p:txBody>
-      </p:sp>
-      <p:sp>
-        <p:nvSpPr>
-          <p:cNvPr id="20" name="TextBox 19"/>
+              <a:t>EOD check-in feeds next-day context</a:t>
+            </a:r>
+          </a:p>
+        </p:txBody>
+      </p:sp>
+      <p:sp>
+        <p:nvSpPr>
+          <p:cNvPr id="22" name="TextBox 21"/>
           <p:cNvSpPr txBox="1"/>
           <p:nvPr/>
         </p:nvSpPr>
         <p:spPr>
           <a:xfrm>
-            <a:off x="9948672" y="2423160"/>
-            <a:ext cx="1874519" cy="502920"/>
+            <a:off x="685800" y="6428232"/>
+            <a:ext cx="10972800" cy="219456"/>
           </a:xfrm>
           <a:prstGeom prst="rect">
             <a:avLst/>
@@ -8146,142 +8076,13 @@
           <a:lstStyle/>
           <a:p>
             <a:r>
-              <a:rPr sz="1400" b="1">
-                <a:solidFill>
-                  <a:srgbClr val="C8922A"/>
-                </a:solidFill>
-                <a:latin typeface="Calibri"/>
-              </a:rPr>
-              <a:t>EOD consolidation</a:t>
-            </a:r>
-          </a:p>
-        </p:txBody>
-      </p:sp>
-      <p:sp>
-        <p:nvSpPr>
-          <p:cNvPr id="21" name="Rectangle 20"/>
-          <p:cNvSpPr/>
-          <p:nvPr/>
-        </p:nvSpPr>
-        <p:spPr>
-          <a:xfrm>
-            <a:off x="658368" y="4983480"/>
-            <a:ext cx="11027664" cy="1188720"/>
-          </a:xfrm>
-          <a:prstGeom prst="rect">
-            <a:avLst/>
-          </a:prstGeom>
-          <a:solidFill>
-            <a:srgbClr val="1A1A1F"/>
-          </a:solidFill>
-          <a:ln w="11430">
-            <a:solidFill>
-              <a:srgbClr val="3D3E47"/>
-            </a:solidFill>
-          </a:ln>
-        </p:spPr>
-        <p:style>
-          <a:lnRef idx="1">
-            <a:schemeClr val="accent1"/>
-          </a:lnRef>
-          <a:fillRef idx="3">
-            <a:schemeClr val="accent1"/>
-          </a:fillRef>
-          <a:effectRef idx="2">
-            <a:schemeClr val="accent1"/>
-          </a:effectRef>
-          <a:fontRef idx="minor">
-            <a:schemeClr val="lt1"/>
-          </a:fontRef>
-        </p:style>
-        <p:txBody>
-          <a:bodyPr rtlCol="0" anchor="ctr"/>
-          <a:lstStyle/>
-          <a:p>
-            <a:pPr algn="ctr"/>
-          </a:p>
-        </p:txBody>
-      </p:sp>
-      <p:sp>
-        <p:nvSpPr>
-          <p:cNvPr id="22" name="TextBox 21"/>
-          <p:cNvSpPr txBox="1"/>
-          <p:nvPr/>
-        </p:nvSpPr>
-        <p:spPr>
-          <a:xfrm>
-            <a:off x="822960" y="5148072"/>
-            <a:ext cx="10707624" cy="868680"/>
-          </a:xfrm>
-          <a:prstGeom prst="rect">
-            <a:avLst/>
-          </a:prstGeom>
-          <a:noFill/>
-        </p:spPr>
-        <p:txBody>
-          <a:bodyPr wrap="none">
-            <a:spAutoFit/>
-          </a:bodyPr>
-          <a:lstStyle/>
-          <a:p>
-            <a:r>
-              <a:rPr sz="1500" b="1">
-                <a:solidFill>
-                  <a:srgbClr val="C8922A"/>
-                </a:solidFill>
-                <a:latin typeface="Calibri"/>
-              </a:rPr>
-              <a:t>Execution intent</a:t>
-            </a:r>
-          </a:p>
-          <a:p>
-            <a:pPr>
-              <a:spcAft>
-                <a:spcPts val="600"/>
-              </a:spcAft>
-              <a:defRPr sz="1200">
-                <a:solidFill>
-                  <a:srgbClr val="E8EAF0"/>
-                </a:solidFill>
-                <a:latin typeface="Calibri"/>
-              </a:defRPr>
-            </a:pPr>
-            <a:r>
-              <a:t>Composure is trained as repeatable daily behavior, not occasional mood relief.</a:t>
-            </a:r>
-          </a:p>
-        </p:txBody>
-      </p:sp>
-      <p:sp>
-        <p:nvSpPr>
-          <p:cNvPr id="23" name="TextBox 22"/>
-          <p:cNvSpPr txBox="1"/>
-          <p:nvPr/>
-        </p:nvSpPr>
-        <p:spPr>
-          <a:xfrm>
-            <a:off x="685800" y="6428232"/>
-            <a:ext cx="10972800" cy="228600"/>
-          </a:xfrm>
-          <a:prstGeom prst="rect">
-            <a:avLst/>
-          </a:prstGeom>
-          <a:noFill/>
-        </p:spPr>
-        <p:txBody>
-          <a:bodyPr wrap="none">
-            <a:spAutoFit/>
-          </a:bodyPr>
-          <a:lstStyle/>
-          <a:p>
-            <a:r>
-              <a:rPr sz="800">
+              <a:rPr sz="850">
                 <a:solidFill>
                   <a:srgbClr val="9496A1"/>
                 </a:solidFill>
                 <a:latin typeface="Consolas"/>
               </a:rPr>
-              <a:t>Source: Stillform morning -&gt; intervention -&gt; post-rating -&gt; EOD architecture</a:t>
+              <a:t>Source: Stillform App.jsx: morning/EOD loops, post-rating, and mode routing</a:t>
             </a:r>
           </a:p>
         </p:txBody>
@@ -8364,7 +8165,7 @@
         <p:spPr>
           <a:xfrm>
             <a:off x="502920" y="100584"/>
-            <a:ext cx="7315200" cy="182880"/>
+            <a:ext cx="7772400" cy="182880"/>
           </a:xfrm>
           <a:prstGeom prst="rect">
             <a:avLst/>
@@ -8378,13 +8179,13 @@
           <a:lstStyle/>
           <a:p>
             <a:r>
-              <a:rPr sz="850">
+              <a:rPr sz="900">
                 <a:solidFill>
                   <a:srgbClr val="C8922A"/>
                 </a:solidFill>
                 <a:latin typeface="Consolas"/>
               </a:rPr>
-              <a:t>STILLFORM · APPLIED SCIENCE BRIEF</a:t>
+              <a:t>STILLFORM · EXECUTIVE APPLIED SCIENCE BRIEF</a:t>
             </a:r>
           </a:p>
         </p:txBody>
@@ -8397,8 +8198,8 @@
         </p:nvSpPr>
         <p:spPr>
           <a:xfrm>
-            <a:off x="10149840" y="100584"/>
-            <a:ext cx="1554480" cy="182880"/>
+            <a:off x="10241280" y="100584"/>
+            <a:ext cx="1463040" cy="182880"/>
           </a:xfrm>
           <a:prstGeom prst="rect">
             <a:avLst/>
@@ -8413,7 +8214,7 @@
           <a:p>
             <a:pPr algn="r"/>
             <a:r>
-              <a:rPr sz="850">
+              <a:rPr sz="900">
                 <a:solidFill>
                   <a:srgbClr val="9496A1"/>
                 </a:solidFill>
@@ -8433,7 +8234,7 @@
         <p:spPr>
           <a:xfrm>
             <a:off x="640080" y="640080"/>
-            <a:ext cx="10972800" cy="1005840"/>
+            <a:ext cx="10972800" cy="960120"/>
           </a:xfrm>
           <a:prstGeom prst="rect">
             <a:avLst/>
@@ -8447,7 +8248,7 @@
           <a:lstStyle/>
           <a:p>
             <a:r>
-              <a:rPr sz="3600" b="1">
+              <a:rPr sz="3800" b="1">
                 <a:solidFill>
                   <a:srgbClr val="E8EAF0"/>
                 </a:solidFill>
@@ -8466,8 +8267,8 @@
         </p:nvSpPr>
         <p:spPr>
           <a:xfrm>
-            <a:off x="658368" y="1417320"/>
-            <a:ext cx="10972800" cy="365760"/>
+            <a:off x="676656" y="1417320"/>
+            <a:ext cx="10881360" cy="411480"/>
           </a:xfrm>
           <a:prstGeom prst="rect">
             <a:avLst/>
@@ -8481,7 +8282,7 @@
           <a:lstStyle/>
           <a:p>
             <a:r>
-              <a:rPr sz="1400">
+              <a:rPr sz="1500">
                 <a:solidFill>
                   <a:srgbClr val="9496A1"/>
                 </a:solidFill>
@@ -8501,7 +8302,7 @@
         <p:spPr>
           <a:xfrm>
             <a:off x="685800" y="1874519"/>
-            <a:ext cx="7223760" cy="4297680"/>
+            <a:ext cx="7406640" cy="4389120"/>
           </a:xfrm>
           <a:prstGeom prst="rect">
             <a:avLst/>
@@ -8509,9 +8310,9 @@
           <a:solidFill>
             <a:srgbClr val="141418"/>
           </a:solidFill>
-          <a:ln w="11430">
+          <a:ln w="12700">
             <a:solidFill>
-              <a:srgbClr val="3D3E47"/>
+              <a:srgbClr val="3A3A42"/>
             </a:solidFill>
           </a:ln>
         </p:spPr>
@@ -8547,7 +8348,7 @@
         </p:nvGraphicFramePr>
         <p:xfrm>
           <a:off x="960120" y="2240280"/>
-          <a:ext cx="6720840" cy="3611880"/>
+          <a:ext cx="6903720" cy="3611880"/>
         </p:xfrm>
         <a:graphic>
           <a:graphicData uri="http://schemas.openxmlformats.org/drawingml/2006/chart">
@@ -8563,8 +8364,8 @@
         </p:nvSpPr>
         <p:spPr>
           <a:xfrm>
-            <a:off x="8183879" y="1874519"/>
-            <a:ext cx="3520440" cy="4297680"/>
+            <a:off x="8321040" y="1874519"/>
+            <a:ext cx="3383280" cy="4389120"/>
           </a:xfrm>
           <a:prstGeom prst="rect">
             <a:avLst/>
@@ -8572,9 +8373,9 @@
           <a:solidFill>
             <a:srgbClr val="1A1A1F"/>
           </a:solidFill>
-          <a:ln w="11430">
+          <a:ln w="12700">
             <a:solidFill>
-              <a:srgbClr val="3D3E47"/>
+              <a:srgbClr val="3A3A42"/>
             </a:solidFill>
           </a:ln>
         </p:spPr>
@@ -8608,8 +8409,8 @@
         </p:nvSpPr>
         <p:spPr>
           <a:xfrm>
-            <a:off x="8348471" y="2039111"/>
-            <a:ext cx="3200400" cy="3977640"/>
+            <a:off x="8595360" y="2240280"/>
+            <a:ext cx="2926080" cy="3566160"/>
           </a:xfrm>
           <a:prstGeom prst="rect">
             <a:avLst/>
@@ -8617,27 +8418,16 @@
           <a:noFill/>
         </p:spPr>
         <p:txBody>
-          <a:bodyPr wrap="none">
+          <a:bodyPr wrap="square">
             <a:spAutoFit/>
           </a:bodyPr>
           <a:lstStyle/>
           <a:p>
-            <a:r>
-              <a:rPr sz="1500" b="1">
-                <a:solidFill>
-                  <a:srgbClr val="C8922A"/>
-                </a:solidFill>
-                <a:latin typeface="Calibri"/>
-              </a:rPr>
-              <a:t>How this works in-app</a:t>
-            </a:r>
-          </a:p>
-          <a:p>
             <a:pPr>
               <a:spcAft>
-                <a:spcPts val="600"/>
+                <a:spcPts val="900"/>
               </a:spcAft>
-              <a:defRPr sz="1200">
+              <a:defRPr sz="1500" b="1">
                 <a:solidFill>
                   <a:srgbClr val="E8EAF0"/>
                 </a:solidFill>
@@ -8645,15 +8435,15 @@
               </a:defRPr>
             </a:pPr>
             <a:r>
-              <a:t>Reliability score = (Loop x 0.65) + (Recovery x 0.35).</a:t>
+              <a:t>How Stillform proves effect:</a:t>
             </a:r>
           </a:p>
           <a:p>
             <a:pPr>
               <a:spcAft>
-                <a:spcPts val="600"/>
+                <a:spcPts val="700"/>
               </a:spcAft>
-              <a:defRPr sz="1200">
+              <a:defRPr sz="1250" b="0">
                 <a:solidFill>
                   <a:srgbClr val="E8EAF0"/>
                 </a:solidFill>
@@ -8661,15 +8451,15 @@
               </a:defRPr>
             </a:pPr>
             <a:r>
-              <a:t>14-day window for active operating signal.</a:t>
+              <a:t>Reliability score = (loop completion x 0.65) + (nudge recovery x 0.35).</a:t>
             </a:r>
           </a:p>
           <a:p>
             <a:pPr>
               <a:spcAft>
-                <a:spcPts val="600"/>
+                <a:spcPts val="700"/>
               </a:spcAft>
-              <a:defRPr sz="1200">
+              <a:defRPr sz="1250" b="0">
                 <a:solidFill>
                   <a:srgbClr val="E8EAF0"/>
                 </a:solidFill>
@@ -8677,7 +8467,23 @@
               </a:defRPr>
             </a:pPr>
             <a:r>
-              <a:t>12-week horizon for composure telemetry.</a:t>
+              <a:t>Decision window: rolling 14 days.</a:t>
+            </a:r>
+          </a:p>
+          <a:p>
+            <a:pPr>
+              <a:spcAft>
+                <a:spcPts val="700"/>
+              </a:spcAft>
+              <a:defRPr sz="1250" b="0">
+                <a:solidFill>
+                  <a:srgbClr val="E8EAF0"/>
+                </a:solidFill>
+                <a:latin typeface="Calibri"/>
+              </a:defRPr>
+            </a:pPr>
+            <a:r>
+              <a:t>Telemetry horizon: 12 weeks.</a:t>
             </a:r>
           </a:p>
         </p:txBody>
@@ -8691,7 +8497,7 @@
         <p:spPr>
           <a:xfrm>
             <a:off x="685800" y="6428232"/>
-            <a:ext cx="10972800" cy="228600"/>
+            <a:ext cx="10972800" cy="219456"/>
           </a:xfrm>
           <a:prstGeom prst="rect">
             <a:avLst/>
@@ -8705,13 +8511,13 @@
           <a:lstStyle/>
           <a:p>
             <a:r>
-              <a:rPr sz="800">
+              <a:rPr sz="850">
                 <a:solidFill>
                   <a:srgbClr val="9496A1"/>
                 </a:solidFill>
                 <a:latin typeface="Consolas"/>
               </a:rPr>
-              <a:t>Source: Stillform App.jsx reliabilityScore + loop/nudge telemetry implementation</a:t>
+              <a:t>Source: Stillform App.jsx reliabilityScore and telemetry blocks</a:t>
             </a:r>
           </a:p>
         </p:txBody>
@@ -8794,7 +8600,7 @@
         <p:spPr>
           <a:xfrm>
             <a:off x="502920" y="100584"/>
-            <a:ext cx="7315200" cy="182880"/>
+            <a:ext cx="7772400" cy="182880"/>
           </a:xfrm>
           <a:prstGeom prst="rect">
             <a:avLst/>
@@ -8808,13 +8614,13 @@
           <a:lstStyle/>
           <a:p>
             <a:r>
-              <a:rPr sz="850">
+              <a:rPr sz="900">
                 <a:solidFill>
                   <a:srgbClr val="C8922A"/>
                 </a:solidFill>
                 <a:latin typeface="Consolas"/>
               </a:rPr>
-              <a:t>STILLFORM · APPLIED SCIENCE BRIEF</a:t>
+              <a:t>STILLFORM · EXECUTIVE APPLIED SCIENCE BRIEF</a:t>
             </a:r>
           </a:p>
         </p:txBody>
@@ -8827,8 +8633,8 @@
         </p:nvSpPr>
         <p:spPr>
           <a:xfrm>
-            <a:off x="10149840" y="100584"/>
-            <a:ext cx="1554480" cy="182880"/>
+            <a:off x="10241280" y="100584"/>
+            <a:ext cx="1463040" cy="182880"/>
           </a:xfrm>
           <a:prstGeom prst="rect">
             <a:avLst/>
@@ -8843,7 +8649,7 @@
           <a:p>
             <a:pPr algn="r"/>
             <a:r>
-              <a:rPr sz="850">
+              <a:rPr sz="900">
                 <a:solidFill>
                   <a:srgbClr val="9496A1"/>
                 </a:solidFill>
@@ -8863,7 +8669,7 @@
         <p:spPr>
           <a:xfrm>
             <a:off x="640080" y="640080"/>
-            <a:ext cx="10972800" cy="1005840"/>
+            <a:ext cx="10972800" cy="960120"/>
           </a:xfrm>
           <a:prstGeom prst="rect">
             <a:avLst/>
@@ -8877,7 +8683,7 @@
           <a:lstStyle/>
           <a:p>
             <a:r>
-              <a:rPr sz="3600" b="1">
+              <a:rPr sz="3800" b="1">
                 <a:solidFill>
                   <a:srgbClr val="E8EAF0"/>
                 </a:solidFill>
@@ -8896,8 +8702,8 @@
         </p:nvSpPr>
         <p:spPr>
           <a:xfrm>
-            <a:off x="658368" y="1417320"/>
-            <a:ext cx="10972800" cy="365760"/>
+            <a:off x="676656" y="1417320"/>
+            <a:ext cx="10881360" cy="411480"/>
           </a:xfrm>
           <a:prstGeom prst="rect">
             <a:avLst/>
@@ -8911,7 +8717,7 @@
           <a:lstStyle/>
           <a:p>
             <a:r>
-              <a:rPr sz="1400">
+              <a:rPr sz="1500">
                 <a:solidFill>
                   <a:srgbClr val="9496A1"/>
                 </a:solidFill>
@@ -8930,8 +8736,8 @@
         </p:nvSpPr>
         <p:spPr>
           <a:xfrm>
-            <a:off x="804672" y="2011680"/>
-            <a:ext cx="10607040" cy="3794760"/>
+            <a:off x="822960" y="2011680"/>
+            <a:ext cx="10561320" cy="3886200"/>
           </a:xfrm>
           <a:prstGeom prst="rect">
             <a:avLst/>
@@ -8939,9 +8745,9 @@
           <a:solidFill>
             <a:srgbClr val="141418"/>
           </a:solidFill>
-          <a:ln w="11430">
+          <a:ln w="12700">
             <a:solidFill>
-              <a:srgbClr val="3D3E47"/>
+              <a:srgbClr val="3A3A42"/>
             </a:solidFill>
           </a:ln>
         </p:spPr>
@@ -8975,8 +8781,8 @@
         </p:nvSpPr>
         <p:spPr>
           <a:xfrm>
-            <a:off x="1097280" y="2423160"/>
-            <a:ext cx="10058400" cy="3063240"/>
+            <a:off x="1143000" y="2423160"/>
+            <a:ext cx="9966960" cy="3200400"/>
           </a:xfrm>
           <a:prstGeom prst="rect">
             <a:avLst/>
@@ -8984,16 +8790,16 @@
           <a:noFill/>
         </p:spPr>
         <p:txBody>
-          <a:bodyPr wrap="none">
+          <a:bodyPr wrap="square">
             <a:spAutoFit/>
           </a:bodyPr>
           <a:lstStyle/>
           <a:p>
             <a:pPr>
               <a:spcAft>
-                <a:spcPts val="800"/>
+                <a:spcPts val="900"/>
               </a:spcAft>
-              <a:defRPr sz="2500" b="1">
+              <a:defRPr sz="2900" b="1">
                 <a:solidFill>
                   <a:srgbClr val="E8EAF0"/>
                 </a:solidFill>
@@ -9001,15 +8807,15 @@
               </a:defRPr>
             </a:pPr>
             <a:r>
-              <a:t>Stillform is not psychiatric treatment software.</a:t>
+              <a:t>Stillform is a composure system for everyone.</a:t>
             </a:r>
           </a:p>
           <a:p>
             <a:pPr>
               <a:spcAft>
-                <a:spcPts val="800"/>
+                <a:spcPts val="700"/>
               </a:spcAft>
-              <a:defRPr sz="2000" b="1">
+              <a:defRPr sz="2000" b="0">
                 <a:solidFill>
                   <a:srgbClr val="E8EAF0"/>
                 </a:solidFill>
@@ -9017,15 +8823,15 @@
               </a:defRPr>
             </a:pPr>
             <a:r>
-              <a:t>It is a composure and self-awareness operating system.</a:t>
+              <a:t>Its value is not inspirational content; it is measurable state-to-action transfer under pressure.</a:t>
             </a:r>
           </a:p>
           <a:p>
             <a:pPr>
               <a:spcAft>
-                <a:spcPts val="800"/>
+                <a:spcPts val="700"/>
               </a:spcAft>
-              <a:defRPr sz="2000" b="1">
+              <a:defRPr sz="2000" b="0">
                 <a:solidFill>
                   <a:srgbClr val="E8EAF0"/>
                 </a:solidFill>
@@ -9033,7 +8839,23 @@
               </a:defRPr>
             </a:pPr>
             <a:r>
-              <a:t>Mechanism quality is judged by behavior shift, reliability, and transfer under pressure.</a:t>
+              <a:t>The deck's visuals matter only because each one ties directly to a mechanism and a telemetry proof signal.</a:t>
+            </a:r>
+          </a:p>
+          <a:p>
+            <a:pPr>
+              <a:spcAft>
+                <a:spcPts val="700"/>
+              </a:spcAft>
+              <a:defRPr sz="2000" b="0">
+                <a:solidFill>
+                  <a:srgbClr val="E8EAF0"/>
+                </a:solidFill>
+                <a:latin typeface="Calibri"/>
+              </a:defRPr>
+            </a:pPr>
+            <a:r>
+              <a:t>The release standard is simple: if the mechanism is not measurable, it is not ready to claim.</a:t>
             </a:r>
           </a:p>
         </p:txBody>
@@ -9047,7 +8869,7 @@
         <p:spPr>
           <a:xfrm>
             <a:off x="685800" y="6428232"/>
-            <a:ext cx="10972800" cy="228600"/>
+            <a:ext cx="10972800" cy="219456"/>
           </a:xfrm>
           <a:prstGeom prst="rect">
             <a:avLst/>
@@ -9061,13 +8883,13 @@
           <a:lstStyle/>
           <a:p>
             <a:r>
-              <a:rPr sz="800">
+              <a:rPr sz="850">
                 <a:solidFill>
                   <a:srgbClr val="9496A1"/>
                 </a:solidFill>
                 <a:latin typeface="Consolas"/>
               </a:rPr>
-              <a:t>Source: Stillform applied science model: metacognition, EQ, composure, impulsivity, microbias</a:t>
+              <a:t>Source: Stillform applied science model and release integrity principles</a:t>
             </a:r>
           </a:p>
         </p:txBody>
